--- a/slides/1_python_slides/8_advanced_functions.pptx
+++ b/slides/1_python_slides/8_advanced_functions.pptx
@@ -419,7 +419,7 @@
             <a:pPr indent="0" algn="r">
               <a:buNone/>
             </a:pPr>
-            <a:fld id="{57F43B65-CFEB-4EB8-BBD3-9CD8B8A093D9}" type="slidenum">
+            <a:fld id="{7C005205-BC3E-48D2-9BDC-9EEF17FA1020}" type="slidenum">
               <a:rPr lang="en-US" sz="1400" b="0" u="none" strike="noStrike">
                 <a:solidFill>
                   <a:srgbClr val="000000"/>
@@ -477,7 +477,7 @@
         <p:spPr>
           <a:xfrm>
             <a:off x="685800" y="1143000"/>
-            <a:ext cx="5485680" cy="3085560"/>
+            <a:ext cx="5485320" cy="3085200"/>
           </a:xfrm>
           <a:prstGeom prst="rect">
             <a:avLst/>
@@ -500,7 +500,7 @@
         <p:spPr>
           <a:xfrm>
             <a:off x="685800" y="4400640"/>
-            <a:ext cx="5485680" cy="3599640"/>
+            <a:ext cx="5485320" cy="3599280"/>
           </a:xfrm>
           <a:prstGeom prst="rect">
             <a:avLst/>
@@ -542,7 +542,7 @@
         <p:spPr>
           <a:xfrm>
             <a:off x="3884760" y="8685360"/>
-            <a:ext cx="2971080" cy="457920"/>
+            <a:ext cx="2970720" cy="457560"/>
           </a:xfrm>
           <a:prstGeom prst="rect">
             <a:avLst/>
@@ -586,7 +586,7 @@
                 <a:tab pos="0" algn="l"/>
               </a:tabLst>
             </a:pPr>
-            <a:fld id="{EA418206-2015-47E8-86A9-7286C592BB74}" type="slidenum">
+            <a:fld id="{776D83C8-62F4-47A4-8A69-FDA6CA2737F2}" type="slidenum">
               <a:rPr lang="en-US" sz="1200" b="0" u="none" strike="noStrike">
                 <a:solidFill>
                   <a:schemeClr val="dk1"/>
@@ -596,7 +596,7 @@
                 <a:latin typeface="+mn-lt"/>
                 <a:ea typeface="+mn-ea"/>
               </a:rPr>
-              <a:t>&lt;number&gt;</a:t>
+              <a:t>1</a:t>
             </a:fld>
             <a:endParaRPr lang="en-US" sz="1200" b="0" u="none" strike="noStrike">
               <a:solidFill>
@@ -644,7 +644,7 @@
         <p:spPr>
           <a:xfrm>
             <a:off x="685800" y="1143000"/>
-            <a:ext cx="5485680" cy="3085560"/>
+            <a:ext cx="5485320" cy="3085200"/>
           </a:xfrm>
           <a:prstGeom prst="rect">
             <a:avLst/>
@@ -667,7 +667,7 @@
         <p:spPr>
           <a:xfrm>
             <a:off x="685800" y="4400640"/>
-            <a:ext cx="5485680" cy="3599640"/>
+            <a:ext cx="5485320" cy="3599280"/>
           </a:xfrm>
           <a:prstGeom prst="rect">
             <a:avLst/>
@@ -709,7 +709,7 @@
         <p:spPr>
           <a:xfrm>
             <a:off x="3884760" y="8685360"/>
-            <a:ext cx="2971080" cy="457920"/>
+            <a:ext cx="2970720" cy="457560"/>
           </a:xfrm>
           <a:prstGeom prst="rect">
             <a:avLst/>
@@ -753,7 +753,7 @@
                 <a:tab pos="0" algn="l"/>
               </a:tabLst>
             </a:pPr>
-            <a:fld id="{8AB35263-7FBB-4E4D-A8E9-54711E5CA076}" type="slidenum">
+            <a:fld id="{033B5979-7AEA-4CBA-AF1B-D7A93A3EA97F}" type="slidenum">
               <a:rPr lang="en-US" sz="1200" b="0" u="none" strike="noStrike">
                 <a:solidFill>
                   <a:schemeClr val="dk1"/>
@@ -763,7 +763,7 @@
                 <a:latin typeface="+mn-lt"/>
                 <a:ea typeface="+mn-ea"/>
               </a:rPr>
-              <a:t>&lt;number&gt;</a:t>
+              <a:t>1</a:t>
             </a:fld>
             <a:endParaRPr lang="en-US" sz="1200" b="0" u="none" strike="noStrike">
               <a:solidFill>
@@ -811,7 +811,7 @@
         <p:spPr>
           <a:xfrm>
             <a:off x="685800" y="1143000"/>
-            <a:ext cx="5485680" cy="3085560"/>
+            <a:ext cx="5485320" cy="3085200"/>
           </a:xfrm>
           <a:prstGeom prst="rect">
             <a:avLst/>
@@ -834,7 +834,7 @@
         <p:spPr>
           <a:xfrm>
             <a:off x="685800" y="4400640"/>
-            <a:ext cx="5485680" cy="3599640"/>
+            <a:ext cx="5485320" cy="3599280"/>
           </a:xfrm>
           <a:prstGeom prst="rect">
             <a:avLst/>
@@ -876,7 +876,7 @@
         <p:spPr>
           <a:xfrm>
             <a:off x="3884760" y="8685360"/>
-            <a:ext cx="2971080" cy="457920"/>
+            <a:ext cx="2970720" cy="457560"/>
           </a:xfrm>
           <a:prstGeom prst="rect">
             <a:avLst/>
@@ -920,7 +920,7 @@
                 <a:tab pos="0" algn="l"/>
               </a:tabLst>
             </a:pPr>
-            <a:fld id="{D8248429-F9AE-45F4-8D48-F5649D27D32B}" type="slidenum">
+            <a:fld id="{BD46C181-A9AE-41F0-9BE1-C1359AA08873}" type="slidenum">
               <a:rPr lang="en-US" sz="1200" b="0" u="none" strike="noStrike">
                 <a:solidFill>
                   <a:schemeClr val="dk1"/>
@@ -930,7 +930,7 @@
                 <a:latin typeface="+mn-lt"/>
                 <a:ea typeface="+mn-ea"/>
               </a:rPr>
-              <a:t>&lt;number&gt;</a:t>
+              <a:t>1</a:t>
             </a:fld>
             <a:endParaRPr lang="en-US" sz="1200" b="0" u="none" strike="noStrike">
               <a:solidFill>
@@ -978,7 +978,7 @@
         <p:spPr>
           <a:xfrm>
             <a:off x="685800" y="1143000"/>
-            <a:ext cx="5486040" cy="3085920"/>
+            <a:ext cx="5485680" cy="3085560"/>
           </a:xfrm>
           <a:prstGeom prst="rect">
             <a:avLst/>
@@ -1001,7 +1001,7 @@
         <p:spPr>
           <a:xfrm>
             <a:off x="685800" y="4400640"/>
-            <a:ext cx="5485680" cy="3599640"/>
+            <a:ext cx="5485320" cy="3599280"/>
           </a:xfrm>
           <a:prstGeom prst="rect">
             <a:avLst/>
@@ -1043,7 +1043,7 @@
         <p:spPr>
           <a:xfrm>
             <a:off x="3884760" y="8685360"/>
-            <a:ext cx="2971080" cy="457920"/>
+            <a:ext cx="2970720" cy="457560"/>
           </a:xfrm>
           <a:prstGeom prst="rect">
             <a:avLst/>
@@ -1087,7 +1087,7 @@
                 <a:tab pos="0" algn="l"/>
               </a:tabLst>
             </a:pPr>
-            <a:fld id="{C5DF6B1B-513B-47DE-A337-20D05B31B2FB}" type="slidenum">
+            <a:fld id="{E4939C02-5497-4116-81A6-35E03C232A4A}" type="slidenum">
               <a:rPr lang="en-US" sz="1200" b="0" u="none" strike="noStrike">
                 <a:solidFill>
                   <a:schemeClr val="dk1"/>
@@ -1097,7 +1097,7 @@
                 <a:latin typeface="+mn-lt"/>
                 <a:ea typeface="+mn-ea"/>
               </a:rPr>
-              <a:t>&lt;number&gt;</a:t>
+              <a:t>1</a:t>
             </a:fld>
             <a:endParaRPr lang="en-US" sz="1200" b="0" u="none" strike="noStrike">
               <a:solidFill>
@@ -1145,7 +1145,7 @@
         <p:spPr>
           <a:xfrm>
             <a:off x="685800" y="1143000"/>
-            <a:ext cx="5486040" cy="3085920"/>
+            <a:ext cx="5485680" cy="3085560"/>
           </a:xfrm>
           <a:prstGeom prst="rect">
             <a:avLst/>
@@ -1168,7 +1168,7 @@
         <p:spPr>
           <a:xfrm>
             <a:off x="685800" y="4400640"/>
-            <a:ext cx="5485680" cy="3599640"/>
+            <a:ext cx="5485320" cy="3599280"/>
           </a:xfrm>
           <a:prstGeom prst="rect">
             <a:avLst/>
@@ -1210,7 +1210,7 @@
         <p:spPr>
           <a:xfrm>
             <a:off x="3884760" y="8685360"/>
-            <a:ext cx="2971080" cy="457920"/>
+            <a:ext cx="2970720" cy="457560"/>
           </a:xfrm>
           <a:prstGeom prst="rect">
             <a:avLst/>
@@ -1254,7 +1254,7 @@
                 <a:tab pos="0" algn="l"/>
               </a:tabLst>
             </a:pPr>
-            <a:fld id="{F862ECC0-D093-4EA8-9935-83CD7122BDBB}" type="slidenum">
+            <a:fld id="{5D81195E-BD9D-4242-81C7-3352A57523AE}" type="slidenum">
               <a:rPr lang="en-US" sz="1200" b="0" u="none" strike="noStrike">
                 <a:solidFill>
                   <a:schemeClr val="dk1"/>
@@ -1264,7 +1264,7 @@
                 <a:latin typeface="+mn-lt"/>
                 <a:ea typeface="+mn-ea"/>
               </a:rPr>
-              <a:t>&lt;number&gt;</a:t>
+              <a:t>1</a:t>
             </a:fld>
             <a:endParaRPr lang="en-US" sz="1200" b="0" u="none" strike="noStrike">
               <a:solidFill>
@@ -1312,7 +1312,7 @@
         <p:spPr>
           <a:xfrm>
             <a:off x="685800" y="1143000"/>
-            <a:ext cx="5486040" cy="3085920"/>
+            <a:ext cx="5485680" cy="3085560"/>
           </a:xfrm>
           <a:prstGeom prst="rect">
             <a:avLst/>
@@ -1335,7 +1335,7 @@
         <p:spPr>
           <a:xfrm>
             <a:off x="685800" y="4400640"/>
-            <a:ext cx="5485680" cy="3599640"/>
+            <a:ext cx="5485320" cy="3599280"/>
           </a:xfrm>
           <a:prstGeom prst="rect">
             <a:avLst/>
@@ -1377,7 +1377,7 @@
         <p:spPr>
           <a:xfrm>
             <a:off x="3884760" y="8685360"/>
-            <a:ext cx="2971080" cy="457920"/>
+            <a:ext cx="2970720" cy="457560"/>
           </a:xfrm>
           <a:prstGeom prst="rect">
             <a:avLst/>
@@ -1421,7 +1421,7 @@
                 <a:tab pos="0" algn="l"/>
               </a:tabLst>
             </a:pPr>
-            <a:fld id="{7D11A14F-1E32-4D62-9B29-D33FF89DDEB7}" type="slidenum">
+            <a:fld id="{71AF71E3-DC71-4490-B88D-C8ED716AA82B}" type="slidenum">
               <a:rPr lang="en-US" sz="1200" b="0" u="none" strike="noStrike">
                 <a:solidFill>
                   <a:schemeClr val="dk1"/>
@@ -1431,7 +1431,7 @@
                 <a:latin typeface="+mn-lt"/>
                 <a:ea typeface="+mn-ea"/>
               </a:rPr>
-              <a:t>&lt;number&gt;</a:t>
+              <a:t>1</a:t>
             </a:fld>
             <a:endParaRPr lang="en-US" sz="1200" b="0" u="none" strike="noStrike">
               <a:solidFill>
@@ -1479,7 +1479,7 @@
         <p:spPr>
           <a:xfrm>
             <a:off x="685800" y="1143000"/>
-            <a:ext cx="5486040" cy="3085920"/>
+            <a:ext cx="5485680" cy="3085560"/>
           </a:xfrm>
           <a:prstGeom prst="rect">
             <a:avLst/>
@@ -1502,7 +1502,7 @@
         <p:spPr>
           <a:xfrm>
             <a:off x="685800" y="4400640"/>
-            <a:ext cx="5485680" cy="3599640"/>
+            <a:ext cx="5485320" cy="3599280"/>
           </a:xfrm>
           <a:prstGeom prst="rect">
             <a:avLst/>
@@ -1544,7 +1544,7 @@
         <p:spPr>
           <a:xfrm>
             <a:off x="3884760" y="8685360"/>
-            <a:ext cx="2971080" cy="457920"/>
+            <a:ext cx="2970720" cy="457560"/>
           </a:xfrm>
           <a:prstGeom prst="rect">
             <a:avLst/>
@@ -1588,7 +1588,7 @@
                 <a:tab pos="0" algn="l"/>
               </a:tabLst>
             </a:pPr>
-            <a:fld id="{2D4E5989-6FB7-41EA-81C0-47D136469ACE}" type="slidenum">
+            <a:fld id="{D35950A9-9246-467A-B356-52166CB954FE}" type="slidenum">
               <a:rPr lang="en-US" sz="1200" b="0" u="none" strike="noStrike">
                 <a:solidFill>
                   <a:schemeClr val="dk1"/>
@@ -1598,7 +1598,7 @@
                 <a:latin typeface="+mn-lt"/>
                 <a:ea typeface="+mn-ea"/>
               </a:rPr>
-              <a:t>&lt;number&gt;</a:t>
+              <a:t>1</a:t>
             </a:fld>
             <a:endParaRPr lang="en-US" sz="1200" b="0" u="none" strike="noStrike">
               <a:solidFill>
@@ -1646,7 +1646,7 @@
         <p:spPr>
           <a:xfrm>
             <a:off x="685800" y="1143000"/>
-            <a:ext cx="5486040" cy="3085920"/>
+            <a:ext cx="5485680" cy="3085560"/>
           </a:xfrm>
           <a:prstGeom prst="rect">
             <a:avLst/>
@@ -1669,7 +1669,7 @@
         <p:spPr>
           <a:xfrm>
             <a:off x="685800" y="4400640"/>
-            <a:ext cx="5485680" cy="3599640"/>
+            <a:ext cx="5485320" cy="3599280"/>
           </a:xfrm>
           <a:prstGeom prst="rect">
             <a:avLst/>
@@ -1711,7 +1711,7 @@
         <p:spPr>
           <a:xfrm>
             <a:off x="3884760" y="8685360"/>
-            <a:ext cx="2971080" cy="457920"/>
+            <a:ext cx="2970720" cy="457560"/>
           </a:xfrm>
           <a:prstGeom prst="rect">
             <a:avLst/>
@@ -1755,7 +1755,7 @@
                 <a:tab pos="0" algn="l"/>
               </a:tabLst>
             </a:pPr>
-            <a:fld id="{2AA86644-7F93-4949-8A48-1770A3C76B7B}" type="slidenum">
+            <a:fld id="{AB5FA0B6-B93A-42F2-B8BB-4AC2C486F9BE}" type="slidenum">
               <a:rPr lang="en-US" sz="1200" b="0" u="none" strike="noStrike">
                 <a:solidFill>
                   <a:schemeClr val="dk1"/>
@@ -1765,7 +1765,7 @@
                 <a:latin typeface="+mn-lt"/>
                 <a:ea typeface="+mn-ea"/>
               </a:rPr>
-              <a:t>&lt;number&gt;</a:t>
+              <a:t>1</a:t>
             </a:fld>
             <a:endParaRPr lang="en-US" sz="1200" b="0" u="none" strike="noStrike">
               <a:solidFill>
@@ -1813,7 +1813,7 @@
         <p:spPr>
           <a:xfrm>
             <a:off x="685800" y="1143000"/>
-            <a:ext cx="5485680" cy="3085560"/>
+            <a:ext cx="5485320" cy="3085200"/>
           </a:xfrm>
           <a:prstGeom prst="rect">
             <a:avLst/>
@@ -1836,7 +1836,7 @@
         <p:spPr>
           <a:xfrm>
             <a:off x="685800" y="4400640"/>
-            <a:ext cx="5485680" cy="3599640"/>
+            <a:ext cx="5485320" cy="3599280"/>
           </a:xfrm>
           <a:prstGeom prst="rect">
             <a:avLst/>
@@ -1878,7 +1878,7 @@
         <p:spPr>
           <a:xfrm>
             <a:off x="3884760" y="8685360"/>
-            <a:ext cx="2971080" cy="457920"/>
+            <a:ext cx="2970720" cy="457560"/>
           </a:xfrm>
           <a:prstGeom prst="rect">
             <a:avLst/>
@@ -1922,7 +1922,7 @@
                 <a:tab pos="0" algn="l"/>
               </a:tabLst>
             </a:pPr>
-            <a:fld id="{61CF6721-247E-4D64-AD6C-3F5FC7E5A8C4}" type="slidenum">
+            <a:fld id="{FD7C1EA5-425B-4BA7-B7C7-A50FC4D8A9B7}" type="slidenum">
               <a:rPr lang="en-US" sz="1200" b="0" u="none" strike="noStrike">
                 <a:solidFill>
                   <a:schemeClr val="dk1"/>
@@ -1932,7 +1932,7 @@
                 <a:latin typeface="+mn-lt"/>
                 <a:ea typeface="+mn-ea"/>
               </a:rPr>
-              <a:t>&lt;number&gt;</a:t>
+              <a:t>1</a:t>
             </a:fld>
             <a:endParaRPr lang="en-US" sz="1200" b="0" u="none" strike="noStrike">
               <a:solidFill>
@@ -1980,7 +1980,7 @@
         <p:spPr>
           <a:xfrm>
             <a:off x="685800" y="1143000"/>
-            <a:ext cx="5485680" cy="3085560"/>
+            <a:ext cx="5485320" cy="3085200"/>
           </a:xfrm>
           <a:prstGeom prst="rect">
             <a:avLst/>
@@ -2003,7 +2003,7 @@
         <p:spPr>
           <a:xfrm>
             <a:off x="685800" y="4400640"/>
-            <a:ext cx="5485680" cy="3599640"/>
+            <a:ext cx="5485320" cy="3599280"/>
           </a:xfrm>
           <a:prstGeom prst="rect">
             <a:avLst/>
@@ -2045,7 +2045,7 @@
         <p:spPr>
           <a:xfrm>
             <a:off x="3884760" y="8685360"/>
-            <a:ext cx="2971080" cy="457920"/>
+            <a:ext cx="2970720" cy="457560"/>
           </a:xfrm>
           <a:prstGeom prst="rect">
             <a:avLst/>
@@ -2089,7 +2089,7 @@
                 <a:tab pos="0" algn="l"/>
               </a:tabLst>
             </a:pPr>
-            <a:fld id="{E33D3102-BC80-41D0-9640-48A99DD0823B}" type="slidenum">
+            <a:fld id="{5A810BE1-0F89-4A86-8BB6-0F0EFD7CBF20}" type="slidenum">
               <a:rPr lang="en-US" sz="1200" b="0" u="none" strike="noStrike">
                 <a:solidFill>
                   <a:schemeClr val="dk1"/>
@@ -2099,7 +2099,7 @@
                 <a:latin typeface="+mn-lt"/>
                 <a:ea typeface="+mn-ea"/>
               </a:rPr>
-              <a:t>&lt;number&gt;</a:t>
+              <a:t>1</a:t>
             </a:fld>
             <a:endParaRPr lang="en-US" sz="1200" b="0" u="none" strike="noStrike">
               <a:solidFill>
@@ -2147,7 +2147,7 @@
         <p:spPr>
           <a:xfrm>
             <a:off x="685800" y="1143000"/>
-            <a:ext cx="5485680" cy="3085560"/>
+            <a:ext cx="5485320" cy="3085200"/>
           </a:xfrm>
           <a:prstGeom prst="rect">
             <a:avLst/>
@@ -2170,7 +2170,7 @@
         <p:spPr>
           <a:xfrm>
             <a:off x="685800" y="4400640"/>
-            <a:ext cx="5485680" cy="3599640"/>
+            <a:ext cx="5485320" cy="3599280"/>
           </a:xfrm>
           <a:prstGeom prst="rect">
             <a:avLst/>
@@ -2212,7 +2212,7 @@
         <p:spPr>
           <a:xfrm>
             <a:off x="3884760" y="8685360"/>
-            <a:ext cx="2971080" cy="457920"/>
+            <a:ext cx="2970720" cy="457560"/>
           </a:xfrm>
           <a:prstGeom prst="rect">
             <a:avLst/>
@@ -2256,7 +2256,7 @@
                 <a:tab pos="0" algn="l"/>
               </a:tabLst>
             </a:pPr>
-            <a:fld id="{99BBC751-002B-4DCC-84EB-80E9F68C8D80}" type="slidenum">
+            <a:fld id="{2D78CAF6-619E-42DC-A8B0-19FD808C972C}" type="slidenum">
               <a:rPr lang="en-US" sz="1200" b="0" u="none" strike="noStrike">
                 <a:solidFill>
                   <a:schemeClr val="dk1"/>
@@ -2266,7 +2266,7 @@
                 <a:latin typeface="+mn-lt"/>
                 <a:ea typeface="+mn-ea"/>
               </a:rPr>
-              <a:t>&lt;number&gt;</a:t>
+              <a:t>1</a:t>
             </a:fld>
             <a:endParaRPr lang="en-US" sz="1200" b="0" u="none" strike="noStrike">
               <a:solidFill>
@@ -2314,7 +2314,7 @@
         <p:spPr>
           <a:xfrm>
             <a:off x="685800" y="1143000"/>
-            <a:ext cx="5485680" cy="3085560"/>
+            <a:ext cx="5485320" cy="3085200"/>
           </a:xfrm>
           <a:prstGeom prst="rect">
             <a:avLst/>
@@ -2337,7 +2337,7 @@
         <p:spPr>
           <a:xfrm>
             <a:off x="685800" y="4400640"/>
-            <a:ext cx="5485680" cy="3599640"/>
+            <a:ext cx="5485320" cy="3599280"/>
           </a:xfrm>
           <a:prstGeom prst="rect">
             <a:avLst/>
@@ -2379,7 +2379,7 @@
         <p:spPr>
           <a:xfrm>
             <a:off x="3884760" y="8685360"/>
-            <a:ext cx="2971080" cy="457920"/>
+            <a:ext cx="2970720" cy="457560"/>
           </a:xfrm>
           <a:prstGeom prst="rect">
             <a:avLst/>
@@ -2423,7 +2423,7 @@
                 <a:tab pos="0" algn="l"/>
               </a:tabLst>
             </a:pPr>
-            <a:fld id="{0551E49B-7CCE-40AB-B910-B00457327546}" type="slidenum">
+            <a:fld id="{F7EDB52C-496B-4D48-9A9C-0E3DC54D3612}" type="slidenum">
               <a:rPr lang="en-US" sz="1200" b="0" u="none" strike="noStrike">
                 <a:solidFill>
                   <a:schemeClr val="dk1"/>
@@ -2433,7 +2433,7 @@
                 <a:latin typeface="+mn-lt"/>
                 <a:ea typeface="+mn-ea"/>
               </a:rPr>
-              <a:t>&lt;number&gt;</a:t>
+              <a:t>1</a:t>
             </a:fld>
             <a:endParaRPr lang="en-US" sz="1200" b="0" u="none" strike="noStrike">
               <a:solidFill>
@@ -2481,7 +2481,7 @@
         <p:spPr>
           <a:xfrm>
             <a:off x="685800" y="1143000"/>
-            <a:ext cx="5485680" cy="3085560"/>
+            <a:ext cx="5485320" cy="3085200"/>
           </a:xfrm>
           <a:prstGeom prst="rect">
             <a:avLst/>
@@ -2504,7 +2504,7 @@
         <p:spPr>
           <a:xfrm>
             <a:off x="685800" y="4400640"/>
-            <a:ext cx="5485680" cy="3599640"/>
+            <a:ext cx="5485320" cy="3599280"/>
           </a:xfrm>
           <a:prstGeom prst="rect">
             <a:avLst/>
@@ -2546,7 +2546,7 @@
         <p:spPr>
           <a:xfrm>
             <a:off x="3884760" y="8685360"/>
-            <a:ext cx="2971080" cy="457920"/>
+            <a:ext cx="2970720" cy="457560"/>
           </a:xfrm>
           <a:prstGeom prst="rect">
             <a:avLst/>
@@ -2590,7 +2590,7 @@
                 <a:tab pos="0" algn="l"/>
               </a:tabLst>
             </a:pPr>
-            <a:fld id="{962C9A12-4D65-437A-B0E2-135B46315D12}" type="slidenum">
+            <a:fld id="{1F49B307-8770-4651-922A-DCD7FD9F06E1}" type="slidenum">
               <a:rPr lang="en-US" sz="1200" b="0" u="none" strike="noStrike">
                 <a:solidFill>
                   <a:schemeClr val="dk1"/>
@@ -2600,7 +2600,7 @@
                 <a:latin typeface="+mn-lt"/>
                 <a:ea typeface="+mn-ea"/>
               </a:rPr>
-              <a:t>&lt;number&gt;</a:t>
+              <a:t>1</a:t>
             </a:fld>
             <a:endParaRPr lang="en-US" sz="1200" b="0" u="none" strike="noStrike">
               <a:solidFill>
@@ -2648,7 +2648,7 @@
         <p:spPr>
           <a:xfrm>
             <a:off x="685800" y="1143000"/>
-            <a:ext cx="5485680" cy="3085560"/>
+            <a:ext cx="5485320" cy="3085200"/>
           </a:xfrm>
           <a:prstGeom prst="rect">
             <a:avLst/>
@@ -2671,7 +2671,7 @@
         <p:spPr>
           <a:xfrm>
             <a:off x="685800" y="4400640"/>
-            <a:ext cx="5485680" cy="3599640"/>
+            <a:ext cx="5485320" cy="3599280"/>
           </a:xfrm>
           <a:prstGeom prst="rect">
             <a:avLst/>
@@ -2713,7 +2713,7 @@
         <p:spPr>
           <a:xfrm>
             <a:off x="3884760" y="8685360"/>
-            <a:ext cx="2971080" cy="457920"/>
+            <a:ext cx="2970720" cy="457560"/>
           </a:xfrm>
           <a:prstGeom prst="rect">
             <a:avLst/>
@@ -2757,7 +2757,7 @@
                 <a:tab pos="0" algn="l"/>
               </a:tabLst>
             </a:pPr>
-            <a:fld id="{E86030BD-F67B-444C-BCD5-EA9922FD88C9}" type="slidenum">
+            <a:fld id="{3B1D3CDA-F56D-4F69-A3A2-F236E0385BE2}" type="slidenum">
               <a:rPr lang="en-US" sz="1200" b="0" u="none" strike="noStrike">
                 <a:solidFill>
                   <a:schemeClr val="dk1"/>
@@ -2767,7 +2767,7 @@
                 <a:latin typeface="+mn-lt"/>
                 <a:ea typeface="+mn-ea"/>
               </a:rPr>
-              <a:t>&lt;number&gt;</a:t>
+              <a:t>1</a:t>
             </a:fld>
             <a:endParaRPr lang="en-US" sz="1200" b="0" u="none" strike="noStrike">
               <a:solidFill>
@@ -2815,7 +2815,7 @@
         <p:spPr>
           <a:xfrm>
             <a:off x="685800" y="1143000"/>
-            <a:ext cx="5485680" cy="3085560"/>
+            <a:ext cx="5485320" cy="3085200"/>
           </a:xfrm>
           <a:prstGeom prst="rect">
             <a:avLst/>
@@ -2838,7 +2838,7 @@
         <p:spPr>
           <a:xfrm>
             <a:off x="685800" y="4400640"/>
-            <a:ext cx="5485680" cy="3599640"/>
+            <a:ext cx="5485320" cy="3599280"/>
           </a:xfrm>
           <a:prstGeom prst="rect">
             <a:avLst/>
@@ -2880,7 +2880,7 @@
         <p:spPr>
           <a:xfrm>
             <a:off x="3884760" y="8685360"/>
-            <a:ext cx="2971080" cy="457920"/>
+            <a:ext cx="2970720" cy="457560"/>
           </a:xfrm>
           <a:prstGeom prst="rect">
             <a:avLst/>
@@ -2924,7 +2924,7 @@
                 <a:tab pos="0" algn="l"/>
               </a:tabLst>
             </a:pPr>
-            <a:fld id="{E6CB1213-67B5-42CA-B1A4-F0392FBC4F32}" type="slidenum">
+            <a:fld id="{90801D22-DD3E-401B-BF7B-4790A9FE39C4}" type="slidenum">
               <a:rPr lang="en-US" sz="1200" b="0" u="none" strike="noStrike">
                 <a:solidFill>
                   <a:schemeClr val="dk1"/>
@@ -2934,7 +2934,7 @@
                 <a:latin typeface="+mn-lt"/>
                 <a:ea typeface="+mn-ea"/>
               </a:rPr>
-              <a:t>&lt;number&gt;</a:t>
+              <a:t>1</a:t>
             </a:fld>
             <a:endParaRPr lang="en-US" sz="1200" b="0" u="none" strike="noStrike">
               <a:solidFill>
@@ -2982,7 +2982,7 @@
         <p:spPr>
           <a:xfrm>
             <a:off x="685800" y="1143000"/>
-            <a:ext cx="5485680" cy="3085560"/>
+            <a:ext cx="5485320" cy="3085200"/>
           </a:xfrm>
           <a:prstGeom prst="rect">
             <a:avLst/>
@@ -3005,7 +3005,7 @@
         <p:spPr>
           <a:xfrm>
             <a:off x="685800" y="4400640"/>
-            <a:ext cx="5485680" cy="3599640"/>
+            <a:ext cx="5485320" cy="3599280"/>
           </a:xfrm>
           <a:prstGeom prst="rect">
             <a:avLst/>
@@ -3047,7 +3047,7 @@
         <p:spPr>
           <a:xfrm>
             <a:off x="3884760" y="8685360"/>
-            <a:ext cx="2971080" cy="457920"/>
+            <a:ext cx="2970720" cy="457560"/>
           </a:xfrm>
           <a:prstGeom prst="rect">
             <a:avLst/>
@@ -3091,7 +3091,7 @@
                 <a:tab pos="0" algn="l"/>
               </a:tabLst>
             </a:pPr>
-            <a:fld id="{8D5F81D8-D988-451D-9127-AD9F7EE7526B}" type="slidenum">
+            <a:fld id="{62B94069-B127-412A-8062-78C6FFB6E7DE}" type="slidenum">
               <a:rPr lang="en-US" sz="1200" b="0" u="none" strike="noStrike">
                 <a:solidFill>
                   <a:schemeClr val="dk1"/>
@@ -3101,7 +3101,7 @@
                 <a:latin typeface="+mn-lt"/>
                 <a:ea typeface="+mn-ea"/>
               </a:rPr>
-              <a:t>&lt;number&gt;</a:t>
+              <a:t>1</a:t>
             </a:fld>
             <a:endParaRPr lang="en-US" sz="1200" b="0" u="none" strike="noStrike">
               <a:solidFill>
@@ -3149,7 +3149,7 @@
         <p:spPr>
           <a:xfrm>
             <a:off x="685800" y="1143000"/>
-            <a:ext cx="5485680" cy="3085560"/>
+            <a:ext cx="5485320" cy="3085200"/>
           </a:xfrm>
           <a:prstGeom prst="rect">
             <a:avLst/>
@@ -3172,7 +3172,7 @@
         <p:spPr>
           <a:xfrm>
             <a:off x="685800" y="4400640"/>
-            <a:ext cx="5485680" cy="3599640"/>
+            <a:ext cx="5485320" cy="3599280"/>
           </a:xfrm>
           <a:prstGeom prst="rect">
             <a:avLst/>
@@ -3214,7 +3214,7 @@
         <p:spPr>
           <a:xfrm>
             <a:off x="3884760" y="8685360"/>
-            <a:ext cx="2971080" cy="457920"/>
+            <a:ext cx="2970720" cy="457560"/>
           </a:xfrm>
           <a:prstGeom prst="rect">
             <a:avLst/>
@@ -3258,7 +3258,7 @@
                 <a:tab pos="0" algn="l"/>
               </a:tabLst>
             </a:pPr>
-            <a:fld id="{45443141-9BF7-4A9C-AB1B-F8908281FC8F}" type="slidenum">
+            <a:fld id="{B3EC00EB-068D-47C4-8545-57F95139D097}" type="slidenum">
               <a:rPr lang="en-US" sz="1200" b="0" u="none" strike="noStrike">
                 <a:solidFill>
                   <a:schemeClr val="dk1"/>
@@ -3268,7 +3268,7 @@
                 <a:latin typeface="+mn-lt"/>
                 <a:ea typeface="+mn-ea"/>
               </a:rPr>
-              <a:t>&lt;number&gt;</a:t>
+              <a:t>1</a:t>
             </a:fld>
             <a:endParaRPr lang="en-US" sz="1200" b="0" u="none" strike="noStrike">
               <a:solidFill>
@@ -3316,7 +3316,7 @@
         <p:spPr>
           <a:xfrm>
             <a:off x="685800" y="1143000"/>
-            <a:ext cx="5485680" cy="3085560"/>
+            <a:ext cx="5485320" cy="3085200"/>
           </a:xfrm>
           <a:prstGeom prst="rect">
             <a:avLst/>
@@ -3339,7 +3339,7 @@
         <p:spPr>
           <a:xfrm>
             <a:off x="685800" y="4400640"/>
-            <a:ext cx="5485680" cy="3599640"/>
+            <a:ext cx="5485320" cy="3599280"/>
           </a:xfrm>
           <a:prstGeom prst="rect">
             <a:avLst/>
@@ -3381,7 +3381,7 @@
         <p:spPr>
           <a:xfrm>
             <a:off x="3884760" y="8685360"/>
-            <a:ext cx="2971080" cy="457920"/>
+            <a:ext cx="2970720" cy="457560"/>
           </a:xfrm>
           <a:prstGeom prst="rect">
             <a:avLst/>
@@ -3425,7 +3425,7 @@
                 <a:tab pos="0" algn="l"/>
               </a:tabLst>
             </a:pPr>
-            <a:fld id="{64B8A03D-7FA4-4380-AB9B-3A49D892C719}" type="slidenum">
+            <a:fld id="{C576E124-E1F2-40A1-981F-040CCC6B4AB4}" type="slidenum">
               <a:rPr lang="en-US" sz="1200" b="0" u="none" strike="noStrike">
                 <a:solidFill>
                   <a:schemeClr val="dk1"/>
@@ -3435,7 +3435,7 @@
                 <a:latin typeface="+mn-lt"/>
                 <a:ea typeface="+mn-ea"/>
               </a:rPr>
-              <a:t>&lt;number&gt;</a:t>
+              <a:t>1</a:t>
             </a:fld>
             <a:endParaRPr lang="en-US" sz="1200" b="0" u="none" strike="noStrike">
               <a:solidFill>
@@ -3483,7 +3483,7 @@
         <p:spPr>
           <a:xfrm>
             <a:off x="685800" y="1143000"/>
-            <a:ext cx="5485680" cy="3085560"/>
+            <a:ext cx="5485320" cy="3085200"/>
           </a:xfrm>
           <a:prstGeom prst="rect">
             <a:avLst/>
@@ -3506,7 +3506,7 @@
         <p:spPr>
           <a:xfrm>
             <a:off x="685800" y="4400640"/>
-            <a:ext cx="5485680" cy="3599640"/>
+            <a:ext cx="5485320" cy="3599280"/>
           </a:xfrm>
           <a:prstGeom prst="rect">
             <a:avLst/>
@@ -3548,7 +3548,7 @@
         <p:spPr>
           <a:xfrm>
             <a:off x="3884760" y="8685360"/>
-            <a:ext cx="2971080" cy="457920"/>
+            <a:ext cx="2970720" cy="457560"/>
           </a:xfrm>
           <a:prstGeom prst="rect">
             <a:avLst/>
@@ -3592,7 +3592,7 @@
                 <a:tab pos="0" algn="l"/>
               </a:tabLst>
             </a:pPr>
-            <a:fld id="{1ED04F74-EC0A-4AEF-9D0B-65245DD5D967}" type="slidenum">
+            <a:fld id="{4719AD57-5DD8-433F-A4D0-5569D72CA329}" type="slidenum">
               <a:rPr lang="en-US" sz="1200" b="0" u="none" strike="noStrike">
                 <a:solidFill>
                   <a:schemeClr val="dk1"/>
@@ -3602,7 +3602,7 @@
                 <a:latin typeface="+mn-lt"/>
                 <a:ea typeface="+mn-ea"/>
               </a:rPr>
-              <a:t>&lt;number&gt;</a:t>
+              <a:t>1</a:t>
             </a:fld>
             <a:endParaRPr lang="en-US" sz="1200" b="0" u="none" strike="noStrike">
               <a:solidFill>
@@ -3650,7 +3650,7 @@
         <p:spPr>
           <a:xfrm>
             <a:off x="685800" y="1143000"/>
-            <a:ext cx="5485680" cy="3085560"/>
+            <a:ext cx="5485320" cy="3085200"/>
           </a:xfrm>
           <a:prstGeom prst="rect">
             <a:avLst/>
@@ -3673,7 +3673,7 @@
         <p:spPr>
           <a:xfrm>
             <a:off x="685800" y="4400640"/>
-            <a:ext cx="5485680" cy="3599640"/>
+            <a:ext cx="5485320" cy="3599280"/>
           </a:xfrm>
           <a:prstGeom prst="rect">
             <a:avLst/>
@@ -3715,7 +3715,7 @@
         <p:spPr>
           <a:xfrm>
             <a:off x="3884760" y="8685360"/>
-            <a:ext cx="2971080" cy="457920"/>
+            <a:ext cx="2970720" cy="457560"/>
           </a:xfrm>
           <a:prstGeom prst="rect">
             <a:avLst/>
@@ -3759,7 +3759,7 @@
                 <a:tab pos="0" algn="l"/>
               </a:tabLst>
             </a:pPr>
-            <a:fld id="{0FB1EFB1-7668-4B9C-874C-D3665D36A96D}" type="slidenum">
+            <a:fld id="{772E0442-61CF-4509-A2A9-07B4A27F5232}" type="slidenum">
               <a:rPr lang="en-US" sz="1200" b="0" u="none" strike="noStrike">
                 <a:solidFill>
                   <a:schemeClr val="dk1"/>
@@ -3769,7 +3769,7 @@
                 <a:latin typeface="+mn-lt"/>
                 <a:ea typeface="+mn-ea"/>
               </a:rPr>
-              <a:t>&lt;number&gt;</a:t>
+              <a:t>1</a:t>
             </a:fld>
             <a:endParaRPr lang="en-US" sz="1200" b="0" u="none" strike="noStrike">
               <a:solidFill>
@@ -3817,7 +3817,7 @@
         <p:spPr>
           <a:xfrm>
             <a:off x="685800" y="1143000"/>
-            <a:ext cx="5485680" cy="3085560"/>
+            <a:ext cx="5485320" cy="3085200"/>
           </a:xfrm>
           <a:prstGeom prst="rect">
             <a:avLst/>
@@ -3840,7 +3840,7 @@
         <p:spPr>
           <a:xfrm>
             <a:off x="685800" y="4400640"/>
-            <a:ext cx="5485680" cy="3599640"/>
+            <a:ext cx="5485320" cy="3599280"/>
           </a:xfrm>
           <a:prstGeom prst="rect">
             <a:avLst/>
@@ -3882,7 +3882,7 @@
         <p:spPr>
           <a:xfrm>
             <a:off x="3884760" y="8685360"/>
-            <a:ext cx="2971080" cy="457920"/>
+            <a:ext cx="2970720" cy="457560"/>
           </a:xfrm>
           <a:prstGeom prst="rect">
             <a:avLst/>
@@ -3926,7 +3926,7 @@
                 <a:tab pos="0" algn="l"/>
               </a:tabLst>
             </a:pPr>
-            <a:fld id="{D5213FA7-2D6E-47D6-BEB6-9C437BA8B466}" type="slidenum">
+            <a:fld id="{3F5B402F-C8DE-47BB-81D2-5B58F5E5FCB8}" type="slidenum">
               <a:rPr lang="en-US" sz="1200" b="0" u="none" strike="noStrike">
                 <a:solidFill>
                   <a:schemeClr val="dk1"/>
@@ -3936,7 +3936,7 @@
                 <a:latin typeface="+mn-lt"/>
                 <a:ea typeface="+mn-ea"/>
               </a:rPr>
-              <a:t>&lt;number&gt;</a:t>
+              <a:t>1</a:t>
             </a:fld>
             <a:endParaRPr lang="en-US" sz="1200" b="0" u="none" strike="noStrike">
               <a:solidFill>
@@ -3984,7 +3984,7 @@
         <p:spPr>
           <a:xfrm>
             <a:off x="685800" y="1143000"/>
-            <a:ext cx="5485680" cy="3085560"/>
+            <a:ext cx="5485320" cy="3085200"/>
           </a:xfrm>
           <a:prstGeom prst="rect">
             <a:avLst/>
@@ -4007,7 +4007,7 @@
         <p:spPr>
           <a:xfrm>
             <a:off x="685800" y="4400640"/>
-            <a:ext cx="5485680" cy="3599640"/>
+            <a:ext cx="5485320" cy="3599280"/>
           </a:xfrm>
           <a:prstGeom prst="rect">
             <a:avLst/>
@@ -4049,7 +4049,7 @@
         <p:spPr>
           <a:xfrm>
             <a:off x="3884760" y="8685360"/>
-            <a:ext cx="2971080" cy="457920"/>
+            <a:ext cx="2970720" cy="457560"/>
           </a:xfrm>
           <a:prstGeom prst="rect">
             <a:avLst/>
@@ -4093,7 +4093,7 @@
                 <a:tab pos="0" algn="l"/>
               </a:tabLst>
             </a:pPr>
-            <a:fld id="{C0C5E7D6-2343-475C-9697-1C1DF69E0556}" type="slidenum">
+            <a:fld id="{EE1BB28A-5AFA-4877-9945-3F2A16405A7A}" type="slidenum">
               <a:rPr lang="en-US" sz="1200" b="0" u="none" strike="noStrike">
                 <a:solidFill>
                   <a:schemeClr val="dk1"/>
@@ -4103,7 +4103,7 @@
                 <a:latin typeface="+mn-lt"/>
                 <a:ea typeface="+mn-ea"/>
               </a:rPr>
-              <a:t>&lt;number&gt;</a:t>
+              <a:t>1</a:t>
             </a:fld>
             <a:endParaRPr lang="en-US" sz="1200" b="0" u="none" strike="noStrike">
               <a:solidFill>
@@ -4151,7 +4151,7 @@
         <p:spPr>
           <a:xfrm>
             <a:off x="685800" y="1143000"/>
-            <a:ext cx="5485680" cy="3085560"/>
+            <a:ext cx="5485320" cy="3085200"/>
           </a:xfrm>
           <a:prstGeom prst="rect">
             <a:avLst/>
@@ -4174,7 +4174,7 @@
         <p:spPr>
           <a:xfrm>
             <a:off x="685800" y="4400640"/>
-            <a:ext cx="5485680" cy="3599640"/>
+            <a:ext cx="5485320" cy="3599280"/>
           </a:xfrm>
           <a:prstGeom prst="rect">
             <a:avLst/>
@@ -4216,7 +4216,7 @@
         <p:spPr>
           <a:xfrm>
             <a:off x="3884760" y="8685360"/>
-            <a:ext cx="2971080" cy="457920"/>
+            <a:ext cx="2970720" cy="457560"/>
           </a:xfrm>
           <a:prstGeom prst="rect">
             <a:avLst/>
@@ -4260,7 +4260,7 @@
                 <a:tab pos="0" algn="l"/>
               </a:tabLst>
             </a:pPr>
-            <a:fld id="{CB47C578-A8C0-4F7A-9C85-08FD622E8667}" type="slidenum">
+            <a:fld id="{B073C9B5-B98F-4F81-8FF6-BA56F5879912}" type="slidenum">
               <a:rPr lang="en-US" sz="1200" b="0" u="none" strike="noStrike">
                 <a:solidFill>
                   <a:schemeClr val="dk1"/>
@@ -4270,7 +4270,7 @@
                 <a:latin typeface="+mn-lt"/>
                 <a:ea typeface="+mn-ea"/>
               </a:rPr>
-              <a:t>&lt;number&gt;</a:t>
+              <a:t>1</a:t>
             </a:fld>
             <a:endParaRPr lang="en-US" sz="1200" b="0" u="none" strike="noStrike">
               <a:solidFill>
@@ -4318,7 +4318,7 @@
         <p:spPr>
           <a:xfrm>
             <a:off x="685800" y="1143000"/>
-            <a:ext cx="5485680" cy="3085560"/>
+            <a:ext cx="5485320" cy="3085200"/>
           </a:xfrm>
           <a:prstGeom prst="rect">
             <a:avLst/>
@@ -4341,7 +4341,7 @@
         <p:spPr>
           <a:xfrm>
             <a:off x="685800" y="4400640"/>
-            <a:ext cx="5485680" cy="3599640"/>
+            <a:ext cx="5485320" cy="3599280"/>
           </a:xfrm>
           <a:prstGeom prst="rect">
             <a:avLst/>
@@ -4383,7 +4383,7 @@
         <p:spPr>
           <a:xfrm>
             <a:off x="3884760" y="8685360"/>
-            <a:ext cx="2971080" cy="457920"/>
+            <a:ext cx="2970720" cy="457560"/>
           </a:xfrm>
           <a:prstGeom prst="rect">
             <a:avLst/>
@@ -4427,7 +4427,7 @@
                 <a:tab pos="0" algn="l"/>
               </a:tabLst>
             </a:pPr>
-            <a:fld id="{1C9C97A7-5DB8-499F-AE22-870005F44278}" type="slidenum">
+            <a:fld id="{39F2897F-7E24-409D-B28B-22086AFA5DB8}" type="slidenum">
               <a:rPr lang="en-US" sz="1200" b="0" u="none" strike="noStrike">
                 <a:solidFill>
                   <a:schemeClr val="dk1"/>
@@ -4437,7 +4437,7 @@
                 <a:latin typeface="+mn-lt"/>
                 <a:ea typeface="+mn-ea"/>
               </a:rPr>
-              <a:t>&lt;number&gt;</a:t>
+              <a:t>1</a:t>
             </a:fld>
             <a:endParaRPr lang="en-US" sz="1200" b="0" u="none" strike="noStrike">
               <a:solidFill>
@@ -4485,7 +4485,7 @@
         <p:spPr>
           <a:xfrm>
             <a:off x="685800" y="1143000"/>
-            <a:ext cx="5485680" cy="3085560"/>
+            <a:ext cx="5485320" cy="3085200"/>
           </a:xfrm>
           <a:prstGeom prst="rect">
             <a:avLst/>
@@ -4508,7 +4508,7 @@
         <p:spPr>
           <a:xfrm>
             <a:off x="685800" y="4400640"/>
-            <a:ext cx="5485680" cy="3599640"/>
+            <a:ext cx="5485320" cy="3599280"/>
           </a:xfrm>
           <a:prstGeom prst="rect">
             <a:avLst/>
@@ -4550,7 +4550,7 @@
         <p:spPr>
           <a:xfrm>
             <a:off x="3884760" y="8685360"/>
-            <a:ext cx="2971080" cy="457920"/>
+            <a:ext cx="2970720" cy="457560"/>
           </a:xfrm>
           <a:prstGeom prst="rect">
             <a:avLst/>
@@ -4594,7 +4594,7 @@
                 <a:tab pos="0" algn="l"/>
               </a:tabLst>
             </a:pPr>
-            <a:fld id="{68DF6697-D424-4F02-ADDD-0EE557340232}" type="slidenum">
+            <a:fld id="{D57B36B7-5DE7-4CCB-9B39-B67E80E47A31}" type="slidenum">
               <a:rPr lang="en-US" sz="1200" b="0" u="none" strike="noStrike">
                 <a:solidFill>
                   <a:schemeClr val="dk1"/>
@@ -4604,7 +4604,7 @@
                 <a:latin typeface="+mn-lt"/>
                 <a:ea typeface="+mn-ea"/>
               </a:rPr>
-              <a:t>&lt;number&gt;</a:t>
+              <a:t>1</a:t>
             </a:fld>
             <a:endParaRPr lang="en-US" sz="1200" b="0" u="none" strike="noStrike">
               <a:solidFill>
@@ -4652,7 +4652,7 @@
         <p:spPr>
           <a:xfrm>
             <a:off x="685800" y="1143000"/>
-            <a:ext cx="5485680" cy="3085560"/>
+            <a:ext cx="5485320" cy="3085200"/>
           </a:xfrm>
           <a:prstGeom prst="rect">
             <a:avLst/>
@@ -4675,7 +4675,7 @@
         <p:spPr>
           <a:xfrm>
             <a:off x="685800" y="4400640"/>
-            <a:ext cx="5485680" cy="3599640"/>
+            <a:ext cx="5485320" cy="3599280"/>
           </a:xfrm>
           <a:prstGeom prst="rect">
             <a:avLst/>
@@ -4717,7 +4717,7 @@
         <p:spPr>
           <a:xfrm>
             <a:off x="3884760" y="8685360"/>
-            <a:ext cx="2971080" cy="457920"/>
+            <a:ext cx="2970720" cy="457560"/>
           </a:xfrm>
           <a:prstGeom prst="rect">
             <a:avLst/>
@@ -4761,7 +4761,7 @@
                 <a:tab pos="0" algn="l"/>
               </a:tabLst>
             </a:pPr>
-            <a:fld id="{C93DC929-155C-4B83-BE20-B3AA566E90F8}" type="slidenum">
+            <a:fld id="{C412144D-709E-4F02-9F40-FCB41932B261}" type="slidenum">
               <a:rPr lang="en-US" sz="1200" b="0" u="none" strike="noStrike">
                 <a:solidFill>
                   <a:schemeClr val="dk1"/>
@@ -4771,7 +4771,7 @@
                 <a:latin typeface="+mn-lt"/>
                 <a:ea typeface="+mn-ea"/>
               </a:rPr>
-              <a:t>&lt;number&gt;</a:t>
+              <a:t>1</a:t>
             </a:fld>
             <a:endParaRPr lang="en-US" sz="1200" b="0" u="none" strike="noStrike">
               <a:solidFill>
@@ -4819,7 +4819,7 @@
         <p:spPr>
           <a:xfrm>
             <a:off x="685800" y="1143000"/>
-            <a:ext cx="5485680" cy="3085560"/>
+            <a:ext cx="5485320" cy="3085200"/>
           </a:xfrm>
           <a:prstGeom prst="rect">
             <a:avLst/>
@@ -4842,7 +4842,7 @@
         <p:spPr>
           <a:xfrm>
             <a:off x="685800" y="4400640"/>
-            <a:ext cx="5485680" cy="3599640"/>
+            <a:ext cx="5485320" cy="3599280"/>
           </a:xfrm>
           <a:prstGeom prst="rect">
             <a:avLst/>
@@ -4884,7 +4884,7 @@
         <p:spPr>
           <a:xfrm>
             <a:off x="3884760" y="8685360"/>
-            <a:ext cx="2971080" cy="457920"/>
+            <a:ext cx="2970720" cy="457560"/>
           </a:xfrm>
           <a:prstGeom prst="rect">
             <a:avLst/>
@@ -4928,7 +4928,7 @@
                 <a:tab pos="0" algn="l"/>
               </a:tabLst>
             </a:pPr>
-            <a:fld id="{0B5E109B-B630-4356-B56A-51418EE608AC}" type="slidenum">
+            <a:fld id="{522236BC-AD52-4689-87A5-ACC2A72E05F7}" type="slidenum">
               <a:rPr lang="en-US" sz="1200" b="0" u="none" strike="noStrike">
                 <a:solidFill>
                   <a:schemeClr val="dk1"/>
@@ -4938,7 +4938,7 @@
                 <a:latin typeface="+mn-lt"/>
                 <a:ea typeface="+mn-ea"/>
               </a:rPr>
-              <a:t>&lt;number&gt;</a:t>
+              <a:t>1</a:t>
             </a:fld>
             <a:endParaRPr lang="en-US" sz="1200" b="0" u="none" strike="noStrike">
               <a:solidFill>
@@ -4986,7 +4986,7 @@
         <p:spPr>
           <a:xfrm>
             <a:off x="685800" y="1143000"/>
-            <a:ext cx="5485680" cy="3085560"/>
+            <a:ext cx="5485320" cy="3085200"/>
           </a:xfrm>
           <a:prstGeom prst="rect">
             <a:avLst/>
@@ -5009,7 +5009,7 @@
         <p:spPr>
           <a:xfrm>
             <a:off x="685800" y="4400640"/>
-            <a:ext cx="5485680" cy="3599640"/>
+            <a:ext cx="5485320" cy="3599280"/>
           </a:xfrm>
           <a:prstGeom prst="rect">
             <a:avLst/>
@@ -5051,7 +5051,7 @@
         <p:spPr>
           <a:xfrm>
             <a:off x="3884760" y="8685360"/>
-            <a:ext cx="2971080" cy="457920"/>
+            <a:ext cx="2970720" cy="457560"/>
           </a:xfrm>
           <a:prstGeom prst="rect">
             <a:avLst/>
@@ -5095,7 +5095,7 @@
                 <a:tab pos="0" algn="l"/>
               </a:tabLst>
             </a:pPr>
-            <a:fld id="{4E8D60D7-ADAB-415C-B41C-845D5EB92290}" type="slidenum">
+            <a:fld id="{9B3E217E-1390-4BAE-BEC4-9D010EB7D552}" type="slidenum">
               <a:rPr lang="en-US" sz="1200" b="0" u="none" strike="noStrike">
                 <a:solidFill>
                   <a:schemeClr val="dk1"/>
@@ -5105,7 +5105,7 @@
                 <a:latin typeface="+mn-lt"/>
                 <a:ea typeface="+mn-ea"/>
               </a:rPr>
-              <a:t>&lt;number&gt;</a:t>
+              <a:t>1</a:t>
             </a:fld>
             <a:endParaRPr lang="en-US" sz="1200" b="0" u="none" strike="noStrike">
               <a:solidFill>
@@ -5153,7 +5153,7 @@
         <p:spPr>
           <a:xfrm>
             <a:off x="685800" y="1143000"/>
-            <a:ext cx="5485680" cy="3085560"/>
+            <a:ext cx="5485320" cy="3085200"/>
           </a:xfrm>
           <a:prstGeom prst="rect">
             <a:avLst/>
@@ -5176,7 +5176,7 @@
         <p:spPr>
           <a:xfrm>
             <a:off x="685800" y="4400640"/>
-            <a:ext cx="5485680" cy="3599640"/>
+            <a:ext cx="5485320" cy="3599280"/>
           </a:xfrm>
           <a:prstGeom prst="rect">
             <a:avLst/>
@@ -5218,7 +5218,7 @@
         <p:spPr>
           <a:xfrm>
             <a:off x="3884760" y="8685360"/>
-            <a:ext cx="2971080" cy="457920"/>
+            <a:ext cx="2970720" cy="457560"/>
           </a:xfrm>
           <a:prstGeom prst="rect">
             <a:avLst/>
@@ -5262,7 +5262,7 @@
                 <a:tab pos="0" algn="l"/>
               </a:tabLst>
             </a:pPr>
-            <a:fld id="{5F9569DC-A9FC-45AE-833D-AE3C445212ED}" type="slidenum">
+            <a:fld id="{59E23C62-78DC-416E-BD5C-F8FCAA0D6A2F}" type="slidenum">
               <a:rPr lang="en-US" sz="1200" b="0" u="none" strike="noStrike">
                 <a:solidFill>
                   <a:schemeClr val="dk1"/>
@@ -5272,7 +5272,7 @@
                 <a:latin typeface="+mn-lt"/>
                 <a:ea typeface="+mn-ea"/>
               </a:rPr>
-              <a:t>&lt;number&gt;</a:t>
+              <a:t>1</a:t>
             </a:fld>
             <a:endParaRPr lang="en-US" sz="1200" b="0" u="none" strike="noStrike">
               <a:solidFill>
@@ -5320,7 +5320,7 @@
         <p:spPr>
           <a:xfrm>
             <a:off x="685800" y="1143000"/>
-            <a:ext cx="5485680" cy="3085560"/>
+            <a:ext cx="5485320" cy="3085200"/>
           </a:xfrm>
           <a:prstGeom prst="rect">
             <a:avLst/>
@@ -5343,7 +5343,7 @@
         <p:spPr>
           <a:xfrm>
             <a:off x="685800" y="4400640"/>
-            <a:ext cx="5485680" cy="3599640"/>
+            <a:ext cx="5485320" cy="3599280"/>
           </a:xfrm>
           <a:prstGeom prst="rect">
             <a:avLst/>
@@ -5385,7 +5385,7 @@
         <p:spPr>
           <a:xfrm>
             <a:off x="3884760" y="8685360"/>
-            <a:ext cx="2971080" cy="457920"/>
+            <a:ext cx="2970720" cy="457560"/>
           </a:xfrm>
           <a:prstGeom prst="rect">
             <a:avLst/>
@@ -5429,7 +5429,7 @@
                 <a:tab pos="0" algn="l"/>
               </a:tabLst>
             </a:pPr>
-            <a:fld id="{BB973678-DBB9-4A80-A71A-ADEAE52097DA}" type="slidenum">
+            <a:fld id="{AC902CEF-7B49-4D05-BE34-863E4FD267DE}" type="slidenum">
               <a:rPr lang="en-US" sz="1200" b="0" u="none" strike="noStrike">
                 <a:solidFill>
                   <a:schemeClr val="dk1"/>
@@ -5439,7 +5439,7 @@
                 <a:latin typeface="+mn-lt"/>
                 <a:ea typeface="+mn-ea"/>
               </a:rPr>
-              <a:t>&lt;number&gt;</a:t>
+              <a:t>1</a:t>
             </a:fld>
             <a:endParaRPr lang="en-US" sz="1200" b="0" u="none" strike="noStrike">
               <a:solidFill>
@@ -5487,7 +5487,7 @@
         <p:spPr>
           <a:xfrm>
             <a:off x="685800" y="1143000"/>
-            <a:ext cx="5485680" cy="3085560"/>
+            <a:ext cx="5485320" cy="3085200"/>
           </a:xfrm>
           <a:prstGeom prst="rect">
             <a:avLst/>
@@ -5510,7 +5510,7 @@
         <p:spPr>
           <a:xfrm>
             <a:off x="685800" y="4400640"/>
-            <a:ext cx="5485680" cy="3599640"/>
+            <a:ext cx="5485320" cy="3599280"/>
           </a:xfrm>
           <a:prstGeom prst="rect">
             <a:avLst/>
@@ -5552,7 +5552,7 @@
         <p:spPr>
           <a:xfrm>
             <a:off x="3884760" y="8685360"/>
-            <a:ext cx="2971080" cy="457920"/>
+            <a:ext cx="2970720" cy="457560"/>
           </a:xfrm>
           <a:prstGeom prst="rect">
             <a:avLst/>
@@ -5596,7 +5596,7 @@
                 <a:tab pos="0" algn="l"/>
               </a:tabLst>
             </a:pPr>
-            <a:fld id="{E9AB9325-407F-4AB0-BEDA-F0D939709AD2}" type="slidenum">
+            <a:fld id="{07531207-5F1A-4053-B693-B1929D6474B5}" type="slidenum">
               <a:rPr lang="en-US" sz="1200" b="0" u="none" strike="noStrike">
                 <a:solidFill>
                   <a:schemeClr val="dk1"/>
@@ -5606,7 +5606,7 @@
                 <a:latin typeface="+mn-lt"/>
                 <a:ea typeface="+mn-ea"/>
               </a:rPr>
-              <a:t>&lt;number&gt;</a:t>
+              <a:t>1</a:t>
             </a:fld>
             <a:endParaRPr lang="en-US" sz="1200" b="0" u="none" strike="noStrike">
               <a:solidFill>
@@ -5654,7 +5654,7 @@
         <p:spPr>
           <a:xfrm>
             <a:off x="685800" y="1143000"/>
-            <a:ext cx="5485680" cy="3085560"/>
+            <a:ext cx="5485320" cy="3085200"/>
           </a:xfrm>
           <a:prstGeom prst="rect">
             <a:avLst/>
@@ -5677,7 +5677,7 @@
         <p:spPr>
           <a:xfrm>
             <a:off x="685800" y="4400640"/>
-            <a:ext cx="5485680" cy="3599640"/>
+            <a:ext cx="5485320" cy="3599280"/>
           </a:xfrm>
           <a:prstGeom prst="rect">
             <a:avLst/>
@@ -5719,7 +5719,7 @@
         <p:spPr>
           <a:xfrm>
             <a:off x="3884760" y="8685360"/>
-            <a:ext cx="2971080" cy="457920"/>
+            <a:ext cx="2970720" cy="457560"/>
           </a:xfrm>
           <a:prstGeom prst="rect">
             <a:avLst/>
@@ -5763,7 +5763,7 @@
                 <a:tab pos="0" algn="l"/>
               </a:tabLst>
             </a:pPr>
-            <a:fld id="{B2276C40-3993-4CB6-85BC-78539DB424A0}" type="slidenum">
+            <a:fld id="{E7B2A18C-87CD-4CFC-A131-043C862A0A79}" type="slidenum">
               <a:rPr lang="en-US" sz="1200" b="0" u="none" strike="noStrike">
                 <a:solidFill>
                   <a:schemeClr val="dk1"/>
@@ -5773,7 +5773,7 @@
                 <a:latin typeface="+mn-lt"/>
                 <a:ea typeface="+mn-ea"/>
               </a:rPr>
-              <a:t>&lt;number&gt;</a:t>
+              <a:t>1</a:t>
             </a:fld>
             <a:endParaRPr lang="en-US" sz="1200" b="0" u="none" strike="noStrike">
               <a:solidFill>
@@ -5821,7 +5821,7 @@
         <p:spPr>
           <a:xfrm>
             <a:off x="685800" y="1143000"/>
-            <a:ext cx="5485680" cy="3085560"/>
+            <a:ext cx="5485320" cy="3085200"/>
           </a:xfrm>
           <a:prstGeom prst="rect">
             <a:avLst/>
@@ -5844,7 +5844,7 @@
         <p:spPr>
           <a:xfrm>
             <a:off x="685800" y="4400640"/>
-            <a:ext cx="5485680" cy="3599640"/>
+            <a:ext cx="5485320" cy="3599280"/>
           </a:xfrm>
           <a:prstGeom prst="rect">
             <a:avLst/>
@@ -5886,7 +5886,7 @@
         <p:spPr>
           <a:xfrm>
             <a:off x="3884760" y="8685360"/>
-            <a:ext cx="2971080" cy="457920"/>
+            <a:ext cx="2970720" cy="457560"/>
           </a:xfrm>
           <a:prstGeom prst="rect">
             <a:avLst/>
@@ -5930,7 +5930,7 @@
                 <a:tab pos="0" algn="l"/>
               </a:tabLst>
             </a:pPr>
-            <a:fld id="{6983BA0E-7473-4D47-8084-66B4FA4B7620}" type="slidenum">
+            <a:fld id="{1E7FBFF7-A34C-4E69-A021-AB69BF431F76}" type="slidenum">
               <a:rPr lang="en-US" sz="1200" b="0" u="none" strike="noStrike">
                 <a:solidFill>
                   <a:schemeClr val="dk1"/>
@@ -5940,7 +5940,7 @@
                 <a:latin typeface="+mn-lt"/>
                 <a:ea typeface="+mn-ea"/>
               </a:rPr>
-              <a:t>&lt;number&gt;</a:t>
+              <a:t>1</a:t>
             </a:fld>
             <a:endParaRPr lang="en-US" sz="1200" b="0" u="none" strike="noStrike">
               <a:solidFill>
@@ -5988,7 +5988,7 @@
         <p:spPr>
           <a:xfrm>
             <a:off x="685800" y="1143000"/>
-            <a:ext cx="5485680" cy="3085560"/>
+            <a:ext cx="5485320" cy="3085200"/>
           </a:xfrm>
           <a:prstGeom prst="rect">
             <a:avLst/>
@@ -6011,7 +6011,7 @@
         <p:spPr>
           <a:xfrm>
             <a:off x="685800" y="4400640"/>
-            <a:ext cx="5485680" cy="3599640"/>
+            <a:ext cx="5485320" cy="3599280"/>
           </a:xfrm>
           <a:prstGeom prst="rect">
             <a:avLst/>
@@ -6053,7 +6053,7 @@
         <p:spPr>
           <a:xfrm>
             <a:off x="3884760" y="8685360"/>
-            <a:ext cx="2971080" cy="457920"/>
+            <a:ext cx="2970720" cy="457560"/>
           </a:xfrm>
           <a:prstGeom prst="rect">
             <a:avLst/>
@@ -6097,7 +6097,7 @@
                 <a:tab pos="0" algn="l"/>
               </a:tabLst>
             </a:pPr>
-            <a:fld id="{0CBD61A7-F0F2-4CCD-B3A9-F585A1B86493}" type="slidenum">
+            <a:fld id="{D15DDEDF-850C-4D99-9558-A49CD672B3DF}" type="slidenum">
               <a:rPr lang="en-US" sz="1200" b="0" u="none" strike="noStrike">
                 <a:solidFill>
                   <a:schemeClr val="dk1"/>
@@ -6107,7 +6107,7 @@
                 <a:latin typeface="+mn-lt"/>
                 <a:ea typeface="+mn-ea"/>
               </a:rPr>
-              <a:t>&lt;number&gt;</a:t>
+              <a:t>1</a:t>
             </a:fld>
             <a:endParaRPr lang="en-US" sz="1200" b="0" u="none" strike="noStrike">
               <a:solidFill>
@@ -6155,7 +6155,7 @@
         <p:spPr>
           <a:xfrm>
             <a:off x="685800" y="1143000"/>
-            <a:ext cx="5485680" cy="3085560"/>
+            <a:ext cx="5485320" cy="3085200"/>
           </a:xfrm>
           <a:prstGeom prst="rect">
             <a:avLst/>
@@ -6178,7 +6178,7 @@
         <p:spPr>
           <a:xfrm>
             <a:off x="685800" y="4400640"/>
-            <a:ext cx="5485680" cy="3599640"/>
+            <a:ext cx="5485320" cy="3599280"/>
           </a:xfrm>
           <a:prstGeom prst="rect">
             <a:avLst/>
@@ -6220,7 +6220,7 @@
         <p:spPr>
           <a:xfrm>
             <a:off x="3884760" y="8685360"/>
-            <a:ext cx="2971080" cy="457920"/>
+            <a:ext cx="2970720" cy="457560"/>
           </a:xfrm>
           <a:prstGeom prst="rect">
             <a:avLst/>
@@ -6264,7 +6264,7 @@
                 <a:tab pos="0" algn="l"/>
               </a:tabLst>
             </a:pPr>
-            <a:fld id="{7FD60A77-9ED5-4B37-B3C6-278F56770121}" type="slidenum">
+            <a:fld id="{0A7C301F-1597-406E-92F7-935E0CD433D3}" type="slidenum">
               <a:rPr lang="en-US" sz="1200" b="0" u="none" strike="noStrike">
                 <a:solidFill>
                   <a:schemeClr val="dk1"/>
@@ -6274,7 +6274,7 @@
                 <a:latin typeface="+mn-lt"/>
                 <a:ea typeface="+mn-ea"/>
               </a:rPr>
-              <a:t>&lt;number&gt;</a:t>
+              <a:t>1</a:t>
             </a:fld>
             <a:endParaRPr lang="en-US" sz="1200" b="0" u="none" strike="noStrike">
               <a:solidFill>
@@ -6322,7 +6322,7 @@
         <p:spPr>
           <a:xfrm>
             <a:off x="685800" y="1143000"/>
-            <a:ext cx="5485680" cy="3085560"/>
+            <a:ext cx="5485320" cy="3085200"/>
           </a:xfrm>
           <a:prstGeom prst="rect">
             <a:avLst/>
@@ -6345,7 +6345,7 @@
         <p:spPr>
           <a:xfrm>
             <a:off x="685800" y="4400640"/>
-            <a:ext cx="5485680" cy="3599640"/>
+            <a:ext cx="5485320" cy="3599280"/>
           </a:xfrm>
           <a:prstGeom prst="rect">
             <a:avLst/>
@@ -6387,7 +6387,7 @@
         <p:spPr>
           <a:xfrm>
             <a:off x="3884760" y="8685360"/>
-            <a:ext cx="2971080" cy="457920"/>
+            <a:ext cx="2970720" cy="457560"/>
           </a:xfrm>
           <a:prstGeom prst="rect">
             <a:avLst/>
@@ -6431,7 +6431,7 @@
                 <a:tab pos="0" algn="l"/>
               </a:tabLst>
             </a:pPr>
-            <a:fld id="{00B2B0B5-E931-4DB7-9BB9-624A3AA5351B}" type="slidenum">
+            <a:fld id="{188C5DCF-6D96-4C76-B55A-3E0BDF07E8A8}" type="slidenum">
               <a:rPr lang="en-US" sz="1200" b="0" u="none" strike="noStrike">
                 <a:solidFill>
                   <a:schemeClr val="dk1"/>
@@ -6441,7 +6441,7 @@
                 <a:latin typeface="+mn-lt"/>
                 <a:ea typeface="+mn-ea"/>
               </a:rPr>
-              <a:t>&lt;number&gt;</a:t>
+              <a:t>1</a:t>
             </a:fld>
             <a:endParaRPr lang="en-US" sz="1200" b="0" u="none" strike="noStrike">
               <a:solidFill>
@@ -6489,7 +6489,7 @@
         <p:spPr>
           <a:xfrm>
             <a:off x="685800" y="1143000"/>
-            <a:ext cx="5485680" cy="3085560"/>
+            <a:ext cx="5485320" cy="3085200"/>
           </a:xfrm>
           <a:prstGeom prst="rect">
             <a:avLst/>
@@ -6512,7 +6512,7 @@
         <p:spPr>
           <a:xfrm>
             <a:off x="685800" y="4400640"/>
-            <a:ext cx="5485680" cy="3599640"/>
+            <a:ext cx="5485320" cy="3599280"/>
           </a:xfrm>
           <a:prstGeom prst="rect">
             <a:avLst/>
@@ -6554,7 +6554,7 @@
         <p:spPr>
           <a:xfrm>
             <a:off x="3884760" y="8685360"/>
-            <a:ext cx="2971080" cy="457920"/>
+            <a:ext cx="2970720" cy="457560"/>
           </a:xfrm>
           <a:prstGeom prst="rect">
             <a:avLst/>
@@ -6598,7 +6598,7 @@
                 <a:tab pos="0" algn="l"/>
               </a:tabLst>
             </a:pPr>
-            <a:fld id="{8D475BFD-3C23-4857-9D05-FD446FC0358E}" type="slidenum">
+            <a:fld id="{7A838040-8879-42C0-8B07-4AD82B8C014E}" type="slidenum">
               <a:rPr lang="en-US" sz="1200" b="0" u="none" strike="noStrike">
                 <a:solidFill>
                   <a:schemeClr val="dk1"/>
@@ -6608,7 +6608,7 @@
                 <a:latin typeface="+mn-lt"/>
                 <a:ea typeface="+mn-ea"/>
               </a:rPr>
-              <a:t>&lt;number&gt;</a:t>
+              <a:t>1</a:t>
             </a:fld>
             <a:endParaRPr lang="en-US" sz="1200" b="0" u="none" strike="noStrike">
               <a:solidFill>
@@ -6656,7 +6656,7 @@
         <p:spPr>
           <a:xfrm>
             <a:off x="685800" y="1143000"/>
-            <a:ext cx="5485680" cy="3085560"/>
+            <a:ext cx="5485320" cy="3085200"/>
           </a:xfrm>
           <a:prstGeom prst="rect">
             <a:avLst/>
@@ -6679,7 +6679,7 @@
         <p:spPr>
           <a:xfrm>
             <a:off x="685800" y="4400640"/>
-            <a:ext cx="5485680" cy="3599640"/>
+            <a:ext cx="5485320" cy="3599280"/>
           </a:xfrm>
           <a:prstGeom prst="rect">
             <a:avLst/>
@@ -6721,7 +6721,7 @@
         <p:spPr>
           <a:xfrm>
             <a:off x="3884760" y="8685360"/>
-            <a:ext cx="2971080" cy="457920"/>
+            <a:ext cx="2970720" cy="457560"/>
           </a:xfrm>
           <a:prstGeom prst="rect">
             <a:avLst/>
@@ -6765,7 +6765,7 @@
                 <a:tab pos="0" algn="l"/>
               </a:tabLst>
             </a:pPr>
-            <a:fld id="{A63A7CFE-961C-4EF7-8AA5-BA6D0A857109}" type="slidenum">
+            <a:fld id="{CC1EA4FF-C15A-4D48-94FF-65A7AC774325}" type="slidenum">
               <a:rPr lang="en-US" sz="1200" b="0" u="none" strike="noStrike">
                 <a:solidFill>
                   <a:schemeClr val="dk1"/>
@@ -6775,7 +6775,7 @@
                 <a:latin typeface="+mn-lt"/>
                 <a:ea typeface="+mn-ea"/>
               </a:rPr>
-              <a:t>&lt;number&gt;</a:t>
+              <a:t>1</a:t>
             </a:fld>
             <a:endParaRPr lang="en-US" sz="1200" b="0" u="none" strike="noStrike">
               <a:solidFill>
@@ -6823,7 +6823,7 @@
         <p:spPr>
           <a:xfrm>
             <a:off x="685800" y="1143000"/>
-            <a:ext cx="5485680" cy="3085560"/>
+            <a:ext cx="5485320" cy="3085200"/>
           </a:xfrm>
           <a:prstGeom prst="rect">
             <a:avLst/>
@@ -6846,7 +6846,7 @@
         <p:spPr>
           <a:xfrm>
             <a:off x="685800" y="4400640"/>
-            <a:ext cx="5485680" cy="3599640"/>
+            <a:ext cx="5485320" cy="3599280"/>
           </a:xfrm>
           <a:prstGeom prst="rect">
             <a:avLst/>
@@ -6888,7 +6888,7 @@
         <p:spPr>
           <a:xfrm>
             <a:off x="3884760" y="8685360"/>
-            <a:ext cx="2971080" cy="457920"/>
+            <a:ext cx="2970720" cy="457560"/>
           </a:xfrm>
           <a:prstGeom prst="rect">
             <a:avLst/>
@@ -6932,7 +6932,7 @@
                 <a:tab pos="0" algn="l"/>
               </a:tabLst>
             </a:pPr>
-            <a:fld id="{8AE03283-0572-4539-BC34-E0C305A04CA3}" type="slidenum">
+            <a:fld id="{EA2A8941-2FEA-4D35-AB85-93CE6C0C10BA}" type="slidenum">
               <a:rPr lang="en-US" sz="1200" b="0" u="none" strike="noStrike">
                 <a:solidFill>
                   <a:schemeClr val="dk1"/>
@@ -6942,7 +6942,7 @@
                 <a:latin typeface="+mn-lt"/>
                 <a:ea typeface="+mn-ea"/>
               </a:rPr>
-              <a:t>&lt;number&gt;</a:t>
+              <a:t>1</a:t>
             </a:fld>
             <a:endParaRPr lang="en-US" sz="1200" b="0" u="none" strike="noStrike">
               <a:solidFill>
@@ -6990,7 +6990,7 @@
         <p:spPr>
           <a:xfrm>
             <a:off x="685800" y="1143000"/>
-            <a:ext cx="5485680" cy="3085560"/>
+            <a:ext cx="5485320" cy="3085200"/>
           </a:xfrm>
           <a:prstGeom prst="rect">
             <a:avLst/>
@@ -7013,7 +7013,7 @@
         <p:spPr>
           <a:xfrm>
             <a:off x="685800" y="4400640"/>
-            <a:ext cx="5485680" cy="3599640"/>
+            <a:ext cx="5485320" cy="3599280"/>
           </a:xfrm>
           <a:prstGeom prst="rect">
             <a:avLst/>
@@ -7055,7 +7055,7 @@
         <p:spPr>
           <a:xfrm>
             <a:off x="3884760" y="8685360"/>
-            <a:ext cx="2971080" cy="457920"/>
+            <a:ext cx="2970720" cy="457560"/>
           </a:xfrm>
           <a:prstGeom prst="rect">
             <a:avLst/>
@@ -7099,7 +7099,7 @@
                 <a:tab pos="0" algn="l"/>
               </a:tabLst>
             </a:pPr>
-            <a:fld id="{059F3454-54ED-4885-9D3C-565C4D966F7B}" type="slidenum">
+            <a:fld id="{8A3AAA24-3F3E-48A4-9344-FFACBA2C1702}" type="slidenum">
               <a:rPr lang="en-US" sz="1200" b="0" u="none" strike="noStrike">
                 <a:solidFill>
                   <a:schemeClr val="dk1"/>
@@ -7109,7 +7109,7 @@
                 <a:latin typeface="+mn-lt"/>
                 <a:ea typeface="+mn-ea"/>
               </a:rPr>
-              <a:t>&lt;number&gt;</a:t>
+              <a:t>1</a:t>
             </a:fld>
             <a:endParaRPr lang="en-US" sz="1200" b="0" u="none" strike="noStrike">
               <a:solidFill>
@@ -7157,7 +7157,7 @@
         <p:spPr>
           <a:xfrm>
             <a:off x="685800" y="1143000"/>
-            <a:ext cx="5485680" cy="3085560"/>
+            <a:ext cx="5485320" cy="3085200"/>
           </a:xfrm>
           <a:prstGeom prst="rect">
             <a:avLst/>
@@ -7180,7 +7180,7 @@
         <p:spPr>
           <a:xfrm>
             <a:off x="685800" y="4400640"/>
-            <a:ext cx="5485680" cy="3599640"/>
+            <a:ext cx="5485320" cy="3599280"/>
           </a:xfrm>
           <a:prstGeom prst="rect">
             <a:avLst/>
@@ -7222,7 +7222,7 @@
         <p:spPr>
           <a:xfrm>
             <a:off x="3884760" y="8685360"/>
-            <a:ext cx="2971080" cy="457920"/>
+            <a:ext cx="2970720" cy="457560"/>
           </a:xfrm>
           <a:prstGeom prst="rect">
             <a:avLst/>
@@ -7266,7 +7266,7 @@
                 <a:tab pos="0" algn="l"/>
               </a:tabLst>
             </a:pPr>
-            <a:fld id="{A52AF99D-11F5-49CB-990E-A2AD93156D6E}" type="slidenum">
+            <a:fld id="{C8F46390-9D4D-4394-8CEB-CB8FEB03872C}" type="slidenum">
               <a:rPr lang="en-US" sz="1200" b="0" u="none" strike="noStrike">
                 <a:solidFill>
                   <a:schemeClr val="dk1"/>
@@ -7276,7 +7276,7 @@
                 <a:latin typeface="+mn-lt"/>
                 <a:ea typeface="+mn-ea"/>
               </a:rPr>
-              <a:t>&lt;number&gt;</a:t>
+              <a:t>1</a:t>
             </a:fld>
             <a:endParaRPr lang="en-US" sz="1200" b="0" u="none" strike="noStrike">
               <a:solidFill>
@@ -7324,7 +7324,7 @@
         <p:spPr>
           <a:xfrm>
             <a:off x="685800" y="1143000"/>
-            <a:ext cx="5485680" cy="3085560"/>
+            <a:ext cx="5485320" cy="3085200"/>
           </a:xfrm>
           <a:prstGeom prst="rect">
             <a:avLst/>
@@ -7347,7 +7347,7 @@
         <p:spPr>
           <a:xfrm>
             <a:off x="685800" y="4400640"/>
-            <a:ext cx="5485680" cy="3599640"/>
+            <a:ext cx="5485320" cy="3599280"/>
           </a:xfrm>
           <a:prstGeom prst="rect">
             <a:avLst/>
@@ -7389,7 +7389,7 @@
         <p:spPr>
           <a:xfrm>
             <a:off x="3884760" y="8685360"/>
-            <a:ext cx="2971080" cy="457920"/>
+            <a:ext cx="2970720" cy="457560"/>
           </a:xfrm>
           <a:prstGeom prst="rect">
             <a:avLst/>
@@ -7433,7 +7433,7 @@
                 <a:tab pos="0" algn="l"/>
               </a:tabLst>
             </a:pPr>
-            <a:fld id="{B07CD695-D2FA-4111-8043-35C435E346DB}" type="slidenum">
+            <a:fld id="{49844F37-3E00-4012-8F47-6406100A7609}" type="slidenum">
               <a:rPr lang="en-US" sz="1200" b="0" u="none" strike="noStrike">
                 <a:solidFill>
                   <a:schemeClr val="dk1"/>
@@ -7443,7 +7443,7 @@
                 <a:latin typeface="+mn-lt"/>
                 <a:ea typeface="+mn-ea"/>
               </a:rPr>
-              <a:t>&lt;number&gt;</a:t>
+              <a:t>1</a:t>
             </a:fld>
             <a:endParaRPr lang="en-US" sz="1200" b="0" u="none" strike="noStrike">
               <a:solidFill>
@@ -7491,7 +7491,7 @@
         <p:spPr>
           <a:xfrm>
             <a:off x="685800" y="1143000"/>
-            <a:ext cx="5485680" cy="3085560"/>
+            <a:ext cx="5485320" cy="3085200"/>
           </a:xfrm>
           <a:prstGeom prst="rect">
             <a:avLst/>
@@ -7514,7 +7514,7 @@
         <p:spPr>
           <a:xfrm>
             <a:off x="685800" y="4400640"/>
-            <a:ext cx="5485680" cy="3599640"/>
+            <a:ext cx="5485320" cy="3599280"/>
           </a:xfrm>
           <a:prstGeom prst="rect">
             <a:avLst/>
@@ -7556,7 +7556,7 @@
         <p:spPr>
           <a:xfrm>
             <a:off x="3884760" y="8685360"/>
-            <a:ext cx="2971080" cy="457920"/>
+            <a:ext cx="2970720" cy="457560"/>
           </a:xfrm>
           <a:prstGeom prst="rect">
             <a:avLst/>
@@ -7600,7 +7600,7 @@
                 <a:tab pos="0" algn="l"/>
               </a:tabLst>
             </a:pPr>
-            <a:fld id="{B33F13F8-7B37-43DA-914E-B76444CA258D}" type="slidenum">
+            <a:fld id="{F88CC879-8BE6-4BAF-A8AC-18057751BF28}" type="slidenum">
               <a:rPr lang="en-US" sz="1200" b="0" u="none" strike="noStrike">
                 <a:solidFill>
                   <a:schemeClr val="dk1"/>
@@ -7658,7 +7658,7 @@
         <p:spPr>
           <a:xfrm>
             <a:off x="685800" y="1143000"/>
-            <a:ext cx="5486040" cy="3085920"/>
+            <a:ext cx="5485680" cy="3085560"/>
           </a:xfrm>
           <a:prstGeom prst="rect">
             <a:avLst/>
@@ -7681,7 +7681,7 @@
         <p:spPr>
           <a:xfrm>
             <a:off x="685800" y="4400640"/>
-            <a:ext cx="5485680" cy="3599640"/>
+            <a:ext cx="5485320" cy="3599280"/>
           </a:xfrm>
           <a:prstGeom prst="rect">
             <a:avLst/>
@@ -7723,7 +7723,7 @@
         <p:spPr>
           <a:xfrm>
             <a:off x="3884760" y="8685360"/>
-            <a:ext cx="2971080" cy="457920"/>
+            <a:ext cx="2970720" cy="457560"/>
           </a:xfrm>
           <a:prstGeom prst="rect">
             <a:avLst/>
@@ -7767,7 +7767,7 @@
                 <a:tab pos="0" algn="l"/>
               </a:tabLst>
             </a:pPr>
-            <a:fld id="{5F80B07B-3C8E-48E8-BBEA-A3ECA589DF34}" type="slidenum">
+            <a:fld id="{85F22AC2-1412-4EA8-A39B-CE54751E4D9D}" type="slidenum">
               <a:rPr lang="en-US" sz="1200" b="0" u="none" strike="noStrike">
                 <a:solidFill>
                   <a:schemeClr val="dk1"/>
@@ -7777,7 +7777,7 @@
                 <a:latin typeface="+mn-lt"/>
                 <a:ea typeface="+mn-ea"/>
               </a:rPr>
-              <a:t>&lt;number&gt;</a:t>
+              <a:t>1</a:t>
             </a:fld>
             <a:endParaRPr lang="en-US" sz="1200" b="0" u="none" strike="noStrike">
               <a:solidFill>
@@ -7825,7 +7825,7 @@
         <p:spPr>
           <a:xfrm>
             <a:off x="685800" y="1143000"/>
-            <a:ext cx="5486040" cy="3085920"/>
+            <a:ext cx="5485680" cy="3085560"/>
           </a:xfrm>
           <a:prstGeom prst="rect">
             <a:avLst/>
@@ -7848,7 +7848,7 @@
         <p:spPr>
           <a:xfrm>
             <a:off x="685800" y="4400640"/>
-            <a:ext cx="5485680" cy="3599640"/>
+            <a:ext cx="5485320" cy="3599280"/>
           </a:xfrm>
           <a:prstGeom prst="rect">
             <a:avLst/>
@@ -7890,7 +7890,7 @@
         <p:spPr>
           <a:xfrm>
             <a:off x="3884760" y="8685360"/>
-            <a:ext cx="2971080" cy="457920"/>
+            <a:ext cx="2970720" cy="457560"/>
           </a:xfrm>
           <a:prstGeom prst="rect">
             <a:avLst/>
@@ -7934,7 +7934,7 @@
                 <a:tab pos="0" algn="l"/>
               </a:tabLst>
             </a:pPr>
-            <a:fld id="{4791EBA3-6BE0-4496-9039-9FD687EDE672}" type="slidenum">
+            <a:fld id="{38CFC66B-F015-460A-A924-4CDAC16CED33}" type="slidenum">
               <a:rPr lang="en-US" sz="1200" b="0" u="none" strike="noStrike">
                 <a:solidFill>
                   <a:schemeClr val="dk1"/>
@@ -7944,7 +7944,7 @@
                 <a:latin typeface="+mn-lt"/>
                 <a:ea typeface="+mn-ea"/>
               </a:rPr>
-              <a:t>&lt;number&gt;</a:t>
+              <a:t>1</a:t>
             </a:fld>
             <a:endParaRPr lang="en-US" sz="1200" b="0" u="none" strike="noStrike">
               <a:solidFill>
@@ -7992,7 +7992,7 @@
         <p:spPr>
           <a:xfrm>
             <a:off x="685800" y="1143000"/>
-            <a:ext cx="5486040" cy="3085920"/>
+            <a:ext cx="5485680" cy="3085560"/>
           </a:xfrm>
           <a:prstGeom prst="rect">
             <a:avLst/>
@@ -8015,7 +8015,7 @@
         <p:spPr>
           <a:xfrm>
             <a:off x="685800" y="4400640"/>
-            <a:ext cx="5485680" cy="3599640"/>
+            <a:ext cx="5485320" cy="3599280"/>
           </a:xfrm>
           <a:prstGeom prst="rect">
             <a:avLst/>
@@ -8057,7 +8057,7 @@
         <p:spPr>
           <a:xfrm>
             <a:off x="3884760" y="8685360"/>
-            <a:ext cx="2971080" cy="457920"/>
+            <a:ext cx="2970720" cy="457560"/>
           </a:xfrm>
           <a:prstGeom prst="rect">
             <a:avLst/>
@@ -8101,7 +8101,7 @@
                 <a:tab pos="0" algn="l"/>
               </a:tabLst>
             </a:pPr>
-            <a:fld id="{B7F087C5-2B22-45CA-A433-FF37BC66C316}" type="slidenum">
+            <a:fld id="{E049F079-5503-404C-8077-745382D2DC3F}" type="slidenum">
               <a:rPr lang="en-US" sz="1200" b="0" u="none" strike="noStrike">
                 <a:solidFill>
                   <a:schemeClr val="dk1"/>
@@ -8111,7 +8111,7 @@
                 <a:latin typeface="+mn-lt"/>
                 <a:ea typeface="+mn-ea"/>
               </a:rPr>
-              <a:t>&lt;number&gt;</a:t>
+              <a:t>1</a:t>
             </a:fld>
             <a:endParaRPr lang="en-US" sz="1200" b="0" u="none" strike="noStrike">
               <a:solidFill>
@@ -8159,7 +8159,7 @@
         <p:spPr>
           <a:xfrm>
             <a:off x="685800" y="1143000"/>
-            <a:ext cx="5486040" cy="3085920"/>
+            <a:ext cx="5485680" cy="3085560"/>
           </a:xfrm>
           <a:prstGeom prst="rect">
             <a:avLst/>
@@ -8182,7 +8182,7 @@
         <p:spPr>
           <a:xfrm>
             <a:off x="685800" y="4400640"/>
-            <a:ext cx="5485680" cy="3599640"/>
+            <a:ext cx="5485320" cy="3599280"/>
           </a:xfrm>
           <a:prstGeom prst="rect">
             <a:avLst/>
@@ -8224,7 +8224,7 @@
         <p:spPr>
           <a:xfrm>
             <a:off x="3884760" y="8685360"/>
-            <a:ext cx="2971080" cy="457920"/>
+            <a:ext cx="2970720" cy="457560"/>
           </a:xfrm>
           <a:prstGeom prst="rect">
             <a:avLst/>
@@ -8268,7 +8268,7 @@
                 <a:tab pos="0" algn="l"/>
               </a:tabLst>
             </a:pPr>
-            <a:fld id="{FF3B726D-89C6-4501-ADA1-5343FBF9A79C}" type="slidenum">
+            <a:fld id="{A14C06C3-6F6A-422D-BD2F-0528C2CBBF4D}" type="slidenum">
               <a:rPr lang="en-US" sz="1200" b="0" u="none" strike="noStrike">
                 <a:solidFill>
                   <a:schemeClr val="dk1"/>
@@ -8278,7 +8278,7 @@
                 <a:latin typeface="+mn-lt"/>
                 <a:ea typeface="+mn-ea"/>
               </a:rPr>
-              <a:t>&lt;number&gt;</a:t>
+              <a:t>1</a:t>
             </a:fld>
             <a:endParaRPr lang="en-US" sz="1200" b="0" u="none" strike="noStrike">
               <a:solidFill>
@@ -8326,7 +8326,7 @@
         <p:spPr>
           <a:xfrm>
             <a:off x="685800" y="1143000"/>
-            <a:ext cx="5486040" cy="3085920"/>
+            <a:ext cx="5485680" cy="3085560"/>
           </a:xfrm>
           <a:prstGeom prst="rect">
             <a:avLst/>
@@ -8349,7 +8349,7 @@
         <p:spPr>
           <a:xfrm>
             <a:off x="685800" y="4400640"/>
-            <a:ext cx="5485680" cy="3599640"/>
+            <a:ext cx="5485320" cy="3599280"/>
           </a:xfrm>
           <a:prstGeom prst="rect">
             <a:avLst/>
@@ -8391,7 +8391,7 @@
         <p:spPr>
           <a:xfrm>
             <a:off x="3884760" y="8685360"/>
-            <a:ext cx="2971080" cy="457920"/>
+            <a:ext cx="2970720" cy="457560"/>
           </a:xfrm>
           <a:prstGeom prst="rect">
             <a:avLst/>
@@ -8435,7 +8435,7 @@
                 <a:tab pos="0" algn="l"/>
               </a:tabLst>
             </a:pPr>
-            <a:fld id="{B8BDD0D9-0599-4BA5-8B82-A27BE80513EB}" type="slidenum">
+            <a:fld id="{2515951E-AD77-4280-9C70-1E6CFEA509F8}" type="slidenum">
               <a:rPr lang="en-US" sz="1200" b="0" u="none" strike="noStrike">
                 <a:solidFill>
                   <a:schemeClr val="dk1"/>
@@ -8445,7 +8445,7 @@
                 <a:latin typeface="+mn-lt"/>
                 <a:ea typeface="+mn-ea"/>
               </a:rPr>
-              <a:t>&lt;number&gt;</a:t>
+              <a:t>1</a:t>
             </a:fld>
             <a:endParaRPr lang="en-US" sz="1200" b="0" u="none" strike="noStrike">
               <a:solidFill>
@@ -8771,7 +8771,7 @@
             </a:lvl7pPr>
           </a:lstStyle>
           <a:p>
-            <a:pPr marL="228600" indent="-228600" algn="l" defTabSz="914400">
+            <a:pPr indent="-324000" algn="l" defTabSz="914400">
               <a:lnSpc>
                 <a:spcPct val="90000"/>
               </a:lnSpc>
@@ -9059,7 +9059,7 @@
         <p:spPr>
           <a:xfrm>
             <a:off x="-2286000" y="3657600"/>
-            <a:ext cx="6400080" cy="6400080"/>
+            <a:ext cx="6399720" cy="6399720"/>
           </a:xfrm>
           <a:prstGeom prst="ellipse">
             <a:avLst/>
@@ -9102,7 +9102,7 @@
         <p:spPr>
           <a:xfrm>
             <a:off x="8229600" y="-2743200"/>
-            <a:ext cx="6400080" cy="6400080"/>
+            <a:ext cx="6399720" cy="6399720"/>
           </a:xfrm>
           <a:prstGeom prst="ellipse">
             <a:avLst/>
@@ -9145,7 +9145,7 @@
         <p:spPr>
           <a:xfrm>
             <a:off x="5495400" y="914400"/>
-            <a:ext cx="1188000" cy="1188000"/>
+            <a:ext cx="1187640" cy="1187640"/>
           </a:xfrm>
           <a:prstGeom prst="ellipse">
             <a:avLst/>
@@ -9192,7 +9192,7 @@
         <p:spPr>
           <a:xfrm>
             <a:off x="5678280" y="1097280"/>
-            <a:ext cx="831240" cy="831240"/>
+            <a:ext cx="830880" cy="830880"/>
           </a:xfrm>
           <a:prstGeom prst="rect">
             <a:avLst/>
@@ -9212,7 +9212,7 @@
         <p:spPr>
           <a:xfrm>
             <a:off x="914400" y="2377440"/>
-            <a:ext cx="10359360" cy="1005120"/>
+            <a:ext cx="10359000" cy="1004760"/>
           </a:xfrm>
           <a:prstGeom prst="rect">
             <a:avLst/>
@@ -9273,7 +9273,7 @@
         <p:spPr>
           <a:xfrm>
             <a:off x="914400" y="3383280"/>
-            <a:ext cx="10359360" cy="547920"/>
+            <a:ext cx="10359000" cy="547560"/>
           </a:xfrm>
           <a:prstGeom prst="rect">
             <a:avLst/>
@@ -9334,7 +9334,7 @@
         <p:spPr>
           <a:xfrm>
             <a:off x="914400" y="3977640"/>
-            <a:ext cx="10359360" cy="456480"/>
+            <a:ext cx="10359000" cy="456120"/>
           </a:xfrm>
           <a:prstGeom prst="rect">
             <a:avLst/>
@@ -9395,7 +9395,7 @@
         <p:spPr>
           <a:xfrm>
             <a:off x="11521440" y="6446520"/>
-            <a:ext cx="456480" cy="273600"/>
+            <a:ext cx="456120" cy="273240"/>
           </a:xfrm>
           <a:prstGeom prst="rect">
             <a:avLst/>
@@ -9493,7 +9493,7 @@
         <p:spPr>
           <a:xfrm>
             <a:off x="-1828800" y="5029200"/>
-            <a:ext cx="3656880" cy="3656880"/>
+            <a:ext cx="3656520" cy="3656520"/>
           </a:xfrm>
           <a:prstGeom prst="ellipse">
             <a:avLst/>
@@ -9536,7 +9536,7 @@
         <p:spPr>
           <a:xfrm>
             <a:off x="457200" y="457200"/>
-            <a:ext cx="639360" cy="639360"/>
+            <a:ext cx="639000" cy="639000"/>
           </a:xfrm>
           <a:prstGeom prst="ellipse">
             <a:avLst/>
@@ -9583,7 +9583,7 @@
         <p:spPr>
           <a:xfrm>
             <a:off x="548640" y="548640"/>
-            <a:ext cx="447480" cy="447480"/>
+            <a:ext cx="447120" cy="447120"/>
           </a:xfrm>
           <a:prstGeom prst="rect">
             <a:avLst/>
@@ -9603,7 +9603,7 @@
         <p:spPr>
           <a:xfrm>
             <a:off x="1280160" y="457200"/>
-            <a:ext cx="10423440" cy="639360"/>
+            <a:ext cx="10423080" cy="639000"/>
           </a:xfrm>
           <a:prstGeom prst="rect">
             <a:avLst/>
@@ -9664,7 +9664,7 @@
         <p:spPr>
           <a:xfrm>
             <a:off x="457200" y="1600200"/>
-            <a:ext cx="11273760" cy="4479840"/>
+            <a:ext cx="11273400" cy="4479480"/>
           </a:xfrm>
           <a:prstGeom prst="roundRect">
             <a:avLst>
@@ -9709,7 +9709,7 @@
         <p:spPr>
           <a:xfrm>
             <a:off x="822960" y="1828800"/>
-            <a:ext cx="10514880" cy="456480"/>
+            <a:ext cx="10514520" cy="456120"/>
           </a:xfrm>
           <a:prstGeom prst="rect">
             <a:avLst/>
@@ -9770,7 +9770,7 @@
         <p:spPr>
           <a:xfrm>
             <a:off x="822960" y="2423160"/>
-            <a:ext cx="383400" cy="383400"/>
+            <a:ext cx="383040" cy="383040"/>
           </a:xfrm>
           <a:prstGeom prst="ellipse">
             <a:avLst/>
@@ -9813,7 +9813,7 @@
         <p:spPr>
           <a:xfrm>
             <a:off x="822960" y="2423160"/>
-            <a:ext cx="383400" cy="383400"/>
+            <a:ext cx="383040" cy="383040"/>
           </a:xfrm>
           <a:prstGeom prst="rect">
             <a:avLst/>
@@ -9874,7 +9874,7 @@
         <p:spPr>
           <a:xfrm>
             <a:off x="1435680" y="2423160"/>
-            <a:ext cx="9582120" cy="383400"/>
+            <a:ext cx="9581760" cy="383040"/>
           </a:xfrm>
           <a:prstGeom prst="rect">
             <a:avLst/>
@@ -9935,7 +9935,7 @@
         <p:spPr>
           <a:xfrm>
             <a:off x="822960" y="3300840"/>
-            <a:ext cx="383400" cy="383400"/>
+            <a:ext cx="383040" cy="383040"/>
           </a:xfrm>
           <a:prstGeom prst="ellipse">
             <a:avLst/>
@@ -9978,7 +9978,7 @@
         <p:spPr>
           <a:xfrm>
             <a:off x="822960" y="3300840"/>
-            <a:ext cx="383400" cy="383400"/>
+            <a:ext cx="383040" cy="383040"/>
           </a:xfrm>
           <a:prstGeom prst="rect">
             <a:avLst/>
@@ -10039,7 +10039,7 @@
         <p:spPr>
           <a:xfrm>
             <a:off x="1435680" y="3300840"/>
-            <a:ext cx="9582120" cy="383400"/>
+            <a:ext cx="9581760" cy="383040"/>
           </a:xfrm>
           <a:prstGeom prst="rect">
             <a:avLst/>
@@ -10100,7 +10100,7 @@
         <p:spPr>
           <a:xfrm>
             <a:off x="822960" y="4178880"/>
-            <a:ext cx="383400" cy="383400"/>
+            <a:ext cx="383040" cy="383040"/>
           </a:xfrm>
           <a:prstGeom prst="ellipse">
             <a:avLst/>
@@ -10143,7 +10143,7 @@
         <p:spPr>
           <a:xfrm>
             <a:off x="822960" y="4178880"/>
-            <a:ext cx="383400" cy="383400"/>
+            <a:ext cx="383040" cy="383040"/>
           </a:xfrm>
           <a:prstGeom prst="rect">
             <a:avLst/>
@@ -10204,7 +10204,7 @@
         <p:spPr>
           <a:xfrm>
             <a:off x="1435680" y="4178880"/>
-            <a:ext cx="9582120" cy="383400"/>
+            <a:ext cx="9581760" cy="383040"/>
           </a:xfrm>
           <a:prstGeom prst="rect">
             <a:avLst/>
@@ -10265,7 +10265,7 @@
         <p:spPr>
           <a:xfrm>
             <a:off x="822960" y="5056560"/>
-            <a:ext cx="383400" cy="383400"/>
+            <a:ext cx="383040" cy="383040"/>
           </a:xfrm>
           <a:prstGeom prst="ellipse">
             <a:avLst/>
@@ -10308,7 +10308,7 @@
         <p:spPr>
           <a:xfrm>
             <a:off x="822960" y="5056560"/>
-            <a:ext cx="383400" cy="383400"/>
+            <a:ext cx="383040" cy="383040"/>
           </a:xfrm>
           <a:prstGeom prst="rect">
             <a:avLst/>
@@ -10369,7 +10369,7 @@
         <p:spPr>
           <a:xfrm>
             <a:off x="1435680" y="5056560"/>
-            <a:ext cx="9582120" cy="383400"/>
+            <a:ext cx="9581760" cy="383040"/>
           </a:xfrm>
           <a:prstGeom prst="rect">
             <a:avLst/>
@@ -10430,7 +10430,7 @@
         <p:spPr>
           <a:xfrm>
             <a:off x="457200" y="6446520"/>
-            <a:ext cx="7314480" cy="273600"/>
+            <a:ext cx="7314120" cy="273240"/>
           </a:xfrm>
           <a:prstGeom prst="rect">
             <a:avLst/>
@@ -10491,7 +10491,7 @@
         <p:spPr>
           <a:xfrm>
             <a:off x="11521440" y="6446520"/>
-            <a:ext cx="456480" cy="273600"/>
+            <a:ext cx="456120" cy="273240"/>
           </a:xfrm>
           <a:prstGeom prst="rect">
             <a:avLst/>
@@ -10589,7 +10589,7 @@
         <p:spPr>
           <a:xfrm>
             <a:off x="-1828800" y="4114800"/>
-            <a:ext cx="5485680" cy="5485680"/>
+            <a:ext cx="5485320" cy="5485320"/>
           </a:xfrm>
           <a:prstGeom prst="ellipse">
             <a:avLst/>
@@ -10632,7 +10632,7 @@
         <p:spPr>
           <a:xfrm>
             <a:off x="9601200" y="-2286000"/>
-            <a:ext cx="5485680" cy="5485680"/>
+            <a:ext cx="5485320" cy="5485320"/>
           </a:xfrm>
           <a:prstGeom prst="ellipse">
             <a:avLst/>
@@ -10675,7 +10675,7 @@
         <p:spPr>
           <a:xfrm>
             <a:off x="5596200" y="731520"/>
-            <a:ext cx="1005120" cy="1005120"/>
+            <a:ext cx="1004760" cy="1004760"/>
           </a:xfrm>
           <a:prstGeom prst="ellipse">
             <a:avLst/>
@@ -10722,7 +10722,7 @@
         <p:spPr>
           <a:xfrm>
             <a:off x="5742360" y="877680"/>
-            <a:ext cx="703440" cy="703440"/>
+            <a:ext cx="703080" cy="703080"/>
           </a:xfrm>
           <a:prstGeom prst="rect">
             <a:avLst/>
@@ -10742,7 +10742,7 @@
         <p:spPr>
           <a:xfrm>
             <a:off x="914400" y="1965960"/>
-            <a:ext cx="10359360" cy="365040"/>
+            <a:ext cx="10359000" cy="364680"/>
           </a:xfrm>
           <a:prstGeom prst="rect">
             <a:avLst/>
@@ -10803,7 +10803,7 @@
         <p:spPr>
           <a:xfrm>
             <a:off x="914400" y="2377440"/>
-            <a:ext cx="10359360" cy="2010960"/>
+            <a:ext cx="10359000" cy="2010600"/>
           </a:xfrm>
           <a:prstGeom prst="rect">
             <a:avLst/>
@@ -10864,7 +10864,7 @@
         <p:spPr>
           <a:xfrm>
             <a:off x="1463040" y="4572000"/>
-            <a:ext cx="9262080" cy="1096560"/>
+            <a:ext cx="9261720" cy="1096200"/>
           </a:xfrm>
           <a:prstGeom prst="rect">
             <a:avLst/>
@@ -10925,7 +10925,7 @@
         <p:spPr>
           <a:xfrm>
             <a:off x="11521440" y="6446520"/>
-            <a:ext cx="456480" cy="273600"/>
+            <a:ext cx="456120" cy="273240"/>
           </a:xfrm>
           <a:prstGeom prst="rect">
             <a:avLst/>
@@ -11023,7 +11023,7 @@
         <p:spPr>
           <a:xfrm>
             <a:off x="10515600" y="5669280"/>
-            <a:ext cx="3199680" cy="3199680"/>
+            <a:ext cx="3199320" cy="3199320"/>
           </a:xfrm>
           <a:prstGeom prst="roundRect">
             <a:avLst>
@@ -11068,7 +11068,7 @@
         <p:spPr>
           <a:xfrm>
             <a:off x="457200" y="457200"/>
-            <a:ext cx="639360" cy="639360"/>
+            <a:ext cx="639000" cy="639000"/>
           </a:xfrm>
           <a:prstGeom prst="ellipse">
             <a:avLst/>
@@ -11115,7 +11115,7 @@
         <p:spPr>
           <a:xfrm>
             <a:off x="548640" y="548640"/>
-            <a:ext cx="447480" cy="447480"/>
+            <a:ext cx="447120" cy="447120"/>
           </a:xfrm>
           <a:prstGeom prst="rect">
             <a:avLst/>
@@ -11135,7 +11135,7 @@
         <p:spPr>
           <a:xfrm>
             <a:off x="1280160" y="457200"/>
-            <a:ext cx="10423440" cy="639360"/>
+            <a:ext cx="10423080" cy="639000"/>
           </a:xfrm>
           <a:prstGeom prst="rect">
             <a:avLst/>
@@ -11196,7 +11196,7 @@
         <p:spPr>
           <a:xfrm>
             <a:off x="457200" y="1554480"/>
-            <a:ext cx="3656880" cy="4662720"/>
+            <a:ext cx="3656520" cy="4662360"/>
           </a:xfrm>
           <a:prstGeom prst="roundRect">
             <a:avLst>
@@ -11241,7 +11241,7 @@
         <p:spPr>
           <a:xfrm>
             <a:off x="1508760" y="2194560"/>
-            <a:ext cx="1553760" cy="1553760"/>
+            <a:ext cx="1553400" cy="1553400"/>
           </a:xfrm>
           <a:prstGeom prst="ellipse">
             <a:avLst/>
@@ -11288,7 +11288,7 @@
         <p:spPr>
           <a:xfrm>
             <a:off x="1746360" y="2423160"/>
-            <a:ext cx="1087560" cy="1087560"/>
+            <a:ext cx="1087200" cy="1087200"/>
           </a:xfrm>
           <a:prstGeom prst="rect">
             <a:avLst/>
@@ -11308,7 +11308,7 @@
         <p:spPr>
           <a:xfrm>
             <a:off x="640080" y="3977640"/>
-            <a:ext cx="3291120" cy="1736640"/>
+            <a:ext cx="3290760" cy="1736280"/>
           </a:xfrm>
           <a:prstGeom prst="rect">
             <a:avLst/>
@@ -11429,7 +11429,7 @@
         <p:spPr>
           <a:xfrm>
             <a:off x="4572000" y="1737360"/>
-            <a:ext cx="7131600" cy="4114080"/>
+            <a:ext cx="7131240" cy="4113720"/>
           </a:xfrm>
           <a:prstGeom prst="rect">
             <a:avLst/>
@@ -11600,7 +11600,7 @@
         <p:spPr>
           <a:xfrm>
             <a:off x="457200" y="6446520"/>
-            <a:ext cx="7314480" cy="273600"/>
+            <a:ext cx="7314120" cy="273240"/>
           </a:xfrm>
           <a:prstGeom prst="rect">
             <a:avLst/>
@@ -11661,7 +11661,7 @@
         <p:spPr>
           <a:xfrm>
             <a:off x="11521440" y="6446520"/>
-            <a:ext cx="456480" cy="273600"/>
+            <a:ext cx="456120" cy="273240"/>
           </a:xfrm>
           <a:prstGeom prst="rect">
             <a:avLst/>
@@ -11759,7 +11759,7 @@
         <p:spPr>
           <a:xfrm>
             <a:off x="457200" y="457200"/>
-            <a:ext cx="639360" cy="639360"/>
+            <a:ext cx="639000" cy="639000"/>
           </a:xfrm>
           <a:prstGeom prst="ellipse">
             <a:avLst/>
@@ -11806,7 +11806,7 @@
         <p:spPr>
           <a:xfrm>
             <a:off x="548640" y="548640"/>
-            <a:ext cx="447480" cy="447480"/>
+            <a:ext cx="447120" cy="447120"/>
           </a:xfrm>
           <a:prstGeom prst="rect">
             <a:avLst/>
@@ -11826,7 +11826,7 @@
         <p:spPr>
           <a:xfrm>
             <a:off x="1280160" y="457200"/>
-            <a:ext cx="10423440" cy="639360"/>
+            <a:ext cx="10423080" cy="639000"/>
           </a:xfrm>
           <a:prstGeom prst="rect">
             <a:avLst/>
@@ -11887,7 +11887,7 @@
         <p:spPr>
           <a:xfrm>
             <a:off x="457200" y="1645920"/>
-            <a:ext cx="5348520" cy="4479840"/>
+            <a:ext cx="5348160" cy="4479480"/>
           </a:xfrm>
           <a:prstGeom prst="roundRect">
             <a:avLst>
@@ -11932,7 +11932,7 @@
         <p:spPr>
           <a:xfrm>
             <a:off x="731520" y="1874520"/>
-            <a:ext cx="456480" cy="456480"/>
+            <a:ext cx="456120" cy="456120"/>
           </a:xfrm>
           <a:prstGeom prst="ellipse">
             <a:avLst/>
@@ -11979,7 +11979,7 @@
         <p:spPr>
           <a:xfrm>
             <a:off x="804600" y="1938600"/>
-            <a:ext cx="319320" cy="319320"/>
+            <a:ext cx="318960" cy="318960"/>
           </a:xfrm>
           <a:prstGeom prst="rect">
             <a:avLst/>
@@ -11999,7 +11999,7 @@
         <p:spPr>
           <a:xfrm>
             <a:off x="1325880" y="1874520"/>
-            <a:ext cx="4342680" cy="456480"/>
+            <a:ext cx="4342320" cy="456120"/>
           </a:xfrm>
           <a:prstGeom prst="rect">
             <a:avLst/>
@@ -12060,7 +12060,7 @@
         <p:spPr>
           <a:xfrm>
             <a:off x="731520" y="2514600"/>
-            <a:ext cx="4799880" cy="3382560"/>
+            <a:ext cx="4799520" cy="3382200"/>
           </a:xfrm>
           <a:prstGeom prst="rect">
             <a:avLst/>
@@ -12231,7 +12231,7 @@
         <p:spPr>
           <a:xfrm>
             <a:off x="6172200" y="1645920"/>
-            <a:ext cx="5348520" cy="4479840"/>
+            <a:ext cx="5348160" cy="4479480"/>
           </a:xfrm>
           <a:prstGeom prst="roundRect">
             <a:avLst>
@@ -12276,7 +12276,7 @@
         <p:spPr>
           <a:xfrm>
             <a:off x="6446520" y="1874520"/>
-            <a:ext cx="456480" cy="456480"/>
+            <a:ext cx="456120" cy="456120"/>
           </a:xfrm>
           <a:prstGeom prst="ellipse">
             <a:avLst/>
@@ -12323,7 +12323,7 @@
         <p:spPr>
           <a:xfrm>
             <a:off x="6519600" y="1938600"/>
-            <a:ext cx="319320" cy="319320"/>
+            <a:ext cx="318960" cy="318960"/>
           </a:xfrm>
           <a:prstGeom prst="rect">
             <a:avLst/>
@@ -12343,7 +12343,7 @@
         <p:spPr>
           <a:xfrm>
             <a:off x="7040880" y="1874520"/>
-            <a:ext cx="4342680" cy="456480"/>
+            <a:ext cx="4342320" cy="456120"/>
           </a:xfrm>
           <a:prstGeom prst="rect">
             <a:avLst/>
@@ -12404,7 +12404,7 @@
         <p:spPr>
           <a:xfrm>
             <a:off x="6446520" y="2514600"/>
-            <a:ext cx="4799880" cy="3382560"/>
+            <a:ext cx="4799520" cy="3382200"/>
           </a:xfrm>
           <a:prstGeom prst="rect">
             <a:avLst/>
@@ -12575,7 +12575,7 @@
         <p:spPr>
           <a:xfrm>
             <a:off x="457200" y="6446520"/>
-            <a:ext cx="7314480" cy="273600"/>
+            <a:ext cx="7314120" cy="273240"/>
           </a:xfrm>
           <a:prstGeom prst="rect">
             <a:avLst/>
@@ -12636,7 +12636,7 @@
         <p:spPr>
           <a:xfrm>
             <a:off x="11521440" y="6446520"/>
-            <a:ext cx="456480" cy="273600"/>
+            <a:ext cx="456120" cy="273240"/>
           </a:xfrm>
           <a:prstGeom prst="rect">
             <a:avLst/>
@@ -12734,7 +12734,7 @@
         <p:spPr>
           <a:xfrm>
             <a:off x="457200" y="457200"/>
-            <a:ext cx="639360" cy="639360"/>
+            <a:ext cx="639000" cy="639000"/>
           </a:xfrm>
           <a:prstGeom prst="ellipse">
             <a:avLst/>
@@ -12781,7 +12781,7 @@
         <p:spPr>
           <a:xfrm>
             <a:off x="548640" y="548640"/>
-            <a:ext cx="447480" cy="447480"/>
+            <a:ext cx="447120" cy="447120"/>
           </a:xfrm>
           <a:prstGeom prst="rect">
             <a:avLst/>
@@ -12801,7 +12801,7 @@
         <p:spPr>
           <a:xfrm>
             <a:off x="1280160" y="457200"/>
-            <a:ext cx="10423440" cy="639360"/>
+            <a:ext cx="10423080" cy="639000"/>
           </a:xfrm>
           <a:prstGeom prst="rect">
             <a:avLst/>
@@ -12862,7 +12862,7 @@
         <p:spPr>
           <a:xfrm>
             <a:off x="548640" y="1828800"/>
-            <a:ext cx="4754160" cy="4022640"/>
+            <a:ext cx="4753800" cy="4022280"/>
           </a:xfrm>
           <a:prstGeom prst="rect">
             <a:avLst/>
@@ -12998,7 +12998,7 @@
         <p:spPr>
           <a:xfrm>
             <a:off x="5486400" y="1691640"/>
-            <a:ext cx="6217200" cy="4342680"/>
+            <a:ext cx="6216840" cy="4342320"/>
           </a:xfrm>
           <a:prstGeom prst="roundRect">
             <a:avLst>
@@ -13043,7 +13043,7 @@
         <p:spPr>
           <a:xfrm>
             <a:off x="5806440" y="1965960"/>
-            <a:ext cx="5577120" cy="3794040"/>
+            <a:ext cx="5576760" cy="3793680"/>
           </a:xfrm>
           <a:prstGeom prst="rect">
             <a:avLst/>
@@ -13374,7 +13374,7 @@
         <p:spPr>
           <a:xfrm>
             <a:off x="457200" y="6446520"/>
-            <a:ext cx="7314480" cy="273600"/>
+            <a:ext cx="7314120" cy="273240"/>
           </a:xfrm>
           <a:prstGeom prst="rect">
             <a:avLst/>
@@ -13435,7 +13435,7 @@
         <p:spPr>
           <a:xfrm>
             <a:off x="11521440" y="6446520"/>
-            <a:ext cx="456480" cy="273600"/>
+            <a:ext cx="456120" cy="273240"/>
           </a:xfrm>
           <a:prstGeom prst="rect">
             <a:avLst/>
@@ -13533,7 +13533,7 @@
         <p:spPr>
           <a:xfrm>
             <a:off x="457200" y="457200"/>
-            <a:ext cx="639360" cy="639360"/>
+            <a:ext cx="639000" cy="639000"/>
           </a:xfrm>
           <a:prstGeom prst="ellipse">
             <a:avLst/>
@@ -13580,7 +13580,7 @@
         <p:spPr>
           <a:xfrm>
             <a:off x="548640" y="548640"/>
-            <a:ext cx="447480" cy="447480"/>
+            <a:ext cx="447120" cy="447120"/>
           </a:xfrm>
           <a:prstGeom prst="rect">
             <a:avLst/>
@@ -13600,7 +13600,7 @@
         <p:spPr>
           <a:xfrm>
             <a:off x="1280160" y="457200"/>
-            <a:ext cx="10423440" cy="639360"/>
+            <a:ext cx="10423080" cy="639000"/>
           </a:xfrm>
           <a:prstGeom prst="rect">
             <a:avLst/>
@@ -13661,7 +13661,7 @@
         <p:spPr>
           <a:xfrm>
             <a:off x="548640" y="1828800"/>
-            <a:ext cx="4754160" cy="4022640"/>
+            <a:ext cx="4753800" cy="4022280"/>
           </a:xfrm>
           <a:prstGeom prst="rect">
             <a:avLst/>
@@ -13797,7 +13797,7 @@
         <p:spPr>
           <a:xfrm>
             <a:off x="5486400" y="1691640"/>
-            <a:ext cx="6217200" cy="4342680"/>
+            <a:ext cx="6216840" cy="4342320"/>
           </a:xfrm>
           <a:prstGeom prst="roundRect">
             <a:avLst>
@@ -13842,7 +13842,7 @@
         <p:spPr>
           <a:xfrm>
             <a:off x="5806440" y="1965960"/>
-            <a:ext cx="5577120" cy="3794040"/>
+            <a:ext cx="5576760" cy="3793680"/>
           </a:xfrm>
           <a:prstGeom prst="rect">
             <a:avLst/>
@@ -14083,7 +14083,7 @@
         <p:spPr>
           <a:xfrm>
             <a:off x="457200" y="6446520"/>
-            <a:ext cx="7314480" cy="273600"/>
+            <a:ext cx="7314120" cy="273240"/>
           </a:xfrm>
           <a:prstGeom prst="rect">
             <a:avLst/>
@@ -14144,7 +14144,7 @@
         <p:spPr>
           <a:xfrm>
             <a:off x="11521440" y="6446520"/>
-            <a:ext cx="456480" cy="273600"/>
+            <a:ext cx="456120" cy="273240"/>
           </a:xfrm>
           <a:prstGeom prst="rect">
             <a:avLst/>
@@ -14242,7 +14242,7 @@
         <p:spPr>
           <a:xfrm>
             <a:off x="10515600" y="5669280"/>
-            <a:ext cx="3199680" cy="3199680"/>
+            <a:ext cx="3199320" cy="3199320"/>
           </a:xfrm>
           <a:prstGeom prst="roundRect">
             <a:avLst>
@@ -14287,7 +14287,7 @@
         <p:spPr>
           <a:xfrm>
             <a:off x="457200" y="457200"/>
-            <a:ext cx="639360" cy="639360"/>
+            <a:ext cx="639000" cy="639000"/>
           </a:xfrm>
           <a:prstGeom prst="ellipse">
             <a:avLst/>
@@ -14334,7 +14334,7 @@
         <p:spPr>
           <a:xfrm>
             <a:off x="548640" y="548640"/>
-            <a:ext cx="447480" cy="447480"/>
+            <a:ext cx="447120" cy="447120"/>
           </a:xfrm>
           <a:prstGeom prst="rect">
             <a:avLst/>
@@ -14354,7 +14354,7 @@
         <p:spPr>
           <a:xfrm>
             <a:off x="1280160" y="457200"/>
-            <a:ext cx="10423440" cy="639360"/>
+            <a:ext cx="10423080" cy="639000"/>
           </a:xfrm>
           <a:prstGeom prst="rect">
             <a:avLst/>
@@ -14415,7 +14415,7 @@
         <p:spPr>
           <a:xfrm>
             <a:off x="457200" y="1554480"/>
-            <a:ext cx="3656880" cy="4662720"/>
+            <a:ext cx="3656520" cy="4662360"/>
           </a:xfrm>
           <a:prstGeom prst="roundRect">
             <a:avLst>
@@ -14460,7 +14460,7 @@
         <p:spPr>
           <a:xfrm>
             <a:off x="1508760" y="2194560"/>
-            <a:ext cx="1553760" cy="1553760"/>
+            <a:ext cx="1553400" cy="1553400"/>
           </a:xfrm>
           <a:prstGeom prst="ellipse">
             <a:avLst/>
@@ -14507,7 +14507,7 @@
         <p:spPr>
           <a:xfrm>
             <a:off x="1746360" y="2423160"/>
-            <a:ext cx="1087560" cy="1087560"/>
+            <a:ext cx="1087200" cy="1087200"/>
           </a:xfrm>
           <a:prstGeom prst="rect">
             <a:avLst/>
@@ -14527,7 +14527,7 @@
         <p:spPr>
           <a:xfrm>
             <a:off x="640080" y="3977640"/>
-            <a:ext cx="3291120" cy="1736640"/>
+            <a:ext cx="3290760" cy="1736280"/>
           </a:xfrm>
           <a:prstGeom prst="rect">
             <a:avLst/>
@@ -14648,7 +14648,7 @@
         <p:spPr>
           <a:xfrm>
             <a:off x="4572000" y="1737360"/>
-            <a:ext cx="7131600" cy="4114080"/>
+            <a:ext cx="7131240" cy="4113720"/>
           </a:xfrm>
           <a:prstGeom prst="rect">
             <a:avLst/>
@@ -14819,7 +14819,7 @@
         <p:spPr>
           <a:xfrm>
             <a:off x="457200" y="6446520"/>
-            <a:ext cx="7314480" cy="273600"/>
+            <a:ext cx="7314120" cy="273240"/>
           </a:xfrm>
           <a:prstGeom prst="rect">
             <a:avLst/>
@@ -14880,7 +14880,7 @@
         <p:spPr>
           <a:xfrm>
             <a:off x="11521440" y="6446520"/>
-            <a:ext cx="456480" cy="273600"/>
+            <a:ext cx="456120" cy="273240"/>
           </a:xfrm>
           <a:prstGeom prst="rect">
             <a:avLst/>
@@ -14978,7 +14978,7 @@
         <p:spPr>
           <a:xfrm>
             <a:off x="-1828800" y="5029200"/>
-            <a:ext cx="3656880" cy="3656880"/>
+            <a:ext cx="3656520" cy="3656520"/>
           </a:xfrm>
           <a:prstGeom prst="ellipse">
             <a:avLst/>
@@ -15021,7 +15021,7 @@
         <p:spPr>
           <a:xfrm>
             <a:off x="457200" y="457200"/>
-            <a:ext cx="639360" cy="639360"/>
+            <a:ext cx="639000" cy="639000"/>
           </a:xfrm>
           <a:prstGeom prst="ellipse">
             <a:avLst/>
@@ -15068,7 +15068,7 @@
         <p:spPr>
           <a:xfrm>
             <a:off x="548640" y="548640"/>
-            <a:ext cx="447480" cy="447480"/>
+            <a:ext cx="447120" cy="447120"/>
           </a:xfrm>
           <a:prstGeom prst="rect">
             <a:avLst/>
@@ -15088,7 +15088,7 @@
         <p:spPr>
           <a:xfrm>
             <a:off x="1280160" y="457200"/>
-            <a:ext cx="10423440" cy="639360"/>
+            <a:ext cx="10423080" cy="639000"/>
           </a:xfrm>
           <a:prstGeom prst="rect">
             <a:avLst/>
@@ -15149,7 +15149,7 @@
         <p:spPr>
           <a:xfrm>
             <a:off x="457200" y="1600200"/>
-            <a:ext cx="11273760" cy="4479840"/>
+            <a:ext cx="11273400" cy="4479480"/>
           </a:xfrm>
           <a:prstGeom prst="roundRect">
             <a:avLst>
@@ -15194,7 +15194,7 @@
         <p:spPr>
           <a:xfrm>
             <a:off x="822960" y="1828800"/>
-            <a:ext cx="10514880" cy="456480"/>
+            <a:ext cx="10514520" cy="456120"/>
           </a:xfrm>
           <a:prstGeom prst="rect">
             <a:avLst/>
@@ -15255,7 +15255,7 @@
         <p:spPr>
           <a:xfrm>
             <a:off x="822960" y="2423160"/>
-            <a:ext cx="383400" cy="383400"/>
+            <a:ext cx="383040" cy="383040"/>
           </a:xfrm>
           <a:prstGeom prst="ellipse">
             <a:avLst/>
@@ -15298,7 +15298,7 @@
         <p:spPr>
           <a:xfrm>
             <a:off x="822960" y="2423160"/>
-            <a:ext cx="383400" cy="383400"/>
+            <a:ext cx="383040" cy="383040"/>
           </a:xfrm>
           <a:prstGeom prst="rect">
             <a:avLst/>
@@ -15359,7 +15359,7 @@
         <p:spPr>
           <a:xfrm>
             <a:off x="1435680" y="2423160"/>
-            <a:ext cx="9582120" cy="383400"/>
+            <a:ext cx="9581760" cy="383040"/>
           </a:xfrm>
           <a:prstGeom prst="rect">
             <a:avLst/>
@@ -15420,7 +15420,7 @@
         <p:spPr>
           <a:xfrm>
             <a:off x="822960" y="3300840"/>
-            <a:ext cx="383400" cy="383400"/>
+            <a:ext cx="383040" cy="383040"/>
           </a:xfrm>
           <a:prstGeom prst="ellipse">
             <a:avLst/>
@@ -15463,7 +15463,7 @@
         <p:spPr>
           <a:xfrm>
             <a:off x="822960" y="3300840"/>
-            <a:ext cx="383400" cy="383400"/>
+            <a:ext cx="383040" cy="383040"/>
           </a:xfrm>
           <a:prstGeom prst="rect">
             <a:avLst/>
@@ -15524,7 +15524,7 @@
         <p:spPr>
           <a:xfrm>
             <a:off x="1435680" y="3300840"/>
-            <a:ext cx="9582120" cy="383400"/>
+            <a:ext cx="9581760" cy="383040"/>
           </a:xfrm>
           <a:prstGeom prst="rect">
             <a:avLst/>
@@ -15585,7 +15585,7 @@
         <p:spPr>
           <a:xfrm>
             <a:off x="822960" y="4178880"/>
-            <a:ext cx="383400" cy="383400"/>
+            <a:ext cx="383040" cy="383040"/>
           </a:xfrm>
           <a:prstGeom prst="ellipse">
             <a:avLst/>
@@ -15628,7 +15628,7 @@
         <p:spPr>
           <a:xfrm>
             <a:off x="822960" y="4178880"/>
-            <a:ext cx="383400" cy="383400"/>
+            <a:ext cx="383040" cy="383040"/>
           </a:xfrm>
           <a:prstGeom prst="rect">
             <a:avLst/>
@@ -15689,7 +15689,7 @@
         <p:spPr>
           <a:xfrm>
             <a:off x="1435680" y="4178880"/>
-            <a:ext cx="9582120" cy="383400"/>
+            <a:ext cx="9581760" cy="383040"/>
           </a:xfrm>
           <a:prstGeom prst="rect">
             <a:avLst/>
@@ -15750,7 +15750,7 @@
         <p:spPr>
           <a:xfrm>
             <a:off x="822960" y="5056560"/>
-            <a:ext cx="383400" cy="383400"/>
+            <a:ext cx="383040" cy="383040"/>
           </a:xfrm>
           <a:prstGeom prst="ellipse">
             <a:avLst/>
@@ -15793,7 +15793,7 @@
         <p:spPr>
           <a:xfrm>
             <a:off x="822960" y="5056560"/>
-            <a:ext cx="383400" cy="383400"/>
+            <a:ext cx="383040" cy="383040"/>
           </a:xfrm>
           <a:prstGeom prst="rect">
             <a:avLst/>
@@ -15854,7 +15854,7 @@
         <p:spPr>
           <a:xfrm>
             <a:off x="1435680" y="5056560"/>
-            <a:ext cx="9582120" cy="383400"/>
+            <a:ext cx="9581760" cy="383040"/>
           </a:xfrm>
           <a:prstGeom prst="rect">
             <a:avLst/>
@@ -15915,7 +15915,7 @@
         <p:spPr>
           <a:xfrm>
             <a:off x="457200" y="6446520"/>
-            <a:ext cx="7314480" cy="273600"/>
+            <a:ext cx="7314120" cy="273240"/>
           </a:xfrm>
           <a:prstGeom prst="rect">
             <a:avLst/>
@@ -15976,7 +15976,7 @@
         <p:spPr>
           <a:xfrm>
             <a:off x="11521440" y="6446520"/>
-            <a:ext cx="456480" cy="273600"/>
+            <a:ext cx="456120" cy="273240"/>
           </a:xfrm>
           <a:prstGeom prst="rect">
             <a:avLst/>
@@ -16074,7 +16074,7 @@
         <p:spPr>
           <a:xfrm>
             <a:off x="-1828800" y="4114800"/>
-            <a:ext cx="5485680" cy="5485680"/>
+            <a:ext cx="5485320" cy="5485320"/>
           </a:xfrm>
           <a:prstGeom prst="ellipse">
             <a:avLst/>
@@ -16117,7 +16117,7 @@
         <p:spPr>
           <a:xfrm>
             <a:off x="9601200" y="-2286000"/>
-            <a:ext cx="5485680" cy="5485680"/>
+            <a:ext cx="5485320" cy="5485320"/>
           </a:xfrm>
           <a:prstGeom prst="ellipse">
             <a:avLst/>
@@ -16160,7 +16160,7 @@
         <p:spPr>
           <a:xfrm>
             <a:off x="5596200" y="731520"/>
-            <a:ext cx="1005120" cy="1005120"/>
+            <a:ext cx="1004760" cy="1004760"/>
           </a:xfrm>
           <a:prstGeom prst="ellipse">
             <a:avLst/>
@@ -16207,7 +16207,7 @@
         <p:spPr>
           <a:xfrm>
             <a:off x="5742360" y="877680"/>
-            <a:ext cx="703440" cy="703440"/>
+            <a:ext cx="703080" cy="703080"/>
           </a:xfrm>
           <a:prstGeom prst="rect">
             <a:avLst/>
@@ -16227,7 +16227,7 @@
         <p:spPr>
           <a:xfrm>
             <a:off x="914400" y="1965960"/>
-            <a:ext cx="10359360" cy="365040"/>
+            <a:ext cx="10359000" cy="364680"/>
           </a:xfrm>
           <a:prstGeom prst="rect">
             <a:avLst/>
@@ -16288,7 +16288,7 @@
         <p:spPr>
           <a:xfrm>
             <a:off x="914400" y="2377440"/>
-            <a:ext cx="10359360" cy="2010960"/>
+            <a:ext cx="10359000" cy="2010600"/>
           </a:xfrm>
           <a:prstGeom prst="rect">
             <a:avLst/>
@@ -16349,7 +16349,7 @@
         <p:spPr>
           <a:xfrm>
             <a:off x="1463040" y="4572000"/>
-            <a:ext cx="9262080" cy="1096560"/>
+            <a:ext cx="9261720" cy="1096200"/>
           </a:xfrm>
           <a:prstGeom prst="rect">
             <a:avLst/>
@@ -16410,7 +16410,7 @@
         <p:spPr>
           <a:xfrm>
             <a:off x="11521440" y="6446520"/>
-            <a:ext cx="456480" cy="273600"/>
+            <a:ext cx="456120" cy="273240"/>
           </a:xfrm>
           <a:prstGeom prst="rect">
             <a:avLst/>
@@ -16508,7 +16508,7 @@
         <p:spPr>
           <a:xfrm>
             <a:off x="10515600" y="5669280"/>
-            <a:ext cx="3199680" cy="3199680"/>
+            <a:ext cx="3199320" cy="3199320"/>
           </a:xfrm>
           <a:prstGeom prst="roundRect">
             <a:avLst>
@@ -16553,7 +16553,7 @@
         <p:spPr>
           <a:xfrm>
             <a:off x="457200" y="457200"/>
-            <a:ext cx="639360" cy="639360"/>
+            <a:ext cx="639000" cy="639000"/>
           </a:xfrm>
           <a:prstGeom prst="ellipse">
             <a:avLst/>
@@ -16600,7 +16600,7 @@
         <p:spPr>
           <a:xfrm>
             <a:off x="548640" y="548640"/>
-            <a:ext cx="447480" cy="447480"/>
+            <a:ext cx="447120" cy="447120"/>
           </a:xfrm>
           <a:prstGeom prst="rect">
             <a:avLst/>
@@ -16620,7 +16620,7 @@
         <p:spPr>
           <a:xfrm>
             <a:off x="1280160" y="457200"/>
-            <a:ext cx="10423440" cy="639360"/>
+            <a:ext cx="10423080" cy="639000"/>
           </a:xfrm>
           <a:prstGeom prst="rect">
             <a:avLst/>
@@ -16681,7 +16681,7 @@
         <p:spPr>
           <a:xfrm>
             <a:off x="457200" y="1554480"/>
-            <a:ext cx="3656880" cy="4662720"/>
+            <a:ext cx="3656520" cy="4662360"/>
           </a:xfrm>
           <a:prstGeom prst="roundRect">
             <a:avLst>
@@ -16726,7 +16726,7 @@
         <p:spPr>
           <a:xfrm>
             <a:off x="1508760" y="2194560"/>
-            <a:ext cx="1553760" cy="1553760"/>
+            <a:ext cx="1553400" cy="1553400"/>
           </a:xfrm>
           <a:prstGeom prst="ellipse">
             <a:avLst/>
@@ -16773,7 +16773,7 @@
         <p:spPr>
           <a:xfrm>
             <a:off x="1746360" y="2423160"/>
-            <a:ext cx="1087560" cy="1087560"/>
+            <a:ext cx="1087200" cy="1087200"/>
           </a:xfrm>
           <a:prstGeom prst="rect">
             <a:avLst/>
@@ -16793,7 +16793,7 @@
         <p:spPr>
           <a:xfrm>
             <a:off x="640080" y="3977640"/>
-            <a:ext cx="3291120" cy="1736640"/>
+            <a:ext cx="3290760" cy="1736280"/>
           </a:xfrm>
           <a:prstGeom prst="rect">
             <a:avLst/>
@@ -16914,7 +16914,7 @@
         <p:spPr>
           <a:xfrm>
             <a:off x="4572000" y="1737360"/>
-            <a:ext cx="7131600" cy="4114080"/>
+            <a:ext cx="7131240" cy="4113720"/>
           </a:xfrm>
           <a:prstGeom prst="rect">
             <a:avLst/>
@@ -17085,7 +17085,7 @@
         <p:spPr>
           <a:xfrm>
             <a:off x="457200" y="6446520"/>
-            <a:ext cx="7314480" cy="273600"/>
+            <a:ext cx="7314120" cy="273240"/>
           </a:xfrm>
           <a:prstGeom prst="rect">
             <a:avLst/>
@@ -17146,7 +17146,7 @@
         <p:spPr>
           <a:xfrm>
             <a:off x="11521440" y="6446520"/>
-            <a:ext cx="456480" cy="273600"/>
+            <a:ext cx="456120" cy="273240"/>
           </a:xfrm>
           <a:prstGeom prst="rect">
             <a:avLst/>
@@ -17244,7 +17244,7 @@
         <p:spPr>
           <a:xfrm>
             <a:off x="457200" y="457200"/>
-            <a:ext cx="639360" cy="639360"/>
+            <a:ext cx="639000" cy="639000"/>
           </a:xfrm>
           <a:prstGeom prst="ellipse">
             <a:avLst/>
@@ -17291,7 +17291,7 @@
         <p:spPr>
           <a:xfrm>
             <a:off x="548640" y="548640"/>
-            <a:ext cx="447480" cy="447480"/>
+            <a:ext cx="447120" cy="447120"/>
           </a:xfrm>
           <a:prstGeom prst="rect">
             <a:avLst/>
@@ -17311,7 +17311,7 @@
         <p:spPr>
           <a:xfrm>
             <a:off x="1280160" y="457200"/>
-            <a:ext cx="10423440" cy="639360"/>
+            <a:ext cx="10423080" cy="639000"/>
           </a:xfrm>
           <a:prstGeom prst="rect">
             <a:avLst/>
@@ -17372,7 +17372,7 @@
         <p:spPr>
           <a:xfrm>
             <a:off x="457200" y="1600200"/>
-            <a:ext cx="11273760" cy="560880"/>
+            <a:ext cx="11273400" cy="560520"/>
           </a:xfrm>
           <a:prstGeom prst="roundRect">
             <a:avLst>
@@ -17417,7 +17417,7 @@
         <p:spPr>
           <a:xfrm>
             <a:off x="685800" y="1707480"/>
-            <a:ext cx="346680" cy="346680"/>
+            <a:ext cx="346320" cy="346320"/>
           </a:xfrm>
           <a:prstGeom prst="ellipse">
             <a:avLst/>
@@ -17464,7 +17464,7 @@
         <p:spPr>
           <a:xfrm>
             <a:off x="758880" y="1780560"/>
-            <a:ext cx="200520" cy="200520"/>
+            <a:ext cx="200160" cy="200160"/>
           </a:xfrm>
           <a:prstGeom prst="rect">
             <a:avLst/>
@@ -17484,7 +17484,7 @@
         <p:spPr>
           <a:xfrm>
             <a:off x="1234440" y="1600200"/>
-            <a:ext cx="10240560" cy="560880"/>
+            <a:ext cx="10240200" cy="560520"/>
           </a:xfrm>
           <a:prstGeom prst="rect">
             <a:avLst/>
@@ -17545,7 +17545,7 @@
         <p:spPr>
           <a:xfrm>
             <a:off x="457200" y="2253240"/>
-            <a:ext cx="11273760" cy="560880"/>
+            <a:ext cx="11273400" cy="560520"/>
           </a:xfrm>
           <a:prstGeom prst="roundRect">
             <a:avLst>
@@ -17590,7 +17590,7 @@
         <p:spPr>
           <a:xfrm>
             <a:off x="685800" y="2360520"/>
-            <a:ext cx="346680" cy="346680"/>
+            <a:ext cx="346320" cy="346320"/>
           </a:xfrm>
           <a:prstGeom prst="ellipse">
             <a:avLst/>
@@ -17637,7 +17637,7 @@
         <p:spPr>
           <a:xfrm>
             <a:off x="758880" y="2433600"/>
-            <a:ext cx="200520" cy="200520"/>
+            <a:ext cx="200160" cy="200160"/>
           </a:xfrm>
           <a:prstGeom prst="rect">
             <a:avLst/>
@@ -17657,7 +17657,7 @@
         <p:spPr>
           <a:xfrm>
             <a:off x="1234440" y="2253240"/>
-            <a:ext cx="10240560" cy="560880"/>
+            <a:ext cx="10240200" cy="560520"/>
           </a:xfrm>
           <a:prstGeom prst="rect">
             <a:avLst/>
@@ -17718,7 +17718,7 @@
         <p:spPr>
           <a:xfrm>
             <a:off x="457200" y="2906640"/>
-            <a:ext cx="11273760" cy="560880"/>
+            <a:ext cx="11273400" cy="560520"/>
           </a:xfrm>
           <a:prstGeom prst="roundRect">
             <a:avLst>
@@ -17763,7 +17763,7 @@
         <p:spPr>
           <a:xfrm>
             <a:off x="685800" y="3013560"/>
-            <a:ext cx="346680" cy="346680"/>
+            <a:ext cx="346320" cy="346320"/>
           </a:xfrm>
           <a:prstGeom prst="ellipse">
             <a:avLst/>
@@ -17810,7 +17810,7 @@
         <p:spPr>
           <a:xfrm>
             <a:off x="758880" y="3086640"/>
-            <a:ext cx="200520" cy="200520"/>
+            <a:ext cx="200160" cy="200160"/>
           </a:xfrm>
           <a:prstGeom prst="rect">
             <a:avLst/>
@@ -17830,7 +17830,7 @@
         <p:spPr>
           <a:xfrm>
             <a:off x="1234440" y="2906640"/>
-            <a:ext cx="10240560" cy="560880"/>
+            <a:ext cx="10240200" cy="560520"/>
           </a:xfrm>
           <a:prstGeom prst="rect">
             <a:avLst/>
@@ -17891,7 +17891,7 @@
         <p:spPr>
           <a:xfrm>
             <a:off x="457200" y="3559680"/>
-            <a:ext cx="11273760" cy="560880"/>
+            <a:ext cx="11273400" cy="560520"/>
           </a:xfrm>
           <a:prstGeom prst="roundRect">
             <a:avLst>
@@ -17936,7 +17936,7 @@
         <p:spPr>
           <a:xfrm>
             <a:off x="685800" y="3666600"/>
-            <a:ext cx="346680" cy="346680"/>
+            <a:ext cx="346320" cy="346320"/>
           </a:xfrm>
           <a:prstGeom prst="ellipse">
             <a:avLst/>
@@ -17983,7 +17983,7 @@
         <p:spPr>
           <a:xfrm>
             <a:off x="758880" y="3740040"/>
-            <a:ext cx="200520" cy="200520"/>
+            <a:ext cx="200160" cy="200160"/>
           </a:xfrm>
           <a:prstGeom prst="rect">
             <a:avLst/>
@@ -18003,7 +18003,7 @@
         <p:spPr>
           <a:xfrm>
             <a:off x="1234440" y="3559680"/>
-            <a:ext cx="10240560" cy="560880"/>
+            <a:ext cx="10240200" cy="560520"/>
           </a:xfrm>
           <a:prstGeom prst="rect">
             <a:avLst/>
@@ -18064,7 +18064,7 @@
         <p:spPr>
           <a:xfrm>
             <a:off x="457200" y="4212720"/>
-            <a:ext cx="11273760" cy="560880"/>
+            <a:ext cx="11273400" cy="560520"/>
           </a:xfrm>
           <a:prstGeom prst="roundRect">
             <a:avLst>
@@ -18109,7 +18109,7 @@
         <p:spPr>
           <a:xfrm>
             <a:off x="685800" y="4320000"/>
-            <a:ext cx="346680" cy="346680"/>
+            <a:ext cx="346320" cy="346320"/>
           </a:xfrm>
           <a:prstGeom prst="ellipse">
             <a:avLst/>
@@ -18156,7 +18156,7 @@
         <p:spPr>
           <a:xfrm>
             <a:off x="758880" y="4393080"/>
-            <a:ext cx="200520" cy="200520"/>
+            <a:ext cx="200160" cy="200160"/>
           </a:xfrm>
           <a:prstGeom prst="rect">
             <a:avLst/>
@@ -18176,7 +18176,7 @@
         <p:spPr>
           <a:xfrm>
             <a:off x="1234440" y="4212720"/>
-            <a:ext cx="10240560" cy="560880"/>
+            <a:ext cx="10240200" cy="560520"/>
           </a:xfrm>
           <a:prstGeom prst="rect">
             <a:avLst/>
@@ -18237,7 +18237,7 @@
         <p:spPr>
           <a:xfrm>
             <a:off x="457200" y="4865760"/>
-            <a:ext cx="11273760" cy="560880"/>
+            <a:ext cx="11273400" cy="560520"/>
           </a:xfrm>
           <a:prstGeom prst="roundRect">
             <a:avLst>
@@ -18282,7 +18282,7 @@
         <p:spPr>
           <a:xfrm>
             <a:off x="685800" y="4973040"/>
-            <a:ext cx="346680" cy="346680"/>
+            <a:ext cx="346320" cy="346320"/>
           </a:xfrm>
           <a:prstGeom prst="ellipse">
             <a:avLst/>
@@ -18329,7 +18329,7 @@
         <p:spPr>
           <a:xfrm>
             <a:off x="758880" y="5046120"/>
-            <a:ext cx="200520" cy="200520"/>
+            <a:ext cx="200160" cy="200160"/>
           </a:xfrm>
           <a:prstGeom prst="rect">
             <a:avLst/>
@@ -18349,7 +18349,7 @@
         <p:spPr>
           <a:xfrm>
             <a:off x="1234440" y="4865760"/>
-            <a:ext cx="10240560" cy="560880"/>
+            <a:ext cx="10240200" cy="560520"/>
           </a:xfrm>
           <a:prstGeom prst="rect">
             <a:avLst/>
@@ -18410,7 +18410,7 @@
         <p:spPr>
           <a:xfrm>
             <a:off x="457200" y="5519160"/>
-            <a:ext cx="11273760" cy="560880"/>
+            <a:ext cx="11273400" cy="560520"/>
           </a:xfrm>
           <a:prstGeom prst="roundRect">
             <a:avLst>
@@ -18455,7 +18455,7 @@
         <p:spPr>
           <a:xfrm>
             <a:off x="685800" y="5626080"/>
-            <a:ext cx="346680" cy="346680"/>
+            <a:ext cx="346320" cy="346320"/>
           </a:xfrm>
           <a:prstGeom prst="ellipse">
             <a:avLst/>
@@ -18502,7 +18502,7 @@
         <p:spPr>
           <a:xfrm>
             <a:off x="758880" y="5699160"/>
-            <a:ext cx="200520" cy="200520"/>
+            <a:ext cx="200160" cy="200160"/>
           </a:xfrm>
           <a:prstGeom prst="rect">
             <a:avLst/>
@@ -18522,7 +18522,7 @@
         <p:spPr>
           <a:xfrm>
             <a:off x="1234440" y="5519160"/>
-            <a:ext cx="10240560" cy="560880"/>
+            <a:ext cx="10240200" cy="560520"/>
           </a:xfrm>
           <a:prstGeom prst="rect">
             <a:avLst/>
@@ -18583,7 +18583,7 @@
         <p:spPr>
           <a:xfrm>
             <a:off x="457200" y="6446520"/>
-            <a:ext cx="7314480" cy="273600"/>
+            <a:ext cx="7314120" cy="273240"/>
           </a:xfrm>
           <a:prstGeom prst="rect">
             <a:avLst/>
@@ -18644,7 +18644,7 @@
         <p:spPr>
           <a:xfrm>
             <a:off x="11521440" y="6446520"/>
-            <a:ext cx="456480" cy="273600"/>
+            <a:ext cx="456120" cy="273240"/>
           </a:xfrm>
           <a:prstGeom prst="rect">
             <a:avLst/>
@@ -18742,7 +18742,7 @@
         <p:spPr>
           <a:xfrm>
             <a:off x="457200" y="457200"/>
-            <a:ext cx="639360" cy="639360"/>
+            <a:ext cx="639000" cy="639000"/>
           </a:xfrm>
           <a:prstGeom prst="ellipse">
             <a:avLst/>
@@ -18789,7 +18789,7 @@
         <p:spPr>
           <a:xfrm>
             <a:off x="548640" y="548640"/>
-            <a:ext cx="447480" cy="447480"/>
+            <a:ext cx="447120" cy="447120"/>
           </a:xfrm>
           <a:prstGeom prst="rect">
             <a:avLst/>
@@ -18809,7 +18809,7 @@
         <p:spPr>
           <a:xfrm>
             <a:off x="1280160" y="457200"/>
-            <a:ext cx="10423440" cy="639360"/>
+            <a:ext cx="10423080" cy="639000"/>
           </a:xfrm>
           <a:prstGeom prst="rect">
             <a:avLst/>
@@ -18870,7 +18870,7 @@
         <p:spPr>
           <a:xfrm>
             <a:off x="457200" y="1645920"/>
-            <a:ext cx="5348520" cy="4479840"/>
+            <a:ext cx="5348160" cy="4479480"/>
           </a:xfrm>
           <a:prstGeom prst="roundRect">
             <a:avLst>
@@ -18915,7 +18915,7 @@
         <p:spPr>
           <a:xfrm>
             <a:off x="731520" y="1874520"/>
-            <a:ext cx="456480" cy="456480"/>
+            <a:ext cx="456120" cy="456120"/>
           </a:xfrm>
           <a:prstGeom prst="ellipse">
             <a:avLst/>
@@ -18962,7 +18962,7 @@
         <p:spPr>
           <a:xfrm>
             <a:off x="804600" y="1938600"/>
-            <a:ext cx="319320" cy="319320"/>
+            <a:ext cx="318960" cy="318960"/>
           </a:xfrm>
           <a:prstGeom prst="rect">
             <a:avLst/>
@@ -18982,7 +18982,7 @@
         <p:spPr>
           <a:xfrm>
             <a:off x="1325880" y="1874520"/>
-            <a:ext cx="4342680" cy="456480"/>
+            <a:ext cx="4342320" cy="456120"/>
           </a:xfrm>
           <a:prstGeom prst="rect">
             <a:avLst/>
@@ -19043,7 +19043,7 @@
         <p:spPr>
           <a:xfrm>
             <a:off x="731520" y="2514600"/>
-            <a:ext cx="4799880" cy="3382560"/>
+            <a:ext cx="4799520" cy="3382200"/>
           </a:xfrm>
           <a:prstGeom prst="rect">
             <a:avLst/>
@@ -19214,7 +19214,7 @@
         <p:spPr>
           <a:xfrm>
             <a:off x="6172200" y="1645920"/>
-            <a:ext cx="5348520" cy="4479840"/>
+            <a:ext cx="5348160" cy="4479480"/>
           </a:xfrm>
           <a:prstGeom prst="roundRect">
             <a:avLst>
@@ -19259,7 +19259,7 @@
         <p:spPr>
           <a:xfrm>
             <a:off x="6446520" y="1874520"/>
-            <a:ext cx="456480" cy="456480"/>
+            <a:ext cx="456120" cy="456120"/>
           </a:xfrm>
           <a:prstGeom prst="ellipse">
             <a:avLst/>
@@ -19306,7 +19306,7 @@
         <p:spPr>
           <a:xfrm>
             <a:off x="6519600" y="1938600"/>
-            <a:ext cx="319320" cy="319320"/>
+            <a:ext cx="318960" cy="318960"/>
           </a:xfrm>
           <a:prstGeom prst="rect">
             <a:avLst/>
@@ -19326,7 +19326,7 @@
         <p:spPr>
           <a:xfrm>
             <a:off x="7040880" y="1874520"/>
-            <a:ext cx="4342680" cy="456480"/>
+            <a:ext cx="4342320" cy="456120"/>
           </a:xfrm>
           <a:prstGeom prst="rect">
             <a:avLst/>
@@ -19387,7 +19387,7 @@
         <p:spPr>
           <a:xfrm>
             <a:off x="6446520" y="2514600"/>
-            <a:ext cx="4799880" cy="3382560"/>
+            <a:ext cx="4799520" cy="3382200"/>
           </a:xfrm>
           <a:prstGeom prst="rect">
             <a:avLst/>
@@ -19558,7 +19558,7 @@
         <p:spPr>
           <a:xfrm>
             <a:off x="457200" y="6446520"/>
-            <a:ext cx="7314480" cy="273600"/>
+            <a:ext cx="7314120" cy="273240"/>
           </a:xfrm>
           <a:prstGeom prst="rect">
             <a:avLst/>
@@ -19619,7 +19619,7 @@
         <p:spPr>
           <a:xfrm>
             <a:off x="11521440" y="6446520"/>
-            <a:ext cx="456480" cy="273600"/>
+            <a:ext cx="456120" cy="273240"/>
           </a:xfrm>
           <a:prstGeom prst="rect">
             <a:avLst/>
@@ -19717,7 +19717,7 @@
         <p:spPr>
           <a:xfrm>
             <a:off x="457200" y="457200"/>
-            <a:ext cx="639360" cy="639360"/>
+            <a:ext cx="639000" cy="639000"/>
           </a:xfrm>
           <a:prstGeom prst="ellipse">
             <a:avLst/>
@@ -19764,7 +19764,7 @@
         <p:spPr>
           <a:xfrm>
             <a:off x="548640" y="548640"/>
-            <a:ext cx="447480" cy="447480"/>
+            <a:ext cx="447120" cy="447120"/>
           </a:xfrm>
           <a:prstGeom prst="rect">
             <a:avLst/>
@@ -19784,7 +19784,7 @@
         <p:spPr>
           <a:xfrm>
             <a:off x="1280160" y="457200"/>
-            <a:ext cx="10423440" cy="639360"/>
+            <a:ext cx="10423080" cy="639000"/>
           </a:xfrm>
           <a:prstGeom prst="rect">
             <a:avLst/>
@@ -19845,7 +19845,7 @@
         <p:spPr>
           <a:xfrm>
             <a:off x="548640" y="1828800"/>
-            <a:ext cx="4754160" cy="4022640"/>
+            <a:ext cx="4753800" cy="4022280"/>
           </a:xfrm>
           <a:prstGeom prst="rect">
             <a:avLst/>
@@ -19981,7 +19981,7 @@
         <p:spPr>
           <a:xfrm>
             <a:off x="5486400" y="1691640"/>
-            <a:ext cx="6217200" cy="4342680"/>
+            <a:ext cx="6216840" cy="4342320"/>
           </a:xfrm>
           <a:prstGeom prst="roundRect">
             <a:avLst>
@@ -20026,7 +20026,7 @@
         <p:spPr>
           <a:xfrm>
             <a:off x="5806440" y="1965960"/>
-            <a:ext cx="5577120" cy="3794040"/>
+            <a:ext cx="5576760" cy="3793680"/>
           </a:xfrm>
           <a:prstGeom prst="rect">
             <a:avLst/>
@@ -20381,7 +20381,7 @@
         <p:spPr>
           <a:xfrm>
             <a:off x="457200" y="6446520"/>
-            <a:ext cx="7314480" cy="273600"/>
+            <a:ext cx="7314120" cy="273240"/>
           </a:xfrm>
           <a:prstGeom prst="rect">
             <a:avLst/>
@@ -20442,7 +20442,7 @@
         <p:spPr>
           <a:xfrm>
             <a:off x="11521440" y="6446520"/>
-            <a:ext cx="456480" cy="273600"/>
+            <a:ext cx="456120" cy="273240"/>
           </a:xfrm>
           <a:prstGeom prst="rect">
             <a:avLst/>
@@ -20540,7 +20540,7 @@
         <p:spPr>
           <a:xfrm>
             <a:off x="457200" y="457200"/>
-            <a:ext cx="639360" cy="639360"/>
+            <a:ext cx="639000" cy="639000"/>
           </a:xfrm>
           <a:prstGeom prst="ellipse">
             <a:avLst/>
@@ -20587,7 +20587,7 @@
         <p:spPr>
           <a:xfrm>
             <a:off x="548640" y="548640"/>
-            <a:ext cx="447480" cy="447480"/>
+            <a:ext cx="447120" cy="447120"/>
           </a:xfrm>
           <a:prstGeom prst="rect">
             <a:avLst/>
@@ -20607,7 +20607,7 @@
         <p:spPr>
           <a:xfrm>
             <a:off x="1280160" y="457200"/>
-            <a:ext cx="10423440" cy="639360"/>
+            <a:ext cx="10423080" cy="639000"/>
           </a:xfrm>
           <a:prstGeom prst="rect">
             <a:avLst/>
@@ -20668,7 +20668,7 @@
         <p:spPr>
           <a:xfrm>
             <a:off x="1097280" y="1691640"/>
-            <a:ext cx="9993600" cy="712440"/>
+            <a:ext cx="9993240" cy="712080"/>
           </a:xfrm>
           <a:prstGeom prst="roundRect">
             <a:avLst>
@@ -20713,7 +20713,7 @@
         <p:spPr>
           <a:xfrm>
             <a:off x="1325880" y="1691640"/>
-            <a:ext cx="9536400" cy="712440"/>
+            <a:ext cx="9536040" cy="712080"/>
           </a:xfrm>
           <a:prstGeom prst="rect">
             <a:avLst/>
@@ -20774,7 +20774,7 @@
         <p:spPr>
           <a:xfrm>
             <a:off x="1417320" y="2514600"/>
-            <a:ext cx="9673560" cy="712440"/>
+            <a:ext cx="9673200" cy="712080"/>
           </a:xfrm>
           <a:prstGeom prst="roundRect">
             <a:avLst>
@@ -20819,7 +20819,7 @@
         <p:spPr>
           <a:xfrm>
             <a:off x="1645920" y="2514600"/>
-            <a:ext cx="9216360" cy="712440"/>
+            <a:ext cx="9216000" cy="712080"/>
           </a:xfrm>
           <a:prstGeom prst="rect">
             <a:avLst/>
@@ -20880,7 +20880,7 @@
         <p:spPr>
           <a:xfrm>
             <a:off x="1737360" y="3337560"/>
-            <a:ext cx="9353520" cy="712440"/>
+            <a:ext cx="9353160" cy="712080"/>
           </a:xfrm>
           <a:prstGeom prst="roundRect">
             <a:avLst>
@@ -20925,7 +20925,7 @@
         <p:spPr>
           <a:xfrm>
             <a:off x="1965960" y="3337560"/>
-            <a:ext cx="8896320" cy="712440"/>
+            <a:ext cx="8895960" cy="712080"/>
           </a:xfrm>
           <a:prstGeom prst="rect">
             <a:avLst/>
@@ -20986,7 +20986,7 @@
         <p:spPr>
           <a:xfrm>
             <a:off x="2057400" y="4160520"/>
-            <a:ext cx="9033480" cy="712440"/>
+            <a:ext cx="9033120" cy="712080"/>
           </a:xfrm>
           <a:prstGeom prst="roundRect">
             <a:avLst>
@@ -21031,7 +21031,7 @@
         <p:spPr>
           <a:xfrm>
             <a:off x="2286000" y="4160520"/>
-            <a:ext cx="8576280" cy="712440"/>
+            <a:ext cx="8575920" cy="712080"/>
           </a:xfrm>
           <a:prstGeom prst="rect">
             <a:avLst/>
@@ -21092,7 +21092,7 @@
         <p:spPr>
           <a:xfrm>
             <a:off x="2377440" y="4983480"/>
-            <a:ext cx="8713440" cy="712440"/>
+            <a:ext cx="8713080" cy="712080"/>
           </a:xfrm>
           <a:prstGeom prst="roundRect">
             <a:avLst>
@@ -21137,7 +21137,7 @@
         <p:spPr>
           <a:xfrm>
             <a:off x="2606040" y="4983480"/>
-            <a:ext cx="8256240" cy="712440"/>
+            <a:ext cx="8255880" cy="712080"/>
           </a:xfrm>
           <a:prstGeom prst="rect">
             <a:avLst/>
@@ -21198,7 +21198,7 @@
         <p:spPr>
           <a:xfrm>
             <a:off x="1097280" y="5852160"/>
-            <a:ext cx="9993600" cy="456480"/>
+            <a:ext cx="9993240" cy="456120"/>
           </a:xfrm>
           <a:prstGeom prst="rect">
             <a:avLst/>
@@ -21259,7 +21259,7 @@
         <p:spPr>
           <a:xfrm>
             <a:off x="457200" y="6446520"/>
-            <a:ext cx="7314480" cy="273600"/>
+            <a:ext cx="7314120" cy="273240"/>
           </a:xfrm>
           <a:prstGeom prst="rect">
             <a:avLst/>
@@ -21320,7 +21320,7 @@
         <p:spPr>
           <a:xfrm>
             <a:off x="11521440" y="6446520"/>
-            <a:ext cx="456480" cy="273600"/>
+            <a:ext cx="456120" cy="273240"/>
           </a:xfrm>
           <a:prstGeom prst="rect">
             <a:avLst/>
@@ -21418,7 +21418,7 @@
         <p:spPr>
           <a:xfrm>
             <a:off x="457200" y="457200"/>
-            <a:ext cx="639360" cy="639360"/>
+            <a:ext cx="639000" cy="639000"/>
           </a:xfrm>
           <a:prstGeom prst="ellipse">
             <a:avLst/>
@@ -21465,7 +21465,7 @@
         <p:spPr>
           <a:xfrm>
             <a:off x="548640" y="548640"/>
-            <a:ext cx="447480" cy="447480"/>
+            <a:ext cx="447120" cy="447120"/>
           </a:xfrm>
           <a:prstGeom prst="rect">
             <a:avLst/>
@@ -21485,7 +21485,7 @@
         <p:spPr>
           <a:xfrm>
             <a:off x="1280160" y="457200"/>
-            <a:ext cx="10423440" cy="639360"/>
+            <a:ext cx="10423080" cy="639000"/>
           </a:xfrm>
           <a:prstGeom prst="rect">
             <a:avLst/>
@@ -21546,7 +21546,7 @@
         <p:spPr>
           <a:xfrm>
             <a:off x="548640" y="1828800"/>
-            <a:ext cx="4754160" cy="4022640"/>
+            <a:ext cx="4753800" cy="4022280"/>
           </a:xfrm>
           <a:prstGeom prst="rect">
             <a:avLst/>
@@ -21682,7 +21682,7 @@
         <p:spPr>
           <a:xfrm>
             <a:off x="5486400" y="1691640"/>
-            <a:ext cx="6217200" cy="4342680"/>
+            <a:ext cx="6216840" cy="4342320"/>
           </a:xfrm>
           <a:prstGeom prst="roundRect">
             <a:avLst>
@@ -21727,7 +21727,7 @@
         <p:spPr>
           <a:xfrm>
             <a:off x="5806440" y="1965960"/>
-            <a:ext cx="5577120" cy="3794040"/>
+            <a:ext cx="5576760" cy="3793680"/>
           </a:xfrm>
           <a:prstGeom prst="rect">
             <a:avLst/>
@@ -22034,7 +22034,7 @@
         <p:spPr>
           <a:xfrm>
             <a:off x="457200" y="6446520"/>
-            <a:ext cx="7314480" cy="273600"/>
+            <a:ext cx="7314120" cy="273240"/>
           </a:xfrm>
           <a:prstGeom prst="rect">
             <a:avLst/>
@@ -22095,7 +22095,7 @@
         <p:spPr>
           <a:xfrm>
             <a:off x="11521440" y="6446520"/>
-            <a:ext cx="456480" cy="273600"/>
+            <a:ext cx="456120" cy="273240"/>
           </a:xfrm>
           <a:prstGeom prst="rect">
             <a:avLst/>
@@ -22193,7 +22193,7 @@
         <p:spPr>
           <a:xfrm>
             <a:off x="10515600" y="5669280"/>
-            <a:ext cx="3199680" cy="3199680"/>
+            <a:ext cx="3199320" cy="3199320"/>
           </a:xfrm>
           <a:prstGeom prst="roundRect">
             <a:avLst>
@@ -22238,7 +22238,7 @@
         <p:spPr>
           <a:xfrm>
             <a:off x="457200" y="457200"/>
-            <a:ext cx="639360" cy="639360"/>
+            <a:ext cx="639000" cy="639000"/>
           </a:xfrm>
           <a:prstGeom prst="ellipse">
             <a:avLst/>
@@ -22285,7 +22285,7 @@
         <p:spPr>
           <a:xfrm>
             <a:off x="548640" y="548640"/>
-            <a:ext cx="447480" cy="447480"/>
+            <a:ext cx="447120" cy="447120"/>
           </a:xfrm>
           <a:prstGeom prst="rect">
             <a:avLst/>
@@ -22305,7 +22305,7 @@
         <p:spPr>
           <a:xfrm>
             <a:off x="1280160" y="457200"/>
-            <a:ext cx="10423440" cy="639360"/>
+            <a:ext cx="10423080" cy="639000"/>
           </a:xfrm>
           <a:prstGeom prst="rect">
             <a:avLst/>
@@ -22366,7 +22366,7 @@
         <p:spPr>
           <a:xfrm>
             <a:off x="457200" y="1554480"/>
-            <a:ext cx="3656880" cy="4662720"/>
+            <a:ext cx="3656520" cy="4662360"/>
           </a:xfrm>
           <a:prstGeom prst="roundRect">
             <a:avLst>
@@ -22411,7 +22411,7 @@
         <p:spPr>
           <a:xfrm>
             <a:off x="1508760" y="2194560"/>
-            <a:ext cx="1553760" cy="1553760"/>
+            <a:ext cx="1553400" cy="1553400"/>
           </a:xfrm>
           <a:prstGeom prst="ellipse">
             <a:avLst/>
@@ -22458,7 +22458,7 @@
         <p:spPr>
           <a:xfrm>
             <a:off x="1746360" y="2423160"/>
-            <a:ext cx="1087560" cy="1087560"/>
+            <a:ext cx="1087200" cy="1087200"/>
           </a:xfrm>
           <a:prstGeom prst="rect">
             <a:avLst/>
@@ -22478,7 +22478,7 @@
         <p:spPr>
           <a:xfrm>
             <a:off x="640080" y="3977640"/>
-            <a:ext cx="3291120" cy="1736640"/>
+            <a:ext cx="3290760" cy="1736280"/>
           </a:xfrm>
           <a:prstGeom prst="rect">
             <a:avLst/>
@@ -22599,7 +22599,7 @@
         <p:spPr>
           <a:xfrm>
             <a:off x="4572000" y="1737360"/>
-            <a:ext cx="7131600" cy="4114080"/>
+            <a:ext cx="7131240" cy="4113720"/>
           </a:xfrm>
           <a:prstGeom prst="rect">
             <a:avLst/>
@@ -22770,7 +22770,7 @@
         <p:spPr>
           <a:xfrm>
             <a:off x="457200" y="6446520"/>
-            <a:ext cx="7314480" cy="273600"/>
+            <a:ext cx="7314120" cy="273240"/>
           </a:xfrm>
           <a:prstGeom prst="rect">
             <a:avLst/>
@@ -22831,7 +22831,7 @@
         <p:spPr>
           <a:xfrm>
             <a:off x="11521440" y="6446520"/>
-            <a:ext cx="456480" cy="273600"/>
+            <a:ext cx="456120" cy="273240"/>
           </a:xfrm>
           <a:prstGeom prst="rect">
             <a:avLst/>
@@ -22929,7 +22929,7 @@
         <p:spPr>
           <a:xfrm>
             <a:off x="457200" y="457200"/>
-            <a:ext cx="639360" cy="639360"/>
+            <a:ext cx="639000" cy="639000"/>
           </a:xfrm>
           <a:prstGeom prst="ellipse">
             <a:avLst/>
@@ -22976,7 +22976,7 @@
         <p:spPr>
           <a:xfrm>
             <a:off x="548640" y="548640"/>
-            <a:ext cx="447480" cy="447480"/>
+            <a:ext cx="447120" cy="447120"/>
           </a:xfrm>
           <a:prstGeom prst="rect">
             <a:avLst/>
@@ -22996,7 +22996,7 @@
         <p:spPr>
           <a:xfrm>
             <a:off x="1280160" y="457200"/>
-            <a:ext cx="10423440" cy="639360"/>
+            <a:ext cx="10423080" cy="639000"/>
           </a:xfrm>
           <a:prstGeom prst="rect">
             <a:avLst/>
@@ -23057,7 +23057,7 @@
         <p:spPr>
           <a:xfrm>
             <a:off x="457200" y="1645920"/>
-            <a:ext cx="5348520" cy="4479840"/>
+            <a:ext cx="5348160" cy="4479480"/>
           </a:xfrm>
           <a:prstGeom prst="roundRect">
             <a:avLst>
@@ -23102,7 +23102,7 @@
         <p:spPr>
           <a:xfrm>
             <a:off x="731520" y="1874520"/>
-            <a:ext cx="456480" cy="456480"/>
+            <a:ext cx="456120" cy="456120"/>
           </a:xfrm>
           <a:prstGeom prst="ellipse">
             <a:avLst/>
@@ -23149,7 +23149,7 @@
         <p:spPr>
           <a:xfrm>
             <a:off x="804600" y="1938600"/>
-            <a:ext cx="319320" cy="319320"/>
+            <a:ext cx="318960" cy="318960"/>
           </a:xfrm>
           <a:prstGeom prst="rect">
             <a:avLst/>
@@ -23169,7 +23169,7 @@
         <p:spPr>
           <a:xfrm>
             <a:off x="1325880" y="1874520"/>
-            <a:ext cx="4342680" cy="456480"/>
+            <a:ext cx="4342320" cy="456120"/>
           </a:xfrm>
           <a:prstGeom prst="rect">
             <a:avLst/>
@@ -23230,7 +23230,7 @@
         <p:spPr>
           <a:xfrm>
             <a:off x="731520" y="2514600"/>
-            <a:ext cx="4799880" cy="3382560"/>
+            <a:ext cx="4799520" cy="3382200"/>
           </a:xfrm>
           <a:prstGeom prst="rect">
             <a:avLst/>
@@ -23366,7 +23366,7 @@
         <p:spPr>
           <a:xfrm>
             <a:off x="6172200" y="1645920"/>
-            <a:ext cx="5348520" cy="4479840"/>
+            <a:ext cx="5348160" cy="4479480"/>
           </a:xfrm>
           <a:prstGeom prst="roundRect">
             <a:avLst>
@@ -23411,7 +23411,7 @@
         <p:spPr>
           <a:xfrm>
             <a:off x="6446520" y="1874520"/>
-            <a:ext cx="456480" cy="456480"/>
+            <a:ext cx="456120" cy="456120"/>
           </a:xfrm>
           <a:prstGeom prst="ellipse">
             <a:avLst/>
@@ -23458,7 +23458,7 @@
         <p:spPr>
           <a:xfrm>
             <a:off x="6519600" y="1938600"/>
-            <a:ext cx="319320" cy="319320"/>
+            <a:ext cx="318960" cy="318960"/>
           </a:xfrm>
           <a:prstGeom prst="rect">
             <a:avLst/>
@@ -23478,7 +23478,7 @@
         <p:spPr>
           <a:xfrm>
             <a:off x="7040880" y="1874520"/>
-            <a:ext cx="4342680" cy="456480"/>
+            <a:ext cx="4342320" cy="456120"/>
           </a:xfrm>
           <a:prstGeom prst="rect">
             <a:avLst/>
@@ -23539,7 +23539,7 @@
         <p:spPr>
           <a:xfrm>
             <a:off x="6446520" y="2514600"/>
-            <a:ext cx="4799880" cy="3382560"/>
+            <a:ext cx="4799520" cy="3382200"/>
           </a:xfrm>
           <a:prstGeom prst="rect">
             <a:avLst/>
@@ -23675,7 +23675,7 @@
         <p:spPr>
           <a:xfrm>
             <a:off x="457200" y="6446520"/>
-            <a:ext cx="7314480" cy="273600"/>
+            <a:ext cx="7314120" cy="273240"/>
           </a:xfrm>
           <a:prstGeom prst="rect">
             <a:avLst/>
@@ -23736,7 +23736,7 @@
         <p:spPr>
           <a:xfrm>
             <a:off x="11521440" y="6446520"/>
-            <a:ext cx="456480" cy="273600"/>
+            <a:ext cx="456120" cy="273240"/>
           </a:xfrm>
           <a:prstGeom prst="rect">
             <a:avLst/>
@@ -23834,7 +23834,7 @@
         <p:spPr>
           <a:xfrm>
             <a:off x="457200" y="457200"/>
-            <a:ext cx="639360" cy="639360"/>
+            <a:ext cx="639000" cy="639000"/>
           </a:xfrm>
           <a:prstGeom prst="ellipse">
             <a:avLst/>
@@ -23881,7 +23881,7 @@
         <p:spPr>
           <a:xfrm>
             <a:off x="548640" y="548640"/>
-            <a:ext cx="447480" cy="447480"/>
+            <a:ext cx="447120" cy="447120"/>
           </a:xfrm>
           <a:prstGeom prst="rect">
             <a:avLst/>
@@ -23901,7 +23901,7 @@
         <p:spPr>
           <a:xfrm>
             <a:off x="1280160" y="457200"/>
-            <a:ext cx="10423440" cy="639360"/>
+            <a:ext cx="10423080" cy="639000"/>
           </a:xfrm>
           <a:prstGeom prst="rect">
             <a:avLst/>
@@ -23962,7 +23962,7 @@
         <p:spPr>
           <a:xfrm>
             <a:off x="548640" y="1828800"/>
-            <a:ext cx="4754160" cy="4022640"/>
+            <a:ext cx="4753800" cy="4022280"/>
           </a:xfrm>
           <a:prstGeom prst="rect">
             <a:avLst/>
@@ -24098,7 +24098,7 @@
         <p:spPr>
           <a:xfrm>
             <a:off x="5486400" y="1691640"/>
-            <a:ext cx="6217200" cy="4342680"/>
+            <a:ext cx="6216840" cy="4342320"/>
           </a:xfrm>
           <a:prstGeom prst="roundRect">
             <a:avLst>
@@ -24143,7 +24143,7 @@
         <p:spPr>
           <a:xfrm>
             <a:off x="5806440" y="1965960"/>
-            <a:ext cx="5577120" cy="3794040"/>
+            <a:ext cx="5576760" cy="3793680"/>
           </a:xfrm>
           <a:prstGeom prst="rect">
             <a:avLst/>
@@ -24516,7 +24516,7 @@
         <p:spPr>
           <a:xfrm>
             <a:off x="457200" y="6446520"/>
-            <a:ext cx="7314480" cy="273600"/>
+            <a:ext cx="7314120" cy="273240"/>
           </a:xfrm>
           <a:prstGeom prst="rect">
             <a:avLst/>
@@ -24577,7 +24577,7 @@
         <p:spPr>
           <a:xfrm>
             <a:off x="11521440" y="6446520"/>
-            <a:ext cx="456480" cy="273600"/>
+            <a:ext cx="456120" cy="273240"/>
           </a:xfrm>
           <a:prstGeom prst="rect">
             <a:avLst/>
@@ -24675,7 +24675,7 @@
         <p:spPr>
           <a:xfrm>
             <a:off x="-1828800" y="5029200"/>
-            <a:ext cx="3656880" cy="3656880"/>
+            <a:ext cx="3656520" cy="3656520"/>
           </a:xfrm>
           <a:prstGeom prst="ellipse">
             <a:avLst/>
@@ -24718,7 +24718,7 @@
         <p:spPr>
           <a:xfrm>
             <a:off x="457200" y="457200"/>
-            <a:ext cx="639360" cy="639360"/>
+            <a:ext cx="639000" cy="639000"/>
           </a:xfrm>
           <a:prstGeom prst="ellipse">
             <a:avLst/>
@@ -24765,7 +24765,7 @@
         <p:spPr>
           <a:xfrm>
             <a:off x="548640" y="548640"/>
-            <a:ext cx="447480" cy="447480"/>
+            <a:ext cx="447120" cy="447120"/>
           </a:xfrm>
           <a:prstGeom prst="rect">
             <a:avLst/>
@@ -24785,7 +24785,7 @@
         <p:spPr>
           <a:xfrm>
             <a:off x="1280160" y="457200"/>
-            <a:ext cx="10423440" cy="639360"/>
+            <a:ext cx="10423080" cy="639000"/>
           </a:xfrm>
           <a:prstGeom prst="rect">
             <a:avLst/>
@@ -24846,7 +24846,7 @@
         <p:spPr>
           <a:xfrm>
             <a:off x="457200" y="1600200"/>
-            <a:ext cx="11273760" cy="4479840"/>
+            <a:ext cx="11273400" cy="4479480"/>
           </a:xfrm>
           <a:prstGeom prst="roundRect">
             <a:avLst>
@@ -24891,7 +24891,7 @@
         <p:spPr>
           <a:xfrm>
             <a:off x="822960" y="1828800"/>
-            <a:ext cx="10514880" cy="456480"/>
+            <a:ext cx="10514520" cy="456120"/>
           </a:xfrm>
           <a:prstGeom prst="rect">
             <a:avLst/>
@@ -24952,7 +24952,7 @@
         <p:spPr>
           <a:xfrm>
             <a:off x="822960" y="2423160"/>
-            <a:ext cx="383400" cy="383400"/>
+            <a:ext cx="383040" cy="383040"/>
           </a:xfrm>
           <a:prstGeom prst="ellipse">
             <a:avLst/>
@@ -24995,7 +24995,7 @@
         <p:spPr>
           <a:xfrm>
             <a:off x="822960" y="2423160"/>
-            <a:ext cx="383400" cy="383400"/>
+            <a:ext cx="383040" cy="383040"/>
           </a:xfrm>
           <a:prstGeom prst="rect">
             <a:avLst/>
@@ -25056,7 +25056,7 @@
         <p:spPr>
           <a:xfrm>
             <a:off x="1435680" y="2423160"/>
-            <a:ext cx="9582120" cy="383400"/>
+            <a:ext cx="9581760" cy="383040"/>
           </a:xfrm>
           <a:prstGeom prst="rect">
             <a:avLst/>
@@ -25117,7 +25117,7 @@
         <p:spPr>
           <a:xfrm>
             <a:off x="822960" y="3300840"/>
-            <a:ext cx="383400" cy="383400"/>
+            <a:ext cx="383040" cy="383040"/>
           </a:xfrm>
           <a:prstGeom prst="ellipse">
             <a:avLst/>
@@ -25160,7 +25160,7 @@
         <p:spPr>
           <a:xfrm>
             <a:off x="822960" y="3300840"/>
-            <a:ext cx="383400" cy="383400"/>
+            <a:ext cx="383040" cy="383040"/>
           </a:xfrm>
           <a:prstGeom prst="rect">
             <a:avLst/>
@@ -25221,7 +25221,7 @@
         <p:spPr>
           <a:xfrm>
             <a:off x="1435680" y="3300840"/>
-            <a:ext cx="9582120" cy="383400"/>
+            <a:ext cx="9581760" cy="383040"/>
           </a:xfrm>
           <a:prstGeom prst="rect">
             <a:avLst/>
@@ -25282,7 +25282,7 @@
         <p:spPr>
           <a:xfrm>
             <a:off x="822960" y="4178880"/>
-            <a:ext cx="383400" cy="383400"/>
+            <a:ext cx="383040" cy="383040"/>
           </a:xfrm>
           <a:prstGeom prst="ellipse">
             <a:avLst/>
@@ -25325,7 +25325,7 @@
         <p:spPr>
           <a:xfrm>
             <a:off x="822960" y="4178880"/>
-            <a:ext cx="383400" cy="383400"/>
+            <a:ext cx="383040" cy="383040"/>
           </a:xfrm>
           <a:prstGeom prst="rect">
             <a:avLst/>
@@ -25386,7 +25386,7 @@
         <p:spPr>
           <a:xfrm>
             <a:off x="1435680" y="4178880"/>
-            <a:ext cx="9582120" cy="383400"/>
+            <a:ext cx="9581760" cy="383040"/>
           </a:xfrm>
           <a:prstGeom prst="rect">
             <a:avLst/>
@@ -25447,7 +25447,7 @@
         <p:spPr>
           <a:xfrm>
             <a:off x="822960" y="5056560"/>
-            <a:ext cx="383400" cy="383400"/>
+            <a:ext cx="383040" cy="383040"/>
           </a:xfrm>
           <a:prstGeom prst="ellipse">
             <a:avLst/>
@@ -25490,7 +25490,7 @@
         <p:spPr>
           <a:xfrm>
             <a:off x="822960" y="5056560"/>
-            <a:ext cx="383400" cy="383400"/>
+            <a:ext cx="383040" cy="383040"/>
           </a:xfrm>
           <a:prstGeom prst="rect">
             <a:avLst/>
@@ -25551,7 +25551,7 @@
         <p:spPr>
           <a:xfrm>
             <a:off x="1435680" y="5056560"/>
-            <a:ext cx="9582120" cy="383400"/>
+            <a:ext cx="9581760" cy="383040"/>
           </a:xfrm>
           <a:prstGeom prst="rect">
             <a:avLst/>
@@ -25612,7 +25612,7 @@
         <p:spPr>
           <a:xfrm>
             <a:off x="457200" y="6446520"/>
-            <a:ext cx="7314480" cy="273600"/>
+            <a:ext cx="7314120" cy="273240"/>
           </a:xfrm>
           <a:prstGeom prst="rect">
             <a:avLst/>
@@ -25673,7 +25673,7 @@
         <p:spPr>
           <a:xfrm>
             <a:off x="11521440" y="6446520"/>
-            <a:ext cx="456480" cy="273600"/>
+            <a:ext cx="456120" cy="273240"/>
           </a:xfrm>
           <a:prstGeom prst="rect">
             <a:avLst/>
@@ -25771,7 +25771,7 @@
         <p:spPr>
           <a:xfrm>
             <a:off x="-1828800" y="4114800"/>
-            <a:ext cx="5485680" cy="5485680"/>
+            <a:ext cx="5485320" cy="5485320"/>
           </a:xfrm>
           <a:prstGeom prst="ellipse">
             <a:avLst/>
@@ -25814,7 +25814,7 @@
         <p:spPr>
           <a:xfrm>
             <a:off x="9601200" y="-2286000"/>
-            <a:ext cx="5485680" cy="5485680"/>
+            <a:ext cx="5485320" cy="5485320"/>
           </a:xfrm>
           <a:prstGeom prst="ellipse">
             <a:avLst/>
@@ -25857,7 +25857,7 @@
         <p:spPr>
           <a:xfrm>
             <a:off x="5596200" y="731520"/>
-            <a:ext cx="1005120" cy="1005120"/>
+            <a:ext cx="1004760" cy="1004760"/>
           </a:xfrm>
           <a:prstGeom prst="ellipse">
             <a:avLst/>
@@ -25904,7 +25904,7 @@
         <p:spPr>
           <a:xfrm>
             <a:off x="5742360" y="877680"/>
-            <a:ext cx="703440" cy="703440"/>
+            <a:ext cx="703080" cy="703080"/>
           </a:xfrm>
           <a:prstGeom prst="rect">
             <a:avLst/>
@@ -25924,7 +25924,7 @@
         <p:spPr>
           <a:xfrm>
             <a:off x="914400" y="1965960"/>
-            <a:ext cx="10359360" cy="365040"/>
+            <a:ext cx="10359000" cy="364680"/>
           </a:xfrm>
           <a:prstGeom prst="rect">
             <a:avLst/>
@@ -25985,7 +25985,7 @@
         <p:spPr>
           <a:xfrm>
             <a:off x="914400" y="2377440"/>
-            <a:ext cx="10359360" cy="2010960"/>
+            <a:ext cx="10359000" cy="2010600"/>
           </a:xfrm>
           <a:prstGeom prst="rect">
             <a:avLst/>
@@ -26046,7 +26046,7 @@
         <p:spPr>
           <a:xfrm>
             <a:off x="1463040" y="4572000"/>
-            <a:ext cx="9262080" cy="1096560"/>
+            <a:ext cx="9261720" cy="1096200"/>
           </a:xfrm>
           <a:prstGeom prst="rect">
             <a:avLst/>
@@ -26107,7 +26107,7 @@
         <p:spPr>
           <a:xfrm>
             <a:off x="11521440" y="6446520"/>
-            <a:ext cx="456480" cy="273600"/>
+            <a:ext cx="456120" cy="273240"/>
           </a:xfrm>
           <a:prstGeom prst="rect">
             <a:avLst/>
@@ -26205,7 +26205,7 @@
         <p:spPr>
           <a:xfrm>
             <a:off x="10515600" y="5669280"/>
-            <a:ext cx="3199680" cy="3199680"/>
+            <a:ext cx="3199320" cy="3199320"/>
           </a:xfrm>
           <a:prstGeom prst="roundRect">
             <a:avLst>
@@ -26250,7 +26250,7 @@
         <p:spPr>
           <a:xfrm>
             <a:off x="457200" y="457200"/>
-            <a:ext cx="639360" cy="639360"/>
+            <a:ext cx="639000" cy="639000"/>
           </a:xfrm>
           <a:prstGeom prst="ellipse">
             <a:avLst/>
@@ -26297,7 +26297,7 @@
         <p:spPr>
           <a:xfrm>
             <a:off x="548640" y="548640"/>
-            <a:ext cx="447480" cy="447480"/>
+            <a:ext cx="447120" cy="447120"/>
           </a:xfrm>
           <a:prstGeom prst="rect">
             <a:avLst/>
@@ -26317,7 +26317,7 @@
         <p:spPr>
           <a:xfrm>
             <a:off x="1280160" y="457200"/>
-            <a:ext cx="10423440" cy="639360"/>
+            <a:ext cx="10423080" cy="639000"/>
           </a:xfrm>
           <a:prstGeom prst="rect">
             <a:avLst/>
@@ -26378,7 +26378,7 @@
         <p:spPr>
           <a:xfrm>
             <a:off x="457200" y="1554480"/>
-            <a:ext cx="3656880" cy="4662720"/>
+            <a:ext cx="3656520" cy="4662360"/>
           </a:xfrm>
           <a:prstGeom prst="roundRect">
             <a:avLst>
@@ -26423,7 +26423,7 @@
         <p:spPr>
           <a:xfrm>
             <a:off x="1508760" y="2194560"/>
-            <a:ext cx="1553760" cy="1553760"/>
+            <a:ext cx="1553400" cy="1553400"/>
           </a:xfrm>
           <a:prstGeom prst="ellipse">
             <a:avLst/>
@@ -26470,7 +26470,7 @@
         <p:spPr>
           <a:xfrm>
             <a:off x="1746360" y="2423160"/>
-            <a:ext cx="1087560" cy="1087560"/>
+            <a:ext cx="1087200" cy="1087200"/>
           </a:xfrm>
           <a:prstGeom prst="rect">
             <a:avLst/>
@@ -26490,7 +26490,7 @@
         <p:spPr>
           <a:xfrm>
             <a:off x="640080" y="3977640"/>
-            <a:ext cx="3291120" cy="1736640"/>
+            <a:ext cx="3290760" cy="1736280"/>
           </a:xfrm>
           <a:prstGeom prst="rect">
             <a:avLst/>
@@ -26611,7 +26611,7 @@
         <p:spPr>
           <a:xfrm>
             <a:off x="4572000" y="1737360"/>
-            <a:ext cx="7131600" cy="4114080"/>
+            <a:ext cx="7131240" cy="4113720"/>
           </a:xfrm>
           <a:prstGeom prst="rect">
             <a:avLst/>
@@ -26782,7 +26782,7 @@
         <p:spPr>
           <a:xfrm>
             <a:off x="457200" y="6446520"/>
-            <a:ext cx="7314480" cy="273600"/>
+            <a:ext cx="7314120" cy="273240"/>
           </a:xfrm>
           <a:prstGeom prst="rect">
             <a:avLst/>
@@ -26843,7 +26843,7 @@
         <p:spPr>
           <a:xfrm>
             <a:off x="11521440" y="6446520"/>
-            <a:ext cx="456480" cy="273600"/>
+            <a:ext cx="456120" cy="273240"/>
           </a:xfrm>
           <a:prstGeom prst="rect">
             <a:avLst/>
@@ -26941,7 +26941,7 @@
         <p:spPr>
           <a:xfrm>
             <a:off x="-1828800" y="4114800"/>
-            <a:ext cx="5485680" cy="5485680"/>
+            <a:ext cx="5485320" cy="5485320"/>
           </a:xfrm>
           <a:prstGeom prst="ellipse">
             <a:avLst/>
@@ -26984,7 +26984,7 @@
         <p:spPr>
           <a:xfrm>
             <a:off x="9601200" y="-2286000"/>
-            <a:ext cx="5485680" cy="5485680"/>
+            <a:ext cx="5485320" cy="5485320"/>
           </a:xfrm>
           <a:prstGeom prst="ellipse">
             <a:avLst/>
@@ -27027,7 +27027,7 @@
         <p:spPr>
           <a:xfrm>
             <a:off x="5596200" y="731520"/>
-            <a:ext cx="1005120" cy="1005120"/>
+            <a:ext cx="1004760" cy="1004760"/>
           </a:xfrm>
           <a:prstGeom prst="ellipse">
             <a:avLst/>
@@ -27074,7 +27074,7 @@
         <p:spPr>
           <a:xfrm>
             <a:off x="5742360" y="877680"/>
-            <a:ext cx="703440" cy="703440"/>
+            <a:ext cx="703080" cy="703080"/>
           </a:xfrm>
           <a:prstGeom prst="rect">
             <a:avLst/>
@@ -27094,7 +27094,7 @@
         <p:spPr>
           <a:xfrm>
             <a:off x="914400" y="1965960"/>
-            <a:ext cx="10359360" cy="365040"/>
+            <a:ext cx="10359000" cy="364680"/>
           </a:xfrm>
           <a:prstGeom prst="rect">
             <a:avLst/>
@@ -27155,7 +27155,7 @@
         <p:spPr>
           <a:xfrm>
             <a:off x="914400" y="2377440"/>
-            <a:ext cx="10359360" cy="2010960"/>
+            <a:ext cx="10359000" cy="2010600"/>
           </a:xfrm>
           <a:prstGeom prst="rect">
             <a:avLst/>
@@ -27216,7 +27216,7 @@
         <p:spPr>
           <a:xfrm>
             <a:off x="1463040" y="4572000"/>
-            <a:ext cx="9262080" cy="1096560"/>
+            <a:ext cx="9261720" cy="1096200"/>
           </a:xfrm>
           <a:prstGeom prst="rect">
             <a:avLst/>
@@ -27277,7 +27277,7 @@
         <p:spPr>
           <a:xfrm>
             <a:off x="11521440" y="6446520"/>
-            <a:ext cx="456480" cy="273600"/>
+            <a:ext cx="456120" cy="273240"/>
           </a:xfrm>
           <a:prstGeom prst="rect">
             <a:avLst/>
@@ -27375,7 +27375,7 @@
         <p:spPr>
           <a:xfrm>
             <a:off x="457200" y="457200"/>
-            <a:ext cx="639360" cy="639360"/>
+            <a:ext cx="639000" cy="639000"/>
           </a:xfrm>
           <a:prstGeom prst="ellipse">
             <a:avLst/>
@@ -27422,7 +27422,7 @@
         <p:spPr>
           <a:xfrm>
             <a:off x="548640" y="548640"/>
-            <a:ext cx="447480" cy="447480"/>
+            <a:ext cx="447120" cy="447120"/>
           </a:xfrm>
           <a:prstGeom prst="rect">
             <a:avLst/>
@@ -27442,7 +27442,7 @@
         <p:spPr>
           <a:xfrm>
             <a:off x="1280160" y="457200"/>
-            <a:ext cx="10423440" cy="639360"/>
+            <a:ext cx="10423080" cy="639000"/>
           </a:xfrm>
           <a:prstGeom prst="rect">
             <a:avLst/>
@@ -27503,7 +27503,7 @@
         <p:spPr>
           <a:xfrm>
             <a:off x="914400" y="1737360"/>
-            <a:ext cx="10359360" cy="4205520"/>
+            <a:ext cx="10359000" cy="4205160"/>
           </a:xfrm>
           <a:prstGeom prst="roundRect">
             <a:avLst>
@@ -27551,7 +27551,7 @@
         <p:spPr>
           <a:xfrm>
             <a:off x="1188720" y="1920240"/>
-            <a:ext cx="9783360" cy="365040"/>
+            <a:ext cx="9783000" cy="364680"/>
           </a:xfrm>
           <a:prstGeom prst="rect">
             <a:avLst/>
@@ -27612,7 +27612,7 @@
         <p:spPr>
           <a:xfrm>
             <a:off x="1188720" y="2377440"/>
-            <a:ext cx="9783360" cy="365040"/>
+            <a:ext cx="9783000" cy="364680"/>
           </a:xfrm>
           <a:prstGeom prst="rect">
             <a:avLst/>
@@ -27673,7 +27673,7 @@
         <p:spPr>
           <a:xfrm>
             <a:off x="1463040" y="2926080"/>
-            <a:ext cx="9262080" cy="2651040"/>
+            <a:ext cx="9261720" cy="2650680"/>
           </a:xfrm>
           <a:prstGeom prst="roundRect">
             <a:avLst>
@@ -27718,7 +27718,7 @@
         <p:spPr>
           <a:xfrm>
             <a:off x="1737360" y="3108960"/>
-            <a:ext cx="8686080" cy="365040"/>
+            <a:ext cx="8685720" cy="364680"/>
           </a:xfrm>
           <a:prstGeom prst="rect">
             <a:avLst/>
@@ -27779,7 +27779,7 @@
         <p:spPr>
           <a:xfrm>
             <a:off x="1737360" y="3520440"/>
-            <a:ext cx="8686080" cy="365040"/>
+            <a:ext cx="8685720" cy="364680"/>
           </a:xfrm>
           <a:prstGeom prst="rect">
             <a:avLst/>
@@ -27840,7 +27840,7 @@
         <p:spPr>
           <a:xfrm>
             <a:off x="1737360" y="4023360"/>
-            <a:ext cx="8686080" cy="456480"/>
+            <a:ext cx="8685720" cy="456120"/>
           </a:xfrm>
           <a:prstGeom prst="rect">
             <a:avLst/>
@@ -27901,7 +27901,7 @@
         <p:spPr>
           <a:xfrm>
             <a:off x="1737360" y="4709160"/>
-            <a:ext cx="8594640" cy="776520"/>
+            <a:ext cx="8594280" cy="776160"/>
           </a:xfrm>
           <a:prstGeom prst="rect">
             <a:avLst/>
@@ -27962,7 +27962,7 @@
         <p:spPr>
           <a:xfrm>
             <a:off x="457200" y="6446520"/>
-            <a:ext cx="7314480" cy="273600"/>
+            <a:ext cx="7314120" cy="273240"/>
           </a:xfrm>
           <a:prstGeom prst="rect">
             <a:avLst/>
@@ -28023,7 +28023,7 @@
         <p:spPr>
           <a:xfrm>
             <a:off x="11521440" y="6446520"/>
-            <a:ext cx="456480" cy="273600"/>
+            <a:ext cx="456120" cy="273240"/>
           </a:xfrm>
           <a:prstGeom prst="rect">
             <a:avLst/>
@@ -28121,7 +28121,7 @@
         <p:spPr>
           <a:xfrm>
             <a:off x="457200" y="457200"/>
-            <a:ext cx="639360" cy="639360"/>
+            <a:ext cx="639000" cy="639000"/>
           </a:xfrm>
           <a:prstGeom prst="ellipse">
             <a:avLst/>
@@ -28168,7 +28168,7 @@
         <p:spPr>
           <a:xfrm>
             <a:off x="548640" y="548640"/>
-            <a:ext cx="447480" cy="447480"/>
+            <a:ext cx="447120" cy="447120"/>
           </a:xfrm>
           <a:prstGeom prst="rect">
             <a:avLst/>
@@ -28188,7 +28188,7 @@
         <p:spPr>
           <a:xfrm>
             <a:off x="1280160" y="457200"/>
-            <a:ext cx="10423440" cy="639360"/>
+            <a:ext cx="10423080" cy="639000"/>
           </a:xfrm>
           <a:prstGeom prst="rect">
             <a:avLst/>
@@ -28248,8 +28248,8 @@
         </p:nvSpPr>
         <p:spPr>
           <a:xfrm>
-            <a:off x="548640" y="1828800"/>
-            <a:ext cx="4754160" cy="4022640"/>
+            <a:off x="548640" y="1936800"/>
+            <a:ext cx="4753800" cy="4022280"/>
           </a:xfrm>
           <a:prstGeom prst="rect">
             <a:avLst/>
@@ -28284,7 +28284,7 @@
               <a:buChar char=""/>
             </a:pPr>
             <a:r>
-              <a:rPr lang="en-US" sz="1350" b="0" u="none" strike="noStrike">
+              <a:rPr lang="en-US" sz="2200" b="0" u="none" strike="noStrike">
                 <a:solidFill>
                   <a:srgbClr val="1B2420"/>
                 </a:solidFill>
@@ -28295,7 +28295,7 @@
               </a:rPr>
               <a:t>make_multiplier(factor) returns a brand-new function, customized with whatever factor was passed in</a:t>
             </a:r>
-            <a:endParaRPr lang="en-US" sz="1350" b="0" u="none" strike="noStrike">
+            <a:endParaRPr lang="en-US" sz="2200" b="0" u="none" strike="noStrike">
               <a:solidFill>
                 <a:srgbClr val="000000"/>
               </a:solidFill>
@@ -28319,7 +28319,7 @@
               <a:buChar char=""/>
             </a:pPr>
             <a:r>
-              <a:rPr lang="en-US" sz="1350" b="0" u="none" strike="noStrike">
+              <a:rPr lang="en-US" sz="2200" b="0" u="none" strike="noStrike">
                 <a:solidFill>
                   <a:srgbClr val="1B2420"/>
                 </a:solidFill>
@@ -28330,7 +28330,7 @@
               </a:rPr>
               <a:t>Each returned function keeps its own private copy of factor — double and triple don’t interfere with each other</a:t>
             </a:r>
-            <a:endParaRPr lang="en-US" sz="1350" b="0" u="none" strike="noStrike">
+            <a:endParaRPr lang="en-US" sz="2200" b="0" u="none" strike="noStrike">
               <a:solidFill>
                 <a:srgbClr val="000000"/>
               </a:solidFill>
@@ -28354,7 +28354,7 @@
               <a:buChar char=""/>
             </a:pPr>
             <a:r>
-              <a:rPr lang="en-US" sz="1350" b="0" u="none" strike="noStrike">
+              <a:rPr lang="en-US" sz="2200" b="0" u="none" strike="noStrike">
                 <a:solidFill>
                   <a:srgbClr val="1B2420"/>
                 </a:solidFill>
@@ -28365,7 +28365,7 @@
               </a:rPr>
               <a:t>This "function that builds functions" pattern shows up constantly in real configuration and callback code</a:t>
             </a:r>
-            <a:endParaRPr lang="en-US" sz="1350" b="0" u="none" strike="noStrike">
+            <a:endParaRPr lang="en-US" sz="2200" b="0" u="none" strike="noStrike">
               <a:solidFill>
                 <a:srgbClr val="000000"/>
               </a:solidFill>
@@ -28385,7 +28385,7 @@
         <p:spPr>
           <a:xfrm>
             <a:off x="5486400" y="1691640"/>
-            <a:ext cx="6217200" cy="4342680"/>
+            <a:ext cx="6216840" cy="4342320"/>
           </a:xfrm>
           <a:prstGeom prst="roundRect">
             <a:avLst>
@@ -28430,7 +28430,7 @@
         <p:spPr>
           <a:xfrm>
             <a:off x="5806440" y="1965960"/>
-            <a:ext cx="5577120" cy="3794040"/>
+            <a:ext cx="5576760" cy="3793680"/>
           </a:xfrm>
           <a:prstGeom prst="rect">
             <a:avLst/>
@@ -28460,7 +28460,7 @@
               </a:tabLst>
             </a:pPr>
             <a:r>
-              <a:rPr lang="en-US" sz="1250" b="0" u="none" strike="noStrike">
+              <a:rPr lang="en-US" sz="1800" b="0" u="none" strike="noStrike">
                 <a:solidFill>
                   <a:srgbClr val="C9D3CC"/>
                 </a:solidFill>
@@ -28471,7 +28471,7 @@
               </a:rPr>
               <a:t>def make_multiplier(factor):</a:t>
             </a:r>
-            <a:endParaRPr lang="en-US" sz="1250" b="0" u="none" strike="noStrike">
+            <a:endParaRPr lang="en-US" sz="1800" b="0" u="none" strike="noStrike">
               <a:solidFill>
                 <a:srgbClr val="000000"/>
               </a:solidFill>
@@ -28490,7 +28490,7 @@
               </a:tabLst>
             </a:pPr>
             <a:r>
-              <a:rPr lang="en-US" sz="1250" b="0" u="none" strike="noStrike">
+              <a:rPr lang="en-US" sz="1800" b="0" u="none" strike="noStrike">
                 <a:solidFill>
                   <a:srgbClr val="C9D3CC"/>
                 </a:solidFill>
@@ -28501,7 +28501,7 @@
               </a:rPr>
               <a:t>    def multiply(n):</a:t>
             </a:r>
-            <a:endParaRPr lang="en-US" sz="1250" b="0" u="none" strike="noStrike">
+            <a:endParaRPr lang="en-US" sz="1800" b="0" u="none" strike="noStrike">
               <a:solidFill>
                 <a:srgbClr val="000000"/>
               </a:solidFill>
@@ -28520,7 +28520,7 @@
               </a:tabLst>
             </a:pPr>
             <a:r>
-              <a:rPr lang="en-US" sz="1250" b="0" u="none" strike="noStrike">
+              <a:rPr lang="en-US" sz="1800" b="0" u="none" strike="noStrike">
                 <a:solidFill>
                   <a:srgbClr val="C9D3CC"/>
                 </a:solidFill>
@@ -28532,7 +28532,7 @@
               <a:t>        return n * factor  </a:t>
             </a:r>
             <a:r>
-              <a:rPr lang="en-US" sz="1250" b="0" u="none" strike="noStrike">
+              <a:rPr lang="en-US" sz="1800" b="0" u="none" strike="noStrike">
                 <a:solidFill>
                   <a:srgbClr val="7C8A80"/>
                 </a:solidFill>
@@ -28543,7 +28543,7 @@
               </a:rPr>
               <a:t>  # remembers "factor"</a:t>
             </a:r>
-            <a:endParaRPr lang="en-US" sz="1250" b="0" u="none" strike="noStrike">
+            <a:endParaRPr lang="en-US" sz="1800" b="0" u="none" strike="noStrike">
               <a:solidFill>
                 <a:srgbClr val="000000"/>
               </a:solidFill>
@@ -28562,7 +28562,7 @@
               </a:tabLst>
             </a:pPr>
             <a:r>
-              <a:rPr lang="en-US" sz="1250" b="0" u="none" strike="noStrike">
+              <a:rPr lang="en-US" sz="1800" b="0" u="none" strike="noStrike">
                 <a:solidFill>
                   <a:srgbClr val="C9D3CC"/>
                 </a:solidFill>
@@ -28573,7 +28573,7 @@
               </a:rPr>
               <a:t>    return multiply</a:t>
             </a:r>
-            <a:endParaRPr lang="en-US" sz="1250" b="0" u="none" strike="noStrike">
+            <a:endParaRPr lang="en-US" sz="1800" b="0" u="none" strike="noStrike">
               <a:solidFill>
                 <a:srgbClr val="000000"/>
               </a:solidFill>
@@ -28592,7 +28592,7 @@
               </a:tabLst>
             </a:pPr>
             <a:r>
-              <a:rPr lang="en-US" sz="1250" b="0" u="none" strike="noStrike">
+              <a:rPr lang="en-US" sz="1800" b="0" u="none" strike="noStrike">
                 <a:solidFill>
                   <a:srgbClr val="C9D3CC"/>
                 </a:solidFill>
@@ -28603,7 +28603,7 @@
               </a:rPr>
               <a:t> </a:t>
             </a:r>
-            <a:endParaRPr lang="en-US" sz="1250" b="0" u="none" strike="noStrike">
+            <a:endParaRPr lang="en-US" sz="1800" b="0" u="none" strike="noStrike">
               <a:solidFill>
                 <a:srgbClr val="000000"/>
               </a:solidFill>
@@ -28622,7 +28622,7 @@
               </a:tabLst>
             </a:pPr>
             <a:r>
-              <a:rPr lang="en-US" sz="1250" b="0" u="none" strike="noStrike">
+              <a:rPr lang="en-US" sz="1800" b="0" u="none" strike="noStrike">
                 <a:solidFill>
                   <a:srgbClr val="C9D3CC"/>
                 </a:solidFill>
@@ -28633,7 +28633,7 @@
               </a:rPr>
               <a:t>double = make_multiplier(2)</a:t>
             </a:r>
-            <a:endParaRPr lang="en-US" sz="1250" b="0" u="none" strike="noStrike">
+            <a:endParaRPr lang="en-US" sz="1800" b="0" u="none" strike="noStrike">
               <a:solidFill>
                 <a:srgbClr val="000000"/>
               </a:solidFill>
@@ -28652,7 +28652,7 @@
               </a:tabLst>
             </a:pPr>
             <a:r>
-              <a:rPr lang="en-US" sz="1250" b="0" u="none" strike="noStrike">
+              <a:rPr lang="en-US" sz="1800" b="0" u="none" strike="noStrike">
                 <a:solidFill>
                   <a:srgbClr val="C9D3CC"/>
                 </a:solidFill>
@@ -28663,7 +28663,7 @@
               </a:rPr>
               <a:t>triple = make_multiplier(3)</a:t>
             </a:r>
-            <a:endParaRPr lang="en-US" sz="1250" b="0" u="none" strike="noStrike">
+            <a:endParaRPr lang="en-US" sz="1800" b="0" u="none" strike="noStrike">
               <a:solidFill>
                 <a:srgbClr val="000000"/>
               </a:solidFill>
@@ -28682,7 +28682,7 @@
               </a:tabLst>
             </a:pPr>
             <a:r>
-              <a:rPr lang="en-US" sz="1250" b="0" u="none" strike="noStrike">
+              <a:rPr lang="en-US" sz="1800" b="0" u="none" strike="noStrike">
                 <a:solidFill>
                   <a:srgbClr val="C9D3CC"/>
                 </a:solidFill>
@@ -28693,7 +28693,7 @@
               </a:rPr>
               <a:t> </a:t>
             </a:r>
-            <a:endParaRPr lang="en-US" sz="1250" b="0" u="none" strike="noStrike">
+            <a:endParaRPr lang="en-US" sz="1800" b="0" u="none" strike="noStrike">
               <a:solidFill>
                 <a:srgbClr val="000000"/>
               </a:solidFill>
@@ -28712,7 +28712,7 @@
               </a:tabLst>
             </a:pPr>
             <a:r>
-              <a:rPr lang="en-US" sz="1250" b="0" u="none" strike="noStrike">
+              <a:rPr lang="en-US" sz="1800" b="0" u="none" strike="noStrike">
                 <a:solidFill>
                   <a:srgbClr val="C9D3CC"/>
                 </a:solidFill>
@@ -28724,7 +28724,7 @@
               <a:t>double(5) </a:t>
             </a:r>
             <a:r>
-              <a:rPr lang="en-US" sz="1250" b="0" u="none" strike="noStrike">
+              <a:rPr lang="en-US" sz="1800" b="0" u="none" strike="noStrike">
                 <a:solidFill>
                   <a:srgbClr val="7C8A80"/>
                 </a:solidFill>
@@ -28735,7 +28735,7 @@
               </a:rPr>
               <a:t>  # 10</a:t>
             </a:r>
-            <a:endParaRPr lang="en-US" sz="1250" b="0" u="none" strike="noStrike">
+            <a:endParaRPr lang="en-US" sz="1800" b="0" u="none" strike="noStrike">
               <a:solidFill>
                 <a:srgbClr val="000000"/>
               </a:solidFill>
@@ -28754,7 +28754,7 @@
               </a:tabLst>
             </a:pPr>
             <a:r>
-              <a:rPr lang="en-US" sz="1250" b="0" u="none" strike="noStrike">
+              <a:rPr lang="en-US" sz="1800" b="0" u="none" strike="noStrike">
                 <a:solidFill>
                   <a:srgbClr val="C9D3CC"/>
                 </a:solidFill>
@@ -28766,7 +28766,7 @@
               <a:t>triple(5) </a:t>
             </a:r>
             <a:r>
-              <a:rPr lang="en-US" sz="1250" b="0" u="none" strike="noStrike">
+              <a:rPr lang="en-US" sz="1800" b="0" u="none" strike="noStrike">
                 <a:solidFill>
                   <a:srgbClr val="7C8A80"/>
                 </a:solidFill>
@@ -28777,7 +28777,7 @@
               </a:rPr>
               <a:t>  # 15</a:t>
             </a:r>
-            <a:endParaRPr lang="en-US" sz="1250" b="0" u="none" strike="noStrike">
+            <a:endParaRPr lang="en-US" sz="1800" b="0" u="none" strike="noStrike">
               <a:solidFill>
                 <a:srgbClr val="000000"/>
               </a:solidFill>
@@ -28797,7 +28797,7 @@
         <p:spPr>
           <a:xfrm>
             <a:off x="457200" y="6446520"/>
-            <a:ext cx="7314480" cy="273600"/>
+            <a:ext cx="7314120" cy="273240"/>
           </a:xfrm>
           <a:prstGeom prst="rect">
             <a:avLst/>
@@ -28858,7 +28858,7 @@
         <p:spPr>
           <a:xfrm>
             <a:off x="11521440" y="6446520"/>
-            <a:ext cx="456480" cy="273600"/>
+            <a:ext cx="456120" cy="273240"/>
           </a:xfrm>
           <a:prstGeom prst="rect">
             <a:avLst/>
@@ -28956,7 +28956,7 @@
         <p:spPr>
           <a:xfrm>
             <a:off x="457200" y="457200"/>
-            <a:ext cx="639360" cy="639360"/>
+            <a:ext cx="639000" cy="639000"/>
           </a:xfrm>
           <a:prstGeom prst="ellipse">
             <a:avLst/>
@@ -29003,7 +29003,7 @@
         <p:spPr>
           <a:xfrm>
             <a:off x="548640" y="548640"/>
-            <a:ext cx="447480" cy="447480"/>
+            <a:ext cx="447120" cy="447120"/>
           </a:xfrm>
           <a:prstGeom prst="rect">
             <a:avLst/>
@@ -29023,7 +29023,7 @@
         <p:spPr>
           <a:xfrm>
             <a:off x="1280160" y="457200"/>
-            <a:ext cx="10423440" cy="639360"/>
+            <a:ext cx="10423080" cy="639000"/>
           </a:xfrm>
           <a:prstGeom prst="rect">
             <a:avLst/>
@@ -29084,7 +29084,7 @@
         <p:spPr>
           <a:xfrm>
             <a:off x="548640" y="1828800"/>
-            <a:ext cx="4754160" cy="4022640"/>
+            <a:ext cx="4753800" cy="4022280"/>
           </a:xfrm>
           <a:prstGeom prst="rect">
             <a:avLst/>
@@ -29119,7 +29119,7 @@
               <a:buChar char=""/>
             </a:pPr>
             <a:r>
-              <a:rPr lang="en-US" sz="1350" b="0" u="none" strike="noStrike">
+              <a:rPr lang="en-US" sz="2000" b="0" u="none" strike="noStrike">
                 <a:solidFill>
                   <a:srgbClr val="1B2420"/>
                 </a:solidFill>
@@ -29128,9 +29128,21 @@
                 <a:latin typeface="Calibri"/>
                 <a:ea typeface="Calibri"/>
               </a:rPr>
-              <a:t>By default, an inner function can read an outer variable, but assigning to it creates a new local variable instead</a:t>
-            </a:r>
-            <a:endParaRPr lang="en-US" sz="1350" b="0" u="none" strike="noStrike">
+              <a:t>By default, an inner function can read an outer variable, but assigning to it </a:t>
+            </a:r>
+            <a:r>
+              <a:rPr lang="en-US" sz="2000" b="0" u="none" strike="noStrike">
+                <a:solidFill>
+                  <a:srgbClr val="1B2420"/>
+                </a:solidFill>
+                <a:effectLst/>
+                <a:uFillTx/>
+                <a:latin typeface="Calibri"/>
+                <a:ea typeface="Calibri"/>
+              </a:rPr>
+              <a:t>creates a new local variable instead</a:t>
+            </a:r>
+            <a:endParaRPr lang="en-US" sz="2000" b="0" u="none" strike="noStrike">
               <a:solidFill>
                 <a:srgbClr val="000000"/>
               </a:solidFill>
@@ -29154,7 +29166,7 @@
               <a:buChar char=""/>
             </a:pPr>
             <a:r>
-              <a:rPr lang="en-US" sz="1350" b="0" u="none" strike="noStrike">
+              <a:rPr lang="en-US" sz="2000" b="0" u="none" strike="noStrike">
                 <a:solidFill>
                   <a:srgbClr val="1B2420"/>
                 </a:solidFill>
@@ -29163,9 +29175,21 @@
                 <a:latin typeface="Calibri"/>
                 <a:ea typeface="Calibri"/>
               </a:rPr>
-              <a:t>nonlocal tells Python: "this name refers to the enclosing function’s variable, not a new local one"</a:t>
-            </a:r>
-            <a:endParaRPr lang="en-US" sz="1350" b="0" u="none" strike="noStrike">
+              <a:t>nonlocal tells Python: "this name refers to the enclosing function’s variable, not a </a:t>
+            </a:r>
+            <a:r>
+              <a:rPr lang="en-US" sz="2000" b="0" u="none" strike="noStrike">
+                <a:solidFill>
+                  <a:srgbClr val="1B2420"/>
+                </a:solidFill>
+                <a:effectLst/>
+                <a:uFillTx/>
+                <a:latin typeface="Calibri"/>
+                <a:ea typeface="Calibri"/>
+              </a:rPr>
+              <a:t>new local one"</a:t>
+            </a:r>
+            <a:endParaRPr lang="en-US" sz="2000" b="0" u="none" strike="noStrike">
               <a:solidFill>
                 <a:srgbClr val="000000"/>
               </a:solidFill>
@@ -29189,7 +29213,7 @@
               <a:buChar char=""/>
             </a:pPr>
             <a:r>
-              <a:rPr lang="en-US" sz="1350" b="0" u="none" strike="noStrike">
+              <a:rPr lang="en-US" sz="2000" b="0" u="none" strike="noStrike">
                 <a:solidFill>
                   <a:srgbClr val="1B2420"/>
                 </a:solidFill>
@@ -29198,9 +29222,21 @@
                 <a:latin typeface="Calibri"/>
                 <a:ea typeface="Calibri"/>
               </a:rPr>
-              <a:t>This is how a closure keeps running state between calls — like a counter that remembers its own count</a:t>
-            </a:r>
-            <a:endParaRPr lang="en-US" sz="1350" b="0" u="none" strike="noStrike">
+              <a:t>This is how a closure keeps running state between calls — like a counter that </a:t>
+            </a:r>
+            <a:r>
+              <a:rPr lang="en-US" sz="2000" b="0" u="none" strike="noStrike">
+                <a:solidFill>
+                  <a:srgbClr val="1B2420"/>
+                </a:solidFill>
+                <a:effectLst/>
+                <a:uFillTx/>
+                <a:latin typeface="Calibri"/>
+                <a:ea typeface="Calibri"/>
+              </a:rPr>
+              <a:t>remembers its own count</a:t>
+            </a:r>
+            <a:endParaRPr lang="en-US" sz="2000" b="0" u="none" strike="noStrike">
               <a:solidFill>
                 <a:srgbClr val="000000"/>
               </a:solidFill>
@@ -29220,7 +29256,7 @@
         <p:spPr>
           <a:xfrm>
             <a:off x="5486400" y="1691640"/>
-            <a:ext cx="6217200" cy="4342680"/>
+            <a:ext cx="6216840" cy="4342320"/>
           </a:xfrm>
           <a:prstGeom prst="roundRect">
             <a:avLst>
@@ -29265,7 +29301,7 @@
         <p:spPr>
           <a:xfrm>
             <a:off x="5806440" y="1965960"/>
-            <a:ext cx="5577120" cy="3794040"/>
+            <a:ext cx="5576760" cy="3793680"/>
           </a:xfrm>
           <a:prstGeom prst="rect">
             <a:avLst/>
@@ -29295,7 +29331,7 @@
               </a:tabLst>
             </a:pPr>
             <a:r>
-              <a:rPr lang="en-US" sz="1250" b="0" u="none" strike="noStrike">
+              <a:rPr lang="en-US" sz="1600" b="0" u="none" strike="noStrike">
                 <a:solidFill>
                   <a:srgbClr val="C9D3CC"/>
                 </a:solidFill>
@@ -29306,7 +29342,7 @@
               </a:rPr>
               <a:t>def make_counter():</a:t>
             </a:r>
-            <a:endParaRPr lang="en-US" sz="1250" b="0" u="none" strike="noStrike">
+            <a:endParaRPr lang="en-US" sz="1600" b="0" u="none" strike="noStrike">
               <a:solidFill>
                 <a:srgbClr val="000000"/>
               </a:solidFill>
@@ -29325,7 +29361,7 @@
               </a:tabLst>
             </a:pPr>
             <a:r>
-              <a:rPr lang="en-US" sz="1250" b="0" u="none" strike="noStrike">
+              <a:rPr lang="en-US" sz="1600" b="0" u="none" strike="noStrike">
                 <a:solidFill>
                   <a:srgbClr val="C9D3CC"/>
                 </a:solidFill>
@@ -29336,7 +29372,7 @@
               </a:rPr>
               <a:t>    count = 0</a:t>
             </a:r>
-            <a:endParaRPr lang="en-US" sz="1250" b="0" u="none" strike="noStrike">
+            <a:endParaRPr lang="en-US" sz="1600" b="0" u="none" strike="noStrike">
               <a:solidFill>
                 <a:srgbClr val="000000"/>
               </a:solidFill>
@@ -29355,7 +29391,7 @@
               </a:tabLst>
             </a:pPr>
             <a:r>
-              <a:rPr lang="en-US" sz="1250" b="0" u="none" strike="noStrike">
+              <a:rPr lang="en-US" sz="1600" b="0" u="none" strike="noStrike">
                 <a:solidFill>
                   <a:srgbClr val="C9D3CC"/>
                 </a:solidFill>
@@ -29366,7 +29402,7 @@
               </a:rPr>
               <a:t>    def increment():</a:t>
             </a:r>
-            <a:endParaRPr lang="en-US" sz="1250" b="0" u="none" strike="noStrike">
+            <a:endParaRPr lang="en-US" sz="1600" b="0" u="none" strike="noStrike">
               <a:solidFill>
                 <a:srgbClr val="000000"/>
               </a:solidFill>
@@ -29385,7 +29421,7 @@
               </a:tabLst>
             </a:pPr>
             <a:r>
-              <a:rPr lang="en-US" sz="1250" b="0" u="none" strike="noStrike">
+              <a:rPr lang="en-US" sz="1600" b="0" u="none" strike="noStrike">
                 <a:solidFill>
                   <a:srgbClr val="C9D3CC"/>
                 </a:solidFill>
@@ -29396,7 +29432,7 @@
               </a:rPr>
               <a:t>        nonlocal count</a:t>
             </a:r>
-            <a:endParaRPr lang="en-US" sz="1250" b="0" u="none" strike="noStrike">
+            <a:endParaRPr lang="en-US" sz="1600" b="0" u="none" strike="noStrike">
               <a:solidFill>
                 <a:srgbClr val="000000"/>
               </a:solidFill>
@@ -29415,7 +29451,7 @@
               </a:tabLst>
             </a:pPr>
             <a:r>
-              <a:rPr lang="en-US" sz="1250" b="0" u="none" strike="noStrike">
+              <a:rPr lang="en-US" sz="1600" b="0" u="none" strike="noStrike">
                 <a:solidFill>
                   <a:srgbClr val="C9D3CC"/>
                 </a:solidFill>
@@ -29426,7 +29462,7 @@
               </a:rPr>
               <a:t>        count += 1</a:t>
             </a:r>
-            <a:endParaRPr lang="en-US" sz="1250" b="0" u="none" strike="noStrike">
+            <a:endParaRPr lang="en-US" sz="1600" b="0" u="none" strike="noStrike">
               <a:solidFill>
                 <a:srgbClr val="000000"/>
               </a:solidFill>
@@ -29445,7 +29481,7 @@
               </a:tabLst>
             </a:pPr>
             <a:r>
-              <a:rPr lang="en-US" sz="1250" b="0" u="none" strike="noStrike">
+              <a:rPr lang="en-US" sz="1600" b="0" u="none" strike="noStrike">
                 <a:solidFill>
                   <a:srgbClr val="C9D3CC"/>
                 </a:solidFill>
@@ -29456,7 +29492,7 @@
               </a:rPr>
               <a:t>        return count</a:t>
             </a:r>
-            <a:endParaRPr lang="en-US" sz="1250" b="0" u="none" strike="noStrike">
+            <a:endParaRPr lang="en-US" sz="1600" b="0" u="none" strike="noStrike">
               <a:solidFill>
                 <a:srgbClr val="000000"/>
               </a:solidFill>
@@ -29475,7 +29511,7 @@
               </a:tabLst>
             </a:pPr>
             <a:r>
-              <a:rPr lang="en-US" sz="1250" b="0" u="none" strike="noStrike">
+              <a:rPr lang="en-US" sz="1600" b="0" u="none" strike="noStrike">
                 <a:solidFill>
                   <a:srgbClr val="C9D3CC"/>
                 </a:solidFill>
@@ -29486,7 +29522,7 @@
               </a:rPr>
               <a:t>    return increment</a:t>
             </a:r>
-            <a:endParaRPr lang="en-US" sz="1250" b="0" u="none" strike="noStrike">
+            <a:endParaRPr lang="en-US" sz="1600" b="0" u="none" strike="noStrike">
               <a:solidFill>
                 <a:srgbClr val="000000"/>
               </a:solidFill>
@@ -29505,7 +29541,7 @@
               </a:tabLst>
             </a:pPr>
             <a:r>
-              <a:rPr lang="en-US" sz="1250" b="0" u="none" strike="noStrike">
+              <a:rPr lang="en-US" sz="1600" b="0" u="none" strike="noStrike">
                 <a:solidFill>
                   <a:srgbClr val="C9D3CC"/>
                 </a:solidFill>
@@ -29516,7 +29552,7 @@
               </a:rPr>
               <a:t> </a:t>
             </a:r>
-            <a:endParaRPr lang="en-US" sz="1250" b="0" u="none" strike="noStrike">
+            <a:endParaRPr lang="en-US" sz="1600" b="0" u="none" strike="noStrike">
               <a:solidFill>
                 <a:srgbClr val="000000"/>
               </a:solidFill>
@@ -29535,7 +29571,7 @@
               </a:tabLst>
             </a:pPr>
             <a:r>
-              <a:rPr lang="en-US" sz="1250" b="0" u="none" strike="noStrike">
+              <a:rPr lang="en-US" sz="1600" b="0" u="none" strike="noStrike">
                 <a:solidFill>
                   <a:srgbClr val="C9D3CC"/>
                 </a:solidFill>
@@ -29546,7 +29582,7 @@
               </a:rPr>
               <a:t>counter = make_counter()</a:t>
             </a:r>
-            <a:endParaRPr lang="en-US" sz="1250" b="0" u="none" strike="noStrike">
+            <a:endParaRPr lang="en-US" sz="1600" b="0" u="none" strike="noStrike">
               <a:solidFill>
                 <a:srgbClr val="000000"/>
               </a:solidFill>
@@ -29565,7 +29601,7 @@
               </a:tabLst>
             </a:pPr>
             <a:r>
-              <a:rPr lang="en-US" sz="1250" b="0" u="none" strike="noStrike">
+              <a:rPr lang="en-US" sz="1600" b="0" u="none" strike="noStrike">
                 <a:solidFill>
                   <a:srgbClr val="C9D3CC"/>
                 </a:solidFill>
@@ -29577,7 +29613,7 @@
               <a:t>counter() </a:t>
             </a:r>
             <a:r>
-              <a:rPr lang="en-US" sz="1250" b="0" u="none" strike="noStrike">
+              <a:rPr lang="en-US" sz="1600" b="0" u="none" strike="noStrike">
                 <a:solidFill>
                   <a:srgbClr val="7C8A80"/>
                 </a:solidFill>
@@ -29588,7 +29624,7 @@
               </a:rPr>
               <a:t>  # 1</a:t>
             </a:r>
-            <a:endParaRPr lang="en-US" sz="1250" b="0" u="none" strike="noStrike">
+            <a:endParaRPr lang="en-US" sz="1600" b="0" u="none" strike="noStrike">
               <a:solidFill>
                 <a:srgbClr val="000000"/>
               </a:solidFill>
@@ -29607,7 +29643,7 @@
               </a:tabLst>
             </a:pPr>
             <a:r>
-              <a:rPr lang="en-US" sz="1250" b="0" u="none" strike="noStrike">
+              <a:rPr lang="en-US" sz="1600" b="0" u="none" strike="noStrike">
                 <a:solidFill>
                   <a:srgbClr val="C9D3CC"/>
                 </a:solidFill>
@@ -29619,7 +29655,7 @@
               <a:t>counter() </a:t>
             </a:r>
             <a:r>
-              <a:rPr lang="en-US" sz="1250" b="0" u="none" strike="noStrike">
+              <a:rPr lang="en-US" sz="1600" b="0" u="none" strike="noStrike">
                 <a:solidFill>
                   <a:srgbClr val="7C8A80"/>
                 </a:solidFill>
@@ -29630,7 +29666,7 @@
               </a:rPr>
               <a:t>  # 2</a:t>
             </a:r>
-            <a:endParaRPr lang="en-US" sz="1250" b="0" u="none" strike="noStrike">
+            <a:endParaRPr lang="en-US" sz="1600" b="0" u="none" strike="noStrike">
               <a:solidFill>
                 <a:srgbClr val="000000"/>
               </a:solidFill>
@@ -29649,7 +29685,7 @@
               </a:tabLst>
             </a:pPr>
             <a:r>
-              <a:rPr lang="en-US" sz="1250" b="0" u="none" strike="noStrike">
+              <a:rPr lang="en-US" sz="1600" b="0" u="none" strike="noStrike">
                 <a:solidFill>
                   <a:srgbClr val="C9D3CC"/>
                 </a:solidFill>
@@ -29661,7 +29697,7 @@
               <a:t>counter() </a:t>
             </a:r>
             <a:r>
-              <a:rPr lang="en-US" sz="1250" b="0" u="none" strike="noStrike">
+              <a:rPr lang="en-US" sz="1600" b="0" u="none" strike="noStrike">
                 <a:solidFill>
                   <a:srgbClr val="7C8A80"/>
                 </a:solidFill>
@@ -29672,7 +29708,7 @@
               </a:rPr>
               <a:t>  # 3</a:t>
             </a:r>
-            <a:endParaRPr lang="en-US" sz="1250" b="0" u="none" strike="noStrike">
+            <a:endParaRPr lang="en-US" sz="1600" b="0" u="none" strike="noStrike">
               <a:solidFill>
                 <a:srgbClr val="000000"/>
               </a:solidFill>
@@ -29692,7 +29728,7 @@
         <p:spPr>
           <a:xfrm>
             <a:off x="457200" y="6446520"/>
-            <a:ext cx="7314480" cy="273600"/>
+            <a:ext cx="7314120" cy="273240"/>
           </a:xfrm>
           <a:prstGeom prst="rect">
             <a:avLst/>
@@ -29753,7 +29789,7 @@
         <p:spPr>
           <a:xfrm>
             <a:off x="11521440" y="6446520"/>
-            <a:ext cx="456480" cy="273600"/>
+            <a:ext cx="456120" cy="273240"/>
           </a:xfrm>
           <a:prstGeom prst="rect">
             <a:avLst/>
@@ -29851,7 +29887,7 @@
         <p:spPr>
           <a:xfrm>
             <a:off x="-1828800" y="5029200"/>
-            <a:ext cx="3656880" cy="3656880"/>
+            <a:ext cx="3656520" cy="3656520"/>
           </a:xfrm>
           <a:prstGeom prst="ellipse">
             <a:avLst/>
@@ -29894,7 +29930,7 @@
         <p:spPr>
           <a:xfrm>
             <a:off x="457200" y="457200"/>
-            <a:ext cx="639360" cy="639360"/>
+            <a:ext cx="639000" cy="639000"/>
           </a:xfrm>
           <a:prstGeom prst="ellipse">
             <a:avLst/>
@@ -29941,7 +29977,7 @@
         <p:spPr>
           <a:xfrm>
             <a:off x="548640" y="548640"/>
-            <a:ext cx="447480" cy="447480"/>
+            <a:ext cx="447120" cy="447120"/>
           </a:xfrm>
           <a:prstGeom prst="rect">
             <a:avLst/>
@@ -29961,7 +29997,7 @@
         <p:spPr>
           <a:xfrm>
             <a:off x="1280160" y="457200"/>
-            <a:ext cx="10423440" cy="639360"/>
+            <a:ext cx="10423080" cy="639000"/>
           </a:xfrm>
           <a:prstGeom prst="rect">
             <a:avLst/>
@@ -30022,7 +30058,7 @@
         <p:spPr>
           <a:xfrm>
             <a:off x="457200" y="1600200"/>
-            <a:ext cx="11273760" cy="4479840"/>
+            <a:ext cx="11273400" cy="4479480"/>
           </a:xfrm>
           <a:prstGeom prst="roundRect">
             <a:avLst>
@@ -30067,7 +30103,7 @@
         <p:spPr>
           <a:xfrm>
             <a:off x="822960" y="1828800"/>
-            <a:ext cx="10514880" cy="456480"/>
+            <a:ext cx="10514520" cy="456120"/>
           </a:xfrm>
           <a:prstGeom prst="rect">
             <a:avLst/>
@@ -30128,7 +30164,7 @@
         <p:spPr>
           <a:xfrm>
             <a:off x="822960" y="2423160"/>
-            <a:ext cx="383400" cy="383400"/>
+            <a:ext cx="383040" cy="383040"/>
           </a:xfrm>
           <a:prstGeom prst="ellipse">
             <a:avLst/>
@@ -30171,7 +30207,7 @@
         <p:spPr>
           <a:xfrm>
             <a:off x="822960" y="2423160"/>
-            <a:ext cx="383400" cy="383400"/>
+            <a:ext cx="383040" cy="383040"/>
           </a:xfrm>
           <a:prstGeom prst="rect">
             <a:avLst/>
@@ -30232,7 +30268,7 @@
         <p:spPr>
           <a:xfrm>
             <a:off x="1435680" y="2423160"/>
-            <a:ext cx="9582120" cy="383400"/>
+            <a:ext cx="9581760" cy="383040"/>
           </a:xfrm>
           <a:prstGeom prst="rect">
             <a:avLst/>
@@ -30293,7 +30329,7 @@
         <p:spPr>
           <a:xfrm>
             <a:off x="822960" y="3300840"/>
-            <a:ext cx="383400" cy="383400"/>
+            <a:ext cx="383040" cy="383040"/>
           </a:xfrm>
           <a:prstGeom prst="ellipse">
             <a:avLst/>
@@ -30336,7 +30372,7 @@
         <p:spPr>
           <a:xfrm>
             <a:off x="822960" y="3300840"/>
-            <a:ext cx="383400" cy="383400"/>
+            <a:ext cx="383040" cy="383040"/>
           </a:xfrm>
           <a:prstGeom prst="rect">
             <a:avLst/>
@@ -30397,7 +30433,7 @@
         <p:spPr>
           <a:xfrm>
             <a:off x="1435680" y="3300840"/>
-            <a:ext cx="9582120" cy="383400"/>
+            <a:ext cx="9581760" cy="383040"/>
           </a:xfrm>
           <a:prstGeom prst="rect">
             <a:avLst/>
@@ -30458,7 +30494,7 @@
         <p:spPr>
           <a:xfrm>
             <a:off x="822960" y="4178880"/>
-            <a:ext cx="383400" cy="383400"/>
+            <a:ext cx="383040" cy="383040"/>
           </a:xfrm>
           <a:prstGeom prst="ellipse">
             <a:avLst/>
@@ -30501,7 +30537,7 @@
         <p:spPr>
           <a:xfrm>
             <a:off x="822960" y="4178880"/>
-            <a:ext cx="383400" cy="383400"/>
+            <a:ext cx="383040" cy="383040"/>
           </a:xfrm>
           <a:prstGeom prst="rect">
             <a:avLst/>
@@ -30562,7 +30598,7 @@
         <p:spPr>
           <a:xfrm>
             <a:off x="1435680" y="4178880"/>
-            <a:ext cx="9582120" cy="383400"/>
+            <a:ext cx="9581760" cy="383040"/>
           </a:xfrm>
           <a:prstGeom prst="rect">
             <a:avLst/>
@@ -30623,7 +30659,7 @@
         <p:spPr>
           <a:xfrm>
             <a:off x="457200" y="6446520"/>
-            <a:ext cx="7314480" cy="273600"/>
+            <a:ext cx="7314120" cy="273240"/>
           </a:xfrm>
           <a:prstGeom prst="rect">
             <a:avLst/>
@@ -30684,7 +30720,7 @@
         <p:spPr>
           <a:xfrm>
             <a:off x="11521440" y="6446520"/>
-            <a:ext cx="456480" cy="273600"/>
+            <a:ext cx="456120" cy="273240"/>
           </a:xfrm>
           <a:prstGeom prst="rect">
             <a:avLst/>
@@ -30782,7 +30818,7 @@
         <p:spPr>
           <a:xfrm>
             <a:off x="-1828800" y="4114800"/>
-            <a:ext cx="5485680" cy="5485680"/>
+            <a:ext cx="5485320" cy="5485320"/>
           </a:xfrm>
           <a:prstGeom prst="ellipse">
             <a:avLst/>
@@ -30825,7 +30861,7 @@
         <p:spPr>
           <a:xfrm>
             <a:off x="9601200" y="-2286000"/>
-            <a:ext cx="5485680" cy="5485680"/>
+            <a:ext cx="5485320" cy="5485320"/>
           </a:xfrm>
           <a:prstGeom prst="ellipse">
             <a:avLst/>
@@ -30868,7 +30904,7 @@
         <p:spPr>
           <a:xfrm>
             <a:off x="5596200" y="731520"/>
-            <a:ext cx="1005120" cy="1005120"/>
+            <a:ext cx="1004760" cy="1004760"/>
           </a:xfrm>
           <a:prstGeom prst="ellipse">
             <a:avLst/>
@@ -30915,7 +30951,7 @@
         <p:spPr>
           <a:xfrm>
             <a:off x="5742360" y="877680"/>
-            <a:ext cx="703440" cy="703440"/>
+            <a:ext cx="703080" cy="703080"/>
           </a:xfrm>
           <a:prstGeom prst="rect">
             <a:avLst/>
@@ -30935,7 +30971,7 @@
         <p:spPr>
           <a:xfrm>
             <a:off x="914400" y="1965960"/>
-            <a:ext cx="10359360" cy="365040"/>
+            <a:ext cx="10359000" cy="364680"/>
           </a:xfrm>
           <a:prstGeom prst="rect">
             <a:avLst/>
@@ -30996,7 +31032,7 @@
         <p:spPr>
           <a:xfrm>
             <a:off x="914400" y="2377440"/>
-            <a:ext cx="10359360" cy="2010960"/>
+            <a:ext cx="10359000" cy="2010600"/>
           </a:xfrm>
           <a:prstGeom prst="rect">
             <a:avLst/>
@@ -31057,7 +31093,7 @@
         <p:spPr>
           <a:xfrm>
             <a:off x="1463040" y="4572000"/>
-            <a:ext cx="9262080" cy="1096560"/>
+            <a:ext cx="9261720" cy="1096200"/>
           </a:xfrm>
           <a:prstGeom prst="rect">
             <a:avLst/>
@@ -31118,7 +31154,7 @@
         <p:spPr>
           <a:xfrm>
             <a:off x="11521440" y="6446520"/>
-            <a:ext cx="456480" cy="273600"/>
+            <a:ext cx="456120" cy="273240"/>
           </a:xfrm>
           <a:prstGeom prst="rect">
             <a:avLst/>
@@ -31216,7 +31252,7 @@
         <p:spPr>
           <a:xfrm>
             <a:off x="10515600" y="5669280"/>
-            <a:ext cx="3199680" cy="3199680"/>
+            <a:ext cx="3199320" cy="3199320"/>
           </a:xfrm>
           <a:prstGeom prst="roundRect">
             <a:avLst>
@@ -31261,7 +31297,7 @@
         <p:spPr>
           <a:xfrm>
             <a:off x="457200" y="457200"/>
-            <a:ext cx="639360" cy="639360"/>
+            <a:ext cx="639000" cy="639000"/>
           </a:xfrm>
           <a:prstGeom prst="ellipse">
             <a:avLst/>
@@ -31308,7 +31344,7 @@
         <p:spPr>
           <a:xfrm>
             <a:off x="548640" y="548640"/>
-            <a:ext cx="447480" cy="447480"/>
+            <a:ext cx="447120" cy="447120"/>
           </a:xfrm>
           <a:prstGeom prst="rect">
             <a:avLst/>
@@ -31328,7 +31364,7 @@
         <p:spPr>
           <a:xfrm>
             <a:off x="1280160" y="457200"/>
-            <a:ext cx="10423440" cy="639360"/>
+            <a:ext cx="10423080" cy="639000"/>
           </a:xfrm>
           <a:prstGeom prst="rect">
             <a:avLst/>
@@ -31389,7 +31425,7 @@
         <p:spPr>
           <a:xfrm>
             <a:off x="457200" y="1554480"/>
-            <a:ext cx="3656880" cy="4662720"/>
+            <a:ext cx="3656520" cy="4662360"/>
           </a:xfrm>
           <a:prstGeom prst="roundRect">
             <a:avLst>
@@ -31434,7 +31470,7 @@
         <p:spPr>
           <a:xfrm>
             <a:off x="1508760" y="2194560"/>
-            <a:ext cx="1553760" cy="1553760"/>
+            <a:ext cx="1553400" cy="1553400"/>
           </a:xfrm>
           <a:prstGeom prst="ellipse">
             <a:avLst/>
@@ -31481,7 +31517,7 @@
         <p:spPr>
           <a:xfrm>
             <a:off x="1746360" y="2423160"/>
-            <a:ext cx="1087560" cy="1087560"/>
+            <a:ext cx="1087200" cy="1087200"/>
           </a:xfrm>
           <a:prstGeom prst="rect">
             <a:avLst/>
@@ -31501,7 +31537,7 @@
         <p:spPr>
           <a:xfrm>
             <a:off x="640080" y="3977640"/>
-            <a:ext cx="3291120" cy="1736640"/>
+            <a:ext cx="3290760" cy="1736280"/>
           </a:xfrm>
           <a:prstGeom prst="rect">
             <a:avLst/>
@@ -31622,7 +31658,7 @@
         <p:spPr>
           <a:xfrm>
             <a:off x="4572000" y="1737360"/>
-            <a:ext cx="7131600" cy="4114080"/>
+            <a:ext cx="7131240" cy="4113720"/>
           </a:xfrm>
           <a:prstGeom prst="rect">
             <a:avLst/>
@@ -31793,7 +31829,7 @@
         <p:spPr>
           <a:xfrm>
             <a:off x="457200" y="6446520"/>
-            <a:ext cx="7314480" cy="273600"/>
+            <a:ext cx="7314120" cy="273240"/>
           </a:xfrm>
           <a:prstGeom prst="rect">
             <a:avLst/>
@@ -31854,7 +31890,7 @@
         <p:spPr>
           <a:xfrm>
             <a:off x="11521440" y="6446520"/>
-            <a:ext cx="456480" cy="273600"/>
+            <a:ext cx="456120" cy="273240"/>
           </a:xfrm>
           <a:prstGeom prst="rect">
             <a:avLst/>
@@ -31952,7 +31988,7 @@
         <p:spPr>
           <a:xfrm>
             <a:off x="457200" y="457200"/>
-            <a:ext cx="639360" cy="639360"/>
+            <a:ext cx="639000" cy="639000"/>
           </a:xfrm>
           <a:prstGeom prst="ellipse">
             <a:avLst/>
@@ -31999,7 +32035,7 @@
         <p:spPr>
           <a:xfrm>
             <a:off x="548640" y="548640"/>
-            <a:ext cx="447480" cy="447480"/>
+            <a:ext cx="447120" cy="447120"/>
           </a:xfrm>
           <a:prstGeom prst="rect">
             <a:avLst/>
@@ -32019,7 +32055,7 @@
         <p:spPr>
           <a:xfrm>
             <a:off x="1280160" y="457200"/>
-            <a:ext cx="10423440" cy="639360"/>
+            <a:ext cx="10423080" cy="639000"/>
           </a:xfrm>
           <a:prstGeom prst="rect">
             <a:avLst/>
@@ -32080,7 +32116,7 @@
         <p:spPr>
           <a:xfrm>
             <a:off x="1188720" y="1783080"/>
-            <a:ext cx="9810720" cy="4022640"/>
+            <a:ext cx="9810360" cy="4022280"/>
           </a:xfrm>
           <a:prstGeom prst="roundRect">
             <a:avLst>
@@ -32125,7 +32161,7 @@
         <p:spPr>
           <a:xfrm>
             <a:off x="1463040" y="1965960"/>
-            <a:ext cx="9326160" cy="365040"/>
+            <a:ext cx="9325800" cy="364680"/>
           </a:xfrm>
           <a:prstGeom prst="rect">
             <a:avLst/>
@@ -32186,7 +32222,7 @@
         <p:spPr>
           <a:xfrm>
             <a:off x="1463040" y="2468880"/>
-            <a:ext cx="9262080" cy="593640"/>
+            <a:ext cx="9261720" cy="593280"/>
           </a:xfrm>
           <a:prstGeom prst="roundRect">
             <a:avLst>
@@ -32231,7 +32267,7 @@
         <p:spPr>
           <a:xfrm>
             <a:off x="1737360" y="2468880"/>
-            <a:ext cx="8686080" cy="593640"/>
+            <a:ext cx="8685720" cy="593280"/>
           </a:xfrm>
           <a:prstGeom prst="rect">
             <a:avLst/>
@@ -32292,7 +32328,7 @@
         <p:spPr>
           <a:xfrm>
             <a:off x="1828800" y="3246120"/>
-            <a:ext cx="8530560" cy="1005120"/>
+            <a:ext cx="8530200" cy="1004760"/>
           </a:xfrm>
           <a:prstGeom prst="roundRect">
             <a:avLst>
@@ -32340,7 +32376,7 @@
         <p:spPr>
           <a:xfrm>
             <a:off x="2103120" y="3246120"/>
-            <a:ext cx="7954560" cy="1005120"/>
+            <a:ext cx="7954200" cy="1004760"/>
           </a:xfrm>
           <a:prstGeom prst="rect">
             <a:avLst/>
@@ -32401,7 +32437,7 @@
         <p:spPr>
           <a:xfrm>
             <a:off x="1463040" y="4434840"/>
-            <a:ext cx="9262080" cy="593640"/>
+            <a:ext cx="9261720" cy="593280"/>
           </a:xfrm>
           <a:prstGeom prst="roundRect">
             <a:avLst>
@@ -32446,7 +32482,7 @@
         <p:spPr>
           <a:xfrm>
             <a:off x="1737360" y="4434840"/>
-            <a:ext cx="8686080" cy="593640"/>
+            <a:ext cx="8685720" cy="593280"/>
           </a:xfrm>
           <a:prstGeom prst="rect">
             <a:avLst/>
@@ -32507,7 +32543,7 @@
         <p:spPr>
           <a:xfrm>
             <a:off x="1463040" y="5166360"/>
-            <a:ext cx="9262080" cy="547920"/>
+            <a:ext cx="9261720" cy="547560"/>
           </a:xfrm>
           <a:prstGeom prst="rect">
             <a:avLst/>
@@ -32568,7 +32604,7 @@
         <p:spPr>
           <a:xfrm>
             <a:off x="457200" y="6446520"/>
-            <a:ext cx="7314480" cy="273600"/>
+            <a:ext cx="7314120" cy="273240"/>
           </a:xfrm>
           <a:prstGeom prst="rect">
             <a:avLst/>
@@ -32629,7 +32665,7 @@
         <p:spPr>
           <a:xfrm>
             <a:off x="11521440" y="6446520"/>
-            <a:ext cx="456480" cy="273600"/>
+            <a:ext cx="456120" cy="273240"/>
           </a:xfrm>
           <a:prstGeom prst="rect">
             <a:avLst/>
@@ -32727,7 +32763,7 @@
         <p:spPr>
           <a:xfrm>
             <a:off x="457200" y="457200"/>
-            <a:ext cx="639360" cy="639360"/>
+            <a:ext cx="639000" cy="639000"/>
           </a:xfrm>
           <a:prstGeom prst="ellipse">
             <a:avLst/>
@@ -32774,7 +32810,7 @@
         <p:spPr>
           <a:xfrm>
             <a:off x="548640" y="548640"/>
-            <a:ext cx="447480" cy="447480"/>
+            <a:ext cx="447120" cy="447120"/>
           </a:xfrm>
           <a:prstGeom prst="rect">
             <a:avLst/>
@@ -32794,7 +32830,7 @@
         <p:spPr>
           <a:xfrm>
             <a:off x="1280160" y="457200"/>
-            <a:ext cx="10423440" cy="639360"/>
+            <a:ext cx="10423080" cy="639000"/>
           </a:xfrm>
           <a:prstGeom prst="rect">
             <a:avLst/>
@@ -32855,7 +32891,7 @@
         <p:spPr>
           <a:xfrm>
             <a:off x="548640" y="1828800"/>
-            <a:ext cx="4754160" cy="4022640"/>
+            <a:ext cx="4753800" cy="4022280"/>
           </a:xfrm>
           <a:prstGeom prst="rect">
             <a:avLst/>
@@ -32991,7 +33027,7 @@
         <p:spPr>
           <a:xfrm>
             <a:off x="5486400" y="1691640"/>
-            <a:ext cx="6217200" cy="4342680"/>
+            <a:ext cx="6216840" cy="4342320"/>
           </a:xfrm>
           <a:prstGeom prst="roundRect">
             <a:avLst>
@@ -33036,7 +33072,7 @@
         <p:spPr>
           <a:xfrm>
             <a:off x="5806440" y="1965960"/>
-            <a:ext cx="5577120" cy="3794040"/>
+            <a:ext cx="5576760" cy="3793680"/>
           </a:xfrm>
           <a:prstGeom prst="rect">
             <a:avLst/>
@@ -33517,7 +33553,7 @@
         <p:spPr>
           <a:xfrm>
             <a:off x="457200" y="6446520"/>
-            <a:ext cx="7314480" cy="273600"/>
+            <a:ext cx="7314120" cy="273240"/>
           </a:xfrm>
           <a:prstGeom prst="rect">
             <a:avLst/>
@@ -33578,7 +33614,7 @@
         <p:spPr>
           <a:xfrm>
             <a:off x="11521440" y="6446520"/>
-            <a:ext cx="456480" cy="273600"/>
+            <a:ext cx="456120" cy="273240"/>
           </a:xfrm>
           <a:prstGeom prst="rect">
             <a:avLst/>
@@ -33676,7 +33712,7 @@
         <p:spPr>
           <a:xfrm>
             <a:off x="457200" y="457200"/>
-            <a:ext cx="639360" cy="639360"/>
+            <a:ext cx="639000" cy="639000"/>
           </a:xfrm>
           <a:prstGeom prst="ellipse">
             <a:avLst/>
@@ -33723,7 +33759,7 @@
         <p:spPr>
           <a:xfrm>
             <a:off x="548640" y="548640"/>
-            <a:ext cx="447480" cy="447480"/>
+            <a:ext cx="447120" cy="447120"/>
           </a:xfrm>
           <a:prstGeom prst="rect">
             <a:avLst/>
@@ -33743,7 +33779,7 @@
         <p:spPr>
           <a:xfrm>
             <a:off x="1280160" y="457200"/>
-            <a:ext cx="10423440" cy="639360"/>
+            <a:ext cx="10423080" cy="639000"/>
           </a:xfrm>
           <a:prstGeom prst="rect">
             <a:avLst/>
@@ -33804,7 +33840,7 @@
         <p:spPr>
           <a:xfrm>
             <a:off x="548640" y="1828800"/>
-            <a:ext cx="4754160" cy="4022640"/>
+            <a:ext cx="4753800" cy="4022280"/>
           </a:xfrm>
           <a:prstGeom prst="rect">
             <a:avLst/>
@@ -33940,7 +33976,7 @@
         <p:spPr>
           <a:xfrm>
             <a:off x="5486400" y="1691640"/>
-            <a:ext cx="6217200" cy="4342680"/>
+            <a:ext cx="6216840" cy="4342320"/>
           </a:xfrm>
           <a:prstGeom prst="roundRect">
             <a:avLst>
@@ -33985,7 +34021,7 @@
         <p:spPr>
           <a:xfrm>
             <a:off x="5806440" y="1965960"/>
-            <a:ext cx="5577120" cy="3794040"/>
+            <a:ext cx="5576760" cy="3793680"/>
           </a:xfrm>
           <a:prstGeom prst="rect">
             <a:avLst/>
@@ -34400,7 +34436,7 @@
         <p:spPr>
           <a:xfrm>
             <a:off x="457200" y="6446520"/>
-            <a:ext cx="7314480" cy="273600"/>
+            <a:ext cx="7314120" cy="273240"/>
           </a:xfrm>
           <a:prstGeom prst="rect">
             <a:avLst/>
@@ -34461,7 +34497,7 @@
         <p:spPr>
           <a:xfrm>
             <a:off x="11521440" y="6446520"/>
-            <a:ext cx="456480" cy="273600"/>
+            <a:ext cx="456120" cy="273240"/>
           </a:xfrm>
           <a:prstGeom prst="rect">
             <a:avLst/>
@@ -34559,7 +34595,7 @@
         <p:spPr>
           <a:xfrm>
             <a:off x="457200" y="457200"/>
-            <a:ext cx="639360" cy="639360"/>
+            <a:ext cx="639000" cy="639000"/>
           </a:xfrm>
           <a:prstGeom prst="ellipse">
             <a:avLst/>
@@ -34606,7 +34642,7 @@
         <p:spPr>
           <a:xfrm>
             <a:off x="548640" y="548640"/>
-            <a:ext cx="447480" cy="447480"/>
+            <a:ext cx="447120" cy="447120"/>
           </a:xfrm>
           <a:prstGeom prst="rect">
             <a:avLst/>
@@ -34626,7 +34662,7 @@
         <p:spPr>
           <a:xfrm>
             <a:off x="1280160" y="457200"/>
-            <a:ext cx="10423440" cy="639360"/>
+            <a:ext cx="10423080" cy="639000"/>
           </a:xfrm>
           <a:prstGeom prst="rect">
             <a:avLst/>
@@ -34687,7 +34723,7 @@
         <p:spPr>
           <a:xfrm>
             <a:off x="457200" y="1508760"/>
-            <a:ext cx="3611160" cy="4891320"/>
+            <a:ext cx="3610800" cy="4890960"/>
           </a:xfrm>
           <a:prstGeom prst="roundRect">
             <a:avLst>
@@ -34732,7 +34768,7 @@
         <p:spPr>
           <a:xfrm>
             <a:off x="1989000" y="2094120"/>
-            <a:ext cx="547920" cy="547920"/>
+            <a:ext cx="547560" cy="547560"/>
           </a:xfrm>
           <a:prstGeom prst="ellipse">
             <a:avLst/>
@@ -34779,7 +34815,7 @@
         <p:spPr>
           <a:xfrm>
             <a:off x="2071080" y="2176200"/>
-            <a:ext cx="383400" cy="383400"/>
+            <a:ext cx="383040" cy="383040"/>
           </a:xfrm>
           <a:prstGeom prst="rect">
             <a:avLst/>
@@ -34799,7 +34835,7 @@
         <p:spPr>
           <a:xfrm>
             <a:off x="548640" y="2715840"/>
-            <a:ext cx="3428280" cy="365040"/>
+            <a:ext cx="3427920" cy="364680"/>
           </a:xfrm>
           <a:prstGeom prst="rect">
             <a:avLst/>
@@ -34860,7 +34896,7 @@
         <p:spPr>
           <a:xfrm>
             <a:off x="603360" y="3099960"/>
-            <a:ext cx="3318480" cy="3153960"/>
+            <a:ext cx="3318120" cy="3153600"/>
           </a:xfrm>
           <a:prstGeom prst="rect">
             <a:avLst/>
@@ -34921,7 +34957,7 @@
         <p:spPr>
           <a:xfrm>
             <a:off x="4288680" y="1508760"/>
-            <a:ext cx="3611160" cy="4891320"/>
+            <a:ext cx="3610800" cy="4890960"/>
           </a:xfrm>
           <a:prstGeom prst="roundRect">
             <a:avLst>
@@ -34966,7 +35002,7 @@
         <p:spPr>
           <a:xfrm>
             <a:off x="5820120" y="2094120"/>
-            <a:ext cx="547920" cy="547920"/>
+            <a:ext cx="547560" cy="547560"/>
           </a:xfrm>
           <a:prstGeom prst="ellipse">
             <a:avLst/>
@@ -35013,7 +35049,7 @@
         <p:spPr>
           <a:xfrm>
             <a:off x="5902560" y="2176200"/>
-            <a:ext cx="383400" cy="383400"/>
+            <a:ext cx="383040" cy="383040"/>
           </a:xfrm>
           <a:prstGeom prst="rect">
             <a:avLst/>
@@ -35033,7 +35069,7 @@
         <p:spPr>
           <a:xfrm>
             <a:off x="4380120" y="2715840"/>
-            <a:ext cx="3428280" cy="365040"/>
+            <a:ext cx="3427920" cy="364680"/>
           </a:xfrm>
           <a:prstGeom prst="rect">
             <a:avLst/>
@@ -35094,7 +35130,7 @@
         <p:spPr>
           <a:xfrm>
             <a:off x="4434840" y="3099960"/>
-            <a:ext cx="3318480" cy="3153960"/>
+            <a:ext cx="3318120" cy="3153600"/>
           </a:xfrm>
           <a:prstGeom prst="rect">
             <a:avLst/>
@@ -35155,7 +35191,7 @@
         <p:spPr>
           <a:xfrm>
             <a:off x="8119800" y="1508760"/>
-            <a:ext cx="3611160" cy="4891320"/>
+            <a:ext cx="3610800" cy="4890960"/>
           </a:xfrm>
           <a:prstGeom prst="roundRect">
             <a:avLst>
@@ -35200,7 +35236,7 @@
         <p:spPr>
           <a:xfrm>
             <a:off x="9651600" y="2094120"/>
-            <a:ext cx="547920" cy="547920"/>
+            <a:ext cx="547560" cy="547560"/>
           </a:xfrm>
           <a:prstGeom prst="ellipse">
             <a:avLst/>
@@ -35247,7 +35283,7 @@
         <p:spPr>
           <a:xfrm>
             <a:off x="9733680" y="2176200"/>
-            <a:ext cx="383400" cy="383400"/>
+            <a:ext cx="383040" cy="383040"/>
           </a:xfrm>
           <a:prstGeom prst="rect">
             <a:avLst/>
@@ -35267,7 +35303,7 @@
         <p:spPr>
           <a:xfrm>
             <a:off x="8211240" y="2715840"/>
-            <a:ext cx="3428280" cy="365040"/>
+            <a:ext cx="3427920" cy="364680"/>
           </a:xfrm>
           <a:prstGeom prst="rect">
             <a:avLst/>
@@ -35328,7 +35364,7 @@
         <p:spPr>
           <a:xfrm>
             <a:off x="8266320" y="3099960"/>
-            <a:ext cx="3318480" cy="3153960"/>
+            <a:ext cx="3318120" cy="3153600"/>
           </a:xfrm>
           <a:prstGeom prst="rect">
             <a:avLst/>
@@ -35389,7 +35425,7 @@
         <p:spPr>
           <a:xfrm>
             <a:off x="457200" y="6446520"/>
-            <a:ext cx="7314480" cy="273600"/>
+            <a:ext cx="7314120" cy="273240"/>
           </a:xfrm>
           <a:prstGeom prst="rect">
             <a:avLst/>
@@ -35450,7 +35486,7 @@
         <p:spPr>
           <a:xfrm>
             <a:off x="11521440" y="6446520"/>
-            <a:ext cx="456480" cy="273600"/>
+            <a:ext cx="456120" cy="273240"/>
           </a:xfrm>
           <a:prstGeom prst="rect">
             <a:avLst/>
@@ -35548,7 +35584,7 @@
         <p:spPr>
           <a:xfrm>
             <a:off x="10515600" y="5669280"/>
-            <a:ext cx="3199680" cy="3199680"/>
+            <a:ext cx="3199320" cy="3199320"/>
           </a:xfrm>
           <a:prstGeom prst="roundRect">
             <a:avLst>
@@ -35593,7 +35629,7 @@
         <p:spPr>
           <a:xfrm>
             <a:off x="457200" y="457200"/>
-            <a:ext cx="639360" cy="639360"/>
+            <a:ext cx="639000" cy="639000"/>
           </a:xfrm>
           <a:prstGeom prst="ellipse">
             <a:avLst/>
@@ -35640,7 +35676,7 @@
         <p:spPr>
           <a:xfrm>
             <a:off x="548640" y="548640"/>
-            <a:ext cx="447480" cy="447480"/>
+            <a:ext cx="447120" cy="447120"/>
           </a:xfrm>
           <a:prstGeom prst="rect">
             <a:avLst/>
@@ -35660,7 +35696,7 @@
         <p:spPr>
           <a:xfrm>
             <a:off x="1280160" y="457200"/>
-            <a:ext cx="10423440" cy="639360"/>
+            <a:ext cx="10423080" cy="639000"/>
           </a:xfrm>
           <a:prstGeom prst="rect">
             <a:avLst/>
@@ -35721,7 +35757,7 @@
         <p:spPr>
           <a:xfrm>
             <a:off x="457200" y="1554480"/>
-            <a:ext cx="3656880" cy="4662720"/>
+            <a:ext cx="3656520" cy="4662360"/>
           </a:xfrm>
           <a:prstGeom prst="roundRect">
             <a:avLst>
@@ -35766,7 +35802,7 @@
         <p:spPr>
           <a:xfrm>
             <a:off x="1508760" y="2194560"/>
-            <a:ext cx="1553760" cy="1553760"/>
+            <a:ext cx="1553400" cy="1553400"/>
           </a:xfrm>
           <a:prstGeom prst="ellipse">
             <a:avLst/>
@@ -35813,7 +35849,7 @@
         <p:spPr>
           <a:xfrm>
             <a:off x="1746360" y="2423160"/>
-            <a:ext cx="1087560" cy="1087560"/>
+            <a:ext cx="1087200" cy="1087200"/>
           </a:xfrm>
           <a:prstGeom prst="rect">
             <a:avLst/>
@@ -35833,7 +35869,7 @@
         <p:spPr>
           <a:xfrm>
             <a:off x="640080" y="3977640"/>
-            <a:ext cx="3291120" cy="1736640"/>
+            <a:ext cx="3290760" cy="1736280"/>
           </a:xfrm>
           <a:prstGeom prst="rect">
             <a:avLst/>
@@ -35954,7 +35990,7 @@
         <p:spPr>
           <a:xfrm>
             <a:off x="4572000" y="1737360"/>
-            <a:ext cx="7131600" cy="4114080"/>
+            <a:ext cx="7131240" cy="4113720"/>
           </a:xfrm>
           <a:prstGeom prst="rect">
             <a:avLst/>
@@ -36125,7 +36161,7 @@
         <p:spPr>
           <a:xfrm>
             <a:off x="457200" y="6446520"/>
-            <a:ext cx="7314480" cy="273600"/>
+            <a:ext cx="7314120" cy="273240"/>
           </a:xfrm>
           <a:prstGeom prst="rect">
             <a:avLst/>
@@ -36186,7 +36222,7 @@
         <p:spPr>
           <a:xfrm>
             <a:off x="11521440" y="6446520"/>
-            <a:ext cx="456480" cy="273600"/>
+            <a:ext cx="456120" cy="273240"/>
           </a:xfrm>
           <a:prstGeom prst="rect">
             <a:avLst/>
@@ -36284,7 +36320,7 @@
         <p:spPr>
           <a:xfrm>
             <a:off x="-1828800" y="5029200"/>
-            <a:ext cx="3656880" cy="3656880"/>
+            <a:ext cx="3656520" cy="3656520"/>
           </a:xfrm>
           <a:prstGeom prst="ellipse">
             <a:avLst/>
@@ -36327,7 +36363,7 @@
         <p:spPr>
           <a:xfrm>
             <a:off x="457200" y="457200"/>
-            <a:ext cx="639360" cy="639360"/>
+            <a:ext cx="639000" cy="639000"/>
           </a:xfrm>
           <a:prstGeom prst="ellipse">
             <a:avLst/>
@@ -36374,7 +36410,7 @@
         <p:spPr>
           <a:xfrm>
             <a:off x="548640" y="548640"/>
-            <a:ext cx="447480" cy="447480"/>
+            <a:ext cx="447120" cy="447120"/>
           </a:xfrm>
           <a:prstGeom prst="rect">
             <a:avLst/>
@@ -36394,7 +36430,7 @@
         <p:spPr>
           <a:xfrm>
             <a:off x="1280160" y="457200"/>
-            <a:ext cx="10423440" cy="639360"/>
+            <a:ext cx="10423080" cy="639000"/>
           </a:xfrm>
           <a:prstGeom prst="rect">
             <a:avLst/>
@@ -36455,7 +36491,7 @@
         <p:spPr>
           <a:xfrm>
             <a:off x="457200" y="1600200"/>
-            <a:ext cx="11273760" cy="4479840"/>
+            <a:ext cx="11273400" cy="4479480"/>
           </a:xfrm>
           <a:prstGeom prst="roundRect">
             <a:avLst>
@@ -36500,7 +36536,7 @@
         <p:spPr>
           <a:xfrm>
             <a:off x="822960" y="1828800"/>
-            <a:ext cx="10514880" cy="456480"/>
+            <a:ext cx="10514520" cy="456120"/>
           </a:xfrm>
           <a:prstGeom prst="rect">
             <a:avLst/>
@@ -36561,7 +36597,7 @@
         <p:spPr>
           <a:xfrm>
             <a:off x="822960" y="2423160"/>
-            <a:ext cx="383400" cy="383400"/>
+            <a:ext cx="383040" cy="383040"/>
           </a:xfrm>
           <a:prstGeom prst="ellipse">
             <a:avLst/>
@@ -36604,7 +36640,7 @@
         <p:spPr>
           <a:xfrm>
             <a:off x="822960" y="2423160"/>
-            <a:ext cx="383400" cy="383400"/>
+            <a:ext cx="383040" cy="383040"/>
           </a:xfrm>
           <a:prstGeom prst="rect">
             <a:avLst/>
@@ -36665,7 +36701,7 @@
         <p:spPr>
           <a:xfrm>
             <a:off x="1435680" y="2423160"/>
-            <a:ext cx="9582120" cy="383400"/>
+            <a:ext cx="9581760" cy="383040"/>
           </a:xfrm>
           <a:prstGeom prst="rect">
             <a:avLst/>
@@ -36726,7 +36762,7 @@
         <p:spPr>
           <a:xfrm>
             <a:off x="822960" y="3300840"/>
-            <a:ext cx="383400" cy="383400"/>
+            <a:ext cx="383040" cy="383040"/>
           </a:xfrm>
           <a:prstGeom prst="ellipse">
             <a:avLst/>
@@ -36769,7 +36805,7 @@
         <p:spPr>
           <a:xfrm>
             <a:off x="822960" y="3300840"/>
-            <a:ext cx="383400" cy="383400"/>
+            <a:ext cx="383040" cy="383040"/>
           </a:xfrm>
           <a:prstGeom prst="rect">
             <a:avLst/>
@@ -36830,7 +36866,7 @@
         <p:spPr>
           <a:xfrm>
             <a:off x="1435680" y="3300840"/>
-            <a:ext cx="9582120" cy="383400"/>
+            <a:ext cx="9581760" cy="383040"/>
           </a:xfrm>
           <a:prstGeom prst="rect">
             <a:avLst/>
@@ -36891,7 +36927,7 @@
         <p:spPr>
           <a:xfrm>
             <a:off x="822960" y="4178880"/>
-            <a:ext cx="383400" cy="383400"/>
+            <a:ext cx="383040" cy="383040"/>
           </a:xfrm>
           <a:prstGeom prst="ellipse">
             <a:avLst/>
@@ -36934,7 +36970,7 @@
         <p:spPr>
           <a:xfrm>
             <a:off x="822960" y="4178880"/>
-            <a:ext cx="383400" cy="383400"/>
+            <a:ext cx="383040" cy="383040"/>
           </a:xfrm>
           <a:prstGeom prst="rect">
             <a:avLst/>
@@ -36995,7 +37031,7 @@
         <p:spPr>
           <a:xfrm>
             <a:off x="1435680" y="4178880"/>
-            <a:ext cx="9582120" cy="383400"/>
+            <a:ext cx="9581760" cy="383040"/>
           </a:xfrm>
           <a:prstGeom prst="rect">
             <a:avLst/>
@@ -37056,7 +37092,7 @@
         <p:spPr>
           <a:xfrm>
             <a:off x="457200" y="6446520"/>
-            <a:ext cx="7314480" cy="273600"/>
+            <a:ext cx="7314120" cy="273240"/>
           </a:xfrm>
           <a:prstGeom prst="rect">
             <a:avLst/>
@@ -37117,7 +37153,7 @@
         <p:spPr>
           <a:xfrm>
             <a:off x="11521440" y="6446520"/>
-            <a:ext cx="456480" cy="273600"/>
+            <a:ext cx="456120" cy="273240"/>
           </a:xfrm>
           <a:prstGeom prst="rect">
             <a:avLst/>
@@ -37215,7 +37251,7 @@
         <p:spPr>
           <a:xfrm>
             <a:off x="-1828800" y="4114800"/>
-            <a:ext cx="5485680" cy="5485680"/>
+            <a:ext cx="5485320" cy="5485320"/>
           </a:xfrm>
           <a:prstGeom prst="ellipse">
             <a:avLst/>
@@ -37258,7 +37294,7 @@
         <p:spPr>
           <a:xfrm>
             <a:off x="9601200" y="-2286000"/>
-            <a:ext cx="5485680" cy="5485680"/>
+            <a:ext cx="5485320" cy="5485320"/>
           </a:xfrm>
           <a:prstGeom prst="ellipse">
             <a:avLst/>
@@ -37301,7 +37337,7 @@
         <p:spPr>
           <a:xfrm>
             <a:off x="5596200" y="731520"/>
-            <a:ext cx="1005120" cy="1005120"/>
+            <a:ext cx="1004760" cy="1004760"/>
           </a:xfrm>
           <a:prstGeom prst="ellipse">
             <a:avLst/>
@@ -37348,7 +37384,7 @@
         <p:spPr>
           <a:xfrm>
             <a:off x="5742360" y="877680"/>
-            <a:ext cx="703440" cy="703440"/>
+            <a:ext cx="703080" cy="703080"/>
           </a:xfrm>
           <a:prstGeom prst="rect">
             <a:avLst/>
@@ -37368,7 +37404,7 @@
         <p:spPr>
           <a:xfrm>
             <a:off x="914400" y="1965960"/>
-            <a:ext cx="10359360" cy="365040"/>
+            <a:ext cx="10359000" cy="364680"/>
           </a:xfrm>
           <a:prstGeom prst="rect">
             <a:avLst/>
@@ -37429,7 +37465,7 @@
         <p:spPr>
           <a:xfrm>
             <a:off x="914400" y="2377440"/>
-            <a:ext cx="10359360" cy="2010960"/>
+            <a:ext cx="10359000" cy="2010600"/>
           </a:xfrm>
           <a:prstGeom prst="rect">
             <a:avLst/>
@@ -37490,7 +37526,7 @@
         <p:spPr>
           <a:xfrm>
             <a:off x="1463040" y="4572000"/>
-            <a:ext cx="9262080" cy="1096560"/>
+            <a:ext cx="9261720" cy="1096200"/>
           </a:xfrm>
           <a:prstGeom prst="rect">
             <a:avLst/>
@@ -37551,7 +37587,7 @@
         <p:spPr>
           <a:xfrm>
             <a:off x="11521440" y="6446520"/>
-            <a:ext cx="456480" cy="273600"/>
+            <a:ext cx="456120" cy="273240"/>
           </a:xfrm>
           <a:prstGeom prst="rect">
             <a:avLst/>
@@ -37649,7 +37685,7 @@
         <p:spPr>
           <a:xfrm>
             <a:off x="-1828800" y="5029200"/>
-            <a:ext cx="3656880" cy="3656880"/>
+            <a:ext cx="3656520" cy="3656520"/>
           </a:xfrm>
           <a:prstGeom prst="ellipse">
             <a:avLst/>
@@ -37692,7 +37728,7 @@
         <p:spPr>
           <a:xfrm>
             <a:off x="457200" y="457200"/>
-            <a:ext cx="639360" cy="639360"/>
+            <a:ext cx="639000" cy="639000"/>
           </a:xfrm>
           <a:prstGeom prst="ellipse">
             <a:avLst/>
@@ -37739,7 +37775,7 @@
         <p:spPr>
           <a:xfrm>
             <a:off x="548640" y="548640"/>
-            <a:ext cx="447480" cy="447480"/>
+            <a:ext cx="447120" cy="447120"/>
           </a:xfrm>
           <a:prstGeom prst="rect">
             <a:avLst/>
@@ -37759,7 +37795,7 @@
         <p:spPr>
           <a:xfrm>
             <a:off x="1280160" y="457200"/>
-            <a:ext cx="10423440" cy="639360"/>
+            <a:ext cx="10423080" cy="639000"/>
           </a:xfrm>
           <a:prstGeom prst="rect">
             <a:avLst/>
@@ -37820,7 +37856,7 @@
         <p:spPr>
           <a:xfrm>
             <a:off x="457200" y="1600200"/>
-            <a:ext cx="11273760" cy="4479840"/>
+            <a:ext cx="11273400" cy="4479480"/>
           </a:xfrm>
           <a:prstGeom prst="roundRect">
             <a:avLst>
@@ -37865,7 +37901,7 @@
         <p:spPr>
           <a:xfrm>
             <a:off x="822960" y="1828800"/>
-            <a:ext cx="10514880" cy="456480"/>
+            <a:ext cx="10514520" cy="456120"/>
           </a:xfrm>
           <a:prstGeom prst="rect">
             <a:avLst/>
@@ -37926,7 +37962,7 @@
         <p:spPr>
           <a:xfrm>
             <a:off x="822960" y="2423160"/>
-            <a:ext cx="401760" cy="401760"/>
+            <a:ext cx="401400" cy="401400"/>
           </a:xfrm>
           <a:prstGeom prst="ellipse">
             <a:avLst/>
@@ -37973,7 +38009,7 @@
         <p:spPr>
           <a:xfrm>
             <a:off x="887040" y="2487240"/>
-            <a:ext cx="282600" cy="282600"/>
+            <a:ext cx="282240" cy="282240"/>
           </a:xfrm>
           <a:prstGeom prst="rect">
             <a:avLst/>
@@ -37993,7 +38029,7 @@
         <p:spPr>
           <a:xfrm>
             <a:off x="1371600" y="2441520"/>
-            <a:ext cx="401760" cy="365040"/>
+            <a:ext cx="401400" cy="364680"/>
           </a:xfrm>
           <a:prstGeom prst="roundRect">
             <a:avLst>
@@ -38038,7 +38074,7 @@
         <p:spPr>
           <a:xfrm>
             <a:off x="1371600" y="2441520"/>
-            <a:ext cx="401760" cy="365040"/>
+            <a:ext cx="401400" cy="364680"/>
           </a:xfrm>
           <a:prstGeom prst="rect">
             <a:avLst/>
@@ -38099,7 +38135,7 @@
         <p:spPr>
           <a:xfrm>
             <a:off x="1920240" y="2423160"/>
-            <a:ext cx="9509040" cy="1005120"/>
+            <a:ext cx="9508680" cy="1004760"/>
           </a:xfrm>
           <a:prstGeom prst="rect">
             <a:avLst/>
@@ -38160,7 +38196,7 @@
         <p:spPr>
           <a:xfrm>
             <a:off x="822960" y="3593520"/>
-            <a:ext cx="401760" cy="401760"/>
+            <a:ext cx="401400" cy="401400"/>
           </a:xfrm>
           <a:prstGeom prst="ellipse">
             <a:avLst/>
@@ -38207,7 +38243,7 @@
         <p:spPr>
           <a:xfrm>
             <a:off x="887040" y="3657600"/>
-            <a:ext cx="282600" cy="282600"/>
+            <a:ext cx="282240" cy="282240"/>
           </a:xfrm>
           <a:prstGeom prst="rect">
             <a:avLst/>
@@ -38227,7 +38263,7 @@
         <p:spPr>
           <a:xfrm>
             <a:off x="1371600" y="3611880"/>
-            <a:ext cx="401760" cy="365040"/>
+            <a:ext cx="401400" cy="364680"/>
           </a:xfrm>
           <a:prstGeom prst="roundRect">
             <a:avLst>
@@ -38272,7 +38308,7 @@
         <p:spPr>
           <a:xfrm>
             <a:off x="1371600" y="3611880"/>
-            <a:ext cx="401760" cy="365040"/>
+            <a:ext cx="401400" cy="364680"/>
           </a:xfrm>
           <a:prstGeom prst="rect">
             <a:avLst/>
@@ -38333,7 +38369,7 @@
         <p:spPr>
           <a:xfrm>
             <a:off x="1920240" y="3593520"/>
-            <a:ext cx="9509040" cy="1005120"/>
+            <a:ext cx="9508680" cy="1004760"/>
           </a:xfrm>
           <a:prstGeom prst="rect">
             <a:avLst/>
@@ -38394,7 +38430,7 @@
         <p:spPr>
           <a:xfrm>
             <a:off x="822960" y="4763880"/>
-            <a:ext cx="401760" cy="401760"/>
+            <a:ext cx="401400" cy="401400"/>
           </a:xfrm>
           <a:prstGeom prst="ellipse">
             <a:avLst/>
@@ -38441,7 +38477,7 @@
         <p:spPr>
           <a:xfrm>
             <a:off x="887040" y="4827960"/>
-            <a:ext cx="282600" cy="282600"/>
+            <a:ext cx="282240" cy="282240"/>
           </a:xfrm>
           <a:prstGeom prst="rect">
             <a:avLst/>
@@ -38461,7 +38497,7 @@
         <p:spPr>
           <a:xfrm>
             <a:off x="1371600" y="4782240"/>
-            <a:ext cx="401760" cy="365040"/>
+            <a:ext cx="401400" cy="364680"/>
           </a:xfrm>
           <a:prstGeom prst="roundRect">
             <a:avLst>
@@ -38506,7 +38542,7 @@
         <p:spPr>
           <a:xfrm>
             <a:off x="1371600" y="4782240"/>
-            <a:ext cx="401760" cy="365040"/>
+            <a:ext cx="401400" cy="364680"/>
           </a:xfrm>
           <a:prstGeom prst="rect">
             <a:avLst/>
@@ -38567,7 +38603,7 @@
         <p:spPr>
           <a:xfrm>
             <a:off x="1920240" y="4763880"/>
-            <a:ext cx="9509040" cy="1005120"/>
+            <a:ext cx="9508680" cy="1004760"/>
           </a:xfrm>
           <a:prstGeom prst="rect">
             <a:avLst/>
@@ -38628,7 +38664,7 @@
         <p:spPr>
           <a:xfrm>
             <a:off x="457200" y="6446520"/>
-            <a:ext cx="7314480" cy="273600"/>
+            <a:ext cx="7314120" cy="273240"/>
           </a:xfrm>
           <a:prstGeom prst="rect">
             <a:avLst/>
@@ -38689,7 +38725,7 @@
         <p:spPr>
           <a:xfrm>
             <a:off x="11521440" y="6446520"/>
-            <a:ext cx="456480" cy="273600"/>
+            <a:ext cx="456120" cy="273240"/>
           </a:xfrm>
           <a:prstGeom prst="rect">
             <a:avLst/>
@@ -38787,7 +38823,7 @@
         <p:spPr>
           <a:xfrm>
             <a:off x="-1828800" y="5029200"/>
-            <a:ext cx="3656880" cy="3656880"/>
+            <a:ext cx="3656520" cy="3656520"/>
           </a:xfrm>
           <a:prstGeom prst="ellipse">
             <a:avLst/>
@@ -38830,7 +38866,7 @@
         <p:spPr>
           <a:xfrm>
             <a:off x="457200" y="457200"/>
-            <a:ext cx="639360" cy="639360"/>
+            <a:ext cx="639000" cy="639000"/>
           </a:xfrm>
           <a:prstGeom prst="ellipse">
             <a:avLst/>
@@ -38877,7 +38913,7 @@
         <p:spPr>
           <a:xfrm>
             <a:off x="548640" y="548640"/>
-            <a:ext cx="447480" cy="447480"/>
+            <a:ext cx="447120" cy="447120"/>
           </a:xfrm>
           <a:prstGeom prst="rect">
             <a:avLst/>
@@ -38897,7 +38933,7 @@
         <p:spPr>
           <a:xfrm>
             <a:off x="1280160" y="457200"/>
-            <a:ext cx="10423440" cy="639360"/>
+            <a:ext cx="10423080" cy="639000"/>
           </a:xfrm>
           <a:prstGeom prst="rect">
             <a:avLst/>
@@ -38958,7 +38994,7 @@
         <p:spPr>
           <a:xfrm>
             <a:off x="457200" y="1600200"/>
-            <a:ext cx="11273760" cy="4479840"/>
+            <a:ext cx="11273400" cy="4479480"/>
           </a:xfrm>
           <a:prstGeom prst="roundRect">
             <a:avLst>
@@ -39003,7 +39039,7 @@
         <p:spPr>
           <a:xfrm>
             <a:off x="822960" y="1828800"/>
-            <a:ext cx="10514880" cy="456480"/>
+            <a:ext cx="10514520" cy="456120"/>
           </a:xfrm>
           <a:prstGeom prst="rect">
             <a:avLst/>
@@ -39064,7 +39100,7 @@
         <p:spPr>
           <a:xfrm>
             <a:off x="822960" y="2423160"/>
-            <a:ext cx="401760" cy="401760"/>
+            <a:ext cx="401400" cy="401400"/>
           </a:xfrm>
           <a:prstGeom prst="ellipse">
             <a:avLst/>
@@ -39111,7 +39147,7 @@
         <p:spPr>
           <a:xfrm>
             <a:off x="887040" y="2487240"/>
-            <a:ext cx="282600" cy="282600"/>
+            <a:ext cx="282240" cy="282240"/>
           </a:xfrm>
           <a:prstGeom prst="rect">
             <a:avLst/>
@@ -39131,7 +39167,7 @@
         <p:spPr>
           <a:xfrm>
             <a:off x="1371600" y="2441520"/>
-            <a:ext cx="401760" cy="365040"/>
+            <a:ext cx="401400" cy="364680"/>
           </a:xfrm>
           <a:prstGeom prst="roundRect">
             <a:avLst>
@@ -39176,7 +39212,7 @@
         <p:spPr>
           <a:xfrm>
             <a:off x="1371600" y="2441520"/>
-            <a:ext cx="401760" cy="365040"/>
+            <a:ext cx="401400" cy="364680"/>
           </a:xfrm>
           <a:prstGeom prst="rect">
             <a:avLst/>
@@ -39237,7 +39273,7 @@
         <p:spPr>
           <a:xfrm>
             <a:off x="1920240" y="2423160"/>
-            <a:ext cx="9509040" cy="1005120"/>
+            <a:ext cx="9508680" cy="1004760"/>
           </a:xfrm>
           <a:prstGeom prst="rect">
             <a:avLst/>
@@ -39298,7 +39334,7 @@
         <p:spPr>
           <a:xfrm>
             <a:off x="822960" y="3593520"/>
-            <a:ext cx="401760" cy="401760"/>
+            <a:ext cx="401400" cy="401400"/>
           </a:xfrm>
           <a:prstGeom prst="ellipse">
             <a:avLst/>
@@ -39345,7 +39381,7 @@
         <p:spPr>
           <a:xfrm>
             <a:off x="887040" y="3657600"/>
-            <a:ext cx="282600" cy="282600"/>
+            <a:ext cx="282240" cy="282240"/>
           </a:xfrm>
           <a:prstGeom prst="rect">
             <a:avLst/>
@@ -39365,7 +39401,7 @@
         <p:spPr>
           <a:xfrm>
             <a:off x="1371600" y="3611880"/>
-            <a:ext cx="401760" cy="365040"/>
+            <a:ext cx="401400" cy="364680"/>
           </a:xfrm>
           <a:prstGeom prst="roundRect">
             <a:avLst>
@@ -39410,7 +39446,7 @@
         <p:spPr>
           <a:xfrm>
             <a:off x="1371600" y="3611880"/>
-            <a:ext cx="401760" cy="365040"/>
+            <a:ext cx="401400" cy="364680"/>
           </a:xfrm>
           <a:prstGeom prst="rect">
             <a:avLst/>
@@ -39471,7 +39507,7 @@
         <p:spPr>
           <a:xfrm>
             <a:off x="1920240" y="3593520"/>
-            <a:ext cx="9509040" cy="1005120"/>
+            <a:ext cx="9508680" cy="1004760"/>
           </a:xfrm>
           <a:prstGeom prst="rect">
             <a:avLst/>
@@ -39532,7 +39568,7 @@
         <p:spPr>
           <a:xfrm>
             <a:off x="822960" y="4763880"/>
-            <a:ext cx="401760" cy="401760"/>
+            <a:ext cx="401400" cy="401400"/>
           </a:xfrm>
           <a:prstGeom prst="ellipse">
             <a:avLst/>
@@ -39579,7 +39615,7 @@
         <p:spPr>
           <a:xfrm>
             <a:off x="887040" y="4827960"/>
-            <a:ext cx="282600" cy="282600"/>
+            <a:ext cx="282240" cy="282240"/>
           </a:xfrm>
           <a:prstGeom prst="rect">
             <a:avLst/>
@@ -39599,7 +39635,7 @@
         <p:spPr>
           <a:xfrm>
             <a:off x="1371600" y="4782240"/>
-            <a:ext cx="401760" cy="365040"/>
+            <a:ext cx="401400" cy="364680"/>
           </a:xfrm>
           <a:prstGeom prst="roundRect">
             <a:avLst>
@@ -39644,7 +39680,7 @@
         <p:spPr>
           <a:xfrm>
             <a:off x="1371600" y="4782240"/>
-            <a:ext cx="401760" cy="365040"/>
+            <a:ext cx="401400" cy="364680"/>
           </a:xfrm>
           <a:prstGeom prst="rect">
             <a:avLst/>
@@ -39705,7 +39741,7 @@
         <p:spPr>
           <a:xfrm>
             <a:off x="1920240" y="4763880"/>
-            <a:ext cx="9509040" cy="1005120"/>
+            <a:ext cx="9508680" cy="1004760"/>
           </a:xfrm>
           <a:prstGeom prst="rect">
             <a:avLst/>
@@ -39766,7 +39802,7 @@
         <p:spPr>
           <a:xfrm>
             <a:off x="457200" y="6446520"/>
-            <a:ext cx="7314480" cy="273600"/>
+            <a:ext cx="7314120" cy="273240"/>
           </a:xfrm>
           <a:prstGeom prst="rect">
             <a:avLst/>
@@ -39827,7 +39863,7 @@
         <p:spPr>
           <a:xfrm>
             <a:off x="11521440" y="6446520"/>
-            <a:ext cx="456480" cy="273600"/>
+            <a:ext cx="456120" cy="273240"/>
           </a:xfrm>
           <a:prstGeom prst="rect">
             <a:avLst/>
@@ -39925,7 +39961,7 @@
         <p:spPr>
           <a:xfrm>
             <a:off x="-1828800" y="5029200"/>
-            <a:ext cx="3656880" cy="3656880"/>
+            <a:ext cx="3656520" cy="3656520"/>
           </a:xfrm>
           <a:prstGeom prst="ellipse">
             <a:avLst/>
@@ -39968,7 +40004,7 @@
         <p:spPr>
           <a:xfrm>
             <a:off x="457200" y="457200"/>
-            <a:ext cx="639360" cy="639360"/>
+            <a:ext cx="639000" cy="639000"/>
           </a:xfrm>
           <a:prstGeom prst="ellipse">
             <a:avLst/>
@@ -40015,7 +40051,7 @@
         <p:spPr>
           <a:xfrm>
             <a:off x="548640" y="548640"/>
-            <a:ext cx="447480" cy="447480"/>
+            <a:ext cx="447120" cy="447120"/>
           </a:xfrm>
           <a:prstGeom prst="rect">
             <a:avLst/>
@@ -40035,7 +40071,7 @@
         <p:spPr>
           <a:xfrm>
             <a:off x="1280160" y="457200"/>
-            <a:ext cx="10423440" cy="639360"/>
+            <a:ext cx="10423080" cy="639000"/>
           </a:xfrm>
           <a:prstGeom prst="rect">
             <a:avLst/>
@@ -40096,7 +40132,7 @@
         <p:spPr>
           <a:xfrm>
             <a:off x="457200" y="1600200"/>
-            <a:ext cx="11273760" cy="4479840"/>
+            <a:ext cx="11273400" cy="4479480"/>
           </a:xfrm>
           <a:prstGeom prst="roundRect">
             <a:avLst>
@@ -40141,7 +40177,7 @@
         <p:spPr>
           <a:xfrm>
             <a:off x="822960" y="1828800"/>
-            <a:ext cx="10514880" cy="456480"/>
+            <a:ext cx="10514520" cy="456120"/>
           </a:xfrm>
           <a:prstGeom prst="rect">
             <a:avLst/>
@@ -40202,7 +40238,7 @@
         <p:spPr>
           <a:xfrm>
             <a:off x="822960" y="2423160"/>
-            <a:ext cx="401760" cy="401760"/>
+            <a:ext cx="401400" cy="401400"/>
           </a:xfrm>
           <a:prstGeom prst="ellipse">
             <a:avLst/>
@@ -40249,7 +40285,7 @@
         <p:spPr>
           <a:xfrm>
             <a:off x="887040" y="2487240"/>
-            <a:ext cx="282600" cy="282600"/>
+            <a:ext cx="282240" cy="282240"/>
           </a:xfrm>
           <a:prstGeom prst="rect">
             <a:avLst/>
@@ -40269,7 +40305,7 @@
         <p:spPr>
           <a:xfrm>
             <a:off x="1371600" y="2441520"/>
-            <a:ext cx="401760" cy="365040"/>
+            <a:ext cx="401400" cy="364680"/>
           </a:xfrm>
           <a:prstGeom prst="roundRect">
             <a:avLst>
@@ -40314,7 +40350,7 @@
         <p:spPr>
           <a:xfrm>
             <a:off x="1371600" y="2441520"/>
-            <a:ext cx="401760" cy="365040"/>
+            <a:ext cx="401400" cy="364680"/>
           </a:xfrm>
           <a:prstGeom prst="rect">
             <a:avLst/>
@@ -40375,7 +40411,7 @@
         <p:spPr>
           <a:xfrm>
             <a:off x="1920240" y="2423160"/>
-            <a:ext cx="9509040" cy="1005120"/>
+            <a:ext cx="9508680" cy="1004760"/>
           </a:xfrm>
           <a:prstGeom prst="rect">
             <a:avLst/>
@@ -40436,7 +40472,7 @@
         <p:spPr>
           <a:xfrm>
             <a:off x="822960" y="3593520"/>
-            <a:ext cx="401760" cy="401760"/>
+            <a:ext cx="401400" cy="401400"/>
           </a:xfrm>
           <a:prstGeom prst="ellipse">
             <a:avLst/>
@@ -40483,7 +40519,7 @@
         <p:spPr>
           <a:xfrm>
             <a:off x="887040" y="3657600"/>
-            <a:ext cx="282600" cy="282600"/>
+            <a:ext cx="282240" cy="282240"/>
           </a:xfrm>
           <a:prstGeom prst="rect">
             <a:avLst/>
@@ -40503,7 +40539,7 @@
         <p:spPr>
           <a:xfrm>
             <a:off x="1371600" y="3611880"/>
-            <a:ext cx="401760" cy="365040"/>
+            <a:ext cx="401400" cy="364680"/>
           </a:xfrm>
           <a:prstGeom prst="roundRect">
             <a:avLst>
@@ -40548,7 +40584,7 @@
         <p:spPr>
           <a:xfrm>
             <a:off x="1371600" y="3611880"/>
-            <a:ext cx="401760" cy="365040"/>
+            <a:ext cx="401400" cy="364680"/>
           </a:xfrm>
           <a:prstGeom prst="rect">
             <a:avLst/>
@@ -40609,7 +40645,7 @@
         <p:spPr>
           <a:xfrm>
             <a:off x="1920240" y="3593520"/>
-            <a:ext cx="9509040" cy="1005120"/>
+            <a:ext cx="9508680" cy="1004760"/>
           </a:xfrm>
           <a:prstGeom prst="rect">
             <a:avLst/>
@@ -40670,7 +40706,7 @@
         <p:spPr>
           <a:xfrm>
             <a:off x="822960" y="4763880"/>
-            <a:ext cx="401760" cy="401760"/>
+            <a:ext cx="401400" cy="401400"/>
           </a:xfrm>
           <a:prstGeom prst="ellipse">
             <a:avLst/>
@@ -40717,7 +40753,7 @@
         <p:spPr>
           <a:xfrm>
             <a:off x="887040" y="4827960"/>
-            <a:ext cx="282600" cy="282600"/>
+            <a:ext cx="282240" cy="282240"/>
           </a:xfrm>
           <a:prstGeom prst="rect">
             <a:avLst/>
@@ -40737,7 +40773,7 @@
         <p:spPr>
           <a:xfrm>
             <a:off x="1371600" y="4782240"/>
-            <a:ext cx="401760" cy="365040"/>
+            <a:ext cx="401400" cy="364680"/>
           </a:xfrm>
           <a:prstGeom prst="roundRect">
             <a:avLst>
@@ -40782,7 +40818,7 @@
         <p:spPr>
           <a:xfrm>
             <a:off x="1371600" y="4782240"/>
-            <a:ext cx="401760" cy="365040"/>
+            <a:ext cx="401400" cy="364680"/>
           </a:xfrm>
           <a:prstGeom prst="rect">
             <a:avLst/>
@@ -40843,7 +40879,7 @@
         <p:spPr>
           <a:xfrm>
             <a:off x="1920240" y="4763880"/>
-            <a:ext cx="9509040" cy="1005120"/>
+            <a:ext cx="9508680" cy="1004760"/>
           </a:xfrm>
           <a:prstGeom prst="rect">
             <a:avLst/>
@@ -40904,7 +40940,7 @@
         <p:spPr>
           <a:xfrm>
             <a:off x="457200" y="6446520"/>
-            <a:ext cx="7314480" cy="273600"/>
+            <a:ext cx="7314120" cy="273240"/>
           </a:xfrm>
           <a:prstGeom prst="rect">
             <a:avLst/>
@@ -40965,7 +41001,7 @@
         <p:spPr>
           <a:xfrm>
             <a:off x="11521440" y="6446520"/>
-            <a:ext cx="456480" cy="273600"/>
+            <a:ext cx="456120" cy="273240"/>
           </a:xfrm>
           <a:prstGeom prst="rect">
             <a:avLst/>
@@ -41063,7 +41099,7 @@
         <p:spPr>
           <a:xfrm>
             <a:off x="-1828800" y="4114800"/>
-            <a:ext cx="5485680" cy="5485680"/>
+            <a:ext cx="5485320" cy="5485320"/>
           </a:xfrm>
           <a:prstGeom prst="ellipse">
             <a:avLst/>
@@ -41106,7 +41142,7 @@
         <p:spPr>
           <a:xfrm>
             <a:off x="9601200" y="-2286000"/>
-            <a:ext cx="5485680" cy="5485680"/>
+            <a:ext cx="5485320" cy="5485320"/>
           </a:xfrm>
           <a:prstGeom prst="ellipse">
             <a:avLst/>
@@ -41149,7 +41185,7 @@
         <p:spPr>
           <a:xfrm>
             <a:off x="5596200" y="731520"/>
-            <a:ext cx="1005120" cy="1005120"/>
+            <a:ext cx="1004760" cy="1004760"/>
           </a:xfrm>
           <a:prstGeom prst="ellipse">
             <a:avLst/>
@@ -41196,7 +41232,7 @@
         <p:spPr>
           <a:xfrm>
             <a:off x="5742360" y="877680"/>
-            <a:ext cx="703440" cy="703440"/>
+            <a:ext cx="703080" cy="703080"/>
           </a:xfrm>
           <a:prstGeom prst="rect">
             <a:avLst/>
@@ -41216,7 +41252,7 @@
         <p:spPr>
           <a:xfrm>
             <a:off x="914400" y="1965960"/>
-            <a:ext cx="10359360" cy="365040"/>
+            <a:ext cx="10359000" cy="364680"/>
           </a:xfrm>
           <a:prstGeom prst="rect">
             <a:avLst/>
@@ -41277,7 +41313,7 @@
         <p:spPr>
           <a:xfrm>
             <a:off x="914400" y="2377440"/>
-            <a:ext cx="10359360" cy="2010960"/>
+            <a:ext cx="10359000" cy="2010600"/>
           </a:xfrm>
           <a:prstGeom prst="rect">
             <a:avLst/>
@@ -41338,7 +41374,7 @@
         <p:spPr>
           <a:xfrm>
             <a:off x="1463040" y="4572000"/>
-            <a:ext cx="9262080" cy="1096560"/>
+            <a:ext cx="9261720" cy="1096200"/>
           </a:xfrm>
           <a:prstGeom prst="rect">
             <a:avLst/>
@@ -41399,7 +41435,7 @@
         <p:spPr>
           <a:xfrm>
             <a:off x="11521440" y="6446520"/>
-            <a:ext cx="456480" cy="273600"/>
+            <a:ext cx="456120" cy="273240"/>
           </a:xfrm>
           <a:prstGeom prst="rect">
             <a:avLst/>
@@ -41497,7 +41533,7 @@
         <p:spPr>
           <a:xfrm>
             <a:off x="10515600" y="5669280"/>
-            <a:ext cx="3199680" cy="3199680"/>
+            <a:ext cx="3199320" cy="3199320"/>
           </a:xfrm>
           <a:prstGeom prst="roundRect">
             <a:avLst>
@@ -41542,7 +41578,7 @@
         <p:spPr>
           <a:xfrm>
             <a:off x="457200" y="457200"/>
-            <a:ext cx="639360" cy="639360"/>
+            <a:ext cx="639000" cy="639000"/>
           </a:xfrm>
           <a:prstGeom prst="ellipse">
             <a:avLst/>
@@ -41589,7 +41625,7 @@
         <p:spPr>
           <a:xfrm>
             <a:off x="548640" y="548640"/>
-            <a:ext cx="447480" cy="447480"/>
+            <a:ext cx="447120" cy="447120"/>
           </a:xfrm>
           <a:prstGeom prst="rect">
             <a:avLst/>
@@ -41609,7 +41645,7 @@
         <p:spPr>
           <a:xfrm>
             <a:off x="1280160" y="457200"/>
-            <a:ext cx="10423440" cy="639360"/>
+            <a:ext cx="10423080" cy="639000"/>
           </a:xfrm>
           <a:prstGeom prst="rect">
             <a:avLst/>
@@ -41670,7 +41706,7 @@
         <p:spPr>
           <a:xfrm>
             <a:off x="457200" y="1554480"/>
-            <a:ext cx="3656880" cy="4662720"/>
+            <a:ext cx="3656520" cy="4662360"/>
           </a:xfrm>
           <a:prstGeom prst="roundRect">
             <a:avLst>
@@ -41715,7 +41751,7 @@
         <p:spPr>
           <a:xfrm>
             <a:off x="1508760" y="2194560"/>
-            <a:ext cx="1553760" cy="1553760"/>
+            <a:ext cx="1553400" cy="1553400"/>
           </a:xfrm>
           <a:prstGeom prst="ellipse">
             <a:avLst/>
@@ -41762,7 +41798,7 @@
         <p:spPr>
           <a:xfrm>
             <a:off x="1746360" y="2423160"/>
-            <a:ext cx="1087560" cy="1087560"/>
+            <a:ext cx="1087200" cy="1087200"/>
           </a:xfrm>
           <a:prstGeom prst="rect">
             <a:avLst/>
@@ -41782,7 +41818,7 @@
         <p:spPr>
           <a:xfrm>
             <a:off x="640080" y="3977640"/>
-            <a:ext cx="3291120" cy="1736640"/>
+            <a:ext cx="3290760" cy="1736280"/>
           </a:xfrm>
           <a:prstGeom prst="rect">
             <a:avLst/>
@@ -41903,7 +41939,7 @@
         <p:spPr>
           <a:xfrm>
             <a:off x="4572000" y="1737360"/>
-            <a:ext cx="7131600" cy="4114080"/>
+            <a:ext cx="7131240" cy="4113720"/>
           </a:xfrm>
           <a:prstGeom prst="rect">
             <a:avLst/>
@@ -42074,7 +42110,7 @@
         <p:spPr>
           <a:xfrm>
             <a:off x="457200" y="6446520"/>
-            <a:ext cx="7314480" cy="273600"/>
+            <a:ext cx="7314120" cy="273240"/>
           </a:xfrm>
           <a:prstGeom prst="rect">
             <a:avLst/>
@@ -42135,7 +42171,7 @@
         <p:spPr>
           <a:xfrm>
             <a:off x="11521440" y="6446520"/>
-            <a:ext cx="456480" cy="273600"/>
+            <a:ext cx="456120" cy="273240"/>
           </a:xfrm>
           <a:prstGeom prst="rect">
             <a:avLst/>
@@ -42233,7 +42269,7 @@
         <p:spPr>
           <a:xfrm>
             <a:off x="10515600" y="5669280"/>
-            <a:ext cx="3199680" cy="3199680"/>
+            <a:ext cx="3199320" cy="3199320"/>
           </a:xfrm>
           <a:prstGeom prst="roundRect">
             <a:avLst>
@@ -42278,7 +42314,7 @@
         <p:spPr>
           <a:xfrm>
             <a:off x="457200" y="457200"/>
-            <a:ext cx="639360" cy="639360"/>
+            <a:ext cx="639000" cy="639000"/>
           </a:xfrm>
           <a:prstGeom prst="ellipse">
             <a:avLst/>
@@ -42325,7 +42361,7 @@
         <p:spPr>
           <a:xfrm>
             <a:off x="548640" y="548640"/>
-            <a:ext cx="447480" cy="447480"/>
+            <a:ext cx="447120" cy="447120"/>
           </a:xfrm>
           <a:prstGeom prst="rect">
             <a:avLst/>
@@ -42345,7 +42381,7 @@
         <p:spPr>
           <a:xfrm>
             <a:off x="1280160" y="457200"/>
-            <a:ext cx="10423440" cy="639360"/>
+            <a:ext cx="10423080" cy="639000"/>
           </a:xfrm>
           <a:prstGeom prst="rect">
             <a:avLst/>
@@ -42406,7 +42442,7 @@
         <p:spPr>
           <a:xfrm>
             <a:off x="457200" y="1554480"/>
-            <a:ext cx="3656880" cy="4662720"/>
+            <a:ext cx="3656520" cy="4662360"/>
           </a:xfrm>
           <a:prstGeom prst="roundRect">
             <a:avLst>
@@ -42451,7 +42487,7 @@
         <p:spPr>
           <a:xfrm>
             <a:off x="1508760" y="2194560"/>
-            <a:ext cx="1553760" cy="1553760"/>
+            <a:ext cx="1553400" cy="1553400"/>
           </a:xfrm>
           <a:prstGeom prst="ellipse">
             <a:avLst/>
@@ -42498,7 +42534,7 @@
         <p:spPr>
           <a:xfrm>
             <a:off x="1746360" y="2423160"/>
-            <a:ext cx="1087560" cy="1087560"/>
+            <a:ext cx="1087200" cy="1087200"/>
           </a:xfrm>
           <a:prstGeom prst="rect">
             <a:avLst/>
@@ -42518,7 +42554,7 @@
         <p:spPr>
           <a:xfrm>
             <a:off x="640080" y="3977640"/>
-            <a:ext cx="3291120" cy="1736640"/>
+            <a:ext cx="3290760" cy="1736280"/>
           </a:xfrm>
           <a:prstGeom prst="rect">
             <a:avLst/>
@@ -42639,7 +42675,7 @@
         <p:spPr>
           <a:xfrm>
             <a:off x="4572000" y="1737360"/>
-            <a:ext cx="7131600" cy="4114080"/>
+            <a:ext cx="7131240" cy="4113720"/>
           </a:xfrm>
           <a:prstGeom prst="rect">
             <a:avLst/>
@@ -42810,7 +42846,7 @@
         <p:spPr>
           <a:xfrm>
             <a:off x="457200" y="6446520"/>
-            <a:ext cx="7314480" cy="273600"/>
+            <a:ext cx="7314120" cy="273240"/>
           </a:xfrm>
           <a:prstGeom prst="rect">
             <a:avLst/>
@@ -42871,7 +42907,7 @@
         <p:spPr>
           <a:xfrm>
             <a:off x="11521440" y="6446520"/>
-            <a:ext cx="456480" cy="273600"/>
+            <a:ext cx="456120" cy="273240"/>
           </a:xfrm>
           <a:prstGeom prst="rect">
             <a:avLst/>
@@ -42969,7 +43005,7 @@
         <p:spPr>
           <a:xfrm>
             <a:off x="-1828800" y="4114800"/>
-            <a:ext cx="5485680" cy="5485680"/>
+            <a:ext cx="5485320" cy="5485320"/>
           </a:xfrm>
           <a:prstGeom prst="ellipse">
             <a:avLst/>
@@ -43012,7 +43048,7 @@
         <p:spPr>
           <a:xfrm>
             <a:off x="9601200" y="-2286000"/>
-            <a:ext cx="5485680" cy="5485680"/>
+            <a:ext cx="5485320" cy="5485320"/>
           </a:xfrm>
           <a:prstGeom prst="ellipse">
             <a:avLst/>
@@ -43055,7 +43091,7 @@
         <p:spPr>
           <a:xfrm>
             <a:off x="5596200" y="731520"/>
-            <a:ext cx="1005120" cy="1005120"/>
+            <a:ext cx="1004760" cy="1004760"/>
           </a:xfrm>
           <a:prstGeom prst="ellipse">
             <a:avLst/>
@@ -43102,7 +43138,7 @@
         <p:spPr>
           <a:xfrm>
             <a:off x="5742360" y="877680"/>
-            <a:ext cx="703440" cy="703440"/>
+            <a:ext cx="703080" cy="703080"/>
           </a:xfrm>
           <a:prstGeom prst="rect">
             <a:avLst/>
@@ -43122,7 +43158,7 @@
         <p:spPr>
           <a:xfrm>
             <a:off x="914400" y="1965960"/>
-            <a:ext cx="10359360" cy="365040"/>
+            <a:ext cx="10359000" cy="364680"/>
           </a:xfrm>
           <a:prstGeom prst="rect">
             <a:avLst/>
@@ -43183,7 +43219,7 @@
         <p:spPr>
           <a:xfrm>
             <a:off x="914400" y="2377440"/>
-            <a:ext cx="10359360" cy="2010960"/>
+            <a:ext cx="10359000" cy="2010600"/>
           </a:xfrm>
           <a:prstGeom prst="rect">
             <a:avLst/>
@@ -43244,7 +43280,7 @@
         <p:spPr>
           <a:xfrm>
             <a:off x="1463040" y="4572000"/>
-            <a:ext cx="9262080" cy="1096560"/>
+            <a:ext cx="9261720" cy="1096200"/>
           </a:xfrm>
           <a:prstGeom prst="rect">
             <a:avLst/>
@@ -43305,7 +43341,7 @@
         <p:spPr>
           <a:xfrm>
             <a:off x="11521440" y="6446520"/>
-            <a:ext cx="456480" cy="273600"/>
+            <a:ext cx="456120" cy="273240"/>
           </a:xfrm>
           <a:prstGeom prst="rect">
             <a:avLst/>
@@ -43403,7 +43439,7 @@
         <p:spPr>
           <a:xfrm>
             <a:off x="457200" y="457200"/>
-            <a:ext cx="639360" cy="639360"/>
+            <a:ext cx="639000" cy="639000"/>
           </a:xfrm>
           <a:prstGeom prst="ellipse">
             <a:avLst/>
@@ -43450,7 +43486,7 @@
         <p:spPr>
           <a:xfrm>
             <a:off x="548640" y="548640"/>
-            <a:ext cx="447480" cy="447480"/>
+            <a:ext cx="447120" cy="447120"/>
           </a:xfrm>
           <a:prstGeom prst="rect">
             <a:avLst/>
@@ -43470,7 +43506,7 @@
         <p:spPr>
           <a:xfrm>
             <a:off x="1280160" y="457200"/>
-            <a:ext cx="10423440" cy="639360"/>
+            <a:ext cx="10423080" cy="639000"/>
           </a:xfrm>
           <a:prstGeom prst="rect">
             <a:avLst/>
@@ -43531,7 +43567,7 @@
         <p:spPr>
           <a:xfrm>
             <a:off x="548640" y="1828800"/>
-            <a:ext cx="4754160" cy="4022640"/>
+            <a:ext cx="4753800" cy="4022280"/>
           </a:xfrm>
           <a:prstGeom prst="rect">
             <a:avLst/>
@@ -43667,7 +43703,7 @@
         <p:spPr>
           <a:xfrm>
             <a:off x="5486400" y="1691640"/>
-            <a:ext cx="6217200" cy="4342680"/>
+            <a:ext cx="6216840" cy="4342320"/>
           </a:xfrm>
           <a:prstGeom prst="roundRect">
             <a:avLst>
@@ -43712,7 +43748,7 @@
         <p:spPr>
           <a:xfrm>
             <a:off x="5806440" y="1965960"/>
-            <a:ext cx="5577120" cy="3794040"/>
+            <a:ext cx="5576760" cy="3793680"/>
           </a:xfrm>
           <a:prstGeom prst="rect">
             <a:avLst/>
@@ -44001,7 +44037,7 @@
         <p:spPr>
           <a:xfrm>
             <a:off x="457200" y="6446520"/>
-            <a:ext cx="7314480" cy="273600"/>
+            <a:ext cx="7314120" cy="273240"/>
           </a:xfrm>
           <a:prstGeom prst="rect">
             <a:avLst/>
@@ -44062,7 +44098,7 @@
         <p:spPr>
           <a:xfrm>
             <a:off x="11521440" y="6446520"/>
-            <a:ext cx="456480" cy="273600"/>
+            <a:ext cx="456120" cy="273240"/>
           </a:xfrm>
           <a:prstGeom prst="rect">
             <a:avLst/>
@@ -44160,7 +44196,7 @@
         <p:spPr>
           <a:xfrm>
             <a:off x="457200" y="457200"/>
-            <a:ext cx="639360" cy="639360"/>
+            <a:ext cx="639000" cy="639000"/>
           </a:xfrm>
           <a:prstGeom prst="ellipse">
             <a:avLst/>
@@ -44207,7 +44243,7 @@
         <p:spPr>
           <a:xfrm>
             <a:off x="548640" y="548640"/>
-            <a:ext cx="447480" cy="447480"/>
+            <a:ext cx="447120" cy="447120"/>
           </a:xfrm>
           <a:prstGeom prst="rect">
             <a:avLst/>
@@ -44227,7 +44263,7 @@
         <p:spPr>
           <a:xfrm>
             <a:off x="1280160" y="457200"/>
-            <a:ext cx="10423440" cy="639360"/>
+            <a:ext cx="10423080" cy="639000"/>
           </a:xfrm>
           <a:prstGeom prst="rect">
             <a:avLst/>
@@ -44288,7 +44324,7 @@
         <p:spPr>
           <a:xfrm>
             <a:off x="548640" y="1828800"/>
-            <a:ext cx="4754160" cy="4022640"/>
+            <a:ext cx="4753800" cy="4022280"/>
           </a:xfrm>
           <a:prstGeom prst="rect">
             <a:avLst/>
@@ -44424,7 +44460,7 @@
         <p:spPr>
           <a:xfrm>
             <a:off x="5486400" y="1691640"/>
-            <a:ext cx="6217200" cy="4342680"/>
+            <a:ext cx="6216840" cy="4342320"/>
           </a:xfrm>
           <a:prstGeom prst="roundRect">
             <a:avLst>
@@ -44469,7 +44505,7 @@
         <p:spPr>
           <a:xfrm>
             <a:off x="5806440" y="1965960"/>
-            <a:ext cx="5577120" cy="3794040"/>
+            <a:ext cx="5576760" cy="3793680"/>
           </a:xfrm>
           <a:prstGeom prst="rect">
             <a:avLst/>
@@ -44782,7 +44818,7 @@
         <p:spPr>
           <a:xfrm>
             <a:off x="457200" y="6446520"/>
-            <a:ext cx="7314480" cy="273600"/>
+            <a:ext cx="7314120" cy="273240"/>
           </a:xfrm>
           <a:prstGeom prst="rect">
             <a:avLst/>
@@ -44843,7 +44879,7 @@
         <p:spPr>
           <a:xfrm>
             <a:off x="11521440" y="6446520"/>
-            <a:ext cx="456480" cy="273600"/>
+            <a:ext cx="456120" cy="273240"/>
           </a:xfrm>
           <a:prstGeom prst="rect">
             <a:avLst/>
@@ -44941,7 +44977,7 @@
         <p:spPr>
           <a:xfrm>
             <a:off x="457200" y="457200"/>
-            <a:ext cx="639360" cy="639360"/>
+            <a:ext cx="639000" cy="639000"/>
           </a:xfrm>
           <a:prstGeom prst="ellipse">
             <a:avLst/>
@@ -44988,7 +45024,7 @@
         <p:spPr>
           <a:xfrm>
             <a:off x="548640" y="548640"/>
-            <a:ext cx="447480" cy="447480"/>
+            <a:ext cx="447120" cy="447120"/>
           </a:xfrm>
           <a:prstGeom prst="rect">
             <a:avLst/>
@@ -45008,7 +45044,7 @@
         <p:spPr>
           <a:xfrm>
             <a:off x="1280160" y="457200"/>
-            <a:ext cx="10423440" cy="639360"/>
+            <a:ext cx="10423080" cy="639000"/>
           </a:xfrm>
           <a:prstGeom prst="rect">
             <a:avLst/>
@@ -45069,7 +45105,7 @@
         <p:spPr>
           <a:xfrm>
             <a:off x="548640" y="1828800"/>
-            <a:ext cx="4754160" cy="4022640"/>
+            <a:ext cx="4753800" cy="4022280"/>
           </a:xfrm>
           <a:prstGeom prst="rect">
             <a:avLst/>
@@ -45205,7 +45241,7 @@
         <p:spPr>
           <a:xfrm>
             <a:off x="5486400" y="1691640"/>
-            <a:ext cx="6217200" cy="4342680"/>
+            <a:ext cx="6216840" cy="4342320"/>
           </a:xfrm>
           <a:prstGeom prst="roundRect">
             <a:avLst>
@@ -45250,7 +45286,7 @@
         <p:spPr>
           <a:xfrm>
             <a:off x="5806440" y="1965960"/>
-            <a:ext cx="5577120" cy="3794040"/>
+            <a:ext cx="5576760" cy="3793680"/>
           </a:xfrm>
           <a:prstGeom prst="rect">
             <a:avLst/>
@@ -45587,7 +45623,7 @@
         <p:spPr>
           <a:xfrm>
             <a:off x="457200" y="6446520"/>
-            <a:ext cx="7314480" cy="273600"/>
+            <a:ext cx="7314120" cy="273240"/>
           </a:xfrm>
           <a:prstGeom prst="rect">
             <a:avLst/>
@@ -45648,7 +45684,7 @@
         <p:spPr>
           <a:xfrm>
             <a:off x="11521440" y="6446520"/>
-            <a:ext cx="456480" cy="273600"/>
+            <a:ext cx="456120" cy="273240"/>
           </a:xfrm>
           <a:prstGeom prst="rect">
             <a:avLst/>
@@ -45746,7 +45782,7 @@
         <p:spPr>
           <a:xfrm>
             <a:off x="457200" y="457200"/>
-            <a:ext cx="639360" cy="639360"/>
+            <a:ext cx="639000" cy="639000"/>
           </a:xfrm>
           <a:prstGeom prst="ellipse">
             <a:avLst/>
@@ -45793,7 +45829,7 @@
         <p:spPr>
           <a:xfrm>
             <a:off x="548640" y="548640"/>
-            <a:ext cx="447480" cy="447480"/>
+            <a:ext cx="447120" cy="447120"/>
           </a:xfrm>
           <a:prstGeom prst="rect">
             <a:avLst/>
@@ -45813,7 +45849,7 @@
         <p:spPr>
           <a:xfrm>
             <a:off x="1280160" y="457200"/>
-            <a:ext cx="10423440" cy="639360"/>
+            <a:ext cx="10423080" cy="639000"/>
           </a:xfrm>
           <a:prstGeom prst="rect">
             <a:avLst/>
@@ -45874,7 +45910,7 @@
         <p:spPr>
           <a:xfrm>
             <a:off x="548640" y="1828800"/>
-            <a:ext cx="4754160" cy="4022640"/>
+            <a:ext cx="4753800" cy="4022280"/>
           </a:xfrm>
           <a:prstGeom prst="rect">
             <a:avLst/>
@@ -46010,7 +46046,7 @@
         <p:spPr>
           <a:xfrm>
             <a:off x="5486400" y="1691640"/>
-            <a:ext cx="6217200" cy="4342680"/>
+            <a:ext cx="6216840" cy="4342320"/>
           </a:xfrm>
           <a:prstGeom prst="roundRect">
             <a:avLst>
@@ -46055,7 +46091,7 @@
         <p:spPr>
           <a:xfrm>
             <a:off x="5806440" y="1965960"/>
-            <a:ext cx="5577120" cy="3794040"/>
+            <a:ext cx="5576760" cy="3793680"/>
           </a:xfrm>
           <a:prstGeom prst="rect">
             <a:avLst/>
@@ -46350,7 +46386,7 @@
         <p:spPr>
           <a:xfrm>
             <a:off x="457200" y="6446520"/>
-            <a:ext cx="7314480" cy="273600"/>
+            <a:ext cx="7314120" cy="273240"/>
           </a:xfrm>
           <a:prstGeom prst="rect">
             <a:avLst/>
@@ -46411,7 +46447,7 @@
         <p:spPr>
           <a:xfrm>
             <a:off x="11521440" y="6446520"/>
-            <a:ext cx="456480" cy="273600"/>
+            <a:ext cx="456120" cy="273240"/>
           </a:xfrm>
           <a:prstGeom prst="rect">
             <a:avLst/>
@@ -46509,7 +46545,7 @@
         <p:spPr>
           <a:xfrm>
             <a:off x="457200" y="457200"/>
-            <a:ext cx="639360" cy="639360"/>
+            <a:ext cx="639000" cy="639000"/>
           </a:xfrm>
           <a:prstGeom prst="ellipse">
             <a:avLst/>
@@ -46556,7 +46592,7 @@
         <p:spPr>
           <a:xfrm>
             <a:off x="548640" y="548640"/>
-            <a:ext cx="447480" cy="447480"/>
+            <a:ext cx="447120" cy="447120"/>
           </a:xfrm>
           <a:prstGeom prst="rect">
             <a:avLst/>
@@ -46576,7 +46612,7 @@
         <p:spPr>
           <a:xfrm>
             <a:off x="1280160" y="457200"/>
-            <a:ext cx="10423440" cy="639360"/>
+            <a:ext cx="10423080" cy="639000"/>
           </a:xfrm>
           <a:prstGeom prst="rect">
             <a:avLst/>
@@ -46637,7 +46673,7 @@
         <p:spPr>
           <a:xfrm>
             <a:off x="548640" y="1828800"/>
-            <a:ext cx="4754160" cy="4022640"/>
+            <a:ext cx="4753800" cy="4022280"/>
           </a:xfrm>
           <a:prstGeom prst="rect">
             <a:avLst/>
@@ -46773,7 +46809,7 @@
         <p:spPr>
           <a:xfrm>
             <a:off x="5486400" y="1691640"/>
-            <a:ext cx="6217200" cy="4342680"/>
+            <a:ext cx="6216840" cy="4342320"/>
           </a:xfrm>
           <a:prstGeom prst="roundRect">
             <a:avLst>
@@ -46818,7 +46854,7 @@
         <p:spPr>
           <a:xfrm>
             <a:off x="5806440" y="1965960"/>
-            <a:ext cx="5577120" cy="3794040"/>
+            <a:ext cx="5576760" cy="3793680"/>
           </a:xfrm>
           <a:prstGeom prst="rect">
             <a:avLst/>
@@ -47059,7 +47095,7 @@
         <p:spPr>
           <a:xfrm>
             <a:off x="457200" y="6446520"/>
-            <a:ext cx="7314480" cy="273600"/>
+            <a:ext cx="7314120" cy="273240"/>
           </a:xfrm>
           <a:prstGeom prst="rect">
             <a:avLst/>
@@ -47120,7 +47156,7 @@
         <p:spPr>
           <a:xfrm>
             <a:off x="11521440" y="6446520"/>
-            <a:ext cx="456480" cy="273600"/>
+            <a:ext cx="456120" cy="273240"/>
           </a:xfrm>
           <a:prstGeom prst="rect">
             <a:avLst/>

--- a/slides/1_python_slides/8_advanced_functions.pptx
+++ b/slides/1_python_slides/8_advanced_functions.pptx
@@ -177,7 +177,117 @@
                 <a:uFillTx/>
                 <a:latin typeface="Arial"/>
               </a:rPr>
-              <a:t>Click to edit the notes format</a:t>
+              <a:t>Cli</a:t>
+            </a:r>
+            <a:r>
+              <a:rPr lang="en-US" sz="2000" b="0" u="none" strike="noStrike">
+                <a:solidFill>
+                  <a:srgbClr val="000000"/>
+                </a:solidFill>
+                <a:effectLst/>
+                <a:uFillTx/>
+                <a:latin typeface="Arial"/>
+              </a:rPr>
+              <a:t>ck </a:t>
+            </a:r>
+            <a:r>
+              <a:rPr lang="en-US" sz="2000" b="0" u="none" strike="noStrike">
+                <a:solidFill>
+                  <a:srgbClr val="000000"/>
+                </a:solidFill>
+                <a:effectLst/>
+                <a:uFillTx/>
+                <a:latin typeface="Arial"/>
+              </a:rPr>
+              <a:t>to </a:t>
+            </a:r>
+            <a:r>
+              <a:rPr lang="en-US" sz="2000" b="0" u="none" strike="noStrike">
+                <a:solidFill>
+                  <a:srgbClr val="000000"/>
+                </a:solidFill>
+                <a:effectLst/>
+                <a:uFillTx/>
+                <a:latin typeface="Arial"/>
+              </a:rPr>
+              <a:t>edi</a:t>
+            </a:r>
+            <a:r>
+              <a:rPr lang="en-US" sz="2000" b="0" u="none" strike="noStrike">
+                <a:solidFill>
+                  <a:srgbClr val="000000"/>
+                </a:solidFill>
+                <a:effectLst/>
+                <a:uFillTx/>
+                <a:latin typeface="Arial"/>
+              </a:rPr>
+              <a:t>t </a:t>
+            </a:r>
+            <a:r>
+              <a:rPr lang="en-US" sz="2000" b="0" u="none" strike="noStrike">
+                <a:solidFill>
+                  <a:srgbClr val="000000"/>
+                </a:solidFill>
+                <a:effectLst/>
+                <a:uFillTx/>
+                <a:latin typeface="Arial"/>
+              </a:rPr>
+              <a:t>the </a:t>
+            </a:r>
+            <a:r>
+              <a:rPr lang="en-US" sz="2000" b="0" u="none" strike="noStrike">
+                <a:solidFill>
+                  <a:srgbClr val="000000"/>
+                </a:solidFill>
+                <a:effectLst/>
+                <a:uFillTx/>
+                <a:latin typeface="Arial"/>
+              </a:rPr>
+              <a:t>not</a:t>
+            </a:r>
+            <a:r>
+              <a:rPr lang="en-US" sz="2000" b="0" u="none" strike="noStrike">
+                <a:solidFill>
+                  <a:srgbClr val="000000"/>
+                </a:solidFill>
+                <a:effectLst/>
+                <a:uFillTx/>
+                <a:latin typeface="Arial"/>
+              </a:rPr>
+              <a:t>es </a:t>
+            </a:r>
+            <a:r>
+              <a:rPr lang="en-US" sz="2000" b="0" u="none" strike="noStrike">
+                <a:solidFill>
+                  <a:srgbClr val="000000"/>
+                </a:solidFill>
+                <a:effectLst/>
+                <a:uFillTx/>
+                <a:latin typeface="Arial"/>
+              </a:rPr>
+              <a:t>for</a:t>
+            </a:r>
+            <a:r>
+              <a:rPr lang="en-US" sz="2000" b="0" u="none" strike="noStrike">
+                <a:solidFill>
+                  <a:srgbClr val="000000"/>
+                </a:solidFill>
+                <a:effectLst/>
+                <a:uFillTx/>
+                <a:latin typeface="Arial"/>
+              </a:rPr>
+              <a:t>ma</a:t>
+            </a:r>
+            <a:r>
+              <a:rPr lang="en-US" sz="2000" b="0" u="none" strike="noStrike">
+                <a:solidFill>
+                  <a:srgbClr val="000000"/>
+                </a:solidFill>
+                <a:effectLst/>
+                <a:uFillTx/>
+                <a:latin typeface="Arial"/>
+              </a:rPr>
+              <a:t>t</a:t>
             </a:r>
             <a:endParaRPr lang="en-US" sz="2000" b="0" u="none" strike="noStrike">
               <a:solidFill>
@@ -419,7 +529,7 @@
             <a:pPr indent="0" algn="r">
               <a:buNone/>
             </a:pPr>
-            <a:fld id="{7C005205-BC3E-48D2-9BDC-9EEF17FA1020}" type="slidenum">
+            <a:fld id="{2E390FAB-ACE8-46BF-AC32-6AA8B69F6EF9}" type="slidenum">
               <a:rPr lang="en-US" sz="1400" b="0" u="none" strike="noStrike">
                 <a:solidFill>
                   <a:srgbClr val="000000"/>
@@ -477,7 +587,7 @@
         <p:spPr>
           <a:xfrm>
             <a:off x="685800" y="1143000"/>
-            <a:ext cx="5485320" cy="3085200"/>
+            <a:ext cx="5484960" cy="3084840"/>
           </a:xfrm>
           <a:prstGeom prst="rect">
             <a:avLst/>
@@ -500,7 +610,7 @@
         <p:spPr>
           <a:xfrm>
             <a:off x="685800" y="4400640"/>
-            <a:ext cx="5485320" cy="3599280"/>
+            <a:ext cx="5484960" cy="3598920"/>
           </a:xfrm>
           <a:prstGeom prst="rect">
             <a:avLst/>
@@ -542,7 +652,7 @@
         <p:spPr>
           <a:xfrm>
             <a:off x="3884760" y="8685360"/>
-            <a:ext cx="2970720" cy="457560"/>
+            <a:ext cx="2970360" cy="457200"/>
           </a:xfrm>
           <a:prstGeom prst="rect">
             <a:avLst/>
@@ -586,7 +696,7 @@
                 <a:tab pos="0" algn="l"/>
               </a:tabLst>
             </a:pPr>
-            <a:fld id="{776D83C8-62F4-47A4-8A69-FDA6CA2737F2}" type="slidenum">
+            <a:fld id="{E814BF08-2013-4B60-8A52-12B32E62135F}" type="slidenum">
               <a:rPr lang="en-US" sz="1200" b="0" u="none" strike="noStrike">
                 <a:solidFill>
                   <a:schemeClr val="dk1"/>
@@ -644,7 +754,7 @@
         <p:spPr>
           <a:xfrm>
             <a:off x="685800" y="1143000"/>
-            <a:ext cx="5485320" cy="3085200"/>
+            <a:ext cx="5484960" cy="3084840"/>
           </a:xfrm>
           <a:prstGeom prst="rect">
             <a:avLst/>
@@ -667,7 +777,7 @@
         <p:spPr>
           <a:xfrm>
             <a:off x="685800" y="4400640"/>
-            <a:ext cx="5485320" cy="3599280"/>
+            <a:ext cx="5484960" cy="3598920"/>
           </a:xfrm>
           <a:prstGeom prst="rect">
             <a:avLst/>
@@ -709,7 +819,7 @@
         <p:spPr>
           <a:xfrm>
             <a:off x="3884760" y="8685360"/>
-            <a:ext cx="2970720" cy="457560"/>
+            <a:ext cx="2970360" cy="457200"/>
           </a:xfrm>
           <a:prstGeom prst="rect">
             <a:avLst/>
@@ -753,7 +863,7 @@
                 <a:tab pos="0" algn="l"/>
               </a:tabLst>
             </a:pPr>
-            <a:fld id="{033B5979-7AEA-4CBA-AF1B-D7A93A3EA97F}" type="slidenum">
+            <a:fld id="{86B225FF-BA91-4E4A-9440-4D026BBFA157}" type="slidenum">
               <a:rPr lang="en-US" sz="1200" b="0" u="none" strike="noStrike">
                 <a:solidFill>
                   <a:schemeClr val="dk1"/>
@@ -811,7 +921,7 @@
         <p:spPr>
           <a:xfrm>
             <a:off x="685800" y="1143000"/>
-            <a:ext cx="5485320" cy="3085200"/>
+            <a:ext cx="5484960" cy="3084840"/>
           </a:xfrm>
           <a:prstGeom prst="rect">
             <a:avLst/>
@@ -834,7 +944,7 @@
         <p:spPr>
           <a:xfrm>
             <a:off x="685800" y="4400640"/>
-            <a:ext cx="5485320" cy="3599280"/>
+            <a:ext cx="5484960" cy="3598920"/>
           </a:xfrm>
           <a:prstGeom prst="rect">
             <a:avLst/>
@@ -876,7 +986,7 @@
         <p:spPr>
           <a:xfrm>
             <a:off x="3884760" y="8685360"/>
-            <a:ext cx="2970720" cy="457560"/>
+            <a:ext cx="2970360" cy="457200"/>
           </a:xfrm>
           <a:prstGeom prst="rect">
             <a:avLst/>
@@ -920,7 +1030,7 @@
                 <a:tab pos="0" algn="l"/>
               </a:tabLst>
             </a:pPr>
-            <a:fld id="{BD46C181-A9AE-41F0-9BE1-C1359AA08873}" type="slidenum">
+            <a:fld id="{EBA6B951-F2E7-45EE-BB72-CF8E41F98842}" type="slidenum">
               <a:rPr lang="en-US" sz="1200" b="0" u="none" strike="noStrike">
                 <a:solidFill>
                   <a:schemeClr val="dk1"/>
@@ -978,7 +1088,7 @@
         <p:spPr>
           <a:xfrm>
             <a:off x="685800" y="1143000"/>
-            <a:ext cx="5485680" cy="3085560"/>
+            <a:ext cx="5485320" cy="3085200"/>
           </a:xfrm>
           <a:prstGeom prst="rect">
             <a:avLst/>
@@ -1001,7 +1111,7 @@
         <p:spPr>
           <a:xfrm>
             <a:off x="685800" y="4400640"/>
-            <a:ext cx="5485320" cy="3599280"/>
+            <a:ext cx="5484960" cy="3598920"/>
           </a:xfrm>
           <a:prstGeom prst="rect">
             <a:avLst/>
@@ -1043,7 +1153,7 @@
         <p:spPr>
           <a:xfrm>
             <a:off x="3884760" y="8685360"/>
-            <a:ext cx="2970720" cy="457560"/>
+            <a:ext cx="2970360" cy="457200"/>
           </a:xfrm>
           <a:prstGeom prst="rect">
             <a:avLst/>
@@ -1087,7 +1197,7 @@
                 <a:tab pos="0" algn="l"/>
               </a:tabLst>
             </a:pPr>
-            <a:fld id="{E4939C02-5497-4116-81A6-35E03C232A4A}" type="slidenum">
+            <a:fld id="{A813F961-C22C-4FDB-A741-0796C5CDC2EE}" type="slidenum">
               <a:rPr lang="en-US" sz="1200" b="0" u="none" strike="noStrike">
                 <a:solidFill>
                   <a:schemeClr val="dk1"/>
@@ -1145,7 +1255,7 @@
         <p:spPr>
           <a:xfrm>
             <a:off x="685800" y="1143000"/>
-            <a:ext cx="5485680" cy="3085560"/>
+            <a:ext cx="5485320" cy="3085200"/>
           </a:xfrm>
           <a:prstGeom prst="rect">
             <a:avLst/>
@@ -1168,7 +1278,7 @@
         <p:spPr>
           <a:xfrm>
             <a:off x="685800" y="4400640"/>
-            <a:ext cx="5485320" cy="3599280"/>
+            <a:ext cx="5484960" cy="3598920"/>
           </a:xfrm>
           <a:prstGeom prst="rect">
             <a:avLst/>
@@ -1210,7 +1320,7 @@
         <p:spPr>
           <a:xfrm>
             <a:off x="3884760" y="8685360"/>
-            <a:ext cx="2970720" cy="457560"/>
+            <a:ext cx="2970360" cy="457200"/>
           </a:xfrm>
           <a:prstGeom prst="rect">
             <a:avLst/>
@@ -1254,7 +1364,7 @@
                 <a:tab pos="0" algn="l"/>
               </a:tabLst>
             </a:pPr>
-            <a:fld id="{5D81195E-BD9D-4242-81C7-3352A57523AE}" type="slidenum">
+            <a:fld id="{0C56A83F-3FAD-4485-A869-D576D8403B1E}" type="slidenum">
               <a:rPr lang="en-US" sz="1200" b="0" u="none" strike="noStrike">
                 <a:solidFill>
                   <a:schemeClr val="dk1"/>
@@ -1312,7 +1422,7 @@
         <p:spPr>
           <a:xfrm>
             <a:off x="685800" y="1143000"/>
-            <a:ext cx="5485680" cy="3085560"/>
+            <a:ext cx="5485320" cy="3085200"/>
           </a:xfrm>
           <a:prstGeom prst="rect">
             <a:avLst/>
@@ -1335,7 +1445,7 @@
         <p:spPr>
           <a:xfrm>
             <a:off x="685800" y="4400640"/>
-            <a:ext cx="5485320" cy="3599280"/>
+            <a:ext cx="5484960" cy="3598920"/>
           </a:xfrm>
           <a:prstGeom prst="rect">
             <a:avLst/>
@@ -1377,7 +1487,7 @@
         <p:spPr>
           <a:xfrm>
             <a:off x="3884760" y="8685360"/>
-            <a:ext cx="2970720" cy="457560"/>
+            <a:ext cx="2970360" cy="457200"/>
           </a:xfrm>
           <a:prstGeom prst="rect">
             <a:avLst/>
@@ -1421,7 +1531,7 @@
                 <a:tab pos="0" algn="l"/>
               </a:tabLst>
             </a:pPr>
-            <a:fld id="{71AF71E3-DC71-4490-B88D-C8ED716AA82B}" type="slidenum">
+            <a:fld id="{907E071A-2691-4AF2-85C0-88A420D95F53}" type="slidenum">
               <a:rPr lang="en-US" sz="1200" b="0" u="none" strike="noStrike">
                 <a:solidFill>
                   <a:schemeClr val="dk1"/>
@@ -1479,7 +1589,7 @@
         <p:spPr>
           <a:xfrm>
             <a:off x="685800" y="1143000"/>
-            <a:ext cx="5485680" cy="3085560"/>
+            <a:ext cx="5485320" cy="3085200"/>
           </a:xfrm>
           <a:prstGeom prst="rect">
             <a:avLst/>
@@ -1502,7 +1612,7 @@
         <p:spPr>
           <a:xfrm>
             <a:off x="685800" y="4400640"/>
-            <a:ext cx="5485320" cy="3599280"/>
+            <a:ext cx="5484960" cy="3598920"/>
           </a:xfrm>
           <a:prstGeom prst="rect">
             <a:avLst/>
@@ -1544,7 +1654,7 @@
         <p:spPr>
           <a:xfrm>
             <a:off x="3884760" y="8685360"/>
-            <a:ext cx="2970720" cy="457560"/>
+            <a:ext cx="2970360" cy="457200"/>
           </a:xfrm>
           <a:prstGeom prst="rect">
             <a:avLst/>
@@ -1588,7 +1698,7 @@
                 <a:tab pos="0" algn="l"/>
               </a:tabLst>
             </a:pPr>
-            <a:fld id="{D35950A9-9246-467A-B356-52166CB954FE}" type="slidenum">
+            <a:fld id="{6140F361-4F37-49F0-8FBF-EE9B53239EB6}" type="slidenum">
               <a:rPr lang="en-US" sz="1200" b="0" u="none" strike="noStrike">
                 <a:solidFill>
                   <a:schemeClr val="dk1"/>
@@ -1646,7 +1756,7 @@
         <p:spPr>
           <a:xfrm>
             <a:off x="685800" y="1143000"/>
-            <a:ext cx="5485680" cy="3085560"/>
+            <a:ext cx="5485320" cy="3085200"/>
           </a:xfrm>
           <a:prstGeom prst="rect">
             <a:avLst/>
@@ -1669,7 +1779,7 @@
         <p:spPr>
           <a:xfrm>
             <a:off x="685800" y="4400640"/>
-            <a:ext cx="5485320" cy="3599280"/>
+            <a:ext cx="5484960" cy="3598920"/>
           </a:xfrm>
           <a:prstGeom prst="rect">
             <a:avLst/>
@@ -1711,7 +1821,7 @@
         <p:spPr>
           <a:xfrm>
             <a:off x="3884760" y="8685360"/>
-            <a:ext cx="2970720" cy="457560"/>
+            <a:ext cx="2970360" cy="457200"/>
           </a:xfrm>
           <a:prstGeom prst="rect">
             <a:avLst/>
@@ -1755,7 +1865,7 @@
                 <a:tab pos="0" algn="l"/>
               </a:tabLst>
             </a:pPr>
-            <a:fld id="{AB5FA0B6-B93A-42F2-B8BB-4AC2C486F9BE}" type="slidenum">
+            <a:fld id="{E7F8E8CC-3106-49FF-97E9-0F127FDFE9D8}" type="slidenum">
               <a:rPr lang="en-US" sz="1200" b="0" u="none" strike="noStrike">
                 <a:solidFill>
                   <a:schemeClr val="dk1"/>
@@ -1813,7 +1923,7 @@
         <p:spPr>
           <a:xfrm>
             <a:off x="685800" y="1143000"/>
-            <a:ext cx="5485320" cy="3085200"/>
+            <a:ext cx="5484960" cy="3084840"/>
           </a:xfrm>
           <a:prstGeom prst="rect">
             <a:avLst/>
@@ -1836,7 +1946,7 @@
         <p:spPr>
           <a:xfrm>
             <a:off x="685800" y="4400640"/>
-            <a:ext cx="5485320" cy="3599280"/>
+            <a:ext cx="5484960" cy="3598920"/>
           </a:xfrm>
           <a:prstGeom prst="rect">
             <a:avLst/>
@@ -1878,7 +1988,7 @@
         <p:spPr>
           <a:xfrm>
             <a:off x="3884760" y="8685360"/>
-            <a:ext cx="2970720" cy="457560"/>
+            <a:ext cx="2970360" cy="457200"/>
           </a:xfrm>
           <a:prstGeom prst="rect">
             <a:avLst/>
@@ -1922,7 +2032,7 @@
                 <a:tab pos="0" algn="l"/>
               </a:tabLst>
             </a:pPr>
-            <a:fld id="{FD7C1EA5-425B-4BA7-B7C7-A50FC4D8A9B7}" type="slidenum">
+            <a:fld id="{3E3F785A-2034-4E0E-B07D-DAA99F297FA0}" type="slidenum">
               <a:rPr lang="en-US" sz="1200" b="0" u="none" strike="noStrike">
                 <a:solidFill>
                   <a:schemeClr val="dk1"/>
@@ -1980,7 +2090,7 @@
         <p:spPr>
           <a:xfrm>
             <a:off x="685800" y="1143000"/>
-            <a:ext cx="5485320" cy="3085200"/>
+            <a:ext cx="5484960" cy="3084840"/>
           </a:xfrm>
           <a:prstGeom prst="rect">
             <a:avLst/>
@@ -2003,7 +2113,7 @@
         <p:spPr>
           <a:xfrm>
             <a:off x="685800" y="4400640"/>
-            <a:ext cx="5485320" cy="3599280"/>
+            <a:ext cx="5484960" cy="3598920"/>
           </a:xfrm>
           <a:prstGeom prst="rect">
             <a:avLst/>
@@ -2045,7 +2155,7 @@
         <p:spPr>
           <a:xfrm>
             <a:off x="3884760" y="8685360"/>
-            <a:ext cx="2970720" cy="457560"/>
+            <a:ext cx="2970360" cy="457200"/>
           </a:xfrm>
           <a:prstGeom prst="rect">
             <a:avLst/>
@@ -2089,7 +2199,7 @@
                 <a:tab pos="0" algn="l"/>
               </a:tabLst>
             </a:pPr>
-            <a:fld id="{5A810BE1-0F89-4A86-8BB6-0F0EFD7CBF20}" type="slidenum">
+            <a:fld id="{BB25C921-E208-4D6E-9D10-0EBAFEB64B44}" type="slidenum">
               <a:rPr lang="en-US" sz="1200" b="0" u="none" strike="noStrike">
                 <a:solidFill>
                   <a:schemeClr val="dk1"/>
@@ -2147,7 +2257,7 @@
         <p:spPr>
           <a:xfrm>
             <a:off x="685800" y="1143000"/>
-            <a:ext cx="5485320" cy="3085200"/>
+            <a:ext cx="5484960" cy="3084840"/>
           </a:xfrm>
           <a:prstGeom prst="rect">
             <a:avLst/>
@@ -2170,7 +2280,7 @@
         <p:spPr>
           <a:xfrm>
             <a:off x="685800" y="4400640"/>
-            <a:ext cx="5485320" cy="3599280"/>
+            <a:ext cx="5484960" cy="3598920"/>
           </a:xfrm>
           <a:prstGeom prst="rect">
             <a:avLst/>
@@ -2212,7 +2322,7 @@
         <p:spPr>
           <a:xfrm>
             <a:off x="3884760" y="8685360"/>
-            <a:ext cx="2970720" cy="457560"/>
+            <a:ext cx="2970360" cy="457200"/>
           </a:xfrm>
           <a:prstGeom prst="rect">
             <a:avLst/>
@@ -2256,7 +2366,7 @@
                 <a:tab pos="0" algn="l"/>
               </a:tabLst>
             </a:pPr>
-            <a:fld id="{2D78CAF6-619E-42DC-A8B0-19FD808C972C}" type="slidenum">
+            <a:fld id="{FD049354-5258-4231-BE71-F6CC9F589528}" type="slidenum">
               <a:rPr lang="en-US" sz="1200" b="0" u="none" strike="noStrike">
                 <a:solidFill>
                   <a:schemeClr val="dk1"/>
@@ -2314,7 +2424,7 @@
         <p:spPr>
           <a:xfrm>
             <a:off x="685800" y="1143000"/>
-            <a:ext cx="5485320" cy="3085200"/>
+            <a:ext cx="5484960" cy="3084840"/>
           </a:xfrm>
           <a:prstGeom prst="rect">
             <a:avLst/>
@@ -2337,7 +2447,7 @@
         <p:spPr>
           <a:xfrm>
             <a:off x="685800" y="4400640"/>
-            <a:ext cx="5485320" cy="3599280"/>
+            <a:ext cx="5484960" cy="3598920"/>
           </a:xfrm>
           <a:prstGeom prst="rect">
             <a:avLst/>
@@ -2379,7 +2489,7 @@
         <p:spPr>
           <a:xfrm>
             <a:off x="3884760" y="8685360"/>
-            <a:ext cx="2970720" cy="457560"/>
+            <a:ext cx="2970360" cy="457200"/>
           </a:xfrm>
           <a:prstGeom prst="rect">
             <a:avLst/>
@@ -2423,7 +2533,7 @@
                 <a:tab pos="0" algn="l"/>
               </a:tabLst>
             </a:pPr>
-            <a:fld id="{F7EDB52C-496B-4D48-9A9C-0E3DC54D3612}" type="slidenum">
+            <a:fld id="{5CED5AB7-E633-4768-B672-5F419D5DB5C4}" type="slidenum">
               <a:rPr lang="en-US" sz="1200" b="0" u="none" strike="noStrike">
                 <a:solidFill>
                   <a:schemeClr val="dk1"/>
@@ -2481,7 +2591,7 @@
         <p:spPr>
           <a:xfrm>
             <a:off x="685800" y="1143000"/>
-            <a:ext cx="5485320" cy="3085200"/>
+            <a:ext cx="5484960" cy="3084840"/>
           </a:xfrm>
           <a:prstGeom prst="rect">
             <a:avLst/>
@@ -2504,7 +2614,7 @@
         <p:spPr>
           <a:xfrm>
             <a:off x="685800" y="4400640"/>
-            <a:ext cx="5485320" cy="3599280"/>
+            <a:ext cx="5484960" cy="3598920"/>
           </a:xfrm>
           <a:prstGeom prst="rect">
             <a:avLst/>
@@ -2546,7 +2656,7 @@
         <p:spPr>
           <a:xfrm>
             <a:off x="3884760" y="8685360"/>
-            <a:ext cx="2970720" cy="457560"/>
+            <a:ext cx="2970360" cy="457200"/>
           </a:xfrm>
           <a:prstGeom prst="rect">
             <a:avLst/>
@@ -2590,7 +2700,7 @@
                 <a:tab pos="0" algn="l"/>
               </a:tabLst>
             </a:pPr>
-            <a:fld id="{1F49B307-8770-4651-922A-DCD7FD9F06E1}" type="slidenum">
+            <a:fld id="{2489E55E-388F-4638-BBDE-68755B6F5246}" type="slidenum">
               <a:rPr lang="en-US" sz="1200" b="0" u="none" strike="noStrike">
                 <a:solidFill>
                   <a:schemeClr val="dk1"/>
@@ -2648,7 +2758,7 @@
         <p:spPr>
           <a:xfrm>
             <a:off x="685800" y="1143000"/>
-            <a:ext cx="5485320" cy="3085200"/>
+            <a:ext cx="5484960" cy="3084840"/>
           </a:xfrm>
           <a:prstGeom prst="rect">
             <a:avLst/>
@@ -2671,7 +2781,7 @@
         <p:spPr>
           <a:xfrm>
             <a:off x="685800" y="4400640"/>
-            <a:ext cx="5485320" cy="3599280"/>
+            <a:ext cx="5484960" cy="3598920"/>
           </a:xfrm>
           <a:prstGeom prst="rect">
             <a:avLst/>
@@ -2713,7 +2823,7 @@
         <p:spPr>
           <a:xfrm>
             <a:off x="3884760" y="8685360"/>
-            <a:ext cx="2970720" cy="457560"/>
+            <a:ext cx="2970360" cy="457200"/>
           </a:xfrm>
           <a:prstGeom prst="rect">
             <a:avLst/>
@@ -2757,7 +2867,7 @@
                 <a:tab pos="0" algn="l"/>
               </a:tabLst>
             </a:pPr>
-            <a:fld id="{3B1D3CDA-F56D-4F69-A3A2-F236E0385BE2}" type="slidenum">
+            <a:fld id="{099A011F-9D33-4ABE-85A5-FC5B605C82F7}" type="slidenum">
               <a:rPr lang="en-US" sz="1200" b="0" u="none" strike="noStrike">
                 <a:solidFill>
                   <a:schemeClr val="dk1"/>
@@ -2815,7 +2925,7 @@
         <p:spPr>
           <a:xfrm>
             <a:off x="685800" y="1143000"/>
-            <a:ext cx="5485320" cy="3085200"/>
+            <a:ext cx="5484960" cy="3084840"/>
           </a:xfrm>
           <a:prstGeom prst="rect">
             <a:avLst/>
@@ -2838,7 +2948,7 @@
         <p:spPr>
           <a:xfrm>
             <a:off x="685800" y="4400640"/>
-            <a:ext cx="5485320" cy="3599280"/>
+            <a:ext cx="5484960" cy="3598920"/>
           </a:xfrm>
           <a:prstGeom prst="rect">
             <a:avLst/>
@@ -2880,7 +2990,7 @@
         <p:spPr>
           <a:xfrm>
             <a:off x="3884760" y="8685360"/>
-            <a:ext cx="2970720" cy="457560"/>
+            <a:ext cx="2970360" cy="457200"/>
           </a:xfrm>
           <a:prstGeom prst="rect">
             <a:avLst/>
@@ -2924,7 +3034,7 @@
                 <a:tab pos="0" algn="l"/>
               </a:tabLst>
             </a:pPr>
-            <a:fld id="{90801D22-DD3E-401B-BF7B-4790A9FE39C4}" type="slidenum">
+            <a:fld id="{BA57BF44-30A5-47E3-8797-2E1AEA7E3802}" type="slidenum">
               <a:rPr lang="en-US" sz="1200" b="0" u="none" strike="noStrike">
                 <a:solidFill>
                   <a:schemeClr val="dk1"/>
@@ -2982,7 +3092,7 @@
         <p:spPr>
           <a:xfrm>
             <a:off x="685800" y="1143000"/>
-            <a:ext cx="5485320" cy="3085200"/>
+            <a:ext cx="5484960" cy="3084840"/>
           </a:xfrm>
           <a:prstGeom prst="rect">
             <a:avLst/>
@@ -3005,7 +3115,7 @@
         <p:spPr>
           <a:xfrm>
             <a:off x="685800" y="4400640"/>
-            <a:ext cx="5485320" cy="3599280"/>
+            <a:ext cx="5484960" cy="3598920"/>
           </a:xfrm>
           <a:prstGeom prst="rect">
             <a:avLst/>
@@ -3047,7 +3157,7 @@
         <p:spPr>
           <a:xfrm>
             <a:off x="3884760" y="8685360"/>
-            <a:ext cx="2970720" cy="457560"/>
+            <a:ext cx="2970360" cy="457200"/>
           </a:xfrm>
           <a:prstGeom prst="rect">
             <a:avLst/>
@@ -3091,7 +3201,7 @@
                 <a:tab pos="0" algn="l"/>
               </a:tabLst>
             </a:pPr>
-            <a:fld id="{62B94069-B127-412A-8062-78C6FFB6E7DE}" type="slidenum">
+            <a:fld id="{04E267A1-E7AB-44E2-8F19-8E7E65C93C0D}" type="slidenum">
               <a:rPr lang="en-US" sz="1200" b="0" u="none" strike="noStrike">
                 <a:solidFill>
                   <a:schemeClr val="dk1"/>
@@ -3149,7 +3259,7 @@
         <p:spPr>
           <a:xfrm>
             <a:off x="685800" y="1143000"/>
-            <a:ext cx="5485320" cy="3085200"/>
+            <a:ext cx="5484960" cy="3084840"/>
           </a:xfrm>
           <a:prstGeom prst="rect">
             <a:avLst/>
@@ -3172,7 +3282,7 @@
         <p:spPr>
           <a:xfrm>
             <a:off x="685800" y="4400640"/>
-            <a:ext cx="5485320" cy="3599280"/>
+            <a:ext cx="5484960" cy="3598920"/>
           </a:xfrm>
           <a:prstGeom prst="rect">
             <a:avLst/>
@@ -3214,7 +3324,7 @@
         <p:spPr>
           <a:xfrm>
             <a:off x="3884760" y="8685360"/>
-            <a:ext cx="2970720" cy="457560"/>
+            <a:ext cx="2970360" cy="457200"/>
           </a:xfrm>
           <a:prstGeom prst="rect">
             <a:avLst/>
@@ -3258,7 +3368,7 @@
                 <a:tab pos="0" algn="l"/>
               </a:tabLst>
             </a:pPr>
-            <a:fld id="{B3EC00EB-068D-47C4-8545-57F95139D097}" type="slidenum">
+            <a:fld id="{D892159D-1A31-495F-860B-21010C881384}" type="slidenum">
               <a:rPr lang="en-US" sz="1200" b="0" u="none" strike="noStrike">
                 <a:solidFill>
                   <a:schemeClr val="dk1"/>
@@ -3316,7 +3426,7 @@
         <p:spPr>
           <a:xfrm>
             <a:off x="685800" y="1143000"/>
-            <a:ext cx="5485320" cy="3085200"/>
+            <a:ext cx="5484960" cy="3084840"/>
           </a:xfrm>
           <a:prstGeom prst="rect">
             <a:avLst/>
@@ -3339,7 +3449,7 @@
         <p:spPr>
           <a:xfrm>
             <a:off x="685800" y="4400640"/>
-            <a:ext cx="5485320" cy="3599280"/>
+            <a:ext cx="5484960" cy="3598920"/>
           </a:xfrm>
           <a:prstGeom prst="rect">
             <a:avLst/>
@@ -3381,7 +3491,7 @@
         <p:spPr>
           <a:xfrm>
             <a:off x="3884760" y="8685360"/>
-            <a:ext cx="2970720" cy="457560"/>
+            <a:ext cx="2970360" cy="457200"/>
           </a:xfrm>
           <a:prstGeom prst="rect">
             <a:avLst/>
@@ -3425,7 +3535,7 @@
                 <a:tab pos="0" algn="l"/>
               </a:tabLst>
             </a:pPr>
-            <a:fld id="{C576E124-E1F2-40A1-981F-040CCC6B4AB4}" type="slidenum">
+            <a:fld id="{09ACB567-E0D4-4683-A668-CB3860DEDB8D}" type="slidenum">
               <a:rPr lang="en-US" sz="1200" b="0" u="none" strike="noStrike">
                 <a:solidFill>
                   <a:schemeClr val="dk1"/>
@@ -3483,7 +3593,7 @@
         <p:spPr>
           <a:xfrm>
             <a:off x="685800" y="1143000"/>
-            <a:ext cx="5485320" cy="3085200"/>
+            <a:ext cx="5484960" cy="3084840"/>
           </a:xfrm>
           <a:prstGeom prst="rect">
             <a:avLst/>
@@ -3506,7 +3616,7 @@
         <p:spPr>
           <a:xfrm>
             <a:off x="685800" y="4400640"/>
-            <a:ext cx="5485320" cy="3599280"/>
+            <a:ext cx="5484960" cy="3598920"/>
           </a:xfrm>
           <a:prstGeom prst="rect">
             <a:avLst/>
@@ -3548,7 +3658,7 @@
         <p:spPr>
           <a:xfrm>
             <a:off x="3884760" y="8685360"/>
-            <a:ext cx="2970720" cy="457560"/>
+            <a:ext cx="2970360" cy="457200"/>
           </a:xfrm>
           <a:prstGeom prst="rect">
             <a:avLst/>
@@ -3592,7 +3702,7 @@
                 <a:tab pos="0" algn="l"/>
               </a:tabLst>
             </a:pPr>
-            <a:fld id="{4719AD57-5DD8-433F-A4D0-5569D72CA329}" type="slidenum">
+            <a:fld id="{81F51639-368E-4F14-A1DD-897DB8DD45B5}" type="slidenum">
               <a:rPr lang="en-US" sz="1200" b="0" u="none" strike="noStrike">
                 <a:solidFill>
                   <a:schemeClr val="dk1"/>
@@ -3650,7 +3760,7 @@
         <p:spPr>
           <a:xfrm>
             <a:off x="685800" y="1143000"/>
-            <a:ext cx="5485320" cy="3085200"/>
+            <a:ext cx="5484960" cy="3084840"/>
           </a:xfrm>
           <a:prstGeom prst="rect">
             <a:avLst/>
@@ -3673,7 +3783,7 @@
         <p:spPr>
           <a:xfrm>
             <a:off x="685800" y="4400640"/>
-            <a:ext cx="5485320" cy="3599280"/>
+            <a:ext cx="5484960" cy="3598920"/>
           </a:xfrm>
           <a:prstGeom prst="rect">
             <a:avLst/>
@@ -3715,7 +3825,7 @@
         <p:spPr>
           <a:xfrm>
             <a:off x="3884760" y="8685360"/>
-            <a:ext cx="2970720" cy="457560"/>
+            <a:ext cx="2970360" cy="457200"/>
           </a:xfrm>
           <a:prstGeom prst="rect">
             <a:avLst/>
@@ -3759,7 +3869,7 @@
                 <a:tab pos="0" algn="l"/>
               </a:tabLst>
             </a:pPr>
-            <a:fld id="{772E0442-61CF-4509-A2A9-07B4A27F5232}" type="slidenum">
+            <a:fld id="{1FF593AC-77BC-44FA-ACC8-217ACAF1D555}" type="slidenum">
               <a:rPr lang="en-US" sz="1200" b="0" u="none" strike="noStrike">
                 <a:solidFill>
                   <a:schemeClr val="dk1"/>
@@ -3817,7 +3927,7 @@
         <p:spPr>
           <a:xfrm>
             <a:off x="685800" y="1143000"/>
-            <a:ext cx="5485320" cy="3085200"/>
+            <a:ext cx="5484960" cy="3084840"/>
           </a:xfrm>
           <a:prstGeom prst="rect">
             <a:avLst/>
@@ -3840,7 +3950,7 @@
         <p:spPr>
           <a:xfrm>
             <a:off x="685800" y="4400640"/>
-            <a:ext cx="5485320" cy="3599280"/>
+            <a:ext cx="5484960" cy="3598920"/>
           </a:xfrm>
           <a:prstGeom prst="rect">
             <a:avLst/>
@@ -3882,7 +3992,7 @@
         <p:spPr>
           <a:xfrm>
             <a:off x="3884760" y="8685360"/>
-            <a:ext cx="2970720" cy="457560"/>
+            <a:ext cx="2970360" cy="457200"/>
           </a:xfrm>
           <a:prstGeom prst="rect">
             <a:avLst/>
@@ -3926,7 +4036,7 @@
                 <a:tab pos="0" algn="l"/>
               </a:tabLst>
             </a:pPr>
-            <a:fld id="{3F5B402F-C8DE-47BB-81D2-5B58F5E5FCB8}" type="slidenum">
+            <a:fld id="{6EB8CFE8-CA33-4CED-B5F4-C578B848CF20}" type="slidenum">
               <a:rPr lang="en-US" sz="1200" b="0" u="none" strike="noStrike">
                 <a:solidFill>
                   <a:schemeClr val="dk1"/>
@@ -3984,7 +4094,7 @@
         <p:spPr>
           <a:xfrm>
             <a:off x="685800" y="1143000"/>
-            <a:ext cx="5485320" cy="3085200"/>
+            <a:ext cx="5484960" cy="3084840"/>
           </a:xfrm>
           <a:prstGeom prst="rect">
             <a:avLst/>
@@ -4007,7 +4117,7 @@
         <p:spPr>
           <a:xfrm>
             <a:off x="685800" y="4400640"/>
-            <a:ext cx="5485320" cy="3599280"/>
+            <a:ext cx="5484960" cy="3598920"/>
           </a:xfrm>
           <a:prstGeom prst="rect">
             <a:avLst/>
@@ -4049,7 +4159,7 @@
         <p:spPr>
           <a:xfrm>
             <a:off x="3884760" y="8685360"/>
-            <a:ext cx="2970720" cy="457560"/>
+            <a:ext cx="2970360" cy="457200"/>
           </a:xfrm>
           <a:prstGeom prst="rect">
             <a:avLst/>
@@ -4093,7 +4203,7 @@
                 <a:tab pos="0" algn="l"/>
               </a:tabLst>
             </a:pPr>
-            <a:fld id="{EE1BB28A-5AFA-4877-9945-3F2A16405A7A}" type="slidenum">
+            <a:fld id="{D1E9B5DC-BA7F-433F-9718-ADC54E8A38EB}" type="slidenum">
               <a:rPr lang="en-US" sz="1200" b="0" u="none" strike="noStrike">
                 <a:solidFill>
                   <a:schemeClr val="dk1"/>
@@ -4151,7 +4261,7 @@
         <p:spPr>
           <a:xfrm>
             <a:off x="685800" y="1143000"/>
-            <a:ext cx="5485320" cy="3085200"/>
+            <a:ext cx="5484960" cy="3084840"/>
           </a:xfrm>
           <a:prstGeom prst="rect">
             <a:avLst/>
@@ -4174,7 +4284,7 @@
         <p:spPr>
           <a:xfrm>
             <a:off x="685800" y="4400640"/>
-            <a:ext cx="5485320" cy="3599280"/>
+            <a:ext cx="5484960" cy="3598920"/>
           </a:xfrm>
           <a:prstGeom prst="rect">
             <a:avLst/>
@@ -4216,7 +4326,7 @@
         <p:spPr>
           <a:xfrm>
             <a:off x="3884760" y="8685360"/>
-            <a:ext cx="2970720" cy="457560"/>
+            <a:ext cx="2970360" cy="457200"/>
           </a:xfrm>
           <a:prstGeom prst="rect">
             <a:avLst/>
@@ -4260,7 +4370,7 @@
                 <a:tab pos="0" algn="l"/>
               </a:tabLst>
             </a:pPr>
-            <a:fld id="{B073C9B5-B98F-4F81-8FF6-BA56F5879912}" type="slidenum">
+            <a:fld id="{FD15C69B-19BC-45E5-88C6-5B6C8D5B29CC}" type="slidenum">
               <a:rPr lang="en-US" sz="1200" b="0" u="none" strike="noStrike">
                 <a:solidFill>
                   <a:schemeClr val="dk1"/>
@@ -4318,7 +4428,7 @@
         <p:spPr>
           <a:xfrm>
             <a:off x="685800" y="1143000"/>
-            <a:ext cx="5485320" cy="3085200"/>
+            <a:ext cx="5484960" cy="3084840"/>
           </a:xfrm>
           <a:prstGeom prst="rect">
             <a:avLst/>
@@ -4341,7 +4451,7 @@
         <p:spPr>
           <a:xfrm>
             <a:off x="685800" y="4400640"/>
-            <a:ext cx="5485320" cy="3599280"/>
+            <a:ext cx="5484960" cy="3598920"/>
           </a:xfrm>
           <a:prstGeom prst="rect">
             <a:avLst/>
@@ -4383,7 +4493,7 @@
         <p:spPr>
           <a:xfrm>
             <a:off x="3884760" y="8685360"/>
-            <a:ext cx="2970720" cy="457560"/>
+            <a:ext cx="2970360" cy="457200"/>
           </a:xfrm>
           <a:prstGeom prst="rect">
             <a:avLst/>
@@ -4427,7 +4537,7 @@
                 <a:tab pos="0" algn="l"/>
               </a:tabLst>
             </a:pPr>
-            <a:fld id="{39F2897F-7E24-409D-B28B-22086AFA5DB8}" type="slidenum">
+            <a:fld id="{70368676-3237-4795-B1FA-89F4F8AC6B02}" type="slidenum">
               <a:rPr lang="en-US" sz="1200" b="0" u="none" strike="noStrike">
                 <a:solidFill>
                   <a:schemeClr val="dk1"/>
@@ -4485,7 +4595,7 @@
         <p:spPr>
           <a:xfrm>
             <a:off x="685800" y="1143000"/>
-            <a:ext cx="5485320" cy="3085200"/>
+            <a:ext cx="5484960" cy="3084840"/>
           </a:xfrm>
           <a:prstGeom prst="rect">
             <a:avLst/>
@@ -4508,7 +4618,7 @@
         <p:spPr>
           <a:xfrm>
             <a:off x="685800" y="4400640"/>
-            <a:ext cx="5485320" cy="3599280"/>
+            <a:ext cx="5484960" cy="3598920"/>
           </a:xfrm>
           <a:prstGeom prst="rect">
             <a:avLst/>
@@ -4550,7 +4660,7 @@
         <p:spPr>
           <a:xfrm>
             <a:off x="3884760" y="8685360"/>
-            <a:ext cx="2970720" cy="457560"/>
+            <a:ext cx="2970360" cy="457200"/>
           </a:xfrm>
           <a:prstGeom prst="rect">
             <a:avLst/>
@@ -4594,7 +4704,7 @@
                 <a:tab pos="0" algn="l"/>
               </a:tabLst>
             </a:pPr>
-            <a:fld id="{D57B36B7-5DE7-4CCB-9B39-B67E80E47A31}" type="slidenum">
+            <a:fld id="{C57FDCB9-C0F5-4C6B-BF3E-844104532A79}" type="slidenum">
               <a:rPr lang="en-US" sz="1200" b="0" u="none" strike="noStrike">
                 <a:solidFill>
                   <a:schemeClr val="dk1"/>
@@ -4652,7 +4762,7 @@
         <p:spPr>
           <a:xfrm>
             <a:off x="685800" y="1143000"/>
-            <a:ext cx="5485320" cy="3085200"/>
+            <a:ext cx="5484960" cy="3084840"/>
           </a:xfrm>
           <a:prstGeom prst="rect">
             <a:avLst/>
@@ -4675,7 +4785,7 @@
         <p:spPr>
           <a:xfrm>
             <a:off x="685800" y="4400640"/>
-            <a:ext cx="5485320" cy="3599280"/>
+            <a:ext cx="5484960" cy="3598920"/>
           </a:xfrm>
           <a:prstGeom prst="rect">
             <a:avLst/>
@@ -4717,7 +4827,7 @@
         <p:spPr>
           <a:xfrm>
             <a:off x="3884760" y="8685360"/>
-            <a:ext cx="2970720" cy="457560"/>
+            <a:ext cx="2970360" cy="457200"/>
           </a:xfrm>
           <a:prstGeom prst="rect">
             <a:avLst/>
@@ -4761,7 +4871,7 @@
                 <a:tab pos="0" algn="l"/>
               </a:tabLst>
             </a:pPr>
-            <a:fld id="{C412144D-709E-4F02-9F40-FCB41932B261}" type="slidenum">
+            <a:fld id="{78D059C1-8185-4F99-934B-B67B1EF19872}" type="slidenum">
               <a:rPr lang="en-US" sz="1200" b="0" u="none" strike="noStrike">
                 <a:solidFill>
                   <a:schemeClr val="dk1"/>
@@ -4819,7 +4929,7 @@
         <p:spPr>
           <a:xfrm>
             <a:off x="685800" y="1143000"/>
-            <a:ext cx="5485320" cy="3085200"/>
+            <a:ext cx="5484960" cy="3084840"/>
           </a:xfrm>
           <a:prstGeom prst="rect">
             <a:avLst/>
@@ -4842,7 +4952,7 @@
         <p:spPr>
           <a:xfrm>
             <a:off x="685800" y="4400640"/>
-            <a:ext cx="5485320" cy="3599280"/>
+            <a:ext cx="5484960" cy="3598920"/>
           </a:xfrm>
           <a:prstGeom prst="rect">
             <a:avLst/>
@@ -4884,7 +4994,7 @@
         <p:spPr>
           <a:xfrm>
             <a:off x="3884760" y="8685360"/>
-            <a:ext cx="2970720" cy="457560"/>
+            <a:ext cx="2970360" cy="457200"/>
           </a:xfrm>
           <a:prstGeom prst="rect">
             <a:avLst/>
@@ -4928,7 +5038,7 @@
                 <a:tab pos="0" algn="l"/>
               </a:tabLst>
             </a:pPr>
-            <a:fld id="{522236BC-AD52-4689-87A5-ACC2A72E05F7}" type="slidenum">
+            <a:fld id="{1FE58DFC-2F2C-4587-92A1-2ACFB326948E}" type="slidenum">
               <a:rPr lang="en-US" sz="1200" b="0" u="none" strike="noStrike">
                 <a:solidFill>
                   <a:schemeClr val="dk1"/>
@@ -4986,7 +5096,7 @@
         <p:spPr>
           <a:xfrm>
             <a:off x="685800" y="1143000"/>
-            <a:ext cx="5485320" cy="3085200"/>
+            <a:ext cx="5484960" cy="3084840"/>
           </a:xfrm>
           <a:prstGeom prst="rect">
             <a:avLst/>
@@ -5009,7 +5119,7 @@
         <p:spPr>
           <a:xfrm>
             <a:off x="685800" y="4400640"/>
-            <a:ext cx="5485320" cy="3599280"/>
+            <a:ext cx="5484960" cy="3598920"/>
           </a:xfrm>
           <a:prstGeom prst="rect">
             <a:avLst/>
@@ -5051,7 +5161,7 @@
         <p:spPr>
           <a:xfrm>
             <a:off x="3884760" y="8685360"/>
-            <a:ext cx="2970720" cy="457560"/>
+            <a:ext cx="2970360" cy="457200"/>
           </a:xfrm>
           <a:prstGeom prst="rect">
             <a:avLst/>
@@ -5095,7 +5205,7 @@
                 <a:tab pos="0" algn="l"/>
               </a:tabLst>
             </a:pPr>
-            <a:fld id="{9B3E217E-1390-4BAE-BEC4-9D010EB7D552}" type="slidenum">
+            <a:fld id="{063D6567-DD57-4127-8A23-CEB45BF72F4E}" type="slidenum">
               <a:rPr lang="en-US" sz="1200" b="0" u="none" strike="noStrike">
                 <a:solidFill>
                   <a:schemeClr val="dk1"/>
@@ -5153,7 +5263,7 @@
         <p:spPr>
           <a:xfrm>
             <a:off x="685800" y="1143000"/>
-            <a:ext cx="5485320" cy="3085200"/>
+            <a:ext cx="5484960" cy="3084840"/>
           </a:xfrm>
           <a:prstGeom prst="rect">
             <a:avLst/>
@@ -5176,7 +5286,7 @@
         <p:spPr>
           <a:xfrm>
             <a:off x="685800" y="4400640"/>
-            <a:ext cx="5485320" cy="3599280"/>
+            <a:ext cx="5484960" cy="3598920"/>
           </a:xfrm>
           <a:prstGeom prst="rect">
             <a:avLst/>
@@ -5218,7 +5328,7 @@
         <p:spPr>
           <a:xfrm>
             <a:off x="3884760" y="8685360"/>
-            <a:ext cx="2970720" cy="457560"/>
+            <a:ext cx="2970360" cy="457200"/>
           </a:xfrm>
           <a:prstGeom prst="rect">
             <a:avLst/>
@@ -5262,7 +5372,7 @@
                 <a:tab pos="0" algn="l"/>
               </a:tabLst>
             </a:pPr>
-            <a:fld id="{59E23C62-78DC-416E-BD5C-F8FCAA0D6A2F}" type="slidenum">
+            <a:fld id="{42D5E46E-1C38-494A-A9CF-762EAA00509F}" type="slidenum">
               <a:rPr lang="en-US" sz="1200" b="0" u="none" strike="noStrike">
                 <a:solidFill>
                   <a:schemeClr val="dk1"/>
@@ -5320,7 +5430,7 @@
         <p:spPr>
           <a:xfrm>
             <a:off x="685800" y="1143000"/>
-            <a:ext cx="5485320" cy="3085200"/>
+            <a:ext cx="5484960" cy="3084840"/>
           </a:xfrm>
           <a:prstGeom prst="rect">
             <a:avLst/>
@@ -5343,7 +5453,7 @@
         <p:spPr>
           <a:xfrm>
             <a:off x="685800" y="4400640"/>
-            <a:ext cx="5485320" cy="3599280"/>
+            <a:ext cx="5484960" cy="3598920"/>
           </a:xfrm>
           <a:prstGeom prst="rect">
             <a:avLst/>
@@ -5385,7 +5495,7 @@
         <p:spPr>
           <a:xfrm>
             <a:off x="3884760" y="8685360"/>
-            <a:ext cx="2970720" cy="457560"/>
+            <a:ext cx="2970360" cy="457200"/>
           </a:xfrm>
           <a:prstGeom prst="rect">
             <a:avLst/>
@@ -5429,7 +5539,7 @@
                 <a:tab pos="0" algn="l"/>
               </a:tabLst>
             </a:pPr>
-            <a:fld id="{AC902CEF-7B49-4D05-BE34-863E4FD267DE}" type="slidenum">
+            <a:fld id="{BE5F8A81-F332-4F21-9C34-BDDB142D8D70}" type="slidenum">
               <a:rPr lang="en-US" sz="1200" b="0" u="none" strike="noStrike">
                 <a:solidFill>
                   <a:schemeClr val="dk1"/>
@@ -5487,7 +5597,7 @@
         <p:spPr>
           <a:xfrm>
             <a:off x="685800" y="1143000"/>
-            <a:ext cx="5485320" cy="3085200"/>
+            <a:ext cx="5484960" cy="3084840"/>
           </a:xfrm>
           <a:prstGeom prst="rect">
             <a:avLst/>
@@ -5510,7 +5620,7 @@
         <p:spPr>
           <a:xfrm>
             <a:off x="685800" y="4400640"/>
-            <a:ext cx="5485320" cy="3599280"/>
+            <a:ext cx="5484960" cy="3598920"/>
           </a:xfrm>
           <a:prstGeom prst="rect">
             <a:avLst/>
@@ -5552,7 +5662,7 @@
         <p:spPr>
           <a:xfrm>
             <a:off x="3884760" y="8685360"/>
-            <a:ext cx="2970720" cy="457560"/>
+            <a:ext cx="2970360" cy="457200"/>
           </a:xfrm>
           <a:prstGeom prst="rect">
             <a:avLst/>
@@ -5596,7 +5706,7 @@
                 <a:tab pos="0" algn="l"/>
               </a:tabLst>
             </a:pPr>
-            <a:fld id="{07531207-5F1A-4053-B693-B1929D6474B5}" type="slidenum">
+            <a:fld id="{DABCEDBA-5090-4740-8D4F-9630AB66FCE0}" type="slidenum">
               <a:rPr lang="en-US" sz="1200" b="0" u="none" strike="noStrike">
                 <a:solidFill>
                   <a:schemeClr val="dk1"/>
@@ -5654,7 +5764,7 @@
         <p:spPr>
           <a:xfrm>
             <a:off x="685800" y="1143000"/>
-            <a:ext cx="5485320" cy="3085200"/>
+            <a:ext cx="5484960" cy="3084840"/>
           </a:xfrm>
           <a:prstGeom prst="rect">
             <a:avLst/>
@@ -5677,7 +5787,7 @@
         <p:spPr>
           <a:xfrm>
             <a:off x="685800" y="4400640"/>
-            <a:ext cx="5485320" cy="3599280"/>
+            <a:ext cx="5484960" cy="3598920"/>
           </a:xfrm>
           <a:prstGeom prst="rect">
             <a:avLst/>
@@ -5719,7 +5829,7 @@
         <p:spPr>
           <a:xfrm>
             <a:off x="3884760" y="8685360"/>
-            <a:ext cx="2970720" cy="457560"/>
+            <a:ext cx="2970360" cy="457200"/>
           </a:xfrm>
           <a:prstGeom prst="rect">
             <a:avLst/>
@@ -5763,7 +5873,7 @@
                 <a:tab pos="0" algn="l"/>
               </a:tabLst>
             </a:pPr>
-            <a:fld id="{E7B2A18C-87CD-4CFC-A131-043C862A0A79}" type="slidenum">
+            <a:fld id="{839F6D39-07AA-428C-86A2-29D213545B74}" type="slidenum">
               <a:rPr lang="en-US" sz="1200" b="0" u="none" strike="noStrike">
                 <a:solidFill>
                   <a:schemeClr val="dk1"/>
@@ -5821,7 +5931,7 @@
         <p:spPr>
           <a:xfrm>
             <a:off x="685800" y="1143000"/>
-            <a:ext cx="5485320" cy="3085200"/>
+            <a:ext cx="5484960" cy="3084840"/>
           </a:xfrm>
           <a:prstGeom prst="rect">
             <a:avLst/>
@@ -5844,7 +5954,7 @@
         <p:spPr>
           <a:xfrm>
             <a:off x="685800" y="4400640"/>
-            <a:ext cx="5485320" cy="3599280"/>
+            <a:ext cx="5484960" cy="3598920"/>
           </a:xfrm>
           <a:prstGeom prst="rect">
             <a:avLst/>
@@ -5886,7 +5996,7 @@
         <p:spPr>
           <a:xfrm>
             <a:off x="3884760" y="8685360"/>
-            <a:ext cx="2970720" cy="457560"/>
+            <a:ext cx="2970360" cy="457200"/>
           </a:xfrm>
           <a:prstGeom prst="rect">
             <a:avLst/>
@@ -5930,7 +6040,7 @@
                 <a:tab pos="0" algn="l"/>
               </a:tabLst>
             </a:pPr>
-            <a:fld id="{1E7FBFF7-A34C-4E69-A021-AB69BF431F76}" type="slidenum">
+            <a:fld id="{75FFC2C3-C802-4841-8496-0596226F85E9}" type="slidenum">
               <a:rPr lang="en-US" sz="1200" b="0" u="none" strike="noStrike">
                 <a:solidFill>
                   <a:schemeClr val="dk1"/>
@@ -5988,7 +6098,7 @@
         <p:spPr>
           <a:xfrm>
             <a:off x="685800" y="1143000"/>
-            <a:ext cx="5485320" cy="3085200"/>
+            <a:ext cx="5484960" cy="3084840"/>
           </a:xfrm>
           <a:prstGeom prst="rect">
             <a:avLst/>
@@ -6011,7 +6121,7 @@
         <p:spPr>
           <a:xfrm>
             <a:off x="685800" y="4400640"/>
-            <a:ext cx="5485320" cy="3599280"/>
+            <a:ext cx="5484960" cy="3598920"/>
           </a:xfrm>
           <a:prstGeom prst="rect">
             <a:avLst/>
@@ -6053,7 +6163,7 @@
         <p:spPr>
           <a:xfrm>
             <a:off x="3884760" y="8685360"/>
-            <a:ext cx="2970720" cy="457560"/>
+            <a:ext cx="2970360" cy="457200"/>
           </a:xfrm>
           <a:prstGeom prst="rect">
             <a:avLst/>
@@ -6097,7 +6207,7 @@
                 <a:tab pos="0" algn="l"/>
               </a:tabLst>
             </a:pPr>
-            <a:fld id="{D15DDEDF-850C-4D99-9558-A49CD672B3DF}" type="slidenum">
+            <a:fld id="{1703F109-10B9-4790-A005-B5142862C7E2}" type="slidenum">
               <a:rPr lang="en-US" sz="1200" b="0" u="none" strike="noStrike">
                 <a:solidFill>
                   <a:schemeClr val="dk1"/>
@@ -6155,7 +6265,7 @@
         <p:spPr>
           <a:xfrm>
             <a:off x="685800" y="1143000"/>
-            <a:ext cx="5485320" cy="3085200"/>
+            <a:ext cx="5484960" cy="3084840"/>
           </a:xfrm>
           <a:prstGeom prst="rect">
             <a:avLst/>
@@ -6178,7 +6288,7 @@
         <p:spPr>
           <a:xfrm>
             <a:off x="685800" y="4400640"/>
-            <a:ext cx="5485320" cy="3599280"/>
+            <a:ext cx="5484960" cy="3598920"/>
           </a:xfrm>
           <a:prstGeom prst="rect">
             <a:avLst/>
@@ -6220,7 +6330,7 @@
         <p:spPr>
           <a:xfrm>
             <a:off x="3884760" y="8685360"/>
-            <a:ext cx="2970720" cy="457560"/>
+            <a:ext cx="2970360" cy="457200"/>
           </a:xfrm>
           <a:prstGeom prst="rect">
             <a:avLst/>
@@ -6264,7 +6374,7 @@
                 <a:tab pos="0" algn="l"/>
               </a:tabLst>
             </a:pPr>
-            <a:fld id="{0A7C301F-1597-406E-92F7-935E0CD433D3}" type="slidenum">
+            <a:fld id="{5F41BAAC-4E02-4683-AA66-F357B7377360}" type="slidenum">
               <a:rPr lang="en-US" sz="1200" b="0" u="none" strike="noStrike">
                 <a:solidFill>
                   <a:schemeClr val="dk1"/>
@@ -6322,7 +6432,7 @@
         <p:spPr>
           <a:xfrm>
             <a:off x="685800" y="1143000"/>
-            <a:ext cx="5485320" cy="3085200"/>
+            <a:ext cx="5484960" cy="3084840"/>
           </a:xfrm>
           <a:prstGeom prst="rect">
             <a:avLst/>
@@ -6345,7 +6455,7 @@
         <p:spPr>
           <a:xfrm>
             <a:off x="685800" y="4400640"/>
-            <a:ext cx="5485320" cy="3599280"/>
+            <a:ext cx="5484960" cy="3598920"/>
           </a:xfrm>
           <a:prstGeom prst="rect">
             <a:avLst/>
@@ -6387,7 +6497,7 @@
         <p:spPr>
           <a:xfrm>
             <a:off x="3884760" y="8685360"/>
-            <a:ext cx="2970720" cy="457560"/>
+            <a:ext cx="2970360" cy="457200"/>
           </a:xfrm>
           <a:prstGeom prst="rect">
             <a:avLst/>
@@ -6431,7 +6541,7 @@
                 <a:tab pos="0" algn="l"/>
               </a:tabLst>
             </a:pPr>
-            <a:fld id="{188C5DCF-6D96-4C76-B55A-3E0BDF07E8A8}" type="slidenum">
+            <a:fld id="{73E176AF-699F-4AED-AD94-094B2A5FCE9E}" type="slidenum">
               <a:rPr lang="en-US" sz="1200" b="0" u="none" strike="noStrike">
                 <a:solidFill>
                   <a:schemeClr val="dk1"/>
@@ -6489,7 +6599,7 @@
         <p:spPr>
           <a:xfrm>
             <a:off x="685800" y="1143000"/>
-            <a:ext cx="5485320" cy="3085200"/>
+            <a:ext cx="5484960" cy="3084840"/>
           </a:xfrm>
           <a:prstGeom prst="rect">
             <a:avLst/>
@@ -6512,7 +6622,7 @@
         <p:spPr>
           <a:xfrm>
             <a:off x="685800" y="4400640"/>
-            <a:ext cx="5485320" cy="3599280"/>
+            <a:ext cx="5484960" cy="3598920"/>
           </a:xfrm>
           <a:prstGeom prst="rect">
             <a:avLst/>
@@ -6554,7 +6664,7 @@
         <p:spPr>
           <a:xfrm>
             <a:off x="3884760" y="8685360"/>
-            <a:ext cx="2970720" cy="457560"/>
+            <a:ext cx="2970360" cy="457200"/>
           </a:xfrm>
           <a:prstGeom prst="rect">
             <a:avLst/>
@@ -6598,7 +6708,7 @@
                 <a:tab pos="0" algn="l"/>
               </a:tabLst>
             </a:pPr>
-            <a:fld id="{7A838040-8879-42C0-8B07-4AD82B8C014E}" type="slidenum">
+            <a:fld id="{0C3FBC6C-38CF-4251-A05A-C3FDB6B12F47}" type="slidenum">
               <a:rPr lang="en-US" sz="1200" b="0" u="none" strike="noStrike">
                 <a:solidFill>
                   <a:schemeClr val="dk1"/>
@@ -6656,7 +6766,7 @@
         <p:spPr>
           <a:xfrm>
             <a:off x="685800" y="1143000"/>
-            <a:ext cx="5485320" cy="3085200"/>
+            <a:ext cx="5484960" cy="3084840"/>
           </a:xfrm>
           <a:prstGeom prst="rect">
             <a:avLst/>
@@ -6679,7 +6789,7 @@
         <p:spPr>
           <a:xfrm>
             <a:off x="685800" y="4400640"/>
-            <a:ext cx="5485320" cy="3599280"/>
+            <a:ext cx="5484960" cy="3598920"/>
           </a:xfrm>
           <a:prstGeom prst="rect">
             <a:avLst/>
@@ -6721,7 +6831,7 @@
         <p:spPr>
           <a:xfrm>
             <a:off x="3884760" y="8685360"/>
-            <a:ext cx="2970720" cy="457560"/>
+            <a:ext cx="2970360" cy="457200"/>
           </a:xfrm>
           <a:prstGeom prst="rect">
             <a:avLst/>
@@ -6765,7 +6875,7 @@
                 <a:tab pos="0" algn="l"/>
               </a:tabLst>
             </a:pPr>
-            <a:fld id="{CC1EA4FF-C15A-4D48-94FF-65A7AC774325}" type="slidenum">
+            <a:fld id="{BF87B0FF-0FBC-4DD9-A1B4-0D27512E719F}" type="slidenum">
               <a:rPr lang="en-US" sz="1200" b="0" u="none" strike="noStrike">
                 <a:solidFill>
                   <a:schemeClr val="dk1"/>
@@ -6823,7 +6933,7 @@
         <p:spPr>
           <a:xfrm>
             <a:off x="685800" y="1143000"/>
-            <a:ext cx="5485320" cy="3085200"/>
+            <a:ext cx="5484960" cy="3084840"/>
           </a:xfrm>
           <a:prstGeom prst="rect">
             <a:avLst/>
@@ -6846,7 +6956,7 @@
         <p:spPr>
           <a:xfrm>
             <a:off x="685800" y="4400640"/>
-            <a:ext cx="5485320" cy="3599280"/>
+            <a:ext cx="5484960" cy="3598920"/>
           </a:xfrm>
           <a:prstGeom prst="rect">
             <a:avLst/>
@@ -6888,7 +6998,7 @@
         <p:spPr>
           <a:xfrm>
             <a:off x="3884760" y="8685360"/>
-            <a:ext cx="2970720" cy="457560"/>
+            <a:ext cx="2970360" cy="457200"/>
           </a:xfrm>
           <a:prstGeom prst="rect">
             <a:avLst/>
@@ -6932,7 +7042,7 @@
                 <a:tab pos="0" algn="l"/>
               </a:tabLst>
             </a:pPr>
-            <a:fld id="{EA2A8941-2FEA-4D35-AB85-93CE6C0C10BA}" type="slidenum">
+            <a:fld id="{F29812D2-1F9E-4604-8884-0318415DC06E}" type="slidenum">
               <a:rPr lang="en-US" sz="1200" b="0" u="none" strike="noStrike">
                 <a:solidFill>
                   <a:schemeClr val="dk1"/>
@@ -6990,7 +7100,7 @@
         <p:spPr>
           <a:xfrm>
             <a:off x="685800" y="1143000"/>
-            <a:ext cx="5485320" cy="3085200"/>
+            <a:ext cx="5484960" cy="3084840"/>
           </a:xfrm>
           <a:prstGeom prst="rect">
             <a:avLst/>
@@ -7013,7 +7123,7 @@
         <p:spPr>
           <a:xfrm>
             <a:off x="685800" y="4400640"/>
-            <a:ext cx="5485320" cy="3599280"/>
+            <a:ext cx="5484960" cy="3598920"/>
           </a:xfrm>
           <a:prstGeom prst="rect">
             <a:avLst/>
@@ -7055,7 +7165,7 @@
         <p:spPr>
           <a:xfrm>
             <a:off x="3884760" y="8685360"/>
-            <a:ext cx="2970720" cy="457560"/>
+            <a:ext cx="2970360" cy="457200"/>
           </a:xfrm>
           <a:prstGeom prst="rect">
             <a:avLst/>
@@ -7099,7 +7209,7 @@
                 <a:tab pos="0" algn="l"/>
               </a:tabLst>
             </a:pPr>
-            <a:fld id="{8A3AAA24-3F3E-48A4-9344-FFACBA2C1702}" type="slidenum">
+            <a:fld id="{B1D90F0A-4A68-4ACB-8E11-32D4FB324D5C}" type="slidenum">
               <a:rPr lang="en-US" sz="1200" b="0" u="none" strike="noStrike">
                 <a:solidFill>
                   <a:schemeClr val="dk1"/>
@@ -7157,7 +7267,7 @@
         <p:spPr>
           <a:xfrm>
             <a:off x="685800" y="1143000"/>
-            <a:ext cx="5485320" cy="3085200"/>
+            <a:ext cx="5484960" cy="3084840"/>
           </a:xfrm>
           <a:prstGeom prst="rect">
             <a:avLst/>
@@ -7180,7 +7290,7 @@
         <p:spPr>
           <a:xfrm>
             <a:off x="685800" y="4400640"/>
-            <a:ext cx="5485320" cy="3599280"/>
+            <a:ext cx="5484960" cy="3598920"/>
           </a:xfrm>
           <a:prstGeom prst="rect">
             <a:avLst/>
@@ -7222,7 +7332,7 @@
         <p:spPr>
           <a:xfrm>
             <a:off x="3884760" y="8685360"/>
-            <a:ext cx="2970720" cy="457560"/>
+            <a:ext cx="2970360" cy="457200"/>
           </a:xfrm>
           <a:prstGeom prst="rect">
             <a:avLst/>
@@ -7266,7 +7376,7 @@
                 <a:tab pos="0" algn="l"/>
               </a:tabLst>
             </a:pPr>
-            <a:fld id="{C8F46390-9D4D-4394-8CEB-CB8FEB03872C}" type="slidenum">
+            <a:fld id="{E4A03C98-4F5B-4F77-A8E0-D0AA6E6AC5C3}" type="slidenum">
               <a:rPr lang="en-US" sz="1200" b="0" u="none" strike="noStrike">
                 <a:solidFill>
                   <a:schemeClr val="dk1"/>
@@ -7276,7 +7386,7 @@
                 <a:latin typeface="+mn-lt"/>
                 <a:ea typeface="+mn-ea"/>
               </a:rPr>
-              <a:t>1</a:t>
+              <a:t>&lt;number&gt;</a:t>
             </a:fld>
             <a:endParaRPr lang="en-US" sz="1200" b="0" u="none" strike="noStrike">
               <a:solidFill>
@@ -7324,7 +7434,7 @@
         <p:spPr>
           <a:xfrm>
             <a:off x="685800" y="1143000"/>
-            <a:ext cx="5485320" cy="3085200"/>
+            <a:ext cx="5484960" cy="3084840"/>
           </a:xfrm>
           <a:prstGeom prst="rect">
             <a:avLst/>
@@ -7347,7 +7457,7 @@
         <p:spPr>
           <a:xfrm>
             <a:off x="685800" y="4400640"/>
-            <a:ext cx="5485320" cy="3599280"/>
+            <a:ext cx="5484960" cy="3598920"/>
           </a:xfrm>
           <a:prstGeom prst="rect">
             <a:avLst/>
@@ -7389,7 +7499,7 @@
         <p:spPr>
           <a:xfrm>
             <a:off x="3884760" y="8685360"/>
-            <a:ext cx="2970720" cy="457560"/>
+            <a:ext cx="2970360" cy="457200"/>
           </a:xfrm>
           <a:prstGeom prst="rect">
             <a:avLst/>
@@ -7433,7 +7543,7 @@
                 <a:tab pos="0" algn="l"/>
               </a:tabLst>
             </a:pPr>
-            <a:fld id="{49844F37-3E00-4012-8F47-6406100A7609}" type="slidenum">
+            <a:fld id="{7A08CB95-50BA-4C9D-8B08-9C4FDF43DBF9}" type="slidenum">
               <a:rPr lang="en-US" sz="1200" b="0" u="none" strike="noStrike">
                 <a:solidFill>
                   <a:schemeClr val="dk1"/>
@@ -7443,7 +7553,7 @@
                 <a:latin typeface="+mn-lt"/>
                 <a:ea typeface="+mn-ea"/>
               </a:rPr>
-              <a:t>1</a:t>
+              <a:t>&lt;number&gt;</a:t>
             </a:fld>
             <a:endParaRPr lang="en-US" sz="1200" b="0" u="none" strike="noStrike">
               <a:solidFill>
@@ -7491,7 +7601,7 @@
         <p:spPr>
           <a:xfrm>
             <a:off x="685800" y="1143000"/>
-            <a:ext cx="5485320" cy="3085200"/>
+            <a:ext cx="5484960" cy="3084840"/>
           </a:xfrm>
           <a:prstGeom prst="rect">
             <a:avLst/>
@@ -7514,7 +7624,7 @@
         <p:spPr>
           <a:xfrm>
             <a:off x="685800" y="4400640"/>
-            <a:ext cx="5485320" cy="3599280"/>
+            <a:ext cx="5484960" cy="3598920"/>
           </a:xfrm>
           <a:prstGeom prst="rect">
             <a:avLst/>
@@ -7556,7 +7666,7 @@
         <p:spPr>
           <a:xfrm>
             <a:off x="3884760" y="8685360"/>
-            <a:ext cx="2970720" cy="457560"/>
+            <a:ext cx="2970360" cy="457200"/>
           </a:xfrm>
           <a:prstGeom prst="rect">
             <a:avLst/>
@@ -7600,7 +7710,7 @@
                 <a:tab pos="0" algn="l"/>
               </a:tabLst>
             </a:pPr>
-            <a:fld id="{F88CC879-8BE6-4BAF-A8AC-18057751BF28}" type="slidenum">
+            <a:fld id="{E162CE3C-BF71-4EB3-8CC3-020309844F2B}" type="slidenum">
               <a:rPr lang="en-US" sz="1200" b="0" u="none" strike="noStrike">
                 <a:solidFill>
                   <a:schemeClr val="dk1"/>
@@ -7658,7 +7768,7 @@
         <p:spPr>
           <a:xfrm>
             <a:off x="685800" y="1143000"/>
-            <a:ext cx="5485680" cy="3085560"/>
+            <a:ext cx="5485320" cy="3085200"/>
           </a:xfrm>
           <a:prstGeom prst="rect">
             <a:avLst/>
@@ -7681,7 +7791,7 @@
         <p:spPr>
           <a:xfrm>
             <a:off x="685800" y="4400640"/>
-            <a:ext cx="5485320" cy="3599280"/>
+            <a:ext cx="5484960" cy="3598920"/>
           </a:xfrm>
           <a:prstGeom prst="rect">
             <a:avLst/>
@@ -7723,7 +7833,7 @@
         <p:spPr>
           <a:xfrm>
             <a:off x="3884760" y="8685360"/>
-            <a:ext cx="2970720" cy="457560"/>
+            <a:ext cx="2970360" cy="457200"/>
           </a:xfrm>
           <a:prstGeom prst="rect">
             <a:avLst/>
@@ -7767,7 +7877,7 @@
                 <a:tab pos="0" algn="l"/>
               </a:tabLst>
             </a:pPr>
-            <a:fld id="{85F22AC2-1412-4EA8-A39B-CE54751E4D9D}" type="slidenum">
+            <a:fld id="{6B0C1B42-06F0-428C-801B-60AD2794A464}" type="slidenum">
               <a:rPr lang="en-US" sz="1200" b="0" u="none" strike="noStrike">
                 <a:solidFill>
                   <a:schemeClr val="dk1"/>
@@ -7825,7 +7935,7 @@
         <p:spPr>
           <a:xfrm>
             <a:off x="685800" y="1143000"/>
-            <a:ext cx="5485680" cy="3085560"/>
+            <a:ext cx="5485320" cy="3085200"/>
           </a:xfrm>
           <a:prstGeom prst="rect">
             <a:avLst/>
@@ -7848,7 +7958,7 @@
         <p:spPr>
           <a:xfrm>
             <a:off x="685800" y="4400640"/>
-            <a:ext cx="5485320" cy="3599280"/>
+            <a:ext cx="5484960" cy="3598920"/>
           </a:xfrm>
           <a:prstGeom prst="rect">
             <a:avLst/>
@@ -7890,7 +8000,7 @@
         <p:spPr>
           <a:xfrm>
             <a:off x="3884760" y="8685360"/>
-            <a:ext cx="2970720" cy="457560"/>
+            <a:ext cx="2970360" cy="457200"/>
           </a:xfrm>
           <a:prstGeom prst="rect">
             <a:avLst/>
@@ -7934,7 +8044,7 @@
                 <a:tab pos="0" algn="l"/>
               </a:tabLst>
             </a:pPr>
-            <a:fld id="{38CFC66B-F015-460A-A924-4CDAC16CED33}" type="slidenum">
+            <a:fld id="{3BFBCF9A-A68C-441F-BCC9-A22C27186DAD}" type="slidenum">
               <a:rPr lang="en-US" sz="1200" b="0" u="none" strike="noStrike">
                 <a:solidFill>
                   <a:schemeClr val="dk1"/>
@@ -7992,7 +8102,7 @@
         <p:spPr>
           <a:xfrm>
             <a:off x="685800" y="1143000"/>
-            <a:ext cx="5485680" cy="3085560"/>
+            <a:ext cx="5485320" cy="3085200"/>
           </a:xfrm>
           <a:prstGeom prst="rect">
             <a:avLst/>
@@ -8015,7 +8125,7 @@
         <p:spPr>
           <a:xfrm>
             <a:off x="685800" y="4400640"/>
-            <a:ext cx="5485320" cy="3599280"/>
+            <a:ext cx="5484960" cy="3598920"/>
           </a:xfrm>
           <a:prstGeom prst="rect">
             <a:avLst/>
@@ -8057,7 +8167,7 @@
         <p:spPr>
           <a:xfrm>
             <a:off x="3884760" y="8685360"/>
-            <a:ext cx="2970720" cy="457560"/>
+            <a:ext cx="2970360" cy="457200"/>
           </a:xfrm>
           <a:prstGeom prst="rect">
             <a:avLst/>
@@ -8101,7 +8211,7 @@
                 <a:tab pos="0" algn="l"/>
               </a:tabLst>
             </a:pPr>
-            <a:fld id="{E049F079-5503-404C-8077-745382D2DC3F}" type="slidenum">
+            <a:fld id="{BCB30D10-A7B6-4A04-8D74-D806CC999E8A}" type="slidenum">
               <a:rPr lang="en-US" sz="1200" b="0" u="none" strike="noStrike">
                 <a:solidFill>
                   <a:schemeClr val="dk1"/>
@@ -8159,7 +8269,7 @@
         <p:spPr>
           <a:xfrm>
             <a:off x="685800" y="1143000"/>
-            <a:ext cx="5485680" cy="3085560"/>
+            <a:ext cx="5485320" cy="3085200"/>
           </a:xfrm>
           <a:prstGeom prst="rect">
             <a:avLst/>
@@ -8182,7 +8292,7 @@
         <p:spPr>
           <a:xfrm>
             <a:off x="685800" y="4400640"/>
-            <a:ext cx="5485320" cy="3599280"/>
+            <a:ext cx="5484960" cy="3598920"/>
           </a:xfrm>
           <a:prstGeom prst="rect">
             <a:avLst/>
@@ -8224,7 +8334,7 @@
         <p:spPr>
           <a:xfrm>
             <a:off x="3884760" y="8685360"/>
-            <a:ext cx="2970720" cy="457560"/>
+            <a:ext cx="2970360" cy="457200"/>
           </a:xfrm>
           <a:prstGeom prst="rect">
             <a:avLst/>
@@ -8268,7 +8378,7 @@
                 <a:tab pos="0" algn="l"/>
               </a:tabLst>
             </a:pPr>
-            <a:fld id="{A14C06C3-6F6A-422D-BD2F-0528C2CBBF4D}" type="slidenum">
+            <a:fld id="{DD12D716-0C82-42B4-B6E0-76426D24D8DC}" type="slidenum">
               <a:rPr lang="en-US" sz="1200" b="0" u="none" strike="noStrike">
                 <a:solidFill>
                   <a:schemeClr val="dk1"/>
@@ -8326,7 +8436,7 @@
         <p:spPr>
           <a:xfrm>
             <a:off x="685800" y="1143000"/>
-            <a:ext cx="5485680" cy="3085560"/>
+            <a:ext cx="5485320" cy="3085200"/>
           </a:xfrm>
           <a:prstGeom prst="rect">
             <a:avLst/>
@@ -8349,7 +8459,7 @@
         <p:spPr>
           <a:xfrm>
             <a:off x="685800" y="4400640"/>
-            <a:ext cx="5485320" cy="3599280"/>
+            <a:ext cx="5484960" cy="3598920"/>
           </a:xfrm>
           <a:prstGeom prst="rect">
             <a:avLst/>
@@ -8391,7 +8501,7 @@
         <p:spPr>
           <a:xfrm>
             <a:off x="3884760" y="8685360"/>
-            <a:ext cx="2970720" cy="457560"/>
+            <a:ext cx="2970360" cy="457200"/>
           </a:xfrm>
           <a:prstGeom prst="rect">
             <a:avLst/>
@@ -8435,7 +8545,7 @@
                 <a:tab pos="0" algn="l"/>
               </a:tabLst>
             </a:pPr>
-            <a:fld id="{2515951E-AD77-4280-9C70-1E6CFEA509F8}" type="slidenum">
+            <a:fld id="{5FF19C1C-E9AA-44E4-87EF-112DEFE6038A}" type="slidenum">
               <a:rPr lang="en-US" sz="1200" b="0" u="none" strike="noStrike">
                 <a:solidFill>
                   <a:schemeClr val="dk1"/>
@@ -9059,7 +9169,7 @@
         <p:spPr>
           <a:xfrm>
             <a:off x="-2286000" y="3657600"/>
-            <a:ext cx="6399720" cy="6399720"/>
+            <a:ext cx="6399360" cy="6399360"/>
           </a:xfrm>
           <a:prstGeom prst="ellipse">
             <a:avLst/>
@@ -9102,7 +9212,7 @@
         <p:spPr>
           <a:xfrm>
             <a:off x="8229600" y="-2743200"/>
-            <a:ext cx="6399720" cy="6399720"/>
+            <a:ext cx="6399360" cy="6399360"/>
           </a:xfrm>
           <a:prstGeom prst="ellipse">
             <a:avLst/>
@@ -9145,7 +9255,7 @@
         <p:spPr>
           <a:xfrm>
             <a:off x="5495400" y="914400"/>
-            <a:ext cx="1187640" cy="1187640"/>
+            <a:ext cx="1187280" cy="1187280"/>
           </a:xfrm>
           <a:prstGeom prst="ellipse">
             <a:avLst/>
@@ -9192,7 +9302,7 @@
         <p:spPr>
           <a:xfrm>
             <a:off x="5678280" y="1097280"/>
-            <a:ext cx="830880" cy="830880"/>
+            <a:ext cx="830520" cy="830520"/>
           </a:xfrm>
           <a:prstGeom prst="rect">
             <a:avLst/>
@@ -9212,7 +9322,7 @@
         <p:spPr>
           <a:xfrm>
             <a:off x="914400" y="2377440"/>
-            <a:ext cx="10359000" cy="1004760"/>
+            <a:ext cx="10358640" cy="1004400"/>
           </a:xfrm>
           <a:prstGeom prst="rect">
             <a:avLst/>
@@ -9273,7 +9383,7 @@
         <p:spPr>
           <a:xfrm>
             <a:off x="914400" y="3383280"/>
-            <a:ext cx="10359000" cy="547560"/>
+            <a:ext cx="10358640" cy="547200"/>
           </a:xfrm>
           <a:prstGeom prst="rect">
             <a:avLst/>
@@ -9334,7 +9444,7 @@
         <p:spPr>
           <a:xfrm>
             <a:off x="914400" y="3977640"/>
-            <a:ext cx="10359000" cy="456120"/>
+            <a:ext cx="10358640" cy="455760"/>
           </a:xfrm>
           <a:prstGeom prst="rect">
             <a:avLst/>
@@ -9395,7 +9505,7 @@
         <p:spPr>
           <a:xfrm>
             <a:off x="11521440" y="6446520"/>
-            <a:ext cx="456120" cy="273240"/>
+            <a:ext cx="455760" cy="272880"/>
           </a:xfrm>
           <a:prstGeom prst="rect">
             <a:avLst/>
@@ -9493,7 +9603,7 @@
         <p:spPr>
           <a:xfrm>
             <a:off x="-1828800" y="5029200"/>
-            <a:ext cx="3656520" cy="3656520"/>
+            <a:ext cx="3656160" cy="3656160"/>
           </a:xfrm>
           <a:prstGeom prst="ellipse">
             <a:avLst/>
@@ -9536,7 +9646,7 @@
         <p:spPr>
           <a:xfrm>
             <a:off x="457200" y="457200"/>
-            <a:ext cx="639000" cy="639000"/>
+            <a:ext cx="638640" cy="638640"/>
           </a:xfrm>
           <a:prstGeom prst="ellipse">
             <a:avLst/>
@@ -9583,7 +9693,7 @@
         <p:spPr>
           <a:xfrm>
             <a:off x="548640" y="548640"/>
-            <a:ext cx="447120" cy="447120"/>
+            <a:ext cx="446760" cy="446760"/>
           </a:xfrm>
           <a:prstGeom prst="rect">
             <a:avLst/>
@@ -9603,7 +9713,7 @@
         <p:spPr>
           <a:xfrm>
             <a:off x="1280160" y="457200"/>
-            <a:ext cx="10423080" cy="639000"/>
+            <a:ext cx="10422720" cy="638640"/>
           </a:xfrm>
           <a:prstGeom prst="rect">
             <a:avLst/>
@@ -9664,7 +9774,7 @@
         <p:spPr>
           <a:xfrm>
             <a:off x="457200" y="1600200"/>
-            <a:ext cx="11273400" cy="4479480"/>
+            <a:ext cx="11273040" cy="4479120"/>
           </a:xfrm>
           <a:prstGeom prst="roundRect">
             <a:avLst>
@@ -9709,7 +9819,7 @@
         <p:spPr>
           <a:xfrm>
             <a:off x="822960" y="1828800"/>
-            <a:ext cx="10514520" cy="456120"/>
+            <a:ext cx="10514160" cy="455760"/>
           </a:xfrm>
           <a:prstGeom prst="rect">
             <a:avLst/>
@@ -9770,7 +9880,7 @@
         <p:spPr>
           <a:xfrm>
             <a:off x="822960" y="2423160"/>
-            <a:ext cx="383040" cy="383040"/>
+            <a:ext cx="382680" cy="382680"/>
           </a:xfrm>
           <a:prstGeom prst="ellipse">
             <a:avLst/>
@@ -9813,7 +9923,7 @@
         <p:spPr>
           <a:xfrm>
             <a:off x="822960" y="2423160"/>
-            <a:ext cx="383040" cy="383040"/>
+            <a:ext cx="382680" cy="382680"/>
           </a:xfrm>
           <a:prstGeom prst="rect">
             <a:avLst/>
@@ -9874,7 +9984,7 @@
         <p:spPr>
           <a:xfrm>
             <a:off x="1435680" y="2423160"/>
-            <a:ext cx="9581760" cy="383040"/>
+            <a:ext cx="9581400" cy="382680"/>
           </a:xfrm>
           <a:prstGeom prst="rect">
             <a:avLst/>
@@ -9935,7 +10045,7 @@
         <p:spPr>
           <a:xfrm>
             <a:off x="822960" y="3300840"/>
-            <a:ext cx="383040" cy="383040"/>
+            <a:ext cx="382680" cy="382680"/>
           </a:xfrm>
           <a:prstGeom prst="ellipse">
             <a:avLst/>
@@ -9978,7 +10088,7 @@
         <p:spPr>
           <a:xfrm>
             <a:off x="822960" y="3300840"/>
-            <a:ext cx="383040" cy="383040"/>
+            <a:ext cx="382680" cy="382680"/>
           </a:xfrm>
           <a:prstGeom prst="rect">
             <a:avLst/>
@@ -10039,7 +10149,7 @@
         <p:spPr>
           <a:xfrm>
             <a:off x="1435680" y="3300840"/>
-            <a:ext cx="9581760" cy="383040"/>
+            <a:ext cx="9581400" cy="382680"/>
           </a:xfrm>
           <a:prstGeom prst="rect">
             <a:avLst/>
@@ -10100,7 +10210,7 @@
         <p:spPr>
           <a:xfrm>
             <a:off x="822960" y="4178880"/>
-            <a:ext cx="383040" cy="383040"/>
+            <a:ext cx="382680" cy="382680"/>
           </a:xfrm>
           <a:prstGeom prst="ellipse">
             <a:avLst/>
@@ -10143,7 +10253,7 @@
         <p:spPr>
           <a:xfrm>
             <a:off x="822960" y="4178880"/>
-            <a:ext cx="383040" cy="383040"/>
+            <a:ext cx="382680" cy="382680"/>
           </a:xfrm>
           <a:prstGeom prst="rect">
             <a:avLst/>
@@ -10204,7 +10314,7 @@
         <p:spPr>
           <a:xfrm>
             <a:off x="1435680" y="4178880"/>
-            <a:ext cx="9581760" cy="383040"/>
+            <a:ext cx="9581400" cy="382680"/>
           </a:xfrm>
           <a:prstGeom prst="rect">
             <a:avLst/>
@@ -10265,7 +10375,7 @@
         <p:spPr>
           <a:xfrm>
             <a:off x="822960" y="5056560"/>
-            <a:ext cx="383040" cy="383040"/>
+            <a:ext cx="382680" cy="382680"/>
           </a:xfrm>
           <a:prstGeom prst="ellipse">
             <a:avLst/>
@@ -10308,7 +10418,7 @@
         <p:spPr>
           <a:xfrm>
             <a:off x="822960" y="5056560"/>
-            <a:ext cx="383040" cy="383040"/>
+            <a:ext cx="382680" cy="382680"/>
           </a:xfrm>
           <a:prstGeom prst="rect">
             <a:avLst/>
@@ -10369,7 +10479,7 @@
         <p:spPr>
           <a:xfrm>
             <a:off x="1435680" y="5056560"/>
-            <a:ext cx="9581760" cy="383040"/>
+            <a:ext cx="9581400" cy="382680"/>
           </a:xfrm>
           <a:prstGeom prst="rect">
             <a:avLst/>
@@ -10430,7 +10540,7 @@
         <p:spPr>
           <a:xfrm>
             <a:off x="457200" y="6446520"/>
-            <a:ext cx="7314120" cy="273240"/>
+            <a:ext cx="7313760" cy="272880"/>
           </a:xfrm>
           <a:prstGeom prst="rect">
             <a:avLst/>
@@ -10491,7 +10601,7 @@
         <p:spPr>
           <a:xfrm>
             <a:off x="11521440" y="6446520"/>
-            <a:ext cx="456120" cy="273240"/>
+            <a:ext cx="455760" cy="272880"/>
           </a:xfrm>
           <a:prstGeom prst="rect">
             <a:avLst/>
@@ -10589,7 +10699,7 @@
         <p:spPr>
           <a:xfrm>
             <a:off x="-1828800" y="4114800"/>
-            <a:ext cx="5485320" cy="5485320"/>
+            <a:ext cx="5484960" cy="5484960"/>
           </a:xfrm>
           <a:prstGeom prst="ellipse">
             <a:avLst/>
@@ -10632,7 +10742,7 @@
         <p:spPr>
           <a:xfrm>
             <a:off x="9601200" y="-2286000"/>
-            <a:ext cx="5485320" cy="5485320"/>
+            <a:ext cx="5484960" cy="5484960"/>
           </a:xfrm>
           <a:prstGeom prst="ellipse">
             <a:avLst/>
@@ -10675,7 +10785,7 @@
         <p:spPr>
           <a:xfrm>
             <a:off x="5596200" y="731520"/>
-            <a:ext cx="1004760" cy="1004760"/>
+            <a:ext cx="1004400" cy="1004400"/>
           </a:xfrm>
           <a:prstGeom prst="ellipse">
             <a:avLst/>
@@ -10722,7 +10832,7 @@
         <p:spPr>
           <a:xfrm>
             <a:off x="5742360" y="877680"/>
-            <a:ext cx="703080" cy="703080"/>
+            <a:ext cx="702720" cy="702720"/>
           </a:xfrm>
           <a:prstGeom prst="rect">
             <a:avLst/>
@@ -10742,7 +10852,7 @@
         <p:spPr>
           <a:xfrm>
             <a:off x="914400" y="1965960"/>
-            <a:ext cx="10359000" cy="364680"/>
+            <a:ext cx="10358640" cy="364320"/>
           </a:xfrm>
           <a:prstGeom prst="rect">
             <a:avLst/>
@@ -10803,7 +10913,7 @@
         <p:spPr>
           <a:xfrm>
             <a:off x="914400" y="2377440"/>
-            <a:ext cx="10359000" cy="2010600"/>
+            <a:ext cx="10358640" cy="2010240"/>
           </a:xfrm>
           <a:prstGeom prst="rect">
             <a:avLst/>
@@ -10864,7 +10974,7 @@
         <p:spPr>
           <a:xfrm>
             <a:off x="1463040" y="4572000"/>
-            <a:ext cx="9261720" cy="1096200"/>
+            <a:ext cx="9261360" cy="1095840"/>
           </a:xfrm>
           <a:prstGeom prst="rect">
             <a:avLst/>
@@ -10925,7 +11035,7 @@
         <p:spPr>
           <a:xfrm>
             <a:off x="11521440" y="6446520"/>
-            <a:ext cx="456120" cy="273240"/>
+            <a:ext cx="455760" cy="272880"/>
           </a:xfrm>
           <a:prstGeom prst="rect">
             <a:avLst/>
@@ -11023,7 +11133,7 @@
         <p:spPr>
           <a:xfrm>
             <a:off x="10515600" y="5669280"/>
-            <a:ext cx="3199320" cy="3199320"/>
+            <a:ext cx="3198960" cy="3198960"/>
           </a:xfrm>
           <a:prstGeom prst="roundRect">
             <a:avLst>
@@ -11068,7 +11178,7 @@
         <p:spPr>
           <a:xfrm>
             <a:off x="457200" y="457200"/>
-            <a:ext cx="639000" cy="639000"/>
+            <a:ext cx="638640" cy="638640"/>
           </a:xfrm>
           <a:prstGeom prst="ellipse">
             <a:avLst/>
@@ -11115,7 +11225,7 @@
         <p:spPr>
           <a:xfrm>
             <a:off x="548640" y="548640"/>
-            <a:ext cx="447120" cy="447120"/>
+            <a:ext cx="446760" cy="446760"/>
           </a:xfrm>
           <a:prstGeom prst="rect">
             <a:avLst/>
@@ -11135,7 +11245,7 @@
         <p:spPr>
           <a:xfrm>
             <a:off x="1280160" y="457200"/>
-            <a:ext cx="10423080" cy="639000"/>
+            <a:ext cx="10422720" cy="638640"/>
           </a:xfrm>
           <a:prstGeom prst="rect">
             <a:avLst/>
@@ -11196,7 +11306,7 @@
         <p:spPr>
           <a:xfrm>
             <a:off x="457200" y="1554480"/>
-            <a:ext cx="3656520" cy="4662360"/>
+            <a:ext cx="3656160" cy="4662000"/>
           </a:xfrm>
           <a:prstGeom prst="roundRect">
             <a:avLst>
@@ -11241,7 +11351,7 @@
         <p:spPr>
           <a:xfrm>
             <a:off x="1508760" y="2194560"/>
-            <a:ext cx="1553400" cy="1553400"/>
+            <a:ext cx="1553040" cy="1553040"/>
           </a:xfrm>
           <a:prstGeom prst="ellipse">
             <a:avLst/>
@@ -11288,7 +11398,7 @@
         <p:spPr>
           <a:xfrm>
             <a:off x="1746360" y="2423160"/>
-            <a:ext cx="1087200" cy="1087200"/>
+            <a:ext cx="1086840" cy="1086840"/>
           </a:xfrm>
           <a:prstGeom prst="rect">
             <a:avLst/>
@@ -11308,7 +11418,7 @@
         <p:spPr>
           <a:xfrm>
             <a:off x="640080" y="3977640"/>
-            <a:ext cx="3290760" cy="1736280"/>
+            <a:ext cx="3290400" cy="1735920"/>
           </a:xfrm>
           <a:prstGeom prst="rect">
             <a:avLst/>
@@ -11429,7 +11539,7 @@
         <p:spPr>
           <a:xfrm>
             <a:off x="4572000" y="1737360"/>
-            <a:ext cx="7131240" cy="4113720"/>
+            <a:ext cx="7130880" cy="4113360"/>
           </a:xfrm>
           <a:prstGeom prst="rect">
             <a:avLst/>
@@ -11600,7 +11710,7 @@
         <p:spPr>
           <a:xfrm>
             <a:off x="457200" y="6446520"/>
-            <a:ext cx="7314120" cy="273240"/>
+            <a:ext cx="7313760" cy="272880"/>
           </a:xfrm>
           <a:prstGeom prst="rect">
             <a:avLst/>
@@ -11661,7 +11771,7 @@
         <p:spPr>
           <a:xfrm>
             <a:off x="11521440" y="6446520"/>
-            <a:ext cx="456120" cy="273240"/>
+            <a:ext cx="455760" cy="272880"/>
           </a:xfrm>
           <a:prstGeom prst="rect">
             <a:avLst/>
@@ -11759,7 +11869,7 @@
         <p:spPr>
           <a:xfrm>
             <a:off x="457200" y="457200"/>
-            <a:ext cx="639000" cy="639000"/>
+            <a:ext cx="638640" cy="638640"/>
           </a:xfrm>
           <a:prstGeom prst="ellipse">
             <a:avLst/>
@@ -11806,7 +11916,7 @@
         <p:spPr>
           <a:xfrm>
             <a:off x="548640" y="548640"/>
-            <a:ext cx="447120" cy="447120"/>
+            <a:ext cx="446760" cy="446760"/>
           </a:xfrm>
           <a:prstGeom prst="rect">
             <a:avLst/>
@@ -11826,7 +11936,7 @@
         <p:spPr>
           <a:xfrm>
             <a:off x="1280160" y="457200"/>
-            <a:ext cx="10423080" cy="639000"/>
+            <a:ext cx="10422720" cy="638640"/>
           </a:xfrm>
           <a:prstGeom prst="rect">
             <a:avLst/>
@@ -11887,7 +11997,7 @@
         <p:spPr>
           <a:xfrm>
             <a:off x="457200" y="1645920"/>
-            <a:ext cx="5348160" cy="4479480"/>
+            <a:ext cx="5347800" cy="4479120"/>
           </a:xfrm>
           <a:prstGeom prst="roundRect">
             <a:avLst>
@@ -11932,7 +12042,7 @@
         <p:spPr>
           <a:xfrm>
             <a:off x="731520" y="1874520"/>
-            <a:ext cx="456120" cy="456120"/>
+            <a:ext cx="455760" cy="455760"/>
           </a:xfrm>
           <a:prstGeom prst="ellipse">
             <a:avLst/>
@@ -11979,7 +12089,7 @@
         <p:spPr>
           <a:xfrm>
             <a:off x="804600" y="1938600"/>
-            <a:ext cx="318960" cy="318960"/>
+            <a:ext cx="318600" cy="318600"/>
           </a:xfrm>
           <a:prstGeom prst="rect">
             <a:avLst/>
@@ -11999,7 +12109,7 @@
         <p:spPr>
           <a:xfrm>
             <a:off x="1325880" y="1874520"/>
-            <a:ext cx="4342320" cy="456120"/>
+            <a:ext cx="4341960" cy="455760"/>
           </a:xfrm>
           <a:prstGeom prst="rect">
             <a:avLst/>
@@ -12060,7 +12170,7 @@
         <p:spPr>
           <a:xfrm>
             <a:off x="731520" y="2514600"/>
-            <a:ext cx="4799520" cy="3382200"/>
+            <a:ext cx="4799160" cy="3381840"/>
           </a:xfrm>
           <a:prstGeom prst="rect">
             <a:avLst/>
@@ -12231,7 +12341,7 @@
         <p:spPr>
           <a:xfrm>
             <a:off x="6172200" y="1645920"/>
-            <a:ext cx="5348160" cy="4479480"/>
+            <a:ext cx="5347800" cy="4479120"/>
           </a:xfrm>
           <a:prstGeom prst="roundRect">
             <a:avLst>
@@ -12276,7 +12386,7 @@
         <p:spPr>
           <a:xfrm>
             <a:off x="6446520" y="1874520"/>
-            <a:ext cx="456120" cy="456120"/>
+            <a:ext cx="455760" cy="455760"/>
           </a:xfrm>
           <a:prstGeom prst="ellipse">
             <a:avLst/>
@@ -12323,7 +12433,7 @@
         <p:spPr>
           <a:xfrm>
             <a:off x="6519600" y="1938600"/>
-            <a:ext cx="318960" cy="318960"/>
+            <a:ext cx="318600" cy="318600"/>
           </a:xfrm>
           <a:prstGeom prst="rect">
             <a:avLst/>
@@ -12343,7 +12453,7 @@
         <p:spPr>
           <a:xfrm>
             <a:off x="7040880" y="1874520"/>
-            <a:ext cx="4342320" cy="456120"/>
+            <a:ext cx="4341960" cy="455760"/>
           </a:xfrm>
           <a:prstGeom prst="rect">
             <a:avLst/>
@@ -12404,7 +12514,7 @@
         <p:spPr>
           <a:xfrm>
             <a:off x="6446520" y="2514600"/>
-            <a:ext cx="4799520" cy="3382200"/>
+            <a:ext cx="4799160" cy="3381840"/>
           </a:xfrm>
           <a:prstGeom prst="rect">
             <a:avLst/>
@@ -12575,7 +12685,7 @@
         <p:spPr>
           <a:xfrm>
             <a:off x="457200" y="6446520"/>
-            <a:ext cx="7314120" cy="273240"/>
+            <a:ext cx="7313760" cy="272880"/>
           </a:xfrm>
           <a:prstGeom prst="rect">
             <a:avLst/>
@@ -12636,7 +12746,7 @@
         <p:spPr>
           <a:xfrm>
             <a:off x="11521440" y="6446520"/>
-            <a:ext cx="456120" cy="273240"/>
+            <a:ext cx="455760" cy="272880"/>
           </a:xfrm>
           <a:prstGeom prst="rect">
             <a:avLst/>
@@ -12734,7 +12844,7 @@
         <p:spPr>
           <a:xfrm>
             <a:off x="457200" y="457200"/>
-            <a:ext cx="639000" cy="639000"/>
+            <a:ext cx="638640" cy="638640"/>
           </a:xfrm>
           <a:prstGeom prst="ellipse">
             <a:avLst/>
@@ -12781,7 +12891,7 @@
         <p:spPr>
           <a:xfrm>
             <a:off x="548640" y="548640"/>
-            <a:ext cx="447120" cy="447120"/>
+            <a:ext cx="446760" cy="446760"/>
           </a:xfrm>
           <a:prstGeom prst="rect">
             <a:avLst/>
@@ -12801,7 +12911,7 @@
         <p:spPr>
           <a:xfrm>
             <a:off x="1280160" y="457200"/>
-            <a:ext cx="10423080" cy="639000"/>
+            <a:ext cx="10422720" cy="638640"/>
           </a:xfrm>
           <a:prstGeom prst="rect">
             <a:avLst/>
@@ -12862,7 +12972,7 @@
         <p:spPr>
           <a:xfrm>
             <a:off x="548640" y="1828800"/>
-            <a:ext cx="4753800" cy="4022280"/>
+            <a:ext cx="4753440" cy="4021920"/>
           </a:xfrm>
           <a:prstGeom prst="rect">
             <a:avLst/>
@@ -12998,7 +13108,7 @@
         <p:spPr>
           <a:xfrm>
             <a:off x="5486400" y="1691640"/>
-            <a:ext cx="6216840" cy="4342320"/>
+            <a:ext cx="6216480" cy="4341960"/>
           </a:xfrm>
           <a:prstGeom prst="roundRect">
             <a:avLst>
@@ -13043,7 +13153,7 @@
         <p:spPr>
           <a:xfrm>
             <a:off x="5806440" y="1965960"/>
-            <a:ext cx="5576760" cy="3793680"/>
+            <a:ext cx="5576400" cy="3793320"/>
           </a:xfrm>
           <a:prstGeom prst="rect">
             <a:avLst/>
@@ -13374,7 +13484,7 @@
         <p:spPr>
           <a:xfrm>
             <a:off x="457200" y="6446520"/>
-            <a:ext cx="7314120" cy="273240"/>
+            <a:ext cx="7313760" cy="272880"/>
           </a:xfrm>
           <a:prstGeom prst="rect">
             <a:avLst/>
@@ -13435,7 +13545,7 @@
         <p:spPr>
           <a:xfrm>
             <a:off x="11521440" y="6446520"/>
-            <a:ext cx="456120" cy="273240"/>
+            <a:ext cx="455760" cy="272880"/>
           </a:xfrm>
           <a:prstGeom prst="rect">
             <a:avLst/>
@@ -13533,7 +13643,7 @@
         <p:spPr>
           <a:xfrm>
             <a:off x="457200" y="457200"/>
-            <a:ext cx="639000" cy="639000"/>
+            <a:ext cx="638640" cy="638640"/>
           </a:xfrm>
           <a:prstGeom prst="ellipse">
             <a:avLst/>
@@ -13580,7 +13690,7 @@
         <p:spPr>
           <a:xfrm>
             <a:off x="548640" y="548640"/>
-            <a:ext cx="447120" cy="447120"/>
+            <a:ext cx="446760" cy="446760"/>
           </a:xfrm>
           <a:prstGeom prst="rect">
             <a:avLst/>
@@ -13600,7 +13710,7 @@
         <p:spPr>
           <a:xfrm>
             <a:off x="1280160" y="457200"/>
-            <a:ext cx="10423080" cy="639000"/>
+            <a:ext cx="10422720" cy="638640"/>
           </a:xfrm>
           <a:prstGeom prst="rect">
             <a:avLst/>
@@ -13661,7 +13771,7 @@
         <p:spPr>
           <a:xfrm>
             <a:off x="548640" y="1828800"/>
-            <a:ext cx="4753800" cy="4022280"/>
+            <a:ext cx="4753440" cy="4021920"/>
           </a:xfrm>
           <a:prstGeom prst="rect">
             <a:avLst/>
@@ -13797,7 +13907,7 @@
         <p:spPr>
           <a:xfrm>
             <a:off x="5486400" y="1691640"/>
-            <a:ext cx="6216840" cy="4342320"/>
+            <a:ext cx="6216480" cy="4341960"/>
           </a:xfrm>
           <a:prstGeom prst="roundRect">
             <a:avLst>
@@ -13842,7 +13952,7 @@
         <p:spPr>
           <a:xfrm>
             <a:off x="5806440" y="1965960"/>
-            <a:ext cx="5576760" cy="3793680"/>
+            <a:ext cx="5576400" cy="3793320"/>
           </a:xfrm>
           <a:prstGeom prst="rect">
             <a:avLst/>
@@ -14083,7 +14193,7 @@
         <p:spPr>
           <a:xfrm>
             <a:off x="457200" y="6446520"/>
-            <a:ext cx="7314120" cy="273240"/>
+            <a:ext cx="7313760" cy="272880"/>
           </a:xfrm>
           <a:prstGeom prst="rect">
             <a:avLst/>
@@ -14144,7 +14254,7 @@
         <p:spPr>
           <a:xfrm>
             <a:off x="11521440" y="6446520"/>
-            <a:ext cx="456120" cy="273240"/>
+            <a:ext cx="455760" cy="272880"/>
           </a:xfrm>
           <a:prstGeom prst="rect">
             <a:avLst/>
@@ -14242,7 +14352,7 @@
         <p:spPr>
           <a:xfrm>
             <a:off x="10515600" y="5669280"/>
-            <a:ext cx="3199320" cy="3199320"/>
+            <a:ext cx="3198960" cy="3198960"/>
           </a:xfrm>
           <a:prstGeom prst="roundRect">
             <a:avLst>
@@ -14287,7 +14397,7 @@
         <p:spPr>
           <a:xfrm>
             <a:off x="457200" y="457200"/>
-            <a:ext cx="639000" cy="639000"/>
+            <a:ext cx="638640" cy="638640"/>
           </a:xfrm>
           <a:prstGeom prst="ellipse">
             <a:avLst/>
@@ -14334,7 +14444,7 @@
         <p:spPr>
           <a:xfrm>
             <a:off x="548640" y="548640"/>
-            <a:ext cx="447120" cy="447120"/>
+            <a:ext cx="446760" cy="446760"/>
           </a:xfrm>
           <a:prstGeom prst="rect">
             <a:avLst/>
@@ -14354,7 +14464,7 @@
         <p:spPr>
           <a:xfrm>
             <a:off x="1280160" y="457200"/>
-            <a:ext cx="10423080" cy="639000"/>
+            <a:ext cx="10422720" cy="638640"/>
           </a:xfrm>
           <a:prstGeom prst="rect">
             <a:avLst/>
@@ -14415,7 +14525,7 @@
         <p:spPr>
           <a:xfrm>
             <a:off x="457200" y="1554480"/>
-            <a:ext cx="3656520" cy="4662360"/>
+            <a:ext cx="3656160" cy="4662000"/>
           </a:xfrm>
           <a:prstGeom prst="roundRect">
             <a:avLst>
@@ -14460,7 +14570,7 @@
         <p:spPr>
           <a:xfrm>
             <a:off x="1508760" y="2194560"/>
-            <a:ext cx="1553400" cy="1553400"/>
+            <a:ext cx="1553040" cy="1553040"/>
           </a:xfrm>
           <a:prstGeom prst="ellipse">
             <a:avLst/>
@@ -14507,7 +14617,7 @@
         <p:spPr>
           <a:xfrm>
             <a:off x="1746360" y="2423160"/>
-            <a:ext cx="1087200" cy="1087200"/>
+            <a:ext cx="1086840" cy="1086840"/>
           </a:xfrm>
           <a:prstGeom prst="rect">
             <a:avLst/>
@@ -14527,7 +14637,7 @@
         <p:spPr>
           <a:xfrm>
             <a:off x="640080" y="3977640"/>
-            <a:ext cx="3290760" cy="1736280"/>
+            <a:ext cx="3290400" cy="1735920"/>
           </a:xfrm>
           <a:prstGeom prst="rect">
             <a:avLst/>
@@ -14648,7 +14758,7 @@
         <p:spPr>
           <a:xfrm>
             <a:off x="4572000" y="1737360"/>
-            <a:ext cx="7131240" cy="4113720"/>
+            <a:ext cx="7130880" cy="4113360"/>
           </a:xfrm>
           <a:prstGeom prst="rect">
             <a:avLst/>
@@ -14819,7 +14929,7 @@
         <p:spPr>
           <a:xfrm>
             <a:off x="457200" y="6446520"/>
-            <a:ext cx="7314120" cy="273240"/>
+            <a:ext cx="7313760" cy="272880"/>
           </a:xfrm>
           <a:prstGeom prst="rect">
             <a:avLst/>
@@ -14880,7 +14990,7 @@
         <p:spPr>
           <a:xfrm>
             <a:off x="11521440" y="6446520"/>
-            <a:ext cx="456120" cy="273240"/>
+            <a:ext cx="455760" cy="272880"/>
           </a:xfrm>
           <a:prstGeom prst="rect">
             <a:avLst/>
@@ -14978,7 +15088,7 @@
         <p:spPr>
           <a:xfrm>
             <a:off x="-1828800" y="5029200"/>
-            <a:ext cx="3656520" cy="3656520"/>
+            <a:ext cx="3656160" cy="3656160"/>
           </a:xfrm>
           <a:prstGeom prst="ellipse">
             <a:avLst/>
@@ -15021,7 +15131,7 @@
         <p:spPr>
           <a:xfrm>
             <a:off x="457200" y="457200"/>
-            <a:ext cx="639000" cy="639000"/>
+            <a:ext cx="638640" cy="638640"/>
           </a:xfrm>
           <a:prstGeom prst="ellipse">
             <a:avLst/>
@@ -15068,7 +15178,7 @@
         <p:spPr>
           <a:xfrm>
             <a:off x="548640" y="548640"/>
-            <a:ext cx="447120" cy="447120"/>
+            <a:ext cx="446760" cy="446760"/>
           </a:xfrm>
           <a:prstGeom prst="rect">
             <a:avLst/>
@@ -15088,7 +15198,7 @@
         <p:spPr>
           <a:xfrm>
             <a:off x="1280160" y="457200"/>
-            <a:ext cx="10423080" cy="639000"/>
+            <a:ext cx="10422720" cy="638640"/>
           </a:xfrm>
           <a:prstGeom prst="rect">
             <a:avLst/>
@@ -15149,7 +15259,7 @@
         <p:spPr>
           <a:xfrm>
             <a:off x="457200" y="1600200"/>
-            <a:ext cx="11273400" cy="4479480"/>
+            <a:ext cx="11273040" cy="4479120"/>
           </a:xfrm>
           <a:prstGeom prst="roundRect">
             <a:avLst>
@@ -15194,7 +15304,7 @@
         <p:spPr>
           <a:xfrm>
             <a:off x="822960" y="1828800"/>
-            <a:ext cx="10514520" cy="456120"/>
+            <a:ext cx="10514160" cy="455760"/>
           </a:xfrm>
           <a:prstGeom prst="rect">
             <a:avLst/>
@@ -15255,7 +15365,7 @@
         <p:spPr>
           <a:xfrm>
             <a:off x="822960" y="2423160"/>
-            <a:ext cx="383040" cy="383040"/>
+            <a:ext cx="382680" cy="382680"/>
           </a:xfrm>
           <a:prstGeom prst="ellipse">
             <a:avLst/>
@@ -15298,7 +15408,7 @@
         <p:spPr>
           <a:xfrm>
             <a:off x="822960" y="2423160"/>
-            <a:ext cx="383040" cy="383040"/>
+            <a:ext cx="382680" cy="382680"/>
           </a:xfrm>
           <a:prstGeom prst="rect">
             <a:avLst/>
@@ -15359,7 +15469,7 @@
         <p:spPr>
           <a:xfrm>
             <a:off x="1435680" y="2423160"/>
-            <a:ext cx="9581760" cy="383040"/>
+            <a:ext cx="9581400" cy="382680"/>
           </a:xfrm>
           <a:prstGeom prst="rect">
             <a:avLst/>
@@ -15420,7 +15530,7 @@
         <p:spPr>
           <a:xfrm>
             <a:off x="822960" y="3300840"/>
-            <a:ext cx="383040" cy="383040"/>
+            <a:ext cx="382680" cy="382680"/>
           </a:xfrm>
           <a:prstGeom prst="ellipse">
             <a:avLst/>
@@ -15463,7 +15573,7 @@
         <p:spPr>
           <a:xfrm>
             <a:off x="822960" y="3300840"/>
-            <a:ext cx="383040" cy="383040"/>
+            <a:ext cx="382680" cy="382680"/>
           </a:xfrm>
           <a:prstGeom prst="rect">
             <a:avLst/>
@@ -15524,7 +15634,7 @@
         <p:spPr>
           <a:xfrm>
             <a:off x="1435680" y="3300840"/>
-            <a:ext cx="9581760" cy="383040"/>
+            <a:ext cx="9581400" cy="382680"/>
           </a:xfrm>
           <a:prstGeom prst="rect">
             <a:avLst/>
@@ -15585,7 +15695,7 @@
         <p:spPr>
           <a:xfrm>
             <a:off x="822960" y="4178880"/>
-            <a:ext cx="383040" cy="383040"/>
+            <a:ext cx="382680" cy="382680"/>
           </a:xfrm>
           <a:prstGeom prst="ellipse">
             <a:avLst/>
@@ -15628,7 +15738,7 @@
         <p:spPr>
           <a:xfrm>
             <a:off x="822960" y="4178880"/>
-            <a:ext cx="383040" cy="383040"/>
+            <a:ext cx="382680" cy="382680"/>
           </a:xfrm>
           <a:prstGeom prst="rect">
             <a:avLst/>
@@ -15689,7 +15799,7 @@
         <p:spPr>
           <a:xfrm>
             <a:off x="1435680" y="4178880"/>
-            <a:ext cx="9581760" cy="383040"/>
+            <a:ext cx="9581400" cy="382680"/>
           </a:xfrm>
           <a:prstGeom prst="rect">
             <a:avLst/>
@@ -15750,7 +15860,7 @@
         <p:spPr>
           <a:xfrm>
             <a:off x="822960" y="5056560"/>
-            <a:ext cx="383040" cy="383040"/>
+            <a:ext cx="382680" cy="382680"/>
           </a:xfrm>
           <a:prstGeom prst="ellipse">
             <a:avLst/>
@@ -15793,7 +15903,7 @@
         <p:spPr>
           <a:xfrm>
             <a:off x="822960" y="5056560"/>
-            <a:ext cx="383040" cy="383040"/>
+            <a:ext cx="382680" cy="382680"/>
           </a:xfrm>
           <a:prstGeom prst="rect">
             <a:avLst/>
@@ -15854,7 +15964,7 @@
         <p:spPr>
           <a:xfrm>
             <a:off x="1435680" y="5056560"/>
-            <a:ext cx="9581760" cy="383040"/>
+            <a:ext cx="9581400" cy="382680"/>
           </a:xfrm>
           <a:prstGeom prst="rect">
             <a:avLst/>
@@ -15915,7 +16025,7 @@
         <p:spPr>
           <a:xfrm>
             <a:off x="457200" y="6446520"/>
-            <a:ext cx="7314120" cy="273240"/>
+            <a:ext cx="7313760" cy="272880"/>
           </a:xfrm>
           <a:prstGeom prst="rect">
             <a:avLst/>
@@ -15976,7 +16086,7 @@
         <p:spPr>
           <a:xfrm>
             <a:off x="11521440" y="6446520"/>
-            <a:ext cx="456120" cy="273240"/>
+            <a:ext cx="455760" cy="272880"/>
           </a:xfrm>
           <a:prstGeom prst="rect">
             <a:avLst/>
@@ -16074,7 +16184,7 @@
         <p:spPr>
           <a:xfrm>
             <a:off x="-1828800" y="4114800"/>
-            <a:ext cx="5485320" cy="5485320"/>
+            <a:ext cx="5484960" cy="5484960"/>
           </a:xfrm>
           <a:prstGeom prst="ellipse">
             <a:avLst/>
@@ -16117,7 +16227,7 @@
         <p:spPr>
           <a:xfrm>
             <a:off x="9601200" y="-2286000"/>
-            <a:ext cx="5485320" cy="5485320"/>
+            <a:ext cx="5484960" cy="5484960"/>
           </a:xfrm>
           <a:prstGeom prst="ellipse">
             <a:avLst/>
@@ -16160,7 +16270,7 @@
         <p:spPr>
           <a:xfrm>
             <a:off x="5596200" y="731520"/>
-            <a:ext cx="1004760" cy="1004760"/>
+            <a:ext cx="1004400" cy="1004400"/>
           </a:xfrm>
           <a:prstGeom prst="ellipse">
             <a:avLst/>
@@ -16207,7 +16317,7 @@
         <p:spPr>
           <a:xfrm>
             <a:off x="5742360" y="877680"/>
-            <a:ext cx="703080" cy="703080"/>
+            <a:ext cx="702720" cy="702720"/>
           </a:xfrm>
           <a:prstGeom prst="rect">
             <a:avLst/>
@@ -16227,7 +16337,7 @@
         <p:spPr>
           <a:xfrm>
             <a:off x="914400" y="1965960"/>
-            <a:ext cx="10359000" cy="364680"/>
+            <a:ext cx="10358640" cy="364320"/>
           </a:xfrm>
           <a:prstGeom prst="rect">
             <a:avLst/>
@@ -16288,7 +16398,7 @@
         <p:spPr>
           <a:xfrm>
             <a:off x="914400" y="2377440"/>
-            <a:ext cx="10359000" cy="2010600"/>
+            <a:ext cx="10358640" cy="2010240"/>
           </a:xfrm>
           <a:prstGeom prst="rect">
             <a:avLst/>
@@ -16349,7 +16459,7 @@
         <p:spPr>
           <a:xfrm>
             <a:off x="1463040" y="4572000"/>
-            <a:ext cx="9261720" cy="1096200"/>
+            <a:ext cx="9261360" cy="1095840"/>
           </a:xfrm>
           <a:prstGeom prst="rect">
             <a:avLst/>
@@ -16410,7 +16520,7 @@
         <p:spPr>
           <a:xfrm>
             <a:off x="11521440" y="6446520"/>
-            <a:ext cx="456120" cy="273240"/>
+            <a:ext cx="455760" cy="272880"/>
           </a:xfrm>
           <a:prstGeom prst="rect">
             <a:avLst/>
@@ -16508,7 +16618,7 @@
         <p:spPr>
           <a:xfrm>
             <a:off x="10515600" y="5669280"/>
-            <a:ext cx="3199320" cy="3199320"/>
+            <a:ext cx="3198960" cy="3198960"/>
           </a:xfrm>
           <a:prstGeom prst="roundRect">
             <a:avLst>
@@ -16553,7 +16663,7 @@
         <p:spPr>
           <a:xfrm>
             <a:off x="457200" y="457200"/>
-            <a:ext cx="639000" cy="639000"/>
+            <a:ext cx="638640" cy="638640"/>
           </a:xfrm>
           <a:prstGeom prst="ellipse">
             <a:avLst/>
@@ -16600,7 +16710,7 @@
         <p:spPr>
           <a:xfrm>
             <a:off x="548640" y="548640"/>
-            <a:ext cx="447120" cy="447120"/>
+            <a:ext cx="446760" cy="446760"/>
           </a:xfrm>
           <a:prstGeom prst="rect">
             <a:avLst/>
@@ -16620,7 +16730,7 @@
         <p:spPr>
           <a:xfrm>
             <a:off x="1280160" y="457200"/>
-            <a:ext cx="10423080" cy="639000"/>
+            <a:ext cx="10422720" cy="638640"/>
           </a:xfrm>
           <a:prstGeom prst="rect">
             <a:avLst/>
@@ -16681,7 +16791,7 @@
         <p:spPr>
           <a:xfrm>
             <a:off x="457200" y="1554480"/>
-            <a:ext cx="3656520" cy="4662360"/>
+            <a:ext cx="3656160" cy="4662000"/>
           </a:xfrm>
           <a:prstGeom prst="roundRect">
             <a:avLst>
@@ -16726,7 +16836,7 @@
         <p:spPr>
           <a:xfrm>
             <a:off x="1508760" y="2194560"/>
-            <a:ext cx="1553400" cy="1553400"/>
+            <a:ext cx="1553040" cy="1553040"/>
           </a:xfrm>
           <a:prstGeom prst="ellipse">
             <a:avLst/>
@@ -16773,7 +16883,7 @@
         <p:spPr>
           <a:xfrm>
             <a:off x="1746360" y="2423160"/>
-            <a:ext cx="1087200" cy="1087200"/>
+            <a:ext cx="1086840" cy="1086840"/>
           </a:xfrm>
           <a:prstGeom prst="rect">
             <a:avLst/>
@@ -16793,7 +16903,7 @@
         <p:spPr>
           <a:xfrm>
             <a:off x="640080" y="3977640"/>
-            <a:ext cx="3290760" cy="1736280"/>
+            <a:ext cx="3290400" cy="1735920"/>
           </a:xfrm>
           <a:prstGeom prst="rect">
             <a:avLst/>
@@ -16914,7 +17024,7 @@
         <p:spPr>
           <a:xfrm>
             <a:off x="4572000" y="1737360"/>
-            <a:ext cx="7131240" cy="4113720"/>
+            <a:ext cx="7130880" cy="4113360"/>
           </a:xfrm>
           <a:prstGeom prst="rect">
             <a:avLst/>
@@ -17085,7 +17195,7 @@
         <p:spPr>
           <a:xfrm>
             <a:off x="457200" y="6446520"/>
-            <a:ext cx="7314120" cy="273240"/>
+            <a:ext cx="7313760" cy="272880"/>
           </a:xfrm>
           <a:prstGeom prst="rect">
             <a:avLst/>
@@ -17146,7 +17256,7 @@
         <p:spPr>
           <a:xfrm>
             <a:off x="11521440" y="6446520"/>
-            <a:ext cx="456120" cy="273240"/>
+            <a:ext cx="455760" cy="272880"/>
           </a:xfrm>
           <a:prstGeom prst="rect">
             <a:avLst/>
@@ -17244,7 +17354,7 @@
         <p:spPr>
           <a:xfrm>
             <a:off x="457200" y="457200"/>
-            <a:ext cx="639000" cy="639000"/>
+            <a:ext cx="638640" cy="638640"/>
           </a:xfrm>
           <a:prstGeom prst="ellipse">
             <a:avLst/>
@@ -17291,7 +17401,7 @@
         <p:spPr>
           <a:xfrm>
             <a:off x="548640" y="548640"/>
-            <a:ext cx="447120" cy="447120"/>
+            <a:ext cx="446760" cy="446760"/>
           </a:xfrm>
           <a:prstGeom prst="rect">
             <a:avLst/>
@@ -17311,7 +17421,7 @@
         <p:spPr>
           <a:xfrm>
             <a:off x="1280160" y="457200"/>
-            <a:ext cx="10423080" cy="639000"/>
+            <a:ext cx="10422720" cy="638640"/>
           </a:xfrm>
           <a:prstGeom prst="rect">
             <a:avLst/>
@@ -17372,7 +17482,7 @@
         <p:spPr>
           <a:xfrm>
             <a:off x="457200" y="1600200"/>
-            <a:ext cx="11273400" cy="560520"/>
+            <a:ext cx="11273040" cy="560160"/>
           </a:xfrm>
           <a:prstGeom prst="roundRect">
             <a:avLst>
@@ -17417,7 +17527,7 @@
         <p:spPr>
           <a:xfrm>
             <a:off x="685800" y="1707480"/>
-            <a:ext cx="346320" cy="346320"/>
+            <a:ext cx="345960" cy="345960"/>
           </a:xfrm>
           <a:prstGeom prst="ellipse">
             <a:avLst/>
@@ -17464,7 +17574,7 @@
         <p:spPr>
           <a:xfrm>
             <a:off x="758880" y="1780560"/>
-            <a:ext cx="200160" cy="200160"/>
+            <a:ext cx="199800" cy="199800"/>
           </a:xfrm>
           <a:prstGeom prst="rect">
             <a:avLst/>
@@ -17484,7 +17594,7 @@
         <p:spPr>
           <a:xfrm>
             <a:off x="1234440" y="1600200"/>
-            <a:ext cx="10240200" cy="560520"/>
+            <a:ext cx="10239840" cy="560160"/>
           </a:xfrm>
           <a:prstGeom prst="rect">
             <a:avLst/>
@@ -17545,7 +17655,7 @@
         <p:spPr>
           <a:xfrm>
             <a:off x="457200" y="2253240"/>
-            <a:ext cx="11273400" cy="560520"/>
+            <a:ext cx="11273040" cy="560160"/>
           </a:xfrm>
           <a:prstGeom prst="roundRect">
             <a:avLst>
@@ -17590,7 +17700,7 @@
         <p:spPr>
           <a:xfrm>
             <a:off x="685800" y="2360520"/>
-            <a:ext cx="346320" cy="346320"/>
+            <a:ext cx="345960" cy="345960"/>
           </a:xfrm>
           <a:prstGeom prst="ellipse">
             <a:avLst/>
@@ -17637,7 +17747,7 @@
         <p:spPr>
           <a:xfrm>
             <a:off x="758880" y="2433600"/>
-            <a:ext cx="200160" cy="200160"/>
+            <a:ext cx="199800" cy="199800"/>
           </a:xfrm>
           <a:prstGeom prst="rect">
             <a:avLst/>
@@ -17657,7 +17767,7 @@
         <p:spPr>
           <a:xfrm>
             <a:off x="1234440" y="2253240"/>
-            <a:ext cx="10240200" cy="560520"/>
+            <a:ext cx="10239840" cy="560160"/>
           </a:xfrm>
           <a:prstGeom prst="rect">
             <a:avLst/>
@@ -17718,7 +17828,7 @@
         <p:spPr>
           <a:xfrm>
             <a:off x="457200" y="2906640"/>
-            <a:ext cx="11273400" cy="560520"/>
+            <a:ext cx="11273040" cy="560160"/>
           </a:xfrm>
           <a:prstGeom prst="roundRect">
             <a:avLst>
@@ -17763,7 +17873,7 @@
         <p:spPr>
           <a:xfrm>
             <a:off x="685800" y="3013560"/>
-            <a:ext cx="346320" cy="346320"/>
+            <a:ext cx="345960" cy="345960"/>
           </a:xfrm>
           <a:prstGeom prst="ellipse">
             <a:avLst/>
@@ -17810,7 +17920,7 @@
         <p:spPr>
           <a:xfrm>
             <a:off x="758880" y="3086640"/>
-            <a:ext cx="200160" cy="200160"/>
+            <a:ext cx="199800" cy="199800"/>
           </a:xfrm>
           <a:prstGeom prst="rect">
             <a:avLst/>
@@ -17830,7 +17940,7 @@
         <p:spPr>
           <a:xfrm>
             <a:off x="1234440" y="2906640"/>
-            <a:ext cx="10240200" cy="560520"/>
+            <a:ext cx="10239840" cy="560160"/>
           </a:xfrm>
           <a:prstGeom prst="rect">
             <a:avLst/>
@@ -17891,7 +18001,7 @@
         <p:spPr>
           <a:xfrm>
             <a:off x="457200" y="3559680"/>
-            <a:ext cx="11273400" cy="560520"/>
+            <a:ext cx="11273040" cy="560160"/>
           </a:xfrm>
           <a:prstGeom prst="roundRect">
             <a:avLst>
@@ -17936,7 +18046,7 @@
         <p:spPr>
           <a:xfrm>
             <a:off x="685800" y="3666600"/>
-            <a:ext cx="346320" cy="346320"/>
+            <a:ext cx="345960" cy="345960"/>
           </a:xfrm>
           <a:prstGeom prst="ellipse">
             <a:avLst/>
@@ -17983,7 +18093,7 @@
         <p:spPr>
           <a:xfrm>
             <a:off x="758880" y="3740040"/>
-            <a:ext cx="200160" cy="200160"/>
+            <a:ext cx="199800" cy="199800"/>
           </a:xfrm>
           <a:prstGeom prst="rect">
             <a:avLst/>
@@ -18003,7 +18113,7 @@
         <p:spPr>
           <a:xfrm>
             <a:off x="1234440" y="3559680"/>
-            <a:ext cx="10240200" cy="560520"/>
+            <a:ext cx="10239840" cy="560160"/>
           </a:xfrm>
           <a:prstGeom prst="rect">
             <a:avLst/>
@@ -18064,7 +18174,7 @@
         <p:spPr>
           <a:xfrm>
             <a:off x="457200" y="4212720"/>
-            <a:ext cx="11273400" cy="560520"/>
+            <a:ext cx="11273040" cy="560160"/>
           </a:xfrm>
           <a:prstGeom prst="roundRect">
             <a:avLst>
@@ -18109,7 +18219,7 @@
         <p:spPr>
           <a:xfrm>
             <a:off x="685800" y="4320000"/>
-            <a:ext cx="346320" cy="346320"/>
+            <a:ext cx="345960" cy="345960"/>
           </a:xfrm>
           <a:prstGeom prst="ellipse">
             <a:avLst/>
@@ -18156,7 +18266,7 @@
         <p:spPr>
           <a:xfrm>
             <a:off x="758880" y="4393080"/>
-            <a:ext cx="200160" cy="200160"/>
+            <a:ext cx="199800" cy="199800"/>
           </a:xfrm>
           <a:prstGeom prst="rect">
             <a:avLst/>
@@ -18176,7 +18286,7 @@
         <p:spPr>
           <a:xfrm>
             <a:off x="1234440" y="4212720"/>
-            <a:ext cx="10240200" cy="560520"/>
+            <a:ext cx="10239840" cy="560160"/>
           </a:xfrm>
           <a:prstGeom prst="rect">
             <a:avLst/>
@@ -18237,7 +18347,7 @@
         <p:spPr>
           <a:xfrm>
             <a:off x="457200" y="4865760"/>
-            <a:ext cx="11273400" cy="560520"/>
+            <a:ext cx="11273040" cy="560160"/>
           </a:xfrm>
           <a:prstGeom prst="roundRect">
             <a:avLst>
@@ -18282,7 +18392,7 @@
         <p:spPr>
           <a:xfrm>
             <a:off x="685800" y="4973040"/>
-            <a:ext cx="346320" cy="346320"/>
+            <a:ext cx="345960" cy="345960"/>
           </a:xfrm>
           <a:prstGeom prst="ellipse">
             <a:avLst/>
@@ -18329,7 +18439,7 @@
         <p:spPr>
           <a:xfrm>
             <a:off x="758880" y="5046120"/>
-            <a:ext cx="200160" cy="200160"/>
+            <a:ext cx="199800" cy="199800"/>
           </a:xfrm>
           <a:prstGeom prst="rect">
             <a:avLst/>
@@ -18349,7 +18459,7 @@
         <p:spPr>
           <a:xfrm>
             <a:off x="1234440" y="4865760"/>
-            <a:ext cx="10240200" cy="560520"/>
+            <a:ext cx="10239840" cy="560160"/>
           </a:xfrm>
           <a:prstGeom prst="rect">
             <a:avLst/>
@@ -18410,7 +18520,7 @@
         <p:spPr>
           <a:xfrm>
             <a:off x="457200" y="5519160"/>
-            <a:ext cx="11273400" cy="560520"/>
+            <a:ext cx="11273040" cy="560160"/>
           </a:xfrm>
           <a:prstGeom prst="roundRect">
             <a:avLst>
@@ -18455,7 +18565,7 @@
         <p:spPr>
           <a:xfrm>
             <a:off x="685800" y="5626080"/>
-            <a:ext cx="346320" cy="346320"/>
+            <a:ext cx="345960" cy="345960"/>
           </a:xfrm>
           <a:prstGeom prst="ellipse">
             <a:avLst/>
@@ -18502,7 +18612,7 @@
         <p:spPr>
           <a:xfrm>
             <a:off x="758880" y="5699160"/>
-            <a:ext cx="200160" cy="200160"/>
+            <a:ext cx="199800" cy="199800"/>
           </a:xfrm>
           <a:prstGeom prst="rect">
             <a:avLst/>
@@ -18522,7 +18632,7 @@
         <p:spPr>
           <a:xfrm>
             <a:off x="1234440" y="5519160"/>
-            <a:ext cx="10240200" cy="560520"/>
+            <a:ext cx="10239840" cy="560160"/>
           </a:xfrm>
           <a:prstGeom prst="rect">
             <a:avLst/>
@@ -18583,7 +18693,7 @@
         <p:spPr>
           <a:xfrm>
             <a:off x="457200" y="6446520"/>
-            <a:ext cx="7314120" cy="273240"/>
+            <a:ext cx="7313760" cy="272880"/>
           </a:xfrm>
           <a:prstGeom prst="rect">
             <a:avLst/>
@@ -18644,7 +18754,7 @@
         <p:spPr>
           <a:xfrm>
             <a:off x="11521440" y="6446520"/>
-            <a:ext cx="456120" cy="273240"/>
+            <a:ext cx="455760" cy="272880"/>
           </a:xfrm>
           <a:prstGeom prst="rect">
             <a:avLst/>
@@ -18742,7 +18852,7 @@
         <p:spPr>
           <a:xfrm>
             <a:off x="457200" y="457200"/>
-            <a:ext cx="639000" cy="639000"/>
+            <a:ext cx="638640" cy="638640"/>
           </a:xfrm>
           <a:prstGeom prst="ellipse">
             <a:avLst/>
@@ -18789,7 +18899,7 @@
         <p:spPr>
           <a:xfrm>
             <a:off x="548640" y="548640"/>
-            <a:ext cx="447120" cy="447120"/>
+            <a:ext cx="446760" cy="446760"/>
           </a:xfrm>
           <a:prstGeom prst="rect">
             <a:avLst/>
@@ -18809,7 +18919,7 @@
         <p:spPr>
           <a:xfrm>
             <a:off x="1280160" y="457200"/>
-            <a:ext cx="10423080" cy="639000"/>
+            <a:ext cx="10422720" cy="638640"/>
           </a:xfrm>
           <a:prstGeom prst="rect">
             <a:avLst/>
@@ -18870,7 +18980,7 @@
         <p:spPr>
           <a:xfrm>
             <a:off x="457200" y="1645920"/>
-            <a:ext cx="5348160" cy="4479480"/>
+            <a:ext cx="5347800" cy="4479120"/>
           </a:xfrm>
           <a:prstGeom prst="roundRect">
             <a:avLst>
@@ -18915,7 +19025,7 @@
         <p:spPr>
           <a:xfrm>
             <a:off x="731520" y="1874520"/>
-            <a:ext cx="456120" cy="456120"/>
+            <a:ext cx="455760" cy="455760"/>
           </a:xfrm>
           <a:prstGeom prst="ellipse">
             <a:avLst/>
@@ -18962,7 +19072,7 @@
         <p:spPr>
           <a:xfrm>
             <a:off x="804600" y="1938600"/>
-            <a:ext cx="318960" cy="318960"/>
+            <a:ext cx="318600" cy="318600"/>
           </a:xfrm>
           <a:prstGeom prst="rect">
             <a:avLst/>
@@ -18982,7 +19092,7 @@
         <p:spPr>
           <a:xfrm>
             <a:off x="1325880" y="1874520"/>
-            <a:ext cx="4342320" cy="456120"/>
+            <a:ext cx="4341960" cy="455760"/>
           </a:xfrm>
           <a:prstGeom prst="rect">
             <a:avLst/>
@@ -19043,7 +19153,7 @@
         <p:spPr>
           <a:xfrm>
             <a:off x="731520" y="2514600"/>
-            <a:ext cx="4799520" cy="3382200"/>
+            <a:ext cx="4799160" cy="3381840"/>
           </a:xfrm>
           <a:prstGeom prst="rect">
             <a:avLst/>
@@ -19214,7 +19324,7 @@
         <p:spPr>
           <a:xfrm>
             <a:off x="6172200" y="1645920"/>
-            <a:ext cx="5348160" cy="4479480"/>
+            <a:ext cx="5347800" cy="4479120"/>
           </a:xfrm>
           <a:prstGeom prst="roundRect">
             <a:avLst>
@@ -19259,7 +19369,7 @@
         <p:spPr>
           <a:xfrm>
             <a:off x="6446520" y="1874520"/>
-            <a:ext cx="456120" cy="456120"/>
+            <a:ext cx="455760" cy="455760"/>
           </a:xfrm>
           <a:prstGeom prst="ellipse">
             <a:avLst/>
@@ -19306,7 +19416,7 @@
         <p:spPr>
           <a:xfrm>
             <a:off x="6519600" y="1938600"/>
-            <a:ext cx="318960" cy="318960"/>
+            <a:ext cx="318600" cy="318600"/>
           </a:xfrm>
           <a:prstGeom prst="rect">
             <a:avLst/>
@@ -19326,7 +19436,7 @@
         <p:spPr>
           <a:xfrm>
             <a:off x="7040880" y="1874520"/>
-            <a:ext cx="4342320" cy="456120"/>
+            <a:ext cx="4341960" cy="455760"/>
           </a:xfrm>
           <a:prstGeom prst="rect">
             <a:avLst/>
@@ -19387,7 +19497,7 @@
         <p:spPr>
           <a:xfrm>
             <a:off x="6446520" y="2514600"/>
-            <a:ext cx="4799520" cy="3382200"/>
+            <a:ext cx="4799160" cy="3381840"/>
           </a:xfrm>
           <a:prstGeom prst="rect">
             <a:avLst/>
@@ -19558,7 +19668,7 @@
         <p:spPr>
           <a:xfrm>
             <a:off x="457200" y="6446520"/>
-            <a:ext cx="7314120" cy="273240"/>
+            <a:ext cx="7313760" cy="272880"/>
           </a:xfrm>
           <a:prstGeom prst="rect">
             <a:avLst/>
@@ -19619,7 +19729,7 @@
         <p:spPr>
           <a:xfrm>
             <a:off x="11521440" y="6446520"/>
-            <a:ext cx="456120" cy="273240"/>
+            <a:ext cx="455760" cy="272880"/>
           </a:xfrm>
           <a:prstGeom prst="rect">
             <a:avLst/>
@@ -19717,7 +19827,7 @@
         <p:spPr>
           <a:xfrm>
             <a:off x="457200" y="457200"/>
-            <a:ext cx="639000" cy="639000"/>
+            <a:ext cx="638640" cy="638640"/>
           </a:xfrm>
           <a:prstGeom prst="ellipse">
             <a:avLst/>
@@ -19764,7 +19874,7 @@
         <p:spPr>
           <a:xfrm>
             <a:off x="548640" y="548640"/>
-            <a:ext cx="447120" cy="447120"/>
+            <a:ext cx="446760" cy="446760"/>
           </a:xfrm>
           <a:prstGeom prst="rect">
             <a:avLst/>
@@ -19784,7 +19894,7 @@
         <p:spPr>
           <a:xfrm>
             <a:off x="1280160" y="457200"/>
-            <a:ext cx="10423080" cy="639000"/>
+            <a:ext cx="10422720" cy="638640"/>
           </a:xfrm>
           <a:prstGeom prst="rect">
             <a:avLst/>
@@ -19845,7 +19955,7 @@
         <p:spPr>
           <a:xfrm>
             <a:off x="548640" y="1828800"/>
-            <a:ext cx="4753800" cy="4022280"/>
+            <a:ext cx="4753440" cy="4021920"/>
           </a:xfrm>
           <a:prstGeom prst="rect">
             <a:avLst/>
@@ -19981,7 +20091,7 @@
         <p:spPr>
           <a:xfrm>
             <a:off x="5486400" y="1691640"/>
-            <a:ext cx="6216840" cy="4342320"/>
+            <a:ext cx="6216480" cy="4341960"/>
           </a:xfrm>
           <a:prstGeom prst="roundRect">
             <a:avLst>
@@ -20026,7 +20136,7 @@
         <p:spPr>
           <a:xfrm>
             <a:off x="5806440" y="1965960"/>
-            <a:ext cx="5576760" cy="3793680"/>
+            <a:ext cx="5576400" cy="3793320"/>
           </a:xfrm>
           <a:prstGeom prst="rect">
             <a:avLst/>
@@ -20381,7 +20491,7 @@
         <p:spPr>
           <a:xfrm>
             <a:off x="457200" y="6446520"/>
-            <a:ext cx="7314120" cy="273240"/>
+            <a:ext cx="7313760" cy="272880"/>
           </a:xfrm>
           <a:prstGeom prst="rect">
             <a:avLst/>
@@ -20442,7 +20552,7 @@
         <p:spPr>
           <a:xfrm>
             <a:off x="11521440" y="6446520"/>
-            <a:ext cx="456120" cy="273240"/>
+            <a:ext cx="455760" cy="272880"/>
           </a:xfrm>
           <a:prstGeom prst="rect">
             <a:avLst/>
@@ -20540,7 +20650,7 @@
         <p:spPr>
           <a:xfrm>
             <a:off x="457200" y="457200"/>
-            <a:ext cx="639000" cy="639000"/>
+            <a:ext cx="638640" cy="638640"/>
           </a:xfrm>
           <a:prstGeom prst="ellipse">
             <a:avLst/>
@@ -20587,7 +20697,7 @@
         <p:spPr>
           <a:xfrm>
             <a:off x="548640" y="548640"/>
-            <a:ext cx="447120" cy="447120"/>
+            <a:ext cx="446760" cy="446760"/>
           </a:xfrm>
           <a:prstGeom prst="rect">
             <a:avLst/>
@@ -20607,7 +20717,7 @@
         <p:spPr>
           <a:xfrm>
             <a:off x="1280160" y="457200"/>
-            <a:ext cx="10423080" cy="639000"/>
+            <a:ext cx="10422720" cy="638640"/>
           </a:xfrm>
           <a:prstGeom prst="rect">
             <a:avLst/>
@@ -20668,7 +20778,7 @@
         <p:spPr>
           <a:xfrm>
             <a:off x="1097280" y="1691640"/>
-            <a:ext cx="9993240" cy="712080"/>
+            <a:ext cx="9992880" cy="711720"/>
           </a:xfrm>
           <a:prstGeom prst="roundRect">
             <a:avLst>
@@ -20713,7 +20823,7 @@
         <p:spPr>
           <a:xfrm>
             <a:off x="1325880" y="1691640"/>
-            <a:ext cx="9536040" cy="712080"/>
+            <a:ext cx="9535680" cy="711720"/>
           </a:xfrm>
           <a:prstGeom prst="rect">
             <a:avLst/>
@@ -20774,7 +20884,7 @@
         <p:spPr>
           <a:xfrm>
             <a:off x="1417320" y="2514600"/>
-            <a:ext cx="9673200" cy="712080"/>
+            <a:ext cx="9672840" cy="711720"/>
           </a:xfrm>
           <a:prstGeom prst="roundRect">
             <a:avLst>
@@ -20819,7 +20929,7 @@
         <p:spPr>
           <a:xfrm>
             <a:off x="1645920" y="2514600"/>
-            <a:ext cx="9216000" cy="712080"/>
+            <a:ext cx="9215640" cy="711720"/>
           </a:xfrm>
           <a:prstGeom prst="rect">
             <a:avLst/>
@@ -20880,7 +20990,7 @@
         <p:spPr>
           <a:xfrm>
             <a:off x="1737360" y="3337560"/>
-            <a:ext cx="9353160" cy="712080"/>
+            <a:ext cx="9352800" cy="711720"/>
           </a:xfrm>
           <a:prstGeom prst="roundRect">
             <a:avLst>
@@ -20925,7 +21035,7 @@
         <p:spPr>
           <a:xfrm>
             <a:off x="1965960" y="3337560"/>
-            <a:ext cx="8895960" cy="712080"/>
+            <a:ext cx="8895600" cy="711720"/>
           </a:xfrm>
           <a:prstGeom prst="rect">
             <a:avLst/>
@@ -20986,7 +21096,7 @@
         <p:spPr>
           <a:xfrm>
             <a:off x="2057400" y="4160520"/>
-            <a:ext cx="9033120" cy="712080"/>
+            <a:ext cx="9032760" cy="711720"/>
           </a:xfrm>
           <a:prstGeom prst="roundRect">
             <a:avLst>
@@ -21031,7 +21141,7 @@
         <p:spPr>
           <a:xfrm>
             <a:off x="2286000" y="4160520"/>
-            <a:ext cx="8575920" cy="712080"/>
+            <a:ext cx="8575560" cy="711720"/>
           </a:xfrm>
           <a:prstGeom prst="rect">
             <a:avLst/>
@@ -21092,7 +21202,7 @@
         <p:spPr>
           <a:xfrm>
             <a:off x="2377440" y="4983480"/>
-            <a:ext cx="8713080" cy="712080"/>
+            <a:ext cx="8712720" cy="711720"/>
           </a:xfrm>
           <a:prstGeom prst="roundRect">
             <a:avLst>
@@ -21137,7 +21247,7 @@
         <p:spPr>
           <a:xfrm>
             <a:off x="2606040" y="4983480"/>
-            <a:ext cx="8255880" cy="712080"/>
+            <a:ext cx="8255520" cy="711720"/>
           </a:xfrm>
           <a:prstGeom prst="rect">
             <a:avLst/>
@@ -21198,7 +21308,7 @@
         <p:spPr>
           <a:xfrm>
             <a:off x="1097280" y="5852160"/>
-            <a:ext cx="9993240" cy="456120"/>
+            <a:ext cx="9992880" cy="455760"/>
           </a:xfrm>
           <a:prstGeom prst="rect">
             <a:avLst/>
@@ -21259,7 +21369,7 @@
         <p:spPr>
           <a:xfrm>
             <a:off x="457200" y="6446520"/>
-            <a:ext cx="7314120" cy="273240"/>
+            <a:ext cx="7313760" cy="272880"/>
           </a:xfrm>
           <a:prstGeom prst="rect">
             <a:avLst/>
@@ -21320,7 +21430,7 @@
         <p:spPr>
           <a:xfrm>
             <a:off x="11521440" y="6446520"/>
-            <a:ext cx="456120" cy="273240"/>
+            <a:ext cx="455760" cy="272880"/>
           </a:xfrm>
           <a:prstGeom prst="rect">
             <a:avLst/>
@@ -21418,7 +21528,7 @@
         <p:spPr>
           <a:xfrm>
             <a:off x="457200" y="457200"/>
-            <a:ext cx="639000" cy="639000"/>
+            <a:ext cx="638640" cy="638640"/>
           </a:xfrm>
           <a:prstGeom prst="ellipse">
             <a:avLst/>
@@ -21465,7 +21575,7 @@
         <p:spPr>
           <a:xfrm>
             <a:off x="548640" y="548640"/>
-            <a:ext cx="447120" cy="447120"/>
+            <a:ext cx="446760" cy="446760"/>
           </a:xfrm>
           <a:prstGeom prst="rect">
             <a:avLst/>
@@ -21485,7 +21595,7 @@
         <p:spPr>
           <a:xfrm>
             <a:off x="1280160" y="457200"/>
-            <a:ext cx="10423080" cy="639000"/>
+            <a:ext cx="10422720" cy="638640"/>
           </a:xfrm>
           <a:prstGeom prst="rect">
             <a:avLst/>
@@ -21546,7 +21656,7 @@
         <p:spPr>
           <a:xfrm>
             <a:off x="548640" y="1828800"/>
-            <a:ext cx="4753800" cy="4022280"/>
+            <a:ext cx="4753440" cy="4021920"/>
           </a:xfrm>
           <a:prstGeom prst="rect">
             <a:avLst/>
@@ -21682,7 +21792,7 @@
         <p:spPr>
           <a:xfrm>
             <a:off x="5486400" y="1691640"/>
-            <a:ext cx="6216840" cy="4342320"/>
+            <a:ext cx="6216480" cy="4341960"/>
           </a:xfrm>
           <a:prstGeom prst="roundRect">
             <a:avLst>
@@ -21727,7 +21837,7 @@
         <p:spPr>
           <a:xfrm>
             <a:off x="5806440" y="1965960"/>
-            <a:ext cx="5576760" cy="3793680"/>
+            <a:ext cx="5576400" cy="3793320"/>
           </a:xfrm>
           <a:prstGeom prst="rect">
             <a:avLst/>
@@ -22034,7 +22144,7 @@
         <p:spPr>
           <a:xfrm>
             <a:off x="457200" y="6446520"/>
-            <a:ext cx="7314120" cy="273240"/>
+            <a:ext cx="7313760" cy="272880"/>
           </a:xfrm>
           <a:prstGeom prst="rect">
             <a:avLst/>
@@ -22095,7 +22205,7 @@
         <p:spPr>
           <a:xfrm>
             <a:off x="11521440" y="6446520"/>
-            <a:ext cx="456120" cy="273240"/>
+            <a:ext cx="455760" cy="272880"/>
           </a:xfrm>
           <a:prstGeom prst="rect">
             <a:avLst/>
@@ -22193,7 +22303,7 @@
         <p:spPr>
           <a:xfrm>
             <a:off x="10515600" y="5669280"/>
-            <a:ext cx="3199320" cy="3199320"/>
+            <a:ext cx="3198960" cy="3198960"/>
           </a:xfrm>
           <a:prstGeom prst="roundRect">
             <a:avLst>
@@ -22238,7 +22348,7 @@
         <p:spPr>
           <a:xfrm>
             <a:off x="457200" y="457200"/>
-            <a:ext cx="639000" cy="639000"/>
+            <a:ext cx="638640" cy="638640"/>
           </a:xfrm>
           <a:prstGeom prst="ellipse">
             <a:avLst/>
@@ -22285,7 +22395,7 @@
         <p:spPr>
           <a:xfrm>
             <a:off x="548640" y="548640"/>
-            <a:ext cx="447120" cy="447120"/>
+            <a:ext cx="446760" cy="446760"/>
           </a:xfrm>
           <a:prstGeom prst="rect">
             <a:avLst/>
@@ -22305,7 +22415,7 @@
         <p:spPr>
           <a:xfrm>
             <a:off x="1280160" y="457200"/>
-            <a:ext cx="10423080" cy="639000"/>
+            <a:ext cx="10422720" cy="638640"/>
           </a:xfrm>
           <a:prstGeom prst="rect">
             <a:avLst/>
@@ -22366,7 +22476,7 @@
         <p:spPr>
           <a:xfrm>
             <a:off x="457200" y="1554480"/>
-            <a:ext cx="3656520" cy="4662360"/>
+            <a:ext cx="3656160" cy="4662000"/>
           </a:xfrm>
           <a:prstGeom prst="roundRect">
             <a:avLst>
@@ -22411,7 +22521,7 @@
         <p:spPr>
           <a:xfrm>
             <a:off x="1508760" y="2194560"/>
-            <a:ext cx="1553400" cy="1553400"/>
+            <a:ext cx="1553040" cy="1553040"/>
           </a:xfrm>
           <a:prstGeom prst="ellipse">
             <a:avLst/>
@@ -22458,7 +22568,7 @@
         <p:spPr>
           <a:xfrm>
             <a:off x="1746360" y="2423160"/>
-            <a:ext cx="1087200" cy="1087200"/>
+            <a:ext cx="1086840" cy="1086840"/>
           </a:xfrm>
           <a:prstGeom prst="rect">
             <a:avLst/>
@@ -22478,7 +22588,7 @@
         <p:spPr>
           <a:xfrm>
             <a:off x="640080" y="3977640"/>
-            <a:ext cx="3290760" cy="1736280"/>
+            <a:ext cx="3290400" cy="1735920"/>
           </a:xfrm>
           <a:prstGeom prst="rect">
             <a:avLst/>
@@ -22599,7 +22709,7 @@
         <p:spPr>
           <a:xfrm>
             <a:off x="4572000" y="1737360"/>
-            <a:ext cx="7131240" cy="4113720"/>
+            <a:ext cx="7130880" cy="4113360"/>
           </a:xfrm>
           <a:prstGeom prst="rect">
             <a:avLst/>
@@ -22770,7 +22880,7 @@
         <p:spPr>
           <a:xfrm>
             <a:off x="457200" y="6446520"/>
-            <a:ext cx="7314120" cy="273240"/>
+            <a:ext cx="7313760" cy="272880"/>
           </a:xfrm>
           <a:prstGeom prst="rect">
             <a:avLst/>
@@ -22831,7 +22941,7 @@
         <p:spPr>
           <a:xfrm>
             <a:off x="11521440" y="6446520"/>
-            <a:ext cx="456120" cy="273240"/>
+            <a:ext cx="455760" cy="272880"/>
           </a:xfrm>
           <a:prstGeom prst="rect">
             <a:avLst/>
@@ -22929,7 +23039,7 @@
         <p:spPr>
           <a:xfrm>
             <a:off x="457200" y="457200"/>
-            <a:ext cx="639000" cy="639000"/>
+            <a:ext cx="638640" cy="638640"/>
           </a:xfrm>
           <a:prstGeom prst="ellipse">
             <a:avLst/>
@@ -22976,7 +23086,7 @@
         <p:spPr>
           <a:xfrm>
             <a:off x="548640" y="548640"/>
-            <a:ext cx="447120" cy="447120"/>
+            <a:ext cx="446760" cy="446760"/>
           </a:xfrm>
           <a:prstGeom prst="rect">
             <a:avLst/>
@@ -22996,7 +23106,7 @@
         <p:spPr>
           <a:xfrm>
             <a:off x="1280160" y="457200"/>
-            <a:ext cx="10423080" cy="639000"/>
+            <a:ext cx="10422720" cy="638640"/>
           </a:xfrm>
           <a:prstGeom prst="rect">
             <a:avLst/>
@@ -23057,7 +23167,7 @@
         <p:spPr>
           <a:xfrm>
             <a:off x="457200" y="1645920"/>
-            <a:ext cx="5348160" cy="4479480"/>
+            <a:ext cx="5347800" cy="4479120"/>
           </a:xfrm>
           <a:prstGeom prst="roundRect">
             <a:avLst>
@@ -23102,7 +23212,7 @@
         <p:spPr>
           <a:xfrm>
             <a:off x="731520" y="1874520"/>
-            <a:ext cx="456120" cy="456120"/>
+            <a:ext cx="455760" cy="455760"/>
           </a:xfrm>
           <a:prstGeom prst="ellipse">
             <a:avLst/>
@@ -23149,7 +23259,7 @@
         <p:spPr>
           <a:xfrm>
             <a:off x="804600" y="1938600"/>
-            <a:ext cx="318960" cy="318960"/>
+            <a:ext cx="318600" cy="318600"/>
           </a:xfrm>
           <a:prstGeom prst="rect">
             <a:avLst/>
@@ -23169,7 +23279,7 @@
         <p:spPr>
           <a:xfrm>
             <a:off x="1325880" y="1874520"/>
-            <a:ext cx="4342320" cy="456120"/>
+            <a:ext cx="4341960" cy="455760"/>
           </a:xfrm>
           <a:prstGeom prst="rect">
             <a:avLst/>
@@ -23230,7 +23340,7 @@
         <p:spPr>
           <a:xfrm>
             <a:off x="731520" y="2514600"/>
-            <a:ext cx="4799520" cy="3382200"/>
+            <a:ext cx="4799160" cy="3381840"/>
           </a:xfrm>
           <a:prstGeom prst="rect">
             <a:avLst/>
@@ -23366,7 +23476,7 @@
         <p:spPr>
           <a:xfrm>
             <a:off x="6172200" y="1645920"/>
-            <a:ext cx="5348160" cy="4479480"/>
+            <a:ext cx="5347800" cy="4479120"/>
           </a:xfrm>
           <a:prstGeom prst="roundRect">
             <a:avLst>
@@ -23411,7 +23521,7 @@
         <p:spPr>
           <a:xfrm>
             <a:off x="6446520" y="1874520"/>
-            <a:ext cx="456120" cy="456120"/>
+            <a:ext cx="455760" cy="455760"/>
           </a:xfrm>
           <a:prstGeom prst="ellipse">
             <a:avLst/>
@@ -23458,7 +23568,7 @@
         <p:spPr>
           <a:xfrm>
             <a:off x="6519600" y="1938600"/>
-            <a:ext cx="318960" cy="318960"/>
+            <a:ext cx="318600" cy="318600"/>
           </a:xfrm>
           <a:prstGeom prst="rect">
             <a:avLst/>
@@ -23478,7 +23588,7 @@
         <p:spPr>
           <a:xfrm>
             <a:off x="7040880" y="1874520"/>
-            <a:ext cx="4342320" cy="456120"/>
+            <a:ext cx="4341960" cy="455760"/>
           </a:xfrm>
           <a:prstGeom prst="rect">
             <a:avLst/>
@@ -23539,7 +23649,7 @@
         <p:spPr>
           <a:xfrm>
             <a:off x="6446520" y="2514600"/>
-            <a:ext cx="4799520" cy="3382200"/>
+            <a:ext cx="4799160" cy="3381840"/>
           </a:xfrm>
           <a:prstGeom prst="rect">
             <a:avLst/>
@@ -23675,7 +23785,7 @@
         <p:spPr>
           <a:xfrm>
             <a:off x="457200" y="6446520"/>
-            <a:ext cx="7314120" cy="273240"/>
+            <a:ext cx="7313760" cy="272880"/>
           </a:xfrm>
           <a:prstGeom prst="rect">
             <a:avLst/>
@@ -23736,7 +23846,7 @@
         <p:spPr>
           <a:xfrm>
             <a:off x="11521440" y="6446520"/>
-            <a:ext cx="456120" cy="273240"/>
+            <a:ext cx="455760" cy="272880"/>
           </a:xfrm>
           <a:prstGeom prst="rect">
             <a:avLst/>
@@ -23834,7 +23944,7 @@
         <p:spPr>
           <a:xfrm>
             <a:off x="457200" y="457200"/>
-            <a:ext cx="639000" cy="639000"/>
+            <a:ext cx="638640" cy="638640"/>
           </a:xfrm>
           <a:prstGeom prst="ellipse">
             <a:avLst/>
@@ -23881,7 +23991,7 @@
         <p:spPr>
           <a:xfrm>
             <a:off x="548640" y="548640"/>
-            <a:ext cx="447120" cy="447120"/>
+            <a:ext cx="446760" cy="446760"/>
           </a:xfrm>
           <a:prstGeom prst="rect">
             <a:avLst/>
@@ -23901,7 +24011,7 @@
         <p:spPr>
           <a:xfrm>
             <a:off x="1280160" y="457200"/>
-            <a:ext cx="10423080" cy="639000"/>
+            <a:ext cx="10422720" cy="638640"/>
           </a:xfrm>
           <a:prstGeom prst="rect">
             <a:avLst/>
@@ -23962,7 +24072,7 @@
         <p:spPr>
           <a:xfrm>
             <a:off x="548640" y="1828800"/>
-            <a:ext cx="4753800" cy="4022280"/>
+            <a:ext cx="4753440" cy="4021920"/>
           </a:xfrm>
           <a:prstGeom prst="rect">
             <a:avLst/>
@@ -24098,7 +24208,7 @@
         <p:spPr>
           <a:xfrm>
             <a:off x="5486400" y="1691640"/>
-            <a:ext cx="6216840" cy="4342320"/>
+            <a:ext cx="6216480" cy="4341960"/>
           </a:xfrm>
           <a:prstGeom prst="roundRect">
             <a:avLst>
@@ -24143,7 +24253,7 @@
         <p:spPr>
           <a:xfrm>
             <a:off x="5806440" y="1965960"/>
-            <a:ext cx="5576760" cy="3793680"/>
+            <a:ext cx="5576400" cy="3793320"/>
           </a:xfrm>
           <a:prstGeom prst="rect">
             <a:avLst/>
@@ -24516,7 +24626,7 @@
         <p:spPr>
           <a:xfrm>
             <a:off x="457200" y="6446520"/>
-            <a:ext cx="7314120" cy="273240"/>
+            <a:ext cx="7313760" cy="272880"/>
           </a:xfrm>
           <a:prstGeom prst="rect">
             <a:avLst/>
@@ -24577,7 +24687,7 @@
         <p:spPr>
           <a:xfrm>
             <a:off x="11521440" y="6446520"/>
-            <a:ext cx="456120" cy="273240"/>
+            <a:ext cx="455760" cy="272880"/>
           </a:xfrm>
           <a:prstGeom prst="rect">
             <a:avLst/>
@@ -24675,7 +24785,7 @@
         <p:spPr>
           <a:xfrm>
             <a:off x="-1828800" y="5029200"/>
-            <a:ext cx="3656520" cy="3656520"/>
+            <a:ext cx="3656160" cy="3656160"/>
           </a:xfrm>
           <a:prstGeom prst="ellipse">
             <a:avLst/>
@@ -24718,7 +24828,7 @@
         <p:spPr>
           <a:xfrm>
             <a:off x="457200" y="457200"/>
-            <a:ext cx="639000" cy="639000"/>
+            <a:ext cx="638640" cy="638640"/>
           </a:xfrm>
           <a:prstGeom prst="ellipse">
             <a:avLst/>
@@ -24765,7 +24875,7 @@
         <p:spPr>
           <a:xfrm>
             <a:off x="548640" y="548640"/>
-            <a:ext cx="447120" cy="447120"/>
+            <a:ext cx="446760" cy="446760"/>
           </a:xfrm>
           <a:prstGeom prst="rect">
             <a:avLst/>
@@ -24785,7 +24895,7 @@
         <p:spPr>
           <a:xfrm>
             <a:off x="1280160" y="457200"/>
-            <a:ext cx="10423080" cy="639000"/>
+            <a:ext cx="10422720" cy="638640"/>
           </a:xfrm>
           <a:prstGeom prst="rect">
             <a:avLst/>
@@ -24846,7 +24956,7 @@
         <p:spPr>
           <a:xfrm>
             <a:off x="457200" y="1600200"/>
-            <a:ext cx="11273400" cy="4479480"/>
+            <a:ext cx="11273040" cy="4479120"/>
           </a:xfrm>
           <a:prstGeom prst="roundRect">
             <a:avLst>
@@ -24891,7 +25001,7 @@
         <p:spPr>
           <a:xfrm>
             <a:off x="822960" y="1828800"/>
-            <a:ext cx="10514520" cy="456120"/>
+            <a:ext cx="10514160" cy="455760"/>
           </a:xfrm>
           <a:prstGeom prst="rect">
             <a:avLst/>
@@ -24952,7 +25062,7 @@
         <p:spPr>
           <a:xfrm>
             <a:off x="822960" y="2423160"/>
-            <a:ext cx="383040" cy="383040"/>
+            <a:ext cx="382680" cy="382680"/>
           </a:xfrm>
           <a:prstGeom prst="ellipse">
             <a:avLst/>
@@ -24995,7 +25105,7 @@
         <p:spPr>
           <a:xfrm>
             <a:off x="822960" y="2423160"/>
-            <a:ext cx="383040" cy="383040"/>
+            <a:ext cx="382680" cy="382680"/>
           </a:xfrm>
           <a:prstGeom prst="rect">
             <a:avLst/>
@@ -25056,7 +25166,7 @@
         <p:spPr>
           <a:xfrm>
             <a:off x="1435680" y="2423160"/>
-            <a:ext cx="9581760" cy="383040"/>
+            <a:ext cx="9581400" cy="382680"/>
           </a:xfrm>
           <a:prstGeom prst="rect">
             <a:avLst/>
@@ -25117,7 +25227,7 @@
         <p:spPr>
           <a:xfrm>
             <a:off x="822960" y="3300840"/>
-            <a:ext cx="383040" cy="383040"/>
+            <a:ext cx="382680" cy="382680"/>
           </a:xfrm>
           <a:prstGeom prst="ellipse">
             <a:avLst/>
@@ -25160,7 +25270,7 @@
         <p:spPr>
           <a:xfrm>
             <a:off x="822960" y="3300840"/>
-            <a:ext cx="383040" cy="383040"/>
+            <a:ext cx="382680" cy="382680"/>
           </a:xfrm>
           <a:prstGeom prst="rect">
             <a:avLst/>
@@ -25221,7 +25331,7 @@
         <p:spPr>
           <a:xfrm>
             <a:off x="1435680" y="3300840"/>
-            <a:ext cx="9581760" cy="383040"/>
+            <a:ext cx="9581400" cy="382680"/>
           </a:xfrm>
           <a:prstGeom prst="rect">
             <a:avLst/>
@@ -25282,7 +25392,7 @@
         <p:spPr>
           <a:xfrm>
             <a:off x="822960" y="4178880"/>
-            <a:ext cx="383040" cy="383040"/>
+            <a:ext cx="382680" cy="382680"/>
           </a:xfrm>
           <a:prstGeom prst="ellipse">
             <a:avLst/>
@@ -25325,7 +25435,7 @@
         <p:spPr>
           <a:xfrm>
             <a:off x="822960" y="4178880"/>
-            <a:ext cx="383040" cy="383040"/>
+            <a:ext cx="382680" cy="382680"/>
           </a:xfrm>
           <a:prstGeom prst="rect">
             <a:avLst/>
@@ -25386,7 +25496,7 @@
         <p:spPr>
           <a:xfrm>
             <a:off x="1435680" y="4178880"/>
-            <a:ext cx="9581760" cy="383040"/>
+            <a:ext cx="9581400" cy="382680"/>
           </a:xfrm>
           <a:prstGeom prst="rect">
             <a:avLst/>
@@ -25447,7 +25557,7 @@
         <p:spPr>
           <a:xfrm>
             <a:off x="822960" y="5056560"/>
-            <a:ext cx="383040" cy="383040"/>
+            <a:ext cx="382680" cy="382680"/>
           </a:xfrm>
           <a:prstGeom prst="ellipse">
             <a:avLst/>
@@ -25490,7 +25600,7 @@
         <p:spPr>
           <a:xfrm>
             <a:off x="822960" y="5056560"/>
-            <a:ext cx="383040" cy="383040"/>
+            <a:ext cx="382680" cy="382680"/>
           </a:xfrm>
           <a:prstGeom prst="rect">
             <a:avLst/>
@@ -25551,7 +25661,7 @@
         <p:spPr>
           <a:xfrm>
             <a:off x="1435680" y="5056560"/>
-            <a:ext cx="9581760" cy="383040"/>
+            <a:ext cx="9581400" cy="382680"/>
           </a:xfrm>
           <a:prstGeom prst="rect">
             <a:avLst/>
@@ -25612,7 +25722,7 @@
         <p:spPr>
           <a:xfrm>
             <a:off x="457200" y="6446520"/>
-            <a:ext cx="7314120" cy="273240"/>
+            <a:ext cx="7313760" cy="272880"/>
           </a:xfrm>
           <a:prstGeom prst="rect">
             <a:avLst/>
@@ -25673,7 +25783,7 @@
         <p:spPr>
           <a:xfrm>
             <a:off x="11521440" y="6446520"/>
-            <a:ext cx="456120" cy="273240"/>
+            <a:ext cx="455760" cy="272880"/>
           </a:xfrm>
           <a:prstGeom prst="rect">
             <a:avLst/>
@@ -25771,7 +25881,7 @@
         <p:spPr>
           <a:xfrm>
             <a:off x="-1828800" y="4114800"/>
-            <a:ext cx="5485320" cy="5485320"/>
+            <a:ext cx="5484960" cy="5484960"/>
           </a:xfrm>
           <a:prstGeom prst="ellipse">
             <a:avLst/>
@@ -25814,7 +25924,7 @@
         <p:spPr>
           <a:xfrm>
             <a:off x="9601200" y="-2286000"/>
-            <a:ext cx="5485320" cy="5485320"/>
+            <a:ext cx="5484960" cy="5484960"/>
           </a:xfrm>
           <a:prstGeom prst="ellipse">
             <a:avLst/>
@@ -25857,7 +25967,7 @@
         <p:spPr>
           <a:xfrm>
             <a:off x="5596200" y="731520"/>
-            <a:ext cx="1004760" cy="1004760"/>
+            <a:ext cx="1004400" cy="1004400"/>
           </a:xfrm>
           <a:prstGeom prst="ellipse">
             <a:avLst/>
@@ -25904,7 +26014,7 @@
         <p:spPr>
           <a:xfrm>
             <a:off x="5742360" y="877680"/>
-            <a:ext cx="703080" cy="703080"/>
+            <a:ext cx="702720" cy="702720"/>
           </a:xfrm>
           <a:prstGeom prst="rect">
             <a:avLst/>
@@ -25924,7 +26034,7 @@
         <p:spPr>
           <a:xfrm>
             <a:off x="914400" y="1965960"/>
-            <a:ext cx="10359000" cy="364680"/>
+            <a:ext cx="10358640" cy="364320"/>
           </a:xfrm>
           <a:prstGeom prst="rect">
             <a:avLst/>
@@ -25985,7 +26095,7 @@
         <p:spPr>
           <a:xfrm>
             <a:off x="914400" y="2377440"/>
-            <a:ext cx="10359000" cy="2010600"/>
+            <a:ext cx="10358640" cy="2010240"/>
           </a:xfrm>
           <a:prstGeom prst="rect">
             <a:avLst/>
@@ -26046,7 +26156,7 @@
         <p:spPr>
           <a:xfrm>
             <a:off x="1463040" y="4572000"/>
-            <a:ext cx="9261720" cy="1096200"/>
+            <a:ext cx="9261360" cy="1095840"/>
           </a:xfrm>
           <a:prstGeom prst="rect">
             <a:avLst/>
@@ -26107,7 +26217,7 @@
         <p:spPr>
           <a:xfrm>
             <a:off x="11521440" y="6446520"/>
-            <a:ext cx="456120" cy="273240"/>
+            <a:ext cx="455760" cy="272880"/>
           </a:xfrm>
           <a:prstGeom prst="rect">
             <a:avLst/>
@@ -26205,7 +26315,7 @@
         <p:spPr>
           <a:xfrm>
             <a:off x="10515600" y="5669280"/>
-            <a:ext cx="3199320" cy="3199320"/>
+            <a:ext cx="3198960" cy="3198960"/>
           </a:xfrm>
           <a:prstGeom prst="roundRect">
             <a:avLst>
@@ -26250,7 +26360,7 @@
         <p:spPr>
           <a:xfrm>
             <a:off x="457200" y="457200"/>
-            <a:ext cx="639000" cy="639000"/>
+            <a:ext cx="638640" cy="638640"/>
           </a:xfrm>
           <a:prstGeom prst="ellipse">
             <a:avLst/>
@@ -26297,7 +26407,7 @@
         <p:spPr>
           <a:xfrm>
             <a:off x="548640" y="548640"/>
-            <a:ext cx="447120" cy="447120"/>
+            <a:ext cx="446760" cy="446760"/>
           </a:xfrm>
           <a:prstGeom prst="rect">
             <a:avLst/>
@@ -26317,7 +26427,7 @@
         <p:spPr>
           <a:xfrm>
             <a:off x="1280160" y="457200"/>
-            <a:ext cx="10423080" cy="639000"/>
+            <a:ext cx="10422720" cy="638640"/>
           </a:xfrm>
           <a:prstGeom prst="rect">
             <a:avLst/>
@@ -26378,7 +26488,7 @@
         <p:spPr>
           <a:xfrm>
             <a:off x="457200" y="1554480"/>
-            <a:ext cx="3656520" cy="4662360"/>
+            <a:ext cx="3656160" cy="4662000"/>
           </a:xfrm>
           <a:prstGeom prst="roundRect">
             <a:avLst>
@@ -26423,7 +26533,7 @@
         <p:spPr>
           <a:xfrm>
             <a:off x="1508760" y="2194560"/>
-            <a:ext cx="1553400" cy="1553400"/>
+            <a:ext cx="1553040" cy="1553040"/>
           </a:xfrm>
           <a:prstGeom prst="ellipse">
             <a:avLst/>
@@ -26470,7 +26580,7 @@
         <p:spPr>
           <a:xfrm>
             <a:off x="1746360" y="2423160"/>
-            <a:ext cx="1087200" cy="1087200"/>
+            <a:ext cx="1086840" cy="1086840"/>
           </a:xfrm>
           <a:prstGeom prst="rect">
             <a:avLst/>
@@ -26490,7 +26600,7 @@
         <p:spPr>
           <a:xfrm>
             <a:off x="640080" y="3977640"/>
-            <a:ext cx="3290760" cy="1736280"/>
+            <a:ext cx="3290400" cy="1735920"/>
           </a:xfrm>
           <a:prstGeom prst="rect">
             <a:avLst/>
@@ -26611,7 +26721,7 @@
         <p:spPr>
           <a:xfrm>
             <a:off x="4572000" y="1737360"/>
-            <a:ext cx="7131240" cy="4113720"/>
+            <a:ext cx="7130880" cy="4113360"/>
           </a:xfrm>
           <a:prstGeom prst="rect">
             <a:avLst/>
@@ -26782,7 +26892,7 @@
         <p:spPr>
           <a:xfrm>
             <a:off x="457200" y="6446520"/>
-            <a:ext cx="7314120" cy="273240"/>
+            <a:ext cx="7313760" cy="272880"/>
           </a:xfrm>
           <a:prstGeom prst="rect">
             <a:avLst/>
@@ -26843,7 +26953,7 @@
         <p:spPr>
           <a:xfrm>
             <a:off x="11521440" y="6446520"/>
-            <a:ext cx="456120" cy="273240"/>
+            <a:ext cx="455760" cy="272880"/>
           </a:xfrm>
           <a:prstGeom prst="rect">
             <a:avLst/>
@@ -26941,7 +27051,7 @@
         <p:spPr>
           <a:xfrm>
             <a:off x="-1828800" y="4114800"/>
-            <a:ext cx="5485320" cy="5485320"/>
+            <a:ext cx="5484960" cy="5484960"/>
           </a:xfrm>
           <a:prstGeom prst="ellipse">
             <a:avLst/>
@@ -26984,7 +27094,7 @@
         <p:spPr>
           <a:xfrm>
             <a:off x="9601200" y="-2286000"/>
-            <a:ext cx="5485320" cy="5485320"/>
+            <a:ext cx="5484960" cy="5484960"/>
           </a:xfrm>
           <a:prstGeom prst="ellipse">
             <a:avLst/>
@@ -27027,7 +27137,7 @@
         <p:spPr>
           <a:xfrm>
             <a:off x="5596200" y="731520"/>
-            <a:ext cx="1004760" cy="1004760"/>
+            <a:ext cx="1004400" cy="1004400"/>
           </a:xfrm>
           <a:prstGeom prst="ellipse">
             <a:avLst/>
@@ -27074,7 +27184,7 @@
         <p:spPr>
           <a:xfrm>
             <a:off x="5742360" y="877680"/>
-            <a:ext cx="703080" cy="703080"/>
+            <a:ext cx="702720" cy="702720"/>
           </a:xfrm>
           <a:prstGeom prst="rect">
             <a:avLst/>
@@ -27094,7 +27204,7 @@
         <p:spPr>
           <a:xfrm>
             <a:off x="914400" y="1965960"/>
-            <a:ext cx="10359000" cy="364680"/>
+            <a:ext cx="10358640" cy="364320"/>
           </a:xfrm>
           <a:prstGeom prst="rect">
             <a:avLst/>
@@ -27155,7 +27265,7 @@
         <p:spPr>
           <a:xfrm>
             <a:off x="914400" y="2377440"/>
-            <a:ext cx="10359000" cy="2010600"/>
+            <a:ext cx="10358640" cy="2010240"/>
           </a:xfrm>
           <a:prstGeom prst="rect">
             <a:avLst/>
@@ -27216,7 +27326,7 @@
         <p:spPr>
           <a:xfrm>
             <a:off x="1463040" y="4572000"/>
-            <a:ext cx="9261720" cy="1096200"/>
+            <a:ext cx="9261360" cy="1095840"/>
           </a:xfrm>
           <a:prstGeom prst="rect">
             <a:avLst/>
@@ -27277,7 +27387,7 @@
         <p:spPr>
           <a:xfrm>
             <a:off x="11521440" y="6446520"/>
-            <a:ext cx="456120" cy="273240"/>
+            <a:ext cx="455760" cy="272880"/>
           </a:xfrm>
           <a:prstGeom prst="rect">
             <a:avLst/>
@@ -27375,7 +27485,7 @@
         <p:spPr>
           <a:xfrm>
             <a:off x="457200" y="457200"/>
-            <a:ext cx="639000" cy="639000"/>
+            <a:ext cx="638640" cy="638640"/>
           </a:xfrm>
           <a:prstGeom prst="ellipse">
             <a:avLst/>
@@ -27422,7 +27532,7 @@
         <p:spPr>
           <a:xfrm>
             <a:off x="548640" y="548640"/>
-            <a:ext cx="447120" cy="447120"/>
+            <a:ext cx="446760" cy="446760"/>
           </a:xfrm>
           <a:prstGeom prst="rect">
             <a:avLst/>
@@ -27442,7 +27552,7 @@
         <p:spPr>
           <a:xfrm>
             <a:off x="1280160" y="457200"/>
-            <a:ext cx="10423080" cy="639000"/>
+            <a:ext cx="10422720" cy="638640"/>
           </a:xfrm>
           <a:prstGeom prst="rect">
             <a:avLst/>
@@ -27503,7 +27613,7 @@
         <p:spPr>
           <a:xfrm>
             <a:off x="914400" y="1737360"/>
-            <a:ext cx="10359000" cy="4205160"/>
+            <a:ext cx="10358640" cy="4204800"/>
           </a:xfrm>
           <a:prstGeom prst="roundRect">
             <a:avLst>
@@ -27551,7 +27661,7 @@
         <p:spPr>
           <a:xfrm>
             <a:off x="1188720" y="1920240"/>
-            <a:ext cx="9783000" cy="364680"/>
+            <a:ext cx="9782640" cy="364320"/>
           </a:xfrm>
           <a:prstGeom prst="rect">
             <a:avLst/>
@@ -27612,7 +27722,7 @@
         <p:spPr>
           <a:xfrm>
             <a:off x="1188720" y="2377440"/>
-            <a:ext cx="9783000" cy="364680"/>
+            <a:ext cx="9782640" cy="364320"/>
           </a:xfrm>
           <a:prstGeom prst="rect">
             <a:avLst/>
@@ -27673,7 +27783,7 @@
         <p:spPr>
           <a:xfrm>
             <a:off x="1463040" y="2926080"/>
-            <a:ext cx="9261720" cy="2650680"/>
+            <a:ext cx="9261360" cy="2650320"/>
           </a:xfrm>
           <a:prstGeom prst="roundRect">
             <a:avLst>
@@ -27718,7 +27828,7 @@
         <p:spPr>
           <a:xfrm>
             <a:off x="1737360" y="3108960"/>
-            <a:ext cx="8685720" cy="364680"/>
+            <a:ext cx="8685360" cy="364320"/>
           </a:xfrm>
           <a:prstGeom prst="rect">
             <a:avLst/>
@@ -27779,7 +27889,7 @@
         <p:spPr>
           <a:xfrm>
             <a:off x="1737360" y="3520440"/>
-            <a:ext cx="8685720" cy="364680"/>
+            <a:ext cx="8685360" cy="364320"/>
           </a:xfrm>
           <a:prstGeom prst="rect">
             <a:avLst/>
@@ -27840,7 +27950,7 @@
         <p:spPr>
           <a:xfrm>
             <a:off x="1737360" y="4023360"/>
-            <a:ext cx="8685720" cy="456120"/>
+            <a:ext cx="8685360" cy="455760"/>
           </a:xfrm>
           <a:prstGeom prst="rect">
             <a:avLst/>
@@ -27901,7 +28011,7 @@
         <p:spPr>
           <a:xfrm>
             <a:off x="1737360" y="4709160"/>
-            <a:ext cx="8594280" cy="776160"/>
+            <a:ext cx="8593920" cy="775800"/>
           </a:xfrm>
           <a:prstGeom prst="rect">
             <a:avLst/>
@@ -27962,7 +28072,7 @@
         <p:spPr>
           <a:xfrm>
             <a:off x="457200" y="6446520"/>
-            <a:ext cx="7314120" cy="273240"/>
+            <a:ext cx="7313760" cy="272880"/>
           </a:xfrm>
           <a:prstGeom prst="rect">
             <a:avLst/>
@@ -28023,7 +28133,7 @@
         <p:spPr>
           <a:xfrm>
             <a:off x="11521440" y="6446520"/>
-            <a:ext cx="456120" cy="273240"/>
+            <a:ext cx="455760" cy="272880"/>
           </a:xfrm>
           <a:prstGeom prst="rect">
             <a:avLst/>
@@ -28121,7 +28231,7 @@
         <p:spPr>
           <a:xfrm>
             <a:off x="457200" y="457200"/>
-            <a:ext cx="639000" cy="639000"/>
+            <a:ext cx="638640" cy="638640"/>
           </a:xfrm>
           <a:prstGeom prst="ellipse">
             <a:avLst/>
@@ -28168,7 +28278,7 @@
         <p:spPr>
           <a:xfrm>
             <a:off x="548640" y="548640"/>
-            <a:ext cx="447120" cy="447120"/>
+            <a:ext cx="446760" cy="446760"/>
           </a:xfrm>
           <a:prstGeom prst="rect">
             <a:avLst/>
@@ -28188,7 +28298,7 @@
         <p:spPr>
           <a:xfrm>
             <a:off x="1280160" y="457200"/>
-            <a:ext cx="10423080" cy="639000"/>
+            <a:ext cx="10422720" cy="638640"/>
           </a:xfrm>
           <a:prstGeom prst="rect">
             <a:avLst/>
@@ -28249,7 +28359,7 @@
         <p:spPr>
           <a:xfrm>
             <a:off x="548640" y="1936800"/>
-            <a:ext cx="4753800" cy="4022280"/>
+            <a:ext cx="4753440" cy="4021920"/>
           </a:xfrm>
           <a:prstGeom prst="rect">
             <a:avLst/>
@@ -28385,7 +28495,7 @@
         <p:spPr>
           <a:xfrm>
             <a:off x="5486400" y="1691640"/>
-            <a:ext cx="6216840" cy="4342320"/>
+            <a:ext cx="6216480" cy="4341960"/>
           </a:xfrm>
           <a:prstGeom prst="roundRect">
             <a:avLst>
@@ -28430,7 +28540,7 @@
         <p:spPr>
           <a:xfrm>
             <a:off x="5806440" y="1965960"/>
-            <a:ext cx="5576760" cy="3793680"/>
+            <a:ext cx="5576400" cy="3793320"/>
           </a:xfrm>
           <a:prstGeom prst="rect">
             <a:avLst/>
@@ -28797,7 +28907,7 @@
         <p:spPr>
           <a:xfrm>
             <a:off x="457200" y="6446520"/>
-            <a:ext cx="7314120" cy="273240"/>
+            <a:ext cx="7313760" cy="272880"/>
           </a:xfrm>
           <a:prstGeom prst="rect">
             <a:avLst/>
@@ -28858,7 +28968,7 @@
         <p:spPr>
           <a:xfrm>
             <a:off x="11521440" y="6446520"/>
-            <a:ext cx="456120" cy="273240"/>
+            <a:ext cx="455760" cy="272880"/>
           </a:xfrm>
           <a:prstGeom prst="rect">
             <a:avLst/>
@@ -28956,7 +29066,7 @@
         <p:spPr>
           <a:xfrm>
             <a:off x="457200" y="457200"/>
-            <a:ext cx="639000" cy="639000"/>
+            <a:ext cx="638640" cy="638640"/>
           </a:xfrm>
           <a:prstGeom prst="ellipse">
             <a:avLst/>
@@ -29003,7 +29113,7 @@
         <p:spPr>
           <a:xfrm>
             <a:off x="548640" y="548640"/>
-            <a:ext cx="447120" cy="447120"/>
+            <a:ext cx="446760" cy="446760"/>
           </a:xfrm>
           <a:prstGeom prst="rect">
             <a:avLst/>
@@ -29023,7 +29133,7 @@
         <p:spPr>
           <a:xfrm>
             <a:off x="1280160" y="457200"/>
-            <a:ext cx="10423080" cy="639000"/>
+            <a:ext cx="10422720" cy="638640"/>
           </a:xfrm>
           <a:prstGeom prst="rect">
             <a:avLst/>
@@ -29084,7 +29194,7 @@
         <p:spPr>
           <a:xfrm>
             <a:off x="548640" y="1828800"/>
-            <a:ext cx="4753800" cy="4022280"/>
+            <a:ext cx="4753440" cy="4021920"/>
           </a:xfrm>
           <a:prstGeom prst="rect">
             <a:avLst/>
@@ -29128,19 +29238,7 @@
                 <a:latin typeface="Calibri"/>
                 <a:ea typeface="Calibri"/>
               </a:rPr>
-              <a:t>By default, an inner function can read an outer variable, but assigning to it </a:t>
-            </a:r>
-            <a:r>
-              <a:rPr lang="en-US" sz="2000" b="0" u="none" strike="noStrike">
-                <a:solidFill>
-                  <a:srgbClr val="1B2420"/>
-                </a:solidFill>
-                <a:effectLst/>
-                <a:uFillTx/>
-                <a:latin typeface="Calibri"/>
-                <a:ea typeface="Calibri"/>
-              </a:rPr>
-              <a:t>creates a new local variable instead</a:t>
+              <a:t>By default, an inner function can read an outer variable, but assigning to it creates a new local variable instead</a:t>
             </a:r>
             <a:endParaRPr lang="en-US" sz="2000" b="0" u="none" strike="noStrike">
               <a:solidFill>
@@ -29175,19 +29273,7 @@
                 <a:latin typeface="Calibri"/>
                 <a:ea typeface="Calibri"/>
               </a:rPr>
-              <a:t>nonlocal tells Python: "this name refers to the enclosing function’s variable, not a </a:t>
-            </a:r>
-            <a:r>
-              <a:rPr lang="en-US" sz="2000" b="0" u="none" strike="noStrike">
-                <a:solidFill>
-                  <a:srgbClr val="1B2420"/>
-                </a:solidFill>
-                <a:effectLst/>
-                <a:uFillTx/>
-                <a:latin typeface="Calibri"/>
-                <a:ea typeface="Calibri"/>
-              </a:rPr>
-              <a:t>new local one"</a:t>
+              <a:t>nonlocal tells Python: "this name refers to the enclosing function’s variable, not a new local one"</a:t>
             </a:r>
             <a:endParaRPr lang="en-US" sz="2000" b="0" u="none" strike="noStrike">
               <a:solidFill>
@@ -29222,19 +29308,7 @@
                 <a:latin typeface="Calibri"/>
                 <a:ea typeface="Calibri"/>
               </a:rPr>
-              <a:t>This is how a closure keeps running state between calls — like a counter that </a:t>
-            </a:r>
-            <a:r>
-              <a:rPr lang="en-US" sz="2000" b="0" u="none" strike="noStrike">
-                <a:solidFill>
-                  <a:srgbClr val="1B2420"/>
-                </a:solidFill>
-                <a:effectLst/>
-                <a:uFillTx/>
-                <a:latin typeface="Calibri"/>
-                <a:ea typeface="Calibri"/>
-              </a:rPr>
-              <a:t>remembers its own count</a:t>
+              <a:t>This is how a closure keeps running state between calls — like a counter that remembers its own count</a:t>
             </a:r>
             <a:endParaRPr lang="en-US" sz="2000" b="0" u="none" strike="noStrike">
               <a:solidFill>
@@ -29256,7 +29330,7 @@
         <p:spPr>
           <a:xfrm>
             <a:off x="5486400" y="1691640"/>
-            <a:ext cx="6216840" cy="4342320"/>
+            <a:ext cx="6216480" cy="4341960"/>
           </a:xfrm>
           <a:prstGeom prst="roundRect">
             <a:avLst>
@@ -29301,7 +29375,7 @@
         <p:spPr>
           <a:xfrm>
             <a:off x="5806440" y="1965960"/>
-            <a:ext cx="5576760" cy="3793680"/>
+            <a:ext cx="5576400" cy="3793320"/>
           </a:xfrm>
           <a:prstGeom prst="rect">
             <a:avLst/>
@@ -29728,7 +29802,7 @@
         <p:spPr>
           <a:xfrm>
             <a:off x="457200" y="6446520"/>
-            <a:ext cx="7314120" cy="273240"/>
+            <a:ext cx="7313760" cy="272880"/>
           </a:xfrm>
           <a:prstGeom prst="rect">
             <a:avLst/>
@@ -29789,7 +29863,7 @@
         <p:spPr>
           <a:xfrm>
             <a:off x="11521440" y="6446520"/>
-            <a:ext cx="456120" cy="273240"/>
+            <a:ext cx="455760" cy="272880"/>
           </a:xfrm>
           <a:prstGeom prst="rect">
             <a:avLst/>
@@ -29887,7 +29961,7 @@
         <p:spPr>
           <a:xfrm>
             <a:off x="-1828800" y="5029200"/>
-            <a:ext cx="3656520" cy="3656520"/>
+            <a:ext cx="3656160" cy="3656160"/>
           </a:xfrm>
           <a:prstGeom prst="ellipse">
             <a:avLst/>
@@ -29930,7 +30004,7 @@
         <p:spPr>
           <a:xfrm>
             <a:off x="457200" y="457200"/>
-            <a:ext cx="639000" cy="639000"/>
+            <a:ext cx="638640" cy="638640"/>
           </a:xfrm>
           <a:prstGeom prst="ellipse">
             <a:avLst/>
@@ -29977,7 +30051,7 @@
         <p:spPr>
           <a:xfrm>
             <a:off x="548640" y="548640"/>
-            <a:ext cx="447120" cy="447120"/>
+            <a:ext cx="446760" cy="446760"/>
           </a:xfrm>
           <a:prstGeom prst="rect">
             <a:avLst/>
@@ -29997,7 +30071,7 @@
         <p:spPr>
           <a:xfrm>
             <a:off x="1280160" y="457200"/>
-            <a:ext cx="10423080" cy="639000"/>
+            <a:ext cx="10422720" cy="638640"/>
           </a:xfrm>
           <a:prstGeom prst="rect">
             <a:avLst/>
@@ -30058,7 +30132,7 @@
         <p:spPr>
           <a:xfrm>
             <a:off x="457200" y="1600200"/>
-            <a:ext cx="11273400" cy="4479480"/>
+            <a:ext cx="11273040" cy="4479120"/>
           </a:xfrm>
           <a:prstGeom prst="roundRect">
             <a:avLst>
@@ -30103,7 +30177,7 @@
         <p:spPr>
           <a:xfrm>
             <a:off x="822960" y="1828800"/>
-            <a:ext cx="10514520" cy="456120"/>
+            <a:ext cx="10514160" cy="455760"/>
           </a:xfrm>
           <a:prstGeom prst="rect">
             <a:avLst/>
@@ -30164,7 +30238,7 @@
         <p:spPr>
           <a:xfrm>
             <a:off x="822960" y="2423160"/>
-            <a:ext cx="383040" cy="383040"/>
+            <a:ext cx="382680" cy="382680"/>
           </a:xfrm>
           <a:prstGeom prst="ellipse">
             <a:avLst/>
@@ -30207,7 +30281,7 @@
         <p:spPr>
           <a:xfrm>
             <a:off x="822960" y="2423160"/>
-            <a:ext cx="383040" cy="383040"/>
+            <a:ext cx="382680" cy="382680"/>
           </a:xfrm>
           <a:prstGeom prst="rect">
             <a:avLst/>
@@ -30268,7 +30342,7 @@
         <p:spPr>
           <a:xfrm>
             <a:off x="1435680" y="2423160"/>
-            <a:ext cx="9581760" cy="383040"/>
+            <a:ext cx="9581400" cy="382680"/>
           </a:xfrm>
           <a:prstGeom prst="rect">
             <a:avLst/>
@@ -30329,7 +30403,7 @@
         <p:spPr>
           <a:xfrm>
             <a:off x="822960" y="3300840"/>
-            <a:ext cx="383040" cy="383040"/>
+            <a:ext cx="382680" cy="382680"/>
           </a:xfrm>
           <a:prstGeom prst="ellipse">
             <a:avLst/>
@@ -30372,7 +30446,7 @@
         <p:spPr>
           <a:xfrm>
             <a:off x="822960" y="3300840"/>
-            <a:ext cx="383040" cy="383040"/>
+            <a:ext cx="382680" cy="382680"/>
           </a:xfrm>
           <a:prstGeom prst="rect">
             <a:avLst/>
@@ -30433,7 +30507,7 @@
         <p:spPr>
           <a:xfrm>
             <a:off x="1435680" y="3300840"/>
-            <a:ext cx="9581760" cy="383040"/>
+            <a:ext cx="9581400" cy="382680"/>
           </a:xfrm>
           <a:prstGeom prst="rect">
             <a:avLst/>
@@ -30494,7 +30568,7 @@
         <p:spPr>
           <a:xfrm>
             <a:off x="822960" y="4178880"/>
-            <a:ext cx="383040" cy="383040"/>
+            <a:ext cx="382680" cy="382680"/>
           </a:xfrm>
           <a:prstGeom prst="ellipse">
             <a:avLst/>
@@ -30537,7 +30611,7 @@
         <p:spPr>
           <a:xfrm>
             <a:off x="822960" y="4178880"/>
-            <a:ext cx="383040" cy="383040"/>
+            <a:ext cx="382680" cy="382680"/>
           </a:xfrm>
           <a:prstGeom prst="rect">
             <a:avLst/>
@@ -30598,7 +30672,7 @@
         <p:spPr>
           <a:xfrm>
             <a:off x="1435680" y="4178880"/>
-            <a:ext cx="9581760" cy="383040"/>
+            <a:ext cx="9581400" cy="382680"/>
           </a:xfrm>
           <a:prstGeom prst="rect">
             <a:avLst/>
@@ -30659,7 +30733,7 @@
         <p:spPr>
           <a:xfrm>
             <a:off x="457200" y="6446520"/>
-            <a:ext cx="7314120" cy="273240"/>
+            <a:ext cx="7313760" cy="272880"/>
           </a:xfrm>
           <a:prstGeom prst="rect">
             <a:avLst/>
@@ -30720,7 +30794,7 @@
         <p:spPr>
           <a:xfrm>
             <a:off x="11521440" y="6446520"/>
-            <a:ext cx="456120" cy="273240"/>
+            <a:ext cx="455760" cy="272880"/>
           </a:xfrm>
           <a:prstGeom prst="rect">
             <a:avLst/>
@@ -30818,7 +30892,7 @@
         <p:spPr>
           <a:xfrm>
             <a:off x="-1828800" y="4114800"/>
-            <a:ext cx="5485320" cy="5485320"/>
+            <a:ext cx="5484960" cy="5484960"/>
           </a:xfrm>
           <a:prstGeom prst="ellipse">
             <a:avLst/>
@@ -30861,7 +30935,7 @@
         <p:spPr>
           <a:xfrm>
             <a:off x="9601200" y="-2286000"/>
-            <a:ext cx="5485320" cy="5485320"/>
+            <a:ext cx="5484960" cy="5484960"/>
           </a:xfrm>
           <a:prstGeom prst="ellipse">
             <a:avLst/>
@@ -30904,7 +30978,7 @@
         <p:spPr>
           <a:xfrm>
             <a:off x="5596200" y="731520"/>
-            <a:ext cx="1004760" cy="1004760"/>
+            <a:ext cx="1004400" cy="1004400"/>
           </a:xfrm>
           <a:prstGeom prst="ellipse">
             <a:avLst/>
@@ -30951,7 +31025,7 @@
         <p:spPr>
           <a:xfrm>
             <a:off x="5742360" y="877680"/>
-            <a:ext cx="703080" cy="703080"/>
+            <a:ext cx="702720" cy="702720"/>
           </a:xfrm>
           <a:prstGeom prst="rect">
             <a:avLst/>
@@ -30971,7 +31045,7 @@
         <p:spPr>
           <a:xfrm>
             <a:off x="914400" y="1965960"/>
-            <a:ext cx="10359000" cy="364680"/>
+            <a:ext cx="10358640" cy="364320"/>
           </a:xfrm>
           <a:prstGeom prst="rect">
             <a:avLst/>
@@ -31032,7 +31106,7 @@
         <p:spPr>
           <a:xfrm>
             <a:off x="914400" y="2377440"/>
-            <a:ext cx="10359000" cy="2010600"/>
+            <a:ext cx="10358640" cy="2010240"/>
           </a:xfrm>
           <a:prstGeom prst="rect">
             <a:avLst/>
@@ -31093,7 +31167,7 @@
         <p:spPr>
           <a:xfrm>
             <a:off x="1463040" y="4572000"/>
-            <a:ext cx="9261720" cy="1096200"/>
+            <a:ext cx="9261360" cy="1095840"/>
           </a:xfrm>
           <a:prstGeom prst="rect">
             <a:avLst/>
@@ -31154,7 +31228,7 @@
         <p:spPr>
           <a:xfrm>
             <a:off x="11521440" y="6446520"/>
-            <a:ext cx="456120" cy="273240"/>
+            <a:ext cx="455760" cy="272880"/>
           </a:xfrm>
           <a:prstGeom prst="rect">
             <a:avLst/>
@@ -31252,7 +31326,7 @@
         <p:spPr>
           <a:xfrm>
             <a:off x="10515600" y="5669280"/>
-            <a:ext cx="3199320" cy="3199320"/>
+            <a:ext cx="3198960" cy="3198960"/>
           </a:xfrm>
           <a:prstGeom prst="roundRect">
             <a:avLst>
@@ -31297,7 +31371,7 @@
         <p:spPr>
           <a:xfrm>
             <a:off x="457200" y="457200"/>
-            <a:ext cx="639000" cy="639000"/>
+            <a:ext cx="638640" cy="638640"/>
           </a:xfrm>
           <a:prstGeom prst="ellipse">
             <a:avLst/>
@@ -31344,7 +31418,7 @@
         <p:spPr>
           <a:xfrm>
             <a:off x="548640" y="548640"/>
-            <a:ext cx="447120" cy="447120"/>
+            <a:ext cx="446760" cy="446760"/>
           </a:xfrm>
           <a:prstGeom prst="rect">
             <a:avLst/>
@@ -31364,7 +31438,7 @@
         <p:spPr>
           <a:xfrm>
             <a:off x="1280160" y="457200"/>
-            <a:ext cx="10423080" cy="639000"/>
+            <a:ext cx="10422720" cy="638640"/>
           </a:xfrm>
           <a:prstGeom prst="rect">
             <a:avLst/>
@@ -31425,7 +31499,7 @@
         <p:spPr>
           <a:xfrm>
             <a:off x="457200" y="1554480"/>
-            <a:ext cx="3656520" cy="4662360"/>
+            <a:ext cx="3656160" cy="4662000"/>
           </a:xfrm>
           <a:prstGeom prst="roundRect">
             <a:avLst>
@@ -31470,7 +31544,7 @@
         <p:spPr>
           <a:xfrm>
             <a:off x="1508760" y="2194560"/>
-            <a:ext cx="1553400" cy="1553400"/>
+            <a:ext cx="1553040" cy="1553040"/>
           </a:xfrm>
           <a:prstGeom prst="ellipse">
             <a:avLst/>
@@ -31517,7 +31591,7 @@
         <p:spPr>
           <a:xfrm>
             <a:off x="1746360" y="2423160"/>
-            <a:ext cx="1087200" cy="1087200"/>
+            <a:ext cx="1086840" cy="1086840"/>
           </a:xfrm>
           <a:prstGeom prst="rect">
             <a:avLst/>
@@ -31537,7 +31611,7 @@
         <p:spPr>
           <a:xfrm>
             <a:off x="640080" y="3977640"/>
-            <a:ext cx="3290760" cy="1736280"/>
+            <a:ext cx="3290400" cy="1735920"/>
           </a:xfrm>
           <a:prstGeom prst="rect">
             <a:avLst/>
@@ -31658,7 +31732,7 @@
         <p:spPr>
           <a:xfrm>
             <a:off x="4572000" y="1737360"/>
-            <a:ext cx="7131240" cy="4113720"/>
+            <a:ext cx="7130880" cy="4113360"/>
           </a:xfrm>
           <a:prstGeom prst="rect">
             <a:avLst/>
@@ -31829,7 +31903,7 @@
         <p:spPr>
           <a:xfrm>
             <a:off x="457200" y="6446520"/>
-            <a:ext cx="7314120" cy="273240"/>
+            <a:ext cx="7313760" cy="272880"/>
           </a:xfrm>
           <a:prstGeom prst="rect">
             <a:avLst/>
@@ -31890,7 +31964,7 @@
         <p:spPr>
           <a:xfrm>
             <a:off x="11521440" y="6446520"/>
-            <a:ext cx="456120" cy="273240"/>
+            <a:ext cx="455760" cy="272880"/>
           </a:xfrm>
           <a:prstGeom prst="rect">
             <a:avLst/>
@@ -31988,7 +32062,7 @@
         <p:spPr>
           <a:xfrm>
             <a:off x="457200" y="457200"/>
-            <a:ext cx="639000" cy="639000"/>
+            <a:ext cx="638640" cy="638640"/>
           </a:xfrm>
           <a:prstGeom prst="ellipse">
             <a:avLst/>
@@ -32035,7 +32109,7 @@
         <p:spPr>
           <a:xfrm>
             <a:off x="548640" y="548640"/>
-            <a:ext cx="447120" cy="447120"/>
+            <a:ext cx="446760" cy="446760"/>
           </a:xfrm>
           <a:prstGeom prst="rect">
             <a:avLst/>
@@ -32055,7 +32129,7 @@
         <p:spPr>
           <a:xfrm>
             <a:off x="1280160" y="457200"/>
-            <a:ext cx="10423080" cy="639000"/>
+            <a:ext cx="10422720" cy="638640"/>
           </a:xfrm>
           <a:prstGeom prst="rect">
             <a:avLst/>
@@ -32116,7 +32190,7 @@
         <p:spPr>
           <a:xfrm>
             <a:off x="1188720" y="1783080"/>
-            <a:ext cx="9810360" cy="4022280"/>
+            <a:ext cx="9810000" cy="4021920"/>
           </a:xfrm>
           <a:prstGeom prst="roundRect">
             <a:avLst>
@@ -32161,7 +32235,7 @@
         <p:spPr>
           <a:xfrm>
             <a:off x="1463040" y="1965960"/>
-            <a:ext cx="9325800" cy="364680"/>
+            <a:ext cx="9325440" cy="364320"/>
           </a:xfrm>
           <a:prstGeom prst="rect">
             <a:avLst/>
@@ -32222,7 +32296,7 @@
         <p:spPr>
           <a:xfrm>
             <a:off x="1463040" y="2468880"/>
-            <a:ext cx="9261720" cy="593280"/>
+            <a:ext cx="9261360" cy="592920"/>
           </a:xfrm>
           <a:prstGeom prst="roundRect">
             <a:avLst>
@@ -32267,7 +32341,7 @@
         <p:spPr>
           <a:xfrm>
             <a:off x="1737360" y="2468880"/>
-            <a:ext cx="8685720" cy="593280"/>
+            <a:ext cx="8685360" cy="592920"/>
           </a:xfrm>
           <a:prstGeom prst="rect">
             <a:avLst/>
@@ -32328,7 +32402,7 @@
         <p:spPr>
           <a:xfrm>
             <a:off x="1828800" y="3246120"/>
-            <a:ext cx="8530200" cy="1004760"/>
+            <a:ext cx="8529840" cy="1004400"/>
           </a:xfrm>
           <a:prstGeom prst="roundRect">
             <a:avLst>
@@ -32376,7 +32450,7 @@
         <p:spPr>
           <a:xfrm>
             <a:off x="2103120" y="3246120"/>
-            <a:ext cx="7954200" cy="1004760"/>
+            <a:ext cx="7953840" cy="1004400"/>
           </a:xfrm>
           <a:prstGeom prst="rect">
             <a:avLst/>
@@ -32437,7 +32511,7 @@
         <p:spPr>
           <a:xfrm>
             <a:off x="1463040" y="4434840"/>
-            <a:ext cx="9261720" cy="593280"/>
+            <a:ext cx="9261360" cy="592920"/>
           </a:xfrm>
           <a:prstGeom prst="roundRect">
             <a:avLst>
@@ -32482,7 +32556,7 @@
         <p:spPr>
           <a:xfrm>
             <a:off x="1737360" y="4434840"/>
-            <a:ext cx="8685720" cy="593280"/>
+            <a:ext cx="8685360" cy="592920"/>
           </a:xfrm>
           <a:prstGeom prst="rect">
             <a:avLst/>
@@ -32543,7 +32617,7 @@
         <p:spPr>
           <a:xfrm>
             <a:off x="1463040" y="5166360"/>
-            <a:ext cx="9261720" cy="547560"/>
+            <a:ext cx="9261360" cy="547200"/>
           </a:xfrm>
           <a:prstGeom prst="rect">
             <a:avLst/>
@@ -32604,7 +32678,7 @@
         <p:spPr>
           <a:xfrm>
             <a:off x="457200" y="6446520"/>
-            <a:ext cx="7314120" cy="273240"/>
+            <a:ext cx="7313760" cy="272880"/>
           </a:xfrm>
           <a:prstGeom prst="rect">
             <a:avLst/>
@@ -32665,7 +32739,7 @@
         <p:spPr>
           <a:xfrm>
             <a:off x="11521440" y="6446520"/>
-            <a:ext cx="456120" cy="273240"/>
+            <a:ext cx="455760" cy="272880"/>
           </a:xfrm>
           <a:prstGeom prst="rect">
             <a:avLst/>
@@ -32763,7 +32837,7 @@
         <p:spPr>
           <a:xfrm>
             <a:off x="457200" y="457200"/>
-            <a:ext cx="639000" cy="639000"/>
+            <a:ext cx="638640" cy="638640"/>
           </a:xfrm>
           <a:prstGeom prst="ellipse">
             <a:avLst/>
@@ -32810,7 +32884,7 @@
         <p:spPr>
           <a:xfrm>
             <a:off x="548640" y="548640"/>
-            <a:ext cx="447120" cy="447120"/>
+            <a:ext cx="446760" cy="446760"/>
           </a:xfrm>
           <a:prstGeom prst="rect">
             <a:avLst/>
@@ -32830,7 +32904,7 @@
         <p:spPr>
           <a:xfrm>
             <a:off x="1280160" y="457200"/>
-            <a:ext cx="10423080" cy="639000"/>
+            <a:ext cx="10422720" cy="638640"/>
           </a:xfrm>
           <a:prstGeom prst="rect">
             <a:avLst/>
@@ -32891,7 +32965,7 @@
         <p:spPr>
           <a:xfrm>
             <a:off x="548640" y="1828800"/>
-            <a:ext cx="4753800" cy="4022280"/>
+            <a:ext cx="4753440" cy="4021920"/>
           </a:xfrm>
           <a:prstGeom prst="rect">
             <a:avLst/>
@@ -33027,7 +33101,7 @@
         <p:spPr>
           <a:xfrm>
             <a:off x="5486400" y="1691640"/>
-            <a:ext cx="6216840" cy="4342320"/>
+            <a:ext cx="6216480" cy="4341960"/>
           </a:xfrm>
           <a:prstGeom prst="roundRect">
             <a:avLst>
@@ -33072,7 +33146,7 @@
         <p:spPr>
           <a:xfrm>
             <a:off x="5806440" y="1965960"/>
-            <a:ext cx="5576760" cy="3793680"/>
+            <a:ext cx="5576400" cy="3793320"/>
           </a:xfrm>
           <a:prstGeom prst="rect">
             <a:avLst/>
@@ -33553,7 +33627,7 @@
         <p:spPr>
           <a:xfrm>
             <a:off x="457200" y="6446520"/>
-            <a:ext cx="7314120" cy="273240"/>
+            <a:ext cx="7313760" cy="272880"/>
           </a:xfrm>
           <a:prstGeom prst="rect">
             <a:avLst/>
@@ -33614,7 +33688,7 @@
         <p:spPr>
           <a:xfrm>
             <a:off x="11521440" y="6446520"/>
-            <a:ext cx="456120" cy="273240"/>
+            <a:ext cx="455760" cy="272880"/>
           </a:xfrm>
           <a:prstGeom prst="rect">
             <a:avLst/>
@@ -33712,7 +33786,7 @@
         <p:spPr>
           <a:xfrm>
             <a:off x="457200" y="457200"/>
-            <a:ext cx="639000" cy="639000"/>
+            <a:ext cx="638640" cy="638640"/>
           </a:xfrm>
           <a:prstGeom prst="ellipse">
             <a:avLst/>
@@ -33759,7 +33833,7 @@
         <p:spPr>
           <a:xfrm>
             <a:off x="548640" y="548640"/>
-            <a:ext cx="447120" cy="447120"/>
+            <a:ext cx="446760" cy="446760"/>
           </a:xfrm>
           <a:prstGeom prst="rect">
             <a:avLst/>
@@ -33779,7 +33853,7 @@
         <p:spPr>
           <a:xfrm>
             <a:off x="1280160" y="457200"/>
-            <a:ext cx="10423080" cy="639000"/>
+            <a:ext cx="10422720" cy="638640"/>
           </a:xfrm>
           <a:prstGeom prst="rect">
             <a:avLst/>
@@ -33840,7 +33914,7 @@
         <p:spPr>
           <a:xfrm>
             <a:off x="548640" y="1828800"/>
-            <a:ext cx="4753800" cy="4022280"/>
+            <a:ext cx="4753440" cy="4021920"/>
           </a:xfrm>
           <a:prstGeom prst="rect">
             <a:avLst/>
@@ -33976,7 +34050,7 @@
         <p:spPr>
           <a:xfrm>
             <a:off x="5486400" y="1691640"/>
-            <a:ext cx="6216840" cy="4342320"/>
+            <a:ext cx="6216480" cy="4341960"/>
           </a:xfrm>
           <a:prstGeom prst="roundRect">
             <a:avLst>
@@ -34021,7 +34095,7 @@
         <p:spPr>
           <a:xfrm>
             <a:off x="5806440" y="1965960"/>
-            <a:ext cx="5576760" cy="3793680"/>
+            <a:ext cx="5576400" cy="3793320"/>
           </a:xfrm>
           <a:prstGeom prst="rect">
             <a:avLst/>
@@ -34436,7 +34510,7 @@
         <p:spPr>
           <a:xfrm>
             <a:off x="457200" y="6446520"/>
-            <a:ext cx="7314120" cy="273240"/>
+            <a:ext cx="7313760" cy="272880"/>
           </a:xfrm>
           <a:prstGeom prst="rect">
             <a:avLst/>
@@ -34497,7 +34571,7 @@
         <p:spPr>
           <a:xfrm>
             <a:off x="11521440" y="6446520"/>
-            <a:ext cx="456120" cy="273240"/>
+            <a:ext cx="455760" cy="272880"/>
           </a:xfrm>
           <a:prstGeom prst="rect">
             <a:avLst/>
@@ -34595,7 +34669,7 @@
         <p:spPr>
           <a:xfrm>
             <a:off x="457200" y="457200"/>
-            <a:ext cx="639000" cy="639000"/>
+            <a:ext cx="638640" cy="638640"/>
           </a:xfrm>
           <a:prstGeom prst="ellipse">
             <a:avLst/>
@@ -34642,7 +34716,7 @@
         <p:spPr>
           <a:xfrm>
             <a:off x="548640" y="548640"/>
-            <a:ext cx="447120" cy="447120"/>
+            <a:ext cx="446760" cy="446760"/>
           </a:xfrm>
           <a:prstGeom prst="rect">
             <a:avLst/>
@@ -34662,7 +34736,7 @@
         <p:spPr>
           <a:xfrm>
             <a:off x="1280160" y="457200"/>
-            <a:ext cx="10423080" cy="639000"/>
+            <a:ext cx="10422720" cy="638640"/>
           </a:xfrm>
           <a:prstGeom prst="rect">
             <a:avLst/>
@@ -34723,7 +34797,7 @@
         <p:spPr>
           <a:xfrm>
             <a:off x="457200" y="1508760"/>
-            <a:ext cx="3610800" cy="4890960"/>
+            <a:ext cx="3610440" cy="4890600"/>
           </a:xfrm>
           <a:prstGeom prst="roundRect">
             <a:avLst>
@@ -34768,7 +34842,7 @@
         <p:spPr>
           <a:xfrm>
             <a:off x="1989000" y="2094120"/>
-            <a:ext cx="547560" cy="547560"/>
+            <a:ext cx="547200" cy="547200"/>
           </a:xfrm>
           <a:prstGeom prst="ellipse">
             <a:avLst/>
@@ -34815,7 +34889,7 @@
         <p:spPr>
           <a:xfrm>
             <a:off x="2071080" y="2176200"/>
-            <a:ext cx="383040" cy="383040"/>
+            <a:ext cx="382680" cy="382680"/>
           </a:xfrm>
           <a:prstGeom prst="rect">
             <a:avLst/>
@@ -34835,7 +34909,7 @@
         <p:spPr>
           <a:xfrm>
             <a:off x="548640" y="2715840"/>
-            <a:ext cx="3427920" cy="364680"/>
+            <a:ext cx="3427560" cy="364320"/>
           </a:xfrm>
           <a:prstGeom prst="rect">
             <a:avLst/>
@@ -34896,7 +34970,7 @@
         <p:spPr>
           <a:xfrm>
             <a:off x="603360" y="3099960"/>
-            <a:ext cx="3318120" cy="3153600"/>
+            <a:ext cx="3317760" cy="3153240"/>
           </a:xfrm>
           <a:prstGeom prst="rect">
             <a:avLst/>
@@ -34957,7 +35031,7 @@
         <p:spPr>
           <a:xfrm>
             <a:off x="4288680" y="1508760"/>
-            <a:ext cx="3610800" cy="4890960"/>
+            <a:ext cx="3610440" cy="4890600"/>
           </a:xfrm>
           <a:prstGeom prst="roundRect">
             <a:avLst>
@@ -35002,7 +35076,7 @@
         <p:spPr>
           <a:xfrm>
             <a:off x="5820120" y="2094120"/>
-            <a:ext cx="547560" cy="547560"/>
+            <a:ext cx="547200" cy="547200"/>
           </a:xfrm>
           <a:prstGeom prst="ellipse">
             <a:avLst/>
@@ -35049,7 +35123,7 @@
         <p:spPr>
           <a:xfrm>
             <a:off x="5902560" y="2176200"/>
-            <a:ext cx="383040" cy="383040"/>
+            <a:ext cx="382680" cy="382680"/>
           </a:xfrm>
           <a:prstGeom prst="rect">
             <a:avLst/>
@@ -35069,7 +35143,7 @@
         <p:spPr>
           <a:xfrm>
             <a:off x="4380120" y="2715840"/>
-            <a:ext cx="3427920" cy="364680"/>
+            <a:ext cx="3427560" cy="364320"/>
           </a:xfrm>
           <a:prstGeom prst="rect">
             <a:avLst/>
@@ -35130,7 +35204,7 @@
         <p:spPr>
           <a:xfrm>
             <a:off x="4434840" y="3099960"/>
-            <a:ext cx="3318120" cy="3153600"/>
+            <a:ext cx="3317760" cy="3153240"/>
           </a:xfrm>
           <a:prstGeom prst="rect">
             <a:avLst/>
@@ -35169,7 +35243,199 @@
                 <a:latin typeface="Calibri"/>
                 <a:ea typeface="Calibri"/>
               </a:rPr>
-              <a:t>A decorator that measures and prints how long a function took to run — without changing the function itself</a:t>
+              <a:t>A </a:t>
+            </a:r>
+            <a:r>
+              <a:rPr lang="en-US" sz="1100" b="0" u="none" strike="noStrike">
+                <a:solidFill>
+                  <a:srgbClr val="4B564F"/>
+                </a:solidFill>
+                <a:effectLst/>
+                <a:uFillTx/>
+                <a:latin typeface="Calibri"/>
+                <a:ea typeface="Calibri"/>
+              </a:rPr>
+              <a:t>decorat</a:t>
+            </a:r>
+            <a:r>
+              <a:rPr lang="en-US" sz="1100" b="0" u="none" strike="noStrike">
+                <a:solidFill>
+                  <a:srgbClr val="4B564F"/>
+                </a:solidFill>
+                <a:effectLst/>
+                <a:uFillTx/>
+                <a:latin typeface="Calibri"/>
+                <a:ea typeface="Calibri"/>
+              </a:rPr>
+              <a:t>or that </a:t>
+            </a:r>
+            <a:r>
+              <a:rPr lang="en-US" sz="1100" b="0" u="none" strike="noStrike">
+                <a:solidFill>
+                  <a:srgbClr val="4B564F"/>
+                </a:solidFill>
+                <a:effectLst/>
+                <a:uFillTx/>
+                <a:latin typeface="Calibri"/>
+                <a:ea typeface="Calibri"/>
+              </a:rPr>
+              <a:t>measur</a:t>
+            </a:r>
+            <a:r>
+              <a:rPr lang="en-US" sz="1100" b="0" u="none" strike="noStrike">
+                <a:solidFill>
+                  <a:srgbClr val="4B564F"/>
+                </a:solidFill>
+                <a:effectLst/>
+                <a:uFillTx/>
+                <a:latin typeface="Calibri"/>
+                <a:ea typeface="Calibri"/>
+              </a:rPr>
+              <a:t>es and </a:t>
+            </a:r>
+            <a:r>
+              <a:rPr lang="en-US" sz="1100" b="0" u="none" strike="noStrike">
+                <a:solidFill>
+                  <a:srgbClr val="4B564F"/>
+                </a:solidFill>
+                <a:effectLst/>
+                <a:uFillTx/>
+                <a:latin typeface="Calibri"/>
+                <a:ea typeface="Calibri"/>
+              </a:rPr>
+              <a:t>prints </a:t>
+            </a:r>
+            <a:r>
+              <a:rPr lang="en-US" sz="1100" b="0" u="none" strike="noStrike">
+                <a:solidFill>
+                  <a:srgbClr val="4B564F"/>
+                </a:solidFill>
+                <a:effectLst/>
+                <a:uFillTx/>
+                <a:latin typeface="Calibri"/>
+                <a:ea typeface="Calibri"/>
+              </a:rPr>
+              <a:t>how </a:t>
+            </a:r>
+            <a:r>
+              <a:rPr lang="en-US" sz="1100" b="0" u="none" strike="noStrike">
+                <a:solidFill>
+                  <a:srgbClr val="4B564F"/>
+                </a:solidFill>
+                <a:effectLst/>
+                <a:uFillTx/>
+                <a:latin typeface="Calibri"/>
+                <a:ea typeface="Calibri"/>
+              </a:rPr>
+              <a:t>long a </a:t>
+            </a:r>
+            <a:r>
+              <a:rPr lang="en-US" sz="1100" b="0" u="none" strike="noStrike">
+                <a:solidFill>
+                  <a:srgbClr val="4B564F"/>
+                </a:solidFill>
+                <a:effectLst/>
+                <a:uFillTx/>
+                <a:latin typeface="Calibri"/>
+                <a:ea typeface="Calibri"/>
+              </a:rPr>
+              <a:t>functio</a:t>
+            </a:r>
+            <a:r>
+              <a:rPr lang="en-US" sz="1100" b="0" u="none" strike="noStrike">
+                <a:solidFill>
+                  <a:srgbClr val="4B564F"/>
+                </a:solidFill>
+                <a:effectLst/>
+                <a:uFillTx/>
+                <a:latin typeface="Calibri"/>
+                <a:ea typeface="Calibri"/>
+              </a:rPr>
+              <a:t>n took </a:t>
+            </a:r>
+            <a:r>
+              <a:rPr lang="en-US" sz="1100" b="0" u="none" strike="noStrike">
+                <a:solidFill>
+                  <a:srgbClr val="4B564F"/>
+                </a:solidFill>
+                <a:effectLst/>
+                <a:uFillTx/>
+                <a:latin typeface="Calibri"/>
+                <a:ea typeface="Calibri"/>
+              </a:rPr>
+              <a:t>to run </a:t>
+            </a:r>
+            <a:r>
+              <a:rPr lang="en-US" sz="1100" b="0" u="none" strike="noStrike">
+                <a:solidFill>
+                  <a:srgbClr val="4B564F"/>
+                </a:solidFill>
+                <a:effectLst/>
+                <a:uFillTx/>
+                <a:latin typeface="Calibri"/>
+                <a:ea typeface="Calibri"/>
+              </a:rPr>
+              <a:t>— </a:t>
+            </a:r>
+            <a:r>
+              <a:rPr lang="en-US" sz="1100" b="0" u="none" strike="noStrike">
+                <a:solidFill>
+                  <a:srgbClr val="4B564F"/>
+                </a:solidFill>
+                <a:effectLst/>
+                <a:uFillTx/>
+                <a:latin typeface="Calibri"/>
+                <a:ea typeface="Calibri"/>
+              </a:rPr>
+              <a:t>without </a:t>
+            </a:r>
+            <a:r>
+              <a:rPr lang="en-US" sz="1100" b="0" u="none" strike="noStrike">
+                <a:solidFill>
+                  <a:srgbClr val="4B564F"/>
+                </a:solidFill>
+                <a:effectLst/>
+                <a:uFillTx/>
+                <a:latin typeface="Calibri"/>
+                <a:ea typeface="Calibri"/>
+              </a:rPr>
+              <a:t>changin</a:t>
+            </a:r>
+            <a:r>
+              <a:rPr lang="en-US" sz="1100" b="0" u="none" strike="noStrike">
+                <a:solidFill>
+                  <a:srgbClr val="4B564F"/>
+                </a:solidFill>
+                <a:effectLst/>
+                <a:uFillTx/>
+                <a:latin typeface="Calibri"/>
+                <a:ea typeface="Calibri"/>
+              </a:rPr>
+              <a:t>g the </a:t>
+            </a:r>
+            <a:r>
+              <a:rPr lang="en-US" sz="1100" b="0" u="none" strike="noStrike">
+                <a:solidFill>
+                  <a:srgbClr val="4B564F"/>
+                </a:solidFill>
+                <a:effectLst/>
+                <a:uFillTx/>
+                <a:latin typeface="Calibri"/>
+                <a:ea typeface="Calibri"/>
+              </a:rPr>
+              <a:t>functio</a:t>
+            </a:r>
+            <a:r>
+              <a:rPr lang="en-US" sz="1100" b="0" u="none" strike="noStrike">
+                <a:solidFill>
+                  <a:srgbClr val="4B564F"/>
+                </a:solidFill>
+                <a:effectLst/>
+                <a:uFillTx/>
+                <a:latin typeface="Calibri"/>
+                <a:ea typeface="Calibri"/>
+              </a:rPr>
+              <a:t>n itself</a:t>
             </a:r>
             <a:endParaRPr lang="en-US" sz="1100" b="0" u="none" strike="noStrike">
               <a:solidFill>
@@ -35191,7 +35457,7 @@
         <p:spPr>
           <a:xfrm>
             <a:off x="8119800" y="1508760"/>
-            <a:ext cx="3610800" cy="4890960"/>
+            <a:ext cx="3610440" cy="4890600"/>
           </a:xfrm>
           <a:prstGeom prst="roundRect">
             <a:avLst>
@@ -35236,7 +35502,7 @@
         <p:spPr>
           <a:xfrm>
             <a:off x="9651600" y="2094120"/>
-            <a:ext cx="547560" cy="547560"/>
+            <a:ext cx="547200" cy="547200"/>
           </a:xfrm>
           <a:prstGeom prst="ellipse">
             <a:avLst/>
@@ -35283,7 +35549,7 @@
         <p:spPr>
           <a:xfrm>
             <a:off x="9733680" y="2176200"/>
-            <a:ext cx="383040" cy="383040"/>
+            <a:ext cx="382680" cy="382680"/>
           </a:xfrm>
           <a:prstGeom prst="rect">
             <a:avLst/>
@@ -35303,7 +35569,7 @@
         <p:spPr>
           <a:xfrm>
             <a:off x="8211240" y="2715840"/>
-            <a:ext cx="3427920" cy="364680"/>
+            <a:ext cx="3427560" cy="364320"/>
           </a:xfrm>
           <a:prstGeom prst="rect">
             <a:avLst/>
@@ -35364,7 +35630,7 @@
         <p:spPr>
           <a:xfrm>
             <a:off x="8266320" y="3099960"/>
-            <a:ext cx="3318120" cy="3153600"/>
+            <a:ext cx="3317760" cy="3153240"/>
           </a:xfrm>
           <a:prstGeom prst="rect">
             <a:avLst/>
@@ -35425,7 +35691,7 @@
         <p:spPr>
           <a:xfrm>
             <a:off x="457200" y="6446520"/>
-            <a:ext cx="7314120" cy="273240"/>
+            <a:ext cx="7313760" cy="272880"/>
           </a:xfrm>
           <a:prstGeom prst="rect">
             <a:avLst/>
@@ -35486,7 +35752,7 @@
         <p:spPr>
           <a:xfrm>
             <a:off x="11521440" y="6446520"/>
-            <a:ext cx="456120" cy="273240"/>
+            <a:ext cx="455760" cy="272880"/>
           </a:xfrm>
           <a:prstGeom prst="rect">
             <a:avLst/>
@@ -35584,7 +35850,7 @@
         <p:spPr>
           <a:xfrm>
             <a:off x="10515600" y="5669280"/>
-            <a:ext cx="3199320" cy="3199320"/>
+            <a:ext cx="3198960" cy="3198960"/>
           </a:xfrm>
           <a:prstGeom prst="roundRect">
             <a:avLst>
@@ -35629,7 +35895,7 @@
         <p:spPr>
           <a:xfrm>
             <a:off x="457200" y="457200"/>
-            <a:ext cx="639000" cy="639000"/>
+            <a:ext cx="638640" cy="638640"/>
           </a:xfrm>
           <a:prstGeom prst="ellipse">
             <a:avLst/>
@@ -35676,7 +35942,7 @@
         <p:spPr>
           <a:xfrm>
             <a:off x="548640" y="548640"/>
-            <a:ext cx="447120" cy="447120"/>
+            <a:ext cx="446760" cy="446760"/>
           </a:xfrm>
           <a:prstGeom prst="rect">
             <a:avLst/>
@@ -35696,7 +35962,7 @@
         <p:spPr>
           <a:xfrm>
             <a:off x="1280160" y="457200"/>
-            <a:ext cx="10423080" cy="639000"/>
+            <a:ext cx="10422720" cy="638640"/>
           </a:xfrm>
           <a:prstGeom prst="rect">
             <a:avLst/>
@@ -35757,7 +36023,7 @@
         <p:spPr>
           <a:xfrm>
             <a:off x="457200" y="1554480"/>
-            <a:ext cx="3656520" cy="4662360"/>
+            <a:ext cx="3656160" cy="4662000"/>
           </a:xfrm>
           <a:prstGeom prst="roundRect">
             <a:avLst>
@@ -35802,7 +36068,7 @@
         <p:spPr>
           <a:xfrm>
             <a:off x="1508760" y="2194560"/>
-            <a:ext cx="1553400" cy="1553400"/>
+            <a:ext cx="1553040" cy="1553040"/>
           </a:xfrm>
           <a:prstGeom prst="ellipse">
             <a:avLst/>
@@ -35849,7 +36115,7 @@
         <p:spPr>
           <a:xfrm>
             <a:off x="1746360" y="2423160"/>
-            <a:ext cx="1087200" cy="1087200"/>
+            <a:ext cx="1086840" cy="1086840"/>
           </a:xfrm>
           <a:prstGeom prst="rect">
             <a:avLst/>
@@ -35869,7 +36135,7 @@
         <p:spPr>
           <a:xfrm>
             <a:off x="640080" y="3977640"/>
-            <a:ext cx="3290760" cy="1736280"/>
+            <a:ext cx="3290400" cy="1735920"/>
           </a:xfrm>
           <a:prstGeom prst="rect">
             <a:avLst/>
@@ -35990,7 +36256,7 @@
         <p:spPr>
           <a:xfrm>
             <a:off x="4572000" y="1737360"/>
-            <a:ext cx="7131240" cy="4113720"/>
+            <a:ext cx="7130880" cy="4113360"/>
           </a:xfrm>
           <a:prstGeom prst="rect">
             <a:avLst/>
@@ -36161,7 +36427,7 @@
         <p:spPr>
           <a:xfrm>
             <a:off x="457200" y="6446520"/>
-            <a:ext cx="7314120" cy="273240"/>
+            <a:ext cx="7313760" cy="272880"/>
           </a:xfrm>
           <a:prstGeom prst="rect">
             <a:avLst/>
@@ -36222,7 +36488,7 @@
         <p:spPr>
           <a:xfrm>
             <a:off x="11521440" y="6446520"/>
-            <a:ext cx="456120" cy="273240"/>
+            <a:ext cx="455760" cy="272880"/>
           </a:xfrm>
           <a:prstGeom prst="rect">
             <a:avLst/>
@@ -36320,7 +36586,7 @@
         <p:spPr>
           <a:xfrm>
             <a:off x="-1828800" y="5029200"/>
-            <a:ext cx="3656520" cy="3656520"/>
+            <a:ext cx="3656160" cy="3656160"/>
           </a:xfrm>
           <a:prstGeom prst="ellipse">
             <a:avLst/>
@@ -36363,7 +36629,7 @@
         <p:spPr>
           <a:xfrm>
             <a:off x="457200" y="457200"/>
-            <a:ext cx="639000" cy="639000"/>
+            <a:ext cx="638640" cy="638640"/>
           </a:xfrm>
           <a:prstGeom prst="ellipse">
             <a:avLst/>
@@ -36410,7 +36676,7 @@
         <p:spPr>
           <a:xfrm>
             <a:off x="548640" y="548640"/>
-            <a:ext cx="447120" cy="447120"/>
+            <a:ext cx="446760" cy="446760"/>
           </a:xfrm>
           <a:prstGeom prst="rect">
             <a:avLst/>
@@ -36430,7 +36696,7 @@
         <p:spPr>
           <a:xfrm>
             <a:off x="1280160" y="457200"/>
-            <a:ext cx="10423080" cy="639000"/>
+            <a:ext cx="10422720" cy="638640"/>
           </a:xfrm>
           <a:prstGeom prst="rect">
             <a:avLst/>
@@ -36491,7 +36757,7 @@
         <p:spPr>
           <a:xfrm>
             <a:off x="457200" y="1600200"/>
-            <a:ext cx="11273400" cy="4479480"/>
+            <a:ext cx="11273040" cy="4479120"/>
           </a:xfrm>
           <a:prstGeom prst="roundRect">
             <a:avLst>
@@ -36536,7 +36802,7 @@
         <p:spPr>
           <a:xfrm>
             <a:off x="822960" y="1828800"/>
-            <a:ext cx="10514520" cy="456120"/>
+            <a:ext cx="10514160" cy="455760"/>
           </a:xfrm>
           <a:prstGeom prst="rect">
             <a:avLst/>
@@ -36597,7 +36863,7 @@
         <p:spPr>
           <a:xfrm>
             <a:off x="822960" y="2423160"/>
-            <a:ext cx="383040" cy="383040"/>
+            <a:ext cx="382680" cy="382680"/>
           </a:xfrm>
           <a:prstGeom prst="ellipse">
             <a:avLst/>
@@ -36640,7 +36906,7 @@
         <p:spPr>
           <a:xfrm>
             <a:off x="822960" y="2423160"/>
-            <a:ext cx="383040" cy="383040"/>
+            <a:ext cx="382680" cy="382680"/>
           </a:xfrm>
           <a:prstGeom prst="rect">
             <a:avLst/>
@@ -36701,7 +36967,7 @@
         <p:spPr>
           <a:xfrm>
             <a:off x="1435680" y="2423160"/>
-            <a:ext cx="9581760" cy="383040"/>
+            <a:ext cx="9581400" cy="382680"/>
           </a:xfrm>
           <a:prstGeom prst="rect">
             <a:avLst/>
@@ -36762,7 +37028,7 @@
         <p:spPr>
           <a:xfrm>
             <a:off x="822960" y="3300840"/>
-            <a:ext cx="383040" cy="383040"/>
+            <a:ext cx="382680" cy="382680"/>
           </a:xfrm>
           <a:prstGeom prst="ellipse">
             <a:avLst/>
@@ -36805,7 +37071,7 @@
         <p:spPr>
           <a:xfrm>
             <a:off x="822960" y="3300840"/>
-            <a:ext cx="383040" cy="383040"/>
+            <a:ext cx="382680" cy="382680"/>
           </a:xfrm>
           <a:prstGeom prst="rect">
             <a:avLst/>
@@ -36866,7 +37132,7 @@
         <p:spPr>
           <a:xfrm>
             <a:off x="1435680" y="3300840"/>
-            <a:ext cx="9581760" cy="383040"/>
+            <a:ext cx="9581400" cy="382680"/>
           </a:xfrm>
           <a:prstGeom prst="rect">
             <a:avLst/>
@@ -36927,7 +37193,7 @@
         <p:spPr>
           <a:xfrm>
             <a:off x="822960" y="4178880"/>
-            <a:ext cx="383040" cy="383040"/>
+            <a:ext cx="382680" cy="382680"/>
           </a:xfrm>
           <a:prstGeom prst="ellipse">
             <a:avLst/>
@@ -36970,7 +37236,7 @@
         <p:spPr>
           <a:xfrm>
             <a:off x="822960" y="4178880"/>
-            <a:ext cx="383040" cy="383040"/>
+            <a:ext cx="382680" cy="382680"/>
           </a:xfrm>
           <a:prstGeom prst="rect">
             <a:avLst/>
@@ -37031,7 +37297,7 @@
         <p:spPr>
           <a:xfrm>
             <a:off x="1435680" y="4178880"/>
-            <a:ext cx="9581760" cy="383040"/>
+            <a:ext cx="9581400" cy="382680"/>
           </a:xfrm>
           <a:prstGeom prst="rect">
             <a:avLst/>
@@ -37092,7 +37358,7 @@
         <p:spPr>
           <a:xfrm>
             <a:off x="457200" y="6446520"/>
-            <a:ext cx="7314120" cy="273240"/>
+            <a:ext cx="7313760" cy="272880"/>
           </a:xfrm>
           <a:prstGeom prst="rect">
             <a:avLst/>
@@ -37153,7 +37419,7 @@
         <p:spPr>
           <a:xfrm>
             <a:off x="11521440" y="6446520"/>
-            <a:ext cx="456120" cy="273240"/>
+            <a:ext cx="455760" cy="272880"/>
           </a:xfrm>
           <a:prstGeom prst="rect">
             <a:avLst/>
@@ -37251,7 +37517,7 @@
         <p:spPr>
           <a:xfrm>
             <a:off x="-1828800" y="4114800"/>
-            <a:ext cx="5485320" cy="5485320"/>
+            <a:ext cx="5484960" cy="5484960"/>
           </a:xfrm>
           <a:prstGeom prst="ellipse">
             <a:avLst/>
@@ -37294,7 +37560,7 @@
         <p:spPr>
           <a:xfrm>
             <a:off x="9601200" y="-2286000"/>
-            <a:ext cx="5485320" cy="5485320"/>
+            <a:ext cx="5484960" cy="5484960"/>
           </a:xfrm>
           <a:prstGeom prst="ellipse">
             <a:avLst/>
@@ -37337,7 +37603,7 @@
         <p:spPr>
           <a:xfrm>
             <a:off x="5596200" y="731520"/>
-            <a:ext cx="1004760" cy="1004760"/>
+            <a:ext cx="1004400" cy="1004400"/>
           </a:xfrm>
           <a:prstGeom prst="ellipse">
             <a:avLst/>
@@ -37384,7 +37650,7 @@
         <p:spPr>
           <a:xfrm>
             <a:off x="5742360" y="877680"/>
-            <a:ext cx="703080" cy="703080"/>
+            <a:ext cx="702720" cy="702720"/>
           </a:xfrm>
           <a:prstGeom prst="rect">
             <a:avLst/>
@@ -37404,7 +37670,7 @@
         <p:spPr>
           <a:xfrm>
             <a:off x="914400" y="1965960"/>
-            <a:ext cx="10359000" cy="364680"/>
+            <a:ext cx="10358640" cy="364320"/>
           </a:xfrm>
           <a:prstGeom prst="rect">
             <a:avLst/>
@@ -37465,7 +37731,7 @@
         <p:spPr>
           <a:xfrm>
             <a:off x="914400" y="2377440"/>
-            <a:ext cx="10359000" cy="2010600"/>
+            <a:ext cx="10358640" cy="2010240"/>
           </a:xfrm>
           <a:prstGeom prst="rect">
             <a:avLst/>
@@ -37526,7 +37792,7 @@
         <p:spPr>
           <a:xfrm>
             <a:off x="1463040" y="4572000"/>
-            <a:ext cx="9261720" cy="1096200"/>
+            <a:ext cx="9261360" cy="1095840"/>
           </a:xfrm>
           <a:prstGeom prst="rect">
             <a:avLst/>
@@ -37587,7 +37853,7 @@
         <p:spPr>
           <a:xfrm>
             <a:off x="11521440" y="6446520"/>
-            <a:ext cx="456120" cy="273240"/>
+            <a:ext cx="455760" cy="272880"/>
           </a:xfrm>
           <a:prstGeom prst="rect">
             <a:avLst/>
@@ -37685,7 +37951,7 @@
         <p:spPr>
           <a:xfrm>
             <a:off x="-1828800" y="5029200"/>
-            <a:ext cx="3656520" cy="3656520"/>
+            <a:ext cx="3656160" cy="3656160"/>
           </a:xfrm>
           <a:prstGeom prst="ellipse">
             <a:avLst/>
@@ -37728,7 +37994,7 @@
         <p:spPr>
           <a:xfrm>
             <a:off x="457200" y="457200"/>
-            <a:ext cx="639000" cy="639000"/>
+            <a:ext cx="638640" cy="638640"/>
           </a:xfrm>
           <a:prstGeom prst="ellipse">
             <a:avLst/>
@@ -37775,7 +38041,7 @@
         <p:spPr>
           <a:xfrm>
             <a:off x="548640" y="548640"/>
-            <a:ext cx="447120" cy="447120"/>
+            <a:ext cx="446760" cy="446760"/>
           </a:xfrm>
           <a:prstGeom prst="rect">
             <a:avLst/>
@@ -37795,7 +38061,7 @@
         <p:spPr>
           <a:xfrm>
             <a:off x="1280160" y="457200"/>
-            <a:ext cx="10423080" cy="639000"/>
+            <a:ext cx="10422720" cy="638640"/>
           </a:xfrm>
           <a:prstGeom prst="rect">
             <a:avLst/>
@@ -37856,7 +38122,7 @@
         <p:spPr>
           <a:xfrm>
             <a:off x="457200" y="1600200"/>
-            <a:ext cx="11273400" cy="4479480"/>
+            <a:ext cx="11273040" cy="4479120"/>
           </a:xfrm>
           <a:prstGeom prst="roundRect">
             <a:avLst>
@@ -37901,7 +38167,7 @@
         <p:spPr>
           <a:xfrm>
             <a:off x="822960" y="1828800"/>
-            <a:ext cx="10514520" cy="456120"/>
+            <a:ext cx="10514160" cy="455760"/>
           </a:xfrm>
           <a:prstGeom prst="rect">
             <a:avLst/>
@@ -37962,7 +38228,7 @@
         <p:spPr>
           <a:xfrm>
             <a:off x="822960" y="2423160"/>
-            <a:ext cx="401400" cy="401400"/>
+            <a:ext cx="401040" cy="401040"/>
           </a:xfrm>
           <a:prstGeom prst="ellipse">
             <a:avLst/>
@@ -38009,7 +38275,7 @@
         <p:spPr>
           <a:xfrm>
             <a:off x="887040" y="2487240"/>
-            <a:ext cx="282240" cy="282240"/>
+            <a:ext cx="281880" cy="281880"/>
           </a:xfrm>
           <a:prstGeom prst="rect">
             <a:avLst/>
@@ -38029,7 +38295,7 @@
         <p:spPr>
           <a:xfrm>
             <a:off x="1371600" y="2441520"/>
-            <a:ext cx="401400" cy="364680"/>
+            <a:ext cx="401040" cy="364320"/>
           </a:xfrm>
           <a:prstGeom prst="roundRect">
             <a:avLst>
@@ -38074,7 +38340,7 @@
         <p:spPr>
           <a:xfrm>
             <a:off x="1371600" y="2441520"/>
-            <a:ext cx="401400" cy="364680"/>
+            <a:ext cx="401040" cy="364320"/>
           </a:xfrm>
           <a:prstGeom prst="rect">
             <a:avLst/>
@@ -38135,7 +38401,7 @@
         <p:spPr>
           <a:xfrm>
             <a:off x="1920240" y="2423160"/>
-            <a:ext cx="9508680" cy="1004760"/>
+            <a:ext cx="9508320" cy="1004400"/>
           </a:xfrm>
           <a:prstGeom prst="rect">
             <a:avLst/>
@@ -38196,7 +38462,7 @@
         <p:spPr>
           <a:xfrm>
             <a:off x="822960" y="3593520"/>
-            <a:ext cx="401400" cy="401400"/>
+            <a:ext cx="401040" cy="401040"/>
           </a:xfrm>
           <a:prstGeom prst="ellipse">
             <a:avLst/>
@@ -38243,7 +38509,7 @@
         <p:spPr>
           <a:xfrm>
             <a:off x="887040" y="3657600"/>
-            <a:ext cx="282240" cy="282240"/>
+            <a:ext cx="281880" cy="281880"/>
           </a:xfrm>
           <a:prstGeom prst="rect">
             <a:avLst/>
@@ -38263,7 +38529,7 @@
         <p:spPr>
           <a:xfrm>
             <a:off x="1371600" y="3611880"/>
-            <a:ext cx="401400" cy="364680"/>
+            <a:ext cx="401040" cy="364320"/>
           </a:xfrm>
           <a:prstGeom prst="roundRect">
             <a:avLst>
@@ -38308,7 +38574,7 @@
         <p:spPr>
           <a:xfrm>
             <a:off x="1371600" y="3611880"/>
-            <a:ext cx="401400" cy="364680"/>
+            <a:ext cx="401040" cy="364320"/>
           </a:xfrm>
           <a:prstGeom prst="rect">
             <a:avLst/>
@@ -38369,7 +38635,7 @@
         <p:spPr>
           <a:xfrm>
             <a:off x="1920240" y="3593520"/>
-            <a:ext cx="9508680" cy="1004760"/>
+            <a:ext cx="9508320" cy="1004400"/>
           </a:xfrm>
           <a:prstGeom prst="rect">
             <a:avLst/>
@@ -38430,7 +38696,7 @@
         <p:spPr>
           <a:xfrm>
             <a:off x="822960" y="4763880"/>
-            <a:ext cx="401400" cy="401400"/>
+            <a:ext cx="401040" cy="401040"/>
           </a:xfrm>
           <a:prstGeom prst="ellipse">
             <a:avLst/>
@@ -38477,7 +38743,7 @@
         <p:spPr>
           <a:xfrm>
             <a:off x="887040" y="4827960"/>
-            <a:ext cx="282240" cy="282240"/>
+            <a:ext cx="281880" cy="281880"/>
           </a:xfrm>
           <a:prstGeom prst="rect">
             <a:avLst/>
@@ -38497,7 +38763,7 @@
         <p:spPr>
           <a:xfrm>
             <a:off x="1371600" y="4782240"/>
-            <a:ext cx="401400" cy="364680"/>
+            <a:ext cx="401040" cy="364320"/>
           </a:xfrm>
           <a:prstGeom prst="roundRect">
             <a:avLst>
@@ -38542,7 +38808,7 @@
         <p:spPr>
           <a:xfrm>
             <a:off x="1371600" y="4782240"/>
-            <a:ext cx="401400" cy="364680"/>
+            <a:ext cx="401040" cy="364320"/>
           </a:xfrm>
           <a:prstGeom prst="rect">
             <a:avLst/>
@@ -38603,7 +38869,7 @@
         <p:spPr>
           <a:xfrm>
             <a:off x="1920240" y="4763880"/>
-            <a:ext cx="9508680" cy="1004760"/>
+            <a:ext cx="9508320" cy="1004400"/>
           </a:xfrm>
           <a:prstGeom prst="rect">
             <a:avLst/>
@@ -38664,7 +38930,7 @@
         <p:spPr>
           <a:xfrm>
             <a:off x="457200" y="6446520"/>
-            <a:ext cx="7314120" cy="273240"/>
+            <a:ext cx="7313760" cy="272880"/>
           </a:xfrm>
           <a:prstGeom prst="rect">
             <a:avLst/>
@@ -38725,7 +38991,7 @@
         <p:spPr>
           <a:xfrm>
             <a:off x="11521440" y="6446520"/>
-            <a:ext cx="456120" cy="273240"/>
+            <a:ext cx="455760" cy="272880"/>
           </a:xfrm>
           <a:prstGeom prst="rect">
             <a:avLst/>
@@ -38823,7 +39089,7 @@
         <p:spPr>
           <a:xfrm>
             <a:off x="-1828800" y="5029200"/>
-            <a:ext cx="3656520" cy="3656520"/>
+            <a:ext cx="3656160" cy="3656160"/>
           </a:xfrm>
           <a:prstGeom prst="ellipse">
             <a:avLst/>
@@ -38866,7 +39132,7 @@
         <p:spPr>
           <a:xfrm>
             <a:off x="457200" y="457200"/>
-            <a:ext cx="639000" cy="639000"/>
+            <a:ext cx="638640" cy="638640"/>
           </a:xfrm>
           <a:prstGeom prst="ellipse">
             <a:avLst/>
@@ -38913,7 +39179,7 @@
         <p:spPr>
           <a:xfrm>
             <a:off x="548640" y="548640"/>
-            <a:ext cx="447120" cy="447120"/>
+            <a:ext cx="446760" cy="446760"/>
           </a:xfrm>
           <a:prstGeom prst="rect">
             <a:avLst/>
@@ -38933,7 +39199,7 @@
         <p:spPr>
           <a:xfrm>
             <a:off x="1280160" y="457200"/>
-            <a:ext cx="10423080" cy="639000"/>
+            <a:ext cx="10422720" cy="638640"/>
           </a:xfrm>
           <a:prstGeom prst="rect">
             <a:avLst/>
@@ -38994,7 +39260,7 @@
         <p:spPr>
           <a:xfrm>
             <a:off x="457200" y="1600200"/>
-            <a:ext cx="11273400" cy="4479480"/>
+            <a:ext cx="11273040" cy="4479120"/>
           </a:xfrm>
           <a:prstGeom prst="roundRect">
             <a:avLst>
@@ -39039,7 +39305,7 @@
         <p:spPr>
           <a:xfrm>
             <a:off x="822960" y="1828800"/>
-            <a:ext cx="10514520" cy="456120"/>
+            <a:ext cx="10514160" cy="455760"/>
           </a:xfrm>
           <a:prstGeom prst="rect">
             <a:avLst/>
@@ -39100,7 +39366,7 @@
         <p:spPr>
           <a:xfrm>
             <a:off x="822960" y="2423160"/>
-            <a:ext cx="401400" cy="401400"/>
+            <a:ext cx="401040" cy="401040"/>
           </a:xfrm>
           <a:prstGeom prst="ellipse">
             <a:avLst/>
@@ -39147,7 +39413,7 @@
         <p:spPr>
           <a:xfrm>
             <a:off x="887040" y="2487240"/>
-            <a:ext cx="282240" cy="282240"/>
+            <a:ext cx="281880" cy="281880"/>
           </a:xfrm>
           <a:prstGeom prst="rect">
             <a:avLst/>
@@ -39167,7 +39433,7 @@
         <p:spPr>
           <a:xfrm>
             <a:off x="1371600" y="2441520"/>
-            <a:ext cx="401400" cy="364680"/>
+            <a:ext cx="401040" cy="364320"/>
           </a:xfrm>
           <a:prstGeom prst="roundRect">
             <a:avLst>
@@ -39212,7 +39478,7 @@
         <p:spPr>
           <a:xfrm>
             <a:off x="1371600" y="2441520"/>
-            <a:ext cx="401400" cy="364680"/>
+            <a:ext cx="401040" cy="364320"/>
           </a:xfrm>
           <a:prstGeom prst="rect">
             <a:avLst/>
@@ -39273,7 +39539,7 @@
         <p:spPr>
           <a:xfrm>
             <a:off x="1920240" y="2423160"/>
-            <a:ext cx="9508680" cy="1004760"/>
+            <a:ext cx="9508320" cy="1004400"/>
           </a:xfrm>
           <a:prstGeom prst="rect">
             <a:avLst/>
@@ -39334,7 +39600,7 @@
         <p:spPr>
           <a:xfrm>
             <a:off x="822960" y="3593520"/>
-            <a:ext cx="401400" cy="401400"/>
+            <a:ext cx="401040" cy="401040"/>
           </a:xfrm>
           <a:prstGeom prst="ellipse">
             <a:avLst/>
@@ -39381,7 +39647,7 @@
         <p:spPr>
           <a:xfrm>
             <a:off x="887040" y="3657600"/>
-            <a:ext cx="282240" cy="282240"/>
+            <a:ext cx="281880" cy="281880"/>
           </a:xfrm>
           <a:prstGeom prst="rect">
             <a:avLst/>
@@ -39401,7 +39667,7 @@
         <p:spPr>
           <a:xfrm>
             <a:off x="1371600" y="3611880"/>
-            <a:ext cx="401400" cy="364680"/>
+            <a:ext cx="401040" cy="364320"/>
           </a:xfrm>
           <a:prstGeom prst="roundRect">
             <a:avLst>
@@ -39446,7 +39712,7 @@
         <p:spPr>
           <a:xfrm>
             <a:off x="1371600" y="3611880"/>
-            <a:ext cx="401400" cy="364680"/>
+            <a:ext cx="401040" cy="364320"/>
           </a:xfrm>
           <a:prstGeom prst="rect">
             <a:avLst/>
@@ -39507,7 +39773,7 @@
         <p:spPr>
           <a:xfrm>
             <a:off x="1920240" y="3593520"/>
-            <a:ext cx="9508680" cy="1004760"/>
+            <a:ext cx="9508320" cy="1004400"/>
           </a:xfrm>
           <a:prstGeom prst="rect">
             <a:avLst/>
@@ -39568,7 +39834,7 @@
         <p:spPr>
           <a:xfrm>
             <a:off x="822960" y="4763880"/>
-            <a:ext cx="401400" cy="401400"/>
+            <a:ext cx="401040" cy="401040"/>
           </a:xfrm>
           <a:prstGeom prst="ellipse">
             <a:avLst/>
@@ -39615,7 +39881,7 @@
         <p:spPr>
           <a:xfrm>
             <a:off x="887040" y="4827960"/>
-            <a:ext cx="282240" cy="282240"/>
+            <a:ext cx="281880" cy="281880"/>
           </a:xfrm>
           <a:prstGeom prst="rect">
             <a:avLst/>
@@ -39635,7 +39901,7 @@
         <p:spPr>
           <a:xfrm>
             <a:off x="1371600" y="4782240"/>
-            <a:ext cx="401400" cy="364680"/>
+            <a:ext cx="401040" cy="364320"/>
           </a:xfrm>
           <a:prstGeom prst="roundRect">
             <a:avLst>
@@ -39680,7 +39946,7 @@
         <p:spPr>
           <a:xfrm>
             <a:off x="1371600" y="4782240"/>
-            <a:ext cx="401400" cy="364680"/>
+            <a:ext cx="401040" cy="364320"/>
           </a:xfrm>
           <a:prstGeom prst="rect">
             <a:avLst/>
@@ -39741,7 +40007,7 @@
         <p:spPr>
           <a:xfrm>
             <a:off x="1920240" y="4763880"/>
-            <a:ext cx="9508680" cy="1004760"/>
+            <a:ext cx="9508320" cy="1004400"/>
           </a:xfrm>
           <a:prstGeom prst="rect">
             <a:avLst/>
@@ -39802,7 +40068,7 @@
         <p:spPr>
           <a:xfrm>
             <a:off x="457200" y="6446520"/>
-            <a:ext cx="7314120" cy="273240"/>
+            <a:ext cx="7313760" cy="272880"/>
           </a:xfrm>
           <a:prstGeom prst="rect">
             <a:avLst/>
@@ -39863,7 +40129,7 @@
         <p:spPr>
           <a:xfrm>
             <a:off x="11521440" y="6446520"/>
-            <a:ext cx="456120" cy="273240"/>
+            <a:ext cx="455760" cy="272880"/>
           </a:xfrm>
           <a:prstGeom prst="rect">
             <a:avLst/>
@@ -39961,7 +40227,7 @@
         <p:spPr>
           <a:xfrm>
             <a:off x="-1828800" y="5029200"/>
-            <a:ext cx="3656520" cy="3656520"/>
+            <a:ext cx="3656160" cy="3656160"/>
           </a:xfrm>
           <a:prstGeom prst="ellipse">
             <a:avLst/>
@@ -40004,7 +40270,7 @@
         <p:spPr>
           <a:xfrm>
             <a:off x="457200" y="457200"/>
-            <a:ext cx="639000" cy="639000"/>
+            <a:ext cx="638640" cy="638640"/>
           </a:xfrm>
           <a:prstGeom prst="ellipse">
             <a:avLst/>
@@ -40051,7 +40317,7 @@
         <p:spPr>
           <a:xfrm>
             <a:off x="548640" y="548640"/>
-            <a:ext cx="447120" cy="447120"/>
+            <a:ext cx="446760" cy="446760"/>
           </a:xfrm>
           <a:prstGeom prst="rect">
             <a:avLst/>
@@ -40071,7 +40337,7 @@
         <p:spPr>
           <a:xfrm>
             <a:off x="1280160" y="457200"/>
-            <a:ext cx="10423080" cy="639000"/>
+            <a:ext cx="10422720" cy="638640"/>
           </a:xfrm>
           <a:prstGeom prst="rect">
             <a:avLst/>
@@ -40132,7 +40398,7 @@
         <p:spPr>
           <a:xfrm>
             <a:off x="457200" y="1600200"/>
-            <a:ext cx="11273400" cy="4479480"/>
+            <a:ext cx="11273040" cy="4479120"/>
           </a:xfrm>
           <a:prstGeom prst="roundRect">
             <a:avLst>
@@ -40177,7 +40443,7 @@
         <p:spPr>
           <a:xfrm>
             <a:off x="822960" y="1828800"/>
-            <a:ext cx="10514520" cy="456120"/>
+            <a:ext cx="10514160" cy="455760"/>
           </a:xfrm>
           <a:prstGeom prst="rect">
             <a:avLst/>
@@ -40238,7 +40504,7 @@
         <p:spPr>
           <a:xfrm>
             <a:off x="822960" y="2423160"/>
-            <a:ext cx="401400" cy="401400"/>
+            <a:ext cx="401040" cy="401040"/>
           </a:xfrm>
           <a:prstGeom prst="ellipse">
             <a:avLst/>
@@ -40285,7 +40551,7 @@
         <p:spPr>
           <a:xfrm>
             <a:off x="887040" y="2487240"/>
-            <a:ext cx="282240" cy="282240"/>
+            <a:ext cx="281880" cy="281880"/>
           </a:xfrm>
           <a:prstGeom prst="rect">
             <a:avLst/>
@@ -40305,7 +40571,7 @@
         <p:spPr>
           <a:xfrm>
             <a:off x="1371600" y="2441520"/>
-            <a:ext cx="401400" cy="364680"/>
+            <a:ext cx="401040" cy="364320"/>
           </a:xfrm>
           <a:prstGeom prst="roundRect">
             <a:avLst>
@@ -40350,7 +40616,7 @@
         <p:spPr>
           <a:xfrm>
             <a:off x="1371600" y="2441520"/>
-            <a:ext cx="401400" cy="364680"/>
+            <a:ext cx="401040" cy="364320"/>
           </a:xfrm>
           <a:prstGeom prst="rect">
             <a:avLst/>
@@ -40411,7 +40677,7 @@
         <p:spPr>
           <a:xfrm>
             <a:off x="1920240" y="2423160"/>
-            <a:ext cx="9508680" cy="1004760"/>
+            <a:ext cx="9508320" cy="1004400"/>
           </a:xfrm>
           <a:prstGeom prst="rect">
             <a:avLst/>
@@ -40472,7 +40738,7 @@
         <p:spPr>
           <a:xfrm>
             <a:off x="822960" y="3593520"/>
-            <a:ext cx="401400" cy="401400"/>
+            <a:ext cx="401040" cy="401040"/>
           </a:xfrm>
           <a:prstGeom prst="ellipse">
             <a:avLst/>
@@ -40519,7 +40785,7 @@
         <p:spPr>
           <a:xfrm>
             <a:off x="887040" y="3657600"/>
-            <a:ext cx="282240" cy="282240"/>
+            <a:ext cx="281880" cy="281880"/>
           </a:xfrm>
           <a:prstGeom prst="rect">
             <a:avLst/>
@@ -40539,7 +40805,7 @@
         <p:spPr>
           <a:xfrm>
             <a:off x="1371600" y="3611880"/>
-            <a:ext cx="401400" cy="364680"/>
+            <a:ext cx="401040" cy="364320"/>
           </a:xfrm>
           <a:prstGeom prst="roundRect">
             <a:avLst>
@@ -40584,7 +40850,7 @@
         <p:spPr>
           <a:xfrm>
             <a:off x="1371600" y="3611880"/>
-            <a:ext cx="401400" cy="364680"/>
+            <a:ext cx="401040" cy="364320"/>
           </a:xfrm>
           <a:prstGeom prst="rect">
             <a:avLst/>
@@ -40645,7 +40911,7 @@
         <p:spPr>
           <a:xfrm>
             <a:off x="1920240" y="3593520"/>
-            <a:ext cx="9508680" cy="1004760"/>
+            <a:ext cx="9508320" cy="1004400"/>
           </a:xfrm>
           <a:prstGeom prst="rect">
             <a:avLst/>
@@ -40706,7 +40972,7 @@
         <p:spPr>
           <a:xfrm>
             <a:off x="822960" y="4763880"/>
-            <a:ext cx="401400" cy="401400"/>
+            <a:ext cx="401040" cy="401040"/>
           </a:xfrm>
           <a:prstGeom prst="ellipse">
             <a:avLst/>
@@ -40753,7 +41019,7 @@
         <p:spPr>
           <a:xfrm>
             <a:off x="887040" y="4827960"/>
-            <a:ext cx="282240" cy="282240"/>
+            <a:ext cx="281880" cy="281880"/>
           </a:xfrm>
           <a:prstGeom prst="rect">
             <a:avLst/>
@@ -40773,7 +41039,7 @@
         <p:spPr>
           <a:xfrm>
             <a:off x="1371600" y="4782240"/>
-            <a:ext cx="401400" cy="364680"/>
+            <a:ext cx="401040" cy="364320"/>
           </a:xfrm>
           <a:prstGeom prst="roundRect">
             <a:avLst>
@@ -40818,7 +41084,7 @@
         <p:spPr>
           <a:xfrm>
             <a:off x="1371600" y="4782240"/>
-            <a:ext cx="401400" cy="364680"/>
+            <a:ext cx="401040" cy="364320"/>
           </a:xfrm>
           <a:prstGeom prst="rect">
             <a:avLst/>
@@ -40879,7 +41145,7 @@
         <p:spPr>
           <a:xfrm>
             <a:off x="1920240" y="4763880"/>
-            <a:ext cx="9508680" cy="1004760"/>
+            <a:ext cx="9508320" cy="1004400"/>
           </a:xfrm>
           <a:prstGeom prst="rect">
             <a:avLst/>
@@ -40940,7 +41206,7 @@
         <p:spPr>
           <a:xfrm>
             <a:off x="457200" y="6446520"/>
-            <a:ext cx="7314120" cy="273240"/>
+            <a:ext cx="7313760" cy="272880"/>
           </a:xfrm>
           <a:prstGeom prst="rect">
             <a:avLst/>
@@ -41001,7 +41267,7 @@
         <p:spPr>
           <a:xfrm>
             <a:off x="11521440" y="6446520"/>
-            <a:ext cx="456120" cy="273240"/>
+            <a:ext cx="455760" cy="272880"/>
           </a:xfrm>
           <a:prstGeom prst="rect">
             <a:avLst/>
@@ -41099,7 +41365,7 @@
         <p:spPr>
           <a:xfrm>
             <a:off x="-1828800" y="4114800"/>
-            <a:ext cx="5485320" cy="5485320"/>
+            <a:ext cx="5484960" cy="5484960"/>
           </a:xfrm>
           <a:prstGeom prst="ellipse">
             <a:avLst/>
@@ -41142,7 +41408,7 @@
         <p:spPr>
           <a:xfrm>
             <a:off x="9601200" y="-2286000"/>
-            <a:ext cx="5485320" cy="5485320"/>
+            <a:ext cx="5484960" cy="5484960"/>
           </a:xfrm>
           <a:prstGeom prst="ellipse">
             <a:avLst/>
@@ -41185,7 +41451,7 @@
         <p:spPr>
           <a:xfrm>
             <a:off x="5596200" y="731520"/>
-            <a:ext cx="1004760" cy="1004760"/>
+            <a:ext cx="1004400" cy="1004400"/>
           </a:xfrm>
           <a:prstGeom prst="ellipse">
             <a:avLst/>
@@ -41232,7 +41498,7 @@
         <p:spPr>
           <a:xfrm>
             <a:off x="5742360" y="877680"/>
-            <a:ext cx="703080" cy="703080"/>
+            <a:ext cx="702720" cy="702720"/>
           </a:xfrm>
           <a:prstGeom prst="rect">
             <a:avLst/>
@@ -41252,7 +41518,7 @@
         <p:spPr>
           <a:xfrm>
             <a:off x="914400" y="1965960"/>
-            <a:ext cx="10359000" cy="364680"/>
+            <a:ext cx="10358640" cy="364320"/>
           </a:xfrm>
           <a:prstGeom prst="rect">
             <a:avLst/>
@@ -41313,7 +41579,7 @@
         <p:spPr>
           <a:xfrm>
             <a:off x="914400" y="2377440"/>
-            <a:ext cx="10359000" cy="2010600"/>
+            <a:ext cx="10358640" cy="2010240"/>
           </a:xfrm>
           <a:prstGeom prst="rect">
             <a:avLst/>
@@ -41374,7 +41640,7 @@
         <p:spPr>
           <a:xfrm>
             <a:off x="1463040" y="4572000"/>
-            <a:ext cx="9261720" cy="1096200"/>
+            <a:ext cx="9261360" cy="1095840"/>
           </a:xfrm>
           <a:prstGeom prst="rect">
             <a:avLst/>
@@ -41435,7 +41701,7 @@
         <p:spPr>
           <a:xfrm>
             <a:off x="11521440" y="6446520"/>
-            <a:ext cx="456120" cy="273240"/>
+            <a:ext cx="455760" cy="272880"/>
           </a:xfrm>
           <a:prstGeom prst="rect">
             <a:avLst/>
@@ -41533,7 +41799,7 @@
         <p:spPr>
           <a:xfrm>
             <a:off x="10515600" y="5669280"/>
-            <a:ext cx="3199320" cy="3199320"/>
+            <a:ext cx="3198960" cy="3198960"/>
           </a:xfrm>
           <a:prstGeom prst="roundRect">
             <a:avLst>
@@ -41578,7 +41844,7 @@
         <p:spPr>
           <a:xfrm>
             <a:off x="457200" y="457200"/>
-            <a:ext cx="639000" cy="639000"/>
+            <a:ext cx="638640" cy="638640"/>
           </a:xfrm>
           <a:prstGeom prst="ellipse">
             <a:avLst/>
@@ -41625,7 +41891,7 @@
         <p:spPr>
           <a:xfrm>
             <a:off x="548640" y="548640"/>
-            <a:ext cx="447120" cy="447120"/>
+            <a:ext cx="446760" cy="446760"/>
           </a:xfrm>
           <a:prstGeom prst="rect">
             <a:avLst/>
@@ -41645,7 +41911,7 @@
         <p:spPr>
           <a:xfrm>
             <a:off x="1280160" y="457200"/>
-            <a:ext cx="10423080" cy="639000"/>
+            <a:ext cx="10422720" cy="638640"/>
           </a:xfrm>
           <a:prstGeom prst="rect">
             <a:avLst/>
@@ -41706,7 +41972,7 @@
         <p:spPr>
           <a:xfrm>
             <a:off x="457200" y="1554480"/>
-            <a:ext cx="3656520" cy="4662360"/>
+            <a:ext cx="3656160" cy="4662000"/>
           </a:xfrm>
           <a:prstGeom prst="roundRect">
             <a:avLst>
@@ -41751,7 +42017,7 @@
         <p:spPr>
           <a:xfrm>
             <a:off x="1508760" y="2194560"/>
-            <a:ext cx="1553400" cy="1553400"/>
+            <a:ext cx="1553040" cy="1553040"/>
           </a:xfrm>
           <a:prstGeom prst="ellipse">
             <a:avLst/>
@@ -41798,7 +42064,7 @@
         <p:spPr>
           <a:xfrm>
             <a:off x="1746360" y="2423160"/>
-            <a:ext cx="1087200" cy="1087200"/>
+            <a:ext cx="1086840" cy="1086840"/>
           </a:xfrm>
           <a:prstGeom prst="rect">
             <a:avLst/>
@@ -41818,7 +42084,7 @@
         <p:spPr>
           <a:xfrm>
             <a:off x="640080" y="3977640"/>
-            <a:ext cx="3290760" cy="1736280"/>
+            <a:ext cx="3290400" cy="1735920"/>
           </a:xfrm>
           <a:prstGeom prst="rect">
             <a:avLst/>
@@ -41939,7 +42205,7 @@
         <p:spPr>
           <a:xfrm>
             <a:off x="4572000" y="1737360"/>
-            <a:ext cx="7131240" cy="4113720"/>
+            <a:ext cx="7130880" cy="4113360"/>
           </a:xfrm>
           <a:prstGeom prst="rect">
             <a:avLst/>
@@ -42110,7 +42376,7 @@
         <p:spPr>
           <a:xfrm>
             <a:off x="457200" y="6446520"/>
-            <a:ext cx="7314120" cy="273240"/>
+            <a:ext cx="7313760" cy="272880"/>
           </a:xfrm>
           <a:prstGeom prst="rect">
             <a:avLst/>
@@ -42171,7 +42437,7 @@
         <p:spPr>
           <a:xfrm>
             <a:off x="11521440" y="6446520"/>
-            <a:ext cx="456120" cy="273240"/>
+            <a:ext cx="455760" cy="272880"/>
           </a:xfrm>
           <a:prstGeom prst="rect">
             <a:avLst/>
@@ -42269,7 +42535,7 @@
         <p:spPr>
           <a:xfrm>
             <a:off x="10515600" y="5669280"/>
-            <a:ext cx="3199320" cy="3199320"/>
+            <a:ext cx="3198960" cy="3198960"/>
           </a:xfrm>
           <a:prstGeom prst="roundRect">
             <a:avLst>
@@ -42314,7 +42580,7 @@
         <p:spPr>
           <a:xfrm>
             <a:off x="457200" y="457200"/>
-            <a:ext cx="639000" cy="639000"/>
+            <a:ext cx="638640" cy="638640"/>
           </a:xfrm>
           <a:prstGeom prst="ellipse">
             <a:avLst/>
@@ -42361,7 +42627,7 @@
         <p:spPr>
           <a:xfrm>
             <a:off x="548640" y="548640"/>
-            <a:ext cx="447120" cy="447120"/>
+            <a:ext cx="446760" cy="446760"/>
           </a:xfrm>
           <a:prstGeom prst="rect">
             <a:avLst/>
@@ -42381,7 +42647,7 @@
         <p:spPr>
           <a:xfrm>
             <a:off x="1280160" y="457200"/>
-            <a:ext cx="10423080" cy="639000"/>
+            <a:ext cx="10422720" cy="638640"/>
           </a:xfrm>
           <a:prstGeom prst="rect">
             <a:avLst/>
@@ -42442,7 +42708,7 @@
         <p:spPr>
           <a:xfrm>
             <a:off x="457200" y="1554480"/>
-            <a:ext cx="3656520" cy="4662360"/>
+            <a:ext cx="3656160" cy="4662000"/>
           </a:xfrm>
           <a:prstGeom prst="roundRect">
             <a:avLst>
@@ -42487,7 +42753,7 @@
         <p:spPr>
           <a:xfrm>
             <a:off x="1508760" y="2194560"/>
-            <a:ext cx="1553400" cy="1553400"/>
+            <a:ext cx="1553040" cy="1553040"/>
           </a:xfrm>
           <a:prstGeom prst="ellipse">
             <a:avLst/>
@@ -42534,7 +42800,7 @@
         <p:spPr>
           <a:xfrm>
             <a:off x="1746360" y="2423160"/>
-            <a:ext cx="1087200" cy="1087200"/>
+            <a:ext cx="1086840" cy="1086840"/>
           </a:xfrm>
           <a:prstGeom prst="rect">
             <a:avLst/>
@@ -42554,7 +42820,7 @@
         <p:spPr>
           <a:xfrm>
             <a:off x="640080" y="3977640"/>
-            <a:ext cx="3290760" cy="1736280"/>
+            <a:ext cx="3290400" cy="1735920"/>
           </a:xfrm>
           <a:prstGeom prst="rect">
             <a:avLst/>
@@ -42675,7 +42941,7 @@
         <p:spPr>
           <a:xfrm>
             <a:off x="4572000" y="1737360"/>
-            <a:ext cx="7131240" cy="4113720"/>
+            <a:ext cx="7130880" cy="4113360"/>
           </a:xfrm>
           <a:prstGeom prst="rect">
             <a:avLst/>
@@ -42846,7 +43112,7 @@
         <p:spPr>
           <a:xfrm>
             <a:off x="457200" y="6446520"/>
-            <a:ext cx="7314120" cy="273240"/>
+            <a:ext cx="7313760" cy="272880"/>
           </a:xfrm>
           <a:prstGeom prst="rect">
             <a:avLst/>
@@ -42907,7 +43173,7 @@
         <p:spPr>
           <a:xfrm>
             <a:off x="11521440" y="6446520"/>
-            <a:ext cx="456120" cy="273240"/>
+            <a:ext cx="455760" cy="272880"/>
           </a:xfrm>
           <a:prstGeom prst="rect">
             <a:avLst/>
@@ -43005,7 +43271,7 @@
         <p:spPr>
           <a:xfrm>
             <a:off x="-1828800" y="4114800"/>
-            <a:ext cx="5485320" cy="5485320"/>
+            <a:ext cx="5484960" cy="5484960"/>
           </a:xfrm>
           <a:prstGeom prst="ellipse">
             <a:avLst/>
@@ -43048,7 +43314,7 @@
         <p:spPr>
           <a:xfrm>
             <a:off x="9601200" y="-2286000"/>
-            <a:ext cx="5485320" cy="5485320"/>
+            <a:ext cx="5484960" cy="5484960"/>
           </a:xfrm>
           <a:prstGeom prst="ellipse">
             <a:avLst/>
@@ -43091,7 +43357,7 @@
         <p:spPr>
           <a:xfrm>
             <a:off x="5596200" y="731520"/>
-            <a:ext cx="1004760" cy="1004760"/>
+            <a:ext cx="1004400" cy="1004400"/>
           </a:xfrm>
           <a:prstGeom prst="ellipse">
             <a:avLst/>
@@ -43138,7 +43404,7 @@
         <p:spPr>
           <a:xfrm>
             <a:off x="5742360" y="877680"/>
-            <a:ext cx="703080" cy="703080"/>
+            <a:ext cx="702720" cy="702720"/>
           </a:xfrm>
           <a:prstGeom prst="rect">
             <a:avLst/>
@@ -43158,7 +43424,7 @@
         <p:spPr>
           <a:xfrm>
             <a:off x="914400" y="1965960"/>
-            <a:ext cx="10359000" cy="364680"/>
+            <a:ext cx="10358640" cy="364320"/>
           </a:xfrm>
           <a:prstGeom prst="rect">
             <a:avLst/>
@@ -43219,7 +43485,7 @@
         <p:spPr>
           <a:xfrm>
             <a:off x="914400" y="2377440"/>
-            <a:ext cx="10359000" cy="2010600"/>
+            <a:ext cx="10358640" cy="2010240"/>
           </a:xfrm>
           <a:prstGeom prst="rect">
             <a:avLst/>
@@ -43280,7 +43546,7 @@
         <p:spPr>
           <a:xfrm>
             <a:off x="1463040" y="4572000"/>
-            <a:ext cx="9261720" cy="1096200"/>
+            <a:ext cx="9261360" cy="1095840"/>
           </a:xfrm>
           <a:prstGeom prst="rect">
             <a:avLst/>
@@ -43341,7 +43607,7 @@
         <p:spPr>
           <a:xfrm>
             <a:off x="11521440" y="6446520"/>
-            <a:ext cx="456120" cy="273240"/>
+            <a:ext cx="455760" cy="272880"/>
           </a:xfrm>
           <a:prstGeom prst="rect">
             <a:avLst/>
@@ -43439,7 +43705,7 @@
         <p:spPr>
           <a:xfrm>
             <a:off x="457200" y="457200"/>
-            <a:ext cx="639000" cy="639000"/>
+            <a:ext cx="638640" cy="638640"/>
           </a:xfrm>
           <a:prstGeom prst="ellipse">
             <a:avLst/>
@@ -43486,7 +43752,7 @@
         <p:spPr>
           <a:xfrm>
             <a:off x="548640" y="548640"/>
-            <a:ext cx="447120" cy="447120"/>
+            <a:ext cx="446760" cy="446760"/>
           </a:xfrm>
           <a:prstGeom prst="rect">
             <a:avLst/>
@@ -43506,7 +43772,7 @@
         <p:spPr>
           <a:xfrm>
             <a:off x="1280160" y="457200"/>
-            <a:ext cx="10423080" cy="639000"/>
+            <a:ext cx="10422720" cy="638640"/>
           </a:xfrm>
           <a:prstGeom prst="rect">
             <a:avLst/>
@@ -43567,7 +43833,7 @@
         <p:spPr>
           <a:xfrm>
             <a:off x="548640" y="1828800"/>
-            <a:ext cx="4753800" cy="4022280"/>
+            <a:ext cx="4753440" cy="4021920"/>
           </a:xfrm>
           <a:prstGeom prst="rect">
             <a:avLst/>
@@ -43703,7 +43969,7 @@
         <p:spPr>
           <a:xfrm>
             <a:off x="5486400" y="1691640"/>
-            <a:ext cx="6216840" cy="4342320"/>
+            <a:ext cx="6216480" cy="4341960"/>
           </a:xfrm>
           <a:prstGeom prst="roundRect">
             <a:avLst>
@@ -43748,7 +44014,7 @@
         <p:spPr>
           <a:xfrm>
             <a:off x="5806440" y="1965960"/>
-            <a:ext cx="5576760" cy="3793680"/>
+            <a:ext cx="5576400" cy="3793320"/>
           </a:xfrm>
           <a:prstGeom prst="rect">
             <a:avLst/>
@@ -44037,7 +44303,7 @@
         <p:spPr>
           <a:xfrm>
             <a:off x="457200" y="6446520"/>
-            <a:ext cx="7314120" cy="273240"/>
+            <a:ext cx="7313760" cy="272880"/>
           </a:xfrm>
           <a:prstGeom prst="rect">
             <a:avLst/>
@@ -44098,7 +44364,7 @@
         <p:spPr>
           <a:xfrm>
             <a:off x="11521440" y="6446520"/>
-            <a:ext cx="456120" cy="273240"/>
+            <a:ext cx="455760" cy="272880"/>
           </a:xfrm>
           <a:prstGeom prst="rect">
             <a:avLst/>
@@ -44196,7 +44462,7 @@
         <p:spPr>
           <a:xfrm>
             <a:off x="457200" y="457200"/>
-            <a:ext cx="639000" cy="639000"/>
+            <a:ext cx="638640" cy="638640"/>
           </a:xfrm>
           <a:prstGeom prst="ellipse">
             <a:avLst/>
@@ -44243,7 +44509,7 @@
         <p:spPr>
           <a:xfrm>
             <a:off x="548640" y="548640"/>
-            <a:ext cx="447120" cy="447120"/>
+            <a:ext cx="446760" cy="446760"/>
           </a:xfrm>
           <a:prstGeom prst="rect">
             <a:avLst/>
@@ -44263,7 +44529,7 @@
         <p:spPr>
           <a:xfrm>
             <a:off x="1280160" y="457200"/>
-            <a:ext cx="10423080" cy="639000"/>
+            <a:ext cx="10422720" cy="638640"/>
           </a:xfrm>
           <a:prstGeom prst="rect">
             <a:avLst/>
@@ -44324,7 +44590,7 @@
         <p:spPr>
           <a:xfrm>
             <a:off x="548640" y="1828800"/>
-            <a:ext cx="4753800" cy="4022280"/>
+            <a:ext cx="4753440" cy="4021920"/>
           </a:xfrm>
           <a:prstGeom prst="rect">
             <a:avLst/>
@@ -44460,7 +44726,7 @@
         <p:spPr>
           <a:xfrm>
             <a:off x="5486400" y="1691640"/>
-            <a:ext cx="6216840" cy="4342320"/>
+            <a:ext cx="6216480" cy="4341960"/>
           </a:xfrm>
           <a:prstGeom prst="roundRect">
             <a:avLst>
@@ -44505,7 +44771,7 @@
         <p:spPr>
           <a:xfrm>
             <a:off x="5806440" y="1965960"/>
-            <a:ext cx="5576760" cy="3793680"/>
+            <a:ext cx="5576400" cy="3793320"/>
           </a:xfrm>
           <a:prstGeom prst="rect">
             <a:avLst/>
@@ -44818,7 +45084,7 @@
         <p:spPr>
           <a:xfrm>
             <a:off x="457200" y="6446520"/>
-            <a:ext cx="7314120" cy="273240"/>
+            <a:ext cx="7313760" cy="272880"/>
           </a:xfrm>
           <a:prstGeom prst="rect">
             <a:avLst/>
@@ -44879,7 +45145,7 @@
         <p:spPr>
           <a:xfrm>
             <a:off x="11521440" y="6446520"/>
-            <a:ext cx="456120" cy="273240"/>
+            <a:ext cx="455760" cy="272880"/>
           </a:xfrm>
           <a:prstGeom prst="rect">
             <a:avLst/>
@@ -44977,7 +45243,7 @@
         <p:spPr>
           <a:xfrm>
             <a:off x="457200" y="457200"/>
-            <a:ext cx="639000" cy="639000"/>
+            <a:ext cx="638640" cy="638640"/>
           </a:xfrm>
           <a:prstGeom prst="ellipse">
             <a:avLst/>
@@ -45024,7 +45290,7 @@
         <p:spPr>
           <a:xfrm>
             <a:off x="548640" y="548640"/>
-            <a:ext cx="447120" cy="447120"/>
+            <a:ext cx="446760" cy="446760"/>
           </a:xfrm>
           <a:prstGeom prst="rect">
             <a:avLst/>
@@ -45044,7 +45310,7 @@
         <p:spPr>
           <a:xfrm>
             <a:off x="1280160" y="457200"/>
-            <a:ext cx="10423080" cy="639000"/>
+            <a:ext cx="10422720" cy="638640"/>
           </a:xfrm>
           <a:prstGeom prst="rect">
             <a:avLst/>
@@ -45105,7 +45371,7 @@
         <p:spPr>
           <a:xfrm>
             <a:off x="548640" y="1828800"/>
-            <a:ext cx="4753800" cy="4022280"/>
+            <a:ext cx="4753440" cy="4021920"/>
           </a:xfrm>
           <a:prstGeom prst="rect">
             <a:avLst/>
@@ -45241,7 +45507,7 @@
         <p:spPr>
           <a:xfrm>
             <a:off x="5486400" y="1691640"/>
-            <a:ext cx="6216840" cy="4342320"/>
+            <a:ext cx="6216480" cy="4341960"/>
           </a:xfrm>
           <a:prstGeom prst="roundRect">
             <a:avLst>
@@ -45286,7 +45552,7 @@
         <p:spPr>
           <a:xfrm>
             <a:off x="5806440" y="1965960"/>
-            <a:ext cx="5576760" cy="3793680"/>
+            <a:ext cx="5576400" cy="3793320"/>
           </a:xfrm>
           <a:prstGeom prst="rect">
             <a:avLst/>
@@ -45623,7 +45889,7 @@
         <p:spPr>
           <a:xfrm>
             <a:off x="457200" y="6446520"/>
-            <a:ext cx="7314120" cy="273240"/>
+            <a:ext cx="7313760" cy="272880"/>
           </a:xfrm>
           <a:prstGeom prst="rect">
             <a:avLst/>
@@ -45684,7 +45950,7 @@
         <p:spPr>
           <a:xfrm>
             <a:off x="11521440" y="6446520"/>
-            <a:ext cx="456120" cy="273240"/>
+            <a:ext cx="455760" cy="272880"/>
           </a:xfrm>
           <a:prstGeom prst="rect">
             <a:avLst/>
@@ -45782,7 +46048,7 @@
         <p:spPr>
           <a:xfrm>
             <a:off x="457200" y="457200"/>
-            <a:ext cx="639000" cy="639000"/>
+            <a:ext cx="638640" cy="638640"/>
           </a:xfrm>
           <a:prstGeom prst="ellipse">
             <a:avLst/>
@@ -45829,7 +46095,7 @@
         <p:spPr>
           <a:xfrm>
             <a:off x="548640" y="548640"/>
-            <a:ext cx="447120" cy="447120"/>
+            <a:ext cx="446760" cy="446760"/>
           </a:xfrm>
           <a:prstGeom prst="rect">
             <a:avLst/>
@@ -45849,7 +46115,7 @@
         <p:spPr>
           <a:xfrm>
             <a:off x="1280160" y="457200"/>
-            <a:ext cx="10423080" cy="639000"/>
+            <a:ext cx="10422720" cy="638640"/>
           </a:xfrm>
           <a:prstGeom prst="rect">
             <a:avLst/>
@@ -45910,7 +46176,7 @@
         <p:spPr>
           <a:xfrm>
             <a:off x="548640" y="1828800"/>
-            <a:ext cx="4753800" cy="4022280"/>
+            <a:ext cx="4753440" cy="4021920"/>
           </a:xfrm>
           <a:prstGeom prst="rect">
             <a:avLst/>
@@ -46046,7 +46312,7 @@
         <p:spPr>
           <a:xfrm>
             <a:off x="5486400" y="1691640"/>
-            <a:ext cx="6216840" cy="4342320"/>
+            <a:ext cx="6216480" cy="4341960"/>
           </a:xfrm>
           <a:prstGeom prst="roundRect">
             <a:avLst>
@@ -46091,7 +46357,7 @@
         <p:spPr>
           <a:xfrm>
             <a:off x="5806440" y="1965960"/>
-            <a:ext cx="5576760" cy="3793680"/>
+            <a:ext cx="5576400" cy="3793320"/>
           </a:xfrm>
           <a:prstGeom prst="rect">
             <a:avLst/>
@@ -46386,7 +46652,7 @@
         <p:spPr>
           <a:xfrm>
             <a:off x="457200" y="6446520"/>
-            <a:ext cx="7314120" cy="273240"/>
+            <a:ext cx="7313760" cy="272880"/>
           </a:xfrm>
           <a:prstGeom prst="rect">
             <a:avLst/>
@@ -46447,7 +46713,7 @@
         <p:spPr>
           <a:xfrm>
             <a:off x="11521440" y="6446520"/>
-            <a:ext cx="456120" cy="273240"/>
+            <a:ext cx="455760" cy="272880"/>
           </a:xfrm>
           <a:prstGeom prst="rect">
             <a:avLst/>
@@ -46545,7 +46811,7 @@
         <p:spPr>
           <a:xfrm>
             <a:off x="457200" y="457200"/>
-            <a:ext cx="639000" cy="639000"/>
+            <a:ext cx="638640" cy="638640"/>
           </a:xfrm>
           <a:prstGeom prst="ellipse">
             <a:avLst/>
@@ -46592,7 +46858,7 @@
         <p:spPr>
           <a:xfrm>
             <a:off x="548640" y="548640"/>
-            <a:ext cx="447120" cy="447120"/>
+            <a:ext cx="446760" cy="446760"/>
           </a:xfrm>
           <a:prstGeom prst="rect">
             <a:avLst/>
@@ -46612,7 +46878,7 @@
         <p:spPr>
           <a:xfrm>
             <a:off x="1280160" y="457200"/>
-            <a:ext cx="10423080" cy="639000"/>
+            <a:ext cx="10422720" cy="638640"/>
           </a:xfrm>
           <a:prstGeom prst="rect">
             <a:avLst/>
@@ -46673,7 +46939,7 @@
         <p:spPr>
           <a:xfrm>
             <a:off x="548640" y="1828800"/>
-            <a:ext cx="4753800" cy="4022280"/>
+            <a:ext cx="4753440" cy="4021920"/>
           </a:xfrm>
           <a:prstGeom prst="rect">
             <a:avLst/>
@@ -46809,7 +47075,7 @@
         <p:spPr>
           <a:xfrm>
             <a:off x="5486400" y="1691640"/>
-            <a:ext cx="6216840" cy="4342320"/>
+            <a:ext cx="6216480" cy="4341960"/>
           </a:xfrm>
           <a:prstGeom prst="roundRect">
             <a:avLst>
@@ -46854,7 +47120,7 @@
         <p:spPr>
           <a:xfrm>
             <a:off x="5806440" y="1965960"/>
-            <a:ext cx="5576760" cy="3793680"/>
+            <a:ext cx="5576400" cy="3793320"/>
           </a:xfrm>
           <a:prstGeom prst="rect">
             <a:avLst/>
@@ -47095,7 +47361,7 @@
         <p:spPr>
           <a:xfrm>
             <a:off x="457200" y="6446520"/>
-            <a:ext cx="7314120" cy="273240"/>
+            <a:ext cx="7313760" cy="272880"/>
           </a:xfrm>
           <a:prstGeom prst="rect">
             <a:avLst/>
@@ -47156,7 +47422,7 @@
         <p:spPr>
           <a:xfrm>
             <a:off x="11521440" y="6446520"/>
-            <a:ext cx="456120" cy="273240"/>
+            <a:ext cx="455760" cy="272880"/>
           </a:xfrm>
           <a:prstGeom prst="rect">
             <a:avLst/>

--- a/slides/1_python_slides/8_advanced_functions.pptx
+++ b/slides/1_python_slides/8_advanced_functions.pptx
@@ -177,117 +177,7 @@
                 <a:uFillTx/>
                 <a:latin typeface="Arial"/>
               </a:rPr>
-              <a:t>Cli</a:t>
-            </a:r>
-            <a:r>
-              <a:rPr lang="en-US" sz="2000" b="0" u="none" strike="noStrike">
-                <a:solidFill>
-                  <a:srgbClr val="000000"/>
-                </a:solidFill>
-                <a:effectLst/>
-                <a:uFillTx/>
-                <a:latin typeface="Arial"/>
-              </a:rPr>
-              <a:t>ck </a:t>
-            </a:r>
-            <a:r>
-              <a:rPr lang="en-US" sz="2000" b="0" u="none" strike="noStrike">
-                <a:solidFill>
-                  <a:srgbClr val="000000"/>
-                </a:solidFill>
-                <a:effectLst/>
-                <a:uFillTx/>
-                <a:latin typeface="Arial"/>
-              </a:rPr>
-              <a:t>to </a:t>
-            </a:r>
-            <a:r>
-              <a:rPr lang="en-US" sz="2000" b="0" u="none" strike="noStrike">
-                <a:solidFill>
-                  <a:srgbClr val="000000"/>
-                </a:solidFill>
-                <a:effectLst/>
-                <a:uFillTx/>
-                <a:latin typeface="Arial"/>
-              </a:rPr>
-              <a:t>edi</a:t>
-            </a:r>
-            <a:r>
-              <a:rPr lang="en-US" sz="2000" b="0" u="none" strike="noStrike">
-                <a:solidFill>
-                  <a:srgbClr val="000000"/>
-                </a:solidFill>
-                <a:effectLst/>
-                <a:uFillTx/>
-                <a:latin typeface="Arial"/>
-              </a:rPr>
-              <a:t>t </a:t>
-            </a:r>
-            <a:r>
-              <a:rPr lang="en-US" sz="2000" b="0" u="none" strike="noStrike">
-                <a:solidFill>
-                  <a:srgbClr val="000000"/>
-                </a:solidFill>
-                <a:effectLst/>
-                <a:uFillTx/>
-                <a:latin typeface="Arial"/>
-              </a:rPr>
-              <a:t>the </a:t>
-            </a:r>
-            <a:r>
-              <a:rPr lang="en-US" sz="2000" b="0" u="none" strike="noStrike">
-                <a:solidFill>
-                  <a:srgbClr val="000000"/>
-                </a:solidFill>
-                <a:effectLst/>
-                <a:uFillTx/>
-                <a:latin typeface="Arial"/>
-              </a:rPr>
-              <a:t>not</a:t>
-            </a:r>
-            <a:r>
-              <a:rPr lang="en-US" sz="2000" b="0" u="none" strike="noStrike">
-                <a:solidFill>
-                  <a:srgbClr val="000000"/>
-                </a:solidFill>
-                <a:effectLst/>
-                <a:uFillTx/>
-                <a:latin typeface="Arial"/>
-              </a:rPr>
-              <a:t>es </a:t>
-            </a:r>
-            <a:r>
-              <a:rPr lang="en-US" sz="2000" b="0" u="none" strike="noStrike">
-                <a:solidFill>
-                  <a:srgbClr val="000000"/>
-                </a:solidFill>
-                <a:effectLst/>
-                <a:uFillTx/>
-                <a:latin typeface="Arial"/>
-              </a:rPr>
-              <a:t>for</a:t>
-            </a:r>
-            <a:r>
-              <a:rPr lang="en-US" sz="2000" b="0" u="none" strike="noStrike">
-                <a:solidFill>
-                  <a:srgbClr val="000000"/>
-                </a:solidFill>
-                <a:effectLst/>
-                <a:uFillTx/>
-                <a:latin typeface="Arial"/>
-              </a:rPr>
-              <a:t>ma</a:t>
-            </a:r>
-            <a:r>
-              <a:rPr lang="en-US" sz="2000" b="0" u="none" strike="noStrike">
-                <a:solidFill>
-                  <a:srgbClr val="000000"/>
-                </a:solidFill>
-                <a:effectLst/>
-                <a:uFillTx/>
-                <a:latin typeface="Arial"/>
-              </a:rPr>
-              <a:t>t</a:t>
+              <a:t>Click to edit the notes format</a:t>
             </a:r>
             <a:endParaRPr lang="en-US" sz="2000" b="0" u="none" strike="noStrike">
               <a:solidFill>
@@ -529,7 +419,7 @@
             <a:pPr indent="0" algn="r">
               <a:buNone/>
             </a:pPr>
-            <a:fld id="{2E390FAB-ACE8-46BF-AC32-6AA8B69F6EF9}" type="slidenum">
+            <a:fld id="{22DD93C7-8C34-4698-B8AD-8B1DDCCE468D}" type="slidenum">
               <a:rPr lang="en-US" sz="1400" b="0" u="none" strike="noStrike">
                 <a:solidFill>
                   <a:srgbClr val="000000"/>
@@ -587,7 +477,7 @@
         <p:spPr>
           <a:xfrm>
             <a:off x="685800" y="1143000"/>
-            <a:ext cx="5484960" cy="3084840"/>
+            <a:ext cx="5484600" cy="3084480"/>
           </a:xfrm>
           <a:prstGeom prst="rect">
             <a:avLst/>
@@ -610,7 +500,7 @@
         <p:spPr>
           <a:xfrm>
             <a:off x="685800" y="4400640"/>
-            <a:ext cx="5484960" cy="3598920"/>
+            <a:ext cx="5484600" cy="3598560"/>
           </a:xfrm>
           <a:prstGeom prst="rect">
             <a:avLst/>
@@ -652,7 +542,7 @@
         <p:spPr>
           <a:xfrm>
             <a:off x="3884760" y="8685360"/>
-            <a:ext cx="2970360" cy="457200"/>
+            <a:ext cx="2970000" cy="456840"/>
           </a:xfrm>
           <a:prstGeom prst="rect">
             <a:avLst/>
@@ -696,7 +586,7 @@
                 <a:tab pos="0" algn="l"/>
               </a:tabLst>
             </a:pPr>
-            <a:fld id="{E814BF08-2013-4B60-8A52-12B32E62135F}" type="slidenum">
+            <a:fld id="{6DEFC95E-5133-4565-9181-D5852A3AF219}" type="slidenum">
               <a:rPr lang="en-US" sz="1200" b="0" u="none" strike="noStrike">
                 <a:solidFill>
                   <a:schemeClr val="dk1"/>
@@ -754,7 +644,7 @@
         <p:spPr>
           <a:xfrm>
             <a:off x="685800" y="1143000"/>
-            <a:ext cx="5484960" cy="3084840"/>
+            <a:ext cx="5484600" cy="3084480"/>
           </a:xfrm>
           <a:prstGeom prst="rect">
             <a:avLst/>
@@ -777,7 +667,7 @@
         <p:spPr>
           <a:xfrm>
             <a:off x="685800" y="4400640"/>
-            <a:ext cx="5484960" cy="3598920"/>
+            <a:ext cx="5484600" cy="3598560"/>
           </a:xfrm>
           <a:prstGeom prst="rect">
             <a:avLst/>
@@ -819,7 +709,7 @@
         <p:spPr>
           <a:xfrm>
             <a:off x="3884760" y="8685360"/>
-            <a:ext cx="2970360" cy="457200"/>
+            <a:ext cx="2970000" cy="456840"/>
           </a:xfrm>
           <a:prstGeom prst="rect">
             <a:avLst/>
@@ -863,7 +753,7 @@
                 <a:tab pos="0" algn="l"/>
               </a:tabLst>
             </a:pPr>
-            <a:fld id="{86B225FF-BA91-4E4A-9440-4D026BBFA157}" type="slidenum">
+            <a:fld id="{1AEF960A-FA49-492D-98FB-D05D427CC3F9}" type="slidenum">
               <a:rPr lang="en-US" sz="1200" b="0" u="none" strike="noStrike">
                 <a:solidFill>
                   <a:schemeClr val="dk1"/>
@@ -921,7 +811,7 @@
         <p:spPr>
           <a:xfrm>
             <a:off x="685800" y="1143000"/>
-            <a:ext cx="5484960" cy="3084840"/>
+            <a:ext cx="5484600" cy="3084480"/>
           </a:xfrm>
           <a:prstGeom prst="rect">
             <a:avLst/>
@@ -944,7 +834,7 @@
         <p:spPr>
           <a:xfrm>
             <a:off x="685800" y="4400640"/>
-            <a:ext cx="5484960" cy="3598920"/>
+            <a:ext cx="5484600" cy="3598560"/>
           </a:xfrm>
           <a:prstGeom prst="rect">
             <a:avLst/>
@@ -986,7 +876,7 @@
         <p:spPr>
           <a:xfrm>
             <a:off x="3884760" y="8685360"/>
-            <a:ext cx="2970360" cy="457200"/>
+            <a:ext cx="2970000" cy="456840"/>
           </a:xfrm>
           <a:prstGeom prst="rect">
             <a:avLst/>
@@ -1030,7 +920,7 @@
                 <a:tab pos="0" algn="l"/>
               </a:tabLst>
             </a:pPr>
-            <a:fld id="{EBA6B951-F2E7-45EE-BB72-CF8E41F98842}" type="slidenum">
+            <a:fld id="{88D8E1DE-7E21-4C0F-B60E-9B41632DF6F7}" type="slidenum">
               <a:rPr lang="en-US" sz="1200" b="0" u="none" strike="noStrike">
                 <a:solidFill>
                   <a:schemeClr val="dk1"/>
@@ -1088,7 +978,7 @@
         <p:spPr>
           <a:xfrm>
             <a:off x="685800" y="1143000"/>
-            <a:ext cx="5485320" cy="3085200"/>
+            <a:ext cx="5484960" cy="3084840"/>
           </a:xfrm>
           <a:prstGeom prst="rect">
             <a:avLst/>
@@ -1111,7 +1001,7 @@
         <p:spPr>
           <a:xfrm>
             <a:off x="685800" y="4400640"/>
-            <a:ext cx="5484960" cy="3598920"/>
+            <a:ext cx="5484600" cy="3598560"/>
           </a:xfrm>
           <a:prstGeom prst="rect">
             <a:avLst/>
@@ -1153,7 +1043,7 @@
         <p:spPr>
           <a:xfrm>
             <a:off x="3884760" y="8685360"/>
-            <a:ext cx="2970360" cy="457200"/>
+            <a:ext cx="2970000" cy="456840"/>
           </a:xfrm>
           <a:prstGeom prst="rect">
             <a:avLst/>
@@ -1197,7 +1087,7 @@
                 <a:tab pos="0" algn="l"/>
               </a:tabLst>
             </a:pPr>
-            <a:fld id="{A813F961-C22C-4FDB-A741-0796C5CDC2EE}" type="slidenum">
+            <a:fld id="{8A144376-FA3A-4F7D-B681-AECE852D71DB}" type="slidenum">
               <a:rPr lang="en-US" sz="1200" b="0" u="none" strike="noStrike">
                 <a:solidFill>
                   <a:schemeClr val="dk1"/>
@@ -1255,7 +1145,7 @@
         <p:spPr>
           <a:xfrm>
             <a:off x="685800" y="1143000"/>
-            <a:ext cx="5485320" cy="3085200"/>
+            <a:ext cx="5484960" cy="3084840"/>
           </a:xfrm>
           <a:prstGeom prst="rect">
             <a:avLst/>
@@ -1278,7 +1168,7 @@
         <p:spPr>
           <a:xfrm>
             <a:off x="685800" y="4400640"/>
-            <a:ext cx="5484960" cy="3598920"/>
+            <a:ext cx="5484600" cy="3598560"/>
           </a:xfrm>
           <a:prstGeom prst="rect">
             <a:avLst/>
@@ -1320,7 +1210,7 @@
         <p:spPr>
           <a:xfrm>
             <a:off x="3884760" y="8685360"/>
-            <a:ext cx="2970360" cy="457200"/>
+            <a:ext cx="2970000" cy="456840"/>
           </a:xfrm>
           <a:prstGeom prst="rect">
             <a:avLst/>
@@ -1364,7 +1254,7 @@
                 <a:tab pos="0" algn="l"/>
               </a:tabLst>
             </a:pPr>
-            <a:fld id="{0C56A83F-3FAD-4485-A869-D576D8403B1E}" type="slidenum">
+            <a:fld id="{C20698E7-D5BD-4A73-8CFC-18FD261515C4}" type="slidenum">
               <a:rPr lang="en-US" sz="1200" b="0" u="none" strike="noStrike">
                 <a:solidFill>
                   <a:schemeClr val="dk1"/>
@@ -1422,7 +1312,7 @@
         <p:spPr>
           <a:xfrm>
             <a:off x="685800" y="1143000"/>
-            <a:ext cx="5485320" cy="3085200"/>
+            <a:ext cx="5484960" cy="3084840"/>
           </a:xfrm>
           <a:prstGeom prst="rect">
             <a:avLst/>
@@ -1445,7 +1335,7 @@
         <p:spPr>
           <a:xfrm>
             <a:off x="685800" y="4400640"/>
-            <a:ext cx="5484960" cy="3598920"/>
+            <a:ext cx="5484600" cy="3598560"/>
           </a:xfrm>
           <a:prstGeom prst="rect">
             <a:avLst/>
@@ -1487,7 +1377,7 @@
         <p:spPr>
           <a:xfrm>
             <a:off x="3884760" y="8685360"/>
-            <a:ext cx="2970360" cy="457200"/>
+            <a:ext cx="2970000" cy="456840"/>
           </a:xfrm>
           <a:prstGeom prst="rect">
             <a:avLst/>
@@ -1531,7 +1421,7 @@
                 <a:tab pos="0" algn="l"/>
               </a:tabLst>
             </a:pPr>
-            <a:fld id="{907E071A-2691-4AF2-85C0-88A420D95F53}" type="slidenum">
+            <a:fld id="{E26928F7-D54F-429E-8F95-D5216194B728}" type="slidenum">
               <a:rPr lang="en-US" sz="1200" b="0" u="none" strike="noStrike">
                 <a:solidFill>
                   <a:schemeClr val="dk1"/>
@@ -1589,7 +1479,7 @@
         <p:spPr>
           <a:xfrm>
             <a:off x="685800" y="1143000"/>
-            <a:ext cx="5485320" cy="3085200"/>
+            <a:ext cx="5484960" cy="3084840"/>
           </a:xfrm>
           <a:prstGeom prst="rect">
             <a:avLst/>
@@ -1612,7 +1502,7 @@
         <p:spPr>
           <a:xfrm>
             <a:off x="685800" y="4400640"/>
-            <a:ext cx="5484960" cy="3598920"/>
+            <a:ext cx="5484600" cy="3598560"/>
           </a:xfrm>
           <a:prstGeom prst="rect">
             <a:avLst/>
@@ -1654,7 +1544,7 @@
         <p:spPr>
           <a:xfrm>
             <a:off x="3884760" y="8685360"/>
-            <a:ext cx="2970360" cy="457200"/>
+            <a:ext cx="2970000" cy="456840"/>
           </a:xfrm>
           <a:prstGeom prst="rect">
             <a:avLst/>
@@ -1698,7 +1588,7 @@
                 <a:tab pos="0" algn="l"/>
               </a:tabLst>
             </a:pPr>
-            <a:fld id="{6140F361-4F37-49F0-8FBF-EE9B53239EB6}" type="slidenum">
+            <a:fld id="{B1091714-7477-441B-A29C-4809FD5ED7D0}" type="slidenum">
               <a:rPr lang="en-US" sz="1200" b="0" u="none" strike="noStrike">
                 <a:solidFill>
                   <a:schemeClr val="dk1"/>
@@ -1756,7 +1646,7 @@
         <p:spPr>
           <a:xfrm>
             <a:off x="685800" y="1143000"/>
-            <a:ext cx="5485320" cy="3085200"/>
+            <a:ext cx="5484960" cy="3084840"/>
           </a:xfrm>
           <a:prstGeom prst="rect">
             <a:avLst/>
@@ -1779,7 +1669,7 @@
         <p:spPr>
           <a:xfrm>
             <a:off x="685800" y="4400640"/>
-            <a:ext cx="5484960" cy="3598920"/>
+            <a:ext cx="5484600" cy="3598560"/>
           </a:xfrm>
           <a:prstGeom prst="rect">
             <a:avLst/>
@@ -1821,7 +1711,7 @@
         <p:spPr>
           <a:xfrm>
             <a:off x="3884760" y="8685360"/>
-            <a:ext cx="2970360" cy="457200"/>
+            <a:ext cx="2970000" cy="456840"/>
           </a:xfrm>
           <a:prstGeom prst="rect">
             <a:avLst/>
@@ -1865,7 +1755,7 @@
                 <a:tab pos="0" algn="l"/>
               </a:tabLst>
             </a:pPr>
-            <a:fld id="{E7F8E8CC-3106-49FF-97E9-0F127FDFE9D8}" type="slidenum">
+            <a:fld id="{FF094BE1-7C19-4CC4-B7B5-F75D81209237}" type="slidenum">
               <a:rPr lang="en-US" sz="1200" b="0" u="none" strike="noStrike">
                 <a:solidFill>
                   <a:schemeClr val="dk1"/>
@@ -1923,7 +1813,7 @@
         <p:spPr>
           <a:xfrm>
             <a:off x="685800" y="1143000"/>
-            <a:ext cx="5484960" cy="3084840"/>
+            <a:ext cx="5484600" cy="3084480"/>
           </a:xfrm>
           <a:prstGeom prst="rect">
             <a:avLst/>
@@ -1946,7 +1836,7 @@
         <p:spPr>
           <a:xfrm>
             <a:off x="685800" y="4400640"/>
-            <a:ext cx="5484960" cy="3598920"/>
+            <a:ext cx="5484600" cy="3598560"/>
           </a:xfrm>
           <a:prstGeom prst="rect">
             <a:avLst/>
@@ -1988,7 +1878,7 @@
         <p:spPr>
           <a:xfrm>
             <a:off x="3884760" y="8685360"/>
-            <a:ext cx="2970360" cy="457200"/>
+            <a:ext cx="2970000" cy="456840"/>
           </a:xfrm>
           <a:prstGeom prst="rect">
             <a:avLst/>
@@ -2032,7 +1922,7 @@
                 <a:tab pos="0" algn="l"/>
               </a:tabLst>
             </a:pPr>
-            <a:fld id="{3E3F785A-2034-4E0E-B07D-DAA99F297FA0}" type="slidenum">
+            <a:fld id="{A362A5D5-0345-4A4D-9A90-DD42D4CE018F}" type="slidenum">
               <a:rPr lang="en-US" sz="1200" b="0" u="none" strike="noStrike">
                 <a:solidFill>
                   <a:schemeClr val="dk1"/>
@@ -2090,7 +1980,7 @@
         <p:spPr>
           <a:xfrm>
             <a:off x="685800" y="1143000"/>
-            <a:ext cx="5484960" cy="3084840"/>
+            <a:ext cx="5484600" cy="3084480"/>
           </a:xfrm>
           <a:prstGeom prst="rect">
             <a:avLst/>
@@ -2113,7 +2003,7 @@
         <p:spPr>
           <a:xfrm>
             <a:off x="685800" y="4400640"/>
-            <a:ext cx="5484960" cy="3598920"/>
+            <a:ext cx="5484600" cy="3598560"/>
           </a:xfrm>
           <a:prstGeom prst="rect">
             <a:avLst/>
@@ -2155,7 +2045,7 @@
         <p:spPr>
           <a:xfrm>
             <a:off x="3884760" y="8685360"/>
-            <a:ext cx="2970360" cy="457200"/>
+            <a:ext cx="2970000" cy="456840"/>
           </a:xfrm>
           <a:prstGeom prst="rect">
             <a:avLst/>
@@ -2199,7 +2089,7 @@
                 <a:tab pos="0" algn="l"/>
               </a:tabLst>
             </a:pPr>
-            <a:fld id="{BB25C921-E208-4D6E-9D10-0EBAFEB64B44}" type="slidenum">
+            <a:fld id="{690FF868-E882-4B11-954A-04F527E6920B}" type="slidenum">
               <a:rPr lang="en-US" sz="1200" b="0" u="none" strike="noStrike">
                 <a:solidFill>
                   <a:schemeClr val="dk1"/>
@@ -2257,7 +2147,7 @@
         <p:spPr>
           <a:xfrm>
             <a:off x="685800" y="1143000"/>
-            <a:ext cx="5484960" cy="3084840"/>
+            <a:ext cx="5484600" cy="3084480"/>
           </a:xfrm>
           <a:prstGeom prst="rect">
             <a:avLst/>
@@ -2280,7 +2170,7 @@
         <p:spPr>
           <a:xfrm>
             <a:off x="685800" y="4400640"/>
-            <a:ext cx="5484960" cy="3598920"/>
+            <a:ext cx="5484600" cy="3598560"/>
           </a:xfrm>
           <a:prstGeom prst="rect">
             <a:avLst/>
@@ -2322,7 +2212,7 @@
         <p:spPr>
           <a:xfrm>
             <a:off x="3884760" y="8685360"/>
-            <a:ext cx="2970360" cy="457200"/>
+            <a:ext cx="2970000" cy="456840"/>
           </a:xfrm>
           <a:prstGeom prst="rect">
             <a:avLst/>
@@ -2366,7 +2256,7 @@
                 <a:tab pos="0" algn="l"/>
               </a:tabLst>
             </a:pPr>
-            <a:fld id="{FD049354-5258-4231-BE71-F6CC9F589528}" type="slidenum">
+            <a:fld id="{2414BE5E-07A5-435A-8302-C4CD6C8C0F97}" type="slidenum">
               <a:rPr lang="en-US" sz="1200" b="0" u="none" strike="noStrike">
                 <a:solidFill>
                   <a:schemeClr val="dk1"/>
@@ -2424,7 +2314,7 @@
         <p:spPr>
           <a:xfrm>
             <a:off x="685800" y="1143000"/>
-            <a:ext cx="5484960" cy="3084840"/>
+            <a:ext cx="5484600" cy="3084480"/>
           </a:xfrm>
           <a:prstGeom prst="rect">
             <a:avLst/>
@@ -2447,7 +2337,7 @@
         <p:spPr>
           <a:xfrm>
             <a:off x="685800" y="4400640"/>
-            <a:ext cx="5484960" cy="3598920"/>
+            <a:ext cx="5484600" cy="3598560"/>
           </a:xfrm>
           <a:prstGeom prst="rect">
             <a:avLst/>
@@ -2489,7 +2379,7 @@
         <p:spPr>
           <a:xfrm>
             <a:off x="3884760" y="8685360"/>
-            <a:ext cx="2970360" cy="457200"/>
+            <a:ext cx="2970000" cy="456840"/>
           </a:xfrm>
           <a:prstGeom prst="rect">
             <a:avLst/>
@@ -2533,7 +2423,7 @@
                 <a:tab pos="0" algn="l"/>
               </a:tabLst>
             </a:pPr>
-            <a:fld id="{5CED5AB7-E633-4768-B672-5F419D5DB5C4}" type="slidenum">
+            <a:fld id="{0FA0FF23-801F-4918-BA0F-A42A1D4142DA}" type="slidenum">
               <a:rPr lang="en-US" sz="1200" b="0" u="none" strike="noStrike">
                 <a:solidFill>
                   <a:schemeClr val="dk1"/>
@@ -2591,7 +2481,7 @@
         <p:spPr>
           <a:xfrm>
             <a:off x="685800" y="1143000"/>
-            <a:ext cx="5484960" cy="3084840"/>
+            <a:ext cx="5484600" cy="3084480"/>
           </a:xfrm>
           <a:prstGeom prst="rect">
             <a:avLst/>
@@ -2614,7 +2504,7 @@
         <p:spPr>
           <a:xfrm>
             <a:off x="685800" y="4400640"/>
-            <a:ext cx="5484960" cy="3598920"/>
+            <a:ext cx="5484600" cy="3598560"/>
           </a:xfrm>
           <a:prstGeom prst="rect">
             <a:avLst/>
@@ -2656,7 +2546,7 @@
         <p:spPr>
           <a:xfrm>
             <a:off x="3884760" y="8685360"/>
-            <a:ext cx="2970360" cy="457200"/>
+            <a:ext cx="2970000" cy="456840"/>
           </a:xfrm>
           <a:prstGeom prst="rect">
             <a:avLst/>
@@ -2700,7 +2590,7 @@
                 <a:tab pos="0" algn="l"/>
               </a:tabLst>
             </a:pPr>
-            <a:fld id="{2489E55E-388F-4638-BBDE-68755B6F5246}" type="slidenum">
+            <a:fld id="{A31377A9-B6D3-477C-8B2E-20AA08827FC8}" type="slidenum">
               <a:rPr lang="en-US" sz="1200" b="0" u="none" strike="noStrike">
                 <a:solidFill>
                   <a:schemeClr val="dk1"/>
@@ -2758,7 +2648,7 @@
         <p:spPr>
           <a:xfrm>
             <a:off x="685800" y="1143000"/>
-            <a:ext cx="5484960" cy="3084840"/>
+            <a:ext cx="5484600" cy="3084480"/>
           </a:xfrm>
           <a:prstGeom prst="rect">
             <a:avLst/>
@@ -2781,7 +2671,7 @@
         <p:spPr>
           <a:xfrm>
             <a:off x="685800" y="4400640"/>
-            <a:ext cx="5484960" cy="3598920"/>
+            <a:ext cx="5484600" cy="3598560"/>
           </a:xfrm>
           <a:prstGeom prst="rect">
             <a:avLst/>
@@ -2823,7 +2713,7 @@
         <p:spPr>
           <a:xfrm>
             <a:off x="3884760" y="8685360"/>
-            <a:ext cx="2970360" cy="457200"/>
+            <a:ext cx="2970000" cy="456840"/>
           </a:xfrm>
           <a:prstGeom prst="rect">
             <a:avLst/>
@@ -2867,7 +2757,7 @@
                 <a:tab pos="0" algn="l"/>
               </a:tabLst>
             </a:pPr>
-            <a:fld id="{099A011F-9D33-4ABE-85A5-FC5B605C82F7}" type="slidenum">
+            <a:fld id="{7160A416-872E-4AA0-A25A-D8CFB21420C5}" type="slidenum">
               <a:rPr lang="en-US" sz="1200" b="0" u="none" strike="noStrike">
                 <a:solidFill>
                   <a:schemeClr val="dk1"/>
@@ -2925,7 +2815,7 @@
         <p:spPr>
           <a:xfrm>
             <a:off x="685800" y="1143000"/>
-            <a:ext cx="5484960" cy="3084840"/>
+            <a:ext cx="5484600" cy="3084480"/>
           </a:xfrm>
           <a:prstGeom prst="rect">
             <a:avLst/>
@@ -2948,7 +2838,7 @@
         <p:spPr>
           <a:xfrm>
             <a:off x="685800" y="4400640"/>
-            <a:ext cx="5484960" cy="3598920"/>
+            <a:ext cx="5484600" cy="3598560"/>
           </a:xfrm>
           <a:prstGeom prst="rect">
             <a:avLst/>
@@ -2990,7 +2880,7 @@
         <p:spPr>
           <a:xfrm>
             <a:off x="3884760" y="8685360"/>
-            <a:ext cx="2970360" cy="457200"/>
+            <a:ext cx="2970000" cy="456840"/>
           </a:xfrm>
           <a:prstGeom prst="rect">
             <a:avLst/>
@@ -3034,7 +2924,7 @@
                 <a:tab pos="0" algn="l"/>
               </a:tabLst>
             </a:pPr>
-            <a:fld id="{BA57BF44-30A5-47E3-8797-2E1AEA7E3802}" type="slidenum">
+            <a:fld id="{A47384B2-BA5D-4EE6-81B2-38E1FF894026}" type="slidenum">
               <a:rPr lang="en-US" sz="1200" b="0" u="none" strike="noStrike">
                 <a:solidFill>
                   <a:schemeClr val="dk1"/>
@@ -3092,7 +2982,7 @@
         <p:spPr>
           <a:xfrm>
             <a:off x="685800" y="1143000"/>
-            <a:ext cx="5484960" cy="3084840"/>
+            <a:ext cx="5484600" cy="3084480"/>
           </a:xfrm>
           <a:prstGeom prst="rect">
             <a:avLst/>
@@ -3115,7 +3005,7 @@
         <p:spPr>
           <a:xfrm>
             <a:off x="685800" y="4400640"/>
-            <a:ext cx="5484960" cy="3598920"/>
+            <a:ext cx="5484600" cy="3598560"/>
           </a:xfrm>
           <a:prstGeom prst="rect">
             <a:avLst/>
@@ -3157,7 +3047,7 @@
         <p:spPr>
           <a:xfrm>
             <a:off x="3884760" y="8685360"/>
-            <a:ext cx="2970360" cy="457200"/>
+            <a:ext cx="2970000" cy="456840"/>
           </a:xfrm>
           <a:prstGeom prst="rect">
             <a:avLst/>
@@ -3201,7 +3091,7 @@
                 <a:tab pos="0" algn="l"/>
               </a:tabLst>
             </a:pPr>
-            <a:fld id="{04E267A1-E7AB-44E2-8F19-8E7E65C93C0D}" type="slidenum">
+            <a:fld id="{B7A54274-76D0-4390-8111-95714251C10B}" type="slidenum">
               <a:rPr lang="en-US" sz="1200" b="0" u="none" strike="noStrike">
                 <a:solidFill>
                   <a:schemeClr val="dk1"/>
@@ -3259,7 +3149,7 @@
         <p:spPr>
           <a:xfrm>
             <a:off x="685800" y="1143000"/>
-            <a:ext cx="5484960" cy="3084840"/>
+            <a:ext cx="5484600" cy="3084480"/>
           </a:xfrm>
           <a:prstGeom prst="rect">
             <a:avLst/>
@@ -3282,7 +3172,7 @@
         <p:spPr>
           <a:xfrm>
             <a:off x="685800" y="4400640"/>
-            <a:ext cx="5484960" cy="3598920"/>
+            <a:ext cx="5484600" cy="3598560"/>
           </a:xfrm>
           <a:prstGeom prst="rect">
             <a:avLst/>
@@ -3324,7 +3214,7 @@
         <p:spPr>
           <a:xfrm>
             <a:off x="3884760" y="8685360"/>
-            <a:ext cx="2970360" cy="457200"/>
+            <a:ext cx="2970000" cy="456840"/>
           </a:xfrm>
           <a:prstGeom prst="rect">
             <a:avLst/>
@@ -3368,7 +3258,7 @@
                 <a:tab pos="0" algn="l"/>
               </a:tabLst>
             </a:pPr>
-            <a:fld id="{D892159D-1A31-495F-860B-21010C881384}" type="slidenum">
+            <a:fld id="{FEDCDA7E-513E-4238-85AC-AD5FDC91F7EF}" type="slidenum">
               <a:rPr lang="en-US" sz="1200" b="0" u="none" strike="noStrike">
                 <a:solidFill>
                   <a:schemeClr val="dk1"/>
@@ -3426,7 +3316,7 @@
         <p:spPr>
           <a:xfrm>
             <a:off x="685800" y="1143000"/>
-            <a:ext cx="5484960" cy="3084840"/>
+            <a:ext cx="5484600" cy="3084480"/>
           </a:xfrm>
           <a:prstGeom prst="rect">
             <a:avLst/>
@@ -3449,7 +3339,7 @@
         <p:spPr>
           <a:xfrm>
             <a:off x="685800" y="4400640"/>
-            <a:ext cx="5484960" cy="3598920"/>
+            <a:ext cx="5484600" cy="3598560"/>
           </a:xfrm>
           <a:prstGeom prst="rect">
             <a:avLst/>
@@ -3491,7 +3381,7 @@
         <p:spPr>
           <a:xfrm>
             <a:off x="3884760" y="8685360"/>
-            <a:ext cx="2970360" cy="457200"/>
+            <a:ext cx="2970000" cy="456840"/>
           </a:xfrm>
           <a:prstGeom prst="rect">
             <a:avLst/>
@@ -3535,7 +3425,7 @@
                 <a:tab pos="0" algn="l"/>
               </a:tabLst>
             </a:pPr>
-            <a:fld id="{09ACB567-E0D4-4683-A668-CB3860DEDB8D}" type="slidenum">
+            <a:fld id="{C5A5C8F5-29F8-4186-B0FC-BD9A7780ADE1}" type="slidenum">
               <a:rPr lang="en-US" sz="1200" b="0" u="none" strike="noStrike">
                 <a:solidFill>
                   <a:schemeClr val="dk1"/>
@@ -3593,7 +3483,7 @@
         <p:spPr>
           <a:xfrm>
             <a:off x="685800" y="1143000"/>
-            <a:ext cx="5484960" cy="3084840"/>
+            <a:ext cx="5484600" cy="3084480"/>
           </a:xfrm>
           <a:prstGeom prst="rect">
             <a:avLst/>
@@ -3616,7 +3506,7 @@
         <p:spPr>
           <a:xfrm>
             <a:off x="685800" y="4400640"/>
-            <a:ext cx="5484960" cy="3598920"/>
+            <a:ext cx="5484600" cy="3598560"/>
           </a:xfrm>
           <a:prstGeom prst="rect">
             <a:avLst/>
@@ -3658,7 +3548,7 @@
         <p:spPr>
           <a:xfrm>
             <a:off x="3884760" y="8685360"/>
-            <a:ext cx="2970360" cy="457200"/>
+            <a:ext cx="2970000" cy="456840"/>
           </a:xfrm>
           <a:prstGeom prst="rect">
             <a:avLst/>
@@ -3702,7 +3592,7 @@
                 <a:tab pos="0" algn="l"/>
               </a:tabLst>
             </a:pPr>
-            <a:fld id="{81F51639-368E-4F14-A1DD-897DB8DD45B5}" type="slidenum">
+            <a:fld id="{1D956381-0313-4E1F-BCCF-9D1E3348D309}" type="slidenum">
               <a:rPr lang="en-US" sz="1200" b="0" u="none" strike="noStrike">
                 <a:solidFill>
                   <a:schemeClr val="dk1"/>
@@ -3760,7 +3650,7 @@
         <p:spPr>
           <a:xfrm>
             <a:off x="685800" y="1143000"/>
-            <a:ext cx="5484960" cy="3084840"/>
+            <a:ext cx="5484600" cy="3084480"/>
           </a:xfrm>
           <a:prstGeom prst="rect">
             <a:avLst/>
@@ -3783,7 +3673,7 @@
         <p:spPr>
           <a:xfrm>
             <a:off x="685800" y="4400640"/>
-            <a:ext cx="5484960" cy="3598920"/>
+            <a:ext cx="5484600" cy="3598560"/>
           </a:xfrm>
           <a:prstGeom prst="rect">
             <a:avLst/>
@@ -3825,7 +3715,7 @@
         <p:spPr>
           <a:xfrm>
             <a:off x="3884760" y="8685360"/>
-            <a:ext cx="2970360" cy="457200"/>
+            <a:ext cx="2970000" cy="456840"/>
           </a:xfrm>
           <a:prstGeom prst="rect">
             <a:avLst/>
@@ -3869,7 +3759,7 @@
                 <a:tab pos="0" algn="l"/>
               </a:tabLst>
             </a:pPr>
-            <a:fld id="{1FF593AC-77BC-44FA-ACC8-217ACAF1D555}" type="slidenum">
+            <a:fld id="{AA55C1FA-8F99-485F-A64F-5689C801E190}" type="slidenum">
               <a:rPr lang="en-US" sz="1200" b="0" u="none" strike="noStrike">
                 <a:solidFill>
                   <a:schemeClr val="dk1"/>
@@ -3927,7 +3817,7 @@
         <p:spPr>
           <a:xfrm>
             <a:off x="685800" y="1143000"/>
-            <a:ext cx="5484960" cy="3084840"/>
+            <a:ext cx="5484600" cy="3084480"/>
           </a:xfrm>
           <a:prstGeom prst="rect">
             <a:avLst/>
@@ -3950,7 +3840,7 @@
         <p:spPr>
           <a:xfrm>
             <a:off x="685800" y="4400640"/>
-            <a:ext cx="5484960" cy="3598920"/>
+            <a:ext cx="5484600" cy="3598560"/>
           </a:xfrm>
           <a:prstGeom prst="rect">
             <a:avLst/>
@@ -3992,7 +3882,7 @@
         <p:spPr>
           <a:xfrm>
             <a:off x="3884760" y="8685360"/>
-            <a:ext cx="2970360" cy="457200"/>
+            <a:ext cx="2970000" cy="456840"/>
           </a:xfrm>
           <a:prstGeom prst="rect">
             <a:avLst/>
@@ -4036,7 +3926,7 @@
                 <a:tab pos="0" algn="l"/>
               </a:tabLst>
             </a:pPr>
-            <a:fld id="{6EB8CFE8-CA33-4CED-B5F4-C578B848CF20}" type="slidenum">
+            <a:fld id="{304B281A-6868-44EF-A43D-093914A3CF72}" type="slidenum">
               <a:rPr lang="en-US" sz="1200" b="0" u="none" strike="noStrike">
                 <a:solidFill>
                   <a:schemeClr val="dk1"/>
@@ -4094,7 +3984,7 @@
         <p:spPr>
           <a:xfrm>
             <a:off x="685800" y="1143000"/>
-            <a:ext cx="5484960" cy="3084840"/>
+            <a:ext cx="5484600" cy="3084480"/>
           </a:xfrm>
           <a:prstGeom prst="rect">
             <a:avLst/>
@@ -4117,7 +4007,7 @@
         <p:spPr>
           <a:xfrm>
             <a:off x="685800" y="4400640"/>
-            <a:ext cx="5484960" cy="3598920"/>
+            <a:ext cx="5484600" cy="3598560"/>
           </a:xfrm>
           <a:prstGeom prst="rect">
             <a:avLst/>
@@ -4159,7 +4049,7 @@
         <p:spPr>
           <a:xfrm>
             <a:off x="3884760" y="8685360"/>
-            <a:ext cx="2970360" cy="457200"/>
+            <a:ext cx="2970000" cy="456840"/>
           </a:xfrm>
           <a:prstGeom prst="rect">
             <a:avLst/>
@@ -4203,7 +4093,7 @@
                 <a:tab pos="0" algn="l"/>
               </a:tabLst>
             </a:pPr>
-            <a:fld id="{D1E9B5DC-BA7F-433F-9718-ADC54E8A38EB}" type="slidenum">
+            <a:fld id="{699D481C-5EE4-4534-8AB5-733AC4C821A2}" type="slidenum">
               <a:rPr lang="en-US" sz="1200" b="0" u="none" strike="noStrike">
                 <a:solidFill>
                   <a:schemeClr val="dk1"/>
@@ -4261,7 +4151,7 @@
         <p:spPr>
           <a:xfrm>
             <a:off x="685800" y="1143000"/>
-            <a:ext cx="5484960" cy="3084840"/>
+            <a:ext cx="5484600" cy="3084480"/>
           </a:xfrm>
           <a:prstGeom prst="rect">
             <a:avLst/>
@@ -4284,7 +4174,7 @@
         <p:spPr>
           <a:xfrm>
             <a:off x="685800" y="4400640"/>
-            <a:ext cx="5484960" cy="3598920"/>
+            <a:ext cx="5484600" cy="3598560"/>
           </a:xfrm>
           <a:prstGeom prst="rect">
             <a:avLst/>
@@ -4326,7 +4216,7 @@
         <p:spPr>
           <a:xfrm>
             <a:off x="3884760" y="8685360"/>
-            <a:ext cx="2970360" cy="457200"/>
+            <a:ext cx="2970000" cy="456840"/>
           </a:xfrm>
           <a:prstGeom prst="rect">
             <a:avLst/>
@@ -4370,7 +4260,7 @@
                 <a:tab pos="0" algn="l"/>
               </a:tabLst>
             </a:pPr>
-            <a:fld id="{FD15C69B-19BC-45E5-88C6-5B6C8D5B29CC}" type="slidenum">
+            <a:fld id="{E1CF7AEB-E9C9-43BC-A94D-A25BBA538594}" type="slidenum">
               <a:rPr lang="en-US" sz="1200" b="0" u="none" strike="noStrike">
                 <a:solidFill>
                   <a:schemeClr val="dk1"/>
@@ -4428,7 +4318,7 @@
         <p:spPr>
           <a:xfrm>
             <a:off x="685800" y="1143000"/>
-            <a:ext cx="5484960" cy="3084840"/>
+            <a:ext cx="5484600" cy="3084480"/>
           </a:xfrm>
           <a:prstGeom prst="rect">
             <a:avLst/>
@@ -4451,7 +4341,7 @@
         <p:spPr>
           <a:xfrm>
             <a:off x="685800" y="4400640"/>
-            <a:ext cx="5484960" cy="3598920"/>
+            <a:ext cx="5484600" cy="3598560"/>
           </a:xfrm>
           <a:prstGeom prst="rect">
             <a:avLst/>
@@ -4493,7 +4383,7 @@
         <p:spPr>
           <a:xfrm>
             <a:off x="3884760" y="8685360"/>
-            <a:ext cx="2970360" cy="457200"/>
+            <a:ext cx="2970000" cy="456840"/>
           </a:xfrm>
           <a:prstGeom prst="rect">
             <a:avLst/>
@@ -4537,7 +4427,7 @@
                 <a:tab pos="0" algn="l"/>
               </a:tabLst>
             </a:pPr>
-            <a:fld id="{70368676-3237-4795-B1FA-89F4F8AC6B02}" type="slidenum">
+            <a:fld id="{BBB827B7-AC72-413A-BA0C-482DE2D744A7}" type="slidenum">
               <a:rPr lang="en-US" sz="1200" b="0" u="none" strike="noStrike">
                 <a:solidFill>
                   <a:schemeClr val="dk1"/>
@@ -4595,7 +4485,7 @@
         <p:spPr>
           <a:xfrm>
             <a:off x="685800" y="1143000"/>
-            <a:ext cx="5484960" cy="3084840"/>
+            <a:ext cx="5484600" cy="3084480"/>
           </a:xfrm>
           <a:prstGeom prst="rect">
             <a:avLst/>
@@ -4618,7 +4508,7 @@
         <p:spPr>
           <a:xfrm>
             <a:off x="685800" y="4400640"/>
-            <a:ext cx="5484960" cy="3598920"/>
+            <a:ext cx="5484600" cy="3598560"/>
           </a:xfrm>
           <a:prstGeom prst="rect">
             <a:avLst/>
@@ -4660,7 +4550,7 @@
         <p:spPr>
           <a:xfrm>
             <a:off x="3884760" y="8685360"/>
-            <a:ext cx="2970360" cy="457200"/>
+            <a:ext cx="2970000" cy="456840"/>
           </a:xfrm>
           <a:prstGeom prst="rect">
             <a:avLst/>
@@ -4704,7 +4594,7 @@
                 <a:tab pos="0" algn="l"/>
               </a:tabLst>
             </a:pPr>
-            <a:fld id="{C57FDCB9-C0F5-4C6B-BF3E-844104532A79}" type="slidenum">
+            <a:fld id="{ABC37696-131F-40BB-B856-6E59DD0779B7}" type="slidenum">
               <a:rPr lang="en-US" sz="1200" b="0" u="none" strike="noStrike">
                 <a:solidFill>
                   <a:schemeClr val="dk1"/>
@@ -4762,7 +4652,7 @@
         <p:spPr>
           <a:xfrm>
             <a:off x="685800" y="1143000"/>
-            <a:ext cx="5484960" cy="3084840"/>
+            <a:ext cx="5484600" cy="3084480"/>
           </a:xfrm>
           <a:prstGeom prst="rect">
             <a:avLst/>
@@ -4785,7 +4675,7 @@
         <p:spPr>
           <a:xfrm>
             <a:off x="685800" y="4400640"/>
-            <a:ext cx="5484960" cy="3598920"/>
+            <a:ext cx="5484600" cy="3598560"/>
           </a:xfrm>
           <a:prstGeom prst="rect">
             <a:avLst/>
@@ -4827,7 +4717,7 @@
         <p:spPr>
           <a:xfrm>
             <a:off x="3884760" y="8685360"/>
-            <a:ext cx="2970360" cy="457200"/>
+            <a:ext cx="2970000" cy="456840"/>
           </a:xfrm>
           <a:prstGeom prst="rect">
             <a:avLst/>
@@ -4871,7 +4761,7 @@
                 <a:tab pos="0" algn="l"/>
               </a:tabLst>
             </a:pPr>
-            <a:fld id="{78D059C1-8185-4F99-934B-B67B1EF19872}" type="slidenum">
+            <a:fld id="{B5F7D01C-2DAA-4732-A7E6-347BC244B2B9}" type="slidenum">
               <a:rPr lang="en-US" sz="1200" b="0" u="none" strike="noStrike">
                 <a:solidFill>
                   <a:schemeClr val="dk1"/>
@@ -4929,7 +4819,7 @@
         <p:spPr>
           <a:xfrm>
             <a:off x="685800" y="1143000"/>
-            <a:ext cx="5484960" cy="3084840"/>
+            <a:ext cx="5484600" cy="3084480"/>
           </a:xfrm>
           <a:prstGeom prst="rect">
             <a:avLst/>
@@ -4952,7 +4842,7 @@
         <p:spPr>
           <a:xfrm>
             <a:off x="685800" y="4400640"/>
-            <a:ext cx="5484960" cy="3598920"/>
+            <a:ext cx="5484600" cy="3598560"/>
           </a:xfrm>
           <a:prstGeom prst="rect">
             <a:avLst/>
@@ -4994,7 +4884,7 @@
         <p:spPr>
           <a:xfrm>
             <a:off x="3884760" y="8685360"/>
-            <a:ext cx="2970360" cy="457200"/>
+            <a:ext cx="2970000" cy="456840"/>
           </a:xfrm>
           <a:prstGeom prst="rect">
             <a:avLst/>
@@ -5038,7 +4928,7 @@
                 <a:tab pos="0" algn="l"/>
               </a:tabLst>
             </a:pPr>
-            <a:fld id="{1FE58DFC-2F2C-4587-92A1-2ACFB326948E}" type="slidenum">
+            <a:fld id="{2407CE63-1E56-41DA-A32E-685FCDCBF9BF}" type="slidenum">
               <a:rPr lang="en-US" sz="1200" b="0" u="none" strike="noStrike">
                 <a:solidFill>
                   <a:schemeClr val="dk1"/>
@@ -5096,7 +4986,7 @@
         <p:spPr>
           <a:xfrm>
             <a:off x="685800" y="1143000"/>
-            <a:ext cx="5484960" cy="3084840"/>
+            <a:ext cx="5484600" cy="3084480"/>
           </a:xfrm>
           <a:prstGeom prst="rect">
             <a:avLst/>
@@ -5119,7 +5009,7 @@
         <p:spPr>
           <a:xfrm>
             <a:off x="685800" y="4400640"/>
-            <a:ext cx="5484960" cy="3598920"/>
+            <a:ext cx="5484600" cy="3598560"/>
           </a:xfrm>
           <a:prstGeom prst="rect">
             <a:avLst/>
@@ -5161,7 +5051,7 @@
         <p:spPr>
           <a:xfrm>
             <a:off x="3884760" y="8685360"/>
-            <a:ext cx="2970360" cy="457200"/>
+            <a:ext cx="2970000" cy="456840"/>
           </a:xfrm>
           <a:prstGeom prst="rect">
             <a:avLst/>
@@ -5205,7 +5095,7 @@
                 <a:tab pos="0" algn="l"/>
               </a:tabLst>
             </a:pPr>
-            <a:fld id="{063D6567-DD57-4127-8A23-CEB45BF72F4E}" type="slidenum">
+            <a:fld id="{A7904AAD-E51B-42AE-95B0-1E1181B0906D}" type="slidenum">
               <a:rPr lang="en-US" sz="1200" b="0" u="none" strike="noStrike">
                 <a:solidFill>
                   <a:schemeClr val="dk1"/>
@@ -5263,7 +5153,7 @@
         <p:spPr>
           <a:xfrm>
             <a:off x="685800" y="1143000"/>
-            <a:ext cx="5484960" cy="3084840"/>
+            <a:ext cx="5484600" cy="3084480"/>
           </a:xfrm>
           <a:prstGeom prst="rect">
             <a:avLst/>
@@ -5286,7 +5176,7 @@
         <p:spPr>
           <a:xfrm>
             <a:off x="685800" y="4400640"/>
-            <a:ext cx="5484960" cy="3598920"/>
+            <a:ext cx="5484600" cy="3598560"/>
           </a:xfrm>
           <a:prstGeom prst="rect">
             <a:avLst/>
@@ -5328,7 +5218,7 @@
         <p:spPr>
           <a:xfrm>
             <a:off x="3884760" y="8685360"/>
-            <a:ext cx="2970360" cy="457200"/>
+            <a:ext cx="2970000" cy="456840"/>
           </a:xfrm>
           <a:prstGeom prst="rect">
             <a:avLst/>
@@ -5372,7 +5262,7 @@
                 <a:tab pos="0" algn="l"/>
               </a:tabLst>
             </a:pPr>
-            <a:fld id="{42D5E46E-1C38-494A-A9CF-762EAA00509F}" type="slidenum">
+            <a:fld id="{FAEDCE37-9DA6-4CDD-A29B-E5A59B58ADFB}" type="slidenum">
               <a:rPr lang="en-US" sz="1200" b="0" u="none" strike="noStrike">
                 <a:solidFill>
                   <a:schemeClr val="dk1"/>
@@ -5430,7 +5320,7 @@
         <p:spPr>
           <a:xfrm>
             <a:off x="685800" y="1143000"/>
-            <a:ext cx="5484960" cy="3084840"/>
+            <a:ext cx="5484600" cy="3084480"/>
           </a:xfrm>
           <a:prstGeom prst="rect">
             <a:avLst/>
@@ -5453,7 +5343,7 @@
         <p:spPr>
           <a:xfrm>
             <a:off x="685800" y="4400640"/>
-            <a:ext cx="5484960" cy="3598920"/>
+            <a:ext cx="5484600" cy="3598560"/>
           </a:xfrm>
           <a:prstGeom prst="rect">
             <a:avLst/>
@@ -5495,7 +5385,7 @@
         <p:spPr>
           <a:xfrm>
             <a:off x="3884760" y="8685360"/>
-            <a:ext cx="2970360" cy="457200"/>
+            <a:ext cx="2970000" cy="456840"/>
           </a:xfrm>
           <a:prstGeom prst="rect">
             <a:avLst/>
@@ -5539,7 +5429,7 @@
                 <a:tab pos="0" algn="l"/>
               </a:tabLst>
             </a:pPr>
-            <a:fld id="{BE5F8A81-F332-4F21-9C34-BDDB142D8D70}" type="slidenum">
+            <a:fld id="{28C51D4D-2F99-406D-8783-5213B7B90EFD}" type="slidenum">
               <a:rPr lang="en-US" sz="1200" b="0" u="none" strike="noStrike">
                 <a:solidFill>
                   <a:schemeClr val="dk1"/>
@@ -5597,7 +5487,7 @@
         <p:spPr>
           <a:xfrm>
             <a:off x="685800" y="1143000"/>
-            <a:ext cx="5484960" cy="3084840"/>
+            <a:ext cx="5484600" cy="3084480"/>
           </a:xfrm>
           <a:prstGeom prst="rect">
             <a:avLst/>
@@ -5620,7 +5510,7 @@
         <p:spPr>
           <a:xfrm>
             <a:off x="685800" y="4400640"/>
-            <a:ext cx="5484960" cy="3598920"/>
+            <a:ext cx="5484600" cy="3598560"/>
           </a:xfrm>
           <a:prstGeom prst="rect">
             <a:avLst/>
@@ -5662,7 +5552,7 @@
         <p:spPr>
           <a:xfrm>
             <a:off x="3884760" y="8685360"/>
-            <a:ext cx="2970360" cy="457200"/>
+            <a:ext cx="2970000" cy="456840"/>
           </a:xfrm>
           <a:prstGeom prst="rect">
             <a:avLst/>
@@ -5706,7 +5596,7 @@
                 <a:tab pos="0" algn="l"/>
               </a:tabLst>
             </a:pPr>
-            <a:fld id="{DABCEDBA-5090-4740-8D4F-9630AB66FCE0}" type="slidenum">
+            <a:fld id="{E97530C5-5F8A-450A-8C47-4D638AC19B13}" type="slidenum">
               <a:rPr lang="en-US" sz="1200" b="0" u="none" strike="noStrike">
                 <a:solidFill>
                   <a:schemeClr val="dk1"/>
@@ -5764,7 +5654,7 @@
         <p:spPr>
           <a:xfrm>
             <a:off x="685800" y="1143000"/>
-            <a:ext cx="5484960" cy="3084840"/>
+            <a:ext cx="5484600" cy="3084480"/>
           </a:xfrm>
           <a:prstGeom prst="rect">
             <a:avLst/>
@@ -5787,7 +5677,7 @@
         <p:spPr>
           <a:xfrm>
             <a:off x="685800" y="4400640"/>
-            <a:ext cx="5484960" cy="3598920"/>
+            <a:ext cx="5484600" cy="3598560"/>
           </a:xfrm>
           <a:prstGeom prst="rect">
             <a:avLst/>
@@ -5829,7 +5719,7 @@
         <p:spPr>
           <a:xfrm>
             <a:off x="3884760" y="8685360"/>
-            <a:ext cx="2970360" cy="457200"/>
+            <a:ext cx="2970000" cy="456840"/>
           </a:xfrm>
           <a:prstGeom prst="rect">
             <a:avLst/>
@@ -5873,7 +5763,7 @@
                 <a:tab pos="0" algn="l"/>
               </a:tabLst>
             </a:pPr>
-            <a:fld id="{839F6D39-07AA-428C-86A2-29D213545B74}" type="slidenum">
+            <a:fld id="{44030AFC-85AA-4EA8-8B44-71264C395703}" type="slidenum">
               <a:rPr lang="en-US" sz="1200" b="0" u="none" strike="noStrike">
                 <a:solidFill>
                   <a:schemeClr val="dk1"/>
@@ -5931,7 +5821,7 @@
         <p:spPr>
           <a:xfrm>
             <a:off x="685800" y="1143000"/>
-            <a:ext cx="5484960" cy="3084840"/>
+            <a:ext cx="5484600" cy="3084480"/>
           </a:xfrm>
           <a:prstGeom prst="rect">
             <a:avLst/>
@@ -5954,7 +5844,7 @@
         <p:spPr>
           <a:xfrm>
             <a:off x="685800" y="4400640"/>
-            <a:ext cx="5484960" cy="3598920"/>
+            <a:ext cx="5484600" cy="3598560"/>
           </a:xfrm>
           <a:prstGeom prst="rect">
             <a:avLst/>
@@ -5996,7 +5886,7 @@
         <p:spPr>
           <a:xfrm>
             <a:off x="3884760" y="8685360"/>
-            <a:ext cx="2970360" cy="457200"/>
+            <a:ext cx="2970000" cy="456840"/>
           </a:xfrm>
           <a:prstGeom prst="rect">
             <a:avLst/>
@@ -6040,7 +5930,7 @@
                 <a:tab pos="0" algn="l"/>
               </a:tabLst>
             </a:pPr>
-            <a:fld id="{75FFC2C3-C802-4841-8496-0596226F85E9}" type="slidenum">
+            <a:fld id="{9748D9A0-2EAA-47D5-BA61-BF68F1C3CC6E}" type="slidenum">
               <a:rPr lang="en-US" sz="1200" b="0" u="none" strike="noStrike">
                 <a:solidFill>
                   <a:schemeClr val="dk1"/>
@@ -6098,7 +5988,7 @@
         <p:spPr>
           <a:xfrm>
             <a:off x="685800" y="1143000"/>
-            <a:ext cx="5484960" cy="3084840"/>
+            <a:ext cx="5484600" cy="3084480"/>
           </a:xfrm>
           <a:prstGeom prst="rect">
             <a:avLst/>
@@ -6121,7 +6011,7 @@
         <p:spPr>
           <a:xfrm>
             <a:off x="685800" y="4400640"/>
-            <a:ext cx="5484960" cy="3598920"/>
+            <a:ext cx="5484600" cy="3598560"/>
           </a:xfrm>
           <a:prstGeom prst="rect">
             <a:avLst/>
@@ -6163,7 +6053,7 @@
         <p:spPr>
           <a:xfrm>
             <a:off x="3884760" y="8685360"/>
-            <a:ext cx="2970360" cy="457200"/>
+            <a:ext cx="2970000" cy="456840"/>
           </a:xfrm>
           <a:prstGeom prst="rect">
             <a:avLst/>
@@ -6207,7 +6097,7 @@
                 <a:tab pos="0" algn="l"/>
               </a:tabLst>
             </a:pPr>
-            <a:fld id="{1703F109-10B9-4790-A005-B5142862C7E2}" type="slidenum">
+            <a:fld id="{36E610A9-FBBD-4A7A-9C6D-6AB44C30E58A}" type="slidenum">
               <a:rPr lang="en-US" sz="1200" b="0" u="none" strike="noStrike">
                 <a:solidFill>
                   <a:schemeClr val="dk1"/>
@@ -6265,7 +6155,7 @@
         <p:spPr>
           <a:xfrm>
             <a:off x="685800" y="1143000"/>
-            <a:ext cx="5484960" cy="3084840"/>
+            <a:ext cx="5484600" cy="3084480"/>
           </a:xfrm>
           <a:prstGeom prst="rect">
             <a:avLst/>
@@ -6288,7 +6178,7 @@
         <p:spPr>
           <a:xfrm>
             <a:off x="685800" y="4400640"/>
-            <a:ext cx="5484960" cy="3598920"/>
+            <a:ext cx="5484600" cy="3598560"/>
           </a:xfrm>
           <a:prstGeom prst="rect">
             <a:avLst/>
@@ -6330,7 +6220,7 @@
         <p:spPr>
           <a:xfrm>
             <a:off x="3884760" y="8685360"/>
-            <a:ext cx="2970360" cy="457200"/>
+            <a:ext cx="2970000" cy="456840"/>
           </a:xfrm>
           <a:prstGeom prst="rect">
             <a:avLst/>
@@ -6374,7 +6264,7 @@
                 <a:tab pos="0" algn="l"/>
               </a:tabLst>
             </a:pPr>
-            <a:fld id="{5F41BAAC-4E02-4683-AA66-F357B7377360}" type="slidenum">
+            <a:fld id="{1009AAC9-74A3-459E-8B0A-5F7DA466B09B}" type="slidenum">
               <a:rPr lang="en-US" sz="1200" b="0" u="none" strike="noStrike">
                 <a:solidFill>
                   <a:schemeClr val="dk1"/>
@@ -6432,7 +6322,7 @@
         <p:spPr>
           <a:xfrm>
             <a:off x="685800" y="1143000"/>
-            <a:ext cx="5484960" cy="3084840"/>
+            <a:ext cx="5484600" cy="3084480"/>
           </a:xfrm>
           <a:prstGeom prst="rect">
             <a:avLst/>
@@ -6455,7 +6345,7 @@
         <p:spPr>
           <a:xfrm>
             <a:off x="685800" y="4400640"/>
-            <a:ext cx="5484960" cy="3598920"/>
+            <a:ext cx="5484600" cy="3598560"/>
           </a:xfrm>
           <a:prstGeom prst="rect">
             <a:avLst/>
@@ -6497,7 +6387,7 @@
         <p:spPr>
           <a:xfrm>
             <a:off x="3884760" y="8685360"/>
-            <a:ext cx="2970360" cy="457200"/>
+            <a:ext cx="2970000" cy="456840"/>
           </a:xfrm>
           <a:prstGeom prst="rect">
             <a:avLst/>
@@ -6541,7 +6431,7 @@
                 <a:tab pos="0" algn="l"/>
               </a:tabLst>
             </a:pPr>
-            <a:fld id="{73E176AF-699F-4AED-AD94-094B2A5FCE9E}" type="slidenum">
+            <a:fld id="{5B739865-E62F-4B58-B830-9D0FD78F9D9D}" type="slidenum">
               <a:rPr lang="en-US" sz="1200" b="0" u="none" strike="noStrike">
                 <a:solidFill>
                   <a:schemeClr val="dk1"/>
@@ -6599,7 +6489,7 @@
         <p:spPr>
           <a:xfrm>
             <a:off x="685800" y="1143000"/>
-            <a:ext cx="5484960" cy="3084840"/>
+            <a:ext cx="5484600" cy="3084480"/>
           </a:xfrm>
           <a:prstGeom prst="rect">
             <a:avLst/>
@@ -6622,7 +6512,7 @@
         <p:spPr>
           <a:xfrm>
             <a:off x="685800" y="4400640"/>
-            <a:ext cx="5484960" cy="3598920"/>
+            <a:ext cx="5484600" cy="3598560"/>
           </a:xfrm>
           <a:prstGeom prst="rect">
             <a:avLst/>
@@ -6664,7 +6554,7 @@
         <p:spPr>
           <a:xfrm>
             <a:off x="3884760" y="8685360"/>
-            <a:ext cx="2970360" cy="457200"/>
+            <a:ext cx="2970000" cy="456840"/>
           </a:xfrm>
           <a:prstGeom prst="rect">
             <a:avLst/>
@@ -6708,7 +6598,7 @@
                 <a:tab pos="0" algn="l"/>
               </a:tabLst>
             </a:pPr>
-            <a:fld id="{0C3FBC6C-38CF-4251-A05A-C3FDB6B12F47}" type="slidenum">
+            <a:fld id="{F514FD75-EDB3-4953-BEFD-CD82DB14DBB6}" type="slidenum">
               <a:rPr lang="en-US" sz="1200" b="0" u="none" strike="noStrike">
                 <a:solidFill>
                   <a:schemeClr val="dk1"/>
@@ -6766,7 +6656,7 @@
         <p:spPr>
           <a:xfrm>
             <a:off x="685800" y="1143000"/>
-            <a:ext cx="5484960" cy="3084840"/>
+            <a:ext cx="5484600" cy="3084480"/>
           </a:xfrm>
           <a:prstGeom prst="rect">
             <a:avLst/>
@@ -6789,7 +6679,7 @@
         <p:spPr>
           <a:xfrm>
             <a:off x="685800" y="4400640"/>
-            <a:ext cx="5484960" cy="3598920"/>
+            <a:ext cx="5484600" cy="3598560"/>
           </a:xfrm>
           <a:prstGeom prst="rect">
             <a:avLst/>
@@ -6831,7 +6721,7 @@
         <p:spPr>
           <a:xfrm>
             <a:off x="3884760" y="8685360"/>
-            <a:ext cx="2970360" cy="457200"/>
+            <a:ext cx="2970000" cy="456840"/>
           </a:xfrm>
           <a:prstGeom prst="rect">
             <a:avLst/>
@@ -6875,7 +6765,7 @@
                 <a:tab pos="0" algn="l"/>
               </a:tabLst>
             </a:pPr>
-            <a:fld id="{BF87B0FF-0FBC-4DD9-A1B4-0D27512E719F}" type="slidenum">
+            <a:fld id="{CF4C1C02-B8A1-428E-90B6-73486E7C6CB9}" type="slidenum">
               <a:rPr lang="en-US" sz="1200" b="0" u="none" strike="noStrike">
                 <a:solidFill>
                   <a:schemeClr val="dk1"/>
@@ -6933,7 +6823,7 @@
         <p:spPr>
           <a:xfrm>
             <a:off x="685800" y="1143000"/>
-            <a:ext cx="5484960" cy="3084840"/>
+            <a:ext cx="5484600" cy="3084480"/>
           </a:xfrm>
           <a:prstGeom prst="rect">
             <a:avLst/>
@@ -6956,7 +6846,7 @@
         <p:spPr>
           <a:xfrm>
             <a:off x="685800" y="4400640"/>
-            <a:ext cx="5484960" cy="3598920"/>
+            <a:ext cx="5484600" cy="3598560"/>
           </a:xfrm>
           <a:prstGeom prst="rect">
             <a:avLst/>
@@ -6998,7 +6888,7 @@
         <p:spPr>
           <a:xfrm>
             <a:off x="3884760" y="8685360"/>
-            <a:ext cx="2970360" cy="457200"/>
+            <a:ext cx="2970000" cy="456840"/>
           </a:xfrm>
           <a:prstGeom prst="rect">
             <a:avLst/>
@@ -7042,7 +6932,7 @@
                 <a:tab pos="0" algn="l"/>
               </a:tabLst>
             </a:pPr>
-            <a:fld id="{F29812D2-1F9E-4604-8884-0318415DC06E}" type="slidenum">
+            <a:fld id="{312B45AF-B785-4B21-B692-68B95A29D4B6}" type="slidenum">
               <a:rPr lang="en-US" sz="1200" b="0" u="none" strike="noStrike">
                 <a:solidFill>
                   <a:schemeClr val="dk1"/>
@@ -7100,7 +6990,7 @@
         <p:spPr>
           <a:xfrm>
             <a:off x="685800" y="1143000"/>
-            <a:ext cx="5484960" cy="3084840"/>
+            <a:ext cx="5484600" cy="3084480"/>
           </a:xfrm>
           <a:prstGeom prst="rect">
             <a:avLst/>
@@ -7123,7 +7013,7 @@
         <p:spPr>
           <a:xfrm>
             <a:off x="685800" y="4400640"/>
-            <a:ext cx="5484960" cy="3598920"/>
+            <a:ext cx="5484600" cy="3598560"/>
           </a:xfrm>
           <a:prstGeom prst="rect">
             <a:avLst/>
@@ -7165,7 +7055,7 @@
         <p:spPr>
           <a:xfrm>
             <a:off x="3884760" y="8685360"/>
-            <a:ext cx="2970360" cy="457200"/>
+            <a:ext cx="2970000" cy="456840"/>
           </a:xfrm>
           <a:prstGeom prst="rect">
             <a:avLst/>
@@ -7209,7 +7099,7 @@
                 <a:tab pos="0" algn="l"/>
               </a:tabLst>
             </a:pPr>
-            <a:fld id="{B1D90F0A-4A68-4ACB-8E11-32D4FB324D5C}" type="slidenum">
+            <a:fld id="{2BDB9593-520B-4711-870A-FA1EC2AEC94B}" type="slidenum">
               <a:rPr lang="en-US" sz="1200" b="0" u="none" strike="noStrike">
                 <a:solidFill>
                   <a:schemeClr val="dk1"/>
@@ -7267,7 +7157,7 @@
         <p:spPr>
           <a:xfrm>
             <a:off x="685800" y="1143000"/>
-            <a:ext cx="5484960" cy="3084840"/>
+            <a:ext cx="5484600" cy="3084480"/>
           </a:xfrm>
           <a:prstGeom prst="rect">
             <a:avLst/>
@@ -7290,7 +7180,7 @@
         <p:spPr>
           <a:xfrm>
             <a:off x="685800" y="4400640"/>
-            <a:ext cx="5484960" cy="3598920"/>
+            <a:ext cx="5484600" cy="3598560"/>
           </a:xfrm>
           <a:prstGeom prst="rect">
             <a:avLst/>
@@ -7332,7 +7222,7 @@
         <p:spPr>
           <a:xfrm>
             <a:off x="3884760" y="8685360"/>
-            <a:ext cx="2970360" cy="457200"/>
+            <a:ext cx="2970000" cy="456840"/>
           </a:xfrm>
           <a:prstGeom prst="rect">
             <a:avLst/>
@@ -7376,7 +7266,7 @@
                 <a:tab pos="0" algn="l"/>
               </a:tabLst>
             </a:pPr>
-            <a:fld id="{E4A03C98-4F5B-4F77-A8E0-D0AA6E6AC5C3}" type="slidenum">
+            <a:fld id="{0A938FFE-5452-4DC5-A279-A1BA32285CAF}" type="slidenum">
               <a:rPr lang="en-US" sz="1200" b="0" u="none" strike="noStrike">
                 <a:solidFill>
                   <a:schemeClr val="dk1"/>
@@ -7386,7 +7276,7 @@
                 <a:latin typeface="+mn-lt"/>
                 <a:ea typeface="+mn-ea"/>
               </a:rPr>
-              <a:t>&lt;number&gt;</a:t>
+              <a:t>1</a:t>
             </a:fld>
             <a:endParaRPr lang="en-US" sz="1200" b="0" u="none" strike="noStrike">
               <a:solidFill>
@@ -7434,7 +7324,7 @@
         <p:spPr>
           <a:xfrm>
             <a:off x="685800" y="1143000"/>
-            <a:ext cx="5484960" cy="3084840"/>
+            <a:ext cx="5484600" cy="3084480"/>
           </a:xfrm>
           <a:prstGeom prst="rect">
             <a:avLst/>
@@ -7457,7 +7347,7 @@
         <p:spPr>
           <a:xfrm>
             <a:off x="685800" y="4400640"/>
-            <a:ext cx="5484960" cy="3598920"/>
+            <a:ext cx="5484600" cy="3598560"/>
           </a:xfrm>
           <a:prstGeom prst="rect">
             <a:avLst/>
@@ -7499,7 +7389,7 @@
         <p:spPr>
           <a:xfrm>
             <a:off x="3884760" y="8685360"/>
-            <a:ext cx="2970360" cy="457200"/>
+            <a:ext cx="2970000" cy="456840"/>
           </a:xfrm>
           <a:prstGeom prst="rect">
             <a:avLst/>
@@ -7543,7 +7433,7 @@
                 <a:tab pos="0" algn="l"/>
               </a:tabLst>
             </a:pPr>
-            <a:fld id="{7A08CB95-50BA-4C9D-8B08-9C4FDF43DBF9}" type="slidenum">
+            <a:fld id="{105E49D8-5186-49A2-AC19-307219287F00}" type="slidenum">
               <a:rPr lang="en-US" sz="1200" b="0" u="none" strike="noStrike">
                 <a:solidFill>
                   <a:schemeClr val="dk1"/>
@@ -7553,7 +7443,7 @@
                 <a:latin typeface="+mn-lt"/>
                 <a:ea typeface="+mn-ea"/>
               </a:rPr>
-              <a:t>&lt;number&gt;</a:t>
+              <a:t>1</a:t>
             </a:fld>
             <a:endParaRPr lang="en-US" sz="1200" b="0" u="none" strike="noStrike">
               <a:solidFill>
@@ -7601,7 +7491,7 @@
         <p:spPr>
           <a:xfrm>
             <a:off x="685800" y="1143000"/>
-            <a:ext cx="5484960" cy="3084840"/>
+            <a:ext cx="5484600" cy="3084480"/>
           </a:xfrm>
           <a:prstGeom prst="rect">
             <a:avLst/>
@@ -7624,7 +7514,7 @@
         <p:spPr>
           <a:xfrm>
             <a:off x="685800" y="4400640"/>
-            <a:ext cx="5484960" cy="3598920"/>
+            <a:ext cx="5484600" cy="3598560"/>
           </a:xfrm>
           <a:prstGeom prst="rect">
             <a:avLst/>
@@ -7666,7 +7556,7 @@
         <p:spPr>
           <a:xfrm>
             <a:off x="3884760" y="8685360"/>
-            <a:ext cx="2970360" cy="457200"/>
+            <a:ext cx="2970000" cy="456840"/>
           </a:xfrm>
           <a:prstGeom prst="rect">
             <a:avLst/>
@@ -7710,7 +7600,7 @@
                 <a:tab pos="0" algn="l"/>
               </a:tabLst>
             </a:pPr>
-            <a:fld id="{E162CE3C-BF71-4EB3-8CC3-020309844F2B}" type="slidenum">
+            <a:fld id="{41F6CD20-02B6-49B7-88DC-DFE99FD3B76F}" type="slidenum">
               <a:rPr lang="en-US" sz="1200" b="0" u="none" strike="noStrike">
                 <a:solidFill>
                   <a:schemeClr val="dk1"/>
@@ -7768,7 +7658,7 @@
         <p:spPr>
           <a:xfrm>
             <a:off x="685800" y="1143000"/>
-            <a:ext cx="5485320" cy="3085200"/>
+            <a:ext cx="5484960" cy="3084840"/>
           </a:xfrm>
           <a:prstGeom prst="rect">
             <a:avLst/>
@@ -7791,7 +7681,7 @@
         <p:spPr>
           <a:xfrm>
             <a:off x="685800" y="4400640"/>
-            <a:ext cx="5484960" cy="3598920"/>
+            <a:ext cx="5484600" cy="3598560"/>
           </a:xfrm>
           <a:prstGeom prst="rect">
             <a:avLst/>
@@ -7833,7 +7723,7 @@
         <p:spPr>
           <a:xfrm>
             <a:off x="3884760" y="8685360"/>
-            <a:ext cx="2970360" cy="457200"/>
+            <a:ext cx="2970000" cy="456840"/>
           </a:xfrm>
           <a:prstGeom prst="rect">
             <a:avLst/>
@@ -7877,7 +7767,7 @@
                 <a:tab pos="0" algn="l"/>
               </a:tabLst>
             </a:pPr>
-            <a:fld id="{6B0C1B42-06F0-428C-801B-60AD2794A464}" type="slidenum">
+            <a:fld id="{E3F75BC5-ED9B-4A73-9B9C-DD6B761DCAA4}" type="slidenum">
               <a:rPr lang="en-US" sz="1200" b="0" u="none" strike="noStrike">
                 <a:solidFill>
                   <a:schemeClr val="dk1"/>
@@ -7935,7 +7825,7 @@
         <p:spPr>
           <a:xfrm>
             <a:off x="685800" y="1143000"/>
-            <a:ext cx="5485320" cy="3085200"/>
+            <a:ext cx="5484960" cy="3084840"/>
           </a:xfrm>
           <a:prstGeom prst="rect">
             <a:avLst/>
@@ -7958,7 +7848,7 @@
         <p:spPr>
           <a:xfrm>
             <a:off x="685800" y="4400640"/>
-            <a:ext cx="5484960" cy="3598920"/>
+            <a:ext cx="5484600" cy="3598560"/>
           </a:xfrm>
           <a:prstGeom prst="rect">
             <a:avLst/>
@@ -8000,7 +7890,7 @@
         <p:spPr>
           <a:xfrm>
             <a:off x="3884760" y="8685360"/>
-            <a:ext cx="2970360" cy="457200"/>
+            <a:ext cx="2970000" cy="456840"/>
           </a:xfrm>
           <a:prstGeom prst="rect">
             <a:avLst/>
@@ -8044,7 +7934,7 @@
                 <a:tab pos="0" algn="l"/>
               </a:tabLst>
             </a:pPr>
-            <a:fld id="{3BFBCF9A-A68C-441F-BCC9-A22C27186DAD}" type="slidenum">
+            <a:fld id="{3D3484F8-F253-4C9E-ACE2-ECBDD14F37D0}" type="slidenum">
               <a:rPr lang="en-US" sz="1200" b="0" u="none" strike="noStrike">
                 <a:solidFill>
                   <a:schemeClr val="dk1"/>
@@ -8102,7 +7992,7 @@
         <p:spPr>
           <a:xfrm>
             <a:off x="685800" y="1143000"/>
-            <a:ext cx="5485320" cy="3085200"/>
+            <a:ext cx="5484960" cy="3084840"/>
           </a:xfrm>
           <a:prstGeom prst="rect">
             <a:avLst/>
@@ -8125,7 +8015,7 @@
         <p:spPr>
           <a:xfrm>
             <a:off x="685800" y="4400640"/>
-            <a:ext cx="5484960" cy="3598920"/>
+            <a:ext cx="5484600" cy="3598560"/>
           </a:xfrm>
           <a:prstGeom prst="rect">
             <a:avLst/>
@@ -8167,7 +8057,7 @@
         <p:spPr>
           <a:xfrm>
             <a:off x="3884760" y="8685360"/>
-            <a:ext cx="2970360" cy="457200"/>
+            <a:ext cx="2970000" cy="456840"/>
           </a:xfrm>
           <a:prstGeom prst="rect">
             <a:avLst/>
@@ -8211,7 +8101,7 @@
                 <a:tab pos="0" algn="l"/>
               </a:tabLst>
             </a:pPr>
-            <a:fld id="{BCB30D10-A7B6-4A04-8D74-D806CC999E8A}" type="slidenum">
+            <a:fld id="{CCD66B8D-A9B7-4210-A0AA-3B7FB0530905}" type="slidenum">
               <a:rPr lang="en-US" sz="1200" b="0" u="none" strike="noStrike">
                 <a:solidFill>
                   <a:schemeClr val="dk1"/>
@@ -8269,7 +8159,7 @@
         <p:spPr>
           <a:xfrm>
             <a:off x="685800" y="1143000"/>
-            <a:ext cx="5485320" cy="3085200"/>
+            <a:ext cx="5484960" cy="3084840"/>
           </a:xfrm>
           <a:prstGeom prst="rect">
             <a:avLst/>
@@ -8292,7 +8182,7 @@
         <p:spPr>
           <a:xfrm>
             <a:off x="685800" y="4400640"/>
-            <a:ext cx="5484960" cy="3598920"/>
+            <a:ext cx="5484600" cy="3598560"/>
           </a:xfrm>
           <a:prstGeom prst="rect">
             <a:avLst/>
@@ -8334,7 +8224,7 @@
         <p:spPr>
           <a:xfrm>
             <a:off x="3884760" y="8685360"/>
-            <a:ext cx="2970360" cy="457200"/>
+            <a:ext cx="2970000" cy="456840"/>
           </a:xfrm>
           <a:prstGeom prst="rect">
             <a:avLst/>
@@ -8378,7 +8268,7 @@
                 <a:tab pos="0" algn="l"/>
               </a:tabLst>
             </a:pPr>
-            <a:fld id="{DD12D716-0C82-42B4-B6E0-76426D24D8DC}" type="slidenum">
+            <a:fld id="{997AE784-4ABB-40DE-986E-823895E57399}" type="slidenum">
               <a:rPr lang="en-US" sz="1200" b="0" u="none" strike="noStrike">
                 <a:solidFill>
                   <a:schemeClr val="dk1"/>
@@ -8436,7 +8326,7 @@
         <p:spPr>
           <a:xfrm>
             <a:off x="685800" y="1143000"/>
-            <a:ext cx="5485320" cy="3085200"/>
+            <a:ext cx="5484960" cy="3084840"/>
           </a:xfrm>
           <a:prstGeom prst="rect">
             <a:avLst/>
@@ -8459,7 +8349,7 @@
         <p:spPr>
           <a:xfrm>
             <a:off x="685800" y="4400640"/>
-            <a:ext cx="5484960" cy="3598920"/>
+            <a:ext cx="5484600" cy="3598560"/>
           </a:xfrm>
           <a:prstGeom prst="rect">
             <a:avLst/>
@@ -8501,7 +8391,7 @@
         <p:spPr>
           <a:xfrm>
             <a:off x="3884760" y="8685360"/>
-            <a:ext cx="2970360" cy="457200"/>
+            <a:ext cx="2970000" cy="456840"/>
           </a:xfrm>
           <a:prstGeom prst="rect">
             <a:avLst/>
@@ -8545,7 +8435,7 @@
                 <a:tab pos="0" algn="l"/>
               </a:tabLst>
             </a:pPr>
-            <a:fld id="{5FF19C1C-E9AA-44E4-87EF-112DEFE6038A}" type="slidenum">
+            <a:fld id="{6D553A2B-0D40-4D39-B13F-367F8D6A6A2A}" type="slidenum">
               <a:rPr lang="en-US" sz="1200" b="0" u="none" strike="noStrike">
                 <a:solidFill>
                   <a:schemeClr val="dk1"/>
@@ -9169,7 +9059,7 @@
         <p:spPr>
           <a:xfrm>
             <a:off x="-2286000" y="3657600"/>
-            <a:ext cx="6399360" cy="6399360"/>
+            <a:ext cx="6399000" cy="6399000"/>
           </a:xfrm>
           <a:prstGeom prst="ellipse">
             <a:avLst/>
@@ -9212,7 +9102,7 @@
         <p:spPr>
           <a:xfrm>
             <a:off x="8229600" y="-2743200"/>
-            <a:ext cx="6399360" cy="6399360"/>
+            <a:ext cx="6399000" cy="6399000"/>
           </a:xfrm>
           <a:prstGeom prst="ellipse">
             <a:avLst/>
@@ -9255,7 +9145,7 @@
         <p:spPr>
           <a:xfrm>
             <a:off x="5495400" y="914400"/>
-            <a:ext cx="1187280" cy="1187280"/>
+            <a:ext cx="1186920" cy="1186920"/>
           </a:xfrm>
           <a:prstGeom prst="ellipse">
             <a:avLst/>
@@ -9302,7 +9192,7 @@
         <p:spPr>
           <a:xfrm>
             <a:off x="5678280" y="1097280"/>
-            <a:ext cx="830520" cy="830520"/>
+            <a:ext cx="830160" cy="830160"/>
           </a:xfrm>
           <a:prstGeom prst="rect">
             <a:avLst/>
@@ -9322,7 +9212,7 @@
         <p:spPr>
           <a:xfrm>
             <a:off x="914400" y="2377440"/>
-            <a:ext cx="10358640" cy="1004400"/>
+            <a:ext cx="10358280" cy="1004040"/>
           </a:xfrm>
           <a:prstGeom prst="rect">
             <a:avLst/>
@@ -9383,7 +9273,7 @@
         <p:spPr>
           <a:xfrm>
             <a:off x="914400" y="3383280"/>
-            <a:ext cx="10358640" cy="547200"/>
+            <a:ext cx="10358280" cy="546840"/>
           </a:xfrm>
           <a:prstGeom prst="rect">
             <a:avLst/>
@@ -9444,7 +9334,7 @@
         <p:spPr>
           <a:xfrm>
             <a:off x="914400" y="3977640"/>
-            <a:ext cx="10358640" cy="455760"/>
+            <a:ext cx="10358280" cy="455400"/>
           </a:xfrm>
           <a:prstGeom prst="rect">
             <a:avLst/>
@@ -9505,7 +9395,7 @@
         <p:spPr>
           <a:xfrm>
             <a:off x="11521440" y="6446520"/>
-            <a:ext cx="455760" cy="272880"/>
+            <a:ext cx="455400" cy="272520"/>
           </a:xfrm>
           <a:prstGeom prst="rect">
             <a:avLst/>
@@ -9603,7 +9493,7 @@
         <p:spPr>
           <a:xfrm>
             <a:off x="-1828800" y="5029200"/>
-            <a:ext cx="3656160" cy="3656160"/>
+            <a:ext cx="3655800" cy="3655800"/>
           </a:xfrm>
           <a:prstGeom prst="ellipse">
             <a:avLst/>
@@ -9646,7 +9536,7 @@
         <p:spPr>
           <a:xfrm>
             <a:off x="457200" y="457200"/>
-            <a:ext cx="638640" cy="638640"/>
+            <a:ext cx="638280" cy="638280"/>
           </a:xfrm>
           <a:prstGeom prst="ellipse">
             <a:avLst/>
@@ -9693,7 +9583,7 @@
         <p:spPr>
           <a:xfrm>
             <a:off x="548640" y="548640"/>
-            <a:ext cx="446760" cy="446760"/>
+            <a:ext cx="446400" cy="446400"/>
           </a:xfrm>
           <a:prstGeom prst="rect">
             <a:avLst/>
@@ -9713,7 +9603,7 @@
         <p:spPr>
           <a:xfrm>
             <a:off x="1280160" y="457200"/>
-            <a:ext cx="10422720" cy="638640"/>
+            <a:ext cx="10422360" cy="638280"/>
           </a:xfrm>
           <a:prstGeom prst="rect">
             <a:avLst/>
@@ -9774,7 +9664,7 @@
         <p:spPr>
           <a:xfrm>
             <a:off x="457200" y="1600200"/>
-            <a:ext cx="11273040" cy="4479120"/>
+            <a:ext cx="11272680" cy="4478760"/>
           </a:xfrm>
           <a:prstGeom prst="roundRect">
             <a:avLst>
@@ -9819,7 +9709,7 @@
         <p:spPr>
           <a:xfrm>
             <a:off x="822960" y="1828800"/>
-            <a:ext cx="10514160" cy="455760"/>
+            <a:ext cx="10513800" cy="455400"/>
           </a:xfrm>
           <a:prstGeom prst="rect">
             <a:avLst/>
@@ -9880,7 +9770,7 @@
         <p:spPr>
           <a:xfrm>
             <a:off x="822960" y="2423160"/>
-            <a:ext cx="382680" cy="382680"/>
+            <a:ext cx="382320" cy="382320"/>
           </a:xfrm>
           <a:prstGeom prst="ellipse">
             <a:avLst/>
@@ -9923,7 +9813,7 @@
         <p:spPr>
           <a:xfrm>
             <a:off x="822960" y="2423160"/>
-            <a:ext cx="382680" cy="382680"/>
+            <a:ext cx="382320" cy="382320"/>
           </a:xfrm>
           <a:prstGeom prst="rect">
             <a:avLst/>
@@ -9984,7 +9874,7 @@
         <p:spPr>
           <a:xfrm>
             <a:off x="1435680" y="2423160"/>
-            <a:ext cx="9581400" cy="382680"/>
+            <a:ext cx="9581040" cy="382320"/>
           </a:xfrm>
           <a:prstGeom prst="rect">
             <a:avLst/>
@@ -10045,7 +9935,7 @@
         <p:spPr>
           <a:xfrm>
             <a:off x="822960" y="3300840"/>
-            <a:ext cx="382680" cy="382680"/>
+            <a:ext cx="382320" cy="382320"/>
           </a:xfrm>
           <a:prstGeom prst="ellipse">
             <a:avLst/>
@@ -10088,7 +9978,7 @@
         <p:spPr>
           <a:xfrm>
             <a:off x="822960" y="3300840"/>
-            <a:ext cx="382680" cy="382680"/>
+            <a:ext cx="382320" cy="382320"/>
           </a:xfrm>
           <a:prstGeom prst="rect">
             <a:avLst/>
@@ -10149,7 +10039,7 @@
         <p:spPr>
           <a:xfrm>
             <a:off x="1435680" y="3300840"/>
-            <a:ext cx="9581400" cy="382680"/>
+            <a:ext cx="9581040" cy="382320"/>
           </a:xfrm>
           <a:prstGeom prst="rect">
             <a:avLst/>
@@ -10210,7 +10100,7 @@
         <p:spPr>
           <a:xfrm>
             <a:off x="822960" y="4178880"/>
-            <a:ext cx="382680" cy="382680"/>
+            <a:ext cx="382320" cy="382320"/>
           </a:xfrm>
           <a:prstGeom prst="ellipse">
             <a:avLst/>
@@ -10253,7 +10143,7 @@
         <p:spPr>
           <a:xfrm>
             <a:off x="822960" y="4178880"/>
-            <a:ext cx="382680" cy="382680"/>
+            <a:ext cx="382320" cy="382320"/>
           </a:xfrm>
           <a:prstGeom prst="rect">
             <a:avLst/>
@@ -10314,7 +10204,7 @@
         <p:spPr>
           <a:xfrm>
             <a:off x="1435680" y="4178880"/>
-            <a:ext cx="9581400" cy="382680"/>
+            <a:ext cx="9581040" cy="382320"/>
           </a:xfrm>
           <a:prstGeom prst="rect">
             <a:avLst/>
@@ -10375,7 +10265,7 @@
         <p:spPr>
           <a:xfrm>
             <a:off x="822960" y="5056560"/>
-            <a:ext cx="382680" cy="382680"/>
+            <a:ext cx="382320" cy="382320"/>
           </a:xfrm>
           <a:prstGeom prst="ellipse">
             <a:avLst/>
@@ -10418,7 +10308,7 @@
         <p:spPr>
           <a:xfrm>
             <a:off x="822960" y="5056560"/>
-            <a:ext cx="382680" cy="382680"/>
+            <a:ext cx="382320" cy="382320"/>
           </a:xfrm>
           <a:prstGeom prst="rect">
             <a:avLst/>
@@ -10479,7 +10369,7 @@
         <p:spPr>
           <a:xfrm>
             <a:off x="1435680" y="5056560"/>
-            <a:ext cx="9581400" cy="382680"/>
+            <a:ext cx="9581040" cy="382320"/>
           </a:xfrm>
           <a:prstGeom prst="rect">
             <a:avLst/>
@@ -10540,7 +10430,7 @@
         <p:spPr>
           <a:xfrm>
             <a:off x="457200" y="6446520"/>
-            <a:ext cx="7313760" cy="272880"/>
+            <a:ext cx="7313400" cy="272520"/>
           </a:xfrm>
           <a:prstGeom prst="rect">
             <a:avLst/>
@@ -10601,7 +10491,7 @@
         <p:spPr>
           <a:xfrm>
             <a:off x="11521440" y="6446520"/>
-            <a:ext cx="455760" cy="272880"/>
+            <a:ext cx="455400" cy="272520"/>
           </a:xfrm>
           <a:prstGeom prst="rect">
             <a:avLst/>
@@ -10699,7 +10589,7 @@
         <p:spPr>
           <a:xfrm>
             <a:off x="-1828800" y="4114800"/>
-            <a:ext cx="5484960" cy="5484960"/>
+            <a:ext cx="5484600" cy="5484600"/>
           </a:xfrm>
           <a:prstGeom prst="ellipse">
             <a:avLst/>
@@ -10742,7 +10632,7 @@
         <p:spPr>
           <a:xfrm>
             <a:off x="9601200" y="-2286000"/>
-            <a:ext cx="5484960" cy="5484960"/>
+            <a:ext cx="5484600" cy="5484600"/>
           </a:xfrm>
           <a:prstGeom prst="ellipse">
             <a:avLst/>
@@ -10785,7 +10675,7 @@
         <p:spPr>
           <a:xfrm>
             <a:off x="5596200" y="731520"/>
-            <a:ext cx="1004400" cy="1004400"/>
+            <a:ext cx="1004040" cy="1004040"/>
           </a:xfrm>
           <a:prstGeom prst="ellipse">
             <a:avLst/>
@@ -10832,7 +10722,7 @@
         <p:spPr>
           <a:xfrm>
             <a:off x="5742360" y="877680"/>
-            <a:ext cx="702720" cy="702720"/>
+            <a:ext cx="702360" cy="702360"/>
           </a:xfrm>
           <a:prstGeom prst="rect">
             <a:avLst/>
@@ -10852,7 +10742,7 @@
         <p:spPr>
           <a:xfrm>
             <a:off x="914400" y="1965960"/>
-            <a:ext cx="10358640" cy="364320"/>
+            <a:ext cx="10358280" cy="363960"/>
           </a:xfrm>
           <a:prstGeom prst="rect">
             <a:avLst/>
@@ -10913,7 +10803,7 @@
         <p:spPr>
           <a:xfrm>
             <a:off x="914400" y="2377440"/>
-            <a:ext cx="10358640" cy="2010240"/>
+            <a:ext cx="10358280" cy="2009880"/>
           </a:xfrm>
           <a:prstGeom prst="rect">
             <a:avLst/>
@@ -10974,7 +10864,7 @@
         <p:spPr>
           <a:xfrm>
             <a:off x="1463040" y="4572000"/>
-            <a:ext cx="9261360" cy="1095840"/>
+            <a:ext cx="9261000" cy="1095480"/>
           </a:xfrm>
           <a:prstGeom prst="rect">
             <a:avLst/>
@@ -11035,7 +10925,7 @@
         <p:spPr>
           <a:xfrm>
             <a:off x="11521440" y="6446520"/>
-            <a:ext cx="455760" cy="272880"/>
+            <a:ext cx="455400" cy="272520"/>
           </a:xfrm>
           <a:prstGeom prst="rect">
             <a:avLst/>
@@ -11133,7 +11023,7 @@
         <p:spPr>
           <a:xfrm>
             <a:off x="10515600" y="5669280"/>
-            <a:ext cx="3198960" cy="3198960"/>
+            <a:ext cx="3198600" cy="3198600"/>
           </a:xfrm>
           <a:prstGeom prst="roundRect">
             <a:avLst>
@@ -11178,7 +11068,7 @@
         <p:spPr>
           <a:xfrm>
             <a:off x="457200" y="457200"/>
-            <a:ext cx="638640" cy="638640"/>
+            <a:ext cx="638280" cy="638280"/>
           </a:xfrm>
           <a:prstGeom prst="ellipse">
             <a:avLst/>
@@ -11225,7 +11115,7 @@
         <p:spPr>
           <a:xfrm>
             <a:off x="548640" y="548640"/>
-            <a:ext cx="446760" cy="446760"/>
+            <a:ext cx="446400" cy="446400"/>
           </a:xfrm>
           <a:prstGeom prst="rect">
             <a:avLst/>
@@ -11245,7 +11135,7 @@
         <p:spPr>
           <a:xfrm>
             <a:off x="1280160" y="457200"/>
-            <a:ext cx="10422720" cy="638640"/>
+            <a:ext cx="10422360" cy="638280"/>
           </a:xfrm>
           <a:prstGeom prst="rect">
             <a:avLst/>
@@ -11306,7 +11196,7 @@
         <p:spPr>
           <a:xfrm>
             <a:off x="457200" y="1554480"/>
-            <a:ext cx="3656160" cy="4662000"/>
+            <a:ext cx="3655800" cy="4661640"/>
           </a:xfrm>
           <a:prstGeom prst="roundRect">
             <a:avLst>
@@ -11351,7 +11241,7 @@
         <p:spPr>
           <a:xfrm>
             <a:off x="1508760" y="2194560"/>
-            <a:ext cx="1553040" cy="1553040"/>
+            <a:ext cx="1552680" cy="1552680"/>
           </a:xfrm>
           <a:prstGeom prst="ellipse">
             <a:avLst/>
@@ -11398,7 +11288,7 @@
         <p:spPr>
           <a:xfrm>
             <a:off x="1746360" y="2423160"/>
-            <a:ext cx="1086840" cy="1086840"/>
+            <a:ext cx="1086480" cy="1086480"/>
           </a:xfrm>
           <a:prstGeom prst="rect">
             <a:avLst/>
@@ -11418,7 +11308,7 @@
         <p:spPr>
           <a:xfrm>
             <a:off x="640080" y="3977640"/>
-            <a:ext cx="3290400" cy="1735920"/>
+            <a:ext cx="3290040" cy="1735560"/>
           </a:xfrm>
           <a:prstGeom prst="rect">
             <a:avLst/>
@@ -11539,7 +11429,7 @@
         <p:spPr>
           <a:xfrm>
             <a:off x="4572000" y="1737360"/>
-            <a:ext cx="7130880" cy="4113360"/>
+            <a:ext cx="7130520" cy="4113000"/>
           </a:xfrm>
           <a:prstGeom prst="rect">
             <a:avLst/>
@@ -11710,7 +11600,7 @@
         <p:spPr>
           <a:xfrm>
             <a:off x="457200" y="6446520"/>
-            <a:ext cx="7313760" cy="272880"/>
+            <a:ext cx="7313400" cy="272520"/>
           </a:xfrm>
           <a:prstGeom prst="rect">
             <a:avLst/>
@@ -11771,7 +11661,7 @@
         <p:spPr>
           <a:xfrm>
             <a:off x="11521440" y="6446520"/>
-            <a:ext cx="455760" cy="272880"/>
+            <a:ext cx="455400" cy="272520"/>
           </a:xfrm>
           <a:prstGeom prst="rect">
             <a:avLst/>
@@ -11869,7 +11759,7 @@
         <p:spPr>
           <a:xfrm>
             <a:off x="457200" y="457200"/>
-            <a:ext cx="638640" cy="638640"/>
+            <a:ext cx="638280" cy="638280"/>
           </a:xfrm>
           <a:prstGeom prst="ellipse">
             <a:avLst/>
@@ -11916,7 +11806,7 @@
         <p:spPr>
           <a:xfrm>
             <a:off x="548640" y="548640"/>
-            <a:ext cx="446760" cy="446760"/>
+            <a:ext cx="446400" cy="446400"/>
           </a:xfrm>
           <a:prstGeom prst="rect">
             <a:avLst/>
@@ -11936,7 +11826,7 @@
         <p:spPr>
           <a:xfrm>
             <a:off x="1280160" y="457200"/>
-            <a:ext cx="10422720" cy="638640"/>
+            <a:ext cx="10422360" cy="638280"/>
           </a:xfrm>
           <a:prstGeom prst="rect">
             <a:avLst/>
@@ -11997,7 +11887,7 @@
         <p:spPr>
           <a:xfrm>
             <a:off x="457200" y="1645920"/>
-            <a:ext cx="5347800" cy="4479120"/>
+            <a:ext cx="5347440" cy="4478760"/>
           </a:xfrm>
           <a:prstGeom prst="roundRect">
             <a:avLst>
@@ -12042,7 +11932,7 @@
         <p:spPr>
           <a:xfrm>
             <a:off x="731520" y="1874520"/>
-            <a:ext cx="455760" cy="455760"/>
+            <a:ext cx="455400" cy="455400"/>
           </a:xfrm>
           <a:prstGeom prst="ellipse">
             <a:avLst/>
@@ -12089,7 +11979,7 @@
         <p:spPr>
           <a:xfrm>
             <a:off x="804600" y="1938600"/>
-            <a:ext cx="318600" cy="318600"/>
+            <a:ext cx="318240" cy="318240"/>
           </a:xfrm>
           <a:prstGeom prst="rect">
             <a:avLst/>
@@ -12109,7 +11999,7 @@
         <p:spPr>
           <a:xfrm>
             <a:off x="1325880" y="1874520"/>
-            <a:ext cx="4341960" cy="455760"/>
+            <a:ext cx="4341600" cy="455400"/>
           </a:xfrm>
           <a:prstGeom prst="rect">
             <a:avLst/>
@@ -12170,7 +12060,7 @@
         <p:spPr>
           <a:xfrm>
             <a:off x="731520" y="2514600"/>
-            <a:ext cx="4799160" cy="3381840"/>
+            <a:ext cx="4798800" cy="3381480"/>
           </a:xfrm>
           <a:prstGeom prst="rect">
             <a:avLst/>
@@ -12341,7 +12231,7 @@
         <p:spPr>
           <a:xfrm>
             <a:off x="6172200" y="1645920"/>
-            <a:ext cx="5347800" cy="4479120"/>
+            <a:ext cx="5347440" cy="4478760"/>
           </a:xfrm>
           <a:prstGeom prst="roundRect">
             <a:avLst>
@@ -12386,7 +12276,7 @@
         <p:spPr>
           <a:xfrm>
             <a:off x="6446520" y="1874520"/>
-            <a:ext cx="455760" cy="455760"/>
+            <a:ext cx="455400" cy="455400"/>
           </a:xfrm>
           <a:prstGeom prst="ellipse">
             <a:avLst/>
@@ -12433,7 +12323,7 @@
         <p:spPr>
           <a:xfrm>
             <a:off x="6519600" y="1938600"/>
-            <a:ext cx="318600" cy="318600"/>
+            <a:ext cx="318240" cy="318240"/>
           </a:xfrm>
           <a:prstGeom prst="rect">
             <a:avLst/>
@@ -12453,7 +12343,7 @@
         <p:spPr>
           <a:xfrm>
             <a:off x="7040880" y="1874520"/>
-            <a:ext cx="4341960" cy="455760"/>
+            <a:ext cx="4341600" cy="455400"/>
           </a:xfrm>
           <a:prstGeom prst="rect">
             <a:avLst/>
@@ -12514,7 +12404,7 @@
         <p:spPr>
           <a:xfrm>
             <a:off x="6446520" y="2514600"/>
-            <a:ext cx="4799160" cy="3381840"/>
+            <a:ext cx="4798800" cy="3381480"/>
           </a:xfrm>
           <a:prstGeom prst="rect">
             <a:avLst/>
@@ -12685,7 +12575,7 @@
         <p:spPr>
           <a:xfrm>
             <a:off x="457200" y="6446520"/>
-            <a:ext cx="7313760" cy="272880"/>
+            <a:ext cx="7313400" cy="272520"/>
           </a:xfrm>
           <a:prstGeom prst="rect">
             <a:avLst/>
@@ -12746,7 +12636,7 @@
         <p:spPr>
           <a:xfrm>
             <a:off x="11521440" y="6446520"/>
-            <a:ext cx="455760" cy="272880"/>
+            <a:ext cx="455400" cy="272520"/>
           </a:xfrm>
           <a:prstGeom prst="rect">
             <a:avLst/>
@@ -12844,7 +12734,7 @@
         <p:spPr>
           <a:xfrm>
             <a:off x="457200" y="457200"/>
-            <a:ext cx="638640" cy="638640"/>
+            <a:ext cx="638280" cy="638280"/>
           </a:xfrm>
           <a:prstGeom prst="ellipse">
             <a:avLst/>
@@ -12891,7 +12781,7 @@
         <p:spPr>
           <a:xfrm>
             <a:off x="548640" y="548640"/>
-            <a:ext cx="446760" cy="446760"/>
+            <a:ext cx="446400" cy="446400"/>
           </a:xfrm>
           <a:prstGeom prst="rect">
             <a:avLst/>
@@ -12911,7 +12801,7 @@
         <p:spPr>
           <a:xfrm>
             <a:off x="1280160" y="457200"/>
-            <a:ext cx="10422720" cy="638640"/>
+            <a:ext cx="10422360" cy="638280"/>
           </a:xfrm>
           <a:prstGeom prst="rect">
             <a:avLst/>
@@ -12972,7 +12862,7 @@
         <p:spPr>
           <a:xfrm>
             <a:off x="548640" y="1828800"/>
-            <a:ext cx="4753440" cy="4021920"/>
+            <a:ext cx="4753080" cy="4021560"/>
           </a:xfrm>
           <a:prstGeom prst="rect">
             <a:avLst/>
@@ -13108,7 +12998,7 @@
         <p:spPr>
           <a:xfrm>
             <a:off x="5486400" y="1691640"/>
-            <a:ext cx="6216480" cy="4341960"/>
+            <a:ext cx="6216120" cy="4341600"/>
           </a:xfrm>
           <a:prstGeom prst="roundRect">
             <a:avLst>
@@ -13153,7 +13043,7 @@
         <p:spPr>
           <a:xfrm>
             <a:off x="5806440" y="1965960"/>
-            <a:ext cx="5576400" cy="3793320"/>
+            <a:ext cx="5576040" cy="3792960"/>
           </a:xfrm>
           <a:prstGeom prst="rect">
             <a:avLst/>
@@ -13484,7 +13374,7 @@
         <p:spPr>
           <a:xfrm>
             <a:off x="457200" y="6446520"/>
-            <a:ext cx="7313760" cy="272880"/>
+            <a:ext cx="7313400" cy="272520"/>
           </a:xfrm>
           <a:prstGeom prst="rect">
             <a:avLst/>
@@ -13545,7 +13435,7 @@
         <p:spPr>
           <a:xfrm>
             <a:off x="11521440" y="6446520"/>
-            <a:ext cx="455760" cy="272880"/>
+            <a:ext cx="455400" cy="272520"/>
           </a:xfrm>
           <a:prstGeom prst="rect">
             <a:avLst/>
@@ -13643,7 +13533,7 @@
         <p:spPr>
           <a:xfrm>
             <a:off x="457200" y="457200"/>
-            <a:ext cx="638640" cy="638640"/>
+            <a:ext cx="638280" cy="638280"/>
           </a:xfrm>
           <a:prstGeom prst="ellipse">
             <a:avLst/>
@@ -13690,7 +13580,7 @@
         <p:spPr>
           <a:xfrm>
             <a:off x="548640" y="548640"/>
-            <a:ext cx="446760" cy="446760"/>
+            <a:ext cx="446400" cy="446400"/>
           </a:xfrm>
           <a:prstGeom prst="rect">
             <a:avLst/>
@@ -13710,7 +13600,7 @@
         <p:spPr>
           <a:xfrm>
             <a:off x="1280160" y="457200"/>
-            <a:ext cx="10422720" cy="638640"/>
+            <a:ext cx="10422360" cy="638280"/>
           </a:xfrm>
           <a:prstGeom prst="rect">
             <a:avLst/>
@@ -13771,7 +13661,7 @@
         <p:spPr>
           <a:xfrm>
             <a:off x="548640" y="1828800"/>
-            <a:ext cx="4753440" cy="4021920"/>
+            <a:ext cx="4753080" cy="4021560"/>
           </a:xfrm>
           <a:prstGeom prst="rect">
             <a:avLst/>
@@ -13907,7 +13797,7 @@
         <p:spPr>
           <a:xfrm>
             <a:off x="5486400" y="1691640"/>
-            <a:ext cx="6216480" cy="4341960"/>
+            <a:ext cx="6216120" cy="4341600"/>
           </a:xfrm>
           <a:prstGeom prst="roundRect">
             <a:avLst>
@@ -13952,7 +13842,7 @@
         <p:spPr>
           <a:xfrm>
             <a:off x="5806440" y="1965960"/>
-            <a:ext cx="5576400" cy="3793320"/>
+            <a:ext cx="5576040" cy="3792960"/>
           </a:xfrm>
           <a:prstGeom prst="rect">
             <a:avLst/>
@@ -14193,7 +14083,7 @@
         <p:spPr>
           <a:xfrm>
             <a:off x="457200" y="6446520"/>
-            <a:ext cx="7313760" cy="272880"/>
+            <a:ext cx="7313400" cy="272520"/>
           </a:xfrm>
           <a:prstGeom prst="rect">
             <a:avLst/>
@@ -14254,7 +14144,7 @@
         <p:spPr>
           <a:xfrm>
             <a:off x="11521440" y="6446520"/>
-            <a:ext cx="455760" cy="272880"/>
+            <a:ext cx="455400" cy="272520"/>
           </a:xfrm>
           <a:prstGeom prst="rect">
             <a:avLst/>
@@ -14352,7 +14242,7 @@
         <p:spPr>
           <a:xfrm>
             <a:off x="10515600" y="5669280"/>
-            <a:ext cx="3198960" cy="3198960"/>
+            <a:ext cx="3198600" cy="3198600"/>
           </a:xfrm>
           <a:prstGeom prst="roundRect">
             <a:avLst>
@@ -14397,7 +14287,7 @@
         <p:spPr>
           <a:xfrm>
             <a:off x="457200" y="457200"/>
-            <a:ext cx="638640" cy="638640"/>
+            <a:ext cx="638280" cy="638280"/>
           </a:xfrm>
           <a:prstGeom prst="ellipse">
             <a:avLst/>
@@ -14444,7 +14334,7 @@
         <p:spPr>
           <a:xfrm>
             <a:off x="548640" y="548640"/>
-            <a:ext cx="446760" cy="446760"/>
+            <a:ext cx="446400" cy="446400"/>
           </a:xfrm>
           <a:prstGeom prst="rect">
             <a:avLst/>
@@ -14464,7 +14354,7 @@
         <p:spPr>
           <a:xfrm>
             <a:off x="1280160" y="457200"/>
-            <a:ext cx="10422720" cy="638640"/>
+            <a:ext cx="10422360" cy="638280"/>
           </a:xfrm>
           <a:prstGeom prst="rect">
             <a:avLst/>
@@ -14525,7 +14415,7 @@
         <p:spPr>
           <a:xfrm>
             <a:off x="457200" y="1554480"/>
-            <a:ext cx="3656160" cy="4662000"/>
+            <a:ext cx="3655800" cy="4661640"/>
           </a:xfrm>
           <a:prstGeom prst="roundRect">
             <a:avLst>
@@ -14570,7 +14460,7 @@
         <p:spPr>
           <a:xfrm>
             <a:off x="1508760" y="2194560"/>
-            <a:ext cx="1553040" cy="1553040"/>
+            <a:ext cx="1552680" cy="1552680"/>
           </a:xfrm>
           <a:prstGeom prst="ellipse">
             <a:avLst/>
@@ -14617,7 +14507,7 @@
         <p:spPr>
           <a:xfrm>
             <a:off x="1746360" y="2423160"/>
-            <a:ext cx="1086840" cy="1086840"/>
+            <a:ext cx="1086480" cy="1086480"/>
           </a:xfrm>
           <a:prstGeom prst="rect">
             <a:avLst/>
@@ -14637,7 +14527,7 @@
         <p:spPr>
           <a:xfrm>
             <a:off x="640080" y="3977640"/>
-            <a:ext cx="3290400" cy="1735920"/>
+            <a:ext cx="3290040" cy="1735560"/>
           </a:xfrm>
           <a:prstGeom prst="rect">
             <a:avLst/>
@@ -14758,7 +14648,7 @@
         <p:spPr>
           <a:xfrm>
             <a:off x="4572000" y="1737360"/>
-            <a:ext cx="7130880" cy="4113360"/>
+            <a:ext cx="7130520" cy="4113000"/>
           </a:xfrm>
           <a:prstGeom prst="rect">
             <a:avLst/>
@@ -14929,7 +14819,7 @@
         <p:spPr>
           <a:xfrm>
             <a:off x="457200" y="6446520"/>
-            <a:ext cx="7313760" cy="272880"/>
+            <a:ext cx="7313400" cy="272520"/>
           </a:xfrm>
           <a:prstGeom prst="rect">
             <a:avLst/>
@@ -14990,7 +14880,7 @@
         <p:spPr>
           <a:xfrm>
             <a:off x="11521440" y="6446520"/>
-            <a:ext cx="455760" cy="272880"/>
+            <a:ext cx="455400" cy="272520"/>
           </a:xfrm>
           <a:prstGeom prst="rect">
             <a:avLst/>
@@ -15088,7 +14978,7 @@
         <p:spPr>
           <a:xfrm>
             <a:off x="-1828800" y="5029200"/>
-            <a:ext cx="3656160" cy="3656160"/>
+            <a:ext cx="3655800" cy="3655800"/>
           </a:xfrm>
           <a:prstGeom prst="ellipse">
             <a:avLst/>
@@ -15131,7 +15021,7 @@
         <p:spPr>
           <a:xfrm>
             <a:off x="457200" y="457200"/>
-            <a:ext cx="638640" cy="638640"/>
+            <a:ext cx="638280" cy="638280"/>
           </a:xfrm>
           <a:prstGeom prst="ellipse">
             <a:avLst/>
@@ -15178,7 +15068,7 @@
         <p:spPr>
           <a:xfrm>
             <a:off x="548640" y="548640"/>
-            <a:ext cx="446760" cy="446760"/>
+            <a:ext cx="446400" cy="446400"/>
           </a:xfrm>
           <a:prstGeom prst="rect">
             <a:avLst/>
@@ -15198,7 +15088,7 @@
         <p:spPr>
           <a:xfrm>
             <a:off x="1280160" y="457200"/>
-            <a:ext cx="10422720" cy="638640"/>
+            <a:ext cx="10422360" cy="638280"/>
           </a:xfrm>
           <a:prstGeom prst="rect">
             <a:avLst/>
@@ -15259,7 +15149,7 @@
         <p:spPr>
           <a:xfrm>
             <a:off x="457200" y="1600200"/>
-            <a:ext cx="11273040" cy="4479120"/>
+            <a:ext cx="11272680" cy="4478760"/>
           </a:xfrm>
           <a:prstGeom prst="roundRect">
             <a:avLst>
@@ -15304,7 +15194,7 @@
         <p:spPr>
           <a:xfrm>
             <a:off x="822960" y="1828800"/>
-            <a:ext cx="10514160" cy="455760"/>
+            <a:ext cx="10513800" cy="455400"/>
           </a:xfrm>
           <a:prstGeom prst="rect">
             <a:avLst/>
@@ -15365,7 +15255,7 @@
         <p:spPr>
           <a:xfrm>
             <a:off x="822960" y="2423160"/>
-            <a:ext cx="382680" cy="382680"/>
+            <a:ext cx="382320" cy="382320"/>
           </a:xfrm>
           <a:prstGeom prst="ellipse">
             <a:avLst/>
@@ -15408,7 +15298,7 @@
         <p:spPr>
           <a:xfrm>
             <a:off x="822960" y="2423160"/>
-            <a:ext cx="382680" cy="382680"/>
+            <a:ext cx="382320" cy="382320"/>
           </a:xfrm>
           <a:prstGeom prst="rect">
             <a:avLst/>
@@ -15469,7 +15359,7 @@
         <p:spPr>
           <a:xfrm>
             <a:off x="1435680" y="2423160"/>
-            <a:ext cx="9581400" cy="382680"/>
+            <a:ext cx="9581040" cy="382320"/>
           </a:xfrm>
           <a:prstGeom prst="rect">
             <a:avLst/>
@@ -15530,7 +15420,7 @@
         <p:spPr>
           <a:xfrm>
             <a:off x="822960" y="3300840"/>
-            <a:ext cx="382680" cy="382680"/>
+            <a:ext cx="382320" cy="382320"/>
           </a:xfrm>
           <a:prstGeom prst="ellipse">
             <a:avLst/>
@@ -15573,7 +15463,7 @@
         <p:spPr>
           <a:xfrm>
             <a:off x="822960" y="3300840"/>
-            <a:ext cx="382680" cy="382680"/>
+            <a:ext cx="382320" cy="382320"/>
           </a:xfrm>
           <a:prstGeom prst="rect">
             <a:avLst/>
@@ -15634,7 +15524,7 @@
         <p:spPr>
           <a:xfrm>
             <a:off x="1435680" y="3300840"/>
-            <a:ext cx="9581400" cy="382680"/>
+            <a:ext cx="9581040" cy="382320"/>
           </a:xfrm>
           <a:prstGeom prst="rect">
             <a:avLst/>
@@ -15695,7 +15585,7 @@
         <p:spPr>
           <a:xfrm>
             <a:off x="822960" y="4178880"/>
-            <a:ext cx="382680" cy="382680"/>
+            <a:ext cx="382320" cy="382320"/>
           </a:xfrm>
           <a:prstGeom prst="ellipse">
             <a:avLst/>
@@ -15738,7 +15628,7 @@
         <p:spPr>
           <a:xfrm>
             <a:off x="822960" y="4178880"/>
-            <a:ext cx="382680" cy="382680"/>
+            <a:ext cx="382320" cy="382320"/>
           </a:xfrm>
           <a:prstGeom prst="rect">
             <a:avLst/>
@@ -15799,7 +15689,7 @@
         <p:spPr>
           <a:xfrm>
             <a:off x="1435680" y="4178880"/>
-            <a:ext cx="9581400" cy="382680"/>
+            <a:ext cx="9581040" cy="382320"/>
           </a:xfrm>
           <a:prstGeom prst="rect">
             <a:avLst/>
@@ -15860,7 +15750,7 @@
         <p:spPr>
           <a:xfrm>
             <a:off x="822960" y="5056560"/>
-            <a:ext cx="382680" cy="382680"/>
+            <a:ext cx="382320" cy="382320"/>
           </a:xfrm>
           <a:prstGeom prst="ellipse">
             <a:avLst/>
@@ -15903,7 +15793,7 @@
         <p:spPr>
           <a:xfrm>
             <a:off x="822960" y="5056560"/>
-            <a:ext cx="382680" cy="382680"/>
+            <a:ext cx="382320" cy="382320"/>
           </a:xfrm>
           <a:prstGeom prst="rect">
             <a:avLst/>
@@ -15964,7 +15854,7 @@
         <p:spPr>
           <a:xfrm>
             <a:off x="1435680" y="5056560"/>
-            <a:ext cx="9581400" cy="382680"/>
+            <a:ext cx="9581040" cy="382320"/>
           </a:xfrm>
           <a:prstGeom prst="rect">
             <a:avLst/>
@@ -16025,7 +15915,7 @@
         <p:spPr>
           <a:xfrm>
             <a:off x="457200" y="6446520"/>
-            <a:ext cx="7313760" cy="272880"/>
+            <a:ext cx="7313400" cy="272520"/>
           </a:xfrm>
           <a:prstGeom prst="rect">
             <a:avLst/>
@@ -16086,7 +15976,7 @@
         <p:spPr>
           <a:xfrm>
             <a:off x="11521440" y="6446520"/>
-            <a:ext cx="455760" cy="272880"/>
+            <a:ext cx="455400" cy="272520"/>
           </a:xfrm>
           <a:prstGeom prst="rect">
             <a:avLst/>
@@ -16184,7 +16074,7 @@
         <p:spPr>
           <a:xfrm>
             <a:off x="-1828800" y="4114800"/>
-            <a:ext cx="5484960" cy="5484960"/>
+            <a:ext cx="5484600" cy="5484600"/>
           </a:xfrm>
           <a:prstGeom prst="ellipse">
             <a:avLst/>
@@ -16227,7 +16117,7 @@
         <p:spPr>
           <a:xfrm>
             <a:off x="9601200" y="-2286000"/>
-            <a:ext cx="5484960" cy="5484960"/>
+            <a:ext cx="5484600" cy="5484600"/>
           </a:xfrm>
           <a:prstGeom prst="ellipse">
             <a:avLst/>
@@ -16270,7 +16160,7 @@
         <p:spPr>
           <a:xfrm>
             <a:off x="5596200" y="731520"/>
-            <a:ext cx="1004400" cy="1004400"/>
+            <a:ext cx="1004040" cy="1004040"/>
           </a:xfrm>
           <a:prstGeom prst="ellipse">
             <a:avLst/>
@@ -16317,7 +16207,7 @@
         <p:spPr>
           <a:xfrm>
             <a:off x="5742360" y="877680"/>
-            <a:ext cx="702720" cy="702720"/>
+            <a:ext cx="702360" cy="702360"/>
           </a:xfrm>
           <a:prstGeom prst="rect">
             <a:avLst/>
@@ -16337,7 +16227,7 @@
         <p:spPr>
           <a:xfrm>
             <a:off x="914400" y="1965960"/>
-            <a:ext cx="10358640" cy="364320"/>
+            <a:ext cx="10358280" cy="363960"/>
           </a:xfrm>
           <a:prstGeom prst="rect">
             <a:avLst/>
@@ -16398,7 +16288,7 @@
         <p:spPr>
           <a:xfrm>
             <a:off x="914400" y="2377440"/>
-            <a:ext cx="10358640" cy="2010240"/>
+            <a:ext cx="10358280" cy="2009880"/>
           </a:xfrm>
           <a:prstGeom prst="rect">
             <a:avLst/>
@@ -16459,7 +16349,7 @@
         <p:spPr>
           <a:xfrm>
             <a:off x="1463040" y="4572000"/>
-            <a:ext cx="9261360" cy="1095840"/>
+            <a:ext cx="9261000" cy="1095480"/>
           </a:xfrm>
           <a:prstGeom prst="rect">
             <a:avLst/>
@@ -16520,7 +16410,7 @@
         <p:spPr>
           <a:xfrm>
             <a:off x="11521440" y="6446520"/>
-            <a:ext cx="455760" cy="272880"/>
+            <a:ext cx="455400" cy="272520"/>
           </a:xfrm>
           <a:prstGeom prst="rect">
             <a:avLst/>
@@ -16618,7 +16508,7 @@
         <p:spPr>
           <a:xfrm>
             <a:off x="10515600" y="5669280"/>
-            <a:ext cx="3198960" cy="3198960"/>
+            <a:ext cx="3198600" cy="3198600"/>
           </a:xfrm>
           <a:prstGeom prst="roundRect">
             <a:avLst>
@@ -16663,7 +16553,7 @@
         <p:spPr>
           <a:xfrm>
             <a:off x="457200" y="457200"/>
-            <a:ext cx="638640" cy="638640"/>
+            <a:ext cx="638280" cy="638280"/>
           </a:xfrm>
           <a:prstGeom prst="ellipse">
             <a:avLst/>
@@ -16710,7 +16600,7 @@
         <p:spPr>
           <a:xfrm>
             <a:off x="548640" y="548640"/>
-            <a:ext cx="446760" cy="446760"/>
+            <a:ext cx="446400" cy="446400"/>
           </a:xfrm>
           <a:prstGeom prst="rect">
             <a:avLst/>
@@ -16730,7 +16620,7 @@
         <p:spPr>
           <a:xfrm>
             <a:off x="1280160" y="457200"/>
-            <a:ext cx="10422720" cy="638640"/>
+            <a:ext cx="10422360" cy="638280"/>
           </a:xfrm>
           <a:prstGeom prst="rect">
             <a:avLst/>
@@ -16791,7 +16681,7 @@
         <p:spPr>
           <a:xfrm>
             <a:off x="457200" y="1554480"/>
-            <a:ext cx="3656160" cy="4662000"/>
+            <a:ext cx="3655800" cy="4661640"/>
           </a:xfrm>
           <a:prstGeom prst="roundRect">
             <a:avLst>
@@ -16836,7 +16726,7 @@
         <p:spPr>
           <a:xfrm>
             <a:off x="1508760" y="2194560"/>
-            <a:ext cx="1553040" cy="1553040"/>
+            <a:ext cx="1552680" cy="1552680"/>
           </a:xfrm>
           <a:prstGeom prst="ellipse">
             <a:avLst/>
@@ -16883,7 +16773,7 @@
         <p:spPr>
           <a:xfrm>
             <a:off x="1746360" y="2423160"/>
-            <a:ext cx="1086840" cy="1086840"/>
+            <a:ext cx="1086480" cy="1086480"/>
           </a:xfrm>
           <a:prstGeom prst="rect">
             <a:avLst/>
@@ -16903,7 +16793,7 @@
         <p:spPr>
           <a:xfrm>
             <a:off x="640080" y="3977640"/>
-            <a:ext cx="3290400" cy="1735920"/>
+            <a:ext cx="3290040" cy="1735560"/>
           </a:xfrm>
           <a:prstGeom prst="rect">
             <a:avLst/>
@@ -17024,7 +16914,7 @@
         <p:spPr>
           <a:xfrm>
             <a:off x="4572000" y="1737360"/>
-            <a:ext cx="7130880" cy="4113360"/>
+            <a:ext cx="7130520" cy="4113000"/>
           </a:xfrm>
           <a:prstGeom prst="rect">
             <a:avLst/>
@@ -17059,7 +16949,7 @@
               <a:buChar char=""/>
             </a:pPr>
             <a:r>
-              <a:rPr lang="en-US" sz="1600" b="0" u="none" strike="noStrike">
+              <a:rPr lang="en-US" sz="2200" b="0" u="none" strike="noStrike">
                 <a:solidFill>
                   <a:srgbClr val="1B2420"/>
                 </a:solidFill>
@@ -17070,7 +16960,7 @@
               </a:rPr>
               <a:t>Recursion is a function that calls itself to solve a smaller piece of the same problem</a:t>
             </a:r>
-            <a:endParaRPr lang="en-US" sz="1600" b="0" u="none" strike="noStrike">
+            <a:endParaRPr lang="en-US" sz="2200" b="0" u="none" strike="noStrike">
               <a:solidFill>
                 <a:srgbClr val="000000"/>
               </a:solidFill>
@@ -17094,7 +16984,7 @@
               <a:buChar char=""/>
             </a:pPr>
             <a:r>
-              <a:rPr lang="en-US" sz="1600" b="0" u="none" strike="noStrike">
+              <a:rPr lang="en-US" sz="2200" b="0" u="none" strike="noStrike">
                 <a:solidFill>
                   <a:srgbClr val="1B2420"/>
                 </a:solidFill>
@@ -17105,7 +16995,7 @@
               </a:rPr>
               <a:t>Think of Russian nesting dolls — open one, and there’s a smaller identical doll inside, until you reach the smallest one that doesn’t open</a:t>
             </a:r>
-            <a:endParaRPr lang="en-US" sz="1600" b="0" u="none" strike="noStrike">
+            <a:endParaRPr lang="en-US" sz="2200" b="0" u="none" strike="noStrike">
               <a:solidFill>
                 <a:srgbClr val="000000"/>
               </a:solidFill>
@@ -17129,7 +17019,7 @@
               <a:buChar char=""/>
             </a:pPr>
             <a:r>
-              <a:rPr lang="en-US" sz="1600" b="0" u="none" strike="noStrike">
+              <a:rPr lang="en-US" sz="2200" b="0" u="none" strike="noStrike">
                 <a:solidFill>
                   <a:srgbClr val="1B2420"/>
                 </a:solidFill>
@@ -17140,7 +17030,7 @@
               </a:rPr>
               <a:t>Each call works on a slightly smaller version of the problem, and the smallest version is simple enough to answer directly</a:t>
             </a:r>
-            <a:endParaRPr lang="en-US" sz="1600" b="0" u="none" strike="noStrike">
+            <a:endParaRPr lang="en-US" sz="2200" b="0" u="none" strike="noStrike">
               <a:solidFill>
                 <a:srgbClr val="000000"/>
               </a:solidFill>
@@ -17164,7 +17054,7 @@
               <a:buChar char=""/>
             </a:pPr>
             <a:r>
-              <a:rPr lang="en-US" sz="1600" b="0" u="none" strike="noStrike">
+              <a:rPr lang="en-US" sz="2200" b="0" u="none" strike="noStrike">
                 <a:solidFill>
                   <a:srgbClr val="1B2420"/>
                 </a:solidFill>
@@ -17175,7 +17065,7 @@
               </a:rPr>
               <a:t>That "simple enough to answer directly" case is what makes the whole chain eventually stop</a:t>
             </a:r>
-            <a:endParaRPr lang="en-US" sz="1600" b="0" u="none" strike="noStrike">
+            <a:endParaRPr lang="en-US" sz="2200" b="0" u="none" strike="noStrike">
               <a:solidFill>
                 <a:srgbClr val="000000"/>
               </a:solidFill>
@@ -17195,7 +17085,7 @@
         <p:spPr>
           <a:xfrm>
             <a:off x="457200" y="6446520"/>
-            <a:ext cx="7313760" cy="272880"/>
+            <a:ext cx="7313400" cy="272520"/>
           </a:xfrm>
           <a:prstGeom prst="rect">
             <a:avLst/>
@@ -17256,7 +17146,7 @@
         <p:spPr>
           <a:xfrm>
             <a:off x="11521440" y="6446520"/>
-            <a:ext cx="455760" cy="272880"/>
+            <a:ext cx="455400" cy="272520"/>
           </a:xfrm>
           <a:prstGeom prst="rect">
             <a:avLst/>
@@ -17354,7 +17244,7 @@
         <p:spPr>
           <a:xfrm>
             <a:off x="457200" y="457200"/>
-            <a:ext cx="638640" cy="638640"/>
+            <a:ext cx="638280" cy="638280"/>
           </a:xfrm>
           <a:prstGeom prst="ellipse">
             <a:avLst/>
@@ -17401,7 +17291,7 @@
         <p:spPr>
           <a:xfrm>
             <a:off x="548640" y="548640"/>
-            <a:ext cx="446760" cy="446760"/>
+            <a:ext cx="446400" cy="446400"/>
           </a:xfrm>
           <a:prstGeom prst="rect">
             <a:avLst/>
@@ -17421,7 +17311,7 @@
         <p:spPr>
           <a:xfrm>
             <a:off x="1280160" y="457200"/>
-            <a:ext cx="10422720" cy="638640"/>
+            <a:ext cx="10422360" cy="638280"/>
           </a:xfrm>
           <a:prstGeom prst="rect">
             <a:avLst/>
@@ -17482,7 +17372,7 @@
         <p:spPr>
           <a:xfrm>
             <a:off x="457200" y="1600200"/>
-            <a:ext cx="11273040" cy="560160"/>
+            <a:ext cx="11272680" cy="559800"/>
           </a:xfrm>
           <a:prstGeom prst="roundRect">
             <a:avLst>
@@ -17527,7 +17417,7 @@
         <p:spPr>
           <a:xfrm>
             <a:off x="685800" y="1707480"/>
-            <a:ext cx="345960" cy="345960"/>
+            <a:ext cx="345600" cy="345600"/>
           </a:xfrm>
           <a:prstGeom prst="ellipse">
             <a:avLst/>
@@ -17574,7 +17464,7 @@
         <p:spPr>
           <a:xfrm>
             <a:off x="758880" y="1780560"/>
-            <a:ext cx="199800" cy="199800"/>
+            <a:ext cx="199440" cy="199440"/>
           </a:xfrm>
           <a:prstGeom prst="rect">
             <a:avLst/>
@@ -17594,7 +17484,7 @@
         <p:spPr>
           <a:xfrm>
             <a:off x="1234440" y="1600200"/>
-            <a:ext cx="10239840" cy="560160"/>
+            <a:ext cx="10239480" cy="559800"/>
           </a:xfrm>
           <a:prstGeom prst="rect">
             <a:avLst/>
@@ -17655,7 +17545,7 @@
         <p:spPr>
           <a:xfrm>
             <a:off x="457200" y="2253240"/>
-            <a:ext cx="11273040" cy="560160"/>
+            <a:ext cx="11272680" cy="559800"/>
           </a:xfrm>
           <a:prstGeom prst="roundRect">
             <a:avLst>
@@ -17700,7 +17590,7 @@
         <p:spPr>
           <a:xfrm>
             <a:off x="685800" y="2360520"/>
-            <a:ext cx="345960" cy="345960"/>
+            <a:ext cx="345600" cy="345600"/>
           </a:xfrm>
           <a:prstGeom prst="ellipse">
             <a:avLst/>
@@ -17747,7 +17637,7 @@
         <p:spPr>
           <a:xfrm>
             <a:off x="758880" y="2433600"/>
-            <a:ext cx="199800" cy="199800"/>
+            <a:ext cx="199440" cy="199440"/>
           </a:xfrm>
           <a:prstGeom prst="rect">
             <a:avLst/>
@@ -17767,7 +17657,7 @@
         <p:spPr>
           <a:xfrm>
             <a:off x="1234440" y="2253240"/>
-            <a:ext cx="10239840" cy="560160"/>
+            <a:ext cx="10239480" cy="559800"/>
           </a:xfrm>
           <a:prstGeom prst="rect">
             <a:avLst/>
@@ -17828,7 +17718,7 @@
         <p:spPr>
           <a:xfrm>
             <a:off x="457200" y="2906640"/>
-            <a:ext cx="11273040" cy="560160"/>
+            <a:ext cx="11272680" cy="559800"/>
           </a:xfrm>
           <a:prstGeom prst="roundRect">
             <a:avLst>
@@ -17873,7 +17763,7 @@
         <p:spPr>
           <a:xfrm>
             <a:off x="685800" y="3013560"/>
-            <a:ext cx="345960" cy="345960"/>
+            <a:ext cx="345600" cy="345600"/>
           </a:xfrm>
           <a:prstGeom prst="ellipse">
             <a:avLst/>
@@ -17920,7 +17810,7 @@
         <p:spPr>
           <a:xfrm>
             <a:off x="758880" y="3086640"/>
-            <a:ext cx="199800" cy="199800"/>
+            <a:ext cx="199440" cy="199440"/>
           </a:xfrm>
           <a:prstGeom prst="rect">
             <a:avLst/>
@@ -17940,7 +17830,7 @@
         <p:spPr>
           <a:xfrm>
             <a:off x="1234440" y="2906640"/>
-            <a:ext cx="10239840" cy="560160"/>
+            <a:ext cx="10239480" cy="559800"/>
           </a:xfrm>
           <a:prstGeom prst="rect">
             <a:avLst/>
@@ -18001,7 +17891,7 @@
         <p:spPr>
           <a:xfrm>
             <a:off x="457200" y="3559680"/>
-            <a:ext cx="11273040" cy="560160"/>
+            <a:ext cx="11272680" cy="559800"/>
           </a:xfrm>
           <a:prstGeom prst="roundRect">
             <a:avLst>
@@ -18046,7 +17936,7 @@
         <p:spPr>
           <a:xfrm>
             <a:off x="685800" y="3666600"/>
-            <a:ext cx="345960" cy="345960"/>
+            <a:ext cx="345600" cy="345600"/>
           </a:xfrm>
           <a:prstGeom prst="ellipse">
             <a:avLst/>
@@ -18093,7 +17983,7 @@
         <p:spPr>
           <a:xfrm>
             <a:off x="758880" y="3740040"/>
-            <a:ext cx="199800" cy="199800"/>
+            <a:ext cx="199440" cy="199440"/>
           </a:xfrm>
           <a:prstGeom prst="rect">
             <a:avLst/>
@@ -18113,7 +18003,7 @@
         <p:spPr>
           <a:xfrm>
             <a:off x="1234440" y="3559680"/>
-            <a:ext cx="10239840" cy="560160"/>
+            <a:ext cx="10239480" cy="559800"/>
           </a:xfrm>
           <a:prstGeom prst="rect">
             <a:avLst/>
@@ -18174,7 +18064,7 @@
         <p:spPr>
           <a:xfrm>
             <a:off x="457200" y="4212720"/>
-            <a:ext cx="11273040" cy="560160"/>
+            <a:ext cx="11272680" cy="559800"/>
           </a:xfrm>
           <a:prstGeom prst="roundRect">
             <a:avLst>
@@ -18219,7 +18109,7 @@
         <p:spPr>
           <a:xfrm>
             <a:off x="685800" y="4320000"/>
-            <a:ext cx="345960" cy="345960"/>
+            <a:ext cx="345600" cy="345600"/>
           </a:xfrm>
           <a:prstGeom prst="ellipse">
             <a:avLst/>
@@ -18266,7 +18156,7 @@
         <p:spPr>
           <a:xfrm>
             <a:off x="758880" y="4393080"/>
-            <a:ext cx="199800" cy="199800"/>
+            <a:ext cx="199440" cy="199440"/>
           </a:xfrm>
           <a:prstGeom prst="rect">
             <a:avLst/>
@@ -18286,7 +18176,7 @@
         <p:spPr>
           <a:xfrm>
             <a:off x="1234440" y="4212720"/>
-            <a:ext cx="10239840" cy="560160"/>
+            <a:ext cx="10239480" cy="559800"/>
           </a:xfrm>
           <a:prstGeom prst="rect">
             <a:avLst/>
@@ -18347,7 +18237,7 @@
         <p:spPr>
           <a:xfrm>
             <a:off x="457200" y="4865760"/>
-            <a:ext cx="11273040" cy="560160"/>
+            <a:ext cx="11272680" cy="559800"/>
           </a:xfrm>
           <a:prstGeom prst="roundRect">
             <a:avLst>
@@ -18392,7 +18282,7 @@
         <p:spPr>
           <a:xfrm>
             <a:off x="685800" y="4973040"/>
-            <a:ext cx="345960" cy="345960"/>
+            <a:ext cx="345600" cy="345600"/>
           </a:xfrm>
           <a:prstGeom prst="ellipse">
             <a:avLst/>
@@ -18439,7 +18329,7 @@
         <p:spPr>
           <a:xfrm>
             <a:off x="758880" y="5046120"/>
-            <a:ext cx="199800" cy="199800"/>
+            <a:ext cx="199440" cy="199440"/>
           </a:xfrm>
           <a:prstGeom prst="rect">
             <a:avLst/>
@@ -18459,7 +18349,7 @@
         <p:spPr>
           <a:xfrm>
             <a:off x="1234440" y="4865760"/>
-            <a:ext cx="10239840" cy="560160"/>
+            <a:ext cx="10239480" cy="559800"/>
           </a:xfrm>
           <a:prstGeom prst="rect">
             <a:avLst/>
@@ -18520,7 +18410,7 @@
         <p:spPr>
           <a:xfrm>
             <a:off x="457200" y="5519160"/>
-            <a:ext cx="11273040" cy="560160"/>
+            <a:ext cx="11272680" cy="559800"/>
           </a:xfrm>
           <a:prstGeom prst="roundRect">
             <a:avLst>
@@ -18565,7 +18455,7 @@
         <p:spPr>
           <a:xfrm>
             <a:off x="685800" y="5626080"/>
-            <a:ext cx="345960" cy="345960"/>
+            <a:ext cx="345600" cy="345600"/>
           </a:xfrm>
           <a:prstGeom prst="ellipse">
             <a:avLst/>
@@ -18612,7 +18502,7 @@
         <p:spPr>
           <a:xfrm>
             <a:off x="758880" y="5699160"/>
-            <a:ext cx="199800" cy="199800"/>
+            <a:ext cx="199440" cy="199440"/>
           </a:xfrm>
           <a:prstGeom prst="rect">
             <a:avLst/>
@@ -18632,7 +18522,7 @@
         <p:spPr>
           <a:xfrm>
             <a:off x="1234440" y="5519160"/>
-            <a:ext cx="10239840" cy="560160"/>
+            <a:ext cx="10239480" cy="559800"/>
           </a:xfrm>
           <a:prstGeom prst="rect">
             <a:avLst/>
@@ -18693,7 +18583,7 @@
         <p:spPr>
           <a:xfrm>
             <a:off x="457200" y="6446520"/>
-            <a:ext cx="7313760" cy="272880"/>
+            <a:ext cx="7313400" cy="272520"/>
           </a:xfrm>
           <a:prstGeom prst="rect">
             <a:avLst/>
@@ -18754,7 +18644,7 @@
         <p:spPr>
           <a:xfrm>
             <a:off x="11521440" y="6446520"/>
-            <a:ext cx="455760" cy="272880"/>
+            <a:ext cx="455400" cy="272520"/>
           </a:xfrm>
           <a:prstGeom prst="rect">
             <a:avLst/>
@@ -18852,7 +18742,7 @@
         <p:spPr>
           <a:xfrm>
             <a:off x="457200" y="457200"/>
-            <a:ext cx="638640" cy="638640"/>
+            <a:ext cx="638280" cy="638280"/>
           </a:xfrm>
           <a:prstGeom prst="ellipse">
             <a:avLst/>
@@ -18899,7 +18789,7 @@
         <p:spPr>
           <a:xfrm>
             <a:off x="548640" y="548640"/>
-            <a:ext cx="446760" cy="446760"/>
+            <a:ext cx="446400" cy="446400"/>
           </a:xfrm>
           <a:prstGeom prst="rect">
             <a:avLst/>
@@ -18919,7 +18809,7 @@
         <p:spPr>
           <a:xfrm>
             <a:off x="1280160" y="457200"/>
-            <a:ext cx="10422720" cy="638640"/>
+            <a:ext cx="10422360" cy="638280"/>
           </a:xfrm>
           <a:prstGeom prst="rect">
             <a:avLst/>
@@ -18980,7 +18870,7 @@
         <p:spPr>
           <a:xfrm>
             <a:off x="457200" y="1645920"/>
-            <a:ext cx="5347800" cy="4479120"/>
+            <a:ext cx="5347440" cy="4478760"/>
           </a:xfrm>
           <a:prstGeom prst="roundRect">
             <a:avLst>
@@ -19025,7 +18915,7 @@
         <p:spPr>
           <a:xfrm>
             <a:off x="731520" y="1874520"/>
-            <a:ext cx="455760" cy="455760"/>
+            <a:ext cx="455400" cy="455400"/>
           </a:xfrm>
           <a:prstGeom prst="ellipse">
             <a:avLst/>
@@ -19072,7 +18962,7 @@
         <p:spPr>
           <a:xfrm>
             <a:off x="804600" y="1938600"/>
-            <a:ext cx="318600" cy="318600"/>
+            <a:ext cx="318240" cy="318240"/>
           </a:xfrm>
           <a:prstGeom prst="rect">
             <a:avLst/>
@@ -19092,7 +18982,7 @@
         <p:spPr>
           <a:xfrm>
             <a:off x="1325880" y="1874520"/>
-            <a:ext cx="4341960" cy="455760"/>
+            <a:ext cx="4341600" cy="455400"/>
           </a:xfrm>
           <a:prstGeom prst="rect">
             <a:avLst/>
@@ -19153,7 +19043,7 @@
         <p:spPr>
           <a:xfrm>
             <a:off x="731520" y="2514600"/>
-            <a:ext cx="4799160" cy="3381840"/>
+            <a:ext cx="4798800" cy="3381480"/>
           </a:xfrm>
           <a:prstGeom prst="rect">
             <a:avLst/>
@@ -19188,7 +19078,7 @@
               <a:buChar char=""/>
             </a:pPr>
             <a:r>
-              <a:rPr lang="en-US" sz="1350" b="0" u="none" strike="noStrike">
+              <a:rPr lang="en-US" sz="2100" b="0" u="none" strike="noStrike">
                 <a:solidFill>
                   <a:srgbClr val="1B2420"/>
                 </a:solidFill>
@@ -19199,7 +19089,7 @@
               </a:rPr>
               <a:t>The smallest version of the problem — answered directly, with no further recursive call</a:t>
             </a:r>
-            <a:endParaRPr lang="en-US" sz="1350" b="0" u="none" strike="noStrike">
+            <a:endParaRPr lang="en-US" sz="2100" b="0" u="none" strike="noStrike">
               <a:solidFill>
                 <a:srgbClr val="000000"/>
               </a:solidFill>
@@ -19223,7 +19113,7 @@
               <a:buChar char=""/>
             </a:pPr>
             <a:r>
-              <a:rPr lang="en-US" sz="1350" b="0" u="none" strike="noStrike">
+              <a:rPr lang="en-US" sz="2100" b="0" u="none" strike="noStrike">
                 <a:solidFill>
                   <a:srgbClr val="1B2420"/>
                 </a:solidFill>
@@ -19234,7 +19124,7 @@
               </a:rPr>
               <a:t>This is what stops the recursion</a:t>
             </a:r>
-            <a:endParaRPr lang="en-US" sz="1350" b="0" u="none" strike="noStrike">
+            <a:endParaRPr lang="en-US" sz="2100" b="0" u="none" strike="noStrike">
               <a:solidFill>
                 <a:srgbClr val="000000"/>
               </a:solidFill>
@@ -19258,7 +19148,7 @@
               <a:buChar char=""/>
             </a:pPr>
             <a:r>
-              <a:rPr lang="en-US" sz="1350" b="0" u="none" strike="noStrike">
+              <a:rPr lang="en-US" sz="2100" b="0" u="none" strike="noStrike">
                 <a:solidFill>
                   <a:srgbClr val="1B2420"/>
                 </a:solidFill>
@@ -19269,7 +19159,7 @@
               </a:rPr>
               <a:t>Every recursive function needs at least one</a:t>
             </a:r>
-            <a:endParaRPr lang="en-US" sz="1350" b="0" u="none" strike="noStrike">
+            <a:endParaRPr lang="en-US" sz="2100" b="0" u="none" strike="noStrike">
               <a:solidFill>
                 <a:srgbClr val="000000"/>
               </a:solidFill>
@@ -19293,7 +19183,7 @@
               <a:buChar char=""/>
             </a:pPr>
             <a:r>
-              <a:rPr lang="en-US" sz="1350" b="0" u="none" strike="noStrike">
+              <a:rPr lang="en-US" sz="2100" b="0" u="none" strike="noStrike">
                 <a:solidFill>
                   <a:srgbClr val="1B2420"/>
                 </a:solidFill>
@@ -19304,7 +19194,7 @@
               </a:rPr>
               <a:t>Example: factorial(0) is defined to be 1, no calculation needed</a:t>
             </a:r>
-            <a:endParaRPr lang="en-US" sz="1350" b="0" u="none" strike="noStrike">
+            <a:endParaRPr lang="en-US" sz="2100" b="0" u="none" strike="noStrike">
               <a:solidFill>
                 <a:srgbClr val="000000"/>
               </a:solidFill>
@@ -19324,7 +19214,7 @@
         <p:spPr>
           <a:xfrm>
             <a:off x="6172200" y="1645920"/>
-            <a:ext cx="5347800" cy="4479120"/>
+            <a:ext cx="5347440" cy="4478760"/>
           </a:xfrm>
           <a:prstGeom prst="roundRect">
             <a:avLst>
@@ -19369,7 +19259,7 @@
         <p:spPr>
           <a:xfrm>
             <a:off x="6446520" y="1874520"/>
-            <a:ext cx="455760" cy="455760"/>
+            <a:ext cx="455400" cy="455400"/>
           </a:xfrm>
           <a:prstGeom prst="ellipse">
             <a:avLst/>
@@ -19416,7 +19306,7 @@
         <p:spPr>
           <a:xfrm>
             <a:off x="6519600" y="1938600"/>
-            <a:ext cx="318600" cy="318600"/>
+            <a:ext cx="318240" cy="318240"/>
           </a:xfrm>
           <a:prstGeom prst="rect">
             <a:avLst/>
@@ -19436,7 +19326,7 @@
         <p:spPr>
           <a:xfrm>
             <a:off x="7040880" y="1874520"/>
-            <a:ext cx="4341960" cy="455760"/>
+            <a:ext cx="4341600" cy="455400"/>
           </a:xfrm>
           <a:prstGeom prst="rect">
             <a:avLst/>
@@ -19497,7 +19387,7 @@
         <p:spPr>
           <a:xfrm>
             <a:off x="6446520" y="2514600"/>
-            <a:ext cx="4799160" cy="3381840"/>
+            <a:ext cx="4798800" cy="3381480"/>
           </a:xfrm>
           <a:prstGeom prst="rect">
             <a:avLst/>
@@ -19532,7 +19422,7 @@
               <a:buChar char=""/>
             </a:pPr>
             <a:r>
-              <a:rPr lang="en-US" sz="1350" b="0" u="none" strike="noStrike">
+              <a:rPr lang="en-US" sz="2100" b="0" u="none" strike="noStrike">
                 <a:solidFill>
                   <a:srgbClr val="1B2420"/>
                 </a:solidFill>
@@ -19543,7 +19433,7 @@
               </a:rPr>
               <a:t>The step where the function calls itself on a smaller piece of the problem</a:t>
             </a:r>
-            <a:endParaRPr lang="en-US" sz="1350" b="0" u="none" strike="noStrike">
+            <a:endParaRPr lang="en-US" sz="2100" b="0" u="none" strike="noStrike">
               <a:solidFill>
                 <a:srgbClr val="000000"/>
               </a:solidFill>
@@ -19567,7 +19457,7 @@
               <a:buChar char=""/>
             </a:pPr>
             <a:r>
-              <a:rPr lang="en-US" sz="1350" b="0" u="none" strike="noStrike">
+              <a:rPr lang="en-US" sz="2100" b="0" u="none" strike="noStrike">
                 <a:solidFill>
                   <a:srgbClr val="1B2420"/>
                 </a:solidFill>
@@ -19578,7 +19468,7 @@
               </a:rPr>
               <a:t>Must always move toward the base case — never sideways, never backward</a:t>
             </a:r>
-            <a:endParaRPr lang="en-US" sz="1350" b="0" u="none" strike="noStrike">
+            <a:endParaRPr lang="en-US" sz="2100" b="0" u="none" strike="noStrike">
               <a:solidFill>
                 <a:srgbClr val="000000"/>
               </a:solidFill>
@@ -19602,7 +19492,7 @@
               <a:buChar char=""/>
             </a:pPr>
             <a:r>
-              <a:rPr lang="en-US" sz="1350" b="0" u="none" strike="noStrike">
+              <a:rPr lang="en-US" sz="2100" b="0" u="none" strike="noStrike">
                 <a:solidFill>
                   <a:srgbClr val="1B2420"/>
                 </a:solidFill>
@@ -19613,7 +19503,7 @@
               </a:rPr>
               <a:t>Combines its own small piece of work with the result of the smaller call</a:t>
             </a:r>
-            <a:endParaRPr lang="en-US" sz="1350" b="0" u="none" strike="noStrike">
+            <a:endParaRPr lang="en-US" sz="2100" b="0" u="none" strike="noStrike">
               <a:solidFill>
                 <a:srgbClr val="000000"/>
               </a:solidFill>
@@ -19637,7 +19527,7 @@
               <a:buChar char=""/>
             </a:pPr>
             <a:r>
-              <a:rPr lang="en-US" sz="1350" b="0" u="none" strike="noStrike">
+              <a:rPr lang="en-US" sz="2100" b="0" u="none" strike="noStrike">
                 <a:solidFill>
                   <a:srgbClr val="1B2420"/>
                 </a:solidFill>
@@ -19648,7 +19538,7 @@
               </a:rPr>
               <a:t>Example: factorial(n) = n × factorial(n - 1)</a:t>
             </a:r>
-            <a:endParaRPr lang="en-US" sz="1350" b="0" u="none" strike="noStrike">
+            <a:endParaRPr lang="en-US" sz="2100" b="0" u="none" strike="noStrike">
               <a:solidFill>
                 <a:srgbClr val="000000"/>
               </a:solidFill>
@@ -19668,7 +19558,7 @@
         <p:spPr>
           <a:xfrm>
             <a:off x="457200" y="6446520"/>
-            <a:ext cx="7313760" cy="272880"/>
+            <a:ext cx="7313400" cy="272520"/>
           </a:xfrm>
           <a:prstGeom prst="rect">
             <a:avLst/>
@@ -19729,7 +19619,7 @@
         <p:spPr>
           <a:xfrm>
             <a:off x="11521440" y="6446520"/>
-            <a:ext cx="455760" cy="272880"/>
+            <a:ext cx="455400" cy="272520"/>
           </a:xfrm>
           <a:prstGeom prst="rect">
             <a:avLst/>
@@ -19827,7 +19717,7 @@
         <p:spPr>
           <a:xfrm>
             <a:off x="457200" y="457200"/>
-            <a:ext cx="638640" cy="638640"/>
+            <a:ext cx="638280" cy="638280"/>
           </a:xfrm>
           <a:prstGeom prst="ellipse">
             <a:avLst/>
@@ -19874,7 +19764,7 @@
         <p:spPr>
           <a:xfrm>
             <a:off x="548640" y="548640"/>
-            <a:ext cx="446760" cy="446760"/>
+            <a:ext cx="446400" cy="446400"/>
           </a:xfrm>
           <a:prstGeom prst="rect">
             <a:avLst/>
@@ -19894,7 +19784,7 @@
         <p:spPr>
           <a:xfrm>
             <a:off x="1280160" y="457200"/>
-            <a:ext cx="10422720" cy="638640"/>
+            <a:ext cx="10422360" cy="638280"/>
           </a:xfrm>
           <a:prstGeom prst="rect">
             <a:avLst/>
@@ -19955,7 +19845,7 @@
         <p:spPr>
           <a:xfrm>
             <a:off x="548640" y="1828800"/>
-            <a:ext cx="4753440" cy="4021920"/>
+            <a:ext cx="4753080" cy="4021560"/>
           </a:xfrm>
           <a:prstGeom prst="rect">
             <a:avLst/>
@@ -19990,7 +19880,7 @@
               <a:buChar char=""/>
             </a:pPr>
             <a:r>
-              <a:rPr lang="en-US" sz="1350" b="0" u="none" strike="noStrike">
+              <a:rPr lang="en-US" sz="2400" b="0" u="none" strike="noStrike">
                 <a:solidFill>
                   <a:srgbClr val="1B2420"/>
                 </a:solidFill>
@@ -20001,7 +19891,7 @@
               </a:rPr>
               <a:t>factorial(n) is n × (n-1) × (n-2) × ... × 1 — a textbook recursive definition</a:t>
             </a:r>
-            <a:endParaRPr lang="en-US" sz="1350" b="0" u="none" strike="noStrike">
+            <a:endParaRPr lang="en-US" sz="2400" b="0" u="none" strike="noStrike">
               <a:solidFill>
                 <a:srgbClr val="000000"/>
               </a:solidFill>
@@ -20025,7 +19915,7 @@
               <a:buChar char=""/>
             </a:pPr>
             <a:r>
-              <a:rPr lang="en-US" sz="1350" b="0" u="none" strike="noStrike">
+              <a:rPr lang="en-US" sz="2400" b="0" u="none" strike="noStrike">
                 <a:solidFill>
                   <a:srgbClr val="1B2420"/>
                 </a:solidFill>
@@ -20036,7 +19926,7 @@
               </a:rPr>
               <a:t>Base case: factorial(0) is 1</a:t>
             </a:r>
-            <a:endParaRPr lang="en-US" sz="1350" b="0" u="none" strike="noStrike">
+            <a:endParaRPr lang="en-US" sz="2400" b="0" u="none" strike="noStrike">
               <a:solidFill>
                 <a:srgbClr val="000000"/>
               </a:solidFill>
@@ -20060,7 +19950,7 @@
               <a:buChar char=""/>
             </a:pPr>
             <a:r>
-              <a:rPr lang="en-US" sz="1350" b="0" u="none" strike="noStrike">
+              <a:rPr lang="en-US" sz="2400" b="0" u="none" strike="noStrike">
                 <a:solidFill>
                   <a:srgbClr val="1B2420"/>
                 </a:solidFill>
@@ -20071,7 +19961,7 @@
               </a:rPr>
               <a:t>Recursive case: factorial(n) is n times factorial(n - 1)</a:t>
             </a:r>
-            <a:endParaRPr lang="en-US" sz="1350" b="0" u="none" strike="noStrike">
+            <a:endParaRPr lang="en-US" sz="2400" b="0" u="none" strike="noStrike">
               <a:solidFill>
                 <a:srgbClr val="000000"/>
               </a:solidFill>
@@ -20091,7 +19981,7 @@
         <p:spPr>
           <a:xfrm>
             <a:off x="5486400" y="1691640"/>
-            <a:ext cx="6216480" cy="4341960"/>
+            <a:ext cx="6216120" cy="4341600"/>
           </a:xfrm>
           <a:prstGeom prst="roundRect">
             <a:avLst>
@@ -20136,7 +20026,7 @@
         <p:spPr>
           <a:xfrm>
             <a:off x="5806440" y="1965960"/>
-            <a:ext cx="5576400" cy="3793320"/>
+            <a:ext cx="5576040" cy="3792960"/>
           </a:xfrm>
           <a:prstGeom prst="rect">
             <a:avLst/>
@@ -20166,7 +20056,7 @@
               </a:tabLst>
             </a:pPr>
             <a:r>
-              <a:rPr lang="en-US" sz="1250" b="0" u="none" strike="noStrike">
+              <a:rPr lang="en-US" sz="2000" b="0" u="none" strike="noStrike">
                 <a:solidFill>
                   <a:srgbClr val="C9D3CC"/>
                 </a:solidFill>
@@ -20177,7 +20067,7 @@
               </a:rPr>
               <a:t>def factorial(n):</a:t>
             </a:r>
-            <a:endParaRPr lang="en-US" sz="1250" b="0" u="none" strike="noStrike">
+            <a:endParaRPr lang="en-US" sz="2000" b="0" u="none" strike="noStrike">
               <a:solidFill>
                 <a:srgbClr val="000000"/>
               </a:solidFill>
@@ -20196,7 +20086,7 @@
               </a:tabLst>
             </a:pPr>
             <a:r>
-              <a:rPr lang="en-US" sz="1250" b="0" u="none" strike="noStrike">
+              <a:rPr lang="en-US" sz="2000" b="0" u="none" strike="noStrike">
                 <a:solidFill>
                   <a:srgbClr val="C9D3CC"/>
                 </a:solidFill>
@@ -20208,7 +20098,7 @@
               <a:t>    if n == 0:            </a:t>
             </a:r>
             <a:r>
-              <a:rPr lang="en-US" sz="1250" b="0" u="none" strike="noStrike">
+              <a:rPr lang="en-US" sz="2000" b="0" u="none" strike="noStrike">
                 <a:solidFill>
                   <a:srgbClr val="7C8A80"/>
                 </a:solidFill>
@@ -20219,7 +20109,7 @@
               </a:rPr>
               <a:t>  # base case</a:t>
             </a:r>
-            <a:endParaRPr lang="en-US" sz="1250" b="0" u="none" strike="noStrike">
+            <a:endParaRPr lang="en-US" sz="2000" b="0" u="none" strike="noStrike">
               <a:solidFill>
                 <a:srgbClr val="000000"/>
               </a:solidFill>
@@ -20238,7 +20128,7 @@
               </a:tabLst>
             </a:pPr>
             <a:r>
-              <a:rPr lang="en-US" sz="1250" b="0" u="none" strike="noStrike">
+              <a:rPr lang="en-US" sz="2000" b="0" u="none" strike="noStrike">
                 <a:solidFill>
                   <a:srgbClr val="C9D3CC"/>
                 </a:solidFill>
@@ -20249,7 +20139,7 @@
               </a:rPr>
               <a:t>        return 1</a:t>
             </a:r>
-            <a:endParaRPr lang="en-US" sz="1250" b="0" u="none" strike="noStrike">
+            <a:endParaRPr lang="en-US" sz="2000" b="0" u="none" strike="noStrike">
               <a:solidFill>
                 <a:srgbClr val="000000"/>
               </a:solidFill>
@@ -20268,7 +20158,7 @@
               </a:tabLst>
             </a:pPr>
             <a:r>
-              <a:rPr lang="en-US" sz="1250" b="0" u="none" strike="noStrike">
+              <a:rPr lang="en-US" sz="2000" b="0" u="none" strike="noStrike">
                 <a:solidFill>
                   <a:srgbClr val="C9D3CC"/>
                 </a:solidFill>
@@ -20280,7 +20170,7 @@
               <a:t>    return n * factorial(n - 1) </a:t>
             </a:r>
             <a:r>
-              <a:rPr lang="en-US" sz="1250" b="0" u="none" strike="noStrike">
+              <a:rPr lang="en-US" sz="2000" b="0" u="none" strike="noStrike">
                 <a:solidFill>
                   <a:srgbClr val="7C8A80"/>
                 </a:solidFill>
@@ -20291,7 +20181,7 @@
               </a:rPr>
               <a:t>  # recursive case</a:t>
             </a:r>
-            <a:endParaRPr lang="en-US" sz="1250" b="0" u="none" strike="noStrike">
+            <a:endParaRPr lang="en-US" sz="2000" b="0" u="none" strike="noStrike">
               <a:solidFill>
                 <a:srgbClr val="000000"/>
               </a:solidFill>
@@ -20310,7 +20200,7 @@
               </a:tabLst>
             </a:pPr>
             <a:r>
-              <a:rPr lang="en-US" sz="1250" b="0" u="none" strike="noStrike">
+              <a:rPr lang="en-US" sz="2000" b="0" u="none" strike="noStrike">
                 <a:solidFill>
                   <a:srgbClr val="C9D3CC"/>
                 </a:solidFill>
@@ -20321,7 +20211,7 @@
               </a:rPr>
               <a:t> </a:t>
             </a:r>
-            <a:endParaRPr lang="en-US" sz="1250" b="0" u="none" strike="noStrike">
+            <a:endParaRPr lang="en-US" sz="2000" b="0" u="none" strike="noStrike">
               <a:solidFill>
                 <a:srgbClr val="000000"/>
               </a:solidFill>
@@ -20340,7 +20230,7 @@
               </a:tabLst>
             </a:pPr>
             <a:r>
-              <a:rPr lang="en-US" sz="1250" b="0" u="none" strike="noStrike">
+              <a:rPr lang="en-US" sz="2000" b="0" u="none" strike="noStrike">
                 <a:solidFill>
                   <a:srgbClr val="C9D3CC"/>
                 </a:solidFill>
@@ -20351,7 +20241,7 @@
               </a:rPr>
               <a:t>factorial(4)</a:t>
             </a:r>
-            <a:endParaRPr lang="en-US" sz="1250" b="0" u="none" strike="noStrike">
+            <a:endParaRPr lang="en-US" sz="2000" b="0" u="none" strike="noStrike">
               <a:solidFill>
                 <a:srgbClr val="000000"/>
               </a:solidFill>
@@ -20370,7 +20260,7 @@
               </a:tabLst>
             </a:pPr>
             <a:r>
-              <a:rPr lang="en-US" sz="1250" b="0" u="none" strike="noStrike">
+              <a:rPr lang="en-US" sz="2000" b="0" u="none" strike="noStrike">
                 <a:solidFill>
                   <a:srgbClr val="7C8A80"/>
                 </a:solidFill>
@@ -20381,7 +20271,7 @@
               </a:rPr>
               <a:t># 4 * factorial(3)</a:t>
             </a:r>
-            <a:endParaRPr lang="en-US" sz="1250" b="0" u="none" strike="noStrike">
+            <a:endParaRPr lang="en-US" sz="2000" b="0" u="none" strike="noStrike">
               <a:solidFill>
                 <a:srgbClr val="000000"/>
               </a:solidFill>
@@ -20400,7 +20290,7 @@
               </a:tabLst>
             </a:pPr>
             <a:r>
-              <a:rPr lang="en-US" sz="1250" b="0" u="none" strike="noStrike">
+              <a:rPr lang="en-US" sz="2000" b="0" u="none" strike="noStrike">
                 <a:solidFill>
                   <a:srgbClr val="7C8A80"/>
                 </a:solidFill>
@@ -20411,7 +20301,7 @@
               </a:rPr>
               <a:t># 4 * (3 * factorial(2))</a:t>
             </a:r>
-            <a:endParaRPr lang="en-US" sz="1250" b="0" u="none" strike="noStrike">
+            <a:endParaRPr lang="en-US" sz="2000" b="0" u="none" strike="noStrike">
               <a:solidFill>
                 <a:srgbClr val="000000"/>
               </a:solidFill>
@@ -20430,7 +20320,7 @@
               </a:tabLst>
             </a:pPr>
             <a:r>
-              <a:rPr lang="en-US" sz="1250" b="0" u="none" strike="noStrike">
+              <a:rPr lang="en-US" sz="2000" b="0" u="none" strike="noStrike">
                 <a:solidFill>
                   <a:srgbClr val="7C8A80"/>
                 </a:solidFill>
@@ -20441,7 +20331,7 @@
               </a:rPr>
               <a:t># 4 * (3 * (2 * factorial(1)))</a:t>
             </a:r>
-            <a:endParaRPr lang="en-US" sz="1250" b="0" u="none" strike="noStrike">
+            <a:endParaRPr lang="en-US" sz="2000" b="0" u="none" strike="noStrike">
               <a:solidFill>
                 <a:srgbClr val="000000"/>
               </a:solidFill>
@@ -20460,7 +20350,7 @@
               </a:tabLst>
             </a:pPr>
             <a:r>
-              <a:rPr lang="en-US" sz="1250" b="0" u="none" strike="noStrike">
+              <a:rPr lang="en-US" sz="2000" b="0" u="none" strike="noStrike">
                 <a:solidFill>
                   <a:srgbClr val="7C8A80"/>
                 </a:solidFill>
@@ -20471,7 +20361,7 @@
               </a:rPr>
               <a:t># 4 * 3 * 2 * 1 * 1  -&gt;  24</a:t>
             </a:r>
-            <a:endParaRPr lang="en-US" sz="1250" b="0" u="none" strike="noStrike">
+            <a:endParaRPr lang="en-US" sz="2000" b="0" u="none" strike="noStrike">
               <a:solidFill>
                 <a:srgbClr val="000000"/>
               </a:solidFill>
@@ -20491,7 +20381,7 @@
         <p:spPr>
           <a:xfrm>
             <a:off x="457200" y="6446520"/>
-            <a:ext cx="7313760" cy="272880"/>
+            <a:ext cx="7313400" cy="272520"/>
           </a:xfrm>
           <a:prstGeom prst="rect">
             <a:avLst/>
@@ -20552,7 +20442,7 @@
         <p:spPr>
           <a:xfrm>
             <a:off x="11521440" y="6446520"/>
-            <a:ext cx="455760" cy="272880"/>
+            <a:ext cx="455400" cy="272520"/>
           </a:xfrm>
           <a:prstGeom prst="rect">
             <a:avLst/>
@@ -20650,7 +20540,7 @@
         <p:spPr>
           <a:xfrm>
             <a:off x="457200" y="457200"/>
-            <a:ext cx="638640" cy="638640"/>
+            <a:ext cx="638280" cy="638280"/>
           </a:xfrm>
           <a:prstGeom prst="ellipse">
             <a:avLst/>
@@ -20697,7 +20587,7 @@
         <p:spPr>
           <a:xfrm>
             <a:off x="548640" y="548640"/>
-            <a:ext cx="446760" cy="446760"/>
+            <a:ext cx="446400" cy="446400"/>
           </a:xfrm>
           <a:prstGeom prst="rect">
             <a:avLst/>
@@ -20717,7 +20607,7 @@
         <p:spPr>
           <a:xfrm>
             <a:off x="1280160" y="457200"/>
-            <a:ext cx="10422720" cy="638640"/>
+            <a:ext cx="10422360" cy="638280"/>
           </a:xfrm>
           <a:prstGeom prst="rect">
             <a:avLst/>
@@ -20778,7 +20668,7 @@
         <p:spPr>
           <a:xfrm>
             <a:off x="1097280" y="1691640"/>
-            <a:ext cx="9992880" cy="711720"/>
+            <a:ext cx="9992520" cy="711360"/>
           </a:xfrm>
           <a:prstGeom prst="roundRect">
             <a:avLst>
@@ -20823,7 +20713,7 @@
         <p:spPr>
           <a:xfrm>
             <a:off x="1325880" y="1691640"/>
-            <a:ext cx="9535680" cy="711720"/>
+            <a:ext cx="9535320" cy="711360"/>
           </a:xfrm>
           <a:prstGeom prst="rect">
             <a:avLst/>
@@ -20884,7 +20774,7 @@
         <p:spPr>
           <a:xfrm>
             <a:off x="1417320" y="2514600"/>
-            <a:ext cx="9672840" cy="711720"/>
+            <a:ext cx="9672480" cy="711360"/>
           </a:xfrm>
           <a:prstGeom prst="roundRect">
             <a:avLst>
@@ -20929,7 +20819,7 @@
         <p:spPr>
           <a:xfrm>
             <a:off x="1645920" y="2514600"/>
-            <a:ext cx="9215640" cy="711720"/>
+            <a:ext cx="9215280" cy="711360"/>
           </a:xfrm>
           <a:prstGeom prst="rect">
             <a:avLst/>
@@ -20990,7 +20880,7 @@
         <p:spPr>
           <a:xfrm>
             <a:off x="1737360" y="3337560"/>
-            <a:ext cx="9352800" cy="711720"/>
+            <a:ext cx="9352440" cy="711360"/>
           </a:xfrm>
           <a:prstGeom prst="roundRect">
             <a:avLst>
@@ -21035,7 +20925,7 @@
         <p:spPr>
           <a:xfrm>
             <a:off x="1965960" y="3337560"/>
-            <a:ext cx="8895600" cy="711720"/>
+            <a:ext cx="8895240" cy="711360"/>
           </a:xfrm>
           <a:prstGeom prst="rect">
             <a:avLst/>
@@ -21096,7 +20986,7 @@
         <p:spPr>
           <a:xfrm>
             <a:off x="2057400" y="4160520"/>
-            <a:ext cx="9032760" cy="711720"/>
+            <a:ext cx="9032400" cy="711360"/>
           </a:xfrm>
           <a:prstGeom prst="roundRect">
             <a:avLst>
@@ -21141,7 +21031,7 @@
         <p:spPr>
           <a:xfrm>
             <a:off x="2286000" y="4160520"/>
-            <a:ext cx="8575560" cy="711720"/>
+            <a:ext cx="8575200" cy="711360"/>
           </a:xfrm>
           <a:prstGeom prst="rect">
             <a:avLst/>
@@ -21202,7 +21092,7 @@
         <p:spPr>
           <a:xfrm>
             <a:off x="2377440" y="4983480"/>
-            <a:ext cx="8712720" cy="711720"/>
+            <a:ext cx="8712360" cy="711360"/>
           </a:xfrm>
           <a:prstGeom prst="roundRect">
             <a:avLst>
@@ -21247,7 +21137,7 @@
         <p:spPr>
           <a:xfrm>
             <a:off x="2606040" y="4983480"/>
-            <a:ext cx="8255520" cy="711720"/>
+            <a:ext cx="8255160" cy="711360"/>
           </a:xfrm>
           <a:prstGeom prst="rect">
             <a:avLst/>
@@ -21308,7 +21198,7 @@
         <p:spPr>
           <a:xfrm>
             <a:off x="1097280" y="5852160"/>
-            <a:ext cx="9992880" cy="455760"/>
+            <a:ext cx="9992520" cy="455400"/>
           </a:xfrm>
           <a:prstGeom prst="rect">
             <a:avLst/>
@@ -21369,7 +21259,7 @@
         <p:spPr>
           <a:xfrm>
             <a:off x="457200" y="6446520"/>
-            <a:ext cx="7313760" cy="272880"/>
+            <a:ext cx="7313400" cy="272520"/>
           </a:xfrm>
           <a:prstGeom prst="rect">
             <a:avLst/>
@@ -21430,7 +21320,7 @@
         <p:spPr>
           <a:xfrm>
             <a:off x="11521440" y="6446520"/>
-            <a:ext cx="455760" cy="272880"/>
+            <a:ext cx="455400" cy="272520"/>
           </a:xfrm>
           <a:prstGeom prst="rect">
             <a:avLst/>
@@ -21528,7 +21418,7 @@
         <p:spPr>
           <a:xfrm>
             <a:off x="457200" y="457200"/>
-            <a:ext cx="638640" cy="638640"/>
+            <a:ext cx="638280" cy="638280"/>
           </a:xfrm>
           <a:prstGeom prst="ellipse">
             <a:avLst/>
@@ -21575,7 +21465,7 @@
         <p:spPr>
           <a:xfrm>
             <a:off x="548640" y="548640"/>
-            <a:ext cx="446760" cy="446760"/>
+            <a:ext cx="446400" cy="446400"/>
           </a:xfrm>
           <a:prstGeom prst="rect">
             <a:avLst/>
@@ -21595,7 +21485,7 @@
         <p:spPr>
           <a:xfrm>
             <a:off x="1280160" y="457200"/>
-            <a:ext cx="10422720" cy="638640"/>
+            <a:ext cx="10422360" cy="638280"/>
           </a:xfrm>
           <a:prstGeom prst="rect">
             <a:avLst/>
@@ -21656,7 +21546,7 @@
         <p:spPr>
           <a:xfrm>
             <a:off x="548640" y="1828800"/>
-            <a:ext cx="4753440" cy="4021920"/>
+            <a:ext cx="4753080" cy="4021560"/>
           </a:xfrm>
           <a:prstGeom prst="rect">
             <a:avLst/>
@@ -21691,7 +21581,7 @@
               <a:buChar char=""/>
             </a:pPr>
             <a:r>
-              <a:rPr lang="en-US" sz="1350" b="0" u="none" strike="noStrike">
+              <a:rPr lang="en-US" sz="2400" b="0" u="none" strike="noStrike">
                 <a:solidFill>
                   <a:srgbClr val="1B2420"/>
                 </a:solidFill>
@@ -21702,7 +21592,7 @@
               </a:rPr>
               <a:t>Each Fibonacci number is the sum of the two before it: 0, 1, 1, 2, 3, 5, 8, 13...</a:t>
             </a:r>
-            <a:endParaRPr lang="en-US" sz="1350" b="0" u="none" strike="noStrike">
+            <a:endParaRPr lang="en-US" sz="2400" b="0" u="none" strike="noStrike">
               <a:solidFill>
                 <a:srgbClr val="000000"/>
               </a:solidFill>
@@ -21726,7 +21616,7 @@
               <a:buChar char=""/>
             </a:pPr>
             <a:r>
-              <a:rPr lang="en-US" sz="1350" b="0" u="none" strike="noStrike">
+              <a:rPr lang="en-US" sz="2400" b="0" u="none" strike="noStrike">
                 <a:solidFill>
                   <a:srgbClr val="1B2420"/>
                 </a:solidFill>
@@ -21737,7 +21627,7 @@
               </a:rPr>
               <a:t>Base cases: fib(0) is 0, fib(1) is 1</a:t>
             </a:r>
-            <a:endParaRPr lang="en-US" sz="1350" b="0" u="none" strike="noStrike">
+            <a:endParaRPr lang="en-US" sz="2400" b="0" u="none" strike="noStrike">
               <a:solidFill>
                 <a:srgbClr val="000000"/>
               </a:solidFill>
@@ -21761,7 +21651,7 @@
               <a:buChar char=""/>
             </a:pPr>
             <a:r>
-              <a:rPr lang="en-US" sz="1350" b="0" u="none" strike="noStrike">
+              <a:rPr lang="en-US" sz="2400" b="0" u="none" strike="noStrike">
                 <a:solidFill>
                   <a:srgbClr val="1B2420"/>
                 </a:solidFill>
@@ -21772,7 +21662,7 @@
               </a:rPr>
               <a:t>Recursive case: fib(n) is fib(n-1) + fib(n-2) — two recursive calls, not one</a:t>
             </a:r>
-            <a:endParaRPr lang="en-US" sz="1350" b="0" u="none" strike="noStrike">
+            <a:endParaRPr lang="en-US" sz="2400" b="0" u="none" strike="noStrike">
               <a:solidFill>
                 <a:srgbClr val="000000"/>
               </a:solidFill>
@@ -21792,7 +21682,7 @@
         <p:spPr>
           <a:xfrm>
             <a:off x="5486400" y="1691640"/>
-            <a:ext cx="6216480" cy="4341960"/>
+            <a:ext cx="6216120" cy="4341600"/>
           </a:xfrm>
           <a:prstGeom prst="roundRect">
             <a:avLst>
@@ -21837,7 +21727,7 @@
         <p:spPr>
           <a:xfrm>
             <a:off x="5806440" y="1965960"/>
-            <a:ext cx="5576400" cy="3793320"/>
+            <a:ext cx="5576040" cy="3792960"/>
           </a:xfrm>
           <a:prstGeom prst="rect">
             <a:avLst/>
@@ -21867,7 +21757,7 @@
               </a:tabLst>
             </a:pPr>
             <a:r>
-              <a:rPr lang="en-US" sz="1250" b="0" u="none" strike="noStrike">
+              <a:rPr lang="en-US" sz="2200" b="0" u="none" strike="noStrike">
                 <a:solidFill>
                   <a:srgbClr val="C9D3CC"/>
                 </a:solidFill>
@@ -21878,7 +21768,7 @@
               </a:rPr>
               <a:t>def fib(n):</a:t>
             </a:r>
-            <a:endParaRPr lang="en-US" sz="1250" b="0" u="none" strike="noStrike">
+            <a:endParaRPr lang="en-US" sz="2200" b="0" u="none" strike="noStrike">
               <a:solidFill>
                 <a:srgbClr val="000000"/>
               </a:solidFill>
@@ -21897,7 +21787,7 @@
               </a:tabLst>
             </a:pPr>
             <a:r>
-              <a:rPr lang="en-US" sz="1250" b="0" u="none" strike="noStrike">
+              <a:rPr lang="en-US" sz="2200" b="0" u="none" strike="noStrike">
                 <a:solidFill>
                   <a:srgbClr val="C9D3CC"/>
                 </a:solidFill>
@@ -21909,7 +21799,7 @@
               <a:t>    if n &lt;= 1:             </a:t>
             </a:r>
             <a:r>
-              <a:rPr lang="en-US" sz="1250" b="0" u="none" strike="noStrike">
+              <a:rPr lang="en-US" sz="2200" b="0" u="none" strike="noStrike">
                 <a:solidFill>
                   <a:srgbClr val="7C8A80"/>
                 </a:solidFill>
@@ -21920,7 +21810,7 @@
               </a:rPr>
               <a:t>  # base case</a:t>
             </a:r>
-            <a:endParaRPr lang="en-US" sz="1250" b="0" u="none" strike="noStrike">
+            <a:endParaRPr lang="en-US" sz="2200" b="0" u="none" strike="noStrike">
               <a:solidFill>
                 <a:srgbClr val="000000"/>
               </a:solidFill>
@@ -21939,7 +21829,7 @@
               </a:tabLst>
             </a:pPr>
             <a:r>
-              <a:rPr lang="en-US" sz="1250" b="0" u="none" strike="noStrike">
+              <a:rPr lang="en-US" sz="2200" b="0" u="none" strike="noStrike">
                 <a:solidFill>
                   <a:srgbClr val="C9D3CC"/>
                 </a:solidFill>
@@ -21950,7 +21840,7 @@
               </a:rPr>
               <a:t>        return n</a:t>
             </a:r>
-            <a:endParaRPr lang="en-US" sz="1250" b="0" u="none" strike="noStrike">
+            <a:endParaRPr lang="en-US" sz="2200" b="0" u="none" strike="noStrike">
               <a:solidFill>
                 <a:srgbClr val="000000"/>
               </a:solidFill>
@@ -21969,7 +21859,7 @@
               </a:tabLst>
             </a:pPr>
             <a:r>
-              <a:rPr lang="en-US" sz="1250" b="0" u="none" strike="noStrike">
+              <a:rPr lang="en-US" sz="2200" b="0" u="none" strike="noStrike">
                 <a:solidFill>
                   <a:srgbClr val="C9D3CC"/>
                 </a:solidFill>
@@ -21981,7 +21871,7 @@
               <a:t>    return fib(n-1) + fib(n-2) </a:t>
             </a:r>
             <a:r>
-              <a:rPr lang="en-US" sz="1250" b="0" u="none" strike="noStrike">
+              <a:rPr lang="en-US" sz="2200" b="0" u="none" strike="noStrike">
                 <a:solidFill>
                   <a:srgbClr val="7C8A80"/>
                 </a:solidFill>
@@ -21992,7 +21882,7 @@
               </a:rPr>
               <a:t>  # recursive case</a:t>
             </a:r>
-            <a:endParaRPr lang="en-US" sz="1250" b="0" u="none" strike="noStrike">
+            <a:endParaRPr lang="en-US" sz="2200" b="0" u="none" strike="noStrike">
               <a:solidFill>
                 <a:srgbClr val="000000"/>
               </a:solidFill>
@@ -22011,7 +21901,7 @@
               </a:tabLst>
             </a:pPr>
             <a:r>
-              <a:rPr lang="en-US" sz="1250" b="0" u="none" strike="noStrike">
+              <a:rPr lang="en-US" sz="2200" b="0" u="none" strike="noStrike">
                 <a:solidFill>
                   <a:srgbClr val="C9D3CC"/>
                 </a:solidFill>
@@ -22022,7 +21912,7 @@
               </a:rPr>
               <a:t> </a:t>
             </a:r>
-            <a:endParaRPr lang="en-US" sz="1250" b="0" u="none" strike="noStrike">
+            <a:endParaRPr lang="en-US" sz="2200" b="0" u="none" strike="noStrike">
               <a:solidFill>
                 <a:srgbClr val="000000"/>
               </a:solidFill>
@@ -22041,7 +21931,7 @@
               </a:tabLst>
             </a:pPr>
             <a:r>
-              <a:rPr lang="en-US" sz="1250" b="0" u="none" strike="noStrike">
+              <a:rPr lang="en-US" sz="2200" b="0" u="none" strike="noStrike">
                 <a:solidFill>
                   <a:srgbClr val="C9D3CC"/>
                 </a:solidFill>
@@ -22053,7 +21943,7 @@
               <a:t>fib(6) </a:t>
             </a:r>
             <a:r>
-              <a:rPr lang="en-US" sz="1250" b="0" u="none" strike="noStrike">
+              <a:rPr lang="en-US" sz="2200" b="0" u="none" strike="noStrike">
                 <a:solidFill>
                   <a:srgbClr val="7C8A80"/>
                 </a:solidFill>
@@ -22064,7 +21954,7 @@
               </a:rPr>
               <a:t>  # 8</a:t>
             </a:r>
-            <a:endParaRPr lang="en-US" sz="1250" b="0" u="none" strike="noStrike">
+            <a:endParaRPr lang="en-US" sz="2200" b="0" u="none" strike="noStrike">
               <a:solidFill>
                 <a:srgbClr val="000000"/>
               </a:solidFill>
@@ -22083,7 +21973,7 @@
               </a:tabLst>
             </a:pPr>
             <a:r>
-              <a:rPr lang="en-US" sz="1250" b="0" u="none" strike="noStrike">
+              <a:rPr lang="en-US" sz="2200" b="0" u="none" strike="noStrike">
                 <a:solidFill>
                   <a:srgbClr val="C9D3CC"/>
                 </a:solidFill>
@@ -22094,7 +21984,7 @@
               </a:rPr>
               <a:t>[fib(n) for n in range(7)]</a:t>
             </a:r>
-            <a:endParaRPr lang="en-US" sz="1250" b="0" u="none" strike="noStrike">
+            <a:endParaRPr lang="en-US" sz="2200" b="0" u="none" strike="noStrike">
               <a:solidFill>
                 <a:srgbClr val="000000"/>
               </a:solidFill>
@@ -22113,7 +22003,7 @@
               </a:tabLst>
             </a:pPr>
             <a:r>
-              <a:rPr lang="en-US" sz="1250" b="0" u="none" strike="noStrike">
+              <a:rPr lang="en-US" sz="2200" b="0" u="none" strike="noStrike">
                 <a:solidFill>
                   <a:srgbClr val="7C8A80"/>
                 </a:solidFill>
@@ -22124,7 +22014,7 @@
               </a:rPr>
               <a:t># [0, 1, 1, 2, 3, 5, 8]</a:t>
             </a:r>
-            <a:endParaRPr lang="en-US" sz="1250" b="0" u="none" strike="noStrike">
+            <a:endParaRPr lang="en-US" sz="2200" b="0" u="none" strike="noStrike">
               <a:solidFill>
                 <a:srgbClr val="000000"/>
               </a:solidFill>
@@ -22144,7 +22034,7 @@
         <p:spPr>
           <a:xfrm>
             <a:off x="457200" y="6446520"/>
-            <a:ext cx="7313760" cy="272880"/>
+            <a:ext cx="7313400" cy="272520"/>
           </a:xfrm>
           <a:prstGeom prst="rect">
             <a:avLst/>
@@ -22205,7 +22095,7 @@
         <p:spPr>
           <a:xfrm>
             <a:off x="11521440" y="6446520"/>
-            <a:ext cx="455760" cy="272880"/>
+            <a:ext cx="455400" cy="272520"/>
           </a:xfrm>
           <a:prstGeom prst="rect">
             <a:avLst/>
@@ -22303,7 +22193,7 @@
         <p:spPr>
           <a:xfrm>
             <a:off x="10515600" y="5669280"/>
-            <a:ext cx="3198960" cy="3198960"/>
+            <a:ext cx="3198600" cy="3198600"/>
           </a:xfrm>
           <a:prstGeom prst="roundRect">
             <a:avLst>
@@ -22348,7 +22238,7 @@
         <p:spPr>
           <a:xfrm>
             <a:off x="457200" y="457200"/>
-            <a:ext cx="638640" cy="638640"/>
+            <a:ext cx="638280" cy="638280"/>
           </a:xfrm>
           <a:prstGeom prst="ellipse">
             <a:avLst/>
@@ -22395,7 +22285,7 @@
         <p:spPr>
           <a:xfrm>
             <a:off x="548640" y="548640"/>
-            <a:ext cx="446760" cy="446760"/>
+            <a:ext cx="446400" cy="446400"/>
           </a:xfrm>
           <a:prstGeom prst="rect">
             <a:avLst/>
@@ -22415,7 +22305,7 @@
         <p:spPr>
           <a:xfrm>
             <a:off x="1280160" y="457200"/>
-            <a:ext cx="10422720" cy="638640"/>
+            <a:ext cx="10422360" cy="638280"/>
           </a:xfrm>
           <a:prstGeom prst="rect">
             <a:avLst/>
@@ -22476,7 +22366,7 @@
         <p:spPr>
           <a:xfrm>
             <a:off x="457200" y="1554480"/>
-            <a:ext cx="3656160" cy="4662000"/>
+            <a:ext cx="3655800" cy="4661640"/>
           </a:xfrm>
           <a:prstGeom prst="roundRect">
             <a:avLst>
@@ -22521,7 +22411,7 @@
         <p:spPr>
           <a:xfrm>
             <a:off x="1508760" y="2194560"/>
-            <a:ext cx="1553040" cy="1553040"/>
+            <a:ext cx="1552680" cy="1552680"/>
           </a:xfrm>
           <a:prstGeom prst="ellipse">
             <a:avLst/>
@@ -22568,7 +22458,7 @@
         <p:spPr>
           <a:xfrm>
             <a:off x="1746360" y="2423160"/>
-            <a:ext cx="1086840" cy="1086840"/>
+            <a:ext cx="1086480" cy="1086480"/>
           </a:xfrm>
           <a:prstGeom prst="rect">
             <a:avLst/>
@@ -22588,7 +22478,7 @@
         <p:spPr>
           <a:xfrm>
             <a:off x="640080" y="3977640"/>
-            <a:ext cx="3290400" cy="1735920"/>
+            <a:ext cx="3290040" cy="1735560"/>
           </a:xfrm>
           <a:prstGeom prst="rect">
             <a:avLst/>
@@ -22709,7 +22599,7 @@
         <p:spPr>
           <a:xfrm>
             <a:off x="4572000" y="1737360"/>
-            <a:ext cx="7130880" cy="4113360"/>
+            <a:ext cx="7130520" cy="4113000"/>
           </a:xfrm>
           <a:prstGeom prst="rect">
             <a:avLst/>
@@ -22744,7 +22634,7 @@
               <a:buChar char=""/>
             </a:pPr>
             <a:r>
-              <a:rPr lang="en-US" sz="1600" b="0" u="none" strike="noStrike">
+              <a:rPr lang="en-US" sz="2400" b="0" u="none" strike="noStrike">
                 <a:solidFill>
                   <a:srgbClr val="1B2420"/>
                 </a:solidFill>
@@ -22755,7 +22645,7 @@
               </a:rPr>
               <a:t>If a function never reaches its base case, it keeps calling itself — forever, in theory</a:t>
             </a:r>
-            <a:endParaRPr lang="en-US" sz="1600" b="0" u="none" strike="noStrike">
+            <a:endParaRPr lang="en-US" sz="2400" b="0" u="none" strike="noStrike">
               <a:solidFill>
                 <a:srgbClr val="000000"/>
               </a:solidFill>
@@ -22779,7 +22669,7 @@
               <a:buChar char=""/>
             </a:pPr>
             <a:r>
-              <a:rPr lang="en-US" sz="1600" b="0" u="none" strike="noStrike">
+              <a:rPr lang="en-US" sz="2400" b="0" u="none" strike="noStrike">
                 <a:solidFill>
                   <a:srgbClr val="1B2420"/>
                 </a:solidFill>
@@ -22790,7 +22680,7 @@
               </a:rPr>
               <a:t>In practice, Python raises a RecursionError once the call stack hits its limit (by default, around 1000 calls deep)</a:t>
             </a:r>
-            <a:endParaRPr lang="en-US" sz="1600" b="0" u="none" strike="noStrike">
+            <a:endParaRPr lang="en-US" sz="2400" b="0" u="none" strike="noStrike">
               <a:solidFill>
                 <a:srgbClr val="000000"/>
               </a:solidFill>
@@ -22814,7 +22704,7 @@
               <a:buChar char=""/>
             </a:pPr>
             <a:r>
-              <a:rPr lang="en-US" sz="1600" b="0" u="none" strike="noStrike">
+              <a:rPr lang="en-US" sz="2400" b="0" u="none" strike="noStrike">
                 <a:solidFill>
                   <a:srgbClr val="1B2420"/>
                 </a:solidFill>
@@ -22825,7 +22715,7 @@
               </a:rPr>
               <a:t>This is the recursive cousin of an infinite while loop — same root cause: the stopping condition is never satisfied</a:t>
             </a:r>
-            <a:endParaRPr lang="en-US" sz="1600" b="0" u="none" strike="noStrike">
+            <a:endParaRPr lang="en-US" sz="2400" b="0" u="none" strike="noStrike">
               <a:solidFill>
                 <a:srgbClr val="000000"/>
               </a:solidFill>
@@ -22849,7 +22739,7 @@
               <a:buChar char=""/>
             </a:pPr>
             <a:r>
-              <a:rPr lang="en-US" sz="1600" b="0" u="none" strike="noStrike">
+              <a:rPr lang="en-US" sz="2400" b="0" u="none" strike="noStrike">
                 <a:solidFill>
                   <a:srgbClr val="1B2420"/>
                 </a:solidFill>
@@ -22860,7 +22750,7 @@
               </a:rPr>
               <a:t>The fix is always the same: check that every recursive call is moving strictly closer to the base case</a:t>
             </a:r>
-            <a:endParaRPr lang="en-US" sz="1600" b="0" u="none" strike="noStrike">
+            <a:endParaRPr lang="en-US" sz="2400" b="0" u="none" strike="noStrike">
               <a:solidFill>
                 <a:srgbClr val="000000"/>
               </a:solidFill>
@@ -22880,7 +22770,7 @@
         <p:spPr>
           <a:xfrm>
             <a:off x="457200" y="6446520"/>
-            <a:ext cx="7313760" cy="272880"/>
+            <a:ext cx="7313400" cy="272520"/>
           </a:xfrm>
           <a:prstGeom prst="rect">
             <a:avLst/>
@@ -22941,7 +22831,7 @@
         <p:spPr>
           <a:xfrm>
             <a:off x="11521440" y="6446520"/>
-            <a:ext cx="455760" cy="272880"/>
+            <a:ext cx="455400" cy="272520"/>
           </a:xfrm>
           <a:prstGeom prst="rect">
             <a:avLst/>
@@ -23039,7 +22929,7 @@
         <p:spPr>
           <a:xfrm>
             <a:off x="457200" y="457200"/>
-            <a:ext cx="638640" cy="638640"/>
+            <a:ext cx="638280" cy="638280"/>
           </a:xfrm>
           <a:prstGeom prst="ellipse">
             <a:avLst/>
@@ -23086,7 +22976,7 @@
         <p:spPr>
           <a:xfrm>
             <a:off x="548640" y="548640"/>
-            <a:ext cx="446760" cy="446760"/>
+            <a:ext cx="446400" cy="446400"/>
           </a:xfrm>
           <a:prstGeom prst="rect">
             <a:avLst/>
@@ -23106,7 +22996,7 @@
         <p:spPr>
           <a:xfrm>
             <a:off x="1280160" y="457200"/>
-            <a:ext cx="10422720" cy="638640"/>
+            <a:ext cx="10422360" cy="638280"/>
           </a:xfrm>
           <a:prstGeom prst="rect">
             <a:avLst/>
@@ -23167,7 +23057,7 @@
         <p:spPr>
           <a:xfrm>
             <a:off x="457200" y="1645920"/>
-            <a:ext cx="5347800" cy="4479120"/>
+            <a:ext cx="5347440" cy="4478760"/>
           </a:xfrm>
           <a:prstGeom prst="roundRect">
             <a:avLst>
@@ -23212,7 +23102,7 @@
         <p:spPr>
           <a:xfrm>
             <a:off x="731520" y="1874520"/>
-            <a:ext cx="455760" cy="455760"/>
+            <a:ext cx="455400" cy="455400"/>
           </a:xfrm>
           <a:prstGeom prst="ellipse">
             <a:avLst/>
@@ -23259,7 +23149,7 @@
         <p:spPr>
           <a:xfrm>
             <a:off x="804600" y="1938600"/>
-            <a:ext cx="318600" cy="318600"/>
+            <a:ext cx="318240" cy="318240"/>
           </a:xfrm>
           <a:prstGeom prst="rect">
             <a:avLst/>
@@ -23279,7 +23169,7 @@
         <p:spPr>
           <a:xfrm>
             <a:off x="1325880" y="1874520"/>
-            <a:ext cx="4341960" cy="455760"/>
+            <a:ext cx="4341600" cy="455400"/>
           </a:xfrm>
           <a:prstGeom prst="rect">
             <a:avLst/>
@@ -23340,7 +23230,7 @@
         <p:spPr>
           <a:xfrm>
             <a:off x="731520" y="2514600"/>
-            <a:ext cx="4799160" cy="3381840"/>
+            <a:ext cx="4798800" cy="3381480"/>
           </a:xfrm>
           <a:prstGeom prst="rect">
             <a:avLst/>
@@ -23375,7 +23265,7 @@
               <a:buChar char=""/>
             </a:pPr>
             <a:r>
-              <a:rPr lang="en-US" sz="1350" b="0" u="none" strike="noStrike">
+              <a:rPr lang="en-US" sz="2200" b="0" u="none" strike="noStrike">
                 <a:solidFill>
                   <a:srgbClr val="1B2420"/>
                 </a:solidFill>
@@ -23386,7 +23276,7 @@
               </a:rPr>
               <a:t>The repetition is simple and flat — no natural nesting</a:t>
             </a:r>
-            <a:endParaRPr lang="en-US" sz="1350" b="0" u="none" strike="noStrike">
+            <a:endParaRPr lang="en-US" sz="2200" b="0" u="none" strike="noStrike">
               <a:solidFill>
                 <a:srgbClr val="000000"/>
               </a:solidFill>
@@ -23410,7 +23300,7 @@
               <a:buChar char=""/>
             </a:pPr>
             <a:r>
-              <a:rPr lang="en-US" sz="1350" b="0" u="none" strike="noStrike">
+              <a:rPr lang="en-US" sz="2200" b="0" u="none" strike="noStrike">
                 <a:solidFill>
                   <a:srgbClr val="1B2420"/>
                 </a:solidFill>
@@ -23421,7 +23311,7 @@
               </a:rPr>
               <a:t>Performance matters — loops avoid the overhead of repeated function calls</a:t>
             </a:r>
-            <a:endParaRPr lang="en-US" sz="1350" b="0" u="none" strike="noStrike">
+            <a:endParaRPr lang="en-US" sz="2200" b="0" u="none" strike="noStrike">
               <a:solidFill>
                 <a:srgbClr val="000000"/>
               </a:solidFill>
@@ -23445,7 +23335,7 @@
               <a:buChar char=""/>
             </a:pPr>
             <a:r>
-              <a:rPr lang="en-US" sz="1350" b="0" u="none" strike="noStrike">
+              <a:rPr lang="en-US" sz="2200" b="0" u="none" strike="noStrike">
                 <a:solidFill>
                   <a:srgbClr val="1B2420"/>
                 </a:solidFill>
@@ -23456,7 +23346,7 @@
               </a:rPr>
               <a:t>The data is a straightforward sequence you’re stepping through once</a:t>
             </a:r>
-            <a:endParaRPr lang="en-US" sz="1350" b="0" u="none" strike="noStrike">
+            <a:endParaRPr lang="en-US" sz="2200" b="0" u="none" strike="noStrike">
               <a:solidFill>
                 <a:srgbClr val="000000"/>
               </a:solidFill>
@@ -23476,7 +23366,7 @@
         <p:spPr>
           <a:xfrm>
             <a:off x="6172200" y="1645920"/>
-            <a:ext cx="5347800" cy="4479120"/>
+            <a:ext cx="5347440" cy="4478760"/>
           </a:xfrm>
           <a:prstGeom prst="roundRect">
             <a:avLst>
@@ -23521,7 +23411,7 @@
         <p:spPr>
           <a:xfrm>
             <a:off x="6446520" y="1874520"/>
-            <a:ext cx="455760" cy="455760"/>
+            <a:ext cx="455400" cy="455400"/>
           </a:xfrm>
           <a:prstGeom prst="ellipse">
             <a:avLst/>
@@ -23568,7 +23458,7 @@
         <p:spPr>
           <a:xfrm>
             <a:off x="6519600" y="1938600"/>
-            <a:ext cx="318600" cy="318600"/>
+            <a:ext cx="318240" cy="318240"/>
           </a:xfrm>
           <a:prstGeom prst="rect">
             <a:avLst/>
@@ -23588,7 +23478,7 @@
         <p:spPr>
           <a:xfrm>
             <a:off x="7040880" y="1874520"/>
-            <a:ext cx="4341960" cy="455760"/>
+            <a:ext cx="4341600" cy="455400"/>
           </a:xfrm>
           <a:prstGeom prst="rect">
             <a:avLst/>
@@ -23649,7 +23539,7 @@
         <p:spPr>
           <a:xfrm>
             <a:off x="6446520" y="2514600"/>
-            <a:ext cx="4799160" cy="3381840"/>
+            <a:ext cx="4798800" cy="3381480"/>
           </a:xfrm>
           <a:prstGeom prst="rect">
             <a:avLst/>
@@ -23684,7 +23574,7 @@
               <a:buChar char=""/>
             </a:pPr>
             <a:r>
-              <a:rPr lang="en-US" sz="1350" b="0" u="none" strike="noStrike">
+              <a:rPr lang="en-US" sz="2200" b="0" u="none" strike="noStrike">
                 <a:solidFill>
                   <a:srgbClr val="1B2420"/>
                 </a:solidFill>
@@ -23695,7 +23585,7 @@
               </a:rPr>
               <a:t>The problem is naturally nested — trees, folders, nested data of unknown depth</a:t>
             </a:r>
-            <a:endParaRPr lang="en-US" sz="1350" b="0" u="none" strike="noStrike">
+            <a:endParaRPr lang="en-US" sz="2200" b="0" u="none" strike="noStrike">
               <a:solidFill>
                 <a:srgbClr val="000000"/>
               </a:solidFill>
@@ -23719,7 +23609,7 @@
               <a:buChar char=""/>
             </a:pPr>
             <a:r>
-              <a:rPr lang="en-US" sz="1350" b="0" u="none" strike="noStrike">
+              <a:rPr lang="en-US" sz="2200" b="0" u="none" strike="noStrike">
                 <a:solidFill>
                   <a:srgbClr val="1B2420"/>
                 </a:solidFill>
@@ -23730,7 +23620,7 @@
               </a:rPr>
               <a:t>Each step is a smaller version of the exact same problem</a:t>
             </a:r>
-            <a:endParaRPr lang="en-US" sz="1350" b="0" u="none" strike="noStrike">
+            <a:endParaRPr lang="en-US" sz="2200" b="0" u="none" strike="noStrike">
               <a:solidFill>
                 <a:srgbClr val="000000"/>
               </a:solidFill>
@@ -23754,7 +23644,7 @@
               <a:buChar char=""/>
             </a:pPr>
             <a:r>
-              <a:rPr lang="en-US" sz="1350" b="0" u="none" strike="noStrike">
+              <a:rPr lang="en-US" sz="2200" b="0" u="none" strike="noStrike">
                 <a:solidFill>
                   <a:srgbClr val="1B2420"/>
                 </a:solidFill>
@@ -23765,7 +23655,7 @@
               </a:rPr>
               <a:t>The recursive version is dramatically easier to read than the loop-based equivalent</a:t>
             </a:r>
-            <a:endParaRPr lang="en-US" sz="1350" b="0" u="none" strike="noStrike">
+            <a:endParaRPr lang="en-US" sz="2200" b="0" u="none" strike="noStrike">
               <a:solidFill>
                 <a:srgbClr val="000000"/>
               </a:solidFill>
@@ -23785,7 +23675,7 @@
         <p:spPr>
           <a:xfrm>
             <a:off x="457200" y="6446520"/>
-            <a:ext cx="7313760" cy="272880"/>
+            <a:ext cx="7313400" cy="272520"/>
           </a:xfrm>
           <a:prstGeom prst="rect">
             <a:avLst/>
@@ -23846,7 +23736,7 @@
         <p:spPr>
           <a:xfrm>
             <a:off x="11521440" y="6446520"/>
-            <a:ext cx="455760" cy="272880"/>
+            <a:ext cx="455400" cy="272520"/>
           </a:xfrm>
           <a:prstGeom prst="rect">
             <a:avLst/>
@@ -23944,7 +23834,7 @@
         <p:spPr>
           <a:xfrm>
             <a:off x="457200" y="457200"/>
-            <a:ext cx="638640" cy="638640"/>
+            <a:ext cx="638280" cy="638280"/>
           </a:xfrm>
           <a:prstGeom prst="ellipse">
             <a:avLst/>
@@ -23991,7 +23881,7 @@
         <p:spPr>
           <a:xfrm>
             <a:off x="548640" y="548640"/>
-            <a:ext cx="446760" cy="446760"/>
+            <a:ext cx="446400" cy="446400"/>
           </a:xfrm>
           <a:prstGeom prst="rect">
             <a:avLst/>
@@ -24011,7 +23901,7 @@
         <p:spPr>
           <a:xfrm>
             <a:off x="1280160" y="457200"/>
-            <a:ext cx="10422720" cy="638640"/>
+            <a:ext cx="10422360" cy="638280"/>
           </a:xfrm>
           <a:prstGeom prst="rect">
             <a:avLst/>
@@ -24072,7 +23962,7 @@
         <p:spPr>
           <a:xfrm>
             <a:off x="548640" y="1828800"/>
-            <a:ext cx="4753440" cy="4021920"/>
+            <a:ext cx="4753080" cy="4021560"/>
           </a:xfrm>
           <a:prstGeom prst="rect">
             <a:avLst/>
@@ -24107,7 +23997,7 @@
               <a:buChar char=""/>
             </a:pPr>
             <a:r>
-              <a:rPr lang="en-US" sz="1350" b="0" u="none" strike="noStrike">
+              <a:rPr lang="en-US" sz="2200" b="0" u="none" strike="noStrike">
                 <a:solidFill>
                   <a:srgbClr val="1B2420"/>
                 </a:solidFill>
@@ -24118,7 +24008,7 @@
               </a:rPr>
               <a:t>A dictionary can contain another dictionary, which can contain another — to any depth, unknown in advance</a:t>
             </a:r>
-            <a:endParaRPr lang="en-US" sz="1350" b="0" u="none" strike="noStrike">
+            <a:endParaRPr lang="en-US" sz="2200" b="0" u="none" strike="noStrike">
               <a:solidFill>
                 <a:srgbClr val="000000"/>
               </a:solidFill>
@@ -24142,7 +24032,7 @@
               <a:buChar char=""/>
             </a:pPr>
             <a:r>
-              <a:rPr lang="en-US" sz="1350" b="0" u="none" strike="noStrike">
+              <a:rPr lang="en-US" sz="2200" b="0" u="none" strike="noStrike">
                 <a:solidFill>
                   <a:srgbClr val="1B2420"/>
                 </a:solidFill>
@@ -24153,7 +24043,7 @@
               </a:rPr>
               <a:t>A loop can’t handle "unknown depth" cleanly, but recursion handles it naturally: dig in, and if you find another dictionary, recurse</a:t>
             </a:r>
-            <a:endParaRPr lang="en-US" sz="1350" b="0" u="none" strike="noStrike">
+            <a:endParaRPr lang="en-US" sz="2200" b="0" u="none" strike="noStrike">
               <a:solidFill>
                 <a:srgbClr val="000000"/>
               </a:solidFill>
@@ -24177,7 +24067,7 @@
               <a:buChar char=""/>
             </a:pPr>
             <a:r>
-              <a:rPr lang="en-US" sz="1350" b="0" u="none" strike="noStrike">
+              <a:rPr lang="en-US" sz="2200" b="0" u="none" strike="noStrike">
                 <a:solidFill>
                   <a:srgbClr val="1B2420"/>
                 </a:solidFill>
@@ -24188,7 +24078,7 @@
               </a:rPr>
               <a:t>The exact same pattern is used to walk folder structures, JSON responses, and org charts</a:t>
             </a:r>
-            <a:endParaRPr lang="en-US" sz="1350" b="0" u="none" strike="noStrike">
+            <a:endParaRPr lang="en-US" sz="2200" b="0" u="none" strike="noStrike">
               <a:solidFill>
                 <a:srgbClr val="000000"/>
               </a:solidFill>
@@ -24208,7 +24098,7 @@
         <p:spPr>
           <a:xfrm>
             <a:off x="5486400" y="1691640"/>
-            <a:ext cx="6216480" cy="4341960"/>
+            <a:ext cx="6216120" cy="4341600"/>
           </a:xfrm>
           <a:prstGeom prst="roundRect">
             <a:avLst>
@@ -24253,7 +24143,7 @@
         <p:spPr>
           <a:xfrm>
             <a:off x="5806440" y="1965960"/>
-            <a:ext cx="5576400" cy="3793320"/>
+            <a:ext cx="5576040" cy="3792960"/>
           </a:xfrm>
           <a:prstGeom prst="rect">
             <a:avLst/>
@@ -24283,7 +24173,7 @@
               </a:tabLst>
             </a:pPr>
             <a:r>
-              <a:rPr lang="en-US" sz="1250" b="0" u="none" strike="noStrike">
+              <a:rPr lang="en-US" sz="1800" b="0" u="none" strike="noStrike">
                 <a:solidFill>
                   <a:srgbClr val="C9D3CC"/>
                 </a:solidFill>
@@ -24294,7 +24184,7 @@
               </a:rPr>
               <a:t>def sum_nested(data):</a:t>
             </a:r>
-            <a:endParaRPr lang="en-US" sz="1250" b="0" u="none" strike="noStrike">
+            <a:endParaRPr lang="en-US" sz="1800" b="0" u="none" strike="noStrike">
               <a:solidFill>
                 <a:srgbClr val="000000"/>
               </a:solidFill>
@@ -24313,7 +24203,7 @@
               </a:tabLst>
             </a:pPr>
             <a:r>
-              <a:rPr lang="en-US" sz="1250" b="0" u="none" strike="noStrike">
+              <a:rPr lang="en-US" sz="1800" b="0" u="none" strike="noStrike">
                 <a:solidFill>
                   <a:srgbClr val="C9D3CC"/>
                 </a:solidFill>
@@ -24324,7 +24214,7 @@
               </a:rPr>
               <a:t>    total = 0</a:t>
             </a:r>
-            <a:endParaRPr lang="en-US" sz="1250" b="0" u="none" strike="noStrike">
+            <a:endParaRPr lang="en-US" sz="1800" b="0" u="none" strike="noStrike">
               <a:solidFill>
                 <a:srgbClr val="000000"/>
               </a:solidFill>
@@ -24343,7 +24233,7 @@
               </a:tabLst>
             </a:pPr>
             <a:r>
-              <a:rPr lang="en-US" sz="1250" b="0" u="none" strike="noStrike">
+              <a:rPr lang="en-US" sz="1800" b="0" u="none" strike="noStrike">
                 <a:solidFill>
                   <a:srgbClr val="C9D3CC"/>
                 </a:solidFill>
@@ -24354,7 +24244,7 @@
               </a:rPr>
               <a:t>    for value in data.values():</a:t>
             </a:r>
-            <a:endParaRPr lang="en-US" sz="1250" b="0" u="none" strike="noStrike">
+            <a:endParaRPr lang="en-US" sz="1800" b="0" u="none" strike="noStrike">
               <a:solidFill>
                 <a:srgbClr val="000000"/>
               </a:solidFill>
@@ -24373,7 +24263,7 @@
               </a:tabLst>
             </a:pPr>
             <a:r>
-              <a:rPr lang="en-US" sz="1250" b="0" u="none" strike="noStrike">
+              <a:rPr lang="en-US" sz="1800" b="0" u="none" strike="noStrike">
                 <a:solidFill>
                   <a:srgbClr val="C9D3CC"/>
                 </a:solidFill>
@@ -24384,7 +24274,7 @@
               </a:rPr>
               <a:t>        if isinstance(value, dict):</a:t>
             </a:r>
-            <a:endParaRPr lang="en-US" sz="1250" b="0" u="none" strike="noStrike">
+            <a:endParaRPr lang="en-US" sz="1800" b="0" u="none" strike="noStrike">
               <a:solidFill>
                 <a:srgbClr val="000000"/>
               </a:solidFill>
@@ -24403,7 +24293,7 @@
               </a:tabLst>
             </a:pPr>
             <a:r>
-              <a:rPr lang="en-US" sz="1250" b="0" u="none" strike="noStrike">
+              <a:rPr lang="en-US" sz="1800" b="0" u="none" strike="noStrike">
                 <a:solidFill>
                   <a:srgbClr val="C9D3CC"/>
                 </a:solidFill>
@@ -24415,7 +24305,7 @@
               <a:t>            total += sum_nested(value) </a:t>
             </a:r>
             <a:r>
-              <a:rPr lang="en-US" sz="1250" b="0" u="none" strike="noStrike">
+              <a:rPr lang="en-US" sz="1800" b="0" u="none" strike="noStrike">
                 <a:solidFill>
                   <a:srgbClr val="7C8A80"/>
                 </a:solidFill>
@@ -24426,7 +24316,7 @@
               </a:rPr>
               <a:t>  # recurse</a:t>
             </a:r>
-            <a:endParaRPr lang="en-US" sz="1250" b="0" u="none" strike="noStrike">
+            <a:endParaRPr lang="en-US" sz="1800" b="0" u="none" strike="noStrike">
               <a:solidFill>
                 <a:srgbClr val="000000"/>
               </a:solidFill>
@@ -24445,7 +24335,7 @@
               </a:tabLst>
             </a:pPr>
             <a:r>
-              <a:rPr lang="en-US" sz="1250" b="0" u="none" strike="noStrike">
+              <a:rPr lang="en-US" sz="1800" b="0" u="none" strike="noStrike">
                 <a:solidFill>
                   <a:srgbClr val="C9D3CC"/>
                 </a:solidFill>
@@ -24456,7 +24346,7 @@
               </a:rPr>
               <a:t>        else:</a:t>
             </a:r>
-            <a:endParaRPr lang="en-US" sz="1250" b="0" u="none" strike="noStrike">
+            <a:endParaRPr lang="en-US" sz="1800" b="0" u="none" strike="noStrike">
               <a:solidFill>
                 <a:srgbClr val="000000"/>
               </a:solidFill>
@@ -24475,7 +24365,7 @@
               </a:tabLst>
             </a:pPr>
             <a:r>
-              <a:rPr lang="en-US" sz="1250" b="0" u="none" strike="noStrike">
+              <a:rPr lang="en-US" sz="1800" b="0" u="none" strike="noStrike">
                 <a:solidFill>
                   <a:srgbClr val="C9D3CC"/>
                 </a:solidFill>
@@ -24486,7 +24376,7 @@
               </a:rPr>
               <a:t>            total += value</a:t>
             </a:r>
-            <a:endParaRPr lang="en-US" sz="1250" b="0" u="none" strike="noStrike">
+            <a:endParaRPr lang="en-US" sz="1800" b="0" u="none" strike="noStrike">
               <a:solidFill>
                 <a:srgbClr val="000000"/>
               </a:solidFill>
@@ -24505,7 +24395,7 @@
               </a:tabLst>
             </a:pPr>
             <a:r>
-              <a:rPr lang="en-US" sz="1250" b="0" u="none" strike="noStrike">
+              <a:rPr lang="en-US" sz="1800" b="0" u="none" strike="noStrike">
                 <a:solidFill>
                   <a:srgbClr val="C9D3CC"/>
                 </a:solidFill>
@@ -24516,7 +24406,7 @@
               </a:rPr>
               <a:t>    return total</a:t>
             </a:r>
-            <a:endParaRPr lang="en-US" sz="1250" b="0" u="none" strike="noStrike">
+            <a:endParaRPr lang="en-US" sz="1800" b="0" u="none" strike="noStrike">
               <a:solidFill>
                 <a:srgbClr val="000000"/>
               </a:solidFill>
@@ -24535,7 +24425,7 @@
               </a:tabLst>
             </a:pPr>
             <a:r>
-              <a:rPr lang="en-US" sz="1250" b="0" u="none" strike="noStrike">
+              <a:rPr lang="en-US" sz="1800" b="0" u="none" strike="noStrike">
                 <a:solidFill>
                   <a:srgbClr val="C9D3CC"/>
                 </a:solidFill>
@@ -24546,7 +24436,7 @@
               </a:rPr>
               <a:t> </a:t>
             </a:r>
-            <a:endParaRPr lang="en-US" sz="1250" b="0" u="none" strike="noStrike">
+            <a:endParaRPr lang="en-US" sz="1800" b="0" u="none" strike="noStrike">
               <a:solidFill>
                 <a:srgbClr val="000000"/>
               </a:solidFill>
@@ -24565,7 +24455,7 @@
               </a:tabLst>
             </a:pPr>
             <a:r>
-              <a:rPr lang="en-US" sz="1250" b="0" u="none" strike="noStrike">
+              <a:rPr lang="en-US" sz="1800" b="0" u="none" strike="noStrike">
                 <a:solidFill>
                   <a:srgbClr val="C9D3CC"/>
                 </a:solidFill>
@@ -24576,7 +24466,7 @@
               </a:rPr>
               <a:t>sum_nested({"a": 1, "b": {"c": 2, "d": {"e": 3}}})</a:t>
             </a:r>
-            <a:endParaRPr lang="en-US" sz="1250" b="0" u="none" strike="noStrike">
+            <a:endParaRPr lang="en-US" sz="1800" b="0" u="none" strike="noStrike">
               <a:solidFill>
                 <a:srgbClr val="000000"/>
               </a:solidFill>
@@ -24595,7 +24485,7 @@
               </a:tabLst>
             </a:pPr>
             <a:r>
-              <a:rPr lang="en-US" sz="1250" b="0" u="none" strike="noStrike">
+              <a:rPr lang="en-US" sz="1800" b="0" u="none" strike="noStrike">
                 <a:solidFill>
                   <a:srgbClr val="7C8A80"/>
                 </a:solidFill>
@@ -24606,7 +24496,7 @@
               </a:rPr>
               <a:t># 6</a:t>
             </a:r>
-            <a:endParaRPr lang="en-US" sz="1250" b="0" u="none" strike="noStrike">
+            <a:endParaRPr lang="en-US" sz="1800" b="0" u="none" strike="noStrike">
               <a:solidFill>
                 <a:srgbClr val="000000"/>
               </a:solidFill>
@@ -24626,7 +24516,7 @@
         <p:spPr>
           <a:xfrm>
             <a:off x="457200" y="6446520"/>
-            <a:ext cx="7313760" cy="272880"/>
+            <a:ext cx="7313400" cy="272520"/>
           </a:xfrm>
           <a:prstGeom prst="rect">
             <a:avLst/>
@@ -24687,7 +24577,7 @@
         <p:spPr>
           <a:xfrm>
             <a:off x="11521440" y="6446520"/>
-            <a:ext cx="455760" cy="272880"/>
+            <a:ext cx="455400" cy="272520"/>
           </a:xfrm>
           <a:prstGeom prst="rect">
             <a:avLst/>
@@ -24785,7 +24675,7 @@
         <p:spPr>
           <a:xfrm>
             <a:off x="-1828800" y="5029200"/>
-            <a:ext cx="3656160" cy="3656160"/>
+            <a:ext cx="3655800" cy="3655800"/>
           </a:xfrm>
           <a:prstGeom prst="ellipse">
             <a:avLst/>
@@ -24828,7 +24718,7 @@
         <p:spPr>
           <a:xfrm>
             <a:off x="457200" y="457200"/>
-            <a:ext cx="638640" cy="638640"/>
+            <a:ext cx="638280" cy="638280"/>
           </a:xfrm>
           <a:prstGeom prst="ellipse">
             <a:avLst/>
@@ -24875,7 +24765,7 @@
         <p:spPr>
           <a:xfrm>
             <a:off x="548640" y="548640"/>
-            <a:ext cx="446760" cy="446760"/>
+            <a:ext cx="446400" cy="446400"/>
           </a:xfrm>
           <a:prstGeom prst="rect">
             <a:avLst/>
@@ -24895,7 +24785,7 @@
         <p:spPr>
           <a:xfrm>
             <a:off x="1280160" y="457200"/>
-            <a:ext cx="10422720" cy="638640"/>
+            <a:ext cx="10422360" cy="638280"/>
           </a:xfrm>
           <a:prstGeom prst="rect">
             <a:avLst/>
@@ -24956,7 +24846,7 @@
         <p:spPr>
           <a:xfrm>
             <a:off x="457200" y="1600200"/>
-            <a:ext cx="11273040" cy="4479120"/>
+            <a:ext cx="11272680" cy="4478760"/>
           </a:xfrm>
           <a:prstGeom prst="roundRect">
             <a:avLst>
@@ -25001,7 +24891,7 @@
         <p:spPr>
           <a:xfrm>
             <a:off x="822960" y="1828800"/>
-            <a:ext cx="10514160" cy="455760"/>
+            <a:ext cx="10513800" cy="455400"/>
           </a:xfrm>
           <a:prstGeom prst="rect">
             <a:avLst/>
@@ -25062,7 +24952,7 @@
         <p:spPr>
           <a:xfrm>
             <a:off x="822960" y="2423160"/>
-            <a:ext cx="382680" cy="382680"/>
+            <a:ext cx="382320" cy="382320"/>
           </a:xfrm>
           <a:prstGeom prst="ellipse">
             <a:avLst/>
@@ -25105,7 +24995,7 @@
         <p:spPr>
           <a:xfrm>
             <a:off x="822960" y="2423160"/>
-            <a:ext cx="382680" cy="382680"/>
+            <a:ext cx="382320" cy="382320"/>
           </a:xfrm>
           <a:prstGeom prst="rect">
             <a:avLst/>
@@ -25166,7 +25056,7 @@
         <p:spPr>
           <a:xfrm>
             <a:off x="1435680" y="2423160"/>
-            <a:ext cx="9581400" cy="382680"/>
+            <a:ext cx="9581040" cy="382320"/>
           </a:xfrm>
           <a:prstGeom prst="rect">
             <a:avLst/>
@@ -25227,7 +25117,7 @@
         <p:spPr>
           <a:xfrm>
             <a:off x="822960" y="3300840"/>
-            <a:ext cx="382680" cy="382680"/>
+            <a:ext cx="382320" cy="382320"/>
           </a:xfrm>
           <a:prstGeom prst="ellipse">
             <a:avLst/>
@@ -25270,7 +25160,7 @@
         <p:spPr>
           <a:xfrm>
             <a:off x="822960" y="3300840"/>
-            <a:ext cx="382680" cy="382680"/>
+            <a:ext cx="382320" cy="382320"/>
           </a:xfrm>
           <a:prstGeom prst="rect">
             <a:avLst/>
@@ -25331,7 +25221,7 @@
         <p:spPr>
           <a:xfrm>
             <a:off x="1435680" y="3300840"/>
-            <a:ext cx="9581400" cy="382680"/>
+            <a:ext cx="9581040" cy="382320"/>
           </a:xfrm>
           <a:prstGeom prst="rect">
             <a:avLst/>
@@ -25392,7 +25282,7 @@
         <p:spPr>
           <a:xfrm>
             <a:off x="822960" y="4178880"/>
-            <a:ext cx="382680" cy="382680"/>
+            <a:ext cx="382320" cy="382320"/>
           </a:xfrm>
           <a:prstGeom prst="ellipse">
             <a:avLst/>
@@ -25435,7 +25325,7 @@
         <p:spPr>
           <a:xfrm>
             <a:off x="822960" y="4178880"/>
-            <a:ext cx="382680" cy="382680"/>
+            <a:ext cx="382320" cy="382320"/>
           </a:xfrm>
           <a:prstGeom prst="rect">
             <a:avLst/>
@@ -25496,7 +25386,7 @@
         <p:spPr>
           <a:xfrm>
             <a:off x="1435680" y="4178880"/>
-            <a:ext cx="9581400" cy="382680"/>
+            <a:ext cx="9581040" cy="382320"/>
           </a:xfrm>
           <a:prstGeom prst="rect">
             <a:avLst/>
@@ -25557,7 +25447,7 @@
         <p:spPr>
           <a:xfrm>
             <a:off x="822960" y="5056560"/>
-            <a:ext cx="382680" cy="382680"/>
+            <a:ext cx="382320" cy="382320"/>
           </a:xfrm>
           <a:prstGeom prst="ellipse">
             <a:avLst/>
@@ -25600,7 +25490,7 @@
         <p:spPr>
           <a:xfrm>
             <a:off x="822960" y="5056560"/>
-            <a:ext cx="382680" cy="382680"/>
+            <a:ext cx="382320" cy="382320"/>
           </a:xfrm>
           <a:prstGeom prst="rect">
             <a:avLst/>
@@ -25661,7 +25551,7 @@
         <p:spPr>
           <a:xfrm>
             <a:off x="1435680" y="5056560"/>
-            <a:ext cx="9581400" cy="382680"/>
+            <a:ext cx="9581040" cy="382320"/>
           </a:xfrm>
           <a:prstGeom prst="rect">
             <a:avLst/>
@@ -25722,7 +25612,7 @@
         <p:spPr>
           <a:xfrm>
             <a:off x="457200" y="6446520"/>
-            <a:ext cx="7313760" cy="272880"/>
+            <a:ext cx="7313400" cy="272520"/>
           </a:xfrm>
           <a:prstGeom prst="rect">
             <a:avLst/>
@@ -25783,7 +25673,7 @@
         <p:spPr>
           <a:xfrm>
             <a:off x="11521440" y="6446520"/>
-            <a:ext cx="455760" cy="272880"/>
+            <a:ext cx="455400" cy="272520"/>
           </a:xfrm>
           <a:prstGeom prst="rect">
             <a:avLst/>
@@ -25881,7 +25771,7 @@
         <p:spPr>
           <a:xfrm>
             <a:off x="-1828800" y="4114800"/>
-            <a:ext cx="5484960" cy="5484960"/>
+            <a:ext cx="5484600" cy="5484600"/>
           </a:xfrm>
           <a:prstGeom prst="ellipse">
             <a:avLst/>
@@ -25924,7 +25814,7 @@
         <p:spPr>
           <a:xfrm>
             <a:off x="9601200" y="-2286000"/>
-            <a:ext cx="5484960" cy="5484960"/>
+            <a:ext cx="5484600" cy="5484600"/>
           </a:xfrm>
           <a:prstGeom prst="ellipse">
             <a:avLst/>
@@ -25967,7 +25857,7 @@
         <p:spPr>
           <a:xfrm>
             <a:off x="5596200" y="731520"/>
-            <a:ext cx="1004400" cy="1004400"/>
+            <a:ext cx="1004040" cy="1004040"/>
           </a:xfrm>
           <a:prstGeom prst="ellipse">
             <a:avLst/>
@@ -26014,7 +25904,7 @@
         <p:spPr>
           <a:xfrm>
             <a:off x="5742360" y="877680"/>
-            <a:ext cx="702720" cy="702720"/>
+            <a:ext cx="702360" cy="702360"/>
           </a:xfrm>
           <a:prstGeom prst="rect">
             <a:avLst/>
@@ -26034,7 +25924,7 @@
         <p:spPr>
           <a:xfrm>
             <a:off x="914400" y="1965960"/>
-            <a:ext cx="10358640" cy="364320"/>
+            <a:ext cx="10358280" cy="363960"/>
           </a:xfrm>
           <a:prstGeom prst="rect">
             <a:avLst/>
@@ -26095,7 +25985,7 @@
         <p:spPr>
           <a:xfrm>
             <a:off x="914400" y="2377440"/>
-            <a:ext cx="10358640" cy="2010240"/>
+            <a:ext cx="10358280" cy="2009880"/>
           </a:xfrm>
           <a:prstGeom prst="rect">
             <a:avLst/>
@@ -26156,7 +26046,7 @@
         <p:spPr>
           <a:xfrm>
             <a:off x="1463040" y="4572000"/>
-            <a:ext cx="9261360" cy="1095840"/>
+            <a:ext cx="9261000" cy="1095480"/>
           </a:xfrm>
           <a:prstGeom prst="rect">
             <a:avLst/>
@@ -26217,7 +26107,7 @@
         <p:spPr>
           <a:xfrm>
             <a:off x="11521440" y="6446520"/>
-            <a:ext cx="455760" cy="272880"/>
+            <a:ext cx="455400" cy="272520"/>
           </a:xfrm>
           <a:prstGeom prst="rect">
             <a:avLst/>
@@ -26315,7 +26205,7 @@
         <p:spPr>
           <a:xfrm>
             <a:off x="10515600" y="5669280"/>
-            <a:ext cx="3198960" cy="3198960"/>
+            <a:ext cx="3198600" cy="3198600"/>
           </a:xfrm>
           <a:prstGeom prst="roundRect">
             <a:avLst>
@@ -26360,7 +26250,7 @@
         <p:spPr>
           <a:xfrm>
             <a:off x="457200" y="457200"/>
-            <a:ext cx="638640" cy="638640"/>
+            <a:ext cx="638280" cy="638280"/>
           </a:xfrm>
           <a:prstGeom prst="ellipse">
             <a:avLst/>
@@ -26407,7 +26297,7 @@
         <p:spPr>
           <a:xfrm>
             <a:off x="548640" y="548640"/>
-            <a:ext cx="446760" cy="446760"/>
+            <a:ext cx="446400" cy="446400"/>
           </a:xfrm>
           <a:prstGeom prst="rect">
             <a:avLst/>
@@ -26427,7 +26317,7 @@
         <p:spPr>
           <a:xfrm>
             <a:off x="1280160" y="457200"/>
-            <a:ext cx="10422720" cy="638640"/>
+            <a:ext cx="10422360" cy="638280"/>
           </a:xfrm>
           <a:prstGeom prst="rect">
             <a:avLst/>
@@ -26488,7 +26378,7 @@
         <p:spPr>
           <a:xfrm>
             <a:off x="457200" y="1554480"/>
-            <a:ext cx="3656160" cy="4662000"/>
+            <a:ext cx="3655800" cy="4661640"/>
           </a:xfrm>
           <a:prstGeom prst="roundRect">
             <a:avLst>
@@ -26533,7 +26423,7 @@
         <p:spPr>
           <a:xfrm>
             <a:off x="1508760" y="2194560"/>
-            <a:ext cx="1553040" cy="1553040"/>
+            <a:ext cx="1552680" cy="1552680"/>
           </a:xfrm>
           <a:prstGeom prst="ellipse">
             <a:avLst/>
@@ -26580,7 +26470,7 @@
         <p:spPr>
           <a:xfrm>
             <a:off x="1746360" y="2423160"/>
-            <a:ext cx="1086840" cy="1086840"/>
+            <a:ext cx="1086480" cy="1086480"/>
           </a:xfrm>
           <a:prstGeom prst="rect">
             <a:avLst/>
@@ -26600,7 +26490,7 @@
         <p:spPr>
           <a:xfrm>
             <a:off x="640080" y="3977640"/>
-            <a:ext cx="3290400" cy="1735920"/>
+            <a:ext cx="3290040" cy="1735560"/>
           </a:xfrm>
           <a:prstGeom prst="rect">
             <a:avLst/>
@@ -26721,7 +26611,7 @@
         <p:spPr>
           <a:xfrm>
             <a:off x="4572000" y="1737360"/>
-            <a:ext cx="7130880" cy="4113360"/>
+            <a:ext cx="7130520" cy="4113000"/>
           </a:xfrm>
           <a:prstGeom prst="rect">
             <a:avLst/>
@@ -26892,7 +26782,7 @@
         <p:spPr>
           <a:xfrm>
             <a:off x="457200" y="6446520"/>
-            <a:ext cx="7313760" cy="272880"/>
+            <a:ext cx="7313400" cy="272520"/>
           </a:xfrm>
           <a:prstGeom prst="rect">
             <a:avLst/>
@@ -26953,7 +26843,7 @@
         <p:spPr>
           <a:xfrm>
             <a:off x="11521440" y="6446520"/>
-            <a:ext cx="455760" cy="272880"/>
+            <a:ext cx="455400" cy="272520"/>
           </a:xfrm>
           <a:prstGeom prst="rect">
             <a:avLst/>
@@ -27051,7 +26941,7 @@
         <p:spPr>
           <a:xfrm>
             <a:off x="-1828800" y="4114800"/>
-            <a:ext cx="5484960" cy="5484960"/>
+            <a:ext cx="5484600" cy="5484600"/>
           </a:xfrm>
           <a:prstGeom prst="ellipse">
             <a:avLst/>
@@ -27094,7 +26984,7 @@
         <p:spPr>
           <a:xfrm>
             <a:off x="9601200" y="-2286000"/>
-            <a:ext cx="5484960" cy="5484960"/>
+            <a:ext cx="5484600" cy="5484600"/>
           </a:xfrm>
           <a:prstGeom prst="ellipse">
             <a:avLst/>
@@ -27137,7 +27027,7 @@
         <p:spPr>
           <a:xfrm>
             <a:off x="5596200" y="731520"/>
-            <a:ext cx="1004400" cy="1004400"/>
+            <a:ext cx="1004040" cy="1004040"/>
           </a:xfrm>
           <a:prstGeom prst="ellipse">
             <a:avLst/>
@@ -27184,7 +27074,7 @@
         <p:spPr>
           <a:xfrm>
             <a:off x="5742360" y="877680"/>
-            <a:ext cx="702720" cy="702720"/>
+            <a:ext cx="702360" cy="702360"/>
           </a:xfrm>
           <a:prstGeom prst="rect">
             <a:avLst/>
@@ -27204,7 +27094,7 @@
         <p:spPr>
           <a:xfrm>
             <a:off x="914400" y="1965960"/>
-            <a:ext cx="10358640" cy="364320"/>
+            <a:ext cx="10358280" cy="363960"/>
           </a:xfrm>
           <a:prstGeom prst="rect">
             <a:avLst/>
@@ -27265,7 +27155,7 @@
         <p:spPr>
           <a:xfrm>
             <a:off x="914400" y="2377440"/>
-            <a:ext cx="10358640" cy="2010240"/>
+            <a:ext cx="10358280" cy="2009880"/>
           </a:xfrm>
           <a:prstGeom prst="rect">
             <a:avLst/>
@@ -27326,7 +27216,7 @@
         <p:spPr>
           <a:xfrm>
             <a:off x="1463040" y="4572000"/>
-            <a:ext cx="9261360" cy="1095840"/>
+            <a:ext cx="9261000" cy="1095480"/>
           </a:xfrm>
           <a:prstGeom prst="rect">
             <a:avLst/>
@@ -27387,7 +27277,7 @@
         <p:spPr>
           <a:xfrm>
             <a:off x="11521440" y="6446520"/>
-            <a:ext cx="455760" cy="272880"/>
+            <a:ext cx="455400" cy="272520"/>
           </a:xfrm>
           <a:prstGeom prst="rect">
             <a:avLst/>
@@ -27485,7 +27375,7 @@
         <p:spPr>
           <a:xfrm>
             <a:off x="457200" y="457200"/>
-            <a:ext cx="638640" cy="638640"/>
+            <a:ext cx="638280" cy="638280"/>
           </a:xfrm>
           <a:prstGeom prst="ellipse">
             <a:avLst/>
@@ -27532,7 +27422,7 @@
         <p:spPr>
           <a:xfrm>
             <a:off x="548640" y="548640"/>
-            <a:ext cx="446760" cy="446760"/>
+            <a:ext cx="446400" cy="446400"/>
           </a:xfrm>
           <a:prstGeom prst="rect">
             <a:avLst/>
@@ -27552,7 +27442,7 @@
         <p:spPr>
           <a:xfrm>
             <a:off x="1280160" y="457200"/>
-            <a:ext cx="10422720" cy="638640"/>
+            <a:ext cx="10422360" cy="638280"/>
           </a:xfrm>
           <a:prstGeom prst="rect">
             <a:avLst/>
@@ -27613,7 +27503,7 @@
         <p:spPr>
           <a:xfrm>
             <a:off x="914400" y="1737360"/>
-            <a:ext cx="10358640" cy="4204800"/>
+            <a:ext cx="10358280" cy="4204440"/>
           </a:xfrm>
           <a:prstGeom prst="roundRect">
             <a:avLst>
@@ -27661,7 +27551,7 @@
         <p:spPr>
           <a:xfrm>
             <a:off x="1188720" y="1920240"/>
-            <a:ext cx="9782640" cy="364320"/>
+            <a:ext cx="9782280" cy="363960"/>
           </a:xfrm>
           <a:prstGeom prst="rect">
             <a:avLst/>
@@ -27722,7 +27612,7 @@
         <p:spPr>
           <a:xfrm>
             <a:off x="1188720" y="2377440"/>
-            <a:ext cx="9782640" cy="364320"/>
+            <a:ext cx="9782280" cy="363960"/>
           </a:xfrm>
           <a:prstGeom prst="rect">
             <a:avLst/>
@@ -27783,7 +27673,7 @@
         <p:spPr>
           <a:xfrm>
             <a:off x="1463040" y="2926080"/>
-            <a:ext cx="9261360" cy="2650320"/>
+            <a:ext cx="9261000" cy="2649960"/>
           </a:xfrm>
           <a:prstGeom prst="roundRect">
             <a:avLst>
@@ -27828,7 +27718,7 @@
         <p:spPr>
           <a:xfrm>
             <a:off x="1737360" y="3108960"/>
-            <a:ext cx="8685360" cy="364320"/>
+            <a:ext cx="8685000" cy="363960"/>
           </a:xfrm>
           <a:prstGeom prst="rect">
             <a:avLst/>
@@ -27889,7 +27779,7 @@
         <p:spPr>
           <a:xfrm>
             <a:off x="1737360" y="3520440"/>
-            <a:ext cx="8685360" cy="364320"/>
+            <a:ext cx="8685000" cy="363960"/>
           </a:xfrm>
           <a:prstGeom prst="rect">
             <a:avLst/>
@@ -27950,7 +27840,7 @@
         <p:spPr>
           <a:xfrm>
             <a:off x="1737360" y="4023360"/>
-            <a:ext cx="8685360" cy="455760"/>
+            <a:ext cx="8685000" cy="455400"/>
           </a:xfrm>
           <a:prstGeom prst="rect">
             <a:avLst/>
@@ -28011,7 +27901,7 @@
         <p:spPr>
           <a:xfrm>
             <a:off x="1737360" y="4709160"/>
-            <a:ext cx="8593920" cy="775800"/>
+            <a:ext cx="8593560" cy="775440"/>
           </a:xfrm>
           <a:prstGeom prst="rect">
             <a:avLst/>
@@ -28072,7 +27962,7 @@
         <p:spPr>
           <a:xfrm>
             <a:off x="457200" y="6446520"/>
-            <a:ext cx="7313760" cy="272880"/>
+            <a:ext cx="7313400" cy="272520"/>
           </a:xfrm>
           <a:prstGeom prst="rect">
             <a:avLst/>
@@ -28133,7 +28023,7 @@
         <p:spPr>
           <a:xfrm>
             <a:off x="11521440" y="6446520"/>
-            <a:ext cx="455760" cy="272880"/>
+            <a:ext cx="455400" cy="272520"/>
           </a:xfrm>
           <a:prstGeom prst="rect">
             <a:avLst/>
@@ -28231,7 +28121,7 @@
         <p:spPr>
           <a:xfrm>
             <a:off x="457200" y="457200"/>
-            <a:ext cx="638640" cy="638640"/>
+            <a:ext cx="638280" cy="638280"/>
           </a:xfrm>
           <a:prstGeom prst="ellipse">
             <a:avLst/>
@@ -28278,7 +28168,7 @@
         <p:spPr>
           <a:xfrm>
             <a:off x="548640" y="548640"/>
-            <a:ext cx="446760" cy="446760"/>
+            <a:ext cx="446400" cy="446400"/>
           </a:xfrm>
           <a:prstGeom prst="rect">
             <a:avLst/>
@@ -28298,7 +28188,7 @@
         <p:spPr>
           <a:xfrm>
             <a:off x="1280160" y="457200"/>
-            <a:ext cx="10422720" cy="638640"/>
+            <a:ext cx="10422360" cy="638280"/>
           </a:xfrm>
           <a:prstGeom prst="rect">
             <a:avLst/>
@@ -28359,7 +28249,7 @@
         <p:spPr>
           <a:xfrm>
             <a:off x="548640" y="1936800"/>
-            <a:ext cx="4753440" cy="4021920"/>
+            <a:ext cx="4753080" cy="4021560"/>
           </a:xfrm>
           <a:prstGeom prst="rect">
             <a:avLst/>
@@ -28495,7 +28385,7 @@
         <p:spPr>
           <a:xfrm>
             <a:off x="5486400" y="1691640"/>
-            <a:ext cx="6216480" cy="4341960"/>
+            <a:ext cx="6216120" cy="4341600"/>
           </a:xfrm>
           <a:prstGeom prst="roundRect">
             <a:avLst>
@@ -28540,7 +28430,7 @@
         <p:spPr>
           <a:xfrm>
             <a:off x="5806440" y="1965960"/>
-            <a:ext cx="5576400" cy="3793320"/>
+            <a:ext cx="5576040" cy="3792960"/>
           </a:xfrm>
           <a:prstGeom prst="rect">
             <a:avLst/>
@@ -28907,7 +28797,7 @@
         <p:spPr>
           <a:xfrm>
             <a:off x="457200" y="6446520"/>
-            <a:ext cx="7313760" cy="272880"/>
+            <a:ext cx="7313400" cy="272520"/>
           </a:xfrm>
           <a:prstGeom prst="rect">
             <a:avLst/>
@@ -28968,7 +28858,7 @@
         <p:spPr>
           <a:xfrm>
             <a:off x="11521440" y="6446520"/>
-            <a:ext cx="455760" cy="272880"/>
+            <a:ext cx="455400" cy="272520"/>
           </a:xfrm>
           <a:prstGeom prst="rect">
             <a:avLst/>
@@ -29066,7 +28956,7 @@
         <p:spPr>
           <a:xfrm>
             <a:off x="457200" y="457200"/>
-            <a:ext cx="638640" cy="638640"/>
+            <a:ext cx="638280" cy="638280"/>
           </a:xfrm>
           <a:prstGeom prst="ellipse">
             <a:avLst/>
@@ -29113,7 +29003,7 @@
         <p:spPr>
           <a:xfrm>
             <a:off x="548640" y="548640"/>
-            <a:ext cx="446760" cy="446760"/>
+            <a:ext cx="446400" cy="446400"/>
           </a:xfrm>
           <a:prstGeom prst="rect">
             <a:avLst/>
@@ -29133,7 +29023,7 @@
         <p:spPr>
           <a:xfrm>
             <a:off x="1280160" y="457200"/>
-            <a:ext cx="10422720" cy="638640"/>
+            <a:ext cx="10422360" cy="638280"/>
           </a:xfrm>
           <a:prstGeom prst="rect">
             <a:avLst/>
@@ -29194,7 +29084,7 @@
         <p:spPr>
           <a:xfrm>
             <a:off x="548640" y="1828800"/>
-            <a:ext cx="4753440" cy="4021920"/>
+            <a:ext cx="4753080" cy="4021560"/>
           </a:xfrm>
           <a:prstGeom prst="rect">
             <a:avLst/>
@@ -29330,7 +29220,7 @@
         <p:spPr>
           <a:xfrm>
             <a:off x="5486400" y="1691640"/>
-            <a:ext cx="6216480" cy="4341960"/>
+            <a:ext cx="6216120" cy="4341600"/>
           </a:xfrm>
           <a:prstGeom prst="roundRect">
             <a:avLst>
@@ -29375,7 +29265,7 @@
         <p:spPr>
           <a:xfrm>
             <a:off x="5806440" y="1965960"/>
-            <a:ext cx="5576400" cy="3793320"/>
+            <a:ext cx="5576040" cy="3792960"/>
           </a:xfrm>
           <a:prstGeom prst="rect">
             <a:avLst/>
@@ -29802,7 +29692,7 @@
         <p:spPr>
           <a:xfrm>
             <a:off x="457200" y="6446520"/>
-            <a:ext cx="7313760" cy="272880"/>
+            <a:ext cx="7313400" cy="272520"/>
           </a:xfrm>
           <a:prstGeom prst="rect">
             <a:avLst/>
@@ -29863,7 +29753,7 @@
         <p:spPr>
           <a:xfrm>
             <a:off x="11521440" y="6446520"/>
-            <a:ext cx="455760" cy="272880"/>
+            <a:ext cx="455400" cy="272520"/>
           </a:xfrm>
           <a:prstGeom prst="rect">
             <a:avLst/>
@@ -29961,7 +29851,7 @@
         <p:spPr>
           <a:xfrm>
             <a:off x="-1828800" y="5029200"/>
-            <a:ext cx="3656160" cy="3656160"/>
+            <a:ext cx="3655800" cy="3655800"/>
           </a:xfrm>
           <a:prstGeom prst="ellipse">
             <a:avLst/>
@@ -30004,7 +29894,7 @@
         <p:spPr>
           <a:xfrm>
             <a:off x="457200" y="457200"/>
-            <a:ext cx="638640" cy="638640"/>
+            <a:ext cx="638280" cy="638280"/>
           </a:xfrm>
           <a:prstGeom prst="ellipse">
             <a:avLst/>
@@ -30051,7 +29941,7 @@
         <p:spPr>
           <a:xfrm>
             <a:off x="548640" y="548640"/>
-            <a:ext cx="446760" cy="446760"/>
+            <a:ext cx="446400" cy="446400"/>
           </a:xfrm>
           <a:prstGeom prst="rect">
             <a:avLst/>
@@ -30071,7 +29961,7 @@
         <p:spPr>
           <a:xfrm>
             <a:off x="1280160" y="457200"/>
-            <a:ext cx="10422720" cy="638640"/>
+            <a:ext cx="10422360" cy="638280"/>
           </a:xfrm>
           <a:prstGeom prst="rect">
             <a:avLst/>
@@ -30132,7 +30022,7 @@
         <p:spPr>
           <a:xfrm>
             <a:off x="457200" y="1600200"/>
-            <a:ext cx="11273040" cy="4479120"/>
+            <a:ext cx="11272680" cy="4478760"/>
           </a:xfrm>
           <a:prstGeom prst="roundRect">
             <a:avLst>
@@ -30177,7 +30067,7 @@
         <p:spPr>
           <a:xfrm>
             <a:off x="822960" y="1828800"/>
-            <a:ext cx="10514160" cy="455760"/>
+            <a:ext cx="10513800" cy="455400"/>
           </a:xfrm>
           <a:prstGeom prst="rect">
             <a:avLst/>
@@ -30238,7 +30128,7 @@
         <p:spPr>
           <a:xfrm>
             <a:off x="822960" y="2423160"/>
-            <a:ext cx="382680" cy="382680"/>
+            <a:ext cx="382320" cy="382320"/>
           </a:xfrm>
           <a:prstGeom prst="ellipse">
             <a:avLst/>
@@ -30281,7 +30171,7 @@
         <p:spPr>
           <a:xfrm>
             <a:off x="822960" y="2423160"/>
-            <a:ext cx="382680" cy="382680"/>
+            <a:ext cx="382320" cy="382320"/>
           </a:xfrm>
           <a:prstGeom prst="rect">
             <a:avLst/>
@@ -30342,7 +30232,7 @@
         <p:spPr>
           <a:xfrm>
             <a:off x="1435680" y="2423160"/>
-            <a:ext cx="9581400" cy="382680"/>
+            <a:ext cx="9581040" cy="382320"/>
           </a:xfrm>
           <a:prstGeom prst="rect">
             <a:avLst/>
@@ -30403,7 +30293,7 @@
         <p:spPr>
           <a:xfrm>
             <a:off x="822960" y="3300840"/>
-            <a:ext cx="382680" cy="382680"/>
+            <a:ext cx="382320" cy="382320"/>
           </a:xfrm>
           <a:prstGeom prst="ellipse">
             <a:avLst/>
@@ -30446,7 +30336,7 @@
         <p:spPr>
           <a:xfrm>
             <a:off x="822960" y="3300840"/>
-            <a:ext cx="382680" cy="382680"/>
+            <a:ext cx="382320" cy="382320"/>
           </a:xfrm>
           <a:prstGeom prst="rect">
             <a:avLst/>
@@ -30507,7 +30397,7 @@
         <p:spPr>
           <a:xfrm>
             <a:off x="1435680" y="3300840"/>
-            <a:ext cx="9581400" cy="382680"/>
+            <a:ext cx="9581040" cy="382320"/>
           </a:xfrm>
           <a:prstGeom prst="rect">
             <a:avLst/>
@@ -30568,7 +30458,7 @@
         <p:spPr>
           <a:xfrm>
             <a:off x="822960" y="4178880"/>
-            <a:ext cx="382680" cy="382680"/>
+            <a:ext cx="382320" cy="382320"/>
           </a:xfrm>
           <a:prstGeom prst="ellipse">
             <a:avLst/>
@@ -30611,7 +30501,7 @@
         <p:spPr>
           <a:xfrm>
             <a:off x="822960" y="4178880"/>
-            <a:ext cx="382680" cy="382680"/>
+            <a:ext cx="382320" cy="382320"/>
           </a:xfrm>
           <a:prstGeom prst="rect">
             <a:avLst/>
@@ -30672,7 +30562,7 @@
         <p:spPr>
           <a:xfrm>
             <a:off x="1435680" y="4178880"/>
-            <a:ext cx="9581400" cy="382680"/>
+            <a:ext cx="9581040" cy="382320"/>
           </a:xfrm>
           <a:prstGeom prst="rect">
             <a:avLst/>
@@ -30733,7 +30623,7 @@
         <p:spPr>
           <a:xfrm>
             <a:off x="457200" y="6446520"/>
-            <a:ext cx="7313760" cy="272880"/>
+            <a:ext cx="7313400" cy="272520"/>
           </a:xfrm>
           <a:prstGeom prst="rect">
             <a:avLst/>
@@ -30794,7 +30684,7 @@
         <p:spPr>
           <a:xfrm>
             <a:off x="11521440" y="6446520"/>
-            <a:ext cx="455760" cy="272880"/>
+            <a:ext cx="455400" cy="272520"/>
           </a:xfrm>
           <a:prstGeom prst="rect">
             <a:avLst/>
@@ -30892,7 +30782,7 @@
         <p:spPr>
           <a:xfrm>
             <a:off x="-1828800" y="4114800"/>
-            <a:ext cx="5484960" cy="5484960"/>
+            <a:ext cx="5484600" cy="5484600"/>
           </a:xfrm>
           <a:prstGeom prst="ellipse">
             <a:avLst/>
@@ -30935,7 +30825,7 @@
         <p:spPr>
           <a:xfrm>
             <a:off x="9601200" y="-2286000"/>
-            <a:ext cx="5484960" cy="5484960"/>
+            <a:ext cx="5484600" cy="5484600"/>
           </a:xfrm>
           <a:prstGeom prst="ellipse">
             <a:avLst/>
@@ -30978,7 +30868,7 @@
         <p:spPr>
           <a:xfrm>
             <a:off x="5596200" y="731520"/>
-            <a:ext cx="1004400" cy="1004400"/>
+            <a:ext cx="1004040" cy="1004040"/>
           </a:xfrm>
           <a:prstGeom prst="ellipse">
             <a:avLst/>
@@ -31025,7 +30915,7 @@
         <p:spPr>
           <a:xfrm>
             <a:off x="5742360" y="877680"/>
-            <a:ext cx="702720" cy="702720"/>
+            <a:ext cx="702360" cy="702360"/>
           </a:xfrm>
           <a:prstGeom prst="rect">
             <a:avLst/>
@@ -31045,7 +30935,7 @@
         <p:spPr>
           <a:xfrm>
             <a:off x="914400" y="1965960"/>
-            <a:ext cx="10358640" cy="364320"/>
+            <a:ext cx="10358280" cy="363960"/>
           </a:xfrm>
           <a:prstGeom prst="rect">
             <a:avLst/>
@@ -31106,7 +30996,7 @@
         <p:spPr>
           <a:xfrm>
             <a:off x="914400" y="2377440"/>
-            <a:ext cx="10358640" cy="2010240"/>
+            <a:ext cx="10358280" cy="2009880"/>
           </a:xfrm>
           <a:prstGeom prst="rect">
             <a:avLst/>
@@ -31167,7 +31057,7 @@
         <p:spPr>
           <a:xfrm>
             <a:off x="1463040" y="4572000"/>
-            <a:ext cx="9261360" cy="1095840"/>
+            <a:ext cx="9261000" cy="1095480"/>
           </a:xfrm>
           <a:prstGeom prst="rect">
             <a:avLst/>
@@ -31228,7 +31118,7 @@
         <p:spPr>
           <a:xfrm>
             <a:off x="11521440" y="6446520"/>
-            <a:ext cx="455760" cy="272880"/>
+            <a:ext cx="455400" cy="272520"/>
           </a:xfrm>
           <a:prstGeom prst="rect">
             <a:avLst/>
@@ -31326,7 +31216,7 @@
         <p:spPr>
           <a:xfrm>
             <a:off x="10515600" y="5669280"/>
-            <a:ext cx="3198960" cy="3198960"/>
+            <a:ext cx="3198600" cy="3198600"/>
           </a:xfrm>
           <a:prstGeom prst="roundRect">
             <a:avLst>
@@ -31371,7 +31261,7 @@
         <p:spPr>
           <a:xfrm>
             <a:off x="457200" y="457200"/>
-            <a:ext cx="638640" cy="638640"/>
+            <a:ext cx="638280" cy="638280"/>
           </a:xfrm>
           <a:prstGeom prst="ellipse">
             <a:avLst/>
@@ -31418,7 +31308,7 @@
         <p:spPr>
           <a:xfrm>
             <a:off x="548640" y="548640"/>
-            <a:ext cx="446760" cy="446760"/>
+            <a:ext cx="446400" cy="446400"/>
           </a:xfrm>
           <a:prstGeom prst="rect">
             <a:avLst/>
@@ -31438,7 +31328,7 @@
         <p:spPr>
           <a:xfrm>
             <a:off x="1280160" y="457200"/>
-            <a:ext cx="10422720" cy="638640"/>
+            <a:ext cx="10422360" cy="638280"/>
           </a:xfrm>
           <a:prstGeom prst="rect">
             <a:avLst/>
@@ -31499,7 +31389,7 @@
         <p:spPr>
           <a:xfrm>
             <a:off x="457200" y="1554480"/>
-            <a:ext cx="3656160" cy="4662000"/>
+            <a:ext cx="3655800" cy="4661640"/>
           </a:xfrm>
           <a:prstGeom prst="roundRect">
             <a:avLst>
@@ -31544,7 +31434,7 @@
         <p:spPr>
           <a:xfrm>
             <a:off x="1508760" y="2194560"/>
-            <a:ext cx="1553040" cy="1553040"/>
+            <a:ext cx="1552680" cy="1552680"/>
           </a:xfrm>
           <a:prstGeom prst="ellipse">
             <a:avLst/>
@@ -31591,7 +31481,7 @@
         <p:spPr>
           <a:xfrm>
             <a:off x="1746360" y="2423160"/>
-            <a:ext cx="1086840" cy="1086840"/>
+            <a:ext cx="1086480" cy="1086480"/>
           </a:xfrm>
           <a:prstGeom prst="rect">
             <a:avLst/>
@@ -31611,7 +31501,7 @@
         <p:spPr>
           <a:xfrm>
             <a:off x="640080" y="3977640"/>
-            <a:ext cx="3290400" cy="1735920"/>
+            <a:ext cx="3290040" cy="1735560"/>
           </a:xfrm>
           <a:prstGeom prst="rect">
             <a:avLst/>
@@ -31732,7 +31622,7 @@
         <p:spPr>
           <a:xfrm>
             <a:off x="4572000" y="1737360"/>
-            <a:ext cx="7130880" cy="4113360"/>
+            <a:ext cx="7130520" cy="4113000"/>
           </a:xfrm>
           <a:prstGeom prst="rect">
             <a:avLst/>
@@ -31903,7 +31793,7 @@
         <p:spPr>
           <a:xfrm>
             <a:off x="457200" y="6446520"/>
-            <a:ext cx="7313760" cy="272880"/>
+            <a:ext cx="7313400" cy="272520"/>
           </a:xfrm>
           <a:prstGeom prst="rect">
             <a:avLst/>
@@ -31964,7 +31854,7 @@
         <p:spPr>
           <a:xfrm>
             <a:off x="11521440" y="6446520"/>
-            <a:ext cx="455760" cy="272880"/>
+            <a:ext cx="455400" cy="272520"/>
           </a:xfrm>
           <a:prstGeom prst="rect">
             <a:avLst/>
@@ -32062,7 +31952,7 @@
         <p:spPr>
           <a:xfrm>
             <a:off x="457200" y="457200"/>
-            <a:ext cx="638640" cy="638640"/>
+            <a:ext cx="638280" cy="638280"/>
           </a:xfrm>
           <a:prstGeom prst="ellipse">
             <a:avLst/>
@@ -32109,7 +31999,7 @@
         <p:spPr>
           <a:xfrm>
             <a:off x="548640" y="548640"/>
-            <a:ext cx="446760" cy="446760"/>
+            <a:ext cx="446400" cy="446400"/>
           </a:xfrm>
           <a:prstGeom prst="rect">
             <a:avLst/>
@@ -32129,7 +32019,7 @@
         <p:spPr>
           <a:xfrm>
             <a:off x="1280160" y="457200"/>
-            <a:ext cx="10422720" cy="638640"/>
+            <a:ext cx="10422360" cy="638280"/>
           </a:xfrm>
           <a:prstGeom prst="rect">
             <a:avLst/>
@@ -32190,7 +32080,7 @@
         <p:spPr>
           <a:xfrm>
             <a:off x="1188720" y="1783080"/>
-            <a:ext cx="9810000" cy="4021920"/>
+            <a:ext cx="9809640" cy="4021560"/>
           </a:xfrm>
           <a:prstGeom prst="roundRect">
             <a:avLst>
@@ -32235,7 +32125,7 @@
         <p:spPr>
           <a:xfrm>
             <a:off x="1463040" y="1965960"/>
-            <a:ext cx="9325440" cy="364320"/>
+            <a:ext cx="9325080" cy="363960"/>
           </a:xfrm>
           <a:prstGeom prst="rect">
             <a:avLst/>
@@ -32296,7 +32186,7 @@
         <p:spPr>
           <a:xfrm>
             <a:off x="1463040" y="2468880"/>
-            <a:ext cx="9261360" cy="592920"/>
+            <a:ext cx="9261000" cy="592560"/>
           </a:xfrm>
           <a:prstGeom prst="roundRect">
             <a:avLst>
@@ -32341,7 +32231,7 @@
         <p:spPr>
           <a:xfrm>
             <a:off x="1737360" y="2468880"/>
-            <a:ext cx="8685360" cy="592920"/>
+            <a:ext cx="8685000" cy="592560"/>
           </a:xfrm>
           <a:prstGeom prst="rect">
             <a:avLst/>
@@ -32402,7 +32292,7 @@
         <p:spPr>
           <a:xfrm>
             <a:off x="1828800" y="3246120"/>
-            <a:ext cx="8529840" cy="1004400"/>
+            <a:ext cx="8529480" cy="1004040"/>
           </a:xfrm>
           <a:prstGeom prst="roundRect">
             <a:avLst>
@@ -32450,7 +32340,7 @@
         <p:spPr>
           <a:xfrm>
             <a:off x="2103120" y="3246120"/>
-            <a:ext cx="7953840" cy="1004400"/>
+            <a:ext cx="7953480" cy="1004040"/>
           </a:xfrm>
           <a:prstGeom prst="rect">
             <a:avLst/>
@@ -32511,7 +32401,7 @@
         <p:spPr>
           <a:xfrm>
             <a:off x="1463040" y="4434840"/>
-            <a:ext cx="9261360" cy="592920"/>
+            <a:ext cx="9261000" cy="592560"/>
           </a:xfrm>
           <a:prstGeom prst="roundRect">
             <a:avLst>
@@ -32556,7 +32446,7 @@
         <p:spPr>
           <a:xfrm>
             <a:off x="1737360" y="4434840"/>
-            <a:ext cx="8685360" cy="592920"/>
+            <a:ext cx="8685000" cy="592560"/>
           </a:xfrm>
           <a:prstGeom prst="rect">
             <a:avLst/>
@@ -32617,7 +32507,7 @@
         <p:spPr>
           <a:xfrm>
             <a:off x="1463040" y="5166360"/>
-            <a:ext cx="9261360" cy="547200"/>
+            <a:ext cx="9261000" cy="546840"/>
           </a:xfrm>
           <a:prstGeom prst="rect">
             <a:avLst/>
@@ -32678,7 +32568,7 @@
         <p:spPr>
           <a:xfrm>
             <a:off x="457200" y="6446520"/>
-            <a:ext cx="7313760" cy="272880"/>
+            <a:ext cx="7313400" cy="272520"/>
           </a:xfrm>
           <a:prstGeom prst="rect">
             <a:avLst/>
@@ -32739,7 +32629,7 @@
         <p:spPr>
           <a:xfrm>
             <a:off x="11521440" y="6446520"/>
-            <a:ext cx="455760" cy="272880"/>
+            <a:ext cx="455400" cy="272520"/>
           </a:xfrm>
           <a:prstGeom prst="rect">
             <a:avLst/>
@@ -32837,7 +32727,7 @@
         <p:spPr>
           <a:xfrm>
             <a:off x="457200" y="457200"/>
-            <a:ext cx="638640" cy="638640"/>
+            <a:ext cx="638280" cy="638280"/>
           </a:xfrm>
           <a:prstGeom prst="ellipse">
             <a:avLst/>
@@ -32884,7 +32774,7 @@
         <p:spPr>
           <a:xfrm>
             <a:off x="548640" y="548640"/>
-            <a:ext cx="446760" cy="446760"/>
+            <a:ext cx="446400" cy="446400"/>
           </a:xfrm>
           <a:prstGeom prst="rect">
             <a:avLst/>
@@ -32904,7 +32794,7 @@
         <p:spPr>
           <a:xfrm>
             <a:off x="1280160" y="457200"/>
-            <a:ext cx="10422720" cy="638640"/>
+            <a:ext cx="10422360" cy="638280"/>
           </a:xfrm>
           <a:prstGeom prst="rect">
             <a:avLst/>
@@ -32965,7 +32855,7 @@
         <p:spPr>
           <a:xfrm>
             <a:off x="548640" y="1828800"/>
-            <a:ext cx="4753440" cy="4021920"/>
+            <a:ext cx="4753080" cy="4021560"/>
           </a:xfrm>
           <a:prstGeom prst="rect">
             <a:avLst/>
@@ -33101,7 +32991,7 @@
         <p:spPr>
           <a:xfrm>
             <a:off x="5486400" y="1691640"/>
-            <a:ext cx="6216480" cy="4341960"/>
+            <a:ext cx="6216120" cy="4341600"/>
           </a:xfrm>
           <a:prstGeom prst="roundRect">
             <a:avLst>
@@ -33146,7 +33036,7 @@
         <p:spPr>
           <a:xfrm>
             <a:off x="5806440" y="1965960"/>
-            <a:ext cx="5576400" cy="3793320"/>
+            <a:ext cx="5576040" cy="3792960"/>
           </a:xfrm>
           <a:prstGeom prst="rect">
             <a:avLst/>
@@ -33627,7 +33517,7 @@
         <p:spPr>
           <a:xfrm>
             <a:off x="457200" y="6446520"/>
-            <a:ext cx="7313760" cy="272880"/>
+            <a:ext cx="7313400" cy="272520"/>
           </a:xfrm>
           <a:prstGeom prst="rect">
             <a:avLst/>
@@ -33688,7 +33578,7 @@
         <p:spPr>
           <a:xfrm>
             <a:off x="11521440" y="6446520"/>
-            <a:ext cx="455760" cy="272880"/>
+            <a:ext cx="455400" cy="272520"/>
           </a:xfrm>
           <a:prstGeom prst="rect">
             <a:avLst/>
@@ -33786,7 +33676,7 @@
         <p:spPr>
           <a:xfrm>
             <a:off x="457200" y="457200"/>
-            <a:ext cx="638640" cy="638640"/>
+            <a:ext cx="638280" cy="638280"/>
           </a:xfrm>
           <a:prstGeom prst="ellipse">
             <a:avLst/>
@@ -33833,7 +33723,7 @@
         <p:spPr>
           <a:xfrm>
             <a:off x="548640" y="548640"/>
-            <a:ext cx="446760" cy="446760"/>
+            <a:ext cx="446400" cy="446400"/>
           </a:xfrm>
           <a:prstGeom prst="rect">
             <a:avLst/>
@@ -33853,7 +33743,7 @@
         <p:spPr>
           <a:xfrm>
             <a:off x="1280160" y="457200"/>
-            <a:ext cx="10422720" cy="638640"/>
+            <a:ext cx="10422360" cy="638280"/>
           </a:xfrm>
           <a:prstGeom prst="rect">
             <a:avLst/>
@@ -33914,7 +33804,7 @@
         <p:spPr>
           <a:xfrm>
             <a:off x="548640" y="1828800"/>
-            <a:ext cx="4753440" cy="4021920"/>
+            <a:ext cx="4753080" cy="4021560"/>
           </a:xfrm>
           <a:prstGeom prst="rect">
             <a:avLst/>
@@ -34050,7 +33940,7 @@
         <p:spPr>
           <a:xfrm>
             <a:off x="5486400" y="1691640"/>
-            <a:ext cx="6216480" cy="4341960"/>
+            <a:ext cx="6216120" cy="4341600"/>
           </a:xfrm>
           <a:prstGeom prst="roundRect">
             <a:avLst>
@@ -34095,7 +33985,7 @@
         <p:spPr>
           <a:xfrm>
             <a:off x="5806440" y="1965960"/>
-            <a:ext cx="5576400" cy="3793320"/>
+            <a:ext cx="5576040" cy="3792960"/>
           </a:xfrm>
           <a:prstGeom prst="rect">
             <a:avLst/>
@@ -34510,7 +34400,7 @@
         <p:spPr>
           <a:xfrm>
             <a:off x="457200" y="6446520"/>
-            <a:ext cx="7313760" cy="272880"/>
+            <a:ext cx="7313400" cy="272520"/>
           </a:xfrm>
           <a:prstGeom prst="rect">
             <a:avLst/>
@@ -34571,7 +34461,7 @@
         <p:spPr>
           <a:xfrm>
             <a:off x="11521440" y="6446520"/>
-            <a:ext cx="455760" cy="272880"/>
+            <a:ext cx="455400" cy="272520"/>
           </a:xfrm>
           <a:prstGeom prst="rect">
             <a:avLst/>
@@ -34669,7 +34559,7 @@
         <p:spPr>
           <a:xfrm>
             <a:off x="457200" y="457200"/>
-            <a:ext cx="638640" cy="638640"/>
+            <a:ext cx="638280" cy="638280"/>
           </a:xfrm>
           <a:prstGeom prst="ellipse">
             <a:avLst/>
@@ -34716,7 +34606,7 @@
         <p:spPr>
           <a:xfrm>
             <a:off x="548640" y="548640"/>
-            <a:ext cx="446760" cy="446760"/>
+            <a:ext cx="446400" cy="446400"/>
           </a:xfrm>
           <a:prstGeom prst="rect">
             <a:avLst/>
@@ -34736,7 +34626,7 @@
         <p:spPr>
           <a:xfrm>
             <a:off x="1280160" y="457200"/>
-            <a:ext cx="10422720" cy="638640"/>
+            <a:ext cx="10422360" cy="638280"/>
           </a:xfrm>
           <a:prstGeom prst="rect">
             <a:avLst/>
@@ -34797,7 +34687,7 @@
         <p:spPr>
           <a:xfrm>
             <a:off x="457200" y="1508760"/>
-            <a:ext cx="3610440" cy="4890600"/>
+            <a:ext cx="3610080" cy="4890240"/>
           </a:xfrm>
           <a:prstGeom prst="roundRect">
             <a:avLst>
@@ -34842,7 +34732,7 @@
         <p:spPr>
           <a:xfrm>
             <a:off x="1989000" y="2094120"/>
-            <a:ext cx="547200" cy="547200"/>
+            <a:ext cx="546840" cy="546840"/>
           </a:xfrm>
           <a:prstGeom prst="ellipse">
             <a:avLst/>
@@ -34889,7 +34779,7 @@
         <p:spPr>
           <a:xfrm>
             <a:off x="2071080" y="2176200"/>
-            <a:ext cx="382680" cy="382680"/>
+            <a:ext cx="382320" cy="382320"/>
           </a:xfrm>
           <a:prstGeom prst="rect">
             <a:avLst/>
@@ -34909,7 +34799,7 @@
         <p:spPr>
           <a:xfrm>
             <a:off x="548640" y="2715840"/>
-            <a:ext cx="3427560" cy="364320"/>
+            <a:ext cx="3427200" cy="363960"/>
           </a:xfrm>
           <a:prstGeom prst="rect">
             <a:avLst/>
@@ -34970,7 +34860,7 @@
         <p:spPr>
           <a:xfrm>
             <a:off x="603360" y="3099960"/>
-            <a:ext cx="3317760" cy="3153240"/>
+            <a:ext cx="3317400" cy="3152880"/>
           </a:xfrm>
           <a:prstGeom prst="rect">
             <a:avLst/>
@@ -35031,7 +34921,7 @@
         <p:spPr>
           <a:xfrm>
             <a:off x="4288680" y="1508760"/>
-            <a:ext cx="3610440" cy="4890600"/>
+            <a:ext cx="3610080" cy="4890240"/>
           </a:xfrm>
           <a:prstGeom prst="roundRect">
             <a:avLst>
@@ -35076,7 +34966,7 @@
         <p:spPr>
           <a:xfrm>
             <a:off x="5820120" y="2094120"/>
-            <a:ext cx="547200" cy="547200"/>
+            <a:ext cx="546840" cy="546840"/>
           </a:xfrm>
           <a:prstGeom prst="ellipse">
             <a:avLst/>
@@ -35123,7 +35013,7 @@
         <p:spPr>
           <a:xfrm>
             <a:off x="5902560" y="2176200"/>
-            <a:ext cx="382680" cy="382680"/>
+            <a:ext cx="382320" cy="382320"/>
           </a:xfrm>
           <a:prstGeom prst="rect">
             <a:avLst/>
@@ -35143,7 +35033,7 @@
         <p:spPr>
           <a:xfrm>
             <a:off x="4380120" y="2715840"/>
-            <a:ext cx="3427560" cy="364320"/>
+            <a:ext cx="3427200" cy="363960"/>
           </a:xfrm>
           <a:prstGeom prst="rect">
             <a:avLst/>
@@ -35204,7 +35094,7 @@
         <p:spPr>
           <a:xfrm>
             <a:off x="4434840" y="3099960"/>
-            <a:ext cx="3317760" cy="3153240"/>
+            <a:ext cx="3317400" cy="3152880"/>
           </a:xfrm>
           <a:prstGeom prst="rect">
             <a:avLst/>
@@ -35243,199 +35133,7 @@
                 <a:latin typeface="Calibri"/>
                 <a:ea typeface="Calibri"/>
               </a:rPr>
-              <a:t>A </a:t>
-            </a:r>
-            <a:r>
-              <a:rPr lang="en-US" sz="1100" b="0" u="none" strike="noStrike">
-                <a:solidFill>
-                  <a:srgbClr val="4B564F"/>
-                </a:solidFill>
-                <a:effectLst/>
-                <a:uFillTx/>
-                <a:latin typeface="Calibri"/>
-                <a:ea typeface="Calibri"/>
-              </a:rPr>
-              <a:t>decorat</a:t>
-            </a:r>
-            <a:r>
-              <a:rPr lang="en-US" sz="1100" b="0" u="none" strike="noStrike">
-                <a:solidFill>
-                  <a:srgbClr val="4B564F"/>
-                </a:solidFill>
-                <a:effectLst/>
-                <a:uFillTx/>
-                <a:latin typeface="Calibri"/>
-                <a:ea typeface="Calibri"/>
-              </a:rPr>
-              <a:t>or that </a:t>
-            </a:r>
-            <a:r>
-              <a:rPr lang="en-US" sz="1100" b="0" u="none" strike="noStrike">
-                <a:solidFill>
-                  <a:srgbClr val="4B564F"/>
-                </a:solidFill>
-                <a:effectLst/>
-                <a:uFillTx/>
-                <a:latin typeface="Calibri"/>
-                <a:ea typeface="Calibri"/>
-              </a:rPr>
-              <a:t>measur</a:t>
-            </a:r>
-            <a:r>
-              <a:rPr lang="en-US" sz="1100" b="0" u="none" strike="noStrike">
-                <a:solidFill>
-                  <a:srgbClr val="4B564F"/>
-                </a:solidFill>
-                <a:effectLst/>
-                <a:uFillTx/>
-                <a:latin typeface="Calibri"/>
-                <a:ea typeface="Calibri"/>
-              </a:rPr>
-              <a:t>es and </a:t>
-            </a:r>
-            <a:r>
-              <a:rPr lang="en-US" sz="1100" b="0" u="none" strike="noStrike">
-                <a:solidFill>
-                  <a:srgbClr val="4B564F"/>
-                </a:solidFill>
-                <a:effectLst/>
-                <a:uFillTx/>
-                <a:latin typeface="Calibri"/>
-                <a:ea typeface="Calibri"/>
-              </a:rPr>
-              <a:t>prints </a:t>
-            </a:r>
-            <a:r>
-              <a:rPr lang="en-US" sz="1100" b="0" u="none" strike="noStrike">
-                <a:solidFill>
-                  <a:srgbClr val="4B564F"/>
-                </a:solidFill>
-                <a:effectLst/>
-                <a:uFillTx/>
-                <a:latin typeface="Calibri"/>
-                <a:ea typeface="Calibri"/>
-              </a:rPr>
-              <a:t>how </a:t>
-            </a:r>
-            <a:r>
-              <a:rPr lang="en-US" sz="1100" b="0" u="none" strike="noStrike">
-                <a:solidFill>
-                  <a:srgbClr val="4B564F"/>
-                </a:solidFill>
-                <a:effectLst/>
-                <a:uFillTx/>
-                <a:latin typeface="Calibri"/>
-                <a:ea typeface="Calibri"/>
-              </a:rPr>
-              <a:t>long a </a:t>
-            </a:r>
-            <a:r>
-              <a:rPr lang="en-US" sz="1100" b="0" u="none" strike="noStrike">
-                <a:solidFill>
-                  <a:srgbClr val="4B564F"/>
-                </a:solidFill>
-                <a:effectLst/>
-                <a:uFillTx/>
-                <a:latin typeface="Calibri"/>
-                <a:ea typeface="Calibri"/>
-              </a:rPr>
-              <a:t>functio</a:t>
-            </a:r>
-            <a:r>
-              <a:rPr lang="en-US" sz="1100" b="0" u="none" strike="noStrike">
-                <a:solidFill>
-                  <a:srgbClr val="4B564F"/>
-                </a:solidFill>
-                <a:effectLst/>
-                <a:uFillTx/>
-                <a:latin typeface="Calibri"/>
-                <a:ea typeface="Calibri"/>
-              </a:rPr>
-              <a:t>n took </a:t>
-            </a:r>
-            <a:r>
-              <a:rPr lang="en-US" sz="1100" b="0" u="none" strike="noStrike">
-                <a:solidFill>
-                  <a:srgbClr val="4B564F"/>
-                </a:solidFill>
-                <a:effectLst/>
-                <a:uFillTx/>
-                <a:latin typeface="Calibri"/>
-                <a:ea typeface="Calibri"/>
-              </a:rPr>
-              <a:t>to run </a:t>
-            </a:r>
-            <a:r>
-              <a:rPr lang="en-US" sz="1100" b="0" u="none" strike="noStrike">
-                <a:solidFill>
-                  <a:srgbClr val="4B564F"/>
-                </a:solidFill>
-                <a:effectLst/>
-                <a:uFillTx/>
-                <a:latin typeface="Calibri"/>
-                <a:ea typeface="Calibri"/>
-              </a:rPr>
-              <a:t>— </a:t>
-            </a:r>
-            <a:r>
-              <a:rPr lang="en-US" sz="1100" b="0" u="none" strike="noStrike">
-                <a:solidFill>
-                  <a:srgbClr val="4B564F"/>
-                </a:solidFill>
-                <a:effectLst/>
-                <a:uFillTx/>
-                <a:latin typeface="Calibri"/>
-                <a:ea typeface="Calibri"/>
-              </a:rPr>
-              <a:t>without </a:t>
-            </a:r>
-            <a:r>
-              <a:rPr lang="en-US" sz="1100" b="0" u="none" strike="noStrike">
-                <a:solidFill>
-                  <a:srgbClr val="4B564F"/>
-                </a:solidFill>
-                <a:effectLst/>
-                <a:uFillTx/>
-                <a:latin typeface="Calibri"/>
-                <a:ea typeface="Calibri"/>
-              </a:rPr>
-              <a:t>changin</a:t>
-            </a:r>
-            <a:r>
-              <a:rPr lang="en-US" sz="1100" b="0" u="none" strike="noStrike">
-                <a:solidFill>
-                  <a:srgbClr val="4B564F"/>
-                </a:solidFill>
-                <a:effectLst/>
-                <a:uFillTx/>
-                <a:latin typeface="Calibri"/>
-                <a:ea typeface="Calibri"/>
-              </a:rPr>
-              <a:t>g the </a:t>
-            </a:r>
-            <a:r>
-              <a:rPr lang="en-US" sz="1100" b="0" u="none" strike="noStrike">
-                <a:solidFill>
-                  <a:srgbClr val="4B564F"/>
-                </a:solidFill>
-                <a:effectLst/>
-                <a:uFillTx/>
-                <a:latin typeface="Calibri"/>
-                <a:ea typeface="Calibri"/>
-              </a:rPr>
-              <a:t>functio</a:t>
-            </a:r>
-            <a:r>
-              <a:rPr lang="en-US" sz="1100" b="0" u="none" strike="noStrike">
-                <a:solidFill>
-                  <a:srgbClr val="4B564F"/>
-                </a:solidFill>
-                <a:effectLst/>
-                <a:uFillTx/>
-                <a:latin typeface="Calibri"/>
-                <a:ea typeface="Calibri"/>
-              </a:rPr>
-              <a:t>n itself</a:t>
+              <a:t>A decorator that measures and prints how long a function took to run — without changing the function itself</a:t>
             </a:r>
             <a:endParaRPr lang="en-US" sz="1100" b="0" u="none" strike="noStrike">
               <a:solidFill>
@@ -35457,7 +35155,7 @@
         <p:spPr>
           <a:xfrm>
             <a:off x="8119800" y="1508760"/>
-            <a:ext cx="3610440" cy="4890600"/>
+            <a:ext cx="3610080" cy="4890240"/>
           </a:xfrm>
           <a:prstGeom prst="roundRect">
             <a:avLst>
@@ -35502,7 +35200,7 @@
         <p:spPr>
           <a:xfrm>
             <a:off x="9651600" y="2094120"/>
-            <a:ext cx="547200" cy="547200"/>
+            <a:ext cx="546840" cy="546840"/>
           </a:xfrm>
           <a:prstGeom prst="ellipse">
             <a:avLst/>
@@ -35549,7 +35247,7 @@
         <p:spPr>
           <a:xfrm>
             <a:off x="9733680" y="2176200"/>
-            <a:ext cx="382680" cy="382680"/>
+            <a:ext cx="382320" cy="382320"/>
           </a:xfrm>
           <a:prstGeom prst="rect">
             <a:avLst/>
@@ -35569,7 +35267,7 @@
         <p:spPr>
           <a:xfrm>
             <a:off x="8211240" y="2715840"/>
-            <a:ext cx="3427560" cy="364320"/>
+            <a:ext cx="3427200" cy="363960"/>
           </a:xfrm>
           <a:prstGeom prst="rect">
             <a:avLst/>
@@ -35630,7 +35328,7 @@
         <p:spPr>
           <a:xfrm>
             <a:off x="8266320" y="3099960"/>
-            <a:ext cx="3317760" cy="3153240"/>
+            <a:ext cx="3317400" cy="3152880"/>
           </a:xfrm>
           <a:prstGeom prst="rect">
             <a:avLst/>
@@ -35691,7 +35389,7 @@
         <p:spPr>
           <a:xfrm>
             <a:off x="457200" y="6446520"/>
-            <a:ext cx="7313760" cy="272880"/>
+            <a:ext cx="7313400" cy="272520"/>
           </a:xfrm>
           <a:prstGeom prst="rect">
             <a:avLst/>
@@ -35752,7 +35450,7 @@
         <p:spPr>
           <a:xfrm>
             <a:off x="11521440" y="6446520"/>
-            <a:ext cx="455760" cy="272880"/>
+            <a:ext cx="455400" cy="272520"/>
           </a:xfrm>
           <a:prstGeom prst="rect">
             <a:avLst/>
@@ -35850,7 +35548,7 @@
         <p:spPr>
           <a:xfrm>
             <a:off x="10515600" y="5669280"/>
-            <a:ext cx="3198960" cy="3198960"/>
+            <a:ext cx="3198600" cy="3198600"/>
           </a:xfrm>
           <a:prstGeom prst="roundRect">
             <a:avLst>
@@ -35895,7 +35593,7 @@
         <p:spPr>
           <a:xfrm>
             <a:off x="457200" y="457200"/>
-            <a:ext cx="638640" cy="638640"/>
+            <a:ext cx="638280" cy="638280"/>
           </a:xfrm>
           <a:prstGeom prst="ellipse">
             <a:avLst/>
@@ -35942,7 +35640,7 @@
         <p:spPr>
           <a:xfrm>
             <a:off x="548640" y="548640"/>
-            <a:ext cx="446760" cy="446760"/>
+            <a:ext cx="446400" cy="446400"/>
           </a:xfrm>
           <a:prstGeom prst="rect">
             <a:avLst/>
@@ -35962,7 +35660,7 @@
         <p:spPr>
           <a:xfrm>
             <a:off x="1280160" y="457200"/>
-            <a:ext cx="10422720" cy="638640"/>
+            <a:ext cx="10422360" cy="638280"/>
           </a:xfrm>
           <a:prstGeom prst="rect">
             <a:avLst/>
@@ -36023,7 +35721,7 @@
         <p:spPr>
           <a:xfrm>
             <a:off x="457200" y="1554480"/>
-            <a:ext cx="3656160" cy="4662000"/>
+            <a:ext cx="3655800" cy="4661640"/>
           </a:xfrm>
           <a:prstGeom prst="roundRect">
             <a:avLst>
@@ -36068,7 +35766,7 @@
         <p:spPr>
           <a:xfrm>
             <a:off x="1508760" y="2194560"/>
-            <a:ext cx="1553040" cy="1553040"/>
+            <a:ext cx="1552680" cy="1552680"/>
           </a:xfrm>
           <a:prstGeom prst="ellipse">
             <a:avLst/>
@@ -36115,7 +35813,7 @@
         <p:spPr>
           <a:xfrm>
             <a:off x="1746360" y="2423160"/>
-            <a:ext cx="1086840" cy="1086840"/>
+            <a:ext cx="1086480" cy="1086480"/>
           </a:xfrm>
           <a:prstGeom prst="rect">
             <a:avLst/>
@@ -36135,7 +35833,7 @@
         <p:spPr>
           <a:xfrm>
             <a:off x="640080" y="3977640"/>
-            <a:ext cx="3290400" cy="1735920"/>
+            <a:ext cx="3290040" cy="1735560"/>
           </a:xfrm>
           <a:prstGeom prst="rect">
             <a:avLst/>
@@ -36256,7 +35954,7 @@
         <p:spPr>
           <a:xfrm>
             <a:off x="4572000" y="1737360"/>
-            <a:ext cx="7130880" cy="4113360"/>
+            <a:ext cx="7130520" cy="4113000"/>
           </a:xfrm>
           <a:prstGeom prst="rect">
             <a:avLst/>
@@ -36427,7 +36125,7 @@
         <p:spPr>
           <a:xfrm>
             <a:off x="457200" y="6446520"/>
-            <a:ext cx="7313760" cy="272880"/>
+            <a:ext cx="7313400" cy="272520"/>
           </a:xfrm>
           <a:prstGeom prst="rect">
             <a:avLst/>
@@ -36488,7 +36186,7 @@
         <p:spPr>
           <a:xfrm>
             <a:off x="11521440" y="6446520"/>
-            <a:ext cx="455760" cy="272880"/>
+            <a:ext cx="455400" cy="272520"/>
           </a:xfrm>
           <a:prstGeom prst="rect">
             <a:avLst/>
@@ -36586,7 +36284,7 @@
         <p:spPr>
           <a:xfrm>
             <a:off x="-1828800" y="5029200"/>
-            <a:ext cx="3656160" cy="3656160"/>
+            <a:ext cx="3655800" cy="3655800"/>
           </a:xfrm>
           <a:prstGeom prst="ellipse">
             <a:avLst/>
@@ -36629,7 +36327,7 @@
         <p:spPr>
           <a:xfrm>
             <a:off x="457200" y="457200"/>
-            <a:ext cx="638640" cy="638640"/>
+            <a:ext cx="638280" cy="638280"/>
           </a:xfrm>
           <a:prstGeom prst="ellipse">
             <a:avLst/>
@@ -36676,7 +36374,7 @@
         <p:spPr>
           <a:xfrm>
             <a:off x="548640" y="548640"/>
-            <a:ext cx="446760" cy="446760"/>
+            <a:ext cx="446400" cy="446400"/>
           </a:xfrm>
           <a:prstGeom prst="rect">
             <a:avLst/>
@@ -36696,7 +36394,7 @@
         <p:spPr>
           <a:xfrm>
             <a:off x="1280160" y="457200"/>
-            <a:ext cx="10422720" cy="638640"/>
+            <a:ext cx="10422360" cy="638280"/>
           </a:xfrm>
           <a:prstGeom prst="rect">
             <a:avLst/>
@@ -36757,7 +36455,7 @@
         <p:spPr>
           <a:xfrm>
             <a:off x="457200" y="1600200"/>
-            <a:ext cx="11273040" cy="4479120"/>
+            <a:ext cx="11272680" cy="4478760"/>
           </a:xfrm>
           <a:prstGeom prst="roundRect">
             <a:avLst>
@@ -36802,7 +36500,7 @@
         <p:spPr>
           <a:xfrm>
             <a:off x="822960" y="1828800"/>
-            <a:ext cx="10514160" cy="455760"/>
+            <a:ext cx="10513800" cy="455400"/>
           </a:xfrm>
           <a:prstGeom prst="rect">
             <a:avLst/>
@@ -36863,7 +36561,7 @@
         <p:spPr>
           <a:xfrm>
             <a:off x="822960" y="2423160"/>
-            <a:ext cx="382680" cy="382680"/>
+            <a:ext cx="382320" cy="382320"/>
           </a:xfrm>
           <a:prstGeom prst="ellipse">
             <a:avLst/>
@@ -36906,7 +36604,7 @@
         <p:spPr>
           <a:xfrm>
             <a:off x="822960" y="2423160"/>
-            <a:ext cx="382680" cy="382680"/>
+            <a:ext cx="382320" cy="382320"/>
           </a:xfrm>
           <a:prstGeom prst="rect">
             <a:avLst/>
@@ -36967,7 +36665,7 @@
         <p:spPr>
           <a:xfrm>
             <a:off x="1435680" y="2423160"/>
-            <a:ext cx="9581400" cy="382680"/>
+            <a:ext cx="9581040" cy="382320"/>
           </a:xfrm>
           <a:prstGeom prst="rect">
             <a:avLst/>
@@ -37028,7 +36726,7 @@
         <p:spPr>
           <a:xfrm>
             <a:off x="822960" y="3300840"/>
-            <a:ext cx="382680" cy="382680"/>
+            <a:ext cx="382320" cy="382320"/>
           </a:xfrm>
           <a:prstGeom prst="ellipse">
             <a:avLst/>
@@ -37071,7 +36769,7 @@
         <p:spPr>
           <a:xfrm>
             <a:off x="822960" y="3300840"/>
-            <a:ext cx="382680" cy="382680"/>
+            <a:ext cx="382320" cy="382320"/>
           </a:xfrm>
           <a:prstGeom prst="rect">
             <a:avLst/>
@@ -37132,7 +36830,7 @@
         <p:spPr>
           <a:xfrm>
             <a:off x="1435680" y="3300840"/>
-            <a:ext cx="9581400" cy="382680"/>
+            <a:ext cx="9581040" cy="382320"/>
           </a:xfrm>
           <a:prstGeom prst="rect">
             <a:avLst/>
@@ -37193,7 +36891,7 @@
         <p:spPr>
           <a:xfrm>
             <a:off x="822960" y="4178880"/>
-            <a:ext cx="382680" cy="382680"/>
+            <a:ext cx="382320" cy="382320"/>
           </a:xfrm>
           <a:prstGeom prst="ellipse">
             <a:avLst/>
@@ -37236,7 +36934,7 @@
         <p:spPr>
           <a:xfrm>
             <a:off x="822960" y="4178880"/>
-            <a:ext cx="382680" cy="382680"/>
+            <a:ext cx="382320" cy="382320"/>
           </a:xfrm>
           <a:prstGeom prst="rect">
             <a:avLst/>
@@ -37297,7 +36995,7 @@
         <p:spPr>
           <a:xfrm>
             <a:off x="1435680" y="4178880"/>
-            <a:ext cx="9581400" cy="382680"/>
+            <a:ext cx="9581040" cy="382320"/>
           </a:xfrm>
           <a:prstGeom prst="rect">
             <a:avLst/>
@@ -37358,7 +37056,7 @@
         <p:spPr>
           <a:xfrm>
             <a:off x="457200" y="6446520"/>
-            <a:ext cx="7313760" cy="272880"/>
+            <a:ext cx="7313400" cy="272520"/>
           </a:xfrm>
           <a:prstGeom prst="rect">
             <a:avLst/>
@@ -37419,7 +37117,7 @@
         <p:spPr>
           <a:xfrm>
             <a:off x="11521440" y="6446520"/>
-            <a:ext cx="455760" cy="272880"/>
+            <a:ext cx="455400" cy="272520"/>
           </a:xfrm>
           <a:prstGeom prst="rect">
             <a:avLst/>
@@ -37517,7 +37215,7 @@
         <p:spPr>
           <a:xfrm>
             <a:off x="-1828800" y="4114800"/>
-            <a:ext cx="5484960" cy="5484960"/>
+            <a:ext cx="5484600" cy="5484600"/>
           </a:xfrm>
           <a:prstGeom prst="ellipse">
             <a:avLst/>
@@ -37560,7 +37258,7 @@
         <p:spPr>
           <a:xfrm>
             <a:off x="9601200" y="-2286000"/>
-            <a:ext cx="5484960" cy="5484960"/>
+            <a:ext cx="5484600" cy="5484600"/>
           </a:xfrm>
           <a:prstGeom prst="ellipse">
             <a:avLst/>
@@ -37603,7 +37301,7 @@
         <p:spPr>
           <a:xfrm>
             <a:off x="5596200" y="731520"/>
-            <a:ext cx="1004400" cy="1004400"/>
+            <a:ext cx="1004040" cy="1004040"/>
           </a:xfrm>
           <a:prstGeom prst="ellipse">
             <a:avLst/>
@@ -37650,7 +37348,7 @@
         <p:spPr>
           <a:xfrm>
             <a:off x="5742360" y="877680"/>
-            <a:ext cx="702720" cy="702720"/>
+            <a:ext cx="702360" cy="702360"/>
           </a:xfrm>
           <a:prstGeom prst="rect">
             <a:avLst/>
@@ -37670,7 +37368,7 @@
         <p:spPr>
           <a:xfrm>
             <a:off x="914400" y="1965960"/>
-            <a:ext cx="10358640" cy="364320"/>
+            <a:ext cx="10358280" cy="363960"/>
           </a:xfrm>
           <a:prstGeom prst="rect">
             <a:avLst/>
@@ -37731,7 +37429,7 @@
         <p:spPr>
           <a:xfrm>
             <a:off x="914400" y="2377440"/>
-            <a:ext cx="10358640" cy="2010240"/>
+            <a:ext cx="10358280" cy="2009880"/>
           </a:xfrm>
           <a:prstGeom prst="rect">
             <a:avLst/>
@@ -37792,7 +37490,7 @@
         <p:spPr>
           <a:xfrm>
             <a:off x="1463040" y="4572000"/>
-            <a:ext cx="9261360" cy="1095840"/>
+            <a:ext cx="9261000" cy="1095480"/>
           </a:xfrm>
           <a:prstGeom prst="rect">
             <a:avLst/>
@@ -37853,7 +37551,7 @@
         <p:spPr>
           <a:xfrm>
             <a:off x="11521440" y="6446520"/>
-            <a:ext cx="455760" cy="272880"/>
+            <a:ext cx="455400" cy="272520"/>
           </a:xfrm>
           <a:prstGeom prst="rect">
             <a:avLst/>
@@ -37951,7 +37649,7 @@
         <p:spPr>
           <a:xfrm>
             <a:off x="-1828800" y="5029200"/>
-            <a:ext cx="3656160" cy="3656160"/>
+            <a:ext cx="3655800" cy="3655800"/>
           </a:xfrm>
           <a:prstGeom prst="ellipse">
             <a:avLst/>
@@ -37994,7 +37692,7 @@
         <p:spPr>
           <a:xfrm>
             <a:off x="457200" y="457200"/>
-            <a:ext cx="638640" cy="638640"/>
+            <a:ext cx="638280" cy="638280"/>
           </a:xfrm>
           <a:prstGeom prst="ellipse">
             <a:avLst/>
@@ -38041,7 +37739,7 @@
         <p:spPr>
           <a:xfrm>
             <a:off x="548640" y="548640"/>
-            <a:ext cx="446760" cy="446760"/>
+            <a:ext cx="446400" cy="446400"/>
           </a:xfrm>
           <a:prstGeom prst="rect">
             <a:avLst/>
@@ -38061,7 +37759,7 @@
         <p:spPr>
           <a:xfrm>
             <a:off x="1280160" y="457200"/>
-            <a:ext cx="10422720" cy="638640"/>
+            <a:ext cx="10422360" cy="638280"/>
           </a:xfrm>
           <a:prstGeom prst="rect">
             <a:avLst/>
@@ -38122,7 +37820,7 @@
         <p:spPr>
           <a:xfrm>
             <a:off x="457200" y="1600200"/>
-            <a:ext cx="11273040" cy="4479120"/>
+            <a:ext cx="11272680" cy="4478760"/>
           </a:xfrm>
           <a:prstGeom prst="roundRect">
             <a:avLst>
@@ -38167,7 +37865,7 @@
         <p:spPr>
           <a:xfrm>
             <a:off x="822960" y="1828800"/>
-            <a:ext cx="10514160" cy="455760"/>
+            <a:ext cx="10513800" cy="455400"/>
           </a:xfrm>
           <a:prstGeom prst="rect">
             <a:avLst/>
@@ -38228,7 +37926,7 @@
         <p:spPr>
           <a:xfrm>
             <a:off x="822960" y="2423160"/>
-            <a:ext cx="401040" cy="401040"/>
+            <a:ext cx="400680" cy="400680"/>
           </a:xfrm>
           <a:prstGeom prst="ellipse">
             <a:avLst/>
@@ -38275,7 +37973,7 @@
         <p:spPr>
           <a:xfrm>
             <a:off x="887040" y="2487240"/>
-            <a:ext cx="281880" cy="281880"/>
+            <a:ext cx="281520" cy="281520"/>
           </a:xfrm>
           <a:prstGeom prst="rect">
             <a:avLst/>
@@ -38295,7 +37993,7 @@
         <p:spPr>
           <a:xfrm>
             <a:off x="1371600" y="2441520"/>
-            <a:ext cx="401040" cy="364320"/>
+            <a:ext cx="400680" cy="363960"/>
           </a:xfrm>
           <a:prstGeom prst="roundRect">
             <a:avLst>
@@ -38340,7 +38038,7 @@
         <p:spPr>
           <a:xfrm>
             <a:off x="1371600" y="2441520"/>
-            <a:ext cx="401040" cy="364320"/>
+            <a:ext cx="400680" cy="363960"/>
           </a:xfrm>
           <a:prstGeom prst="rect">
             <a:avLst/>
@@ -38401,7 +38099,7 @@
         <p:spPr>
           <a:xfrm>
             <a:off x="1920240" y="2423160"/>
-            <a:ext cx="9508320" cy="1004400"/>
+            <a:ext cx="9507960" cy="1004040"/>
           </a:xfrm>
           <a:prstGeom prst="rect">
             <a:avLst/>
@@ -38462,7 +38160,7 @@
         <p:spPr>
           <a:xfrm>
             <a:off x="822960" y="3593520"/>
-            <a:ext cx="401040" cy="401040"/>
+            <a:ext cx="400680" cy="400680"/>
           </a:xfrm>
           <a:prstGeom prst="ellipse">
             <a:avLst/>
@@ -38509,7 +38207,7 @@
         <p:spPr>
           <a:xfrm>
             <a:off x="887040" y="3657600"/>
-            <a:ext cx="281880" cy="281880"/>
+            <a:ext cx="281520" cy="281520"/>
           </a:xfrm>
           <a:prstGeom prst="rect">
             <a:avLst/>
@@ -38529,7 +38227,7 @@
         <p:spPr>
           <a:xfrm>
             <a:off x="1371600" y="3611880"/>
-            <a:ext cx="401040" cy="364320"/>
+            <a:ext cx="400680" cy="363960"/>
           </a:xfrm>
           <a:prstGeom prst="roundRect">
             <a:avLst>
@@ -38574,7 +38272,7 @@
         <p:spPr>
           <a:xfrm>
             <a:off x="1371600" y="3611880"/>
-            <a:ext cx="401040" cy="364320"/>
+            <a:ext cx="400680" cy="363960"/>
           </a:xfrm>
           <a:prstGeom prst="rect">
             <a:avLst/>
@@ -38635,7 +38333,7 @@
         <p:spPr>
           <a:xfrm>
             <a:off x="1920240" y="3593520"/>
-            <a:ext cx="9508320" cy="1004400"/>
+            <a:ext cx="9507960" cy="1004040"/>
           </a:xfrm>
           <a:prstGeom prst="rect">
             <a:avLst/>
@@ -38696,7 +38394,7 @@
         <p:spPr>
           <a:xfrm>
             <a:off x="822960" y="4763880"/>
-            <a:ext cx="401040" cy="401040"/>
+            <a:ext cx="400680" cy="400680"/>
           </a:xfrm>
           <a:prstGeom prst="ellipse">
             <a:avLst/>
@@ -38743,7 +38441,7 @@
         <p:spPr>
           <a:xfrm>
             <a:off x="887040" y="4827960"/>
-            <a:ext cx="281880" cy="281880"/>
+            <a:ext cx="281520" cy="281520"/>
           </a:xfrm>
           <a:prstGeom prst="rect">
             <a:avLst/>
@@ -38763,7 +38461,7 @@
         <p:spPr>
           <a:xfrm>
             <a:off x="1371600" y="4782240"/>
-            <a:ext cx="401040" cy="364320"/>
+            <a:ext cx="400680" cy="363960"/>
           </a:xfrm>
           <a:prstGeom prst="roundRect">
             <a:avLst>
@@ -38808,7 +38506,7 @@
         <p:spPr>
           <a:xfrm>
             <a:off x="1371600" y="4782240"/>
-            <a:ext cx="401040" cy="364320"/>
+            <a:ext cx="400680" cy="363960"/>
           </a:xfrm>
           <a:prstGeom prst="rect">
             <a:avLst/>
@@ -38869,7 +38567,7 @@
         <p:spPr>
           <a:xfrm>
             <a:off x="1920240" y="4763880"/>
-            <a:ext cx="9508320" cy="1004400"/>
+            <a:ext cx="9507960" cy="1004040"/>
           </a:xfrm>
           <a:prstGeom prst="rect">
             <a:avLst/>
@@ -38930,7 +38628,7 @@
         <p:spPr>
           <a:xfrm>
             <a:off x="457200" y="6446520"/>
-            <a:ext cx="7313760" cy="272880"/>
+            <a:ext cx="7313400" cy="272520"/>
           </a:xfrm>
           <a:prstGeom prst="rect">
             <a:avLst/>
@@ -38991,7 +38689,7 @@
         <p:spPr>
           <a:xfrm>
             <a:off x="11521440" y="6446520"/>
-            <a:ext cx="455760" cy="272880"/>
+            <a:ext cx="455400" cy="272520"/>
           </a:xfrm>
           <a:prstGeom prst="rect">
             <a:avLst/>
@@ -39089,7 +38787,7 @@
         <p:spPr>
           <a:xfrm>
             <a:off x="-1828800" y="5029200"/>
-            <a:ext cx="3656160" cy="3656160"/>
+            <a:ext cx="3655800" cy="3655800"/>
           </a:xfrm>
           <a:prstGeom prst="ellipse">
             <a:avLst/>
@@ -39132,7 +38830,7 @@
         <p:spPr>
           <a:xfrm>
             <a:off x="457200" y="457200"/>
-            <a:ext cx="638640" cy="638640"/>
+            <a:ext cx="638280" cy="638280"/>
           </a:xfrm>
           <a:prstGeom prst="ellipse">
             <a:avLst/>
@@ -39179,7 +38877,7 @@
         <p:spPr>
           <a:xfrm>
             <a:off x="548640" y="548640"/>
-            <a:ext cx="446760" cy="446760"/>
+            <a:ext cx="446400" cy="446400"/>
           </a:xfrm>
           <a:prstGeom prst="rect">
             <a:avLst/>
@@ -39199,7 +38897,7 @@
         <p:spPr>
           <a:xfrm>
             <a:off x="1280160" y="457200"/>
-            <a:ext cx="10422720" cy="638640"/>
+            <a:ext cx="10422360" cy="638280"/>
           </a:xfrm>
           <a:prstGeom prst="rect">
             <a:avLst/>
@@ -39260,7 +38958,7 @@
         <p:spPr>
           <a:xfrm>
             <a:off x="457200" y="1600200"/>
-            <a:ext cx="11273040" cy="4479120"/>
+            <a:ext cx="11272680" cy="4478760"/>
           </a:xfrm>
           <a:prstGeom prst="roundRect">
             <a:avLst>
@@ -39305,7 +39003,7 @@
         <p:spPr>
           <a:xfrm>
             <a:off x="822960" y="1828800"/>
-            <a:ext cx="10514160" cy="455760"/>
+            <a:ext cx="10513800" cy="455400"/>
           </a:xfrm>
           <a:prstGeom prst="rect">
             <a:avLst/>
@@ -39366,7 +39064,7 @@
         <p:spPr>
           <a:xfrm>
             <a:off x="822960" y="2423160"/>
-            <a:ext cx="401040" cy="401040"/>
+            <a:ext cx="400680" cy="400680"/>
           </a:xfrm>
           <a:prstGeom prst="ellipse">
             <a:avLst/>
@@ -39413,7 +39111,7 @@
         <p:spPr>
           <a:xfrm>
             <a:off x="887040" y="2487240"/>
-            <a:ext cx="281880" cy="281880"/>
+            <a:ext cx="281520" cy="281520"/>
           </a:xfrm>
           <a:prstGeom prst="rect">
             <a:avLst/>
@@ -39433,7 +39131,7 @@
         <p:spPr>
           <a:xfrm>
             <a:off x="1371600" y="2441520"/>
-            <a:ext cx="401040" cy="364320"/>
+            <a:ext cx="400680" cy="363960"/>
           </a:xfrm>
           <a:prstGeom prst="roundRect">
             <a:avLst>
@@ -39478,7 +39176,7 @@
         <p:spPr>
           <a:xfrm>
             <a:off x="1371600" y="2441520"/>
-            <a:ext cx="401040" cy="364320"/>
+            <a:ext cx="400680" cy="363960"/>
           </a:xfrm>
           <a:prstGeom prst="rect">
             <a:avLst/>
@@ -39539,7 +39237,7 @@
         <p:spPr>
           <a:xfrm>
             <a:off x="1920240" y="2423160"/>
-            <a:ext cx="9508320" cy="1004400"/>
+            <a:ext cx="9507960" cy="1004040"/>
           </a:xfrm>
           <a:prstGeom prst="rect">
             <a:avLst/>
@@ -39600,7 +39298,7 @@
         <p:spPr>
           <a:xfrm>
             <a:off x="822960" y="3593520"/>
-            <a:ext cx="401040" cy="401040"/>
+            <a:ext cx="400680" cy="400680"/>
           </a:xfrm>
           <a:prstGeom prst="ellipse">
             <a:avLst/>
@@ -39647,7 +39345,7 @@
         <p:spPr>
           <a:xfrm>
             <a:off x="887040" y="3657600"/>
-            <a:ext cx="281880" cy="281880"/>
+            <a:ext cx="281520" cy="281520"/>
           </a:xfrm>
           <a:prstGeom prst="rect">
             <a:avLst/>
@@ -39667,7 +39365,7 @@
         <p:spPr>
           <a:xfrm>
             <a:off x="1371600" y="3611880"/>
-            <a:ext cx="401040" cy="364320"/>
+            <a:ext cx="400680" cy="363960"/>
           </a:xfrm>
           <a:prstGeom prst="roundRect">
             <a:avLst>
@@ -39712,7 +39410,7 @@
         <p:spPr>
           <a:xfrm>
             <a:off x="1371600" y="3611880"/>
-            <a:ext cx="401040" cy="364320"/>
+            <a:ext cx="400680" cy="363960"/>
           </a:xfrm>
           <a:prstGeom prst="rect">
             <a:avLst/>
@@ -39773,7 +39471,7 @@
         <p:spPr>
           <a:xfrm>
             <a:off x="1920240" y="3593520"/>
-            <a:ext cx="9508320" cy="1004400"/>
+            <a:ext cx="9507960" cy="1004040"/>
           </a:xfrm>
           <a:prstGeom prst="rect">
             <a:avLst/>
@@ -39834,7 +39532,7 @@
         <p:spPr>
           <a:xfrm>
             <a:off x="822960" y="4763880"/>
-            <a:ext cx="401040" cy="401040"/>
+            <a:ext cx="400680" cy="400680"/>
           </a:xfrm>
           <a:prstGeom prst="ellipse">
             <a:avLst/>
@@ -39881,7 +39579,7 @@
         <p:spPr>
           <a:xfrm>
             <a:off x="887040" y="4827960"/>
-            <a:ext cx="281880" cy="281880"/>
+            <a:ext cx="281520" cy="281520"/>
           </a:xfrm>
           <a:prstGeom prst="rect">
             <a:avLst/>
@@ -39901,7 +39599,7 @@
         <p:spPr>
           <a:xfrm>
             <a:off x="1371600" y="4782240"/>
-            <a:ext cx="401040" cy="364320"/>
+            <a:ext cx="400680" cy="363960"/>
           </a:xfrm>
           <a:prstGeom prst="roundRect">
             <a:avLst>
@@ -39946,7 +39644,7 @@
         <p:spPr>
           <a:xfrm>
             <a:off x="1371600" y="4782240"/>
-            <a:ext cx="401040" cy="364320"/>
+            <a:ext cx="400680" cy="363960"/>
           </a:xfrm>
           <a:prstGeom prst="rect">
             <a:avLst/>
@@ -40007,7 +39705,7 @@
         <p:spPr>
           <a:xfrm>
             <a:off x="1920240" y="4763880"/>
-            <a:ext cx="9508320" cy="1004400"/>
+            <a:ext cx="9507960" cy="1004040"/>
           </a:xfrm>
           <a:prstGeom prst="rect">
             <a:avLst/>
@@ -40068,7 +39766,7 @@
         <p:spPr>
           <a:xfrm>
             <a:off x="457200" y="6446520"/>
-            <a:ext cx="7313760" cy="272880"/>
+            <a:ext cx="7313400" cy="272520"/>
           </a:xfrm>
           <a:prstGeom prst="rect">
             <a:avLst/>
@@ -40129,7 +39827,7 @@
         <p:spPr>
           <a:xfrm>
             <a:off x="11521440" y="6446520"/>
-            <a:ext cx="455760" cy="272880"/>
+            <a:ext cx="455400" cy="272520"/>
           </a:xfrm>
           <a:prstGeom prst="rect">
             <a:avLst/>
@@ -40227,7 +39925,7 @@
         <p:spPr>
           <a:xfrm>
             <a:off x="-1828800" y="5029200"/>
-            <a:ext cx="3656160" cy="3656160"/>
+            <a:ext cx="3655800" cy="3655800"/>
           </a:xfrm>
           <a:prstGeom prst="ellipse">
             <a:avLst/>
@@ -40270,7 +39968,7 @@
         <p:spPr>
           <a:xfrm>
             <a:off x="457200" y="457200"/>
-            <a:ext cx="638640" cy="638640"/>
+            <a:ext cx="638280" cy="638280"/>
           </a:xfrm>
           <a:prstGeom prst="ellipse">
             <a:avLst/>
@@ -40317,7 +40015,7 @@
         <p:spPr>
           <a:xfrm>
             <a:off x="548640" y="548640"/>
-            <a:ext cx="446760" cy="446760"/>
+            <a:ext cx="446400" cy="446400"/>
           </a:xfrm>
           <a:prstGeom prst="rect">
             <a:avLst/>
@@ -40337,7 +40035,7 @@
         <p:spPr>
           <a:xfrm>
             <a:off x="1280160" y="457200"/>
-            <a:ext cx="10422720" cy="638640"/>
+            <a:ext cx="10422360" cy="638280"/>
           </a:xfrm>
           <a:prstGeom prst="rect">
             <a:avLst/>
@@ -40398,7 +40096,7 @@
         <p:spPr>
           <a:xfrm>
             <a:off x="457200" y="1600200"/>
-            <a:ext cx="11273040" cy="4479120"/>
+            <a:ext cx="11272680" cy="4478760"/>
           </a:xfrm>
           <a:prstGeom prst="roundRect">
             <a:avLst>
@@ -40443,7 +40141,7 @@
         <p:spPr>
           <a:xfrm>
             <a:off x="822960" y="1828800"/>
-            <a:ext cx="10514160" cy="455760"/>
+            <a:ext cx="10513800" cy="455400"/>
           </a:xfrm>
           <a:prstGeom prst="rect">
             <a:avLst/>
@@ -40504,7 +40202,7 @@
         <p:spPr>
           <a:xfrm>
             <a:off x="822960" y="2423160"/>
-            <a:ext cx="401040" cy="401040"/>
+            <a:ext cx="400680" cy="400680"/>
           </a:xfrm>
           <a:prstGeom prst="ellipse">
             <a:avLst/>
@@ -40551,7 +40249,7 @@
         <p:spPr>
           <a:xfrm>
             <a:off x="887040" y="2487240"/>
-            <a:ext cx="281880" cy="281880"/>
+            <a:ext cx="281520" cy="281520"/>
           </a:xfrm>
           <a:prstGeom prst="rect">
             <a:avLst/>
@@ -40571,7 +40269,7 @@
         <p:spPr>
           <a:xfrm>
             <a:off x="1371600" y="2441520"/>
-            <a:ext cx="401040" cy="364320"/>
+            <a:ext cx="400680" cy="363960"/>
           </a:xfrm>
           <a:prstGeom prst="roundRect">
             <a:avLst>
@@ -40616,7 +40314,7 @@
         <p:spPr>
           <a:xfrm>
             <a:off x="1371600" y="2441520"/>
-            <a:ext cx="401040" cy="364320"/>
+            <a:ext cx="400680" cy="363960"/>
           </a:xfrm>
           <a:prstGeom prst="rect">
             <a:avLst/>
@@ -40677,7 +40375,7 @@
         <p:spPr>
           <a:xfrm>
             <a:off x="1920240" y="2423160"/>
-            <a:ext cx="9508320" cy="1004400"/>
+            <a:ext cx="9507960" cy="1004040"/>
           </a:xfrm>
           <a:prstGeom prst="rect">
             <a:avLst/>
@@ -40738,7 +40436,7 @@
         <p:spPr>
           <a:xfrm>
             <a:off x="822960" y="3593520"/>
-            <a:ext cx="401040" cy="401040"/>
+            <a:ext cx="400680" cy="400680"/>
           </a:xfrm>
           <a:prstGeom prst="ellipse">
             <a:avLst/>
@@ -40785,7 +40483,7 @@
         <p:spPr>
           <a:xfrm>
             <a:off x="887040" y="3657600"/>
-            <a:ext cx="281880" cy="281880"/>
+            <a:ext cx="281520" cy="281520"/>
           </a:xfrm>
           <a:prstGeom prst="rect">
             <a:avLst/>
@@ -40805,7 +40503,7 @@
         <p:spPr>
           <a:xfrm>
             <a:off x="1371600" y="3611880"/>
-            <a:ext cx="401040" cy="364320"/>
+            <a:ext cx="400680" cy="363960"/>
           </a:xfrm>
           <a:prstGeom prst="roundRect">
             <a:avLst>
@@ -40850,7 +40548,7 @@
         <p:spPr>
           <a:xfrm>
             <a:off x="1371600" y="3611880"/>
-            <a:ext cx="401040" cy="364320"/>
+            <a:ext cx="400680" cy="363960"/>
           </a:xfrm>
           <a:prstGeom prst="rect">
             <a:avLst/>
@@ -40911,7 +40609,7 @@
         <p:spPr>
           <a:xfrm>
             <a:off x="1920240" y="3593520"/>
-            <a:ext cx="9508320" cy="1004400"/>
+            <a:ext cx="9507960" cy="1004040"/>
           </a:xfrm>
           <a:prstGeom prst="rect">
             <a:avLst/>
@@ -40972,7 +40670,7 @@
         <p:spPr>
           <a:xfrm>
             <a:off x="822960" y="4763880"/>
-            <a:ext cx="401040" cy="401040"/>
+            <a:ext cx="400680" cy="400680"/>
           </a:xfrm>
           <a:prstGeom prst="ellipse">
             <a:avLst/>
@@ -41019,7 +40717,7 @@
         <p:spPr>
           <a:xfrm>
             <a:off x="887040" y="4827960"/>
-            <a:ext cx="281880" cy="281880"/>
+            <a:ext cx="281520" cy="281520"/>
           </a:xfrm>
           <a:prstGeom prst="rect">
             <a:avLst/>
@@ -41039,7 +40737,7 @@
         <p:spPr>
           <a:xfrm>
             <a:off x="1371600" y="4782240"/>
-            <a:ext cx="401040" cy="364320"/>
+            <a:ext cx="400680" cy="363960"/>
           </a:xfrm>
           <a:prstGeom prst="roundRect">
             <a:avLst>
@@ -41084,7 +40782,7 @@
         <p:spPr>
           <a:xfrm>
             <a:off x="1371600" y="4782240"/>
-            <a:ext cx="401040" cy="364320"/>
+            <a:ext cx="400680" cy="363960"/>
           </a:xfrm>
           <a:prstGeom prst="rect">
             <a:avLst/>
@@ -41145,7 +40843,7 @@
         <p:spPr>
           <a:xfrm>
             <a:off x="1920240" y="4763880"/>
-            <a:ext cx="9508320" cy="1004400"/>
+            <a:ext cx="9507960" cy="1004040"/>
           </a:xfrm>
           <a:prstGeom prst="rect">
             <a:avLst/>
@@ -41206,7 +40904,7 @@
         <p:spPr>
           <a:xfrm>
             <a:off x="457200" y="6446520"/>
-            <a:ext cx="7313760" cy="272880"/>
+            <a:ext cx="7313400" cy="272520"/>
           </a:xfrm>
           <a:prstGeom prst="rect">
             <a:avLst/>
@@ -41267,7 +40965,7 @@
         <p:spPr>
           <a:xfrm>
             <a:off x="11521440" y="6446520"/>
-            <a:ext cx="455760" cy="272880"/>
+            <a:ext cx="455400" cy="272520"/>
           </a:xfrm>
           <a:prstGeom prst="rect">
             <a:avLst/>
@@ -41365,7 +41063,7 @@
         <p:spPr>
           <a:xfrm>
             <a:off x="-1828800" y="4114800"/>
-            <a:ext cx="5484960" cy="5484960"/>
+            <a:ext cx="5484600" cy="5484600"/>
           </a:xfrm>
           <a:prstGeom prst="ellipse">
             <a:avLst/>
@@ -41408,7 +41106,7 @@
         <p:spPr>
           <a:xfrm>
             <a:off x="9601200" y="-2286000"/>
-            <a:ext cx="5484960" cy="5484960"/>
+            <a:ext cx="5484600" cy="5484600"/>
           </a:xfrm>
           <a:prstGeom prst="ellipse">
             <a:avLst/>
@@ -41451,7 +41149,7 @@
         <p:spPr>
           <a:xfrm>
             <a:off x="5596200" y="731520"/>
-            <a:ext cx="1004400" cy="1004400"/>
+            <a:ext cx="1004040" cy="1004040"/>
           </a:xfrm>
           <a:prstGeom prst="ellipse">
             <a:avLst/>
@@ -41498,7 +41196,7 @@
         <p:spPr>
           <a:xfrm>
             <a:off x="5742360" y="877680"/>
-            <a:ext cx="702720" cy="702720"/>
+            <a:ext cx="702360" cy="702360"/>
           </a:xfrm>
           <a:prstGeom prst="rect">
             <a:avLst/>
@@ -41518,7 +41216,7 @@
         <p:spPr>
           <a:xfrm>
             <a:off x="914400" y="1965960"/>
-            <a:ext cx="10358640" cy="364320"/>
+            <a:ext cx="10358280" cy="363960"/>
           </a:xfrm>
           <a:prstGeom prst="rect">
             <a:avLst/>
@@ -41579,7 +41277,7 @@
         <p:spPr>
           <a:xfrm>
             <a:off x="914400" y="2377440"/>
-            <a:ext cx="10358640" cy="2010240"/>
+            <a:ext cx="10358280" cy="2009880"/>
           </a:xfrm>
           <a:prstGeom prst="rect">
             <a:avLst/>
@@ -41640,7 +41338,7 @@
         <p:spPr>
           <a:xfrm>
             <a:off x="1463040" y="4572000"/>
-            <a:ext cx="9261360" cy="1095840"/>
+            <a:ext cx="9261000" cy="1095480"/>
           </a:xfrm>
           <a:prstGeom prst="rect">
             <a:avLst/>
@@ -41701,7 +41399,7 @@
         <p:spPr>
           <a:xfrm>
             <a:off x="11521440" y="6446520"/>
-            <a:ext cx="455760" cy="272880"/>
+            <a:ext cx="455400" cy="272520"/>
           </a:xfrm>
           <a:prstGeom prst="rect">
             <a:avLst/>
@@ -41799,7 +41497,7 @@
         <p:spPr>
           <a:xfrm>
             <a:off x="10515600" y="5669280"/>
-            <a:ext cx="3198960" cy="3198960"/>
+            <a:ext cx="3198600" cy="3198600"/>
           </a:xfrm>
           <a:prstGeom prst="roundRect">
             <a:avLst>
@@ -41844,7 +41542,7 @@
         <p:spPr>
           <a:xfrm>
             <a:off x="457200" y="457200"/>
-            <a:ext cx="638640" cy="638640"/>
+            <a:ext cx="638280" cy="638280"/>
           </a:xfrm>
           <a:prstGeom prst="ellipse">
             <a:avLst/>
@@ -41891,7 +41589,7 @@
         <p:spPr>
           <a:xfrm>
             <a:off x="548640" y="548640"/>
-            <a:ext cx="446760" cy="446760"/>
+            <a:ext cx="446400" cy="446400"/>
           </a:xfrm>
           <a:prstGeom prst="rect">
             <a:avLst/>
@@ -41911,7 +41609,7 @@
         <p:spPr>
           <a:xfrm>
             <a:off x="1280160" y="457200"/>
-            <a:ext cx="10422720" cy="638640"/>
+            <a:ext cx="10422360" cy="638280"/>
           </a:xfrm>
           <a:prstGeom prst="rect">
             <a:avLst/>
@@ -41972,7 +41670,7 @@
         <p:spPr>
           <a:xfrm>
             <a:off x="457200" y="1554480"/>
-            <a:ext cx="3656160" cy="4662000"/>
+            <a:ext cx="3655800" cy="4661640"/>
           </a:xfrm>
           <a:prstGeom prst="roundRect">
             <a:avLst>
@@ -42017,7 +41715,7 @@
         <p:spPr>
           <a:xfrm>
             <a:off x="1508760" y="2194560"/>
-            <a:ext cx="1553040" cy="1553040"/>
+            <a:ext cx="1552680" cy="1552680"/>
           </a:xfrm>
           <a:prstGeom prst="ellipse">
             <a:avLst/>
@@ -42064,7 +41762,7 @@
         <p:spPr>
           <a:xfrm>
             <a:off x="1746360" y="2423160"/>
-            <a:ext cx="1086840" cy="1086840"/>
+            <a:ext cx="1086480" cy="1086480"/>
           </a:xfrm>
           <a:prstGeom prst="rect">
             <a:avLst/>
@@ -42084,7 +41782,7 @@
         <p:spPr>
           <a:xfrm>
             <a:off x="640080" y="3977640"/>
-            <a:ext cx="3290400" cy="1735920"/>
+            <a:ext cx="3290040" cy="1735560"/>
           </a:xfrm>
           <a:prstGeom prst="rect">
             <a:avLst/>
@@ -42205,7 +41903,7 @@
         <p:spPr>
           <a:xfrm>
             <a:off x="4572000" y="1737360"/>
-            <a:ext cx="7130880" cy="4113360"/>
+            <a:ext cx="7130520" cy="4113000"/>
           </a:xfrm>
           <a:prstGeom prst="rect">
             <a:avLst/>
@@ -42376,7 +42074,7 @@
         <p:spPr>
           <a:xfrm>
             <a:off x="457200" y="6446520"/>
-            <a:ext cx="7313760" cy="272880"/>
+            <a:ext cx="7313400" cy="272520"/>
           </a:xfrm>
           <a:prstGeom prst="rect">
             <a:avLst/>
@@ -42437,7 +42135,7 @@
         <p:spPr>
           <a:xfrm>
             <a:off x="11521440" y="6446520"/>
-            <a:ext cx="455760" cy="272880"/>
+            <a:ext cx="455400" cy="272520"/>
           </a:xfrm>
           <a:prstGeom prst="rect">
             <a:avLst/>
@@ -42535,7 +42233,7 @@
         <p:spPr>
           <a:xfrm>
             <a:off x="10515600" y="5669280"/>
-            <a:ext cx="3198960" cy="3198960"/>
+            <a:ext cx="3198600" cy="3198600"/>
           </a:xfrm>
           <a:prstGeom prst="roundRect">
             <a:avLst>
@@ -42580,7 +42278,7 @@
         <p:spPr>
           <a:xfrm>
             <a:off x="457200" y="457200"/>
-            <a:ext cx="638640" cy="638640"/>
+            <a:ext cx="638280" cy="638280"/>
           </a:xfrm>
           <a:prstGeom prst="ellipse">
             <a:avLst/>
@@ -42627,7 +42325,7 @@
         <p:spPr>
           <a:xfrm>
             <a:off x="548640" y="548640"/>
-            <a:ext cx="446760" cy="446760"/>
+            <a:ext cx="446400" cy="446400"/>
           </a:xfrm>
           <a:prstGeom prst="rect">
             <a:avLst/>
@@ -42647,7 +42345,7 @@
         <p:spPr>
           <a:xfrm>
             <a:off x="1280160" y="457200"/>
-            <a:ext cx="10422720" cy="638640"/>
+            <a:ext cx="10422360" cy="638280"/>
           </a:xfrm>
           <a:prstGeom prst="rect">
             <a:avLst/>
@@ -42708,7 +42406,7 @@
         <p:spPr>
           <a:xfrm>
             <a:off x="457200" y="1554480"/>
-            <a:ext cx="3656160" cy="4662000"/>
+            <a:ext cx="3655800" cy="4661640"/>
           </a:xfrm>
           <a:prstGeom prst="roundRect">
             <a:avLst>
@@ -42753,7 +42451,7 @@
         <p:spPr>
           <a:xfrm>
             <a:off x="1508760" y="2194560"/>
-            <a:ext cx="1553040" cy="1553040"/>
+            <a:ext cx="1552680" cy="1552680"/>
           </a:xfrm>
           <a:prstGeom prst="ellipse">
             <a:avLst/>
@@ -42800,7 +42498,7 @@
         <p:spPr>
           <a:xfrm>
             <a:off x="1746360" y="2423160"/>
-            <a:ext cx="1086840" cy="1086840"/>
+            <a:ext cx="1086480" cy="1086480"/>
           </a:xfrm>
           <a:prstGeom prst="rect">
             <a:avLst/>
@@ -42820,7 +42518,7 @@
         <p:spPr>
           <a:xfrm>
             <a:off x="640080" y="3977640"/>
-            <a:ext cx="3290400" cy="1735920"/>
+            <a:ext cx="3290040" cy="1735560"/>
           </a:xfrm>
           <a:prstGeom prst="rect">
             <a:avLst/>
@@ -42941,7 +42639,7 @@
         <p:spPr>
           <a:xfrm>
             <a:off x="4572000" y="1737360"/>
-            <a:ext cx="7130880" cy="4113360"/>
+            <a:ext cx="7130520" cy="4113000"/>
           </a:xfrm>
           <a:prstGeom prst="rect">
             <a:avLst/>
@@ -43112,7 +42810,7 @@
         <p:spPr>
           <a:xfrm>
             <a:off x="457200" y="6446520"/>
-            <a:ext cx="7313760" cy="272880"/>
+            <a:ext cx="7313400" cy="272520"/>
           </a:xfrm>
           <a:prstGeom prst="rect">
             <a:avLst/>
@@ -43173,7 +42871,7 @@
         <p:spPr>
           <a:xfrm>
             <a:off x="11521440" y="6446520"/>
-            <a:ext cx="455760" cy="272880"/>
+            <a:ext cx="455400" cy="272520"/>
           </a:xfrm>
           <a:prstGeom prst="rect">
             <a:avLst/>
@@ -43271,7 +42969,7 @@
         <p:spPr>
           <a:xfrm>
             <a:off x="-1828800" y="4114800"/>
-            <a:ext cx="5484960" cy="5484960"/>
+            <a:ext cx="5484600" cy="5484600"/>
           </a:xfrm>
           <a:prstGeom prst="ellipse">
             <a:avLst/>
@@ -43314,7 +43012,7 @@
         <p:spPr>
           <a:xfrm>
             <a:off x="9601200" y="-2286000"/>
-            <a:ext cx="5484960" cy="5484960"/>
+            <a:ext cx="5484600" cy="5484600"/>
           </a:xfrm>
           <a:prstGeom prst="ellipse">
             <a:avLst/>
@@ -43357,7 +43055,7 @@
         <p:spPr>
           <a:xfrm>
             <a:off x="5596200" y="731520"/>
-            <a:ext cx="1004400" cy="1004400"/>
+            <a:ext cx="1004040" cy="1004040"/>
           </a:xfrm>
           <a:prstGeom prst="ellipse">
             <a:avLst/>
@@ -43404,7 +43102,7 @@
         <p:spPr>
           <a:xfrm>
             <a:off x="5742360" y="877680"/>
-            <a:ext cx="702720" cy="702720"/>
+            <a:ext cx="702360" cy="702360"/>
           </a:xfrm>
           <a:prstGeom prst="rect">
             <a:avLst/>
@@ -43424,7 +43122,7 @@
         <p:spPr>
           <a:xfrm>
             <a:off x="914400" y="1965960"/>
-            <a:ext cx="10358640" cy="364320"/>
+            <a:ext cx="10358280" cy="363960"/>
           </a:xfrm>
           <a:prstGeom prst="rect">
             <a:avLst/>
@@ -43485,7 +43183,7 @@
         <p:spPr>
           <a:xfrm>
             <a:off x="914400" y="2377440"/>
-            <a:ext cx="10358640" cy="2010240"/>
+            <a:ext cx="10358280" cy="2009880"/>
           </a:xfrm>
           <a:prstGeom prst="rect">
             <a:avLst/>
@@ -43546,7 +43244,7 @@
         <p:spPr>
           <a:xfrm>
             <a:off x="1463040" y="4572000"/>
-            <a:ext cx="9261360" cy="1095840"/>
+            <a:ext cx="9261000" cy="1095480"/>
           </a:xfrm>
           <a:prstGeom prst="rect">
             <a:avLst/>
@@ -43607,7 +43305,7 @@
         <p:spPr>
           <a:xfrm>
             <a:off x="11521440" y="6446520"/>
-            <a:ext cx="455760" cy="272880"/>
+            <a:ext cx="455400" cy="272520"/>
           </a:xfrm>
           <a:prstGeom prst="rect">
             <a:avLst/>
@@ -43705,7 +43403,7 @@
         <p:spPr>
           <a:xfrm>
             <a:off x="457200" y="457200"/>
-            <a:ext cx="638640" cy="638640"/>
+            <a:ext cx="638280" cy="638280"/>
           </a:xfrm>
           <a:prstGeom prst="ellipse">
             <a:avLst/>
@@ -43752,7 +43450,7 @@
         <p:spPr>
           <a:xfrm>
             <a:off x="548640" y="548640"/>
-            <a:ext cx="446760" cy="446760"/>
+            <a:ext cx="446400" cy="446400"/>
           </a:xfrm>
           <a:prstGeom prst="rect">
             <a:avLst/>
@@ -43772,7 +43470,7 @@
         <p:spPr>
           <a:xfrm>
             <a:off x="1280160" y="457200"/>
-            <a:ext cx="10422720" cy="638640"/>
+            <a:ext cx="10422360" cy="638280"/>
           </a:xfrm>
           <a:prstGeom prst="rect">
             <a:avLst/>
@@ -43833,7 +43531,7 @@
         <p:spPr>
           <a:xfrm>
             <a:off x="548640" y="1828800"/>
-            <a:ext cx="4753440" cy="4021920"/>
+            <a:ext cx="4753080" cy="4021560"/>
           </a:xfrm>
           <a:prstGeom prst="rect">
             <a:avLst/>
@@ -43969,7 +43667,7 @@
         <p:spPr>
           <a:xfrm>
             <a:off x="5486400" y="1691640"/>
-            <a:ext cx="6216480" cy="4341960"/>
+            <a:ext cx="6216120" cy="4341600"/>
           </a:xfrm>
           <a:prstGeom prst="roundRect">
             <a:avLst>
@@ -44014,7 +43712,7 @@
         <p:spPr>
           <a:xfrm>
             <a:off x="5806440" y="1965960"/>
-            <a:ext cx="5576400" cy="3793320"/>
+            <a:ext cx="5576040" cy="3792960"/>
           </a:xfrm>
           <a:prstGeom prst="rect">
             <a:avLst/>
@@ -44303,7 +44001,7 @@
         <p:spPr>
           <a:xfrm>
             <a:off x="457200" y="6446520"/>
-            <a:ext cx="7313760" cy="272880"/>
+            <a:ext cx="7313400" cy="272520"/>
           </a:xfrm>
           <a:prstGeom prst="rect">
             <a:avLst/>
@@ -44364,7 +44062,7 @@
         <p:spPr>
           <a:xfrm>
             <a:off x="11521440" y="6446520"/>
-            <a:ext cx="455760" cy="272880"/>
+            <a:ext cx="455400" cy="272520"/>
           </a:xfrm>
           <a:prstGeom prst="rect">
             <a:avLst/>
@@ -44462,7 +44160,7 @@
         <p:spPr>
           <a:xfrm>
             <a:off x="457200" y="457200"/>
-            <a:ext cx="638640" cy="638640"/>
+            <a:ext cx="638280" cy="638280"/>
           </a:xfrm>
           <a:prstGeom prst="ellipse">
             <a:avLst/>
@@ -44509,7 +44207,7 @@
         <p:spPr>
           <a:xfrm>
             <a:off x="548640" y="548640"/>
-            <a:ext cx="446760" cy="446760"/>
+            <a:ext cx="446400" cy="446400"/>
           </a:xfrm>
           <a:prstGeom prst="rect">
             <a:avLst/>
@@ -44529,7 +44227,7 @@
         <p:spPr>
           <a:xfrm>
             <a:off x="1280160" y="457200"/>
-            <a:ext cx="10422720" cy="638640"/>
+            <a:ext cx="10422360" cy="638280"/>
           </a:xfrm>
           <a:prstGeom prst="rect">
             <a:avLst/>
@@ -44590,7 +44288,7 @@
         <p:spPr>
           <a:xfrm>
             <a:off x="548640" y="1828800"/>
-            <a:ext cx="4753440" cy="4021920"/>
+            <a:ext cx="4753080" cy="4021560"/>
           </a:xfrm>
           <a:prstGeom prst="rect">
             <a:avLst/>
@@ -44726,7 +44424,7 @@
         <p:spPr>
           <a:xfrm>
             <a:off x="5486400" y="1691640"/>
-            <a:ext cx="6216480" cy="4341960"/>
+            <a:ext cx="6216120" cy="4341600"/>
           </a:xfrm>
           <a:prstGeom prst="roundRect">
             <a:avLst>
@@ -44771,7 +44469,7 @@
         <p:spPr>
           <a:xfrm>
             <a:off x="5806440" y="1965960"/>
-            <a:ext cx="5576400" cy="3793320"/>
+            <a:ext cx="5576040" cy="3792960"/>
           </a:xfrm>
           <a:prstGeom prst="rect">
             <a:avLst/>
@@ -45084,7 +44782,7 @@
         <p:spPr>
           <a:xfrm>
             <a:off x="457200" y="6446520"/>
-            <a:ext cx="7313760" cy="272880"/>
+            <a:ext cx="7313400" cy="272520"/>
           </a:xfrm>
           <a:prstGeom prst="rect">
             <a:avLst/>
@@ -45145,7 +44843,7 @@
         <p:spPr>
           <a:xfrm>
             <a:off x="11521440" y="6446520"/>
-            <a:ext cx="455760" cy="272880"/>
+            <a:ext cx="455400" cy="272520"/>
           </a:xfrm>
           <a:prstGeom prst="rect">
             <a:avLst/>
@@ -45243,7 +44941,7 @@
         <p:spPr>
           <a:xfrm>
             <a:off x="457200" y="457200"/>
-            <a:ext cx="638640" cy="638640"/>
+            <a:ext cx="638280" cy="638280"/>
           </a:xfrm>
           <a:prstGeom prst="ellipse">
             <a:avLst/>
@@ -45290,7 +44988,7 @@
         <p:spPr>
           <a:xfrm>
             <a:off x="548640" y="548640"/>
-            <a:ext cx="446760" cy="446760"/>
+            <a:ext cx="446400" cy="446400"/>
           </a:xfrm>
           <a:prstGeom prst="rect">
             <a:avLst/>
@@ -45310,7 +45008,7 @@
         <p:spPr>
           <a:xfrm>
             <a:off x="1280160" y="457200"/>
-            <a:ext cx="10422720" cy="638640"/>
+            <a:ext cx="10422360" cy="638280"/>
           </a:xfrm>
           <a:prstGeom prst="rect">
             <a:avLst/>
@@ -45371,7 +45069,7 @@
         <p:spPr>
           <a:xfrm>
             <a:off x="548640" y="1828800"/>
-            <a:ext cx="4753440" cy="4021920"/>
+            <a:ext cx="4753080" cy="4021560"/>
           </a:xfrm>
           <a:prstGeom prst="rect">
             <a:avLst/>
@@ -45507,7 +45205,7 @@
         <p:spPr>
           <a:xfrm>
             <a:off x="5486400" y="1691640"/>
-            <a:ext cx="6216480" cy="4341960"/>
+            <a:ext cx="6216120" cy="4341600"/>
           </a:xfrm>
           <a:prstGeom prst="roundRect">
             <a:avLst>
@@ -45552,7 +45250,7 @@
         <p:spPr>
           <a:xfrm>
             <a:off x="5806440" y="1965960"/>
-            <a:ext cx="5576400" cy="3793320"/>
+            <a:ext cx="5576040" cy="3792960"/>
           </a:xfrm>
           <a:prstGeom prst="rect">
             <a:avLst/>
@@ -45889,7 +45587,7 @@
         <p:spPr>
           <a:xfrm>
             <a:off x="457200" y="6446520"/>
-            <a:ext cx="7313760" cy="272880"/>
+            <a:ext cx="7313400" cy="272520"/>
           </a:xfrm>
           <a:prstGeom prst="rect">
             <a:avLst/>
@@ -45950,7 +45648,7 @@
         <p:spPr>
           <a:xfrm>
             <a:off x="11521440" y="6446520"/>
-            <a:ext cx="455760" cy="272880"/>
+            <a:ext cx="455400" cy="272520"/>
           </a:xfrm>
           <a:prstGeom prst="rect">
             <a:avLst/>
@@ -46048,7 +45746,7 @@
         <p:spPr>
           <a:xfrm>
             <a:off x="457200" y="457200"/>
-            <a:ext cx="638640" cy="638640"/>
+            <a:ext cx="638280" cy="638280"/>
           </a:xfrm>
           <a:prstGeom prst="ellipse">
             <a:avLst/>
@@ -46095,7 +45793,7 @@
         <p:spPr>
           <a:xfrm>
             <a:off x="548640" y="548640"/>
-            <a:ext cx="446760" cy="446760"/>
+            <a:ext cx="446400" cy="446400"/>
           </a:xfrm>
           <a:prstGeom prst="rect">
             <a:avLst/>
@@ -46115,7 +45813,7 @@
         <p:spPr>
           <a:xfrm>
             <a:off x="1280160" y="457200"/>
-            <a:ext cx="10422720" cy="638640"/>
+            <a:ext cx="10422360" cy="638280"/>
           </a:xfrm>
           <a:prstGeom prst="rect">
             <a:avLst/>
@@ -46176,7 +45874,7 @@
         <p:spPr>
           <a:xfrm>
             <a:off x="548640" y="1828800"/>
-            <a:ext cx="4753440" cy="4021920"/>
+            <a:ext cx="4753080" cy="4021560"/>
           </a:xfrm>
           <a:prstGeom prst="rect">
             <a:avLst/>
@@ -46312,7 +46010,7 @@
         <p:spPr>
           <a:xfrm>
             <a:off x="5486400" y="1691640"/>
-            <a:ext cx="6216480" cy="4341960"/>
+            <a:ext cx="6216120" cy="4341600"/>
           </a:xfrm>
           <a:prstGeom prst="roundRect">
             <a:avLst>
@@ -46357,7 +46055,7 @@
         <p:spPr>
           <a:xfrm>
             <a:off x="5806440" y="1965960"/>
-            <a:ext cx="5576400" cy="3793320"/>
+            <a:ext cx="5576040" cy="3792960"/>
           </a:xfrm>
           <a:prstGeom prst="rect">
             <a:avLst/>
@@ -46652,7 +46350,7 @@
         <p:spPr>
           <a:xfrm>
             <a:off x="457200" y="6446520"/>
-            <a:ext cx="7313760" cy="272880"/>
+            <a:ext cx="7313400" cy="272520"/>
           </a:xfrm>
           <a:prstGeom prst="rect">
             <a:avLst/>
@@ -46713,7 +46411,7 @@
         <p:spPr>
           <a:xfrm>
             <a:off x="11521440" y="6446520"/>
-            <a:ext cx="455760" cy="272880"/>
+            <a:ext cx="455400" cy="272520"/>
           </a:xfrm>
           <a:prstGeom prst="rect">
             <a:avLst/>
@@ -46811,7 +46509,7 @@
         <p:spPr>
           <a:xfrm>
             <a:off x="457200" y="457200"/>
-            <a:ext cx="638640" cy="638640"/>
+            <a:ext cx="638280" cy="638280"/>
           </a:xfrm>
           <a:prstGeom prst="ellipse">
             <a:avLst/>
@@ -46858,7 +46556,7 @@
         <p:spPr>
           <a:xfrm>
             <a:off x="548640" y="548640"/>
-            <a:ext cx="446760" cy="446760"/>
+            <a:ext cx="446400" cy="446400"/>
           </a:xfrm>
           <a:prstGeom prst="rect">
             <a:avLst/>
@@ -46878,7 +46576,7 @@
         <p:spPr>
           <a:xfrm>
             <a:off x="1280160" y="457200"/>
-            <a:ext cx="10422720" cy="638640"/>
+            <a:ext cx="10422360" cy="638280"/>
           </a:xfrm>
           <a:prstGeom prst="rect">
             <a:avLst/>
@@ -46939,7 +46637,7 @@
         <p:spPr>
           <a:xfrm>
             <a:off x="548640" y="1828800"/>
-            <a:ext cx="4753440" cy="4021920"/>
+            <a:ext cx="4753080" cy="4021560"/>
           </a:xfrm>
           <a:prstGeom prst="rect">
             <a:avLst/>
@@ -47075,7 +46773,7 @@
         <p:spPr>
           <a:xfrm>
             <a:off x="5486400" y="1691640"/>
-            <a:ext cx="6216480" cy="4341960"/>
+            <a:ext cx="6216120" cy="4341600"/>
           </a:xfrm>
           <a:prstGeom prst="roundRect">
             <a:avLst>
@@ -47120,7 +46818,7 @@
         <p:spPr>
           <a:xfrm>
             <a:off x="5806440" y="1965960"/>
-            <a:ext cx="5576400" cy="3793320"/>
+            <a:ext cx="5576040" cy="3792960"/>
           </a:xfrm>
           <a:prstGeom prst="rect">
             <a:avLst/>
@@ -47361,7 +47059,7 @@
         <p:spPr>
           <a:xfrm>
             <a:off x="457200" y="6446520"/>
-            <a:ext cx="7313760" cy="272880"/>
+            <a:ext cx="7313400" cy="272520"/>
           </a:xfrm>
           <a:prstGeom prst="rect">
             <a:avLst/>
@@ -47422,7 +47120,7 @@
         <p:spPr>
           <a:xfrm>
             <a:off x="11521440" y="6446520"/>
-            <a:ext cx="455760" cy="272880"/>
+            <a:ext cx="455400" cy="272520"/>
           </a:xfrm>
           <a:prstGeom prst="rect">
             <a:avLst/>
